--- a/backend/static/templates/certificates/6. 성매매예방 수료증.pptx
+++ b/backend/static/templates/certificates/6. 성매매예방 수료증.pptx
@@ -1,26 +1,31 @@
 
 <file path=ppt/presentation.xml><?xml version="1.0" encoding="utf-8"?>
-<p:presentation xmlns:a="http://schemas.openxmlformats.org/drawingml/2006/main" xmlns:r="http://schemas.openxmlformats.org/officeDocument/2006/relationships" xmlns:mc="http://schemas.openxmlformats.org/markup-compatibility/2006" xmlns:mv="urn:schemas-microsoft-com:mac:vml" xmlns:p="http://schemas.openxmlformats.org/presentationml/2006/main" xmlns:c="http://schemas.openxmlformats.org/drawingml/2006/chart" xmlns:dgm="http://schemas.openxmlformats.org/drawingml/2006/diagram" xmlns:o="urn:schemas-microsoft-com:office:office" xmlns:v="urn:schemas-microsoft-com:vml" xmlns:pvml="urn:schemas-microsoft-com:office:powerpoint" xmlns:com="http://schemas.openxmlformats.org/drawingml/2006/compatibility" xmlns:p14="http://schemas.microsoft.com/office/powerpoint/2010/main" xmlns:p15="http://schemas.microsoft.com/office/powerpoint/2012/main" xmlns:ahyp="http://schemas.microsoft.com/office/drawing/2018/hyperlinkcolor" autoCompressPictures="0" embedTrueTypeFonts="1" strictFirstAndLastChars="0" saveSubsetFonts="1">
+<p:presentation xmlns:a="http://schemas.openxmlformats.org/drawingml/2006/main" xmlns:r="http://schemas.openxmlformats.org/officeDocument/2006/relationships" xmlns:p="http://schemas.openxmlformats.org/presentationml/2006/main" strictFirstAndLastChars="0" embedTrueTypeFonts="1" saveSubsetFonts="1" autoCompressPictures="0">
   <p:sldMasterIdLst>
-    <p:sldMasterId id="2147483648" r:id="rId4"/>
+    <p:sldMasterId id="2147483648" r:id="rId1"/>
   </p:sldMasterIdLst>
   <p:notesMasterIdLst>
-    <p:notesMasterId r:id="rId5"/>
+    <p:notesMasterId r:id="rId3"/>
   </p:notesMasterIdLst>
   <p:sldIdLst>
-    <p:sldId id="256" r:id="rId6"/>
+    <p:sldId id="256" r:id="rId2"/>
   </p:sldIdLst>
-  <p:sldSz cy="9906000" cx="6858000"/>
+  <p:sldSz cx="6858000" cy="9906000" type="A4"/>
   <p:notesSz cx="6858000" cy="9144000"/>
   <p:embeddedFontLst>
     <p:embeddedFont>
+      <p:font typeface="Pretendard" panose="02000503000000020004" pitchFamily="2" charset="-127"/>
+      <p:regular r:id="rId4"/>
+      <p:bold r:id="rId5"/>
+    </p:embeddedFont>
+    <p:embeddedFont>
       <p:font typeface="Play"/>
-      <p:regular r:id="rId7"/>
-      <p:bold r:id="rId8"/>
+      <p:regular r:id="rId6"/>
+      <p:bold r:id="rId7"/>
     </p:embeddedFont>
   </p:embeddedFontLst>
   <p:defaultTextStyle>
-    <a:defPPr lvl="0" marR="0" rtl="0" algn="l">
+    <a:defPPr marR="0" lvl="0" algn="l" rtl="0">
       <a:lnSpc>
         <a:spcPct val="100000"/>
       </a:lnSpc>
@@ -31,7 +36,7 @@
         <a:spcPts val="0"/>
       </a:spcAft>
     </a:defPPr>
-    <a:lvl1pPr lvl="0" marR="0" rtl="0" algn="l">
+    <a:lvl1pPr marR="0" lvl="0" algn="l" rtl="0">
       <a:lnSpc>
         <a:spcPct val="100000"/>
       </a:lnSpc>
@@ -45,7 +50,7 @@
         <a:srgbClr val="000000"/>
       </a:buClr>
       <a:buFont typeface="Arial"/>
-      <a:defRPr b="0" i="0" sz="1400" u="none" cap="none" strike="noStrike">
+      <a:defRPr sz="1400" b="0" i="0" u="none" strike="noStrike" cap="none">
         <a:solidFill>
           <a:srgbClr val="000000"/>
         </a:solidFill>
@@ -55,7 +60,7 @@
         <a:sym typeface="Arial"/>
       </a:defRPr>
     </a:lvl1pPr>
-    <a:lvl2pPr lvl="1" marR="0" rtl="0" algn="l">
+    <a:lvl2pPr marR="0" lvl="1" algn="l" rtl="0">
       <a:lnSpc>
         <a:spcPct val="100000"/>
       </a:lnSpc>
@@ -69,7 +74,7 @@
         <a:srgbClr val="000000"/>
       </a:buClr>
       <a:buFont typeface="Arial"/>
-      <a:defRPr b="0" i="0" sz="1400" u="none" cap="none" strike="noStrike">
+      <a:defRPr sz="1400" b="0" i="0" u="none" strike="noStrike" cap="none">
         <a:solidFill>
           <a:srgbClr val="000000"/>
         </a:solidFill>
@@ -79,7 +84,7 @@
         <a:sym typeface="Arial"/>
       </a:defRPr>
     </a:lvl2pPr>
-    <a:lvl3pPr lvl="2" marR="0" rtl="0" algn="l">
+    <a:lvl3pPr marR="0" lvl="2" algn="l" rtl="0">
       <a:lnSpc>
         <a:spcPct val="100000"/>
       </a:lnSpc>
@@ -93,7 +98,7 @@
         <a:srgbClr val="000000"/>
       </a:buClr>
       <a:buFont typeface="Arial"/>
-      <a:defRPr b="0" i="0" sz="1400" u="none" cap="none" strike="noStrike">
+      <a:defRPr sz="1400" b="0" i="0" u="none" strike="noStrike" cap="none">
         <a:solidFill>
           <a:srgbClr val="000000"/>
         </a:solidFill>
@@ -103,7 +108,7 @@
         <a:sym typeface="Arial"/>
       </a:defRPr>
     </a:lvl3pPr>
-    <a:lvl4pPr lvl="3" marR="0" rtl="0" algn="l">
+    <a:lvl4pPr marR="0" lvl="3" algn="l" rtl="0">
       <a:lnSpc>
         <a:spcPct val="100000"/>
       </a:lnSpc>
@@ -117,7 +122,7 @@
         <a:srgbClr val="000000"/>
       </a:buClr>
       <a:buFont typeface="Arial"/>
-      <a:defRPr b="0" i="0" sz="1400" u="none" cap="none" strike="noStrike">
+      <a:defRPr sz="1400" b="0" i="0" u="none" strike="noStrike" cap="none">
         <a:solidFill>
           <a:srgbClr val="000000"/>
         </a:solidFill>
@@ -127,7 +132,7 @@
         <a:sym typeface="Arial"/>
       </a:defRPr>
     </a:lvl4pPr>
-    <a:lvl5pPr lvl="4" marR="0" rtl="0" algn="l">
+    <a:lvl5pPr marR="0" lvl="4" algn="l" rtl="0">
       <a:lnSpc>
         <a:spcPct val="100000"/>
       </a:lnSpc>
@@ -141,7 +146,7 @@
         <a:srgbClr val="000000"/>
       </a:buClr>
       <a:buFont typeface="Arial"/>
-      <a:defRPr b="0" i="0" sz="1400" u="none" cap="none" strike="noStrike">
+      <a:defRPr sz="1400" b="0" i="0" u="none" strike="noStrike" cap="none">
         <a:solidFill>
           <a:srgbClr val="000000"/>
         </a:solidFill>
@@ -151,7 +156,7 @@
         <a:sym typeface="Arial"/>
       </a:defRPr>
     </a:lvl5pPr>
-    <a:lvl6pPr lvl="5" marR="0" rtl="0" algn="l">
+    <a:lvl6pPr marR="0" lvl="5" algn="l" rtl="0">
       <a:lnSpc>
         <a:spcPct val="100000"/>
       </a:lnSpc>
@@ -165,7 +170,7 @@
         <a:srgbClr val="000000"/>
       </a:buClr>
       <a:buFont typeface="Arial"/>
-      <a:defRPr b="0" i="0" sz="1400" u="none" cap="none" strike="noStrike">
+      <a:defRPr sz="1400" b="0" i="0" u="none" strike="noStrike" cap="none">
         <a:solidFill>
           <a:srgbClr val="000000"/>
         </a:solidFill>
@@ -175,7 +180,7 @@
         <a:sym typeface="Arial"/>
       </a:defRPr>
     </a:lvl6pPr>
-    <a:lvl7pPr lvl="6" marR="0" rtl="0" algn="l">
+    <a:lvl7pPr marR="0" lvl="6" algn="l" rtl="0">
       <a:lnSpc>
         <a:spcPct val="100000"/>
       </a:lnSpc>
@@ -189,7 +194,7 @@
         <a:srgbClr val="000000"/>
       </a:buClr>
       <a:buFont typeface="Arial"/>
-      <a:defRPr b="0" i="0" sz="1400" u="none" cap="none" strike="noStrike">
+      <a:defRPr sz="1400" b="0" i="0" u="none" strike="noStrike" cap="none">
         <a:solidFill>
           <a:srgbClr val="000000"/>
         </a:solidFill>
@@ -199,7 +204,7 @@
         <a:sym typeface="Arial"/>
       </a:defRPr>
     </a:lvl7pPr>
-    <a:lvl8pPr lvl="7" marR="0" rtl="0" algn="l">
+    <a:lvl8pPr marR="0" lvl="7" algn="l" rtl="0">
       <a:lnSpc>
         <a:spcPct val="100000"/>
       </a:lnSpc>
@@ -213,7 +218,7 @@
         <a:srgbClr val="000000"/>
       </a:buClr>
       <a:buFont typeface="Arial"/>
-      <a:defRPr b="0" i="0" sz="1400" u="none" cap="none" strike="noStrike">
+      <a:defRPr sz="1400" b="0" i="0" u="none" strike="noStrike" cap="none">
         <a:solidFill>
           <a:srgbClr val="000000"/>
         </a:solidFill>
@@ -223,7 +228,7 @@
         <a:sym typeface="Arial"/>
       </a:defRPr>
     </a:lvl8pPr>
-    <a:lvl9pPr lvl="8" marR="0" rtl="0" algn="l">
+    <a:lvl9pPr marR="0" lvl="8" algn="l" rtl="0">
       <a:lnSpc>
         <a:spcPct val="100000"/>
       </a:lnSpc>
@@ -237,7 +242,7 @@
         <a:srgbClr val="000000"/>
       </a:buClr>
       <a:buFont typeface="Arial"/>
-      <a:defRPr b="0" i="0" sz="1400" u="none" cap="none" strike="noStrike">
+      <a:defRPr sz="1400" b="0" i="0" u="none" strike="noStrike" cap="none">
         <a:solidFill>
           <a:srgbClr val="000000"/>
         </a:solidFill>
@@ -250,25 +255,26 @@
   </p:defaultTextStyle>
   <p:extLst>
     <p:ext uri="GoogleSlidesCustomDataVersion2">
-      <go:slidesCustomData xmlns:go="http://customooxmlschemas.google.com/" r:id="rId9" roundtripDataSignature="AMtx7mjHcK0S6GQmcZle7c4f5W8JB9gUAA=="/>
+      <go:slidesCustomData xmlns:go="http://customooxmlschemas.google.com/" xmlns:ahyp="http://schemas.microsoft.com/office/drawing/2018/hyperlinkcolor" xmlns:p15="http://schemas.microsoft.com/office/powerpoint/2012/main" xmlns:p14="http://schemas.microsoft.com/office/powerpoint/2010/main" xmlns:com="http://schemas.openxmlformats.org/drawingml/2006/compatibility" xmlns:pvml="urn:schemas-microsoft-com:office:powerpoint" xmlns:v="urn:schemas-microsoft-com:vml" xmlns:o="urn:schemas-microsoft-com:office:office" xmlns:dgm="http://schemas.openxmlformats.org/drawingml/2006/diagram" xmlns:c="http://schemas.openxmlformats.org/drawingml/2006/chart" xmlns:mv="urn:schemas-microsoft-com:mac:vml" xmlns:mc="http://schemas.openxmlformats.org/markup-compatibility/2006" xmlns="" r:id="rId9" roundtripDataSignature="AMtx7mjHcK0S6GQmcZle7c4f5W8JB9gUAA=="/>
     </p:ext>
   </p:extLst>
 </p:presentation>
 </file>
 
 <file path=ppt/notesMasters/notesMaster1.xml><?xml version="1.0" encoding="utf-8"?>
-<p:notesMaster xmlns:a="http://schemas.openxmlformats.org/drawingml/2006/main" xmlns:r="http://schemas.openxmlformats.org/officeDocument/2006/relationships" xmlns:mc="http://schemas.openxmlformats.org/markup-compatibility/2006" xmlns:mv="urn:schemas-microsoft-com:mac:vml" xmlns:p="http://schemas.openxmlformats.org/presentationml/2006/main" xmlns:c="http://schemas.openxmlformats.org/drawingml/2006/chart" xmlns:dgm="http://schemas.openxmlformats.org/drawingml/2006/diagram" xmlns:o="urn:schemas-microsoft-com:office:office" xmlns:v="urn:schemas-microsoft-com:vml" xmlns:pvml="urn:schemas-microsoft-com:office:powerpoint" xmlns:com="http://schemas.openxmlformats.org/drawingml/2006/compatibility" xmlns:p14="http://schemas.microsoft.com/office/powerpoint/2010/main" xmlns:p15="http://schemas.microsoft.com/office/powerpoint/2012/main" xmlns:ahyp="http://schemas.microsoft.com/office/drawing/2018/hyperlinkcolor">
+<p:notesMaster xmlns:a="http://schemas.openxmlformats.org/drawingml/2006/main" xmlns:r="http://schemas.openxmlformats.org/officeDocument/2006/relationships" xmlns:p="http://schemas.openxmlformats.org/presentationml/2006/main">
   <p:cSld>
     <p:bg>
       <p:bgPr>
         <a:solidFill>
           <a:schemeClr val="lt1"/>
         </a:solidFill>
+        <a:effectLst/>
       </p:bgPr>
     </p:bg>
     <p:spTree>
       <p:nvGrpSpPr>
-        <p:cNvPr id="2" name="Shape 2"/>
+        <p:cNvPr id="1" name="Shape 2"/>
         <p:cNvGrpSpPr/>
         <p:nvPr/>
       </p:nvGrpSpPr>
@@ -283,9 +289,11 @@
       <p:sp>
         <p:nvSpPr>
           <p:cNvPr id="3" name="Google Shape;3;n"/>
-          <p:cNvSpPr/>
+          <p:cNvSpPr>
+            <a:spLocks noGrp="1" noRot="1" noChangeAspect="1"/>
+          </p:cNvSpPr>
           <p:nvPr>
-            <p:ph idx="2" type="sldImg"/>
+            <p:ph type="sldImg" idx="2"/>
           </p:nvPr>
         </p:nvSpPr>
         <p:spPr>
@@ -294,9 +302,13 @@
             <a:ext cx="4572225" cy="3429000"/>
           </a:xfrm>
           <a:custGeom>
-            <a:rect b="b" l="l" r="r" t="t"/>
+            <a:avLst/>
+            <a:gdLst/>
+            <a:ahLst/>
+            <a:cxnLst/>
+            <a:rect l="l" t="t" r="r" b="b"/>
             <a:pathLst>
-              <a:path extrusionOk="0" h="120000" w="120000">
+              <a:path w="120000" h="120000" extrusionOk="0">
                 <a:moveTo>
                   <a:pt x="0" y="0"/>
                 </a:moveTo>
@@ -314,23 +326,25 @@
             </a:pathLst>
           </a:custGeom>
           <a:noFill/>
-          <a:ln cap="flat" cmpd="sng" w="9525">
+          <a:ln w="9525" cap="flat" cmpd="sng">
             <a:solidFill>
               <a:srgbClr val="000000"/>
             </a:solidFill>
             <a:prstDash val="solid"/>
             <a:round/>
-            <a:headEnd len="sm" w="sm" type="none"/>
-            <a:tailEnd len="sm" w="sm" type="none"/>
+            <a:headEnd type="none" w="sm" len="sm"/>
+            <a:tailEnd type="none" w="sm" len="sm"/>
           </a:ln>
         </p:spPr>
       </p:sp>
       <p:sp>
         <p:nvSpPr>
           <p:cNvPr id="4" name="Google Shape;4;n"/>
-          <p:cNvSpPr txBox="1"/>
+          <p:cNvSpPr txBox="1">
+            <a:spLocks noGrp="1"/>
+          </p:cNvSpPr>
           <p:nvPr>
-            <p:ph idx="1" type="body"/>
+            <p:ph type="body" idx="1"/>
           </p:nvPr>
         </p:nvSpPr>
         <p:spPr>
@@ -347,11 +361,11 @@
           </a:ln>
         </p:spPr>
         <p:txBody>
-          <a:bodyPr anchorCtr="0" anchor="t" bIns="91425" lIns="91425" spcFirstLastPara="1" rIns="91425" wrap="square" tIns="91425">
+          <a:bodyPr spcFirstLastPara="1" wrap="square" lIns="91425" tIns="91425" rIns="91425" bIns="91425" anchor="t" anchorCtr="0">
             <a:noAutofit/>
           </a:bodyPr>
           <a:lstStyle>
-            <a:lvl1pPr indent="-298450" lvl="0" marL="457200" marR="0" rtl="0" algn="l">
+            <a:lvl1pPr marL="457200" marR="0" lvl="0" indent="-298450" algn="l" rtl="0">
               <a:lnSpc>
                 <a:spcPct val="100000"/>
               </a:lnSpc>
@@ -367,7 +381,7 @@
               <a:buSzPts val="1100"/>
               <a:buFont typeface="Arial"/>
               <a:buChar char="●"/>
-              <a:defRPr b="0" i="0" sz="1100" u="none" cap="none" strike="noStrike">
+              <a:defRPr sz="1100" b="0" i="0" u="none" strike="noStrike" cap="none">
                 <a:solidFill>
                   <a:srgbClr val="000000"/>
                 </a:solidFill>
@@ -377,7 +391,7 @@
                 <a:sym typeface="Arial"/>
               </a:defRPr>
             </a:lvl1pPr>
-            <a:lvl2pPr indent="-298450" lvl="1" marL="914400" marR="0" rtl="0" algn="l">
+            <a:lvl2pPr marL="914400" marR="0" lvl="1" indent="-298450" algn="l" rtl="0">
               <a:lnSpc>
                 <a:spcPct val="100000"/>
               </a:lnSpc>
@@ -393,7 +407,7 @@
               <a:buSzPts val="1100"/>
               <a:buFont typeface="Arial"/>
               <a:buChar char="○"/>
-              <a:defRPr b="0" i="0" sz="1100" u="none" cap="none" strike="noStrike">
+              <a:defRPr sz="1100" b="0" i="0" u="none" strike="noStrike" cap="none">
                 <a:solidFill>
                   <a:srgbClr val="000000"/>
                 </a:solidFill>
@@ -403,7 +417,7 @@
                 <a:sym typeface="Arial"/>
               </a:defRPr>
             </a:lvl2pPr>
-            <a:lvl3pPr indent="-298450" lvl="2" marL="1371600" marR="0" rtl="0" algn="l">
+            <a:lvl3pPr marL="1371600" marR="0" lvl="2" indent="-298450" algn="l" rtl="0">
               <a:lnSpc>
                 <a:spcPct val="100000"/>
               </a:lnSpc>
@@ -419,7 +433,7 @@
               <a:buSzPts val="1100"/>
               <a:buFont typeface="Arial"/>
               <a:buChar char="■"/>
-              <a:defRPr b="0" i="0" sz="1100" u="none" cap="none" strike="noStrike">
+              <a:defRPr sz="1100" b="0" i="0" u="none" strike="noStrike" cap="none">
                 <a:solidFill>
                   <a:srgbClr val="000000"/>
                 </a:solidFill>
@@ -429,7 +443,7 @@
                 <a:sym typeface="Arial"/>
               </a:defRPr>
             </a:lvl3pPr>
-            <a:lvl4pPr indent="-298450" lvl="3" marL="1828800" marR="0" rtl="0" algn="l">
+            <a:lvl4pPr marL="1828800" marR="0" lvl="3" indent="-298450" algn="l" rtl="0">
               <a:lnSpc>
                 <a:spcPct val="100000"/>
               </a:lnSpc>
@@ -445,7 +459,7 @@
               <a:buSzPts val="1100"/>
               <a:buFont typeface="Arial"/>
               <a:buChar char="●"/>
-              <a:defRPr b="0" i="0" sz="1100" u="none" cap="none" strike="noStrike">
+              <a:defRPr sz="1100" b="0" i="0" u="none" strike="noStrike" cap="none">
                 <a:solidFill>
                   <a:srgbClr val="000000"/>
                 </a:solidFill>
@@ -455,7 +469,7 @@
                 <a:sym typeface="Arial"/>
               </a:defRPr>
             </a:lvl4pPr>
-            <a:lvl5pPr indent="-298450" lvl="4" marL="2286000" marR="0" rtl="0" algn="l">
+            <a:lvl5pPr marL="2286000" marR="0" lvl="4" indent="-298450" algn="l" rtl="0">
               <a:lnSpc>
                 <a:spcPct val="100000"/>
               </a:lnSpc>
@@ -471,7 +485,7 @@
               <a:buSzPts val="1100"/>
               <a:buFont typeface="Arial"/>
               <a:buChar char="○"/>
-              <a:defRPr b="0" i="0" sz="1100" u="none" cap="none" strike="noStrike">
+              <a:defRPr sz="1100" b="0" i="0" u="none" strike="noStrike" cap="none">
                 <a:solidFill>
                   <a:srgbClr val="000000"/>
                 </a:solidFill>
@@ -481,7 +495,7 @@
                 <a:sym typeface="Arial"/>
               </a:defRPr>
             </a:lvl5pPr>
-            <a:lvl6pPr indent="-298450" lvl="5" marL="2743200" marR="0" rtl="0" algn="l">
+            <a:lvl6pPr marL="2743200" marR="0" lvl="5" indent="-298450" algn="l" rtl="0">
               <a:lnSpc>
                 <a:spcPct val="100000"/>
               </a:lnSpc>
@@ -497,7 +511,7 @@
               <a:buSzPts val="1100"/>
               <a:buFont typeface="Arial"/>
               <a:buChar char="■"/>
-              <a:defRPr b="0" i="0" sz="1100" u="none" cap="none" strike="noStrike">
+              <a:defRPr sz="1100" b="0" i="0" u="none" strike="noStrike" cap="none">
                 <a:solidFill>
                   <a:srgbClr val="000000"/>
                 </a:solidFill>
@@ -507,7 +521,7 @@
                 <a:sym typeface="Arial"/>
               </a:defRPr>
             </a:lvl6pPr>
-            <a:lvl7pPr indent="-298450" lvl="6" marL="3200400" marR="0" rtl="0" algn="l">
+            <a:lvl7pPr marL="3200400" marR="0" lvl="6" indent="-298450" algn="l" rtl="0">
               <a:lnSpc>
                 <a:spcPct val="100000"/>
               </a:lnSpc>
@@ -523,7 +537,7 @@
               <a:buSzPts val="1100"/>
               <a:buFont typeface="Arial"/>
               <a:buChar char="●"/>
-              <a:defRPr b="0" i="0" sz="1100" u="none" cap="none" strike="noStrike">
+              <a:defRPr sz="1100" b="0" i="0" u="none" strike="noStrike" cap="none">
                 <a:solidFill>
                   <a:srgbClr val="000000"/>
                 </a:solidFill>
@@ -533,7 +547,7 @@
                 <a:sym typeface="Arial"/>
               </a:defRPr>
             </a:lvl7pPr>
-            <a:lvl8pPr indent="-298450" lvl="7" marL="3657600" marR="0" rtl="0" algn="l">
+            <a:lvl8pPr marL="3657600" marR="0" lvl="7" indent="-298450" algn="l" rtl="0">
               <a:lnSpc>
                 <a:spcPct val="100000"/>
               </a:lnSpc>
@@ -549,7 +563,7 @@
               <a:buSzPts val="1100"/>
               <a:buFont typeface="Arial"/>
               <a:buChar char="○"/>
-              <a:defRPr b="0" i="0" sz="1100" u="none" cap="none" strike="noStrike">
+              <a:defRPr sz="1100" b="0" i="0" u="none" strike="noStrike" cap="none">
                 <a:solidFill>
                   <a:srgbClr val="000000"/>
                 </a:solidFill>
@@ -559,7 +573,7 @@
                 <a:sym typeface="Arial"/>
               </a:defRPr>
             </a:lvl8pPr>
-            <a:lvl9pPr indent="-298450" lvl="8" marL="4114800" marR="0" rtl="0" algn="l">
+            <a:lvl9pPr marL="4114800" marR="0" lvl="8" indent="-298450" algn="l" rtl="0">
               <a:lnSpc>
                 <a:spcPct val="100000"/>
               </a:lnSpc>
@@ -575,7 +589,7 @@
               <a:buSzPts val="1100"/>
               <a:buFont typeface="Arial"/>
               <a:buChar char="■"/>
-              <a:defRPr b="0" i="0" sz="1100" u="none" cap="none" strike="noStrike">
+              <a:defRPr sz="1100" b="0" i="0" u="none" strike="noStrike" cap="none">
                 <a:solidFill>
                   <a:srgbClr val="000000"/>
                 </a:solidFill>
@@ -586,14 +600,16 @@
               </a:defRPr>
             </a:lvl9pPr>
           </a:lstStyle>
-          <a:p/>
+          <a:p>
+            <a:endParaRPr/>
+          </a:p>
         </p:txBody>
       </p:sp>
     </p:spTree>
   </p:cSld>
-  <p:clrMap accent1="accent1" accent2="accent2" accent3="accent3" accent4="accent4" accent5="accent5" accent6="accent6" bg1="lt1" bg2="dk2" tx1="dk1" tx2="lt2" folHlink="folHlink" hlink="hlink"/>
+  <p:clrMap bg1="lt1" tx1="dk1" bg2="dk2" tx2="lt2" accent1="accent1" accent2="accent2" accent3="accent3" accent4="accent4" accent5="accent5" accent6="accent6" hlink="hlink" folHlink="folHlink"/>
   <p:notesStyle>
-    <a:defPPr lvl="0" marR="0" rtl="0" algn="l">
+    <a:defPPr marR="0" lvl="0" algn="l" rtl="0">
       <a:lnSpc>
         <a:spcPct val="100000"/>
       </a:lnSpc>
@@ -604,7 +620,7 @@
         <a:spcPts val="0"/>
       </a:spcAft>
     </a:defPPr>
-    <a:lvl1pPr lvl="0" marR="0" rtl="0" algn="l">
+    <a:lvl1pPr marR="0" lvl="0" algn="l" rtl="0">
       <a:lnSpc>
         <a:spcPct val="100000"/>
       </a:lnSpc>
@@ -618,7 +634,7 @@
         <a:srgbClr val="000000"/>
       </a:buClr>
       <a:buFont typeface="Arial"/>
-      <a:defRPr b="0" i="0" sz="1400" u="none" cap="none" strike="noStrike">
+      <a:defRPr sz="1400" b="0" i="0" u="none" strike="noStrike" cap="none">
         <a:solidFill>
           <a:srgbClr val="000000"/>
         </a:solidFill>
@@ -628,7 +644,7 @@
         <a:sym typeface="Arial"/>
       </a:defRPr>
     </a:lvl1pPr>
-    <a:lvl2pPr lvl="1" marR="0" rtl="0" algn="l">
+    <a:lvl2pPr marR="0" lvl="1" algn="l" rtl="0">
       <a:lnSpc>
         <a:spcPct val="100000"/>
       </a:lnSpc>
@@ -642,7 +658,7 @@
         <a:srgbClr val="000000"/>
       </a:buClr>
       <a:buFont typeface="Arial"/>
-      <a:defRPr b="0" i="0" sz="1400" u="none" cap="none" strike="noStrike">
+      <a:defRPr sz="1400" b="0" i="0" u="none" strike="noStrike" cap="none">
         <a:solidFill>
           <a:srgbClr val="000000"/>
         </a:solidFill>
@@ -652,7 +668,7 @@
         <a:sym typeface="Arial"/>
       </a:defRPr>
     </a:lvl2pPr>
-    <a:lvl3pPr lvl="2" marR="0" rtl="0" algn="l">
+    <a:lvl3pPr marR="0" lvl="2" algn="l" rtl="0">
       <a:lnSpc>
         <a:spcPct val="100000"/>
       </a:lnSpc>
@@ -666,7 +682,7 @@
         <a:srgbClr val="000000"/>
       </a:buClr>
       <a:buFont typeface="Arial"/>
-      <a:defRPr b="0" i="0" sz="1400" u="none" cap="none" strike="noStrike">
+      <a:defRPr sz="1400" b="0" i="0" u="none" strike="noStrike" cap="none">
         <a:solidFill>
           <a:srgbClr val="000000"/>
         </a:solidFill>
@@ -676,7 +692,7 @@
         <a:sym typeface="Arial"/>
       </a:defRPr>
     </a:lvl3pPr>
-    <a:lvl4pPr lvl="3" marR="0" rtl="0" algn="l">
+    <a:lvl4pPr marR="0" lvl="3" algn="l" rtl="0">
       <a:lnSpc>
         <a:spcPct val="100000"/>
       </a:lnSpc>
@@ -690,7 +706,7 @@
         <a:srgbClr val="000000"/>
       </a:buClr>
       <a:buFont typeface="Arial"/>
-      <a:defRPr b="0" i="0" sz="1400" u="none" cap="none" strike="noStrike">
+      <a:defRPr sz="1400" b="0" i="0" u="none" strike="noStrike" cap="none">
         <a:solidFill>
           <a:srgbClr val="000000"/>
         </a:solidFill>
@@ -700,7 +716,7 @@
         <a:sym typeface="Arial"/>
       </a:defRPr>
     </a:lvl4pPr>
-    <a:lvl5pPr lvl="4" marR="0" rtl="0" algn="l">
+    <a:lvl5pPr marR="0" lvl="4" algn="l" rtl="0">
       <a:lnSpc>
         <a:spcPct val="100000"/>
       </a:lnSpc>
@@ -714,7 +730,7 @@
         <a:srgbClr val="000000"/>
       </a:buClr>
       <a:buFont typeface="Arial"/>
-      <a:defRPr b="0" i="0" sz="1400" u="none" cap="none" strike="noStrike">
+      <a:defRPr sz="1400" b="0" i="0" u="none" strike="noStrike" cap="none">
         <a:solidFill>
           <a:srgbClr val="000000"/>
         </a:solidFill>
@@ -724,7 +740,7 @@
         <a:sym typeface="Arial"/>
       </a:defRPr>
     </a:lvl5pPr>
-    <a:lvl6pPr lvl="5" marR="0" rtl="0" algn="l">
+    <a:lvl6pPr marR="0" lvl="5" algn="l" rtl="0">
       <a:lnSpc>
         <a:spcPct val="100000"/>
       </a:lnSpc>
@@ -738,7 +754,7 @@
         <a:srgbClr val="000000"/>
       </a:buClr>
       <a:buFont typeface="Arial"/>
-      <a:defRPr b="0" i="0" sz="1400" u="none" cap="none" strike="noStrike">
+      <a:defRPr sz="1400" b="0" i="0" u="none" strike="noStrike" cap="none">
         <a:solidFill>
           <a:srgbClr val="000000"/>
         </a:solidFill>
@@ -748,7 +764,7 @@
         <a:sym typeface="Arial"/>
       </a:defRPr>
     </a:lvl6pPr>
-    <a:lvl7pPr lvl="6" marR="0" rtl="0" algn="l">
+    <a:lvl7pPr marR="0" lvl="6" algn="l" rtl="0">
       <a:lnSpc>
         <a:spcPct val="100000"/>
       </a:lnSpc>
@@ -762,7 +778,7 @@
         <a:srgbClr val="000000"/>
       </a:buClr>
       <a:buFont typeface="Arial"/>
-      <a:defRPr b="0" i="0" sz="1400" u="none" cap="none" strike="noStrike">
+      <a:defRPr sz="1400" b="0" i="0" u="none" strike="noStrike" cap="none">
         <a:solidFill>
           <a:srgbClr val="000000"/>
         </a:solidFill>
@@ -772,7 +788,7 @@
         <a:sym typeface="Arial"/>
       </a:defRPr>
     </a:lvl7pPr>
-    <a:lvl8pPr lvl="7" marR="0" rtl="0" algn="l">
+    <a:lvl8pPr marR="0" lvl="7" algn="l" rtl="0">
       <a:lnSpc>
         <a:spcPct val="100000"/>
       </a:lnSpc>
@@ -786,7 +802,7 @@
         <a:srgbClr val="000000"/>
       </a:buClr>
       <a:buFont typeface="Arial"/>
-      <a:defRPr b="0" i="0" sz="1400" u="none" cap="none" strike="noStrike">
+      <a:defRPr sz="1400" b="0" i="0" u="none" strike="noStrike" cap="none">
         <a:solidFill>
           <a:srgbClr val="000000"/>
         </a:solidFill>
@@ -796,7 +812,7 @@
         <a:sym typeface="Arial"/>
       </a:defRPr>
     </a:lvl8pPr>
-    <a:lvl9pPr lvl="8" marR="0" rtl="0" algn="l">
+    <a:lvl9pPr marR="0" lvl="8" algn="l" rtl="0">
       <a:lnSpc>
         <a:spcPct val="100000"/>
       </a:lnSpc>
@@ -810,7 +826,7 @@
         <a:srgbClr val="000000"/>
       </a:buClr>
       <a:buFont typeface="Arial"/>
-      <a:defRPr b="0" i="0" sz="1400" u="none" cap="none" strike="noStrike">
+      <a:defRPr sz="1400" b="0" i="0" u="none" strike="noStrike" cap="none">
         <a:solidFill>
           <a:srgbClr val="000000"/>
         </a:solidFill>
@@ -825,11 +841,11 @@
 </file>
 
 <file path=ppt/notesSlides/notesSlide1.xml><?xml version="1.0" encoding="utf-8"?>
-<p:notes xmlns:a="http://schemas.openxmlformats.org/drawingml/2006/main" xmlns:r="http://schemas.openxmlformats.org/officeDocument/2006/relationships" xmlns:mc="http://schemas.openxmlformats.org/markup-compatibility/2006" xmlns:mv="urn:schemas-microsoft-com:mac:vml" xmlns:p="http://schemas.openxmlformats.org/presentationml/2006/main" xmlns:c="http://schemas.openxmlformats.org/drawingml/2006/chart" xmlns:dgm="http://schemas.openxmlformats.org/drawingml/2006/diagram" xmlns:o="urn:schemas-microsoft-com:office:office" xmlns:v="urn:schemas-microsoft-com:vml" xmlns:pvml="urn:schemas-microsoft-com:office:powerpoint" xmlns:com="http://schemas.openxmlformats.org/drawingml/2006/compatibility" xmlns:p14="http://schemas.microsoft.com/office/powerpoint/2010/main" xmlns:p15="http://schemas.microsoft.com/office/powerpoint/2012/main" xmlns:ahyp="http://schemas.microsoft.com/office/drawing/2018/hyperlinkcolor" showMasterPhAnim="0" showMasterSp="0">
+<p:notes xmlns:a="http://schemas.openxmlformats.org/drawingml/2006/main" xmlns:r="http://schemas.openxmlformats.org/officeDocument/2006/relationships" xmlns:p="http://schemas.openxmlformats.org/presentationml/2006/main" showMasterSp="0" showMasterPhAnim="0">
   <p:cSld>
     <p:spTree>
       <p:nvGrpSpPr>
-        <p:cNvPr id="80" name="Shape 80"/>
+        <p:cNvPr id="1" name="Shape 80"/>
         <p:cNvGrpSpPr/>
         <p:nvPr/>
       </p:nvGrpSpPr>
@@ -844,9 +860,11 @@
       <p:sp>
         <p:nvSpPr>
           <p:cNvPr id="81" name="Google Shape;81;p1:notes"/>
-          <p:cNvSpPr txBox="1"/>
+          <p:cNvSpPr txBox="1">
+            <a:spLocks noGrp="1"/>
+          </p:cNvSpPr>
           <p:nvPr>
-            <p:ph idx="1" type="body"/>
+            <p:ph type="body" idx="1"/>
           </p:nvPr>
         </p:nvSpPr>
         <p:spPr>
@@ -863,12 +881,12 @@
           </a:ln>
         </p:spPr>
         <p:txBody>
-          <a:bodyPr anchorCtr="0" anchor="t" bIns="91425" lIns="91425" spcFirstLastPara="1" rIns="91425" wrap="square" tIns="91425">
+          <a:bodyPr spcFirstLastPara="1" wrap="square" lIns="91425" tIns="91425" rIns="91425" bIns="91425" anchor="t" anchorCtr="0">
             <a:noAutofit/>
           </a:bodyPr>
           <a:lstStyle/>
           <a:p>
-            <a:pPr indent="0" lvl="0" marL="0" rtl="0" algn="l">
+            <a:pPr marL="0" lvl="0" indent="0" algn="l" rtl="0">
               <a:lnSpc>
                 <a:spcPct val="100000"/>
               </a:lnSpc>
@@ -881,9 +899,6 @@
               <a:buSzPts val="1100"/>
               <a:buNone/>
             </a:pPr>
-            <a:r>
-              <a:t/>
-            </a:r>
             <a:endParaRPr/>
           </a:p>
         </p:txBody>
@@ -891,9 +906,11 @@
       <p:sp>
         <p:nvSpPr>
           <p:cNvPr id="82" name="Google Shape;82;p1:notes"/>
-          <p:cNvSpPr/>
+          <p:cNvSpPr>
+            <a:spLocks noGrp="1" noRot="1" noChangeAspect="1"/>
+          </p:cNvSpPr>
           <p:nvPr>
-            <p:ph idx="2" type="sldImg"/>
+            <p:ph type="sldImg" idx="2"/>
           </p:nvPr>
         </p:nvSpPr>
         <p:spPr>
@@ -902,9 +919,13 @@
             <a:ext cx="2374900" cy="3429000"/>
           </a:xfrm>
           <a:custGeom>
-            <a:rect b="b" l="l" r="r" t="t"/>
+            <a:avLst/>
+            <a:gdLst/>
+            <a:ahLst/>
+            <a:cxnLst/>
+            <a:rect l="l" t="t" r="r" b="b"/>
             <a:pathLst>
-              <a:path extrusionOk="0" h="120000" w="120000">
+              <a:path w="120000" h="120000" extrusionOk="0">
                 <a:moveTo>
                   <a:pt x="0" y="0"/>
                 </a:moveTo>
@@ -922,14 +943,14 @@
             </a:pathLst>
           </a:custGeom>
           <a:noFill/>
-          <a:ln cap="flat" cmpd="sng" w="9525">
+          <a:ln w="9525" cap="flat" cmpd="sng">
             <a:solidFill>
               <a:srgbClr val="000000"/>
             </a:solidFill>
             <a:prstDash val="solid"/>
             <a:round/>
-            <a:headEnd len="sm" w="sm" type="none"/>
-            <a:tailEnd len="sm" w="sm" type="none"/>
+            <a:headEnd type="none" w="sm" len="sm"/>
+            <a:tailEnd type="none" w="sm" len="sm"/>
           </a:ln>
         </p:spPr>
       </p:sp>
@@ -942,11 +963,11 @@
 </file>
 
 <file path=ppt/slideLayouts/slideLayout1.xml><?xml version="1.0" encoding="utf-8"?>
-<p:sldLayout xmlns:a="http://schemas.openxmlformats.org/drawingml/2006/main" xmlns:r="http://schemas.openxmlformats.org/officeDocument/2006/relationships" xmlns:mc="http://schemas.openxmlformats.org/markup-compatibility/2006" xmlns:mv="urn:schemas-microsoft-com:mac:vml" xmlns:p="http://schemas.openxmlformats.org/presentationml/2006/main" xmlns:c="http://schemas.openxmlformats.org/drawingml/2006/chart" xmlns:dgm="http://schemas.openxmlformats.org/drawingml/2006/diagram" xmlns:o="urn:schemas-microsoft-com:office:office" xmlns:v="urn:schemas-microsoft-com:vml" xmlns:pvml="urn:schemas-microsoft-com:office:powerpoint" xmlns:com="http://schemas.openxmlformats.org/drawingml/2006/compatibility" xmlns:p14="http://schemas.microsoft.com/office/powerpoint/2010/main" xmlns:p15="http://schemas.microsoft.com/office/powerpoint/2012/main" xmlns:ahyp="http://schemas.microsoft.com/office/drawing/2018/hyperlinkcolor" matchingName="제목 슬라이드" type="title">
+<p:sldLayout xmlns:a="http://schemas.openxmlformats.org/drawingml/2006/main" xmlns:r="http://schemas.openxmlformats.org/officeDocument/2006/relationships" xmlns:p="http://schemas.openxmlformats.org/presentationml/2006/main" matchingName="제목 슬라이드" type="title">
   <p:cSld name="TITLE">
     <p:spTree>
       <p:nvGrpSpPr>
-        <p:cNvPr id="11" name="Shape 11"/>
+        <p:cNvPr id="1" name="Shape 11"/>
         <p:cNvGrpSpPr/>
         <p:nvPr/>
       </p:nvGrpSpPr>
@@ -961,7 +982,9 @@
       <p:sp>
         <p:nvSpPr>
           <p:cNvPr id="12" name="Google Shape;12;p3"/>
-          <p:cNvSpPr txBox="1"/>
+          <p:cNvSpPr txBox="1">
+            <a:spLocks noGrp="1"/>
+          </p:cNvSpPr>
           <p:nvPr>
             <p:ph type="ctrTitle"/>
           </p:nvPr>
@@ -980,7 +1003,7 @@
           </a:ln>
         </p:spPr>
         <p:txBody>
-          <a:bodyPr anchorCtr="0" anchor="b" bIns="45700" lIns="91425" spcFirstLastPara="1" rIns="91425" wrap="square" tIns="45700">
+          <a:bodyPr spcFirstLastPara="1" wrap="square" lIns="91425" tIns="45700" rIns="91425" bIns="45700" anchor="b" anchorCtr="0">
             <a:normAutofit/>
           </a:bodyPr>
           <a:lstStyle>
@@ -1115,15 +1138,19 @@
               <a:defRPr/>
             </a:lvl9pPr>
           </a:lstStyle>
-          <a:p/>
+          <a:p>
+            <a:endParaRPr/>
+          </a:p>
         </p:txBody>
       </p:sp>
       <p:sp>
         <p:nvSpPr>
           <p:cNvPr id="13" name="Google Shape;13;p3"/>
-          <p:cNvSpPr txBox="1"/>
+          <p:cNvSpPr txBox="1">
+            <a:spLocks noGrp="1"/>
+          </p:cNvSpPr>
           <p:nvPr>
-            <p:ph idx="1" type="subTitle"/>
+            <p:ph type="subTitle" idx="1"/>
           </p:nvPr>
         </p:nvSpPr>
         <p:spPr>
@@ -1140,7 +1167,7 @@
           </a:ln>
         </p:spPr>
         <p:txBody>
-          <a:bodyPr anchorCtr="0" anchor="t" bIns="45700" lIns="91425" spcFirstLastPara="1" rIns="91425" wrap="square" tIns="45700">
+          <a:bodyPr spcFirstLastPara="1" wrap="square" lIns="91425" tIns="45700" rIns="91425" bIns="45700" anchor="t" anchorCtr="0">
             <a:normAutofit/>
           </a:bodyPr>
           <a:lstStyle>
@@ -1298,15 +1325,19 @@
               <a:defRPr sz="1200"/>
             </a:lvl9pPr>
           </a:lstStyle>
-          <a:p/>
+          <a:p>
+            <a:endParaRPr/>
+          </a:p>
         </p:txBody>
       </p:sp>
       <p:sp>
         <p:nvSpPr>
           <p:cNvPr id="14" name="Google Shape;14;p3"/>
-          <p:cNvSpPr txBox="1"/>
+          <p:cNvSpPr txBox="1">
+            <a:spLocks noGrp="1"/>
+          </p:cNvSpPr>
           <p:nvPr>
-            <p:ph idx="10" type="dt"/>
+            <p:ph type="dt" idx="10"/>
           </p:nvPr>
         </p:nvSpPr>
         <p:spPr>
@@ -1323,7 +1354,7 @@
           </a:ln>
         </p:spPr>
         <p:txBody>
-          <a:bodyPr anchorCtr="0" anchor="ctr" bIns="45700" lIns="91425" spcFirstLastPara="1" rIns="91425" wrap="square" tIns="45700">
+          <a:bodyPr spcFirstLastPara="1" wrap="square" lIns="91425" tIns="45700" rIns="91425" bIns="45700" anchor="ctr" anchorCtr="0">
             <a:noAutofit/>
           </a:bodyPr>
           <a:lstStyle>
@@ -1454,15 +1485,19 @@
               <a:defRPr/>
             </a:lvl9pPr>
           </a:lstStyle>
-          <a:p/>
+          <a:p>
+            <a:endParaRPr/>
+          </a:p>
         </p:txBody>
       </p:sp>
       <p:sp>
         <p:nvSpPr>
           <p:cNvPr id="15" name="Google Shape;15;p3"/>
-          <p:cNvSpPr txBox="1"/>
+          <p:cNvSpPr txBox="1">
+            <a:spLocks noGrp="1"/>
+          </p:cNvSpPr>
           <p:nvPr>
-            <p:ph idx="11" type="ftr"/>
+            <p:ph type="ftr" idx="11"/>
           </p:nvPr>
         </p:nvSpPr>
         <p:spPr>
@@ -1479,7 +1514,7 @@
           </a:ln>
         </p:spPr>
         <p:txBody>
-          <a:bodyPr anchorCtr="0" anchor="ctr" bIns="45700" lIns="91425" spcFirstLastPara="1" rIns="91425" wrap="square" tIns="45700">
+          <a:bodyPr spcFirstLastPara="1" wrap="square" lIns="91425" tIns="45700" rIns="91425" bIns="45700" anchor="ctr" anchorCtr="0">
             <a:noAutofit/>
           </a:bodyPr>
           <a:lstStyle>
@@ -1610,15 +1645,19 @@
               <a:defRPr/>
             </a:lvl9pPr>
           </a:lstStyle>
-          <a:p/>
+          <a:p>
+            <a:endParaRPr/>
+          </a:p>
         </p:txBody>
       </p:sp>
       <p:sp>
         <p:nvSpPr>
           <p:cNvPr id="16" name="Google Shape;16;p3"/>
-          <p:cNvSpPr txBox="1"/>
+          <p:cNvSpPr txBox="1">
+            <a:spLocks noGrp="1"/>
+          </p:cNvSpPr>
           <p:nvPr>
-            <p:ph idx="12" type="sldNum"/>
+            <p:ph type="sldNum" idx="12"/>
           </p:nvPr>
         </p:nvSpPr>
         <p:spPr>
@@ -1635,11 +1674,11 @@
           </a:ln>
         </p:spPr>
         <p:txBody>
-          <a:bodyPr anchorCtr="0" anchor="ctr" bIns="45700" lIns="91425" spcFirstLastPara="1" rIns="91425" wrap="square" tIns="45700">
+          <a:bodyPr spcFirstLastPara="1" wrap="square" lIns="91425" tIns="45700" rIns="91425" bIns="45700" anchor="ctr" anchorCtr="0">
             <a:noAutofit/>
           </a:bodyPr>
           <a:lstStyle>
-            <a:lvl1pPr indent="0" lvl="0" marL="0" marR="0" algn="r">
+            <a:lvl1pPr marL="0" marR="0" lvl="0" indent="0" algn="r">
               <a:lnSpc>
                 <a:spcPct val="100000"/>
               </a:lnSpc>
@@ -1655,7 +1694,7 @@
               <a:buSzPts val="900"/>
               <a:buFont typeface="Arial"/>
               <a:buNone/>
-              <a:defRPr b="0" i="0" sz="900" u="none" cap="none" strike="noStrike">
+              <a:defRPr sz="900" b="0" i="0" u="none" strike="noStrike" cap="none">
                 <a:solidFill>
                   <a:srgbClr val="757575"/>
                 </a:solidFill>
@@ -1665,7 +1704,7 @@
                 <a:sym typeface="Arial"/>
               </a:defRPr>
             </a:lvl1pPr>
-            <a:lvl2pPr indent="0" lvl="1" marL="0" marR="0" algn="r">
+            <a:lvl2pPr marL="0" marR="0" lvl="1" indent="0" algn="r">
               <a:lnSpc>
                 <a:spcPct val="100000"/>
               </a:lnSpc>
@@ -1681,7 +1720,7 @@
               <a:buSzPts val="900"/>
               <a:buFont typeface="Arial"/>
               <a:buNone/>
-              <a:defRPr b="0" i="0" sz="900" u="none" cap="none" strike="noStrike">
+              <a:defRPr sz="900" b="0" i="0" u="none" strike="noStrike" cap="none">
                 <a:solidFill>
                   <a:srgbClr val="757575"/>
                 </a:solidFill>
@@ -1691,7 +1730,7 @@
                 <a:sym typeface="Arial"/>
               </a:defRPr>
             </a:lvl2pPr>
-            <a:lvl3pPr indent="0" lvl="2" marL="0" marR="0" algn="r">
+            <a:lvl3pPr marL="0" marR="0" lvl="2" indent="0" algn="r">
               <a:lnSpc>
                 <a:spcPct val="100000"/>
               </a:lnSpc>
@@ -1707,7 +1746,7 @@
               <a:buSzPts val="900"/>
               <a:buFont typeface="Arial"/>
               <a:buNone/>
-              <a:defRPr b="0" i="0" sz="900" u="none" cap="none" strike="noStrike">
+              <a:defRPr sz="900" b="0" i="0" u="none" strike="noStrike" cap="none">
                 <a:solidFill>
                   <a:srgbClr val="757575"/>
                 </a:solidFill>
@@ -1717,7 +1756,7 @@
                 <a:sym typeface="Arial"/>
               </a:defRPr>
             </a:lvl3pPr>
-            <a:lvl4pPr indent="0" lvl="3" marL="0" marR="0" algn="r">
+            <a:lvl4pPr marL="0" marR="0" lvl="3" indent="0" algn="r">
               <a:lnSpc>
                 <a:spcPct val="100000"/>
               </a:lnSpc>
@@ -1733,7 +1772,7 @@
               <a:buSzPts val="900"/>
               <a:buFont typeface="Arial"/>
               <a:buNone/>
-              <a:defRPr b="0" i="0" sz="900" u="none" cap="none" strike="noStrike">
+              <a:defRPr sz="900" b="0" i="0" u="none" strike="noStrike" cap="none">
                 <a:solidFill>
                   <a:srgbClr val="757575"/>
                 </a:solidFill>
@@ -1743,7 +1782,7 @@
                 <a:sym typeface="Arial"/>
               </a:defRPr>
             </a:lvl4pPr>
-            <a:lvl5pPr indent="0" lvl="4" marL="0" marR="0" algn="r">
+            <a:lvl5pPr marL="0" marR="0" lvl="4" indent="0" algn="r">
               <a:lnSpc>
                 <a:spcPct val="100000"/>
               </a:lnSpc>
@@ -1759,7 +1798,7 @@
               <a:buSzPts val="900"/>
               <a:buFont typeface="Arial"/>
               <a:buNone/>
-              <a:defRPr b="0" i="0" sz="900" u="none" cap="none" strike="noStrike">
+              <a:defRPr sz="900" b="0" i="0" u="none" strike="noStrike" cap="none">
                 <a:solidFill>
                   <a:srgbClr val="757575"/>
                 </a:solidFill>
@@ -1769,7 +1808,7 @@
                 <a:sym typeface="Arial"/>
               </a:defRPr>
             </a:lvl5pPr>
-            <a:lvl6pPr indent="0" lvl="5" marL="0" marR="0" algn="r">
+            <a:lvl6pPr marL="0" marR="0" lvl="5" indent="0" algn="r">
               <a:lnSpc>
                 <a:spcPct val="100000"/>
               </a:lnSpc>
@@ -1785,7 +1824,7 @@
               <a:buSzPts val="900"/>
               <a:buFont typeface="Arial"/>
               <a:buNone/>
-              <a:defRPr b="0" i="0" sz="900" u="none" cap="none" strike="noStrike">
+              <a:defRPr sz="900" b="0" i="0" u="none" strike="noStrike" cap="none">
                 <a:solidFill>
                   <a:srgbClr val="757575"/>
                 </a:solidFill>
@@ -1795,7 +1834,7 @@
                 <a:sym typeface="Arial"/>
               </a:defRPr>
             </a:lvl6pPr>
-            <a:lvl7pPr indent="0" lvl="6" marL="0" marR="0" algn="r">
+            <a:lvl7pPr marL="0" marR="0" lvl="6" indent="0" algn="r">
               <a:lnSpc>
                 <a:spcPct val="100000"/>
               </a:lnSpc>
@@ -1811,7 +1850,7 @@
               <a:buSzPts val="900"/>
               <a:buFont typeface="Arial"/>
               <a:buNone/>
-              <a:defRPr b="0" i="0" sz="900" u="none" cap="none" strike="noStrike">
+              <a:defRPr sz="900" b="0" i="0" u="none" strike="noStrike" cap="none">
                 <a:solidFill>
                   <a:srgbClr val="757575"/>
                 </a:solidFill>
@@ -1821,7 +1860,7 @@
                 <a:sym typeface="Arial"/>
               </a:defRPr>
             </a:lvl7pPr>
-            <a:lvl8pPr indent="0" lvl="7" marL="0" marR="0" algn="r">
+            <a:lvl8pPr marL="0" marR="0" lvl="7" indent="0" algn="r">
               <a:lnSpc>
                 <a:spcPct val="100000"/>
               </a:lnSpc>
@@ -1837,7 +1876,7 @@
               <a:buSzPts val="900"/>
               <a:buFont typeface="Arial"/>
               <a:buNone/>
-              <a:defRPr b="0" i="0" sz="900" u="none" cap="none" strike="noStrike">
+              <a:defRPr sz="900" b="0" i="0" u="none" strike="noStrike" cap="none">
                 <a:solidFill>
                   <a:srgbClr val="757575"/>
                 </a:solidFill>
@@ -1847,7 +1886,7 @@
                 <a:sym typeface="Arial"/>
               </a:defRPr>
             </a:lvl8pPr>
-            <a:lvl9pPr indent="0" lvl="8" marL="0" marR="0" algn="r">
+            <a:lvl9pPr marL="0" marR="0" lvl="8" indent="0" algn="r">
               <a:lnSpc>
                 <a:spcPct val="100000"/>
               </a:lnSpc>
@@ -1863,7 +1902,7 @@
               <a:buSzPts val="900"/>
               <a:buFont typeface="Arial"/>
               <a:buNone/>
-              <a:defRPr b="0" i="0" sz="900" u="none" cap="none" strike="noStrike">
+              <a:defRPr sz="900" b="0" i="0" u="none" strike="noStrike" cap="none">
                 <a:solidFill>
                   <a:srgbClr val="757575"/>
                 </a:solidFill>
@@ -1875,7 +1914,7 @@
             </a:lvl9pPr>
           </a:lstStyle>
           <a:p>
-            <a:pPr indent="0" lvl="0" marL="0" rtl="0" algn="r">
+            <a:pPr marL="0" lvl="0" indent="0" algn="r" rtl="0">
               <a:spcBef>
                 <a:spcPts val="0"/>
               </a:spcBef>
@@ -1901,11 +1940,11 @@
 </file>
 
 <file path=ppt/slideLayouts/slideLayout10.xml><?xml version="1.0" encoding="utf-8"?>
-<p:sldLayout xmlns:a="http://schemas.openxmlformats.org/drawingml/2006/main" xmlns:r="http://schemas.openxmlformats.org/officeDocument/2006/relationships" xmlns:mc="http://schemas.openxmlformats.org/markup-compatibility/2006" xmlns:mv="urn:schemas-microsoft-com:mac:vml" xmlns:p="http://schemas.openxmlformats.org/presentationml/2006/main" xmlns:c="http://schemas.openxmlformats.org/drawingml/2006/chart" xmlns:dgm="http://schemas.openxmlformats.org/drawingml/2006/diagram" xmlns:o="urn:schemas-microsoft-com:office:office" xmlns:v="urn:schemas-microsoft-com:vml" xmlns:pvml="urn:schemas-microsoft-com:office:powerpoint" xmlns:com="http://schemas.openxmlformats.org/drawingml/2006/compatibility" xmlns:p14="http://schemas.microsoft.com/office/powerpoint/2010/main" xmlns:p15="http://schemas.microsoft.com/office/powerpoint/2012/main" xmlns:ahyp="http://schemas.microsoft.com/office/drawing/2018/hyperlinkcolor" matchingName="제목 및 세로 텍스트" type="vertTx">
+<p:sldLayout xmlns:a="http://schemas.openxmlformats.org/drawingml/2006/main" xmlns:r="http://schemas.openxmlformats.org/officeDocument/2006/relationships" xmlns:p="http://schemas.openxmlformats.org/presentationml/2006/main" matchingName="제목 및 세로 텍스트" type="vertTx">
   <p:cSld name="VERTICAL_TEXT">
     <p:spTree>
       <p:nvGrpSpPr>
-        <p:cNvPr id="68" name="Shape 68"/>
+        <p:cNvPr id="1" name="Shape 68"/>
         <p:cNvGrpSpPr/>
         <p:nvPr/>
       </p:nvGrpSpPr>
@@ -1920,7 +1959,9 @@
       <p:sp>
         <p:nvSpPr>
           <p:cNvPr id="69" name="Google Shape;69;p12"/>
-          <p:cNvSpPr txBox="1"/>
+          <p:cNvSpPr txBox="1">
+            <a:spLocks noGrp="1"/>
+          </p:cNvSpPr>
           <p:nvPr>
             <p:ph type="title"/>
           </p:nvPr>
@@ -1939,7 +1980,7 @@
           </a:ln>
         </p:spPr>
         <p:txBody>
-          <a:bodyPr anchorCtr="0" anchor="ctr" bIns="45700" lIns="91425" spcFirstLastPara="1" rIns="91425" wrap="square" tIns="45700">
+          <a:bodyPr spcFirstLastPara="1" wrap="square" lIns="91425" tIns="45700" rIns="91425" bIns="45700" anchor="ctr" anchorCtr="0">
             <a:normAutofit/>
           </a:bodyPr>
           <a:lstStyle>
@@ -2073,15 +2114,19 @@
               <a:defRPr/>
             </a:lvl9pPr>
           </a:lstStyle>
-          <a:p/>
+          <a:p>
+            <a:endParaRPr/>
+          </a:p>
         </p:txBody>
       </p:sp>
       <p:sp>
         <p:nvSpPr>
           <p:cNvPr id="70" name="Google Shape;70;p12"/>
-          <p:cNvSpPr txBox="1"/>
+          <p:cNvSpPr txBox="1">
+            <a:spLocks noGrp="1"/>
+          </p:cNvSpPr>
           <p:nvPr>
-            <p:ph idx="1" type="body"/>
+            <p:ph type="body" idx="1"/>
           </p:nvPr>
         </p:nvSpPr>
         <p:spPr>
@@ -2098,11 +2143,11 @@
           </a:ln>
         </p:spPr>
         <p:txBody>
-          <a:bodyPr anchorCtr="0" anchor="t" bIns="45700" lIns="91425" spcFirstLastPara="1" rIns="91425" wrap="square" tIns="45700">
+          <a:bodyPr spcFirstLastPara="1" wrap="square" lIns="91425" tIns="45700" rIns="91425" bIns="45700" anchor="t" anchorCtr="0">
             <a:normAutofit/>
           </a:bodyPr>
           <a:lstStyle>
-            <a:lvl1pPr indent="-342900" lvl="0" marL="457200" algn="l">
+            <a:lvl1pPr marL="457200" lvl="0" indent="-342900" algn="l">
               <a:lnSpc>
                 <a:spcPct val="90000"/>
               </a:lnSpc>
@@ -2119,7 +2164,7 @@
               <a:buChar char="•"/>
               <a:defRPr/>
             </a:lvl1pPr>
-            <a:lvl2pPr indent="-342900" lvl="1" marL="914400" algn="l">
+            <a:lvl2pPr marL="914400" lvl="1" indent="-342900" algn="l">
               <a:lnSpc>
                 <a:spcPct val="90000"/>
               </a:lnSpc>
@@ -2136,7 +2181,7 @@
               <a:buChar char="•"/>
               <a:defRPr/>
             </a:lvl2pPr>
-            <a:lvl3pPr indent="-342900" lvl="2" marL="1371600" algn="l">
+            <a:lvl3pPr marL="1371600" lvl="2" indent="-342900" algn="l">
               <a:lnSpc>
                 <a:spcPct val="90000"/>
               </a:lnSpc>
@@ -2153,7 +2198,7 @@
               <a:buChar char="•"/>
               <a:defRPr/>
             </a:lvl3pPr>
-            <a:lvl4pPr indent="-342900" lvl="3" marL="1828800" algn="l">
+            <a:lvl4pPr marL="1828800" lvl="3" indent="-342900" algn="l">
               <a:lnSpc>
                 <a:spcPct val="90000"/>
               </a:lnSpc>
@@ -2170,7 +2215,7 @@
               <a:buChar char="•"/>
               <a:defRPr/>
             </a:lvl4pPr>
-            <a:lvl5pPr indent="-342900" lvl="4" marL="2286000" algn="l">
+            <a:lvl5pPr marL="2286000" lvl="4" indent="-342900" algn="l">
               <a:lnSpc>
                 <a:spcPct val="90000"/>
               </a:lnSpc>
@@ -2187,7 +2232,7 @@
               <a:buChar char="•"/>
               <a:defRPr/>
             </a:lvl5pPr>
-            <a:lvl6pPr indent="-342900" lvl="5" marL="2743200" algn="l">
+            <a:lvl6pPr marL="2743200" lvl="5" indent="-342900" algn="l">
               <a:lnSpc>
                 <a:spcPct val="90000"/>
               </a:lnSpc>
@@ -2204,7 +2249,7 @@
               <a:buChar char="•"/>
               <a:defRPr/>
             </a:lvl6pPr>
-            <a:lvl7pPr indent="-342900" lvl="6" marL="3200400" algn="l">
+            <a:lvl7pPr marL="3200400" lvl="6" indent="-342900" algn="l">
               <a:lnSpc>
                 <a:spcPct val="90000"/>
               </a:lnSpc>
@@ -2221,7 +2266,7 @@
               <a:buChar char="•"/>
               <a:defRPr/>
             </a:lvl7pPr>
-            <a:lvl8pPr indent="-342900" lvl="7" marL="3657600" algn="l">
+            <a:lvl8pPr marL="3657600" lvl="7" indent="-342900" algn="l">
               <a:lnSpc>
                 <a:spcPct val="90000"/>
               </a:lnSpc>
@@ -2238,7 +2283,7 @@
               <a:buChar char="•"/>
               <a:defRPr/>
             </a:lvl8pPr>
-            <a:lvl9pPr indent="-342900" lvl="8" marL="4114800" algn="l">
+            <a:lvl9pPr marL="4114800" lvl="8" indent="-342900" algn="l">
               <a:lnSpc>
                 <a:spcPct val="90000"/>
               </a:lnSpc>
@@ -2256,15 +2301,19 @@
               <a:defRPr/>
             </a:lvl9pPr>
           </a:lstStyle>
-          <a:p/>
+          <a:p>
+            <a:endParaRPr/>
+          </a:p>
         </p:txBody>
       </p:sp>
       <p:sp>
         <p:nvSpPr>
           <p:cNvPr id="71" name="Google Shape;71;p12"/>
-          <p:cNvSpPr txBox="1"/>
+          <p:cNvSpPr txBox="1">
+            <a:spLocks noGrp="1"/>
+          </p:cNvSpPr>
           <p:nvPr>
-            <p:ph idx="10" type="dt"/>
+            <p:ph type="dt" idx="10"/>
           </p:nvPr>
         </p:nvSpPr>
         <p:spPr>
@@ -2281,7 +2330,7 @@
           </a:ln>
         </p:spPr>
         <p:txBody>
-          <a:bodyPr anchorCtr="0" anchor="ctr" bIns="45700" lIns="91425" spcFirstLastPara="1" rIns="91425" wrap="square" tIns="45700">
+          <a:bodyPr spcFirstLastPara="1" wrap="square" lIns="91425" tIns="45700" rIns="91425" bIns="45700" anchor="ctr" anchorCtr="0">
             <a:noAutofit/>
           </a:bodyPr>
           <a:lstStyle>
@@ -2412,15 +2461,19 @@
               <a:defRPr/>
             </a:lvl9pPr>
           </a:lstStyle>
-          <a:p/>
+          <a:p>
+            <a:endParaRPr/>
+          </a:p>
         </p:txBody>
       </p:sp>
       <p:sp>
         <p:nvSpPr>
           <p:cNvPr id="72" name="Google Shape;72;p12"/>
-          <p:cNvSpPr txBox="1"/>
+          <p:cNvSpPr txBox="1">
+            <a:spLocks noGrp="1"/>
+          </p:cNvSpPr>
           <p:nvPr>
-            <p:ph idx="11" type="ftr"/>
+            <p:ph type="ftr" idx="11"/>
           </p:nvPr>
         </p:nvSpPr>
         <p:spPr>
@@ -2437,7 +2490,7 @@
           </a:ln>
         </p:spPr>
         <p:txBody>
-          <a:bodyPr anchorCtr="0" anchor="ctr" bIns="45700" lIns="91425" spcFirstLastPara="1" rIns="91425" wrap="square" tIns="45700">
+          <a:bodyPr spcFirstLastPara="1" wrap="square" lIns="91425" tIns="45700" rIns="91425" bIns="45700" anchor="ctr" anchorCtr="0">
             <a:noAutofit/>
           </a:bodyPr>
           <a:lstStyle>
@@ -2568,15 +2621,19 @@
               <a:defRPr/>
             </a:lvl9pPr>
           </a:lstStyle>
-          <a:p/>
+          <a:p>
+            <a:endParaRPr/>
+          </a:p>
         </p:txBody>
       </p:sp>
       <p:sp>
         <p:nvSpPr>
           <p:cNvPr id="73" name="Google Shape;73;p12"/>
-          <p:cNvSpPr txBox="1"/>
+          <p:cNvSpPr txBox="1">
+            <a:spLocks noGrp="1"/>
+          </p:cNvSpPr>
           <p:nvPr>
-            <p:ph idx="12" type="sldNum"/>
+            <p:ph type="sldNum" idx="12"/>
           </p:nvPr>
         </p:nvSpPr>
         <p:spPr>
@@ -2593,11 +2650,11 @@
           </a:ln>
         </p:spPr>
         <p:txBody>
-          <a:bodyPr anchorCtr="0" anchor="ctr" bIns="45700" lIns="91425" spcFirstLastPara="1" rIns="91425" wrap="square" tIns="45700">
+          <a:bodyPr spcFirstLastPara="1" wrap="square" lIns="91425" tIns="45700" rIns="91425" bIns="45700" anchor="ctr" anchorCtr="0">
             <a:noAutofit/>
           </a:bodyPr>
           <a:lstStyle>
-            <a:lvl1pPr indent="0" lvl="0" marL="0" marR="0" algn="r">
+            <a:lvl1pPr marL="0" marR="0" lvl="0" indent="0" algn="r">
               <a:lnSpc>
                 <a:spcPct val="100000"/>
               </a:lnSpc>
@@ -2613,7 +2670,7 @@
               <a:buSzPts val="900"/>
               <a:buFont typeface="Arial"/>
               <a:buNone/>
-              <a:defRPr b="0" i="0" sz="900" u="none" cap="none" strike="noStrike">
+              <a:defRPr sz="900" b="0" i="0" u="none" strike="noStrike" cap="none">
                 <a:solidFill>
                   <a:srgbClr val="757575"/>
                 </a:solidFill>
@@ -2623,7 +2680,7 @@
                 <a:sym typeface="Arial"/>
               </a:defRPr>
             </a:lvl1pPr>
-            <a:lvl2pPr indent="0" lvl="1" marL="0" marR="0" algn="r">
+            <a:lvl2pPr marL="0" marR="0" lvl="1" indent="0" algn="r">
               <a:lnSpc>
                 <a:spcPct val="100000"/>
               </a:lnSpc>
@@ -2639,7 +2696,7 @@
               <a:buSzPts val="900"/>
               <a:buFont typeface="Arial"/>
               <a:buNone/>
-              <a:defRPr b="0" i="0" sz="900" u="none" cap="none" strike="noStrike">
+              <a:defRPr sz="900" b="0" i="0" u="none" strike="noStrike" cap="none">
                 <a:solidFill>
                   <a:srgbClr val="757575"/>
                 </a:solidFill>
@@ -2649,7 +2706,7 @@
                 <a:sym typeface="Arial"/>
               </a:defRPr>
             </a:lvl2pPr>
-            <a:lvl3pPr indent="0" lvl="2" marL="0" marR="0" algn="r">
+            <a:lvl3pPr marL="0" marR="0" lvl="2" indent="0" algn="r">
               <a:lnSpc>
                 <a:spcPct val="100000"/>
               </a:lnSpc>
@@ -2665,7 +2722,7 @@
               <a:buSzPts val="900"/>
               <a:buFont typeface="Arial"/>
               <a:buNone/>
-              <a:defRPr b="0" i="0" sz="900" u="none" cap="none" strike="noStrike">
+              <a:defRPr sz="900" b="0" i="0" u="none" strike="noStrike" cap="none">
                 <a:solidFill>
                   <a:srgbClr val="757575"/>
                 </a:solidFill>
@@ -2675,7 +2732,7 @@
                 <a:sym typeface="Arial"/>
               </a:defRPr>
             </a:lvl3pPr>
-            <a:lvl4pPr indent="0" lvl="3" marL="0" marR="0" algn="r">
+            <a:lvl4pPr marL="0" marR="0" lvl="3" indent="0" algn="r">
               <a:lnSpc>
                 <a:spcPct val="100000"/>
               </a:lnSpc>
@@ -2691,7 +2748,7 @@
               <a:buSzPts val="900"/>
               <a:buFont typeface="Arial"/>
               <a:buNone/>
-              <a:defRPr b="0" i="0" sz="900" u="none" cap="none" strike="noStrike">
+              <a:defRPr sz="900" b="0" i="0" u="none" strike="noStrike" cap="none">
                 <a:solidFill>
                   <a:srgbClr val="757575"/>
                 </a:solidFill>
@@ -2701,7 +2758,7 @@
                 <a:sym typeface="Arial"/>
               </a:defRPr>
             </a:lvl4pPr>
-            <a:lvl5pPr indent="0" lvl="4" marL="0" marR="0" algn="r">
+            <a:lvl5pPr marL="0" marR="0" lvl="4" indent="0" algn="r">
               <a:lnSpc>
                 <a:spcPct val="100000"/>
               </a:lnSpc>
@@ -2717,7 +2774,7 @@
               <a:buSzPts val="900"/>
               <a:buFont typeface="Arial"/>
               <a:buNone/>
-              <a:defRPr b="0" i="0" sz="900" u="none" cap="none" strike="noStrike">
+              <a:defRPr sz="900" b="0" i="0" u="none" strike="noStrike" cap="none">
                 <a:solidFill>
                   <a:srgbClr val="757575"/>
                 </a:solidFill>
@@ -2727,7 +2784,7 @@
                 <a:sym typeface="Arial"/>
               </a:defRPr>
             </a:lvl5pPr>
-            <a:lvl6pPr indent="0" lvl="5" marL="0" marR="0" algn="r">
+            <a:lvl6pPr marL="0" marR="0" lvl="5" indent="0" algn="r">
               <a:lnSpc>
                 <a:spcPct val="100000"/>
               </a:lnSpc>
@@ -2743,7 +2800,7 @@
               <a:buSzPts val="900"/>
               <a:buFont typeface="Arial"/>
               <a:buNone/>
-              <a:defRPr b="0" i="0" sz="900" u="none" cap="none" strike="noStrike">
+              <a:defRPr sz="900" b="0" i="0" u="none" strike="noStrike" cap="none">
                 <a:solidFill>
                   <a:srgbClr val="757575"/>
                 </a:solidFill>
@@ -2753,7 +2810,7 @@
                 <a:sym typeface="Arial"/>
               </a:defRPr>
             </a:lvl6pPr>
-            <a:lvl7pPr indent="0" lvl="6" marL="0" marR="0" algn="r">
+            <a:lvl7pPr marL="0" marR="0" lvl="6" indent="0" algn="r">
               <a:lnSpc>
                 <a:spcPct val="100000"/>
               </a:lnSpc>
@@ -2769,7 +2826,7 @@
               <a:buSzPts val="900"/>
               <a:buFont typeface="Arial"/>
               <a:buNone/>
-              <a:defRPr b="0" i="0" sz="900" u="none" cap="none" strike="noStrike">
+              <a:defRPr sz="900" b="0" i="0" u="none" strike="noStrike" cap="none">
                 <a:solidFill>
                   <a:srgbClr val="757575"/>
                 </a:solidFill>
@@ -2779,7 +2836,7 @@
                 <a:sym typeface="Arial"/>
               </a:defRPr>
             </a:lvl7pPr>
-            <a:lvl8pPr indent="0" lvl="7" marL="0" marR="0" algn="r">
+            <a:lvl8pPr marL="0" marR="0" lvl="7" indent="0" algn="r">
               <a:lnSpc>
                 <a:spcPct val="100000"/>
               </a:lnSpc>
@@ -2795,7 +2852,7 @@
               <a:buSzPts val="900"/>
               <a:buFont typeface="Arial"/>
               <a:buNone/>
-              <a:defRPr b="0" i="0" sz="900" u="none" cap="none" strike="noStrike">
+              <a:defRPr sz="900" b="0" i="0" u="none" strike="noStrike" cap="none">
                 <a:solidFill>
                   <a:srgbClr val="757575"/>
                 </a:solidFill>
@@ -2805,7 +2862,7 @@
                 <a:sym typeface="Arial"/>
               </a:defRPr>
             </a:lvl8pPr>
-            <a:lvl9pPr indent="0" lvl="8" marL="0" marR="0" algn="r">
+            <a:lvl9pPr marL="0" marR="0" lvl="8" indent="0" algn="r">
               <a:lnSpc>
                 <a:spcPct val="100000"/>
               </a:lnSpc>
@@ -2821,7 +2878,7 @@
               <a:buSzPts val="900"/>
               <a:buFont typeface="Arial"/>
               <a:buNone/>
-              <a:defRPr b="0" i="0" sz="900" u="none" cap="none" strike="noStrike">
+              <a:defRPr sz="900" b="0" i="0" u="none" strike="noStrike" cap="none">
                 <a:solidFill>
                   <a:srgbClr val="757575"/>
                 </a:solidFill>
@@ -2833,7 +2890,7 @@
             </a:lvl9pPr>
           </a:lstStyle>
           <a:p>
-            <a:pPr indent="0" lvl="0" marL="0" rtl="0" algn="r">
+            <a:pPr marL="0" lvl="0" indent="0" algn="r" rtl="0">
               <a:spcBef>
                 <a:spcPts val="0"/>
               </a:spcBef>
@@ -2859,11 +2916,11 @@
 </file>
 
 <file path=ppt/slideLayouts/slideLayout11.xml><?xml version="1.0" encoding="utf-8"?>
-<p:sldLayout xmlns:a="http://schemas.openxmlformats.org/drawingml/2006/main" xmlns:r="http://schemas.openxmlformats.org/officeDocument/2006/relationships" xmlns:mc="http://schemas.openxmlformats.org/markup-compatibility/2006" xmlns:mv="urn:schemas-microsoft-com:mac:vml" xmlns:p="http://schemas.openxmlformats.org/presentationml/2006/main" xmlns:c="http://schemas.openxmlformats.org/drawingml/2006/chart" xmlns:dgm="http://schemas.openxmlformats.org/drawingml/2006/diagram" xmlns:o="urn:schemas-microsoft-com:office:office" xmlns:v="urn:schemas-microsoft-com:vml" xmlns:pvml="urn:schemas-microsoft-com:office:powerpoint" xmlns:com="http://schemas.openxmlformats.org/drawingml/2006/compatibility" xmlns:p14="http://schemas.microsoft.com/office/powerpoint/2010/main" xmlns:p15="http://schemas.microsoft.com/office/powerpoint/2012/main" xmlns:ahyp="http://schemas.microsoft.com/office/drawing/2018/hyperlinkcolor" matchingName="세로 제목 및 텍스트" type="vertTitleAndTx">
+<p:sldLayout xmlns:a="http://schemas.openxmlformats.org/drawingml/2006/main" xmlns:r="http://schemas.openxmlformats.org/officeDocument/2006/relationships" xmlns:p="http://schemas.openxmlformats.org/presentationml/2006/main" matchingName="세로 제목 및 텍스트" type="vertTitleAndTx">
   <p:cSld name="VERTICAL_TITLE_AND_VERTICAL_TEXT">
     <p:spTree>
       <p:nvGrpSpPr>
-        <p:cNvPr id="74" name="Shape 74"/>
+        <p:cNvPr id="1" name="Shape 74"/>
         <p:cNvGrpSpPr/>
         <p:nvPr/>
       </p:nvGrpSpPr>
@@ -2878,7 +2935,9 @@
       <p:sp>
         <p:nvSpPr>
           <p:cNvPr id="75" name="Google Shape;75;p13"/>
-          <p:cNvSpPr txBox="1"/>
+          <p:cNvSpPr txBox="1">
+            <a:spLocks noGrp="1"/>
+          </p:cNvSpPr>
           <p:nvPr>
             <p:ph type="title"/>
           </p:nvPr>
@@ -2897,7 +2956,7 @@
           </a:ln>
         </p:spPr>
         <p:txBody>
-          <a:bodyPr anchorCtr="0" anchor="ctr" bIns="45700" lIns="91425" spcFirstLastPara="1" rIns="91425" wrap="square" tIns="45700">
+          <a:bodyPr spcFirstLastPara="1" wrap="square" lIns="91425" tIns="45700" rIns="91425" bIns="45700" anchor="ctr" anchorCtr="0">
             <a:normAutofit/>
           </a:bodyPr>
           <a:lstStyle>
@@ -3031,15 +3090,19 @@
               <a:defRPr/>
             </a:lvl9pPr>
           </a:lstStyle>
-          <a:p/>
+          <a:p>
+            <a:endParaRPr/>
+          </a:p>
         </p:txBody>
       </p:sp>
       <p:sp>
         <p:nvSpPr>
           <p:cNvPr id="76" name="Google Shape;76;p13"/>
-          <p:cNvSpPr txBox="1"/>
+          <p:cNvSpPr txBox="1">
+            <a:spLocks noGrp="1"/>
+          </p:cNvSpPr>
           <p:nvPr>
-            <p:ph idx="1" type="body"/>
+            <p:ph type="body" idx="1"/>
           </p:nvPr>
         </p:nvSpPr>
         <p:spPr>
@@ -3056,11 +3119,11 @@
           </a:ln>
         </p:spPr>
         <p:txBody>
-          <a:bodyPr anchorCtr="0" anchor="t" bIns="45700" lIns="91425" spcFirstLastPara="1" rIns="91425" wrap="square" tIns="45700">
+          <a:bodyPr spcFirstLastPara="1" wrap="square" lIns="91425" tIns="45700" rIns="91425" bIns="45700" anchor="t" anchorCtr="0">
             <a:normAutofit/>
           </a:bodyPr>
           <a:lstStyle>
-            <a:lvl1pPr indent="-342900" lvl="0" marL="457200" algn="l">
+            <a:lvl1pPr marL="457200" lvl="0" indent="-342900" algn="l">
               <a:lnSpc>
                 <a:spcPct val="90000"/>
               </a:lnSpc>
@@ -3077,7 +3140,7 @@
               <a:buChar char="•"/>
               <a:defRPr/>
             </a:lvl1pPr>
-            <a:lvl2pPr indent="-342900" lvl="1" marL="914400" algn="l">
+            <a:lvl2pPr marL="914400" lvl="1" indent="-342900" algn="l">
               <a:lnSpc>
                 <a:spcPct val="90000"/>
               </a:lnSpc>
@@ -3094,7 +3157,7 @@
               <a:buChar char="•"/>
               <a:defRPr/>
             </a:lvl2pPr>
-            <a:lvl3pPr indent="-342900" lvl="2" marL="1371600" algn="l">
+            <a:lvl3pPr marL="1371600" lvl="2" indent="-342900" algn="l">
               <a:lnSpc>
                 <a:spcPct val="90000"/>
               </a:lnSpc>
@@ -3111,7 +3174,7 @@
               <a:buChar char="•"/>
               <a:defRPr/>
             </a:lvl3pPr>
-            <a:lvl4pPr indent="-342900" lvl="3" marL="1828800" algn="l">
+            <a:lvl4pPr marL="1828800" lvl="3" indent="-342900" algn="l">
               <a:lnSpc>
                 <a:spcPct val="90000"/>
               </a:lnSpc>
@@ -3128,7 +3191,7 @@
               <a:buChar char="•"/>
               <a:defRPr/>
             </a:lvl4pPr>
-            <a:lvl5pPr indent="-342900" lvl="4" marL="2286000" algn="l">
+            <a:lvl5pPr marL="2286000" lvl="4" indent="-342900" algn="l">
               <a:lnSpc>
                 <a:spcPct val="90000"/>
               </a:lnSpc>
@@ -3145,7 +3208,7 @@
               <a:buChar char="•"/>
               <a:defRPr/>
             </a:lvl5pPr>
-            <a:lvl6pPr indent="-342900" lvl="5" marL="2743200" algn="l">
+            <a:lvl6pPr marL="2743200" lvl="5" indent="-342900" algn="l">
               <a:lnSpc>
                 <a:spcPct val="90000"/>
               </a:lnSpc>
@@ -3162,7 +3225,7 @@
               <a:buChar char="•"/>
               <a:defRPr/>
             </a:lvl6pPr>
-            <a:lvl7pPr indent="-342900" lvl="6" marL="3200400" algn="l">
+            <a:lvl7pPr marL="3200400" lvl="6" indent="-342900" algn="l">
               <a:lnSpc>
                 <a:spcPct val="90000"/>
               </a:lnSpc>
@@ -3179,7 +3242,7 @@
               <a:buChar char="•"/>
               <a:defRPr/>
             </a:lvl7pPr>
-            <a:lvl8pPr indent="-342900" lvl="7" marL="3657600" algn="l">
+            <a:lvl8pPr marL="3657600" lvl="7" indent="-342900" algn="l">
               <a:lnSpc>
                 <a:spcPct val="90000"/>
               </a:lnSpc>
@@ -3196,7 +3259,7 @@
               <a:buChar char="•"/>
               <a:defRPr/>
             </a:lvl8pPr>
-            <a:lvl9pPr indent="-342900" lvl="8" marL="4114800" algn="l">
+            <a:lvl9pPr marL="4114800" lvl="8" indent="-342900" algn="l">
               <a:lnSpc>
                 <a:spcPct val="90000"/>
               </a:lnSpc>
@@ -3214,15 +3277,19 @@
               <a:defRPr/>
             </a:lvl9pPr>
           </a:lstStyle>
-          <a:p/>
+          <a:p>
+            <a:endParaRPr/>
+          </a:p>
         </p:txBody>
       </p:sp>
       <p:sp>
         <p:nvSpPr>
           <p:cNvPr id="77" name="Google Shape;77;p13"/>
-          <p:cNvSpPr txBox="1"/>
+          <p:cNvSpPr txBox="1">
+            <a:spLocks noGrp="1"/>
+          </p:cNvSpPr>
           <p:nvPr>
-            <p:ph idx="10" type="dt"/>
+            <p:ph type="dt" idx="10"/>
           </p:nvPr>
         </p:nvSpPr>
         <p:spPr>
@@ -3239,7 +3306,7 @@
           </a:ln>
         </p:spPr>
         <p:txBody>
-          <a:bodyPr anchorCtr="0" anchor="ctr" bIns="45700" lIns="91425" spcFirstLastPara="1" rIns="91425" wrap="square" tIns="45700">
+          <a:bodyPr spcFirstLastPara="1" wrap="square" lIns="91425" tIns="45700" rIns="91425" bIns="45700" anchor="ctr" anchorCtr="0">
             <a:noAutofit/>
           </a:bodyPr>
           <a:lstStyle>
@@ -3370,15 +3437,19 @@
               <a:defRPr/>
             </a:lvl9pPr>
           </a:lstStyle>
-          <a:p/>
+          <a:p>
+            <a:endParaRPr/>
+          </a:p>
         </p:txBody>
       </p:sp>
       <p:sp>
         <p:nvSpPr>
           <p:cNvPr id="78" name="Google Shape;78;p13"/>
-          <p:cNvSpPr txBox="1"/>
+          <p:cNvSpPr txBox="1">
+            <a:spLocks noGrp="1"/>
+          </p:cNvSpPr>
           <p:nvPr>
-            <p:ph idx="11" type="ftr"/>
+            <p:ph type="ftr" idx="11"/>
           </p:nvPr>
         </p:nvSpPr>
         <p:spPr>
@@ -3395,7 +3466,7 @@
           </a:ln>
         </p:spPr>
         <p:txBody>
-          <a:bodyPr anchorCtr="0" anchor="ctr" bIns="45700" lIns="91425" spcFirstLastPara="1" rIns="91425" wrap="square" tIns="45700">
+          <a:bodyPr spcFirstLastPara="1" wrap="square" lIns="91425" tIns="45700" rIns="91425" bIns="45700" anchor="ctr" anchorCtr="0">
             <a:noAutofit/>
           </a:bodyPr>
           <a:lstStyle>
@@ -3526,15 +3597,19 @@
               <a:defRPr/>
             </a:lvl9pPr>
           </a:lstStyle>
-          <a:p/>
+          <a:p>
+            <a:endParaRPr/>
+          </a:p>
         </p:txBody>
       </p:sp>
       <p:sp>
         <p:nvSpPr>
           <p:cNvPr id="79" name="Google Shape;79;p13"/>
-          <p:cNvSpPr txBox="1"/>
+          <p:cNvSpPr txBox="1">
+            <a:spLocks noGrp="1"/>
+          </p:cNvSpPr>
           <p:nvPr>
-            <p:ph idx="12" type="sldNum"/>
+            <p:ph type="sldNum" idx="12"/>
           </p:nvPr>
         </p:nvSpPr>
         <p:spPr>
@@ -3551,11 +3626,11 @@
           </a:ln>
         </p:spPr>
         <p:txBody>
-          <a:bodyPr anchorCtr="0" anchor="ctr" bIns="45700" lIns="91425" spcFirstLastPara="1" rIns="91425" wrap="square" tIns="45700">
+          <a:bodyPr spcFirstLastPara="1" wrap="square" lIns="91425" tIns="45700" rIns="91425" bIns="45700" anchor="ctr" anchorCtr="0">
             <a:noAutofit/>
           </a:bodyPr>
           <a:lstStyle>
-            <a:lvl1pPr indent="0" lvl="0" marL="0" marR="0" algn="r">
+            <a:lvl1pPr marL="0" marR="0" lvl="0" indent="0" algn="r">
               <a:lnSpc>
                 <a:spcPct val="100000"/>
               </a:lnSpc>
@@ -3571,7 +3646,7 @@
               <a:buSzPts val="900"/>
               <a:buFont typeface="Arial"/>
               <a:buNone/>
-              <a:defRPr b="0" i="0" sz="900" u="none" cap="none" strike="noStrike">
+              <a:defRPr sz="900" b="0" i="0" u="none" strike="noStrike" cap="none">
                 <a:solidFill>
                   <a:srgbClr val="757575"/>
                 </a:solidFill>
@@ -3581,7 +3656,7 @@
                 <a:sym typeface="Arial"/>
               </a:defRPr>
             </a:lvl1pPr>
-            <a:lvl2pPr indent="0" lvl="1" marL="0" marR="0" algn="r">
+            <a:lvl2pPr marL="0" marR="0" lvl="1" indent="0" algn="r">
               <a:lnSpc>
                 <a:spcPct val="100000"/>
               </a:lnSpc>
@@ -3597,7 +3672,7 @@
               <a:buSzPts val="900"/>
               <a:buFont typeface="Arial"/>
               <a:buNone/>
-              <a:defRPr b="0" i="0" sz="900" u="none" cap="none" strike="noStrike">
+              <a:defRPr sz="900" b="0" i="0" u="none" strike="noStrike" cap="none">
                 <a:solidFill>
                   <a:srgbClr val="757575"/>
                 </a:solidFill>
@@ -3607,7 +3682,7 @@
                 <a:sym typeface="Arial"/>
               </a:defRPr>
             </a:lvl2pPr>
-            <a:lvl3pPr indent="0" lvl="2" marL="0" marR="0" algn="r">
+            <a:lvl3pPr marL="0" marR="0" lvl="2" indent="0" algn="r">
               <a:lnSpc>
                 <a:spcPct val="100000"/>
               </a:lnSpc>
@@ -3623,7 +3698,7 @@
               <a:buSzPts val="900"/>
               <a:buFont typeface="Arial"/>
               <a:buNone/>
-              <a:defRPr b="0" i="0" sz="900" u="none" cap="none" strike="noStrike">
+              <a:defRPr sz="900" b="0" i="0" u="none" strike="noStrike" cap="none">
                 <a:solidFill>
                   <a:srgbClr val="757575"/>
                 </a:solidFill>
@@ -3633,7 +3708,7 @@
                 <a:sym typeface="Arial"/>
               </a:defRPr>
             </a:lvl3pPr>
-            <a:lvl4pPr indent="0" lvl="3" marL="0" marR="0" algn="r">
+            <a:lvl4pPr marL="0" marR="0" lvl="3" indent="0" algn="r">
               <a:lnSpc>
                 <a:spcPct val="100000"/>
               </a:lnSpc>
@@ -3649,7 +3724,7 @@
               <a:buSzPts val="900"/>
               <a:buFont typeface="Arial"/>
               <a:buNone/>
-              <a:defRPr b="0" i="0" sz="900" u="none" cap="none" strike="noStrike">
+              <a:defRPr sz="900" b="0" i="0" u="none" strike="noStrike" cap="none">
                 <a:solidFill>
                   <a:srgbClr val="757575"/>
                 </a:solidFill>
@@ -3659,7 +3734,7 @@
                 <a:sym typeface="Arial"/>
               </a:defRPr>
             </a:lvl4pPr>
-            <a:lvl5pPr indent="0" lvl="4" marL="0" marR="0" algn="r">
+            <a:lvl5pPr marL="0" marR="0" lvl="4" indent="0" algn="r">
               <a:lnSpc>
                 <a:spcPct val="100000"/>
               </a:lnSpc>
@@ -3675,7 +3750,7 @@
               <a:buSzPts val="900"/>
               <a:buFont typeface="Arial"/>
               <a:buNone/>
-              <a:defRPr b="0" i="0" sz="900" u="none" cap="none" strike="noStrike">
+              <a:defRPr sz="900" b="0" i="0" u="none" strike="noStrike" cap="none">
                 <a:solidFill>
                   <a:srgbClr val="757575"/>
                 </a:solidFill>
@@ -3685,7 +3760,7 @@
                 <a:sym typeface="Arial"/>
               </a:defRPr>
             </a:lvl5pPr>
-            <a:lvl6pPr indent="0" lvl="5" marL="0" marR="0" algn="r">
+            <a:lvl6pPr marL="0" marR="0" lvl="5" indent="0" algn="r">
               <a:lnSpc>
                 <a:spcPct val="100000"/>
               </a:lnSpc>
@@ -3701,7 +3776,7 @@
               <a:buSzPts val="900"/>
               <a:buFont typeface="Arial"/>
               <a:buNone/>
-              <a:defRPr b="0" i="0" sz="900" u="none" cap="none" strike="noStrike">
+              <a:defRPr sz="900" b="0" i="0" u="none" strike="noStrike" cap="none">
                 <a:solidFill>
                   <a:srgbClr val="757575"/>
                 </a:solidFill>
@@ -3711,7 +3786,7 @@
                 <a:sym typeface="Arial"/>
               </a:defRPr>
             </a:lvl6pPr>
-            <a:lvl7pPr indent="0" lvl="6" marL="0" marR="0" algn="r">
+            <a:lvl7pPr marL="0" marR="0" lvl="6" indent="0" algn="r">
               <a:lnSpc>
                 <a:spcPct val="100000"/>
               </a:lnSpc>
@@ -3727,7 +3802,7 @@
               <a:buSzPts val="900"/>
               <a:buFont typeface="Arial"/>
               <a:buNone/>
-              <a:defRPr b="0" i="0" sz="900" u="none" cap="none" strike="noStrike">
+              <a:defRPr sz="900" b="0" i="0" u="none" strike="noStrike" cap="none">
                 <a:solidFill>
                   <a:srgbClr val="757575"/>
                 </a:solidFill>
@@ -3737,7 +3812,7 @@
                 <a:sym typeface="Arial"/>
               </a:defRPr>
             </a:lvl7pPr>
-            <a:lvl8pPr indent="0" lvl="7" marL="0" marR="0" algn="r">
+            <a:lvl8pPr marL="0" marR="0" lvl="7" indent="0" algn="r">
               <a:lnSpc>
                 <a:spcPct val="100000"/>
               </a:lnSpc>
@@ -3753,7 +3828,7 @@
               <a:buSzPts val="900"/>
               <a:buFont typeface="Arial"/>
               <a:buNone/>
-              <a:defRPr b="0" i="0" sz="900" u="none" cap="none" strike="noStrike">
+              <a:defRPr sz="900" b="0" i="0" u="none" strike="noStrike" cap="none">
                 <a:solidFill>
                   <a:srgbClr val="757575"/>
                 </a:solidFill>
@@ -3763,7 +3838,7 @@
                 <a:sym typeface="Arial"/>
               </a:defRPr>
             </a:lvl8pPr>
-            <a:lvl9pPr indent="0" lvl="8" marL="0" marR="0" algn="r">
+            <a:lvl9pPr marL="0" marR="0" lvl="8" indent="0" algn="r">
               <a:lnSpc>
                 <a:spcPct val="100000"/>
               </a:lnSpc>
@@ -3779,7 +3854,7 @@
               <a:buSzPts val="900"/>
               <a:buFont typeface="Arial"/>
               <a:buNone/>
-              <a:defRPr b="0" i="0" sz="900" u="none" cap="none" strike="noStrike">
+              <a:defRPr sz="900" b="0" i="0" u="none" strike="noStrike" cap="none">
                 <a:solidFill>
                   <a:srgbClr val="757575"/>
                 </a:solidFill>
@@ -3791,7 +3866,7 @@
             </a:lvl9pPr>
           </a:lstStyle>
           <a:p>
-            <a:pPr indent="0" lvl="0" marL="0" rtl="0" algn="r">
+            <a:pPr marL="0" lvl="0" indent="0" algn="r" rtl="0">
               <a:spcBef>
                 <a:spcPts val="0"/>
               </a:spcBef>
@@ -3817,11 +3892,11 @@
 </file>
 
 <file path=ppt/slideLayouts/slideLayout2.xml><?xml version="1.0" encoding="utf-8"?>
-<p:sldLayout xmlns:a="http://schemas.openxmlformats.org/drawingml/2006/main" xmlns:r="http://schemas.openxmlformats.org/officeDocument/2006/relationships" xmlns:mc="http://schemas.openxmlformats.org/markup-compatibility/2006" xmlns:mv="urn:schemas-microsoft-com:mac:vml" xmlns:p="http://schemas.openxmlformats.org/presentationml/2006/main" xmlns:c="http://schemas.openxmlformats.org/drawingml/2006/chart" xmlns:dgm="http://schemas.openxmlformats.org/drawingml/2006/diagram" xmlns:o="urn:schemas-microsoft-com:office:office" xmlns:v="urn:schemas-microsoft-com:vml" xmlns:pvml="urn:schemas-microsoft-com:office:powerpoint" xmlns:com="http://schemas.openxmlformats.org/drawingml/2006/compatibility" xmlns:p14="http://schemas.microsoft.com/office/powerpoint/2010/main" xmlns:p15="http://schemas.microsoft.com/office/powerpoint/2012/main" xmlns:ahyp="http://schemas.microsoft.com/office/drawing/2018/hyperlinkcolor" matchingName="제목 및 내용" type="obj">
+<p:sldLayout xmlns:a="http://schemas.openxmlformats.org/drawingml/2006/main" xmlns:r="http://schemas.openxmlformats.org/officeDocument/2006/relationships" xmlns:p="http://schemas.openxmlformats.org/presentationml/2006/main" matchingName="제목 및 내용" type="obj">
   <p:cSld name="OBJECT">
     <p:spTree>
       <p:nvGrpSpPr>
-        <p:cNvPr id="17" name="Shape 17"/>
+        <p:cNvPr id="1" name="Shape 17"/>
         <p:cNvGrpSpPr/>
         <p:nvPr/>
       </p:nvGrpSpPr>
@@ -3836,7 +3911,9 @@
       <p:sp>
         <p:nvSpPr>
           <p:cNvPr id="18" name="Google Shape;18;p4"/>
-          <p:cNvSpPr txBox="1"/>
+          <p:cNvSpPr txBox="1">
+            <a:spLocks noGrp="1"/>
+          </p:cNvSpPr>
           <p:nvPr>
             <p:ph type="title"/>
           </p:nvPr>
@@ -3855,7 +3932,7 @@
           </a:ln>
         </p:spPr>
         <p:txBody>
-          <a:bodyPr anchorCtr="0" anchor="ctr" bIns="45700" lIns="91425" spcFirstLastPara="1" rIns="91425" wrap="square" tIns="45700">
+          <a:bodyPr spcFirstLastPara="1" wrap="square" lIns="91425" tIns="45700" rIns="91425" bIns="45700" anchor="ctr" anchorCtr="0">
             <a:normAutofit/>
           </a:bodyPr>
           <a:lstStyle>
@@ -3989,15 +4066,19 @@
               <a:defRPr/>
             </a:lvl9pPr>
           </a:lstStyle>
-          <a:p/>
+          <a:p>
+            <a:endParaRPr/>
+          </a:p>
         </p:txBody>
       </p:sp>
       <p:sp>
         <p:nvSpPr>
           <p:cNvPr id="19" name="Google Shape;19;p4"/>
-          <p:cNvSpPr txBox="1"/>
+          <p:cNvSpPr txBox="1">
+            <a:spLocks noGrp="1"/>
+          </p:cNvSpPr>
           <p:nvPr>
-            <p:ph idx="1" type="body"/>
+            <p:ph type="body" idx="1"/>
           </p:nvPr>
         </p:nvSpPr>
         <p:spPr>
@@ -4014,11 +4095,11 @@
           </a:ln>
         </p:spPr>
         <p:txBody>
-          <a:bodyPr anchorCtr="0" anchor="t" bIns="45700" lIns="91425" spcFirstLastPara="1" rIns="91425" wrap="square" tIns="45700">
+          <a:bodyPr spcFirstLastPara="1" wrap="square" lIns="91425" tIns="45700" rIns="91425" bIns="45700" anchor="t" anchorCtr="0">
             <a:normAutofit/>
           </a:bodyPr>
           <a:lstStyle>
-            <a:lvl1pPr indent="-342900" lvl="0" marL="457200" algn="l">
+            <a:lvl1pPr marL="457200" lvl="0" indent="-342900" algn="l">
               <a:lnSpc>
                 <a:spcPct val="90000"/>
               </a:lnSpc>
@@ -4035,7 +4116,7 @@
               <a:buChar char="•"/>
               <a:defRPr/>
             </a:lvl1pPr>
-            <a:lvl2pPr indent="-342900" lvl="1" marL="914400" algn="l">
+            <a:lvl2pPr marL="914400" lvl="1" indent="-342900" algn="l">
               <a:lnSpc>
                 <a:spcPct val="90000"/>
               </a:lnSpc>
@@ -4052,7 +4133,7 @@
               <a:buChar char="•"/>
               <a:defRPr/>
             </a:lvl2pPr>
-            <a:lvl3pPr indent="-342900" lvl="2" marL="1371600" algn="l">
+            <a:lvl3pPr marL="1371600" lvl="2" indent="-342900" algn="l">
               <a:lnSpc>
                 <a:spcPct val="90000"/>
               </a:lnSpc>
@@ -4069,7 +4150,7 @@
               <a:buChar char="•"/>
               <a:defRPr/>
             </a:lvl3pPr>
-            <a:lvl4pPr indent="-342900" lvl="3" marL="1828800" algn="l">
+            <a:lvl4pPr marL="1828800" lvl="3" indent="-342900" algn="l">
               <a:lnSpc>
                 <a:spcPct val="90000"/>
               </a:lnSpc>
@@ -4086,7 +4167,7 @@
               <a:buChar char="•"/>
               <a:defRPr/>
             </a:lvl4pPr>
-            <a:lvl5pPr indent="-342900" lvl="4" marL="2286000" algn="l">
+            <a:lvl5pPr marL="2286000" lvl="4" indent="-342900" algn="l">
               <a:lnSpc>
                 <a:spcPct val="90000"/>
               </a:lnSpc>
@@ -4103,7 +4184,7 @@
               <a:buChar char="•"/>
               <a:defRPr/>
             </a:lvl5pPr>
-            <a:lvl6pPr indent="-342900" lvl="5" marL="2743200" algn="l">
+            <a:lvl6pPr marL="2743200" lvl="5" indent="-342900" algn="l">
               <a:lnSpc>
                 <a:spcPct val="90000"/>
               </a:lnSpc>
@@ -4120,7 +4201,7 @@
               <a:buChar char="•"/>
               <a:defRPr/>
             </a:lvl6pPr>
-            <a:lvl7pPr indent="-342900" lvl="6" marL="3200400" algn="l">
+            <a:lvl7pPr marL="3200400" lvl="6" indent="-342900" algn="l">
               <a:lnSpc>
                 <a:spcPct val="90000"/>
               </a:lnSpc>
@@ -4137,7 +4218,7 @@
               <a:buChar char="•"/>
               <a:defRPr/>
             </a:lvl7pPr>
-            <a:lvl8pPr indent="-342900" lvl="7" marL="3657600" algn="l">
+            <a:lvl8pPr marL="3657600" lvl="7" indent="-342900" algn="l">
               <a:lnSpc>
                 <a:spcPct val="90000"/>
               </a:lnSpc>
@@ -4154,7 +4235,7 @@
               <a:buChar char="•"/>
               <a:defRPr/>
             </a:lvl8pPr>
-            <a:lvl9pPr indent="-342900" lvl="8" marL="4114800" algn="l">
+            <a:lvl9pPr marL="4114800" lvl="8" indent="-342900" algn="l">
               <a:lnSpc>
                 <a:spcPct val="90000"/>
               </a:lnSpc>
@@ -4172,15 +4253,19 @@
               <a:defRPr/>
             </a:lvl9pPr>
           </a:lstStyle>
-          <a:p/>
+          <a:p>
+            <a:endParaRPr/>
+          </a:p>
         </p:txBody>
       </p:sp>
       <p:sp>
         <p:nvSpPr>
           <p:cNvPr id="20" name="Google Shape;20;p4"/>
-          <p:cNvSpPr txBox="1"/>
+          <p:cNvSpPr txBox="1">
+            <a:spLocks noGrp="1"/>
+          </p:cNvSpPr>
           <p:nvPr>
-            <p:ph idx="10" type="dt"/>
+            <p:ph type="dt" idx="10"/>
           </p:nvPr>
         </p:nvSpPr>
         <p:spPr>
@@ -4197,7 +4282,7 @@
           </a:ln>
         </p:spPr>
         <p:txBody>
-          <a:bodyPr anchorCtr="0" anchor="ctr" bIns="45700" lIns="91425" spcFirstLastPara="1" rIns="91425" wrap="square" tIns="45700">
+          <a:bodyPr spcFirstLastPara="1" wrap="square" lIns="91425" tIns="45700" rIns="91425" bIns="45700" anchor="ctr" anchorCtr="0">
             <a:noAutofit/>
           </a:bodyPr>
           <a:lstStyle>
@@ -4328,15 +4413,19 @@
               <a:defRPr/>
             </a:lvl9pPr>
           </a:lstStyle>
-          <a:p/>
+          <a:p>
+            <a:endParaRPr/>
+          </a:p>
         </p:txBody>
       </p:sp>
       <p:sp>
         <p:nvSpPr>
           <p:cNvPr id="21" name="Google Shape;21;p4"/>
-          <p:cNvSpPr txBox="1"/>
+          <p:cNvSpPr txBox="1">
+            <a:spLocks noGrp="1"/>
+          </p:cNvSpPr>
           <p:nvPr>
-            <p:ph idx="11" type="ftr"/>
+            <p:ph type="ftr" idx="11"/>
           </p:nvPr>
         </p:nvSpPr>
         <p:spPr>
@@ -4353,7 +4442,7 @@
           </a:ln>
         </p:spPr>
         <p:txBody>
-          <a:bodyPr anchorCtr="0" anchor="ctr" bIns="45700" lIns="91425" spcFirstLastPara="1" rIns="91425" wrap="square" tIns="45700">
+          <a:bodyPr spcFirstLastPara="1" wrap="square" lIns="91425" tIns="45700" rIns="91425" bIns="45700" anchor="ctr" anchorCtr="0">
             <a:noAutofit/>
           </a:bodyPr>
           <a:lstStyle>
@@ -4484,15 +4573,19 @@
               <a:defRPr/>
             </a:lvl9pPr>
           </a:lstStyle>
-          <a:p/>
+          <a:p>
+            <a:endParaRPr/>
+          </a:p>
         </p:txBody>
       </p:sp>
       <p:sp>
         <p:nvSpPr>
           <p:cNvPr id="22" name="Google Shape;22;p4"/>
-          <p:cNvSpPr txBox="1"/>
+          <p:cNvSpPr txBox="1">
+            <a:spLocks noGrp="1"/>
+          </p:cNvSpPr>
           <p:nvPr>
-            <p:ph idx="12" type="sldNum"/>
+            <p:ph type="sldNum" idx="12"/>
           </p:nvPr>
         </p:nvSpPr>
         <p:spPr>
@@ -4509,11 +4602,11 @@
           </a:ln>
         </p:spPr>
         <p:txBody>
-          <a:bodyPr anchorCtr="0" anchor="ctr" bIns="45700" lIns="91425" spcFirstLastPara="1" rIns="91425" wrap="square" tIns="45700">
+          <a:bodyPr spcFirstLastPara="1" wrap="square" lIns="91425" tIns="45700" rIns="91425" bIns="45700" anchor="ctr" anchorCtr="0">
             <a:noAutofit/>
           </a:bodyPr>
           <a:lstStyle>
-            <a:lvl1pPr indent="0" lvl="0" marL="0" marR="0" algn="r">
+            <a:lvl1pPr marL="0" marR="0" lvl="0" indent="0" algn="r">
               <a:lnSpc>
                 <a:spcPct val="100000"/>
               </a:lnSpc>
@@ -4529,7 +4622,7 @@
               <a:buSzPts val="900"/>
               <a:buFont typeface="Arial"/>
               <a:buNone/>
-              <a:defRPr b="0" i="0" sz="900" u="none" cap="none" strike="noStrike">
+              <a:defRPr sz="900" b="0" i="0" u="none" strike="noStrike" cap="none">
                 <a:solidFill>
                   <a:srgbClr val="757575"/>
                 </a:solidFill>
@@ -4539,7 +4632,7 @@
                 <a:sym typeface="Arial"/>
               </a:defRPr>
             </a:lvl1pPr>
-            <a:lvl2pPr indent="0" lvl="1" marL="0" marR="0" algn="r">
+            <a:lvl2pPr marL="0" marR="0" lvl="1" indent="0" algn="r">
               <a:lnSpc>
                 <a:spcPct val="100000"/>
               </a:lnSpc>
@@ -4555,7 +4648,7 @@
               <a:buSzPts val="900"/>
               <a:buFont typeface="Arial"/>
               <a:buNone/>
-              <a:defRPr b="0" i="0" sz="900" u="none" cap="none" strike="noStrike">
+              <a:defRPr sz="900" b="0" i="0" u="none" strike="noStrike" cap="none">
                 <a:solidFill>
                   <a:srgbClr val="757575"/>
                 </a:solidFill>
@@ -4565,7 +4658,7 @@
                 <a:sym typeface="Arial"/>
               </a:defRPr>
             </a:lvl2pPr>
-            <a:lvl3pPr indent="0" lvl="2" marL="0" marR="0" algn="r">
+            <a:lvl3pPr marL="0" marR="0" lvl="2" indent="0" algn="r">
               <a:lnSpc>
                 <a:spcPct val="100000"/>
               </a:lnSpc>
@@ -4581,7 +4674,7 @@
               <a:buSzPts val="900"/>
               <a:buFont typeface="Arial"/>
               <a:buNone/>
-              <a:defRPr b="0" i="0" sz="900" u="none" cap="none" strike="noStrike">
+              <a:defRPr sz="900" b="0" i="0" u="none" strike="noStrike" cap="none">
                 <a:solidFill>
                   <a:srgbClr val="757575"/>
                 </a:solidFill>
@@ -4591,7 +4684,7 @@
                 <a:sym typeface="Arial"/>
               </a:defRPr>
             </a:lvl3pPr>
-            <a:lvl4pPr indent="0" lvl="3" marL="0" marR="0" algn="r">
+            <a:lvl4pPr marL="0" marR="0" lvl="3" indent="0" algn="r">
               <a:lnSpc>
                 <a:spcPct val="100000"/>
               </a:lnSpc>
@@ -4607,7 +4700,7 @@
               <a:buSzPts val="900"/>
               <a:buFont typeface="Arial"/>
               <a:buNone/>
-              <a:defRPr b="0" i="0" sz="900" u="none" cap="none" strike="noStrike">
+              <a:defRPr sz="900" b="0" i="0" u="none" strike="noStrike" cap="none">
                 <a:solidFill>
                   <a:srgbClr val="757575"/>
                 </a:solidFill>
@@ -4617,7 +4710,7 @@
                 <a:sym typeface="Arial"/>
               </a:defRPr>
             </a:lvl4pPr>
-            <a:lvl5pPr indent="0" lvl="4" marL="0" marR="0" algn="r">
+            <a:lvl5pPr marL="0" marR="0" lvl="4" indent="0" algn="r">
               <a:lnSpc>
                 <a:spcPct val="100000"/>
               </a:lnSpc>
@@ -4633,7 +4726,7 @@
               <a:buSzPts val="900"/>
               <a:buFont typeface="Arial"/>
               <a:buNone/>
-              <a:defRPr b="0" i="0" sz="900" u="none" cap="none" strike="noStrike">
+              <a:defRPr sz="900" b="0" i="0" u="none" strike="noStrike" cap="none">
                 <a:solidFill>
                   <a:srgbClr val="757575"/>
                 </a:solidFill>
@@ -4643,7 +4736,7 @@
                 <a:sym typeface="Arial"/>
               </a:defRPr>
             </a:lvl5pPr>
-            <a:lvl6pPr indent="0" lvl="5" marL="0" marR="0" algn="r">
+            <a:lvl6pPr marL="0" marR="0" lvl="5" indent="0" algn="r">
               <a:lnSpc>
                 <a:spcPct val="100000"/>
               </a:lnSpc>
@@ -4659,7 +4752,7 @@
               <a:buSzPts val="900"/>
               <a:buFont typeface="Arial"/>
               <a:buNone/>
-              <a:defRPr b="0" i="0" sz="900" u="none" cap="none" strike="noStrike">
+              <a:defRPr sz="900" b="0" i="0" u="none" strike="noStrike" cap="none">
                 <a:solidFill>
                   <a:srgbClr val="757575"/>
                 </a:solidFill>
@@ -4669,7 +4762,7 @@
                 <a:sym typeface="Arial"/>
               </a:defRPr>
             </a:lvl6pPr>
-            <a:lvl7pPr indent="0" lvl="6" marL="0" marR="0" algn="r">
+            <a:lvl7pPr marL="0" marR="0" lvl="6" indent="0" algn="r">
               <a:lnSpc>
                 <a:spcPct val="100000"/>
               </a:lnSpc>
@@ -4685,7 +4778,7 @@
               <a:buSzPts val="900"/>
               <a:buFont typeface="Arial"/>
               <a:buNone/>
-              <a:defRPr b="0" i="0" sz="900" u="none" cap="none" strike="noStrike">
+              <a:defRPr sz="900" b="0" i="0" u="none" strike="noStrike" cap="none">
                 <a:solidFill>
                   <a:srgbClr val="757575"/>
                 </a:solidFill>
@@ -4695,7 +4788,7 @@
                 <a:sym typeface="Arial"/>
               </a:defRPr>
             </a:lvl7pPr>
-            <a:lvl8pPr indent="0" lvl="7" marL="0" marR="0" algn="r">
+            <a:lvl8pPr marL="0" marR="0" lvl="7" indent="0" algn="r">
               <a:lnSpc>
                 <a:spcPct val="100000"/>
               </a:lnSpc>
@@ -4711,7 +4804,7 @@
               <a:buSzPts val="900"/>
               <a:buFont typeface="Arial"/>
               <a:buNone/>
-              <a:defRPr b="0" i="0" sz="900" u="none" cap="none" strike="noStrike">
+              <a:defRPr sz="900" b="0" i="0" u="none" strike="noStrike" cap="none">
                 <a:solidFill>
                   <a:srgbClr val="757575"/>
                 </a:solidFill>
@@ -4721,7 +4814,7 @@
                 <a:sym typeface="Arial"/>
               </a:defRPr>
             </a:lvl8pPr>
-            <a:lvl9pPr indent="0" lvl="8" marL="0" marR="0" algn="r">
+            <a:lvl9pPr marL="0" marR="0" lvl="8" indent="0" algn="r">
               <a:lnSpc>
                 <a:spcPct val="100000"/>
               </a:lnSpc>
@@ -4737,7 +4830,7 @@
               <a:buSzPts val="900"/>
               <a:buFont typeface="Arial"/>
               <a:buNone/>
-              <a:defRPr b="0" i="0" sz="900" u="none" cap="none" strike="noStrike">
+              <a:defRPr sz="900" b="0" i="0" u="none" strike="noStrike" cap="none">
                 <a:solidFill>
                   <a:srgbClr val="757575"/>
                 </a:solidFill>
@@ -4749,7 +4842,7 @@
             </a:lvl9pPr>
           </a:lstStyle>
           <a:p>
-            <a:pPr indent="0" lvl="0" marL="0" rtl="0" algn="r">
+            <a:pPr marL="0" lvl="0" indent="0" algn="r" rtl="0">
               <a:spcBef>
                 <a:spcPts val="0"/>
               </a:spcBef>
@@ -4775,11 +4868,11 @@
 </file>
 
 <file path=ppt/slideLayouts/slideLayout3.xml><?xml version="1.0" encoding="utf-8"?>
-<p:sldLayout xmlns:a="http://schemas.openxmlformats.org/drawingml/2006/main" xmlns:r="http://schemas.openxmlformats.org/officeDocument/2006/relationships" xmlns:mc="http://schemas.openxmlformats.org/markup-compatibility/2006" xmlns:mv="urn:schemas-microsoft-com:mac:vml" xmlns:p="http://schemas.openxmlformats.org/presentationml/2006/main" xmlns:c="http://schemas.openxmlformats.org/drawingml/2006/chart" xmlns:dgm="http://schemas.openxmlformats.org/drawingml/2006/diagram" xmlns:o="urn:schemas-microsoft-com:office:office" xmlns:v="urn:schemas-microsoft-com:vml" xmlns:pvml="urn:schemas-microsoft-com:office:powerpoint" xmlns:com="http://schemas.openxmlformats.org/drawingml/2006/compatibility" xmlns:p14="http://schemas.microsoft.com/office/powerpoint/2010/main" xmlns:p15="http://schemas.microsoft.com/office/powerpoint/2012/main" xmlns:ahyp="http://schemas.microsoft.com/office/drawing/2018/hyperlinkcolor" matchingName="구역 머리글" type="secHead">
+<p:sldLayout xmlns:a="http://schemas.openxmlformats.org/drawingml/2006/main" xmlns:r="http://schemas.openxmlformats.org/officeDocument/2006/relationships" xmlns:p="http://schemas.openxmlformats.org/presentationml/2006/main" matchingName="구역 머리글" type="secHead">
   <p:cSld name="SECTION_HEADER">
     <p:spTree>
       <p:nvGrpSpPr>
-        <p:cNvPr id="23" name="Shape 23"/>
+        <p:cNvPr id="1" name="Shape 23"/>
         <p:cNvGrpSpPr/>
         <p:nvPr/>
       </p:nvGrpSpPr>
@@ -4794,7 +4887,9 @@
       <p:sp>
         <p:nvSpPr>
           <p:cNvPr id="24" name="Google Shape;24;p5"/>
-          <p:cNvSpPr txBox="1"/>
+          <p:cNvSpPr txBox="1">
+            <a:spLocks noGrp="1"/>
+          </p:cNvSpPr>
           <p:nvPr>
             <p:ph type="title"/>
           </p:nvPr>
@@ -4813,7 +4908,7 @@
           </a:ln>
         </p:spPr>
         <p:txBody>
-          <a:bodyPr anchorCtr="0" anchor="b" bIns="45700" lIns="91425" spcFirstLastPara="1" rIns="91425" wrap="square" tIns="45700">
+          <a:bodyPr spcFirstLastPara="1" wrap="square" lIns="91425" tIns="45700" rIns="91425" bIns="45700" anchor="b" anchorCtr="0">
             <a:normAutofit/>
           </a:bodyPr>
           <a:lstStyle>
@@ -4948,15 +5043,19 @@
               <a:defRPr/>
             </a:lvl9pPr>
           </a:lstStyle>
-          <a:p/>
+          <a:p>
+            <a:endParaRPr/>
+          </a:p>
         </p:txBody>
       </p:sp>
       <p:sp>
         <p:nvSpPr>
           <p:cNvPr id="25" name="Google Shape;25;p5"/>
-          <p:cNvSpPr txBox="1"/>
+          <p:cNvSpPr txBox="1">
+            <a:spLocks noGrp="1"/>
+          </p:cNvSpPr>
           <p:nvPr>
-            <p:ph idx="1" type="body"/>
+            <p:ph type="body" idx="1"/>
           </p:nvPr>
         </p:nvSpPr>
         <p:spPr>
@@ -4973,11 +5072,11 @@
           </a:ln>
         </p:spPr>
         <p:txBody>
-          <a:bodyPr anchorCtr="0" anchor="t" bIns="45700" lIns="91425" spcFirstLastPara="1" rIns="91425" wrap="square" tIns="45700">
+          <a:bodyPr spcFirstLastPara="1" wrap="square" lIns="91425" tIns="45700" rIns="91425" bIns="45700" anchor="t" anchorCtr="0">
             <a:normAutofit/>
           </a:bodyPr>
           <a:lstStyle>
-            <a:lvl1pPr indent="-228600" lvl="0" marL="457200" algn="l">
+            <a:lvl1pPr marL="457200" lvl="0" indent="-228600" algn="l">
               <a:lnSpc>
                 <a:spcPct val="90000"/>
               </a:lnSpc>
@@ -4998,7 +5097,7 @@
                 </a:solidFill>
               </a:defRPr>
             </a:lvl1pPr>
-            <a:lvl2pPr indent="-228600" lvl="1" marL="914400" algn="l">
+            <a:lvl2pPr marL="914400" lvl="1" indent="-228600" algn="l">
               <a:lnSpc>
                 <a:spcPct val="90000"/>
               </a:lnSpc>
@@ -5019,7 +5118,7 @@
                 </a:solidFill>
               </a:defRPr>
             </a:lvl2pPr>
-            <a:lvl3pPr indent="-228600" lvl="2" marL="1371600" algn="l">
+            <a:lvl3pPr marL="1371600" lvl="2" indent="-228600" algn="l">
               <a:lnSpc>
                 <a:spcPct val="90000"/>
               </a:lnSpc>
@@ -5040,7 +5139,7 @@
                 </a:solidFill>
               </a:defRPr>
             </a:lvl3pPr>
-            <a:lvl4pPr indent="-228600" lvl="3" marL="1828800" algn="l">
+            <a:lvl4pPr marL="1828800" lvl="3" indent="-228600" algn="l">
               <a:lnSpc>
                 <a:spcPct val="90000"/>
               </a:lnSpc>
@@ -5061,7 +5160,7 @@
                 </a:solidFill>
               </a:defRPr>
             </a:lvl4pPr>
-            <a:lvl5pPr indent="-228600" lvl="4" marL="2286000" algn="l">
+            <a:lvl5pPr marL="2286000" lvl="4" indent="-228600" algn="l">
               <a:lnSpc>
                 <a:spcPct val="90000"/>
               </a:lnSpc>
@@ -5082,7 +5181,7 @@
                 </a:solidFill>
               </a:defRPr>
             </a:lvl5pPr>
-            <a:lvl6pPr indent="-228600" lvl="5" marL="2743200" algn="l">
+            <a:lvl6pPr marL="2743200" lvl="5" indent="-228600" algn="l">
               <a:lnSpc>
                 <a:spcPct val="90000"/>
               </a:lnSpc>
@@ -5103,7 +5202,7 @@
                 </a:solidFill>
               </a:defRPr>
             </a:lvl6pPr>
-            <a:lvl7pPr indent="-228600" lvl="6" marL="3200400" algn="l">
+            <a:lvl7pPr marL="3200400" lvl="6" indent="-228600" algn="l">
               <a:lnSpc>
                 <a:spcPct val="90000"/>
               </a:lnSpc>
@@ -5124,7 +5223,7 @@
                 </a:solidFill>
               </a:defRPr>
             </a:lvl7pPr>
-            <a:lvl8pPr indent="-228600" lvl="7" marL="3657600" algn="l">
+            <a:lvl8pPr marL="3657600" lvl="7" indent="-228600" algn="l">
               <a:lnSpc>
                 <a:spcPct val="90000"/>
               </a:lnSpc>
@@ -5145,7 +5244,7 @@
                 </a:solidFill>
               </a:defRPr>
             </a:lvl8pPr>
-            <a:lvl9pPr indent="-228600" lvl="8" marL="4114800" algn="l">
+            <a:lvl9pPr marL="4114800" lvl="8" indent="-228600" algn="l">
               <a:lnSpc>
                 <a:spcPct val="90000"/>
               </a:lnSpc>
@@ -5167,15 +5266,19 @@
               </a:defRPr>
             </a:lvl9pPr>
           </a:lstStyle>
-          <a:p/>
+          <a:p>
+            <a:endParaRPr/>
+          </a:p>
         </p:txBody>
       </p:sp>
       <p:sp>
         <p:nvSpPr>
           <p:cNvPr id="26" name="Google Shape;26;p5"/>
-          <p:cNvSpPr txBox="1"/>
+          <p:cNvSpPr txBox="1">
+            <a:spLocks noGrp="1"/>
+          </p:cNvSpPr>
           <p:nvPr>
-            <p:ph idx="10" type="dt"/>
+            <p:ph type="dt" idx="10"/>
           </p:nvPr>
         </p:nvSpPr>
         <p:spPr>
@@ -5192,7 +5295,7 @@
           </a:ln>
         </p:spPr>
         <p:txBody>
-          <a:bodyPr anchorCtr="0" anchor="ctr" bIns="45700" lIns="91425" spcFirstLastPara="1" rIns="91425" wrap="square" tIns="45700">
+          <a:bodyPr spcFirstLastPara="1" wrap="square" lIns="91425" tIns="45700" rIns="91425" bIns="45700" anchor="ctr" anchorCtr="0">
             <a:noAutofit/>
           </a:bodyPr>
           <a:lstStyle>
@@ -5323,15 +5426,19 @@
               <a:defRPr/>
             </a:lvl9pPr>
           </a:lstStyle>
-          <a:p/>
+          <a:p>
+            <a:endParaRPr/>
+          </a:p>
         </p:txBody>
       </p:sp>
       <p:sp>
         <p:nvSpPr>
           <p:cNvPr id="27" name="Google Shape;27;p5"/>
-          <p:cNvSpPr txBox="1"/>
+          <p:cNvSpPr txBox="1">
+            <a:spLocks noGrp="1"/>
+          </p:cNvSpPr>
           <p:nvPr>
-            <p:ph idx="11" type="ftr"/>
+            <p:ph type="ftr" idx="11"/>
           </p:nvPr>
         </p:nvSpPr>
         <p:spPr>
@@ -5348,7 +5455,7 @@
           </a:ln>
         </p:spPr>
         <p:txBody>
-          <a:bodyPr anchorCtr="0" anchor="ctr" bIns="45700" lIns="91425" spcFirstLastPara="1" rIns="91425" wrap="square" tIns="45700">
+          <a:bodyPr spcFirstLastPara="1" wrap="square" lIns="91425" tIns="45700" rIns="91425" bIns="45700" anchor="ctr" anchorCtr="0">
             <a:noAutofit/>
           </a:bodyPr>
           <a:lstStyle>
@@ -5479,15 +5586,19 @@
               <a:defRPr/>
             </a:lvl9pPr>
           </a:lstStyle>
-          <a:p/>
+          <a:p>
+            <a:endParaRPr/>
+          </a:p>
         </p:txBody>
       </p:sp>
       <p:sp>
         <p:nvSpPr>
           <p:cNvPr id="28" name="Google Shape;28;p5"/>
-          <p:cNvSpPr txBox="1"/>
+          <p:cNvSpPr txBox="1">
+            <a:spLocks noGrp="1"/>
+          </p:cNvSpPr>
           <p:nvPr>
-            <p:ph idx="12" type="sldNum"/>
+            <p:ph type="sldNum" idx="12"/>
           </p:nvPr>
         </p:nvSpPr>
         <p:spPr>
@@ -5504,11 +5615,11 @@
           </a:ln>
         </p:spPr>
         <p:txBody>
-          <a:bodyPr anchorCtr="0" anchor="ctr" bIns="45700" lIns="91425" spcFirstLastPara="1" rIns="91425" wrap="square" tIns="45700">
+          <a:bodyPr spcFirstLastPara="1" wrap="square" lIns="91425" tIns="45700" rIns="91425" bIns="45700" anchor="ctr" anchorCtr="0">
             <a:noAutofit/>
           </a:bodyPr>
           <a:lstStyle>
-            <a:lvl1pPr indent="0" lvl="0" marL="0" marR="0" algn="r">
+            <a:lvl1pPr marL="0" marR="0" lvl="0" indent="0" algn="r">
               <a:lnSpc>
                 <a:spcPct val="100000"/>
               </a:lnSpc>
@@ -5524,7 +5635,7 @@
               <a:buSzPts val="900"/>
               <a:buFont typeface="Arial"/>
               <a:buNone/>
-              <a:defRPr b="0" i="0" sz="900" u="none" cap="none" strike="noStrike">
+              <a:defRPr sz="900" b="0" i="0" u="none" strike="noStrike" cap="none">
                 <a:solidFill>
                   <a:srgbClr val="757575"/>
                 </a:solidFill>
@@ -5534,7 +5645,7 @@
                 <a:sym typeface="Arial"/>
               </a:defRPr>
             </a:lvl1pPr>
-            <a:lvl2pPr indent="0" lvl="1" marL="0" marR="0" algn="r">
+            <a:lvl2pPr marL="0" marR="0" lvl="1" indent="0" algn="r">
               <a:lnSpc>
                 <a:spcPct val="100000"/>
               </a:lnSpc>
@@ -5550,7 +5661,7 @@
               <a:buSzPts val="900"/>
               <a:buFont typeface="Arial"/>
               <a:buNone/>
-              <a:defRPr b="0" i="0" sz="900" u="none" cap="none" strike="noStrike">
+              <a:defRPr sz="900" b="0" i="0" u="none" strike="noStrike" cap="none">
                 <a:solidFill>
                   <a:srgbClr val="757575"/>
                 </a:solidFill>
@@ -5560,7 +5671,7 @@
                 <a:sym typeface="Arial"/>
               </a:defRPr>
             </a:lvl2pPr>
-            <a:lvl3pPr indent="0" lvl="2" marL="0" marR="0" algn="r">
+            <a:lvl3pPr marL="0" marR="0" lvl="2" indent="0" algn="r">
               <a:lnSpc>
                 <a:spcPct val="100000"/>
               </a:lnSpc>
@@ -5576,7 +5687,7 @@
               <a:buSzPts val="900"/>
               <a:buFont typeface="Arial"/>
               <a:buNone/>
-              <a:defRPr b="0" i="0" sz="900" u="none" cap="none" strike="noStrike">
+              <a:defRPr sz="900" b="0" i="0" u="none" strike="noStrike" cap="none">
                 <a:solidFill>
                   <a:srgbClr val="757575"/>
                 </a:solidFill>
@@ -5586,7 +5697,7 @@
                 <a:sym typeface="Arial"/>
               </a:defRPr>
             </a:lvl3pPr>
-            <a:lvl4pPr indent="0" lvl="3" marL="0" marR="0" algn="r">
+            <a:lvl4pPr marL="0" marR="0" lvl="3" indent="0" algn="r">
               <a:lnSpc>
                 <a:spcPct val="100000"/>
               </a:lnSpc>
@@ -5602,7 +5713,7 @@
               <a:buSzPts val="900"/>
               <a:buFont typeface="Arial"/>
               <a:buNone/>
-              <a:defRPr b="0" i="0" sz="900" u="none" cap="none" strike="noStrike">
+              <a:defRPr sz="900" b="0" i="0" u="none" strike="noStrike" cap="none">
                 <a:solidFill>
                   <a:srgbClr val="757575"/>
                 </a:solidFill>
@@ -5612,7 +5723,7 @@
                 <a:sym typeface="Arial"/>
               </a:defRPr>
             </a:lvl4pPr>
-            <a:lvl5pPr indent="0" lvl="4" marL="0" marR="0" algn="r">
+            <a:lvl5pPr marL="0" marR="0" lvl="4" indent="0" algn="r">
               <a:lnSpc>
                 <a:spcPct val="100000"/>
               </a:lnSpc>
@@ -5628,7 +5739,7 @@
               <a:buSzPts val="900"/>
               <a:buFont typeface="Arial"/>
               <a:buNone/>
-              <a:defRPr b="0" i="0" sz="900" u="none" cap="none" strike="noStrike">
+              <a:defRPr sz="900" b="0" i="0" u="none" strike="noStrike" cap="none">
                 <a:solidFill>
                   <a:srgbClr val="757575"/>
                 </a:solidFill>
@@ -5638,7 +5749,7 @@
                 <a:sym typeface="Arial"/>
               </a:defRPr>
             </a:lvl5pPr>
-            <a:lvl6pPr indent="0" lvl="5" marL="0" marR="0" algn="r">
+            <a:lvl6pPr marL="0" marR="0" lvl="5" indent="0" algn="r">
               <a:lnSpc>
                 <a:spcPct val="100000"/>
               </a:lnSpc>
@@ -5654,7 +5765,7 @@
               <a:buSzPts val="900"/>
               <a:buFont typeface="Arial"/>
               <a:buNone/>
-              <a:defRPr b="0" i="0" sz="900" u="none" cap="none" strike="noStrike">
+              <a:defRPr sz="900" b="0" i="0" u="none" strike="noStrike" cap="none">
                 <a:solidFill>
                   <a:srgbClr val="757575"/>
                 </a:solidFill>
@@ -5664,7 +5775,7 @@
                 <a:sym typeface="Arial"/>
               </a:defRPr>
             </a:lvl6pPr>
-            <a:lvl7pPr indent="0" lvl="6" marL="0" marR="0" algn="r">
+            <a:lvl7pPr marL="0" marR="0" lvl="6" indent="0" algn="r">
               <a:lnSpc>
                 <a:spcPct val="100000"/>
               </a:lnSpc>
@@ -5680,7 +5791,7 @@
               <a:buSzPts val="900"/>
               <a:buFont typeface="Arial"/>
               <a:buNone/>
-              <a:defRPr b="0" i="0" sz="900" u="none" cap="none" strike="noStrike">
+              <a:defRPr sz="900" b="0" i="0" u="none" strike="noStrike" cap="none">
                 <a:solidFill>
                   <a:srgbClr val="757575"/>
                 </a:solidFill>
@@ -5690,7 +5801,7 @@
                 <a:sym typeface="Arial"/>
               </a:defRPr>
             </a:lvl7pPr>
-            <a:lvl8pPr indent="0" lvl="7" marL="0" marR="0" algn="r">
+            <a:lvl8pPr marL="0" marR="0" lvl="7" indent="0" algn="r">
               <a:lnSpc>
                 <a:spcPct val="100000"/>
               </a:lnSpc>
@@ -5706,7 +5817,7 @@
               <a:buSzPts val="900"/>
               <a:buFont typeface="Arial"/>
               <a:buNone/>
-              <a:defRPr b="0" i="0" sz="900" u="none" cap="none" strike="noStrike">
+              <a:defRPr sz="900" b="0" i="0" u="none" strike="noStrike" cap="none">
                 <a:solidFill>
                   <a:srgbClr val="757575"/>
                 </a:solidFill>
@@ -5716,7 +5827,7 @@
                 <a:sym typeface="Arial"/>
               </a:defRPr>
             </a:lvl8pPr>
-            <a:lvl9pPr indent="0" lvl="8" marL="0" marR="0" algn="r">
+            <a:lvl9pPr marL="0" marR="0" lvl="8" indent="0" algn="r">
               <a:lnSpc>
                 <a:spcPct val="100000"/>
               </a:lnSpc>
@@ -5732,7 +5843,7 @@
               <a:buSzPts val="900"/>
               <a:buFont typeface="Arial"/>
               <a:buNone/>
-              <a:defRPr b="0" i="0" sz="900" u="none" cap="none" strike="noStrike">
+              <a:defRPr sz="900" b="0" i="0" u="none" strike="noStrike" cap="none">
                 <a:solidFill>
                   <a:srgbClr val="757575"/>
                 </a:solidFill>
@@ -5744,7 +5855,7 @@
             </a:lvl9pPr>
           </a:lstStyle>
           <a:p>
-            <a:pPr indent="0" lvl="0" marL="0" rtl="0" algn="r">
+            <a:pPr marL="0" lvl="0" indent="0" algn="r" rtl="0">
               <a:spcBef>
                 <a:spcPts val="0"/>
               </a:spcBef>
@@ -5770,11 +5881,11 @@
 </file>
 
 <file path=ppt/slideLayouts/slideLayout4.xml><?xml version="1.0" encoding="utf-8"?>
-<p:sldLayout xmlns:a="http://schemas.openxmlformats.org/drawingml/2006/main" xmlns:r="http://schemas.openxmlformats.org/officeDocument/2006/relationships" xmlns:mc="http://schemas.openxmlformats.org/markup-compatibility/2006" xmlns:mv="urn:schemas-microsoft-com:mac:vml" xmlns:p="http://schemas.openxmlformats.org/presentationml/2006/main" xmlns:c="http://schemas.openxmlformats.org/drawingml/2006/chart" xmlns:dgm="http://schemas.openxmlformats.org/drawingml/2006/diagram" xmlns:o="urn:schemas-microsoft-com:office:office" xmlns:v="urn:schemas-microsoft-com:vml" xmlns:pvml="urn:schemas-microsoft-com:office:powerpoint" xmlns:com="http://schemas.openxmlformats.org/drawingml/2006/compatibility" xmlns:p14="http://schemas.microsoft.com/office/powerpoint/2010/main" xmlns:p15="http://schemas.microsoft.com/office/powerpoint/2012/main" xmlns:ahyp="http://schemas.microsoft.com/office/drawing/2018/hyperlinkcolor" matchingName="콘텐츠 2개" type="twoObj">
+<p:sldLayout xmlns:a="http://schemas.openxmlformats.org/drawingml/2006/main" xmlns:r="http://schemas.openxmlformats.org/officeDocument/2006/relationships" xmlns:p="http://schemas.openxmlformats.org/presentationml/2006/main" matchingName="콘텐츠 2개" type="twoObj">
   <p:cSld name="TWO_OBJECTS">
     <p:spTree>
       <p:nvGrpSpPr>
-        <p:cNvPr id="29" name="Shape 29"/>
+        <p:cNvPr id="1" name="Shape 29"/>
         <p:cNvGrpSpPr/>
         <p:nvPr/>
       </p:nvGrpSpPr>
@@ -5789,7 +5900,9 @@
       <p:sp>
         <p:nvSpPr>
           <p:cNvPr id="30" name="Google Shape;30;p6"/>
-          <p:cNvSpPr txBox="1"/>
+          <p:cNvSpPr txBox="1">
+            <a:spLocks noGrp="1"/>
+          </p:cNvSpPr>
           <p:nvPr>
             <p:ph type="title"/>
           </p:nvPr>
@@ -5808,7 +5921,7 @@
           </a:ln>
         </p:spPr>
         <p:txBody>
-          <a:bodyPr anchorCtr="0" anchor="ctr" bIns="45700" lIns="91425" spcFirstLastPara="1" rIns="91425" wrap="square" tIns="45700">
+          <a:bodyPr spcFirstLastPara="1" wrap="square" lIns="91425" tIns="45700" rIns="91425" bIns="45700" anchor="ctr" anchorCtr="0">
             <a:normAutofit/>
           </a:bodyPr>
           <a:lstStyle>
@@ -5942,15 +6055,19 @@
               <a:defRPr/>
             </a:lvl9pPr>
           </a:lstStyle>
-          <a:p/>
+          <a:p>
+            <a:endParaRPr/>
+          </a:p>
         </p:txBody>
       </p:sp>
       <p:sp>
         <p:nvSpPr>
           <p:cNvPr id="31" name="Google Shape;31;p6"/>
-          <p:cNvSpPr txBox="1"/>
+          <p:cNvSpPr txBox="1">
+            <a:spLocks noGrp="1"/>
+          </p:cNvSpPr>
           <p:nvPr>
-            <p:ph idx="1" type="body"/>
+            <p:ph type="body" idx="1"/>
           </p:nvPr>
         </p:nvSpPr>
         <p:spPr>
@@ -5967,11 +6084,11 @@
           </a:ln>
         </p:spPr>
         <p:txBody>
-          <a:bodyPr anchorCtr="0" anchor="t" bIns="45700" lIns="91425" spcFirstLastPara="1" rIns="91425" wrap="square" tIns="45700">
+          <a:bodyPr spcFirstLastPara="1" wrap="square" lIns="91425" tIns="45700" rIns="91425" bIns="45700" anchor="t" anchorCtr="0">
             <a:normAutofit/>
           </a:bodyPr>
           <a:lstStyle>
-            <a:lvl1pPr indent="-342900" lvl="0" marL="457200" algn="l">
+            <a:lvl1pPr marL="457200" lvl="0" indent="-342900" algn="l">
               <a:lnSpc>
                 <a:spcPct val="90000"/>
               </a:lnSpc>
@@ -5988,7 +6105,7 @@
               <a:buChar char="•"/>
               <a:defRPr/>
             </a:lvl1pPr>
-            <a:lvl2pPr indent="-342900" lvl="1" marL="914400" algn="l">
+            <a:lvl2pPr marL="914400" lvl="1" indent="-342900" algn="l">
               <a:lnSpc>
                 <a:spcPct val="90000"/>
               </a:lnSpc>
@@ -6005,7 +6122,7 @@
               <a:buChar char="•"/>
               <a:defRPr/>
             </a:lvl2pPr>
-            <a:lvl3pPr indent="-342900" lvl="2" marL="1371600" algn="l">
+            <a:lvl3pPr marL="1371600" lvl="2" indent="-342900" algn="l">
               <a:lnSpc>
                 <a:spcPct val="90000"/>
               </a:lnSpc>
@@ -6022,7 +6139,7 @@
               <a:buChar char="•"/>
               <a:defRPr/>
             </a:lvl3pPr>
-            <a:lvl4pPr indent="-342900" lvl="3" marL="1828800" algn="l">
+            <a:lvl4pPr marL="1828800" lvl="3" indent="-342900" algn="l">
               <a:lnSpc>
                 <a:spcPct val="90000"/>
               </a:lnSpc>
@@ -6039,7 +6156,7 @@
               <a:buChar char="•"/>
               <a:defRPr/>
             </a:lvl4pPr>
-            <a:lvl5pPr indent="-342900" lvl="4" marL="2286000" algn="l">
+            <a:lvl5pPr marL="2286000" lvl="4" indent="-342900" algn="l">
               <a:lnSpc>
                 <a:spcPct val="90000"/>
               </a:lnSpc>
@@ -6056,7 +6173,7 @@
               <a:buChar char="•"/>
               <a:defRPr/>
             </a:lvl5pPr>
-            <a:lvl6pPr indent="-342900" lvl="5" marL="2743200" algn="l">
+            <a:lvl6pPr marL="2743200" lvl="5" indent="-342900" algn="l">
               <a:lnSpc>
                 <a:spcPct val="90000"/>
               </a:lnSpc>
@@ -6073,7 +6190,7 @@
               <a:buChar char="•"/>
               <a:defRPr/>
             </a:lvl6pPr>
-            <a:lvl7pPr indent="-342900" lvl="6" marL="3200400" algn="l">
+            <a:lvl7pPr marL="3200400" lvl="6" indent="-342900" algn="l">
               <a:lnSpc>
                 <a:spcPct val="90000"/>
               </a:lnSpc>
@@ -6090,7 +6207,7 @@
               <a:buChar char="•"/>
               <a:defRPr/>
             </a:lvl7pPr>
-            <a:lvl8pPr indent="-342900" lvl="7" marL="3657600" algn="l">
+            <a:lvl8pPr marL="3657600" lvl="7" indent="-342900" algn="l">
               <a:lnSpc>
                 <a:spcPct val="90000"/>
               </a:lnSpc>
@@ -6107,7 +6224,7 @@
               <a:buChar char="•"/>
               <a:defRPr/>
             </a:lvl8pPr>
-            <a:lvl9pPr indent="-342900" lvl="8" marL="4114800" algn="l">
+            <a:lvl9pPr marL="4114800" lvl="8" indent="-342900" algn="l">
               <a:lnSpc>
                 <a:spcPct val="90000"/>
               </a:lnSpc>
@@ -6125,15 +6242,19 @@
               <a:defRPr/>
             </a:lvl9pPr>
           </a:lstStyle>
-          <a:p/>
+          <a:p>
+            <a:endParaRPr/>
+          </a:p>
         </p:txBody>
       </p:sp>
       <p:sp>
         <p:nvSpPr>
           <p:cNvPr id="32" name="Google Shape;32;p6"/>
-          <p:cNvSpPr txBox="1"/>
+          <p:cNvSpPr txBox="1">
+            <a:spLocks noGrp="1"/>
+          </p:cNvSpPr>
           <p:nvPr>
-            <p:ph idx="2" type="body"/>
+            <p:ph type="body" idx="2"/>
           </p:nvPr>
         </p:nvSpPr>
         <p:spPr>
@@ -6150,11 +6271,11 @@
           </a:ln>
         </p:spPr>
         <p:txBody>
-          <a:bodyPr anchorCtr="0" anchor="t" bIns="45700" lIns="91425" spcFirstLastPara="1" rIns="91425" wrap="square" tIns="45700">
+          <a:bodyPr spcFirstLastPara="1" wrap="square" lIns="91425" tIns="45700" rIns="91425" bIns="45700" anchor="t" anchorCtr="0">
             <a:normAutofit/>
           </a:bodyPr>
           <a:lstStyle>
-            <a:lvl1pPr indent="-342900" lvl="0" marL="457200" algn="l">
+            <a:lvl1pPr marL="457200" lvl="0" indent="-342900" algn="l">
               <a:lnSpc>
                 <a:spcPct val="90000"/>
               </a:lnSpc>
@@ -6171,7 +6292,7 @@
               <a:buChar char="•"/>
               <a:defRPr/>
             </a:lvl1pPr>
-            <a:lvl2pPr indent="-342900" lvl="1" marL="914400" algn="l">
+            <a:lvl2pPr marL="914400" lvl="1" indent="-342900" algn="l">
               <a:lnSpc>
                 <a:spcPct val="90000"/>
               </a:lnSpc>
@@ -6188,7 +6309,7 @@
               <a:buChar char="•"/>
               <a:defRPr/>
             </a:lvl2pPr>
-            <a:lvl3pPr indent="-342900" lvl="2" marL="1371600" algn="l">
+            <a:lvl3pPr marL="1371600" lvl="2" indent="-342900" algn="l">
               <a:lnSpc>
                 <a:spcPct val="90000"/>
               </a:lnSpc>
@@ -6205,7 +6326,7 @@
               <a:buChar char="•"/>
               <a:defRPr/>
             </a:lvl3pPr>
-            <a:lvl4pPr indent="-342900" lvl="3" marL="1828800" algn="l">
+            <a:lvl4pPr marL="1828800" lvl="3" indent="-342900" algn="l">
               <a:lnSpc>
                 <a:spcPct val="90000"/>
               </a:lnSpc>
@@ -6222,7 +6343,7 @@
               <a:buChar char="•"/>
               <a:defRPr/>
             </a:lvl4pPr>
-            <a:lvl5pPr indent="-342900" lvl="4" marL="2286000" algn="l">
+            <a:lvl5pPr marL="2286000" lvl="4" indent="-342900" algn="l">
               <a:lnSpc>
                 <a:spcPct val="90000"/>
               </a:lnSpc>
@@ -6239,7 +6360,7 @@
               <a:buChar char="•"/>
               <a:defRPr/>
             </a:lvl5pPr>
-            <a:lvl6pPr indent="-342900" lvl="5" marL="2743200" algn="l">
+            <a:lvl6pPr marL="2743200" lvl="5" indent="-342900" algn="l">
               <a:lnSpc>
                 <a:spcPct val="90000"/>
               </a:lnSpc>
@@ -6256,7 +6377,7 @@
               <a:buChar char="•"/>
               <a:defRPr/>
             </a:lvl6pPr>
-            <a:lvl7pPr indent="-342900" lvl="6" marL="3200400" algn="l">
+            <a:lvl7pPr marL="3200400" lvl="6" indent="-342900" algn="l">
               <a:lnSpc>
                 <a:spcPct val="90000"/>
               </a:lnSpc>
@@ -6273,7 +6394,7 @@
               <a:buChar char="•"/>
               <a:defRPr/>
             </a:lvl7pPr>
-            <a:lvl8pPr indent="-342900" lvl="7" marL="3657600" algn="l">
+            <a:lvl8pPr marL="3657600" lvl="7" indent="-342900" algn="l">
               <a:lnSpc>
                 <a:spcPct val="90000"/>
               </a:lnSpc>
@@ -6290,7 +6411,7 @@
               <a:buChar char="•"/>
               <a:defRPr/>
             </a:lvl8pPr>
-            <a:lvl9pPr indent="-342900" lvl="8" marL="4114800" algn="l">
+            <a:lvl9pPr marL="4114800" lvl="8" indent="-342900" algn="l">
               <a:lnSpc>
                 <a:spcPct val="90000"/>
               </a:lnSpc>
@@ -6308,15 +6429,19 @@
               <a:defRPr/>
             </a:lvl9pPr>
           </a:lstStyle>
-          <a:p/>
+          <a:p>
+            <a:endParaRPr/>
+          </a:p>
         </p:txBody>
       </p:sp>
       <p:sp>
         <p:nvSpPr>
           <p:cNvPr id="33" name="Google Shape;33;p6"/>
-          <p:cNvSpPr txBox="1"/>
+          <p:cNvSpPr txBox="1">
+            <a:spLocks noGrp="1"/>
+          </p:cNvSpPr>
           <p:nvPr>
-            <p:ph idx="10" type="dt"/>
+            <p:ph type="dt" idx="10"/>
           </p:nvPr>
         </p:nvSpPr>
         <p:spPr>
@@ -6333,7 +6458,7 @@
           </a:ln>
         </p:spPr>
         <p:txBody>
-          <a:bodyPr anchorCtr="0" anchor="ctr" bIns="45700" lIns="91425" spcFirstLastPara="1" rIns="91425" wrap="square" tIns="45700">
+          <a:bodyPr spcFirstLastPara="1" wrap="square" lIns="91425" tIns="45700" rIns="91425" bIns="45700" anchor="ctr" anchorCtr="0">
             <a:noAutofit/>
           </a:bodyPr>
           <a:lstStyle>
@@ -6464,15 +6589,19 @@
               <a:defRPr/>
             </a:lvl9pPr>
           </a:lstStyle>
-          <a:p/>
+          <a:p>
+            <a:endParaRPr/>
+          </a:p>
         </p:txBody>
       </p:sp>
       <p:sp>
         <p:nvSpPr>
           <p:cNvPr id="34" name="Google Shape;34;p6"/>
-          <p:cNvSpPr txBox="1"/>
+          <p:cNvSpPr txBox="1">
+            <a:spLocks noGrp="1"/>
+          </p:cNvSpPr>
           <p:nvPr>
-            <p:ph idx="11" type="ftr"/>
+            <p:ph type="ftr" idx="11"/>
           </p:nvPr>
         </p:nvSpPr>
         <p:spPr>
@@ -6489,7 +6618,7 @@
           </a:ln>
         </p:spPr>
         <p:txBody>
-          <a:bodyPr anchorCtr="0" anchor="ctr" bIns="45700" lIns="91425" spcFirstLastPara="1" rIns="91425" wrap="square" tIns="45700">
+          <a:bodyPr spcFirstLastPara="1" wrap="square" lIns="91425" tIns="45700" rIns="91425" bIns="45700" anchor="ctr" anchorCtr="0">
             <a:noAutofit/>
           </a:bodyPr>
           <a:lstStyle>
@@ -6620,15 +6749,19 @@
               <a:defRPr/>
             </a:lvl9pPr>
           </a:lstStyle>
-          <a:p/>
+          <a:p>
+            <a:endParaRPr/>
+          </a:p>
         </p:txBody>
       </p:sp>
       <p:sp>
         <p:nvSpPr>
           <p:cNvPr id="35" name="Google Shape;35;p6"/>
-          <p:cNvSpPr txBox="1"/>
+          <p:cNvSpPr txBox="1">
+            <a:spLocks noGrp="1"/>
+          </p:cNvSpPr>
           <p:nvPr>
-            <p:ph idx="12" type="sldNum"/>
+            <p:ph type="sldNum" idx="12"/>
           </p:nvPr>
         </p:nvSpPr>
         <p:spPr>
@@ -6645,11 +6778,11 @@
           </a:ln>
         </p:spPr>
         <p:txBody>
-          <a:bodyPr anchorCtr="0" anchor="ctr" bIns="45700" lIns="91425" spcFirstLastPara="1" rIns="91425" wrap="square" tIns="45700">
+          <a:bodyPr spcFirstLastPara="1" wrap="square" lIns="91425" tIns="45700" rIns="91425" bIns="45700" anchor="ctr" anchorCtr="0">
             <a:noAutofit/>
           </a:bodyPr>
           <a:lstStyle>
-            <a:lvl1pPr indent="0" lvl="0" marL="0" marR="0" algn="r">
+            <a:lvl1pPr marL="0" marR="0" lvl="0" indent="0" algn="r">
               <a:lnSpc>
                 <a:spcPct val="100000"/>
               </a:lnSpc>
@@ -6665,7 +6798,7 @@
               <a:buSzPts val="900"/>
               <a:buFont typeface="Arial"/>
               <a:buNone/>
-              <a:defRPr b="0" i="0" sz="900" u="none" cap="none" strike="noStrike">
+              <a:defRPr sz="900" b="0" i="0" u="none" strike="noStrike" cap="none">
                 <a:solidFill>
                   <a:srgbClr val="757575"/>
                 </a:solidFill>
@@ -6675,7 +6808,7 @@
                 <a:sym typeface="Arial"/>
               </a:defRPr>
             </a:lvl1pPr>
-            <a:lvl2pPr indent="0" lvl="1" marL="0" marR="0" algn="r">
+            <a:lvl2pPr marL="0" marR="0" lvl="1" indent="0" algn="r">
               <a:lnSpc>
                 <a:spcPct val="100000"/>
               </a:lnSpc>
@@ -6691,7 +6824,7 @@
               <a:buSzPts val="900"/>
               <a:buFont typeface="Arial"/>
               <a:buNone/>
-              <a:defRPr b="0" i="0" sz="900" u="none" cap="none" strike="noStrike">
+              <a:defRPr sz="900" b="0" i="0" u="none" strike="noStrike" cap="none">
                 <a:solidFill>
                   <a:srgbClr val="757575"/>
                 </a:solidFill>
@@ -6701,7 +6834,7 @@
                 <a:sym typeface="Arial"/>
               </a:defRPr>
             </a:lvl2pPr>
-            <a:lvl3pPr indent="0" lvl="2" marL="0" marR="0" algn="r">
+            <a:lvl3pPr marL="0" marR="0" lvl="2" indent="0" algn="r">
               <a:lnSpc>
                 <a:spcPct val="100000"/>
               </a:lnSpc>
@@ -6717,7 +6850,7 @@
               <a:buSzPts val="900"/>
               <a:buFont typeface="Arial"/>
               <a:buNone/>
-              <a:defRPr b="0" i="0" sz="900" u="none" cap="none" strike="noStrike">
+              <a:defRPr sz="900" b="0" i="0" u="none" strike="noStrike" cap="none">
                 <a:solidFill>
                   <a:srgbClr val="757575"/>
                 </a:solidFill>
@@ -6727,7 +6860,7 @@
                 <a:sym typeface="Arial"/>
               </a:defRPr>
             </a:lvl3pPr>
-            <a:lvl4pPr indent="0" lvl="3" marL="0" marR="0" algn="r">
+            <a:lvl4pPr marL="0" marR="0" lvl="3" indent="0" algn="r">
               <a:lnSpc>
                 <a:spcPct val="100000"/>
               </a:lnSpc>
@@ -6743,7 +6876,7 @@
               <a:buSzPts val="900"/>
               <a:buFont typeface="Arial"/>
               <a:buNone/>
-              <a:defRPr b="0" i="0" sz="900" u="none" cap="none" strike="noStrike">
+              <a:defRPr sz="900" b="0" i="0" u="none" strike="noStrike" cap="none">
                 <a:solidFill>
                   <a:srgbClr val="757575"/>
                 </a:solidFill>
@@ -6753,7 +6886,7 @@
                 <a:sym typeface="Arial"/>
               </a:defRPr>
             </a:lvl4pPr>
-            <a:lvl5pPr indent="0" lvl="4" marL="0" marR="0" algn="r">
+            <a:lvl5pPr marL="0" marR="0" lvl="4" indent="0" algn="r">
               <a:lnSpc>
                 <a:spcPct val="100000"/>
               </a:lnSpc>
@@ -6769,7 +6902,7 @@
               <a:buSzPts val="900"/>
               <a:buFont typeface="Arial"/>
               <a:buNone/>
-              <a:defRPr b="0" i="0" sz="900" u="none" cap="none" strike="noStrike">
+              <a:defRPr sz="900" b="0" i="0" u="none" strike="noStrike" cap="none">
                 <a:solidFill>
                   <a:srgbClr val="757575"/>
                 </a:solidFill>
@@ -6779,7 +6912,7 @@
                 <a:sym typeface="Arial"/>
               </a:defRPr>
             </a:lvl5pPr>
-            <a:lvl6pPr indent="0" lvl="5" marL="0" marR="0" algn="r">
+            <a:lvl6pPr marL="0" marR="0" lvl="5" indent="0" algn="r">
               <a:lnSpc>
                 <a:spcPct val="100000"/>
               </a:lnSpc>
@@ -6795,7 +6928,7 @@
               <a:buSzPts val="900"/>
               <a:buFont typeface="Arial"/>
               <a:buNone/>
-              <a:defRPr b="0" i="0" sz="900" u="none" cap="none" strike="noStrike">
+              <a:defRPr sz="900" b="0" i="0" u="none" strike="noStrike" cap="none">
                 <a:solidFill>
                   <a:srgbClr val="757575"/>
                 </a:solidFill>
@@ -6805,7 +6938,7 @@
                 <a:sym typeface="Arial"/>
               </a:defRPr>
             </a:lvl6pPr>
-            <a:lvl7pPr indent="0" lvl="6" marL="0" marR="0" algn="r">
+            <a:lvl7pPr marL="0" marR="0" lvl="6" indent="0" algn="r">
               <a:lnSpc>
                 <a:spcPct val="100000"/>
               </a:lnSpc>
@@ -6821,7 +6954,7 @@
               <a:buSzPts val="900"/>
               <a:buFont typeface="Arial"/>
               <a:buNone/>
-              <a:defRPr b="0" i="0" sz="900" u="none" cap="none" strike="noStrike">
+              <a:defRPr sz="900" b="0" i="0" u="none" strike="noStrike" cap="none">
                 <a:solidFill>
                   <a:srgbClr val="757575"/>
                 </a:solidFill>
@@ -6831,7 +6964,7 @@
                 <a:sym typeface="Arial"/>
               </a:defRPr>
             </a:lvl7pPr>
-            <a:lvl8pPr indent="0" lvl="7" marL="0" marR="0" algn="r">
+            <a:lvl8pPr marL="0" marR="0" lvl="7" indent="0" algn="r">
               <a:lnSpc>
                 <a:spcPct val="100000"/>
               </a:lnSpc>
@@ -6847,7 +6980,7 @@
               <a:buSzPts val="900"/>
               <a:buFont typeface="Arial"/>
               <a:buNone/>
-              <a:defRPr b="0" i="0" sz="900" u="none" cap="none" strike="noStrike">
+              <a:defRPr sz="900" b="0" i="0" u="none" strike="noStrike" cap="none">
                 <a:solidFill>
                   <a:srgbClr val="757575"/>
                 </a:solidFill>
@@ -6857,7 +6990,7 @@
                 <a:sym typeface="Arial"/>
               </a:defRPr>
             </a:lvl8pPr>
-            <a:lvl9pPr indent="0" lvl="8" marL="0" marR="0" algn="r">
+            <a:lvl9pPr marL="0" marR="0" lvl="8" indent="0" algn="r">
               <a:lnSpc>
                 <a:spcPct val="100000"/>
               </a:lnSpc>
@@ -6873,7 +7006,7 @@
               <a:buSzPts val="900"/>
               <a:buFont typeface="Arial"/>
               <a:buNone/>
-              <a:defRPr b="0" i="0" sz="900" u="none" cap="none" strike="noStrike">
+              <a:defRPr sz="900" b="0" i="0" u="none" strike="noStrike" cap="none">
                 <a:solidFill>
                   <a:srgbClr val="757575"/>
                 </a:solidFill>
@@ -6885,7 +7018,7 @@
             </a:lvl9pPr>
           </a:lstStyle>
           <a:p>
-            <a:pPr indent="0" lvl="0" marL="0" rtl="0" algn="r">
+            <a:pPr marL="0" lvl="0" indent="0" algn="r" rtl="0">
               <a:spcBef>
                 <a:spcPts val="0"/>
               </a:spcBef>
@@ -6911,11 +7044,11 @@
 </file>
 
 <file path=ppt/slideLayouts/slideLayout5.xml><?xml version="1.0" encoding="utf-8"?>
-<p:sldLayout xmlns:a="http://schemas.openxmlformats.org/drawingml/2006/main" xmlns:r="http://schemas.openxmlformats.org/officeDocument/2006/relationships" xmlns:mc="http://schemas.openxmlformats.org/markup-compatibility/2006" xmlns:mv="urn:schemas-microsoft-com:mac:vml" xmlns:p="http://schemas.openxmlformats.org/presentationml/2006/main" xmlns:c="http://schemas.openxmlformats.org/drawingml/2006/chart" xmlns:dgm="http://schemas.openxmlformats.org/drawingml/2006/diagram" xmlns:o="urn:schemas-microsoft-com:office:office" xmlns:v="urn:schemas-microsoft-com:vml" xmlns:pvml="urn:schemas-microsoft-com:office:powerpoint" xmlns:com="http://schemas.openxmlformats.org/drawingml/2006/compatibility" xmlns:p14="http://schemas.microsoft.com/office/powerpoint/2010/main" xmlns:p15="http://schemas.microsoft.com/office/powerpoint/2012/main" xmlns:ahyp="http://schemas.microsoft.com/office/drawing/2018/hyperlinkcolor" matchingName="비교" type="twoTxTwoObj">
+<p:sldLayout xmlns:a="http://schemas.openxmlformats.org/drawingml/2006/main" xmlns:r="http://schemas.openxmlformats.org/officeDocument/2006/relationships" xmlns:p="http://schemas.openxmlformats.org/presentationml/2006/main" matchingName="비교" type="twoTxTwoObj">
   <p:cSld name="TWO_OBJECTS_WITH_TEXT">
     <p:spTree>
       <p:nvGrpSpPr>
-        <p:cNvPr id="36" name="Shape 36"/>
+        <p:cNvPr id="1" name="Shape 36"/>
         <p:cNvGrpSpPr/>
         <p:nvPr/>
       </p:nvGrpSpPr>
@@ -6930,7 +7063,9 @@
       <p:sp>
         <p:nvSpPr>
           <p:cNvPr id="37" name="Google Shape;37;p7"/>
-          <p:cNvSpPr txBox="1"/>
+          <p:cNvSpPr txBox="1">
+            <a:spLocks noGrp="1"/>
+          </p:cNvSpPr>
           <p:nvPr>
             <p:ph type="title"/>
           </p:nvPr>
@@ -6949,7 +7084,7 @@
           </a:ln>
         </p:spPr>
         <p:txBody>
-          <a:bodyPr anchorCtr="0" anchor="ctr" bIns="45700" lIns="91425" spcFirstLastPara="1" rIns="91425" wrap="square" tIns="45700">
+          <a:bodyPr spcFirstLastPara="1" wrap="square" lIns="91425" tIns="45700" rIns="91425" bIns="45700" anchor="ctr" anchorCtr="0">
             <a:normAutofit/>
           </a:bodyPr>
           <a:lstStyle>
@@ -7083,15 +7218,19 @@
               <a:defRPr/>
             </a:lvl9pPr>
           </a:lstStyle>
-          <a:p/>
+          <a:p>
+            <a:endParaRPr/>
+          </a:p>
         </p:txBody>
       </p:sp>
       <p:sp>
         <p:nvSpPr>
           <p:cNvPr id="38" name="Google Shape;38;p7"/>
-          <p:cNvSpPr txBox="1"/>
+          <p:cNvSpPr txBox="1">
+            <a:spLocks noGrp="1"/>
+          </p:cNvSpPr>
           <p:nvPr>
-            <p:ph idx="1" type="body"/>
+            <p:ph type="body" idx="1"/>
           </p:nvPr>
         </p:nvSpPr>
         <p:spPr>
@@ -7108,11 +7247,11 @@
           </a:ln>
         </p:spPr>
         <p:txBody>
-          <a:bodyPr anchorCtr="0" anchor="b" bIns="45700" lIns="91425" spcFirstLastPara="1" rIns="91425" wrap="square" tIns="45700">
+          <a:bodyPr spcFirstLastPara="1" wrap="square" lIns="91425" tIns="45700" rIns="91425" bIns="45700" anchor="b" anchorCtr="0">
             <a:normAutofit/>
           </a:bodyPr>
           <a:lstStyle>
-            <a:lvl1pPr indent="-228600" lvl="0" marL="457200" algn="l">
+            <a:lvl1pPr marL="457200" lvl="0" indent="-228600" algn="l">
               <a:lnSpc>
                 <a:spcPct val="90000"/>
               </a:lnSpc>
@@ -7127,9 +7266,9 @@
               </a:buClr>
               <a:buSzPts val="1800"/>
               <a:buNone/>
-              <a:defRPr b="1" sz="1800"/>
+              <a:defRPr sz="1800" b="1"/>
             </a:lvl1pPr>
-            <a:lvl2pPr indent="-228600" lvl="1" marL="914400" algn="l">
+            <a:lvl2pPr marL="914400" lvl="1" indent="-228600" algn="l">
               <a:lnSpc>
                 <a:spcPct val="90000"/>
               </a:lnSpc>
@@ -7144,9 +7283,9 @@
               </a:buClr>
               <a:buSzPts val="1500"/>
               <a:buNone/>
-              <a:defRPr b="1" sz="1500"/>
+              <a:defRPr sz="1500" b="1"/>
             </a:lvl2pPr>
-            <a:lvl3pPr indent="-228600" lvl="2" marL="1371600" algn="l">
+            <a:lvl3pPr marL="1371600" lvl="2" indent="-228600" algn="l">
               <a:lnSpc>
                 <a:spcPct val="90000"/>
               </a:lnSpc>
@@ -7161,9 +7300,9 @@
               </a:buClr>
               <a:buSzPts val="1350"/>
               <a:buNone/>
-              <a:defRPr b="1" sz="1350"/>
+              <a:defRPr sz="1350" b="1"/>
             </a:lvl3pPr>
-            <a:lvl4pPr indent="-228600" lvl="3" marL="1828800" algn="l">
+            <a:lvl4pPr marL="1828800" lvl="3" indent="-228600" algn="l">
               <a:lnSpc>
                 <a:spcPct val="90000"/>
               </a:lnSpc>
@@ -7178,9 +7317,9 @@
               </a:buClr>
               <a:buSzPts val="1200"/>
               <a:buNone/>
-              <a:defRPr b="1" sz="1200"/>
+              <a:defRPr sz="1200" b="1"/>
             </a:lvl4pPr>
-            <a:lvl5pPr indent="-228600" lvl="4" marL="2286000" algn="l">
+            <a:lvl5pPr marL="2286000" lvl="4" indent="-228600" algn="l">
               <a:lnSpc>
                 <a:spcPct val="90000"/>
               </a:lnSpc>
@@ -7195,9 +7334,9 @@
               </a:buClr>
               <a:buSzPts val="1200"/>
               <a:buNone/>
-              <a:defRPr b="1" sz="1200"/>
+              <a:defRPr sz="1200" b="1"/>
             </a:lvl5pPr>
-            <a:lvl6pPr indent="-228600" lvl="5" marL="2743200" algn="l">
+            <a:lvl6pPr marL="2743200" lvl="5" indent="-228600" algn="l">
               <a:lnSpc>
                 <a:spcPct val="90000"/>
               </a:lnSpc>
@@ -7212,9 +7351,9 @@
               </a:buClr>
               <a:buSzPts val="1200"/>
               <a:buNone/>
-              <a:defRPr b="1" sz="1200"/>
+              <a:defRPr sz="1200" b="1"/>
             </a:lvl6pPr>
-            <a:lvl7pPr indent="-228600" lvl="6" marL="3200400" algn="l">
+            <a:lvl7pPr marL="3200400" lvl="6" indent="-228600" algn="l">
               <a:lnSpc>
                 <a:spcPct val="90000"/>
               </a:lnSpc>
@@ -7229,9 +7368,9 @@
               </a:buClr>
               <a:buSzPts val="1200"/>
               <a:buNone/>
-              <a:defRPr b="1" sz="1200"/>
+              <a:defRPr sz="1200" b="1"/>
             </a:lvl7pPr>
-            <a:lvl8pPr indent="-228600" lvl="7" marL="3657600" algn="l">
+            <a:lvl8pPr marL="3657600" lvl="7" indent="-228600" algn="l">
               <a:lnSpc>
                 <a:spcPct val="90000"/>
               </a:lnSpc>
@@ -7246,9 +7385,9 @@
               </a:buClr>
               <a:buSzPts val="1200"/>
               <a:buNone/>
-              <a:defRPr b="1" sz="1200"/>
+              <a:defRPr sz="1200" b="1"/>
             </a:lvl8pPr>
-            <a:lvl9pPr indent="-228600" lvl="8" marL="4114800" algn="l">
+            <a:lvl9pPr marL="4114800" lvl="8" indent="-228600" algn="l">
               <a:lnSpc>
                 <a:spcPct val="90000"/>
               </a:lnSpc>
@@ -7263,18 +7402,22 @@
               </a:buClr>
               <a:buSzPts val="1200"/>
               <a:buNone/>
-              <a:defRPr b="1" sz="1200"/>
+              <a:defRPr sz="1200" b="1"/>
             </a:lvl9pPr>
           </a:lstStyle>
-          <a:p/>
+          <a:p>
+            <a:endParaRPr/>
+          </a:p>
         </p:txBody>
       </p:sp>
       <p:sp>
         <p:nvSpPr>
           <p:cNvPr id="39" name="Google Shape;39;p7"/>
-          <p:cNvSpPr txBox="1"/>
+          <p:cNvSpPr txBox="1">
+            <a:spLocks noGrp="1"/>
+          </p:cNvSpPr>
           <p:nvPr>
-            <p:ph idx="2" type="body"/>
+            <p:ph type="body" idx="2"/>
           </p:nvPr>
         </p:nvSpPr>
         <p:spPr>
@@ -7291,11 +7434,11 @@
           </a:ln>
         </p:spPr>
         <p:txBody>
-          <a:bodyPr anchorCtr="0" anchor="t" bIns="45700" lIns="91425" spcFirstLastPara="1" rIns="91425" wrap="square" tIns="45700">
+          <a:bodyPr spcFirstLastPara="1" wrap="square" lIns="91425" tIns="45700" rIns="91425" bIns="45700" anchor="t" anchorCtr="0">
             <a:normAutofit/>
           </a:bodyPr>
           <a:lstStyle>
-            <a:lvl1pPr indent="-342900" lvl="0" marL="457200" algn="l">
+            <a:lvl1pPr marL="457200" lvl="0" indent="-342900" algn="l">
               <a:lnSpc>
                 <a:spcPct val="90000"/>
               </a:lnSpc>
@@ -7312,7 +7455,7 @@
               <a:buChar char="•"/>
               <a:defRPr/>
             </a:lvl1pPr>
-            <a:lvl2pPr indent="-342900" lvl="1" marL="914400" algn="l">
+            <a:lvl2pPr marL="914400" lvl="1" indent="-342900" algn="l">
               <a:lnSpc>
                 <a:spcPct val="90000"/>
               </a:lnSpc>
@@ -7329,7 +7472,7 @@
               <a:buChar char="•"/>
               <a:defRPr/>
             </a:lvl2pPr>
-            <a:lvl3pPr indent="-342900" lvl="2" marL="1371600" algn="l">
+            <a:lvl3pPr marL="1371600" lvl="2" indent="-342900" algn="l">
               <a:lnSpc>
                 <a:spcPct val="90000"/>
               </a:lnSpc>
@@ -7346,7 +7489,7 @@
               <a:buChar char="•"/>
               <a:defRPr/>
             </a:lvl3pPr>
-            <a:lvl4pPr indent="-342900" lvl="3" marL="1828800" algn="l">
+            <a:lvl4pPr marL="1828800" lvl="3" indent="-342900" algn="l">
               <a:lnSpc>
                 <a:spcPct val="90000"/>
               </a:lnSpc>
@@ -7363,7 +7506,7 @@
               <a:buChar char="•"/>
               <a:defRPr/>
             </a:lvl4pPr>
-            <a:lvl5pPr indent="-342900" lvl="4" marL="2286000" algn="l">
+            <a:lvl5pPr marL="2286000" lvl="4" indent="-342900" algn="l">
               <a:lnSpc>
                 <a:spcPct val="90000"/>
               </a:lnSpc>
@@ -7380,7 +7523,7 @@
               <a:buChar char="•"/>
               <a:defRPr/>
             </a:lvl5pPr>
-            <a:lvl6pPr indent="-342900" lvl="5" marL="2743200" algn="l">
+            <a:lvl6pPr marL="2743200" lvl="5" indent="-342900" algn="l">
               <a:lnSpc>
                 <a:spcPct val="90000"/>
               </a:lnSpc>
@@ -7397,7 +7540,7 @@
               <a:buChar char="•"/>
               <a:defRPr/>
             </a:lvl6pPr>
-            <a:lvl7pPr indent="-342900" lvl="6" marL="3200400" algn="l">
+            <a:lvl7pPr marL="3200400" lvl="6" indent="-342900" algn="l">
               <a:lnSpc>
                 <a:spcPct val="90000"/>
               </a:lnSpc>
@@ -7414,7 +7557,7 @@
               <a:buChar char="•"/>
               <a:defRPr/>
             </a:lvl7pPr>
-            <a:lvl8pPr indent="-342900" lvl="7" marL="3657600" algn="l">
+            <a:lvl8pPr marL="3657600" lvl="7" indent="-342900" algn="l">
               <a:lnSpc>
                 <a:spcPct val="90000"/>
               </a:lnSpc>
@@ -7431,7 +7574,7 @@
               <a:buChar char="•"/>
               <a:defRPr/>
             </a:lvl8pPr>
-            <a:lvl9pPr indent="-342900" lvl="8" marL="4114800" algn="l">
+            <a:lvl9pPr marL="4114800" lvl="8" indent="-342900" algn="l">
               <a:lnSpc>
                 <a:spcPct val="90000"/>
               </a:lnSpc>
@@ -7449,15 +7592,19 @@
               <a:defRPr/>
             </a:lvl9pPr>
           </a:lstStyle>
-          <a:p/>
+          <a:p>
+            <a:endParaRPr/>
+          </a:p>
         </p:txBody>
       </p:sp>
       <p:sp>
         <p:nvSpPr>
           <p:cNvPr id="40" name="Google Shape;40;p7"/>
-          <p:cNvSpPr txBox="1"/>
+          <p:cNvSpPr txBox="1">
+            <a:spLocks noGrp="1"/>
+          </p:cNvSpPr>
           <p:nvPr>
-            <p:ph idx="3" type="body"/>
+            <p:ph type="body" idx="3"/>
           </p:nvPr>
         </p:nvSpPr>
         <p:spPr>
@@ -7474,11 +7621,11 @@
           </a:ln>
         </p:spPr>
         <p:txBody>
-          <a:bodyPr anchorCtr="0" anchor="b" bIns="45700" lIns="91425" spcFirstLastPara="1" rIns="91425" wrap="square" tIns="45700">
+          <a:bodyPr spcFirstLastPara="1" wrap="square" lIns="91425" tIns="45700" rIns="91425" bIns="45700" anchor="b" anchorCtr="0">
             <a:normAutofit/>
           </a:bodyPr>
           <a:lstStyle>
-            <a:lvl1pPr indent="-228600" lvl="0" marL="457200" algn="l">
+            <a:lvl1pPr marL="457200" lvl="0" indent="-228600" algn="l">
               <a:lnSpc>
                 <a:spcPct val="90000"/>
               </a:lnSpc>
@@ -7493,9 +7640,9 @@
               </a:buClr>
               <a:buSzPts val="1800"/>
               <a:buNone/>
-              <a:defRPr b="1" sz="1800"/>
+              <a:defRPr sz="1800" b="1"/>
             </a:lvl1pPr>
-            <a:lvl2pPr indent="-228600" lvl="1" marL="914400" algn="l">
+            <a:lvl2pPr marL="914400" lvl="1" indent="-228600" algn="l">
               <a:lnSpc>
                 <a:spcPct val="90000"/>
               </a:lnSpc>
@@ -7510,9 +7657,9 @@
               </a:buClr>
               <a:buSzPts val="1500"/>
               <a:buNone/>
-              <a:defRPr b="1" sz="1500"/>
+              <a:defRPr sz="1500" b="1"/>
             </a:lvl2pPr>
-            <a:lvl3pPr indent="-228600" lvl="2" marL="1371600" algn="l">
+            <a:lvl3pPr marL="1371600" lvl="2" indent="-228600" algn="l">
               <a:lnSpc>
                 <a:spcPct val="90000"/>
               </a:lnSpc>
@@ -7527,9 +7674,9 @@
               </a:buClr>
               <a:buSzPts val="1350"/>
               <a:buNone/>
-              <a:defRPr b="1" sz="1350"/>
+              <a:defRPr sz="1350" b="1"/>
             </a:lvl3pPr>
-            <a:lvl4pPr indent="-228600" lvl="3" marL="1828800" algn="l">
+            <a:lvl4pPr marL="1828800" lvl="3" indent="-228600" algn="l">
               <a:lnSpc>
                 <a:spcPct val="90000"/>
               </a:lnSpc>
@@ -7544,9 +7691,9 @@
               </a:buClr>
               <a:buSzPts val="1200"/>
               <a:buNone/>
-              <a:defRPr b="1" sz="1200"/>
+              <a:defRPr sz="1200" b="1"/>
             </a:lvl4pPr>
-            <a:lvl5pPr indent="-228600" lvl="4" marL="2286000" algn="l">
+            <a:lvl5pPr marL="2286000" lvl="4" indent="-228600" algn="l">
               <a:lnSpc>
                 <a:spcPct val="90000"/>
               </a:lnSpc>
@@ -7561,9 +7708,9 @@
               </a:buClr>
               <a:buSzPts val="1200"/>
               <a:buNone/>
-              <a:defRPr b="1" sz="1200"/>
+              <a:defRPr sz="1200" b="1"/>
             </a:lvl5pPr>
-            <a:lvl6pPr indent="-228600" lvl="5" marL="2743200" algn="l">
+            <a:lvl6pPr marL="2743200" lvl="5" indent="-228600" algn="l">
               <a:lnSpc>
                 <a:spcPct val="90000"/>
               </a:lnSpc>
@@ -7578,9 +7725,9 @@
               </a:buClr>
               <a:buSzPts val="1200"/>
               <a:buNone/>
-              <a:defRPr b="1" sz="1200"/>
+              <a:defRPr sz="1200" b="1"/>
             </a:lvl6pPr>
-            <a:lvl7pPr indent="-228600" lvl="6" marL="3200400" algn="l">
+            <a:lvl7pPr marL="3200400" lvl="6" indent="-228600" algn="l">
               <a:lnSpc>
                 <a:spcPct val="90000"/>
               </a:lnSpc>
@@ -7595,9 +7742,9 @@
               </a:buClr>
               <a:buSzPts val="1200"/>
               <a:buNone/>
-              <a:defRPr b="1" sz="1200"/>
+              <a:defRPr sz="1200" b="1"/>
             </a:lvl7pPr>
-            <a:lvl8pPr indent="-228600" lvl="7" marL="3657600" algn="l">
+            <a:lvl8pPr marL="3657600" lvl="7" indent="-228600" algn="l">
               <a:lnSpc>
                 <a:spcPct val="90000"/>
               </a:lnSpc>
@@ -7612,9 +7759,9 @@
               </a:buClr>
               <a:buSzPts val="1200"/>
               <a:buNone/>
-              <a:defRPr b="1" sz="1200"/>
+              <a:defRPr sz="1200" b="1"/>
             </a:lvl8pPr>
-            <a:lvl9pPr indent="-228600" lvl="8" marL="4114800" algn="l">
+            <a:lvl9pPr marL="4114800" lvl="8" indent="-228600" algn="l">
               <a:lnSpc>
                 <a:spcPct val="90000"/>
               </a:lnSpc>
@@ -7629,18 +7776,22 @@
               </a:buClr>
               <a:buSzPts val="1200"/>
               <a:buNone/>
-              <a:defRPr b="1" sz="1200"/>
+              <a:defRPr sz="1200" b="1"/>
             </a:lvl9pPr>
           </a:lstStyle>
-          <a:p/>
+          <a:p>
+            <a:endParaRPr/>
+          </a:p>
         </p:txBody>
       </p:sp>
       <p:sp>
         <p:nvSpPr>
           <p:cNvPr id="41" name="Google Shape;41;p7"/>
-          <p:cNvSpPr txBox="1"/>
+          <p:cNvSpPr txBox="1">
+            <a:spLocks noGrp="1"/>
+          </p:cNvSpPr>
           <p:nvPr>
-            <p:ph idx="4" type="body"/>
+            <p:ph type="body" idx="4"/>
           </p:nvPr>
         </p:nvSpPr>
         <p:spPr>
@@ -7657,11 +7808,11 @@
           </a:ln>
         </p:spPr>
         <p:txBody>
-          <a:bodyPr anchorCtr="0" anchor="t" bIns="45700" lIns="91425" spcFirstLastPara="1" rIns="91425" wrap="square" tIns="45700">
+          <a:bodyPr spcFirstLastPara="1" wrap="square" lIns="91425" tIns="45700" rIns="91425" bIns="45700" anchor="t" anchorCtr="0">
             <a:normAutofit/>
           </a:bodyPr>
           <a:lstStyle>
-            <a:lvl1pPr indent="-342900" lvl="0" marL="457200" algn="l">
+            <a:lvl1pPr marL="457200" lvl="0" indent="-342900" algn="l">
               <a:lnSpc>
                 <a:spcPct val="90000"/>
               </a:lnSpc>
@@ -7678,7 +7829,7 @@
               <a:buChar char="•"/>
               <a:defRPr/>
             </a:lvl1pPr>
-            <a:lvl2pPr indent="-342900" lvl="1" marL="914400" algn="l">
+            <a:lvl2pPr marL="914400" lvl="1" indent="-342900" algn="l">
               <a:lnSpc>
                 <a:spcPct val="90000"/>
               </a:lnSpc>
@@ -7695,7 +7846,7 @@
               <a:buChar char="•"/>
               <a:defRPr/>
             </a:lvl2pPr>
-            <a:lvl3pPr indent="-342900" lvl="2" marL="1371600" algn="l">
+            <a:lvl3pPr marL="1371600" lvl="2" indent="-342900" algn="l">
               <a:lnSpc>
                 <a:spcPct val="90000"/>
               </a:lnSpc>
@@ -7712,7 +7863,7 @@
               <a:buChar char="•"/>
               <a:defRPr/>
             </a:lvl3pPr>
-            <a:lvl4pPr indent="-342900" lvl="3" marL="1828800" algn="l">
+            <a:lvl4pPr marL="1828800" lvl="3" indent="-342900" algn="l">
               <a:lnSpc>
                 <a:spcPct val="90000"/>
               </a:lnSpc>
@@ -7729,7 +7880,7 @@
               <a:buChar char="•"/>
               <a:defRPr/>
             </a:lvl4pPr>
-            <a:lvl5pPr indent="-342900" lvl="4" marL="2286000" algn="l">
+            <a:lvl5pPr marL="2286000" lvl="4" indent="-342900" algn="l">
               <a:lnSpc>
                 <a:spcPct val="90000"/>
               </a:lnSpc>
@@ -7746,7 +7897,7 @@
               <a:buChar char="•"/>
               <a:defRPr/>
             </a:lvl5pPr>
-            <a:lvl6pPr indent="-342900" lvl="5" marL="2743200" algn="l">
+            <a:lvl6pPr marL="2743200" lvl="5" indent="-342900" algn="l">
               <a:lnSpc>
                 <a:spcPct val="90000"/>
               </a:lnSpc>
@@ -7763,7 +7914,7 @@
               <a:buChar char="•"/>
               <a:defRPr/>
             </a:lvl6pPr>
-            <a:lvl7pPr indent="-342900" lvl="6" marL="3200400" algn="l">
+            <a:lvl7pPr marL="3200400" lvl="6" indent="-342900" algn="l">
               <a:lnSpc>
                 <a:spcPct val="90000"/>
               </a:lnSpc>
@@ -7780,7 +7931,7 @@
               <a:buChar char="•"/>
               <a:defRPr/>
             </a:lvl7pPr>
-            <a:lvl8pPr indent="-342900" lvl="7" marL="3657600" algn="l">
+            <a:lvl8pPr marL="3657600" lvl="7" indent="-342900" algn="l">
               <a:lnSpc>
                 <a:spcPct val="90000"/>
               </a:lnSpc>
@@ -7797,7 +7948,7 @@
               <a:buChar char="•"/>
               <a:defRPr/>
             </a:lvl8pPr>
-            <a:lvl9pPr indent="-342900" lvl="8" marL="4114800" algn="l">
+            <a:lvl9pPr marL="4114800" lvl="8" indent="-342900" algn="l">
               <a:lnSpc>
                 <a:spcPct val="90000"/>
               </a:lnSpc>
@@ -7815,15 +7966,19 @@
               <a:defRPr/>
             </a:lvl9pPr>
           </a:lstStyle>
-          <a:p/>
+          <a:p>
+            <a:endParaRPr/>
+          </a:p>
         </p:txBody>
       </p:sp>
       <p:sp>
         <p:nvSpPr>
           <p:cNvPr id="42" name="Google Shape;42;p7"/>
-          <p:cNvSpPr txBox="1"/>
+          <p:cNvSpPr txBox="1">
+            <a:spLocks noGrp="1"/>
+          </p:cNvSpPr>
           <p:nvPr>
-            <p:ph idx="10" type="dt"/>
+            <p:ph type="dt" idx="10"/>
           </p:nvPr>
         </p:nvSpPr>
         <p:spPr>
@@ -7840,7 +7995,7 @@
           </a:ln>
         </p:spPr>
         <p:txBody>
-          <a:bodyPr anchorCtr="0" anchor="ctr" bIns="45700" lIns="91425" spcFirstLastPara="1" rIns="91425" wrap="square" tIns="45700">
+          <a:bodyPr spcFirstLastPara="1" wrap="square" lIns="91425" tIns="45700" rIns="91425" bIns="45700" anchor="ctr" anchorCtr="0">
             <a:noAutofit/>
           </a:bodyPr>
           <a:lstStyle>
@@ -7971,15 +8126,19 @@
               <a:defRPr/>
             </a:lvl9pPr>
           </a:lstStyle>
-          <a:p/>
+          <a:p>
+            <a:endParaRPr/>
+          </a:p>
         </p:txBody>
       </p:sp>
       <p:sp>
         <p:nvSpPr>
           <p:cNvPr id="43" name="Google Shape;43;p7"/>
-          <p:cNvSpPr txBox="1"/>
+          <p:cNvSpPr txBox="1">
+            <a:spLocks noGrp="1"/>
+          </p:cNvSpPr>
           <p:nvPr>
-            <p:ph idx="11" type="ftr"/>
+            <p:ph type="ftr" idx="11"/>
           </p:nvPr>
         </p:nvSpPr>
         <p:spPr>
@@ -7996,7 +8155,7 @@
           </a:ln>
         </p:spPr>
         <p:txBody>
-          <a:bodyPr anchorCtr="0" anchor="ctr" bIns="45700" lIns="91425" spcFirstLastPara="1" rIns="91425" wrap="square" tIns="45700">
+          <a:bodyPr spcFirstLastPara="1" wrap="square" lIns="91425" tIns="45700" rIns="91425" bIns="45700" anchor="ctr" anchorCtr="0">
             <a:noAutofit/>
           </a:bodyPr>
           <a:lstStyle>
@@ -8127,15 +8286,19 @@
               <a:defRPr/>
             </a:lvl9pPr>
           </a:lstStyle>
-          <a:p/>
+          <a:p>
+            <a:endParaRPr/>
+          </a:p>
         </p:txBody>
       </p:sp>
       <p:sp>
         <p:nvSpPr>
           <p:cNvPr id="44" name="Google Shape;44;p7"/>
-          <p:cNvSpPr txBox="1"/>
+          <p:cNvSpPr txBox="1">
+            <a:spLocks noGrp="1"/>
+          </p:cNvSpPr>
           <p:nvPr>
-            <p:ph idx="12" type="sldNum"/>
+            <p:ph type="sldNum" idx="12"/>
           </p:nvPr>
         </p:nvSpPr>
         <p:spPr>
@@ -8152,11 +8315,11 @@
           </a:ln>
         </p:spPr>
         <p:txBody>
-          <a:bodyPr anchorCtr="0" anchor="ctr" bIns="45700" lIns="91425" spcFirstLastPara="1" rIns="91425" wrap="square" tIns="45700">
+          <a:bodyPr spcFirstLastPara="1" wrap="square" lIns="91425" tIns="45700" rIns="91425" bIns="45700" anchor="ctr" anchorCtr="0">
             <a:noAutofit/>
           </a:bodyPr>
           <a:lstStyle>
-            <a:lvl1pPr indent="0" lvl="0" marL="0" marR="0" algn="r">
+            <a:lvl1pPr marL="0" marR="0" lvl="0" indent="0" algn="r">
               <a:lnSpc>
                 <a:spcPct val="100000"/>
               </a:lnSpc>
@@ -8172,7 +8335,7 @@
               <a:buSzPts val="900"/>
               <a:buFont typeface="Arial"/>
               <a:buNone/>
-              <a:defRPr b="0" i="0" sz="900" u="none" cap="none" strike="noStrike">
+              <a:defRPr sz="900" b="0" i="0" u="none" strike="noStrike" cap="none">
                 <a:solidFill>
                   <a:srgbClr val="757575"/>
                 </a:solidFill>
@@ -8182,7 +8345,7 @@
                 <a:sym typeface="Arial"/>
               </a:defRPr>
             </a:lvl1pPr>
-            <a:lvl2pPr indent="0" lvl="1" marL="0" marR="0" algn="r">
+            <a:lvl2pPr marL="0" marR="0" lvl="1" indent="0" algn="r">
               <a:lnSpc>
                 <a:spcPct val="100000"/>
               </a:lnSpc>
@@ -8198,7 +8361,7 @@
               <a:buSzPts val="900"/>
               <a:buFont typeface="Arial"/>
               <a:buNone/>
-              <a:defRPr b="0" i="0" sz="900" u="none" cap="none" strike="noStrike">
+              <a:defRPr sz="900" b="0" i="0" u="none" strike="noStrike" cap="none">
                 <a:solidFill>
                   <a:srgbClr val="757575"/>
                 </a:solidFill>
@@ -8208,7 +8371,7 @@
                 <a:sym typeface="Arial"/>
               </a:defRPr>
             </a:lvl2pPr>
-            <a:lvl3pPr indent="0" lvl="2" marL="0" marR="0" algn="r">
+            <a:lvl3pPr marL="0" marR="0" lvl="2" indent="0" algn="r">
               <a:lnSpc>
                 <a:spcPct val="100000"/>
               </a:lnSpc>
@@ -8224,7 +8387,7 @@
               <a:buSzPts val="900"/>
               <a:buFont typeface="Arial"/>
               <a:buNone/>
-              <a:defRPr b="0" i="0" sz="900" u="none" cap="none" strike="noStrike">
+              <a:defRPr sz="900" b="0" i="0" u="none" strike="noStrike" cap="none">
                 <a:solidFill>
                   <a:srgbClr val="757575"/>
                 </a:solidFill>
@@ -8234,7 +8397,7 @@
                 <a:sym typeface="Arial"/>
               </a:defRPr>
             </a:lvl3pPr>
-            <a:lvl4pPr indent="0" lvl="3" marL="0" marR="0" algn="r">
+            <a:lvl4pPr marL="0" marR="0" lvl="3" indent="0" algn="r">
               <a:lnSpc>
                 <a:spcPct val="100000"/>
               </a:lnSpc>
@@ -8250,7 +8413,7 @@
               <a:buSzPts val="900"/>
               <a:buFont typeface="Arial"/>
               <a:buNone/>
-              <a:defRPr b="0" i="0" sz="900" u="none" cap="none" strike="noStrike">
+              <a:defRPr sz="900" b="0" i="0" u="none" strike="noStrike" cap="none">
                 <a:solidFill>
                   <a:srgbClr val="757575"/>
                 </a:solidFill>
@@ -8260,7 +8423,7 @@
                 <a:sym typeface="Arial"/>
               </a:defRPr>
             </a:lvl4pPr>
-            <a:lvl5pPr indent="0" lvl="4" marL="0" marR="0" algn="r">
+            <a:lvl5pPr marL="0" marR="0" lvl="4" indent="0" algn="r">
               <a:lnSpc>
                 <a:spcPct val="100000"/>
               </a:lnSpc>
@@ -8276,7 +8439,7 @@
               <a:buSzPts val="900"/>
               <a:buFont typeface="Arial"/>
               <a:buNone/>
-              <a:defRPr b="0" i="0" sz="900" u="none" cap="none" strike="noStrike">
+              <a:defRPr sz="900" b="0" i="0" u="none" strike="noStrike" cap="none">
                 <a:solidFill>
                   <a:srgbClr val="757575"/>
                 </a:solidFill>
@@ -8286,7 +8449,7 @@
                 <a:sym typeface="Arial"/>
               </a:defRPr>
             </a:lvl5pPr>
-            <a:lvl6pPr indent="0" lvl="5" marL="0" marR="0" algn="r">
+            <a:lvl6pPr marL="0" marR="0" lvl="5" indent="0" algn="r">
               <a:lnSpc>
                 <a:spcPct val="100000"/>
               </a:lnSpc>
@@ -8302,7 +8465,7 @@
               <a:buSzPts val="900"/>
               <a:buFont typeface="Arial"/>
               <a:buNone/>
-              <a:defRPr b="0" i="0" sz="900" u="none" cap="none" strike="noStrike">
+              <a:defRPr sz="900" b="0" i="0" u="none" strike="noStrike" cap="none">
                 <a:solidFill>
                   <a:srgbClr val="757575"/>
                 </a:solidFill>
@@ -8312,7 +8475,7 @@
                 <a:sym typeface="Arial"/>
               </a:defRPr>
             </a:lvl6pPr>
-            <a:lvl7pPr indent="0" lvl="6" marL="0" marR="0" algn="r">
+            <a:lvl7pPr marL="0" marR="0" lvl="6" indent="0" algn="r">
               <a:lnSpc>
                 <a:spcPct val="100000"/>
               </a:lnSpc>
@@ -8328,7 +8491,7 @@
               <a:buSzPts val="900"/>
               <a:buFont typeface="Arial"/>
               <a:buNone/>
-              <a:defRPr b="0" i="0" sz="900" u="none" cap="none" strike="noStrike">
+              <a:defRPr sz="900" b="0" i="0" u="none" strike="noStrike" cap="none">
                 <a:solidFill>
                   <a:srgbClr val="757575"/>
                 </a:solidFill>
@@ -8338,7 +8501,7 @@
                 <a:sym typeface="Arial"/>
               </a:defRPr>
             </a:lvl7pPr>
-            <a:lvl8pPr indent="0" lvl="7" marL="0" marR="0" algn="r">
+            <a:lvl8pPr marL="0" marR="0" lvl="7" indent="0" algn="r">
               <a:lnSpc>
                 <a:spcPct val="100000"/>
               </a:lnSpc>
@@ -8354,7 +8517,7 @@
               <a:buSzPts val="900"/>
               <a:buFont typeface="Arial"/>
               <a:buNone/>
-              <a:defRPr b="0" i="0" sz="900" u="none" cap="none" strike="noStrike">
+              <a:defRPr sz="900" b="0" i="0" u="none" strike="noStrike" cap="none">
                 <a:solidFill>
                   <a:srgbClr val="757575"/>
                 </a:solidFill>
@@ -8364,7 +8527,7 @@
                 <a:sym typeface="Arial"/>
               </a:defRPr>
             </a:lvl8pPr>
-            <a:lvl9pPr indent="0" lvl="8" marL="0" marR="0" algn="r">
+            <a:lvl9pPr marL="0" marR="0" lvl="8" indent="0" algn="r">
               <a:lnSpc>
                 <a:spcPct val="100000"/>
               </a:lnSpc>
@@ -8380,7 +8543,7 @@
               <a:buSzPts val="900"/>
               <a:buFont typeface="Arial"/>
               <a:buNone/>
-              <a:defRPr b="0" i="0" sz="900" u="none" cap="none" strike="noStrike">
+              <a:defRPr sz="900" b="0" i="0" u="none" strike="noStrike" cap="none">
                 <a:solidFill>
                   <a:srgbClr val="757575"/>
                 </a:solidFill>
@@ -8392,7 +8555,7 @@
             </a:lvl9pPr>
           </a:lstStyle>
           <a:p>
-            <a:pPr indent="0" lvl="0" marL="0" rtl="0" algn="r">
+            <a:pPr marL="0" lvl="0" indent="0" algn="r" rtl="0">
               <a:spcBef>
                 <a:spcPts val="0"/>
               </a:spcBef>
@@ -8418,11 +8581,11 @@
 </file>
 
 <file path=ppt/slideLayouts/slideLayout6.xml><?xml version="1.0" encoding="utf-8"?>
-<p:sldLayout xmlns:a="http://schemas.openxmlformats.org/drawingml/2006/main" xmlns:r="http://schemas.openxmlformats.org/officeDocument/2006/relationships" xmlns:mc="http://schemas.openxmlformats.org/markup-compatibility/2006" xmlns:mv="urn:schemas-microsoft-com:mac:vml" xmlns:p="http://schemas.openxmlformats.org/presentationml/2006/main" xmlns:c="http://schemas.openxmlformats.org/drawingml/2006/chart" xmlns:dgm="http://schemas.openxmlformats.org/drawingml/2006/diagram" xmlns:o="urn:schemas-microsoft-com:office:office" xmlns:v="urn:schemas-microsoft-com:vml" xmlns:pvml="urn:schemas-microsoft-com:office:powerpoint" xmlns:com="http://schemas.openxmlformats.org/drawingml/2006/compatibility" xmlns:p14="http://schemas.microsoft.com/office/powerpoint/2010/main" xmlns:p15="http://schemas.microsoft.com/office/powerpoint/2012/main" xmlns:ahyp="http://schemas.microsoft.com/office/drawing/2018/hyperlinkcolor" matchingName="제목만" type="titleOnly">
+<p:sldLayout xmlns:a="http://schemas.openxmlformats.org/drawingml/2006/main" xmlns:r="http://schemas.openxmlformats.org/officeDocument/2006/relationships" xmlns:p="http://schemas.openxmlformats.org/presentationml/2006/main" matchingName="제목만" type="titleOnly">
   <p:cSld name="TITLE_ONLY">
     <p:spTree>
       <p:nvGrpSpPr>
-        <p:cNvPr id="45" name="Shape 45"/>
+        <p:cNvPr id="1" name="Shape 45"/>
         <p:cNvGrpSpPr/>
         <p:nvPr/>
       </p:nvGrpSpPr>
@@ -8437,7 +8600,9 @@
       <p:sp>
         <p:nvSpPr>
           <p:cNvPr id="46" name="Google Shape;46;p8"/>
-          <p:cNvSpPr txBox="1"/>
+          <p:cNvSpPr txBox="1">
+            <a:spLocks noGrp="1"/>
+          </p:cNvSpPr>
           <p:nvPr>
             <p:ph type="title"/>
           </p:nvPr>
@@ -8456,7 +8621,7 @@
           </a:ln>
         </p:spPr>
         <p:txBody>
-          <a:bodyPr anchorCtr="0" anchor="ctr" bIns="45700" lIns="91425" spcFirstLastPara="1" rIns="91425" wrap="square" tIns="45700">
+          <a:bodyPr spcFirstLastPara="1" wrap="square" lIns="91425" tIns="45700" rIns="91425" bIns="45700" anchor="ctr" anchorCtr="0">
             <a:normAutofit/>
           </a:bodyPr>
           <a:lstStyle>
@@ -8590,15 +8755,19 @@
               <a:defRPr/>
             </a:lvl9pPr>
           </a:lstStyle>
-          <a:p/>
+          <a:p>
+            <a:endParaRPr/>
+          </a:p>
         </p:txBody>
       </p:sp>
       <p:sp>
         <p:nvSpPr>
           <p:cNvPr id="47" name="Google Shape;47;p8"/>
-          <p:cNvSpPr txBox="1"/>
+          <p:cNvSpPr txBox="1">
+            <a:spLocks noGrp="1"/>
+          </p:cNvSpPr>
           <p:nvPr>
-            <p:ph idx="10" type="dt"/>
+            <p:ph type="dt" idx="10"/>
           </p:nvPr>
         </p:nvSpPr>
         <p:spPr>
@@ -8615,7 +8784,7 @@
           </a:ln>
         </p:spPr>
         <p:txBody>
-          <a:bodyPr anchorCtr="0" anchor="ctr" bIns="45700" lIns="91425" spcFirstLastPara="1" rIns="91425" wrap="square" tIns="45700">
+          <a:bodyPr spcFirstLastPara="1" wrap="square" lIns="91425" tIns="45700" rIns="91425" bIns="45700" anchor="ctr" anchorCtr="0">
             <a:noAutofit/>
           </a:bodyPr>
           <a:lstStyle>
@@ -8746,15 +8915,19 @@
               <a:defRPr/>
             </a:lvl9pPr>
           </a:lstStyle>
-          <a:p/>
+          <a:p>
+            <a:endParaRPr/>
+          </a:p>
         </p:txBody>
       </p:sp>
       <p:sp>
         <p:nvSpPr>
           <p:cNvPr id="48" name="Google Shape;48;p8"/>
-          <p:cNvSpPr txBox="1"/>
+          <p:cNvSpPr txBox="1">
+            <a:spLocks noGrp="1"/>
+          </p:cNvSpPr>
           <p:nvPr>
-            <p:ph idx="11" type="ftr"/>
+            <p:ph type="ftr" idx="11"/>
           </p:nvPr>
         </p:nvSpPr>
         <p:spPr>
@@ -8771,7 +8944,7 @@
           </a:ln>
         </p:spPr>
         <p:txBody>
-          <a:bodyPr anchorCtr="0" anchor="ctr" bIns="45700" lIns="91425" spcFirstLastPara="1" rIns="91425" wrap="square" tIns="45700">
+          <a:bodyPr spcFirstLastPara="1" wrap="square" lIns="91425" tIns="45700" rIns="91425" bIns="45700" anchor="ctr" anchorCtr="0">
             <a:noAutofit/>
           </a:bodyPr>
           <a:lstStyle>
@@ -8902,15 +9075,19 @@
               <a:defRPr/>
             </a:lvl9pPr>
           </a:lstStyle>
-          <a:p/>
+          <a:p>
+            <a:endParaRPr/>
+          </a:p>
         </p:txBody>
       </p:sp>
       <p:sp>
         <p:nvSpPr>
           <p:cNvPr id="49" name="Google Shape;49;p8"/>
-          <p:cNvSpPr txBox="1"/>
+          <p:cNvSpPr txBox="1">
+            <a:spLocks noGrp="1"/>
+          </p:cNvSpPr>
           <p:nvPr>
-            <p:ph idx="12" type="sldNum"/>
+            <p:ph type="sldNum" idx="12"/>
           </p:nvPr>
         </p:nvSpPr>
         <p:spPr>
@@ -8927,11 +9104,11 @@
           </a:ln>
         </p:spPr>
         <p:txBody>
-          <a:bodyPr anchorCtr="0" anchor="ctr" bIns="45700" lIns="91425" spcFirstLastPara="1" rIns="91425" wrap="square" tIns="45700">
+          <a:bodyPr spcFirstLastPara="1" wrap="square" lIns="91425" tIns="45700" rIns="91425" bIns="45700" anchor="ctr" anchorCtr="0">
             <a:noAutofit/>
           </a:bodyPr>
           <a:lstStyle>
-            <a:lvl1pPr indent="0" lvl="0" marL="0" marR="0" algn="r">
+            <a:lvl1pPr marL="0" marR="0" lvl="0" indent="0" algn="r">
               <a:lnSpc>
                 <a:spcPct val="100000"/>
               </a:lnSpc>
@@ -8947,7 +9124,7 @@
               <a:buSzPts val="900"/>
               <a:buFont typeface="Arial"/>
               <a:buNone/>
-              <a:defRPr b="0" i="0" sz="900" u="none" cap="none" strike="noStrike">
+              <a:defRPr sz="900" b="0" i="0" u="none" strike="noStrike" cap="none">
                 <a:solidFill>
                   <a:srgbClr val="757575"/>
                 </a:solidFill>
@@ -8957,7 +9134,7 @@
                 <a:sym typeface="Arial"/>
               </a:defRPr>
             </a:lvl1pPr>
-            <a:lvl2pPr indent="0" lvl="1" marL="0" marR="0" algn="r">
+            <a:lvl2pPr marL="0" marR="0" lvl="1" indent="0" algn="r">
               <a:lnSpc>
                 <a:spcPct val="100000"/>
               </a:lnSpc>
@@ -8973,7 +9150,7 @@
               <a:buSzPts val="900"/>
               <a:buFont typeface="Arial"/>
               <a:buNone/>
-              <a:defRPr b="0" i="0" sz="900" u="none" cap="none" strike="noStrike">
+              <a:defRPr sz="900" b="0" i="0" u="none" strike="noStrike" cap="none">
                 <a:solidFill>
                   <a:srgbClr val="757575"/>
                 </a:solidFill>
@@ -8983,7 +9160,7 @@
                 <a:sym typeface="Arial"/>
               </a:defRPr>
             </a:lvl2pPr>
-            <a:lvl3pPr indent="0" lvl="2" marL="0" marR="0" algn="r">
+            <a:lvl3pPr marL="0" marR="0" lvl="2" indent="0" algn="r">
               <a:lnSpc>
                 <a:spcPct val="100000"/>
               </a:lnSpc>
@@ -8999,7 +9176,7 @@
               <a:buSzPts val="900"/>
               <a:buFont typeface="Arial"/>
               <a:buNone/>
-              <a:defRPr b="0" i="0" sz="900" u="none" cap="none" strike="noStrike">
+              <a:defRPr sz="900" b="0" i="0" u="none" strike="noStrike" cap="none">
                 <a:solidFill>
                   <a:srgbClr val="757575"/>
                 </a:solidFill>
@@ -9009,7 +9186,7 @@
                 <a:sym typeface="Arial"/>
               </a:defRPr>
             </a:lvl3pPr>
-            <a:lvl4pPr indent="0" lvl="3" marL="0" marR="0" algn="r">
+            <a:lvl4pPr marL="0" marR="0" lvl="3" indent="0" algn="r">
               <a:lnSpc>
                 <a:spcPct val="100000"/>
               </a:lnSpc>
@@ -9025,7 +9202,7 @@
               <a:buSzPts val="900"/>
               <a:buFont typeface="Arial"/>
               <a:buNone/>
-              <a:defRPr b="0" i="0" sz="900" u="none" cap="none" strike="noStrike">
+              <a:defRPr sz="900" b="0" i="0" u="none" strike="noStrike" cap="none">
                 <a:solidFill>
                   <a:srgbClr val="757575"/>
                 </a:solidFill>
@@ -9035,7 +9212,7 @@
                 <a:sym typeface="Arial"/>
               </a:defRPr>
             </a:lvl4pPr>
-            <a:lvl5pPr indent="0" lvl="4" marL="0" marR="0" algn="r">
+            <a:lvl5pPr marL="0" marR="0" lvl="4" indent="0" algn="r">
               <a:lnSpc>
                 <a:spcPct val="100000"/>
               </a:lnSpc>
@@ -9051,7 +9228,7 @@
               <a:buSzPts val="900"/>
               <a:buFont typeface="Arial"/>
               <a:buNone/>
-              <a:defRPr b="0" i="0" sz="900" u="none" cap="none" strike="noStrike">
+              <a:defRPr sz="900" b="0" i="0" u="none" strike="noStrike" cap="none">
                 <a:solidFill>
                   <a:srgbClr val="757575"/>
                 </a:solidFill>
@@ -9061,7 +9238,7 @@
                 <a:sym typeface="Arial"/>
               </a:defRPr>
             </a:lvl5pPr>
-            <a:lvl6pPr indent="0" lvl="5" marL="0" marR="0" algn="r">
+            <a:lvl6pPr marL="0" marR="0" lvl="5" indent="0" algn="r">
               <a:lnSpc>
                 <a:spcPct val="100000"/>
               </a:lnSpc>
@@ -9077,7 +9254,7 @@
               <a:buSzPts val="900"/>
               <a:buFont typeface="Arial"/>
               <a:buNone/>
-              <a:defRPr b="0" i="0" sz="900" u="none" cap="none" strike="noStrike">
+              <a:defRPr sz="900" b="0" i="0" u="none" strike="noStrike" cap="none">
                 <a:solidFill>
                   <a:srgbClr val="757575"/>
                 </a:solidFill>
@@ -9087,7 +9264,7 @@
                 <a:sym typeface="Arial"/>
               </a:defRPr>
             </a:lvl6pPr>
-            <a:lvl7pPr indent="0" lvl="6" marL="0" marR="0" algn="r">
+            <a:lvl7pPr marL="0" marR="0" lvl="6" indent="0" algn="r">
               <a:lnSpc>
                 <a:spcPct val="100000"/>
               </a:lnSpc>
@@ -9103,7 +9280,7 @@
               <a:buSzPts val="900"/>
               <a:buFont typeface="Arial"/>
               <a:buNone/>
-              <a:defRPr b="0" i="0" sz="900" u="none" cap="none" strike="noStrike">
+              <a:defRPr sz="900" b="0" i="0" u="none" strike="noStrike" cap="none">
                 <a:solidFill>
                   <a:srgbClr val="757575"/>
                 </a:solidFill>
@@ -9113,7 +9290,7 @@
                 <a:sym typeface="Arial"/>
               </a:defRPr>
             </a:lvl7pPr>
-            <a:lvl8pPr indent="0" lvl="7" marL="0" marR="0" algn="r">
+            <a:lvl8pPr marL="0" marR="0" lvl="7" indent="0" algn="r">
               <a:lnSpc>
                 <a:spcPct val="100000"/>
               </a:lnSpc>
@@ -9129,7 +9306,7 @@
               <a:buSzPts val="900"/>
               <a:buFont typeface="Arial"/>
               <a:buNone/>
-              <a:defRPr b="0" i="0" sz="900" u="none" cap="none" strike="noStrike">
+              <a:defRPr sz="900" b="0" i="0" u="none" strike="noStrike" cap="none">
                 <a:solidFill>
                   <a:srgbClr val="757575"/>
                 </a:solidFill>
@@ -9139,7 +9316,7 @@
                 <a:sym typeface="Arial"/>
               </a:defRPr>
             </a:lvl8pPr>
-            <a:lvl9pPr indent="0" lvl="8" marL="0" marR="0" algn="r">
+            <a:lvl9pPr marL="0" marR="0" lvl="8" indent="0" algn="r">
               <a:lnSpc>
                 <a:spcPct val="100000"/>
               </a:lnSpc>
@@ -9155,7 +9332,7 @@
               <a:buSzPts val="900"/>
               <a:buFont typeface="Arial"/>
               <a:buNone/>
-              <a:defRPr b="0" i="0" sz="900" u="none" cap="none" strike="noStrike">
+              <a:defRPr sz="900" b="0" i="0" u="none" strike="noStrike" cap="none">
                 <a:solidFill>
                   <a:srgbClr val="757575"/>
                 </a:solidFill>
@@ -9167,7 +9344,7 @@
             </a:lvl9pPr>
           </a:lstStyle>
           <a:p>
-            <a:pPr indent="0" lvl="0" marL="0" rtl="0" algn="r">
+            <a:pPr marL="0" lvl="0" indent="0" algn="r" rtl="0">
               <a:spcBef>
                 <a:spcPts val="0"/>
               </a:spcBef>
@@ -9193,11 +9370,11 @@
 </file>
 
 <file path=ppt/slideLayouts/slideLayout7.xml><?xml version="1.0" encoding="utf-8"?>
-<p:sldLayout xmlns:a="http://schemas.openxmlformats.org/drawingml/2006/main" xmlns:r="http://schemas.openxmlformats.org/officeDocument/2006/relationships" xmlns:mc="http://schemas.openxmlformats.org/markup-compatibility/2006" xmlns:mv="urn:schemas-microsoft-com:mac:vml" xmlns:p="http://schemas.openxmlformats.org/presentationml/2006/main" xmlns:c="http://schemas.openxmlformats.org/drawingml/2006/chart" xmlns:dgm="http://schemas.openxmlformats.org/drawingml/2006/diagram" xmlns:o="urn:schemas-microsoft-com:office:office" xmlns:v="urn:schemas-microsoft-com:vml" xmlns:pvml="urn:schemas-microsoft-com:office:powerpoint" xmlns:com="http://schemas.openxmlformats.org/drawingml/2006/compatibility" xmlns:p14="http://schemas.microsoft.com/office/powerpoint/2010/main" xmlns:p15="http://schemas.microsoft.com/office/powerpoint/2012/main" xmlns:ahyp="http://schemas.microsoft.com/office/drawing/2018/hyperlinkcolor" matchingName="빈 화면" type="blank">
+<p:sldLayout xmlns:a="http://schemas.openxmlformats.org/drawingml/2006/main" xmlns:r="http://schemas.openxmlformats.org/officeDocument/2006/relationships" xmlns:p="http://schemas.openxmlformats.org/presentationml/2006/main" matchingName="빈 화면" type="blank">
   <p:cSld name="BLANK">
     <p:spTree>
       <p:nvGrpSpPr>
-        <p:cNvPr id="50" name="Shape 50"/>
+        <p:cNvPr id="1" name="Shape 50"/>
         <p:cNvGrpSpPr/>
         <p:nvPr/>
       </p:nvGrpSpPr>
@@ -9212,9 +9389,11 @@
       <p:sp>
         <p:nvSpPr>
           <p:cNvPr id="51" name="Google Shape;51;p9"/>
-          <p:cNvSpPr txBox="1"/>
+          <p:cNvSpPr txBox="1">
+            <a:spLocks noGrp="1"/>
+          </p:cNvSpPr>
           <p:nvPr>
-            <p:ph idx="10" type="dt"/>
+            <p:ph type="dt" idx="10"/>
           </p:nvPr>
         </p:nvSpPr>
         <p:spPr>
@@ -9231,7 +9410,7 @@
           </a:ln>
         </p:spPr>
         <p:txBody>
-          <a:bodyPr anchorCtr="0" anchor="ctr" bIns="45700" lIns="91425" spcFirstLastPara="1" rIns="91425" wrap="square" tIns="45700">
+          <a:bodyPr spcFirstLastPara="1" wrap="square" lIns="91425" tIns="45700" rIns="91425" bIns="45700" anchor="ctr" anchorCtr="0">
             <a:noAutofit/>
           </a:bodyPr>
           <a:lstStyle>
@@ -9362,15 +9541,19 @@
               <a:defRPr/>
             </a:lvl9pPr>
           </a:lstStyle>
-          <a:p/>
+          <a:p>
+            <a:endParaRPr/>
+          </a:p>
         </p:txBody>
       </p:sp>
       <p:sp>
         <p:nvSpPr>
           <p:cNvPr id="52" name="Google Shape;52;p9"/>
-          <p:cNvSpPr txBox="1"/>
+          <p:cNvSpPr txBox="1">
+            <a:spLocks noGrp="1"/>
+          </p:cNvSpPr>
           <p:nvPr>
-            <p:ph idx="11" type="ftr"/>
+            <p:ph type="ftr" idx="11"/>
           </p:nvPr>
         </p:nvSpPr>
         <p:spPr>
@@ -9387,7 +9570,7 @@
           </a:ln>
         </p:spPr>
         <p:txBody>
-          <a:bodyPr anchorCtr="0" anchor="ctr" bIns="45700" lIns="91425" spcFirstLastPara="1" rIns="91425" wrap="square" tIns="45700">
+          <a:bodyPr spcFirstLastPara="1" wrap="square" lIns="91425" tIns="45700" rIns="91425" bIns="45700" anchor="ctr" anchorCtr="0">
             <a:noAutofit/>
           </a:bodyPr>
           <a:lstStyle>
@@ -9518,15 +9701,19 @@
               <a:defRPr/>
             </a:lvl9pPr>
           </a:lstStyle>
-          <a:p/>
+          <a:p>
+            <a:endParaRPr/>
+          </a:p>
         </p:txBody>
       </p:sp>
       <p:sp>
         <p:nvSpPr>
           <p:cNvPr id="53" name="Google Shape;53;p9"/>
-          <p:cNvSpPr txBox="1"/>
+          <p:cNvSpPr txBox="1">
+            <a:spLocks noGrp="1"/>
+          </p:cNvSpPr>
           <p:nvPr>
-            <p:ph idx="12" type="sldNum"/>
+            <p:ph type="sldNum" idx="12"/>
           </p:nvPr>
         </p:nvSpPr>
         <p:spPr>
@@ -9543,11 +9730,11 @@
           </a:ln>
         </p:spPr>
         <p:txBody>
-          <a:bodyPr anchorCtr="0" anchor="ctr" bIns="45700" lIns="91425" spcFirstLastPara="1" rIns="91425" wrap="square" tIns="45700">
+          <a:bodyPr spcFirstLastPara="1" wrap="square" lIns="91425" tIns="45700" rIns="91425" bIns="45700" anchor="ctr" anchorCtr="0">
             <a:noAutofit/>
           </a:bodyPr>
           <a:lstStyle>
-            <a:lvl1pPr indent="0" lvl="0" marL="0" marR="0" algn="r">
+            <a:lvl1pPr marL="0" marR="0" lvl="0" indent="0" algn="r">
               <a:lnSpc>
                 <a:spcPct val="100000"/>
               </a:lnSpc>
@@ -9563,7 +9750,7 @@
               <a:buSzPts val="900"/>
               <a:buFont typeface="Arial"/>
               <a:buNone/>
-              <a:defRPr b="0" i="0" sz="900" u="none" cap="none" strike="noStrike">
+              <a:defRPr sz="900" b="0" i="0" u="none" strike="noStrike" cap="none">
                 <a:solidFill>
                   <a:srgbClr val="757575"/>
                 </a:solidFill>
@@ -9573,7 +9760,7 @@
                 <a:sym typeface="Arial"/>
               </a:defRPr>
             </a:lvl1pPr>
-            <a:lvl2pPr indent="0" lvl="1" marL="0" marR="0" algn="r">
+            <a:lvl2pPr marL="0" marR="0" lvl="1" indent="0" algn="r">
               <a:lnSpc>
                 <a:spcPct val="100000"/>
               </a:lnSpc>
@@ -9589,7 +9776,7 @@
               <a:buSzPts val="900"/>
               <a:buFont typeface="Arial"/>
               <a:buNone/>
-              <a:defRPr b="0" i="0" sz="900" u="none" cap="none" strike="noStrike">
+              <a:defRPr sz="900" b="0" i="0" u="none" strike="noStrike" cap="none">
                 <a:solidFill>
                   <a:srgbClr val="757575"/>
                 </a:solidFill>
@@ -9599,7 +9786,7 @@
                 <a:sym typeface="Arial"/>
               </a:defRPr>
             </a:lvl2pPr>
-            <a:lvl3pPr indent="0" lvl="2" marL="0" marR="0" algn="r">
+            <a:lvl3pPr marL="0" marR="0" lvl="2" indent="0" algn="r">
               <a:lnSpc>
                 <a:spcPct val="100000"/>
               </a:lnSpc>
@@ -9615,7 +9802,7 @@
               <a:buSzPts val="900"/>
               <a:buFont typeface="Arial"/>
               <a:buNone/>
-              <a:defRPr b="0" i="0" sz="900" u="none" cap="none" strike="noStrike">
+              <a:defRPr sz="900" b="0" i="0" u="none" strike="noStrike" cap="none">
                 <a:solidFill>
                   <a:srgbClr val="757575"/>
                 </a:solidFill>
@@ -9625,7 +9812,7 @@
                 <a:sym typeface="Arial"/>
               </a:defRPr>
             </a:lvl3pPr>
-            <a:lvl4pPr indent="0" lvl="3" marL="0" marR="0" algn="r">
+            <a:lvl4pPr marL="0" marR="0" lvl="3" indent="0" algn="r">
               <a:lnSpc>
                 <a:spcPct val="100000"/>
               </a:lnSpc>
@@ -9641,7 +9828,7 @@
               <a:buSzPts val="900"/>
               <a:buFont typeface="Arial"/>
               <a:buNone/>
-              <a:defRPr b="0" i="0" sz="900" u="none" cap="none" strike="noStrike">
+              <a:defRPr sz="900" b="0" i="0" u="none" strike="noStrike" cap="none">
                 <a:solidFill>
                   <a:srgbClr val="757575"/>
                 </a:solidFill>
@@ -9651,7 +9838,7 @@
                 <a:sym typeface="Arial"/>
               </a:defRPr>
             </a:lvl4pPr>
-            <a:lvl5pPr indent="0" lvl="4" marL="0" marR="0" algn="r">
+            <a:lvl5pPr marL="0" marR="0" lvl="4" indent="0" algn="r">
               <a:lnSpc>
                 <a:spcPct val="100000"/>
               </a:lnSpc>
@@ -9667,7 +9854,7 @@
               <a:buSzPts val="900"/>
               <a:buFont typeface="Arial"/>
               <a:buNone/>
-              <a:defRPr b="0" i="0" sz="900" u="none" cap="none" strike="noStrike">
+              <a:defRPr sz="900" b="0" i="0" u="none" strike="noStrike" cap="none">
                 <a:solidFill>
                   <a:srgbClr val="757575"/>
                 </a:solidFill>
@@ -9677,7 +9864,7 @@
                 <a:sym typeface="Arial"/>
               </a:defRPr>
             </a:lvl5pPr>
-            <a:lvl6pPr indent="0" lvl="5" marL="0" marR="0" algn="r">
+            <a:lvl6pPr marL="0" marR="0" lvl="5" indent="0" algn="r">
               <a:lnSpc>
                 <a:spcPct val="100000"/>
               </a:lnSpc>
@@ -9693,7 +9880,7 @@
               <a:buSzPts val="900"/>
               <a:buFont typeface="Arial"/>
               <a:buNone/>
-              <a:defRPr b="0" i="0" sz="900" u="none" cap="none" strike="noStrike">
+              <a:defRPr sz="900" b="0" i="0" u="none" strike="noStrike" cap="none">
                 <a:solidFill>
                   <a:srgbClr val="757575"/>
                 </a:solidFill>
@@ -9703,7 +9890,7 @@
                 <a:sym typeface="Arial"/>
               </a:defRPr>
             </a:lvl6pPr>
-            <a:lvl7pPr indent="0" lvl="6" marL="0" marR="0" algn="r">
+            <a:lvl7pPr marL="0" marR="0" lvl="6" indent="0" algn="r">
               <a:lnSpc>
                 <a:spcPct val="100000"/>
               </a:lnSpc>
@@ -9719,7 +9906,7 @@
               <a:buSzPts val="900"/>
               <a:buFont typeface="Arial"/>
               <a:buNone/>
-              <a:defRPr b="0" i="0" sz="900" u="none" cap="none" strike="noStrike">
+              <a:defRPr sz="900" b="0" i="0" u="none" strike="noStrike" cap="none">
                 <a:solidFill>
                   <a:srgbClr val="757575"/>
                 </a:solidFill>
@@ -9729,7 +9916,7 @@
                 <a:sym typeface="Arial"/>
               </a:defRPr>
             </a:lvl7pPr>
-            <a:lvl8pPr indent="0" lvl="7" marL="0" marR="0" algn="r">
+            <a:lvl8pPr marL="0" marR="0" lvl="7" indent="0" algn="r">
               <a:lnSpc>
                 <a:spcPct val="100000"/>
               </a:lnSpc>
@@ -9745,7 +9932,7 @@
               <a:buSzPts val="900"/>
               <a:buFont typeface="Arial"/>
               <a:buNone/>
-              <a:defRPr b="0" i="0" sz="900" u="none" cap="none" strike="noStrike">
+              <a:defRPr sz="900" b="0" i="0" u="none" strike="noStrike" cap="none">
                 <a:solidFill>
                   <a:srgbClr val="757575"/>
                 </a:solidFill>
@@ -9755,7 +9942,7 @@
                 <a:sym typeface="Arial"/>
               </a:defRPr>
             </a:lvl8pPr>
-            <a:lvl9pPr indent="0" lvl="8" marL="0" marR="0" algn="r">
+            <a:lvl9pPr marL="0" marR="0" lvl="8" indent="0" algn="r">
               <a:lnSpc>
                 <a:spcPct val="100000"/>
               </a:lnSpc>
@@ -9771,7 +9958,7 @@
               <a:buSzPts val="900"/>
               <a:buFont typeface="Arial"/>
               <a:buNone/>
-              <a:defRPr b="0" i="0" sz="900" u="none" cap="none" strike="noStrike">
+              <a:defRPr sz="900" b="0" i="0" u="none" strike="noStrike" cap="none">
                 <a:solidFill>
                   <a:srgbClr val="757575"/>
                 </a:solidFill>
@@ -9783,7 +9970,7 @@
             </a:lvl9pPr>
           </a:lstStyle>
           <a:p>
-            <a:pPr indent="0" lvl="0" marL="0" rtl="0" algn="r">
+            <a:pPr marL="0" lvl="0" indent="0" algn="r" rtl="0">
               <a:spcBef>
                 <a:spcPts val="0"/>
               </a:spcBef>
@@ -9809,11 +9996,11 @@
 </file>
 
 <file path=ppt/slideLayouts/slideLayout8.xml><?xml version="1.0" encoding="utf-8"?>
-<p:sldLayout xmlns:a="http://schemas.openxmlformats.org/drawingml/2006/main" xmlns:r="http://schemas.openxmlformats.org/officeDocument/2006/relationships" xmlns:mc="http://schemas.openxmlformats.org/markup-compatibility/2006" xmlns:mv="urn:schemas-microsoft-com:mac:vml" xmlns:p="http://schemas.openxmlformats.org/presentationml/2006/main" xmlns:c="http://schemas.openxmlformats.org/drawingml/2006/chart" xmlns:dgm="http://schemas.openxmlformats.org/drawingml/2006/diagram" xmlns:o="urn:schemas-microsoft-com:office:office" xmlns:v="urn:schemas-microsoft-com:vml" xmlns:pvml="urn:schemas-microsoft-com:office:powerpoint" xmlns:com="http://schemas.openxmlformats.org/drawingml/2006/compatibility" xmlns:p14="http://schemas.microsoft.com/office/powerpoint/2010/main" xmlns:p15="http://schemas.microsoft.com/office/powerpoint/2012/main" xmlns:ahyp="http://schemas.microsoft.com/office/drawing/2018/hyperlinkcolor" matchingName="캡션 있는 콘텐츠" type="objTx">
+<p:sldLayout xmlns:a="http://schemas.openxmlformats.org/drawingml/2006/main" xmlns:r="http://schemas.openxmlformats.org/officeDocument/2006/relationships" xmlns:p="http://schemas.openxmlformats.org/presentationml/2006/main" matchingName="캡션 있는 콘텐츠" type="objTx">
   <p:cSld name="OBJECT_WITH_CAPTION_TEXT">
     <p:spTree>
       <p:nvGrpSpPr>
-        <p:cNvPr id="54" name="Shape 54"/>
+        <p:cNvPr id="1" name="Shape 54"/>
         <p:cNvGrpSpPr/>
         <p:nvPr/>
       </p:nvGrpSpPr>
@@ -9828,7 +10015,9 @@
       <p:sp>
         <p:nvSpPr>
           <p:cNvPr id="55" name="Google Shape;55;p10"/>
-          <p:cNvSpPr txBox="1"/>
+          <p:cNvSpPr txBox="1">
+            <a:spLocks noGrp="1"/>
+          </p:cNvSpPr>
           <p:nvPr>
             <p:ph type="title"/>
           </p:nvPr>
@@ -9847,7 +10036,7 @@
           </a:ln>
         </p:spPr>
         <p:txBody>
-          <a:bodyPr anchorCtr="0" anchor="b" bIns="45700" lIns="91425" spcFirstLastPara="1" rIns="91425" wrap="square" tIns="45700">
+          <a:bodyPr spcFirstLastPara="1" wrap="square" lIns="91425" tIns="45700" rIns="91425" bIns="45700" anchor="b" anchorCtr="0">
             <a:normAutofit/>
           </a:bodyPr>
           <a:lstStyle>
@@ -9982,15 +10171,19 @@
               <a:defRPr/>
             </a:lvl9pPr>
           </a:lstStyle>
-          <a:p/>
+          <a:p>
+            <a:endParaRPr/>
+          </a:p>
         </p:txBody>
       </p:sp>
       <p:sp>
         <p:nvSpPr>
           <p:cNvPr id="56" name="Google Shape;56;p10"/>
-          <p:cNvSpPr txBox="1"/>
+          <p:cNvSpPr txBox="1">
+            <a:spLocks noGrp="1"/>
+          </p:cNvSpPr>
           <p:nvPr>
-            <p:ph idx="1" type="body"/>
+            <p:ph type="body" idx="1"/>
           </p:nvPr>
         </p:nvSpPr>
         <p:spPr>
@@ -10007,11 +10200,11 @@
           </a:ln>
         </p:spPr>
         <p:txBody>
-          <a:bodyPr anchorCtr="0" anchor="t" bIns="45700" lIns="91425" spcFirstLastPara="1" rIns="91425" wrap="square" tIns="45700">
+          <a:bodyPr spcFirstLastPara="1" wrap="square" lIns="91425" tIns="45700" rIns="91425" bIns="45700" anchor="t" anchorCtr="0">
             <a:normAutofit/>
           </a:bodyPr>
           <a:lstStyle>
-            <a:lvl1pPr indent="-381000" lvl="0" marL="457200" algn="l">
+            <a:lvl1pPr marL="457200" lvl="0" indent="-381000" algn="l">
               <a:lnSpc>
                 <a:spcPct val="90000"/>
               </a:lnSpc>
@@ -10028,7 +10221,7 @@
               <a:buChar char="•"/>
               <a:defRPr sz="2400"/>
             </a:lvl1pPr>
-            <a:lvl2pPr indent="-361950" lvl="1" marL="914400" algn="l">
+            <a:lvl2pPr marL="914400" lvl="1" indent="-361950" algn="l">
               <a:lnSpc>
                 <a:spcPct val="90000"/>
               </a:lnSpc>
@@ -10045,7 +10238,7 @@
               <a:buChar char="•"/>
               <a:defRPr sz="2100"/>
             </a:lvl2pPr>
-            <a:lvl3pPr indent="-342900" lvl="2" marL="1371600" algn="l">
+            <a:lvl3pPr marL="1371600" lvl="2" indent="-342900" algn="l">
               <a:lnSpc>
                 <a:spcPct val="90000"/>
               </a:lnSpc>
@@ -10062,7 +10255,7 @@
               <a:buChar char="•"/>
               <a:defRPr sz="1800"/>
             </a:lvl3pPr>
-            <a:lvl4pPr indent="-323850" lvl="3" marL="1828800" algn="l">
+            <a:lvl4pPr marL="1828800" lvl="3" indent="-323850" algn="l">
               <a:lnSpc>
                 <a:spcPct val="90000"/>
               </a:lnSpc>
@@ -10079,7 +10272,7 @@
               <a:buChar char="•"/>
               <a:defRPr sz="1500"/>
             </a:lvl4pPr>
-            <a:lvl5pPr indent="-323850" lvl="4" marL="2286000" algn="l">
+            <a:lvl5pPr marL="2286000" lvl="4" indent="-323850" algn="l">
               <a:lnSpc>
                 <a:spcPct val="90000"/>
               </a:lnSpc>
@@ -10096,7 +10289,7 @@
               <a:buChar char="•"/>
               <a:defRPr sz="1500"/>
             </a:lvl5pPr>
-            <a:lvl6pPr indent="-323850" lvl="5" marL="2743200" algn="l">
+            <a:lvl6pPr marL="2743200" lvl="5" indent="-323850" algn="l">
               <a:lnSpc>
                 <a:spcPct val="90000"/>
               </a:lnSpc>
@@ -10113,7 +10306,7 @@
               <a:buChar char="•"/>
               <a:defRPr sz="1500"/>
             </a:lvl6pPr>
-            <a:lvl7pPr indent="-323850" lvl="6" marL="3200400" algn="l">
+            <a:lvl7pPr marL="3200400" lvl="6" indent="-323850" algn="l">
               <a:lnSpc>
                 <a:spcPct val="90000"/>
               </a:lnSpc>
@@ -10130,7 +10323,7 @@
               <a:buChar char="•"/>
               <a:defRPr sz="1500"/>
             </a:lvl7pPr>
-            <a:lvl8pPr indent="-323850" lvl="7" marL="3657600" algn="l">
+            <a:lvl8pPr marL="3657600" lvl="7" indent="-323850" algn="l">
               <a:lnSpc>
                 <a:spcPct val="90000"/>
               </a:lnSpc>
@@ -10147,7 +10340,7 @@
               <a:buChar char="•"/>
               <a:defRPr sz="1500"/>
             </a:lvl8pPr>
-            <a:lvl9pPr indent="-323850" lvl="8" marL="4114800" algn="l">
+            <a:lvl9pPr marL="4114800" lvl="8" indent="-323850" algn="l">
               <a:lnSpc>
                 <a:spcPct val="90000"/>
               </a:lnSpc>
@@ -10165,15 +10358,19 @@
               <a:defRPr sz="1500"/>
             </a:lvl9pPr>
           </a:lstStyle>
-          <a:p/>
+          <a:p>
+            <a:endParaRPr/>
+          </a:p>
         </p:txBody>
       </p:sp>
       <p:sp>
         <p:nvSpPr>
           <p:cNvPr id="57" name="Google Shape;57;p10"/>
-          <p:cNvSpPr txBox="1"/>
+          <p:cNvSpPr txBox="1">
+            <a:spLocks noGrp="1"/>
+          </p:cNvSpPr>
           <p:nvPr>
-            <p:ph idx="2" type="body"/>
+            <p:ph type="body" idx="2"/>
           </p:nvPr>
         </p:nvSpPr>
         <p:spPr>
@@ -10190,11 +10387,11 @@
           </a:ln>
         </p:spPr>
         <p:txBody>
-          <a:bodyPr anchorCtr="0" anchor="t" bIns="45700" lIns="91425" spcFirstLastPara="1" rIns="91425" wrap="square" tIns="45700">
+          <a:bodyPr spcFirstLastPara="1" wrap="square" lIns="91425" tIns="45700" rIns="91425" bIns="45700" anchor="t" anchorCtr="0">
             <a:normAutofit/>
           </a:bodyPr>
           <a:lstStyle>
-            <a:lvl1pPr indent="-228600" lvl="0" marL="457200" algn="l">
+            <a:lvl1pPr marL="457200" lvl="0" indent="-228600" algn="l">
               <a:lnSpc>
                 <a:spcPct val="90000"/>
               </a:lnSpc>
@@ -10211,7 +10408,7 @@
               <a:buNone/>
               <a:defRPr sz="1200"/>
             </a:lvl1pPr>
-            <a:lvl2pPr indent="-228600" lvl="1" marL="914400" algn="l">
+            <a:lvl2pPr marL="914400" lvl="1" indent="-228600" algn="l">
               <a:lnSpc>
                 <a:spcPct val="90000"/>
               </a:lnSpc>
@@ -10228,7 +10425,7 @@
               <a:buNone/>
               <a:defRPr sz="1050"/>
             </a:lvl2pPr>
-            <a:lvl3pPr indent="-228600" lvl="2" marL="1371600" algn="l">
+            <a:lvl3pPr marL="1371600" lvl="2" indent="-228600" algn="l">
               <a:lnSpc>
                 <a:spcPct val="90000"/>
               </a:lnSpc>
@@ -10245,7 +10442,7 @@
               <a:buNone/>
               <a:defRPr sz="900"/>
             </a:lvl3pPr>
-            <a:lvl4pPr indent="-228600" lvl="3" marL="1828800" algn="l">
+            <a:lvl4pPr marL="1828800" lvl="3" indent="-228600" algn="l">
               <a:lnSpc>
                 <a:spcPct val="90000"/>
               </a:lnSpc>
@@ -10262,7 +10459,7 @@
               <a:buNone/>
               <a:defRPr sz="750"/>
             </a:lvl4pPr>
-            <a:lvl5pPr indent="-228600" lvl="4" marL="2286000" algn="l">
+            <a:lvl5pPr marL="2286000" lvl="4" indent="-228600" algn="l">
               <a:lnSpc>
                 <a:spcPct val="90000"/>
               </a:lnSpc>
@@ -10279,7 +10476,7 @@
               <a:buNone/>
               <a:defRPr sz="750"/>
             </a:lvl5pPr>
-            <a:lvl6pPr indent="-228600" lvl="5" marL="2743200" algn="l">
+            <a:lvl6pPr marL="2743200" lvl="5" indent="-228600" algn="l">
               <a:lnSpc>
                 <a:spcPct val="90000"/>
               </a:lnSpc>
@@ -10296,7 +10493,7 @@
               <a:buNone/>
               <a:defRPr sz="750"/>
             </a:lvl6pPr>
-            <a:lvl7pPr indent="-228600" lvl="6" marL="3200400" algn="l">
+            <a:lvl7pPr marL="3200400" lvl="6" indent="-228600" algn="l">
               <a:lnSpc>
                 <a:spcPct val="90000"/>
               </a:lnSpc>
@@ -10313,7 +10510,7 @@
               <a:buNone/>
               <a:defRPr sz="750"/>
             </a:lvl7pPr>
-            <a:lvl8pPr indent="-228600" lvl="7" marL="3657600" algn="l">
+            <a:lvl8pPr marL="3657600" lvl="7" indent="-228600" algn="l">
               <a:lnSpc>
                 <a:spcPct val="90000"/>
               </a:lnSpc>
@@ -10330,7 +10527,7 @@
               <a:buNone/>
               <a:defRPr sz="750"/>
             </a:lvl8pPr>
-            <a:lvl9pPr indent="-228600" lvl="8" marL="4114800" algn="l">
+            <a:lvl9pPr marL="4114800" lvl="8" indent="-228600" algn="l">
               <a:lnSpc>
                 <a:spcPct val="90000"/>
               </a:lnSpc>
@@ -10348,15 +10545,19 @@
               <a:defRPr sz="750"/>
             </a:lvl9pPr>
           </a:lstStyle>
-          <a:p/>
+          <a:p>
+            <a:endParaRPr/>
+          </a:p>
         </p:txBody>
       </p:sp>
       <p:sp>
         <p:nvSpPr>
           <p:cNvPr id="58" name="Google Shape;58;p10"/>
-          <p:cNvSpPr txBox="1"/>
+          <p:cNvSpPr txBox="1">
+            <a:spLocks noGrp="1"/>
+          </p:cNvSpPr>
           <p:nvPr>
-            <p:ph idx="10" type="dt"/>
+            <p:ph type="dt" idx="10"/>
           </p:nvPr>
         </p:nvSpPr>
         <p:spPr>
@@ -10373,7 +10574,7 @@
           </a:ln>
         </p:spPr>
         <p:txBody>
-          <a:bodyPr anchorCtr="0" anchor="ctr" bIns="45700" lIns="91425" spcFirstLastPara="1" rIns="91425" wrap="square" tIns="45700">
+          <a:bodyPr spcFirstLastPara="1" wrap="square" lIns="91425" tIns="45700" rIns="91425" bIns="45700" anchor="ctr" anchorCtr="0">
             <a:noAutofit/>
           </a:bodyPr>
           <a:lstStyle>
@@ -10504,15 +10705,19 @@
               <a:defRPr/>
             </a:lvl9pPr>
           </a:lstStyle>
-          <a:p/>
+          <a:p>
+            <a:endParaRPr/>
+          </a:p>
         </p:txBody>
       </p:sp>
       <p:sp>
         <p:nvSpPr>
           <p:cNvPr id="59" name="Google Shape;59;p10"/>
-          <p:cNvSpPr txBox="1"/>
+          <p:cNvSpPr txBox="1">
+            <a:spLocks noGrp="1"/>
+          </p:cNvSpPr>
           <p:nvPr>
-            <p:ph idx="11" type="ftr"/>
+            <p:ph type="ftr" idx="11"/>
           </p:nvPr>
         </p:nvSpPr>
         <p:spPr>
@@ -10529,7 +10734,7 @@
           </a:ln>
         </p:spPr>
         <p:txBody>
-          <a:bodyPr anchorCtr="0" anchor="ctr" bIns="45700" lIns="91425" spcFirstLastPara="1" rIns="91425" wrap="square" tIns="45700">
+          <a:bodyPr spcFirstLastPara="1" wrap="square" lIns="91425" tIns="45700" rIns="91425" bIns="45700" anchor="ctr" anchorCtr="0">
             <a:noAutofit/>
           </a:bodyPr>
           <a:lstStyle>
@@ -10660,15 +10865,19 @@
               <a:defRPr/>
             </a:lvl9pPr>
           </a:lstStyle>
-          <a:p/>
+          <a:p>
+            <a:endParaRPr/>
+          </a:p>
         </p:txBody>
       </p:sp>
       <p:sp>
         <p:nvSpPr>
           <p:cNvPr id="60" name="Google Shape;60;p10"/>
-          <p:cNvSpPr txBox="1"/>
+          <p:cNvSpPr txBox="1">
+            <a:spLocks noGrp="1"/>
+          </p:cNvSpPr>
           <p:nvPr>
-            <p:ph idx="12" type="sldNum"/>
+            <p:ph type="sldNum" idx="12"/>
           </p:nvPr>
         </p:nvSpPr>
         <p:spPr>
@@ -10685,11 +10894,11 @@
           </a:ln>
         </p:spPr>
         <p:txBody>
-          <a:bodyPr anchorCtr="0" anchor="ctr" bIns="45700" lIns="91425" spcFirstLastPara="1" rIns="91425" wrap="square" tIns="45700">
+          <a:bodyPr spcFirstLastPara="1" wrap="square" lIns="91425" tIns="45700" rIns="91425" bIns="45700" anchor="ctr" anchorCtr="0">
             <a:noAutofit/>
           </a:bodyPr>
           <a:lstStyle>
-            <a:lvl1pPr indent="0" lvl="0" marL="0" marR="0" algn="r">
+            <a:lvl1pPr marL="0" marR="0" lvl="0" indent="0" algn="r">
               <a:lnSpc>
                 <a:spcPct val="100000"/>
               </a:lnSpc>
@@ -10705,7 +10914,7 @@
               <a:buSzPts val="900"/>
               <a:buFont typeface="Arial"/>
               <a:buNone/>
-              <a:defRPr b="0" i="0" sz="900" u="none" cap="none" strike="noStrike">
+              <a:defRPr sz="900" b="0" i="0" u="none" strike="noStrike" cap="none">
                 <a:solidFill>
                   <a:srgbClr val="757575"/>
                 </a:solidFill>
@@ -10715,7 +10924,7 @@
                 <a:sym typeface="Arial"/>
               </a:defRPr>
             </a:lvl1pPr>
-            <a:lvl2pPr indent="0" lvl="1" marL="0" marR="0" algn="r">
+            <a:lvl2pPr marL="0" marR="0" lvl="1" indent="0" algn="r">
               <a:lnSpc>
                 <a:spcPct val="100000"/>
               </a:lnSpc>
@@ -10731,7 +10940,7 @@
               <a:buSzPts val="900"/>
               <a:buFont typeface="Arial"/>
               <a:buNone/>
-              <a:defRPr b="0" i="0" sz="900" u="none" cap="none" strike="noStrike">
+              <a:defRPr sz="900" b="0" i="0" u="none" strike="noStrike" cap="none">
                 <a:solidFill>
                   <a:srgbClr val="757575"/>
                 </a:solidFill>
@@ -10741,7 +10950,7 @@
                 <a:sym typeface="Arial"/>
               </a:defRPr>
             </a:lvl2pPr>
-            <a:lvl3pPr indent="0" lvl="2" marL="0" marR="0" algn="r">
+            <a:lvl3pPr marL="0" marR="0" lvl="2" indent="0" algn="r">
               <a:lnSpc>
                 <a:spcPct val="100000"/>
               </a:lnSpc>
@@ -10757,7 +10966,7 @@
               <a:buSzPts val="900"/>
               <a:buFont typeface="Arial"/>
               <a:buNone/>
-              <a:defRPr b="0" i="0" sz="900" u="none" cap="none" strike="noStrike">
+              <a:defRPr sz="900" b="0" i="0" u="none" strike="noStrike" cap="none">
                 <a:solidFill>
                   <a:srgbClr val="757575"/>
                 </a:solidFill>
@@ -10767,7 +10976,7 @@
                 <a:sym typeface="Arial"/>
               </a:defRPr>
             </a:lvl3pPr>
-            <a:lvl4pPr indent="0" lvl="3" marL="0" marR="0" algn="r">
+            <a:lvl4pPr marL="0" marR="0" lvl="3" indent="0" algn="r">
               <a:lnSpc>
                 <a:spcPct val="100000"/>
               </a:lnSpc>
@@ -10783,7 +10992,7 @@
               <a:buSzPts val="900"/>
               <a:buFont typeface="Arial"/>
               <a:buNone/>
-              <a:defRPr b="0" i="0" sz="900" u="none" cap="none" strike="noStrike">
+              <a:defRPr sz="900" b="0" i="0" u="none" strike="noStrike" cap="none">
                 <a:solidFill>
                   <a:srgbClr val="757575"/>
                 </a:solidFill>
@@ -10793,7 +11002,7 @@
                 <a:sym typeface="Arial"/>
               </a:defRPr>
             </a:lvl4pPr>
-            <a:lvl5pPr indent="0" lvl="4" marL="0" marR="0" algn="r">
+            <a:lvl5pPr marL="0" marR="0" lvl="4" indent="0" algn="r">
               <a:lnSpc>
                 <a:spcPct val="100000"/>
               </a:lnSpc>
@@ -10809,7 +11018,7 @@
               <a:buSzPts val="900"/>
               <a:buFont typeface="Arial"/>
               <a:buNone/>
-              <a:defRPr b="0" i="0" sz="900" u="none" cap="none" strike="noStrike">
+              <a:defRPr sz="900" b="0" i="0" u="none" strike="noStrike" cap="none">
                 <a:solidFill>
                   <a:srgbClr val="757575"/>
                 </a:solidFill>
@@ -10819,7 +11028,7 @@
                 <a:sym typeface="Arial"/>
               </a:defRPr>
             </a:lvl5pPr>
-            <a:lvl6pPr indent="0" lvl="5" marL="0" marR="0" algn="r">
+            <a:lvl6pPr marL="0" marR="0" lvl="5" indent="0" algn="r">
               <a:lnSpc>
                 <a:spcPct val="100000"/>
               </a:lnSpc>
@@ -10835,7 +11044,7 @@
               <a:buSzPts val="900"/>
               <a:buFont typeface="Arial"/>
               <a:buNone/>
-              <a:defRPr b="0" i="0" sz="900" u="none" cap="none" strike="noStrike">
+              <a:defRPr sz="900" b="0" i="0" u="none" strike="noStrike" cap="none">
                 <a:solidFill>
                   <a:srgbClr val="757575"/>
                 </a:solidFill>
@@ -10845,7 +11054,7 @@
                 <a:sym typeface="Arial"/>
               </a:defRPr>
             </a:lvl6pPr>
-            <a:lvl7pPr indent="0" lvl="6" marL="0" marR="0" algn="r">
+            <a:lvl7pPr marL="0" marR="0" lvl="6" indent="0" algn="r">
               <a:lnSpc>
                 <a:spcPct val="100000"/>
               </a:lnSpc>
@@ -10861,7 +11070,7 @@
               <a:buSzPts val="900"/>
               <a:buFont typeface="Arial"/>
               <a:buNone/>
-              <a:defRPr b="0" i="0" sz="900" u="none" cap="none" strike="noStrike">
+              <a:defRPr sz="900" b="0" i="0" u="none" strike="noStrike" cap="none">
                 <a:solidFill>
                   <a:srgbClr val="757575"/>
                 </a:solidFill>
@@ -10871,7 +11080,7 @@
                 <a:sym typeface="Arial"/>
               </a:defRPr>
             </a:lvl7pPr>
-            <a:lvl8pPr indent="0" lvl="7" marL="0" marR="0" algn="r">
+            <a:lvl8pPr marL="0" marR="0" lvl="7" indent="0" algn="r">
               <a:lnSpc>
                 <a:spcPct val="100000"/>
               </a:lnSpc>
@@ -10887,7 +11096,7 @@
               <a:buSzPts val="900"/>
               <a:buFont typeface="Arial"/>
               <a:buNone/>
-              <a:defRPr b="0" i="0" sz="900" u="none" cap="none" strike="noStrike">
+              <a:defRPr sz="900" b="0" i="0" u="none" strike="noStrike" cap="none">
                 <a:solidFill>
                   <a:srgbClr val="757575"/>
                 </a:solidFill>
@@ -10897,7 +11106,7 @@
                 <a:sym typeface="Arial"/>
               </a:defRPr>
             </a:lvl8pPr>
-            <a:lvl9pPr indent="0" lvl="8" marL="0" marR="0" algn="r">
+            <a:lvl9pPr marL="0" marR="0" lvl="8" indent="0" algn="r">
               <a:lnSpc>
                 <a:spcPct val="100000"/>
               </a:lnSpc>
@@ -10913,7 +11122,7 @@
               <a:buSzPts val="900"/>
               <a:buFont typeface="Arial"/>
               <a:buNone/>
-              <a:defRPr b="0" i="0" sz="900" u="none" cap="none" strike="noStrike">
+              <a:defRPr sz="900" b="0" i="0" u="none" strike="noStrike" cap="none">
                 <a:solidFill>
                   <a:srgbClr val="757575"/>
                 </a:solidFill>
@@ -10925,7 +11134,7 @@
             </a:lvl9pPr>
           </a:lstStyle>
           <a:p>
-            <a:pPr indent="0" lvl="0" marL="0" rtl="0" algn="r">
+            <a:pPr marL="0" lvl="0" indent="0" algn="r" rtl="0">
               <a:spcBef>
                 <a:spcPts val="0"/>
               </a:spcBef>
@@ -10951,11 +11160,11 @@
 </file>
 
 <file path=ppt/slideLayouts/slideLayout9.xml><?xml version="1.0" encoding="utf-8"?>
-<p:sldLayout xmlns:a="http://schemas.openxmlformats.org/drawingml/2006/main" xmlns:r="http://schemas.openxmlformats.org/officeDocument/2006/relationships" xmlns:mc="http://schemas.openxmlformats.org/markup-compatibility/2006" xmlns:mv="urn:schemas-microsoft-com:mac:vml" xmlns:p="http://schemas.openxmlformats.org/presentationml/2006/main" xmlns:c="http://schemas.openxmlformats.org/drawingml/2006/chart" xmlns:dgm="http://schemas.openxmlformats.org/drawingml/2006/diagram" xmlns:o="urn:schemas-microsoft-com:office:office" xmlns:v="urn:schemas-microsoft-com:vml" xmlns:pvml="urn:schemas-microsoft-com:office:powerpoint" xmlns:com="http://schemas.openxmlformats.org/drawingml/2006/compatibility" xmlns:p14="http://schemas.microsoft.com/office/powerpoint/2010/main" xmlns:p15="http://schemas.microsoft.com/office/powerpoint/2012/main" xmlns:ahyp="http://schemas.microsoft.com/office/drawing/2018/hyperlinkcolor" matchingName="캡션 있는 그림" type="picTx">
+<p:sldLayout xmlns:a="http://schemas.openxmlformats.org/drawingml/2006/main" xmlns:r="http://schemas.openxmlformats.org/officeDocument/2006/relationships" xmlns:p="http://schemas.openxmlformats.org/presentationml/2006/main" matchingName="캡션 있는 그림" type="picTx">
   <p:cSld name="PICTURE_WITH_CAPTION_TEXT">
     <p:spTree>
       <p:nvGrpSpPr>
-        <p:cNvPr id="61" name="Shape 61"/>
+        <p:cNvPr id="1" name="Shape 61"/>
         <p:cNvGrpSpPr/>
         <p:nvPr/>
       </p:nvGrpSpPr>
@@ -10970,7 +11179,9 @@
       <p:sp>
         <p:nvSpPr>
           <p:cNvPr id="62" name="Google Shape;62;p11"/>
-          <p:cNvSpPr txBox="1"/>
+          <p:cNvSpPr txBox="1">
+            <a:spLocks noGrp="1"/>
+          </p:cNvSpPr>
           <p:nvPr>
             <p:ph type="title"/>
           </p:nvPr>
@@ -10989,7 +11200,7 @@
           </a:ln>
         </p:spPr>
         <p:txBody>
-          <a:bodyPr anchorCtr="0" anchor="b" bIns="45700" lIns="91425" spcFirstLastPara="1" rIns="91425" wrap="square" tIns="45700">
+          <a:bodyPr spcFirstLastPara="1" wrap="square" lIns="91425" tIns="45700" rIns="91425" bIns="45700" anchor="b" anchorCtr="0">
             <a:normAutofit/>
           </a:bodyPr>
           <a:lstStyle>
@@ -11124,15 +11335,19 @@
               <a:defRPr/>
             </a:lvl9pPr>
           </a:lstStyle>
-          <a:p/>
+          <a:p>
+            <a:endParaRPr/>
+          </a:p>
         </p:txBody>
       </p:sp>
       <p:sp>
         <p:nvSpPr>
           <p:cNvPr id="63" name="Google Shape;63;p11"/>
-          <p:cNvSpPr/>
+          <p:cNvSpPr>
+            <a:spLocks noGrp="1"/>
+          </p:cNvSpPr>
           <p:nvPr>
-            <p:ph idx="2" type="pic"/>
+            <p:ph type="pic" idx="2"/>
           </p:nvPr>
         </p:nvSpPr>
         <p:spPr>
@@ -11152,9 +11367,11 @@
       <p:sp>
         <p:nvSpPr>
           <p:cNvPr id="64" name="Google Shape;64;p11"/>
-          <p:cNvSpPr txBox="1"/>
+          <p:cNvSpPr txBox="1">
+            <a:spLocks noGrp="1"/>
+          </p:cNvSpPr>
           <p:nvPr>
-            <p:ph idx="1" type="body"/>
+            <p:ph type="body" idx="1"/>
           </p:nvPr>
         </p:nvSpPr>
         <p:spPr>
@@ -11171,11 +11388,11 @@
           </a:ln>
         </p:spPr>
         <p:txBody>
-          <a:bodyPr anchorCtr="0" anchor="t" bIns="45700" lIns="91425" spcFirstLastPara="1" rIns="91425" wrap="square" tIns="45700">
+          <a:bodyPr spcFirstLastPara="1" wrap="square" lIns="91425" tIns="45700" rIns="91425" bIns="45700" anchor="t" anchorCtr="0">
             <a:normAutofit/>
           </a:bodyPr>
           <a:lstStyle>
-            <a:lvl1pPr indent="-228600" lvl="0" marL="457200" algn="l">
+            <a:lvl1pPr marL="457200" lvl="0" indent="-228600" algn="l">
               <a:lnSpc>
                 <a:spcPct val="90000"/>
               </a:lnSpc>
@@ -11192,7 +11409,7 @@
               <a:buNone/>
               <a:defRPr sz="1200"/>
             </a:lvl1pPr>
-            <a:lvl2pPr indent="-228600" lvl="1" marL="914400" algn="l">
+            <a:lvl2pPr marL="914400" lvl="1" indent="-228600" algn="l">
               <a:lnSpc>
                 <a:spcPct val="90000"/>
               </a:lnSpc>
@@ -11209,7 +11426,7 @@
               <a:buNone/>
               <a:defRPr sz="1050"/>
             </a:lvl2pPr>
-            <a:lvl3pPr indent="-228600" lvl="2" marL="1371600" algn="l">
+            <a:lvl3pPr marL="1371600" lvl="2" indent="-228600" algn="l">
               <a:lnSpc>
                 <a:spcPct val="90000"/>
               </a:lnSpc>
@@ -11226,7 +11443,7 @@
               <a:buNone/>
               <a:defRPr sz="900"/>
             </a:lvl3pPr>
-            <a:lvl4pPr indent="-228600" lvl="3" marL="1828800" algn="l">
+            <a:lvl4pPr marL="1828800" lvl="3" indent="-228600" algn="l">
               <a:lnSpc>
                 <a:spcPct val="90000"/>
               </a:lnSpc>
@@ -11243,7 +11460,7 @@
               <a:buNone/>
               <a:defRPr sz="750"/>
             </a:lvl4pPr>
-            <a:lvl5pPr indent="-228600" lvl="4" marL="2286000" algn="l">
+            <a:lvl5pPr marL="2286000" lvl="4" indent="-228600" algn="l">
               <a:lnSpc>
                 <a:spcPct val="90000"/>
               </a:lnSpc>
@@ -11260,7 +11477,7 @@
               <a:buNone/>
               <a:defRPr sz="750"/>
             </a:lvl5pPr>
-            <a:lvl6pPr indent="-228600" lvl="5" marL="2743200" algn="l">
+            <a:lvl6pPr marL="2743200" lvl="5" indent="-228600" algn="l">
               <a:lnSpc>
                 <a:spcPct val="90000"/>
               </a:lnSpc>
@@ -11277,7 +11494,7 @@
               <a:buNone/>
               <a:defRPr sz="750"/>
             </a:lvl6pPr>
-            <a:lvl7pPr indent="-228600" lvl="6" marL="3200400" algn="l">
+            <a:lvl7pPr marL="3200400" lvl="6" indent="-228600" algn="l">
               <a:lnSpc>
                 <a:spcPct val="90000"/>
               </a:lnSpc>
@@ -11294,7 +11511,7 @@
               <a:buNone/>
               <a:defRPr sz="750"/>
             </a:lvl7pPr>
-            <a:lvl8pPr indent="-228600" lvl="7" marL="3657600" algn="l">
+            <a:lvl8pPr marL="3657600" lvl="7" indent="-228600" algn="l">
               <a:lnSpc>
                 <a:spcPct val="90000"/>
               </a:lnSpc>
@@ -11311,7 +11528,7 @@
               <a:buNone/>
               <a:defRPr sz="750"/>
             </a:lvl8pPr>
-            <a:lvl9pPr indent="-228600" lvl="8" marL="4114800" algn="l">
+            <a:lvl9pPr marL="4114800" lvl="8" indent="-228600" algn="l">
               <a:lnSpc>
                 <a:spcPct val="90000"/>
               </a:lnSpc>
@@ -11329,15 +11546,19 @@
               <a:defRPr sz="750"/>
             </a:lvl9pPr>
           </a:lstStyle>
-          <a:p/>
+          <a:p>
+            <a:endParaRPr/>
+          </a:p>
         </p:txBody>
       </p:sp>
       <p:sp>
         <p:nvSpPr>
           <p:cNvPr id="65" name="Google Shape;65;p11"/>
-          <p:cNvSpPr txBox="1"/>
+          <p:cNvSpPr txBox="1">
+            <a:spLocks noGrp="1"/>
+          </p:cNvSpPr>
           <p:nvPr>
-            <p:ph idx="10" type="dt"/>
+            <p:ph type="dt" idx="10"/>
           </p:nvPr>
         </p:nvSpPr>
         <p:spPr>
@@ -11354,7 +11575,7 @@
           </a:ln>
         </p:spPr>
         <p:txBody>
-          <a:bodyPr anchorCtr="0" anchor="ctr" bIns="45700" lIns="91425" spcFirstLastPara="1" rIns="91425" wrap="square" tIns="45700">
+          <a:bodyPr spcFirstLastPara="1" wrap="square" lIns="91425" tIns="45700" rIns="91425" bIns="45700" anchor="ctr" anchorCtr="0">
             <a:noAutofit/>
           </a:bodyPr>
           <a:lstStyle>
@@ -11485,15 +11706,19 @@
               <a:defRPr/>
             </a:lvl9pPr>
           </a:lstStyle>
-          <a:p/>
+          <a:p>
+            <a:endParaRPr/>
+          </a:p>
         </p:txBody>
       </p:sp>
       <p:sp>
         <p:nvSpPr>
           <p:cNvPr id="66" name="Google Shape;66;p11"/>
-          <p:cNvSpPr txBox="1"/>
+          <p:cNvSpPr txBox="1">
+            <a:spLocks noGrp="1"/>
+          </p:cNvSpPr>
           <p:nvPr>
-            <p:ph idx="11" type="ftr"/>
+            <p:ph type="ftr" idx="11"/>
           </p:nvPr>
         </p:nvSpPr>
         <p:spPr>
@@ -11510,7 +11735,7 @@
           </a:ln>
         </p:spPr>
         <p:txBody>
-          <a:bodyPr anchorCtr="0" anchor="ctr" bIns="45700" lIns="91425" spcFirstLastPara="1" rIns="91425" wrap="square" tIns="45700">
+          <a:bodyPr spcFirstLastPara="1" wrap="square" lIns="91425" tIns="45700" rIns="91425" bIns="45700" anchor="ctr" anchorCtr="0">
             <a:noAutofit/>
           </a:bodyPr>
           <a:lstStyle>
@@ -11641,15 +11866,19 @@
               <a:defRPr/>
             </a:lvl9pPr>
           </a:lstStyle>
-          <a:p/>
+          <a:p>
+            <a:endParaRPr/>
+          </a:p>
         </p:txBody>
       </p:sp>
       <p:sp>
         <p:nvSpPr>
           <p:cNvPr id="67" name="Google Shape;67;p11"/>
-          <p:cNvSpPr txBox="1"/>
+          <p:cNvSpPr txBox="1">
+            <a:spLocks noGrp="1"/>
+          </p:cNvSpPr>
           <p:nvPr>
-            <p:ph idx="12" type="sldNum"/>
+            <p:ph type="sldNum" idx="12"/>
           </p:nvPr>
         </p:nvSpPr>
         <p:spPr>
@@ -11666,11 +11895,11 @@
           </a:ln>
         </p:spPr>
         <p:txBody>
-          <a:bodyPr anchorCtr="0" anchor="ctr" bIns="45700" lIns="91425" spcFirstLastPara="1" rIns="91425" wrap="square" tIns="45700">
+          <a:bodyPr spcFirstLastPara="1" wrap="square" lIns="91425" tIns="45700" rIns="91425" bIns="45700" anchor="ctr" anchorCtr="0">
             <a:noAutofit/>
           </a:bodyPr>
           <a:lstStyle>
-            <a:lvl1pPr indent="0" lvl="0" marL="0" marR="0" algn="r">
+            <a:lvl1pPr marL="0" marR="0" lvl="0" indent="0" algn="r">
               <a:lnSpc>
                 <a:spcPct val="100000"/>
               </a:lnSpc>
@@ -11686,7 +11915,7 @@
               <a:buSzPts val="900"/>
               <a:buFont typeface="Arial"/>
               <a:buNone/>
-              <a:defRPr b="0" i="0" sz="900" u="none" cap="none" strike="noStrike">
+              <a:defRPr sz="900" b="0" i="0" u="none" strike="noStrike" cap="none">
                 <a:solidFill>
                   <a:srgbClr val="757575"/>
                 </a:solidFill>
@@ -11696,7 +11925,7 @@
                 <a:sym typeface="Arial"/>
               </a:defRPr>
             </a:lvl1pPr>
-            <a:lvl2pPr indent="0" lvl="1" marL="0" marR="0" algn="r">
+            <a:lvl2pPr marL="0" marR="0" lvl="1" indent="0" algn="r">
               <a:lnSpc>
                 <a:spcPct val="100000"/>
               </a:lnSpc>
@@ -11712,7 +11941,7 @@
               <a:buSzPts val="900"/>
               <a:buFont typeface="Arial"/>
               <a:buNone/>
-              <a:defRPr b="0" i="0" sz="900" u="none" cap="none" strike="noStrike">
+              <a:defRPr sz="900" b="0" i="0" u="none" strike="noStrike" cap="none">
                 <a:solidFill>
                   <a:srgbClr val="757575"/>
                 </a:solidFill>
@@ -11722,7 +11951,7 @@
                 <a:sym typeface="Arial"/>
               </a:defRPr>
             </a:lvl2pPr>
-            <a:lvl3pPr indent="0" lvl="2" marL="0" marR="0" algn="r">
+            <a:lvl3pPr marL="0" marR="0" lvl="2" indent="0" algn="r">
               <a:lnSpc>
                 <a:spcPct val="100000"/>
               </a:lnSpc>
@@ -11738,7 +11967,7 @@
               <a:buSzPts val="900"/>
               <a:buFont typeface="Arial"/>
               <a:buNone/>
-              <a:defRPr b="0" i="0" sz="900" u="none" cap="none" strike="noStrike">
+              <a:defRPr sz="900" b="0" i="0" u="none" strike="noStrike" cap="none">
                 <a:solidFill>
                   <a:srgbClr val="757575"/>
                 </a:solidFill>
@@ -11748,7 +11977,7 @@
                 <a:sym typeface="Arial"/>
               </a:defRPr>
             </a:lvl3pPr>
-            <a:lvl4pPr indent="0" lvl="3" marL="0" marR="0" algn="r">
+            <a:lvl4pPr marL="0" marR="0" lvl="3" indent="0" algn="r">
               <a:lnSpc>
                 <a:spcPct val="100000"/>
               </a:lnSpc>
@@ -11764,7 +11993,7 @@
               <a:buSzPts val="900"/>
               <a:buFont typeface="Arial"/>
               <a:buNone/>
-              <a:defRPr b="0" i="0" sz="900" u="none" cap="none" strike="noStrike">
+              <a:defRPr sz="900" b="0" i="0" u="none" strike="noStrike" cap="none">
                 <a:solidFill>
                   <a:srgbClr val="757575"/>
                 </a:solidFill>
@@ -11774,7 +12003,7 @@
                 <a:sym typeface="Arial"/>
               </a:defRPr>
             </a:lvl4pPr>
-            <a:lvl5pPr indent="0" lvl="4" marL="0" marR="0" algn="r">
+            <a:lvl5pPr marL="0" marR="0" lvl="4" indent="0" algn="r">
               <a:lnSpc>
                 <a:spcPct val="100000"/>
               </a:lnSpc>
@@ -11790,7 +12019,7 @@
               <a:buSzPts val="900"/>
               <a:buFont typeface="Arial"/>
               <a:buNone/>
-              <a:defRPr b="0" i="0" sz="900" u="none" cap="none" strike="noStrike">
+              <a:defRPr sz="900" b="0" i="0" u="none" strike="noStrike" cap="none">
                 <a:solidFill>
                   <a:srgbClr val="757575"/>
                 </a:solidFill>
@@ -11800,7 +12029,7 @@
                 <a:sym typeface="Arial"/>
               </a:defRPr>
             </a:lvl5pPr>
-            <a:lvl6pPr indent="0" lvl="5" marL="0" marR="0" algn="r">
+            <a:lvl6pPr marL="0" marR="0" lvl="5" indent="0" algn="r">
               <a:lnSpc>
                 <a:spcPct val="100000"/>
               </a:lnSpc>
@@ -11816,7 +12045,7 @@
               <a:buSzPts val="900"/>
               <a:buFont typeface="Arial"/>
               <a:buNone/>
-              <a:defRPr b="0" i="0" sz="900" u="none" cap="none" strike="noStrike">
+              <a:defRPr sz="900" b="0" i="0" u="none" strike="noStrike" cap="none">
                 <a:solidFill>
                   <a:srgbClr val="757575"/>
                 </a:solidFill>
@@ -11826,7 +12055,7 @@
                 <a:sym typeface="Arial"/>
               </a:defRPr>
             </a:lvl6pPr>
-            <a:lvl7pPr indent="0" lvl="6" marL="0" marR="0" algn="r">
+            <a:lvl7pPr marL="0" marR="0" lvl="6" indent="0" algn="r">
               <a:lnSpc>
                 <a:spcPct val="100000"/>
               </a:lnSpc>
@@ -11842,7 +12071,7 @@
               <a:buSzPts val="900"/>
               <a:buFont typeface="Arial"/>
               <a:buNone/>
-              <a:defRPr b="0" i="0" sz="900" u="none" cap="none" strike="noStrike">
+              <a:defRPr sz="900" b="0" i="0" u="none" strike="noStrike" cap="none">
                 <a:solidFill>
                   <a:srgbClr val="757575"/>
                 </a:solidFill>
@@ -11852,7 +12081,7 @@
                 <a:sym typeface="Arial"/>
               </a:defRPr>
             </a:lvl7pPr>
-            <a:lvl8pPr indent="0" lvl="7" marL="0" marR="0" algn="r">
+            <a:lvl8pPr marL="0" marR="0" lvl="7" indent="0" algn="r">
               <a:lnSpc>
                 <a:spcPct val="100000"/>
               </a:lnSpc>
@@ -11868,7 +12097,7 @@
               <a:buSzPts val="900"/>
               <a:buFont typeface="Arial"/>
               <a:buNone/>
-              <a:defRPr b="0" i="0" sz="900" u="none" cap="none" strike="noStrike">
+              <a:defRPr sz="900" b="0" i="0" u="none" strike="noStrike" cap="none">
                 <a:solidFill>
                   <a:srgbClr val="757575"/>
                 </a:solidFill>
@@ -11878,7 +12107,7 @@
                 <a:sym typeface="Arial"/>
               </a:defRPr>
             </a:lvl8pPr>
-            <a:lvl9pPr indent="0" lvl="8" marL="0" marR="0" algn="r">
+            <a:lvl9pPr marL="0" marR="0" lvl="8" indent="0" algn="r">
               <a:lnSpc>
                 <a:spcPct val="100000"/>
               </a:lnSpc>
@@ -11894,7 +12123,7 @@
               <a:buSzPts val="900"/>
               <a:buFont typeface="Arial"/>
               <a:buNone/>
-              <a:defRPr b="0" i="0" sz="900" u="none" cap="none" strike="noStrike">
+              <a:defRPr sz="900" b="0" i="0" u="none" strike="noStrike" cap="none">
                 <a:solidFill>
                   <a:srgbClr val="757575"/>
                 </a:solidFill>
@@ -11906,7 +12135,7 @@
             </a:lvl9pPr>
           </a:lstStyle>
           <a:p>
-            <a:pPr indent="0" lvl="0" marL="0" rtl="0" algn="r">
+            <a:pPr marL="0" lvl="0" indent="0" algn="r" rtl="0">
               <a:spcBef>
                 <a:spcPts val="0"/>
               </a:spcBef>
@@ -11932,18 +12161,19 @@
 </file>
 
 <file path=ppt/slideMasters/slideMaster1.xml><?xml version="1.0" encoding="utf-8"?>
-<p:sldMaster xmlns:a="http://schemas.openxmlformats.org/drawingml/2006/main" xmlns:r="http://schemas.openxmlformats.org/officeDocument/2006/relationships" xmlns:mc="http://schemas.openxmlformats.org/markup-compatibility/2006" xmlns:mv="urn:schemas-microsoft-com:mac:vml" xmlns:p="http://schemas.openxmlformats.org/presentationml/2006/main" xmlns:c="http://schemas.openxmlformats.org/drawingml/2006/chart" xmlns:dgm="http://schemas.openxmlformats.org/drawingml/2006/diagram" xmlns:o="urn:schemas-microsoft-com:office:office" xmlns:v="urn:schemas-microsoft-com:vml" xmlns:pvml="urn:schemas-microsoft-com:office:powerpoint" xmlns:com="http://schemas.openxmlformats.org/drawingml/2006/compatibility" xmlns:p14="http://schemas.microsoft.com/office/powerpoint/2010/main" xmlns:p15="http://schemas.microsoft.com/office/powerpoint/2012/main" xmlns:ahyp="http://schemas.microsoft.com/office/drawing/2018/hyperlinkcolor">
+<p:sldMaster xmlns:a="http://schemas.openxmlformats.org/drawingml/2006/main" xmlns:r="http://schemas.openxmlformats.org/officeDocument/2006/relationships" xmlns:p="http://schemas.openxmlformats.org/presentationml/2006/main">
   <p:cSld>
     <p:bg>
       <p:bgPr>
         <a:solidFill>
           <a:schemeClr val="lt1"/>
         </a:solidFill>
+        <a:effectLst/>
       </p:bgPr>
     </p:bg>
     <p:spTree>
       <p:nvGrpSpPr>
-        <p:cNvPr id="5" name="Shape 5"/>
+        <p:cNvPr id="1" name="Shape 5"/>
         <p:cNvGrpSpPr/>
         <p:nvPr/>
       </p:nvGrpSpPr>
@@ -11958,7 +12188,9 @@
       <p:sp>
         <p:nvSpPr>
           <p:cNvPr id="6" name="Google Shape;6;p2"/>
-          <p:cNvSpPr txBox="1"/>
+          <p:cNvSpPr txBox="1">
+            <a:spLocks noGrp="1"/>
+          </p:cNvSpPr>
           <p:nvPr>
             <p:ph type="title"/>
           </p:nvPr>
@@ -11977,11 +12209,11 @@
           </a:ln>
         </p:spPr>
         <p:txBody>
-          <a:bodyPr anchorCtr="0" anchor="ctr" bIns="45700" lIns="91425" spcFirstLastPara="1" rIns="91425" wrap="square" tIns="45700">
+          <a:bodyPr spcFirstLastPara="1" wrap="square" lIns="91425" tIns="45700" rIns="91425" bIns="45700" anchor="ctr" anchorCtr="0">
             <a:normAutofit/>
           </a:bodyPr>
           <a:lstStyle>
-            <a:lvl1pPr lvl="0" marR="0" rtl="0" algn="l">
+            <a:lvl1pPr marR="0" lvl="0" algn="l" rtl="0">
               <a:lnSpc>
                 <a:spcPct val="90000"/>
               </a:lnSpc>
@@ -11997,7 +12229,7 @@
               <a:buSzPts val="3300"/>
               <a:buFont typeface="Play"/>
               <a:buNone/>
-              <a:defRPr b="0" i="0" sz="3300" u="none" cap="none" strike="noStrike">
+              <a:defRPr sz="3300" b="0" i="0" u="none" strike="noStrike" cap="none">
                 <a:solidFill>
                   <a:schemeClr val="dk1"/>
                 </a:solidFill>
@@ -12007,7 +12239,7 @@
                 <a:sym typeface="Play"/>
               </a:defRPr>
             </a:lvl1pPr>
-            <a:lvl2pPr lvl="1" marR="0" rtl="0" algn="l">
+            <a:lvl2pPr marR="0" lvl="1" algn="l" rtl="0">
               <a:lnSpc>
                 <a:spcPct val="100000"/>
               </a:lnSpc>
@@ -12023,7 +12255,7 @@
               <a:buSzPts val="1400"/>
               <a:buFont typeface="Arial"/>
               <a:buNone/>
-              <a:defRPr b="0" i="0" sz="1800" u="none" cap="none" strike="noStrike">
+              <a:defRPr sz="1800" b="0" i="0" u="none" strike="noStrike" cap="none">
                 <a:solidFill>
                   <a:srgbClr val="000000"/>
                 </a:solidFill>
@@ -12033,7 +12265,7 @@
                 <a:sym typeface="Arial"/>
               </a:defRPr>
             </a:lvl2pPr>
-            <a:lvl3pPr lvl="2" marR="0" rtl="0" algn="l">
+            <a:lvl3pPr marR="0" lvl="2" algn="l" rtl="0">
               <a:lnSpc>
                 <a:spcPct val="100000"/>
               </a:lnSpc>
@@ -12049,7 +12281,7 @@
               <a:buSzPts val="1400"/>
               <a:buFont typeface="Arial"/>
               <a:buNone/>
-              <a:defRPr b="0" i="0" sz="1800" u="none" cap="none" strike="noStrike">
+              <a:defRPr sz="1800" b="0" i="0" u="none" strike="noStrike" cap="none">
                 <a:solidFill>
                   <a:srgbClr val="000000"/>
                 </a:solidFill>
@@ -12059,7 +12291,7 @@
                 <a:sym typeface="Arial"/>
               </a:defRPr>
             </a:lvl3pPr>
-            <a:lvl4pPr lvl="3" marR="0" rtl="0" algn="l">
+            <a:lvl4pPr marR="0" lvl="3" algn="l" rtl="0">
               <a:lnSpc>
                 <a:spcPct val="100000"/>
               </a:lnSpc>
@@ -12075,7 +12307,7 @@
               <a:buSzPts val="1400"/>
               <a:buFont typeface="Arial"/>
               <a:buNone/>
-              <a:defRPr b="0" i="0" sz="1800" u="none" cap="none" strike="noStrike">
+              <a:defRPr sz="1800" b="0" i="0" u="none" strike="noStrike" cap="none">
                 <a:solidFill>
                   <a:srgbClr val="000000"/>
                 </a:solidFill>
@@ -12085,7 +12317,7 @@
                 <a:sym typeface="Arial"/>
               </a:defRPr>
             </a:lvl4pPr>
-            <a:lvl5pPr lvl="4" marR="0" rtl="0" algn="l">
+            <a:lvl5pPr marR="0" lvl="4" algn="l" rtl="0">
               <a:lnSpc>
                 <a:spcPct val="100000"/>
               </a:lnSpc>
@@ -12101,7 +12333,7 @@
               <a:buSzPts val="1400"/>
               <a:buFont typeface="Arial"/>
               <a:buNone/>
-              <a:defRPr b="0" i="0" sz="1800" u="none" cap="none" strike="noStrike">
+              <a:defRPr sz="1800" b="0" i="0" u="none" strike="noStrike" cap="none">
                 <a:solidFill>
                   <a:srgbClr val="000000"/>
                 </a:solidFill>
@@ -12111,7 +12343,7 @@
                 <a:sym typeface="Arial"/>
               </a:defRPr>
             </a:lvl5pPr>
-            <a:lvl6pPr lvl="5" marR="0" rtl="0" algn="l">
+            <a:lvl6pPr marR="0" lvl="5" algn="l" rtl="0">
               <a:lnSpc>
                 <a:spcPct val="100000"/>
               </a:lnSpc>
@@ -12127,7 +12359,7 @@
               <a:buSzPts val="1400"/>
               <a:buFont typeface="Arial"/>
               <a:buNone/>
-              <a:defRPr b="0" i="0" sz="1800" u="none" cap="none" strike="noStrike">
+              <a:defRPr sz="1800" b="0" i="0" u="none" strike="noStrike" cap="none">
                 <a:solidFill>
                   <a:srgbClr val="000000"/>
                 </a:solidFill>
@@ -12137,7 +12369,7 @@
                 <a:sym typeface="Arial"/>
               </a:defRPr>
             </a:lvl6pPr>
-            <a:lvl7pPr lvl="6" marR="0" rtl="0" algn="l">
+            <a:lvl7pPr marR="0" lvl="6" algn="l" rtl="0">
               <a:lnSpc>
                 <a:spcPct val="100000"/>
               </a:lnSpc>
@@ -12153,7 +12385,7 @@
               <a:buSzPts val="1400"/>
               <a:buFont typeface="Arial"/>
               <a:buNone/>
-              <a:defRPr b="0" i="0" sz="1800" u="none" cap="none" strike="noStrike">
+              <a:defRPr sz="1800" b="0" i="0" u="none" strike="noStrike" cap="none">
                 <a:solidFill>
                   <a:srgbClr val="000000"/>
                 </a:solidFill>
@@ -12163,7 +12395,7 @@
                 <a:sym typeface="Arial"/>
               </a:defRPr>
             </a:lvl7pPr>
-            <a:lvl8pPr lvl="7" marR="0" rtl="0" algn="l">
+            <a:lvl8pPr marR="0" lvl="7" algn="l" rtl="0">
               <a:lnSpc>
                 <a:spcPct val="100000"/>
               </a:lnSpc>
@@ -12179,7 +12411,7 @@
               <a:buSzPts val="1400"/>
               <a:buFont typeface="Arial"/>
               <a:buNone/>
-              <a:defRPr b="0" i="0" sz="1800" u="none" cap="none" strike="noStrike">
+              <a:defRPr sz="1800" b="0" i="0" u="none" strike="noStrike" cap="none">
                 <a:solidFill>
                   <a:srgbClr val="000000"/>
                 </a:solidFill>
@@ -12189,7 +12421,7 @@
                 <a:sym typeface="Arial"/>
               </a:defRPr>
             </a:lvl8pPr>
-            <a:lvl9pPr lvl="8" marR="0" rtl="0" algn="l">
+            <a:lvl9pPr marR="0" lvl="8" algn="l" rtl="0">
               <a:lnSpc>
                 <a:spcPct val="100000"/>
               </a:lnSpc>
@@ -12205,7 +12437,7 @@
               <a:buSzPts val="1400"/>
               <a:buFont typeface="Arial"/>
               <a:buNone/>
-              <a:defRPr b="0" i="0" sz="1800" u="none" cap="none" strike="noStrike">
+              <a:defRPr sz="1800" b="0" i="0" u="none" strike="noStrike" cap="none">
                 <a:solidFill>
                   <a:srgbClr val="000000"/>
                 </a:solidFill>
@@ -12216,15 +12448,19 @@
               </a:defRPr>
             </a:lvl9pPr>
           </a:lstStyle>
-          <a:p/>
+          <a:p>
+            <a:endParaRPr/>
+          </a:p>
         </p:txBody>
       </p:sp>
       <p:sp>
         <p:nvSpPr>
           <p:cNvPr id="7" name="Google Shape;7;p2"/>
-          <p:cNvSpPr txBox="1"/>
+          <p:cNvSpPr txBox="1">
+            <a:spLocks noGrp="1"/>
+          </p:cNvSpPr>
           <p:nvPr>
-            <p:ph idx="1" type="body"/>
+            <p:ph type="body" idx="1"/>
           </p:nvPr>
         </p:nvSpPr>
         <p:spPr>
@@ -12241,11 +12477,11 @@
           </a:ln>
         </p:spPr>
         <p:txBody>
-          <a:bodyPr anchorCtr="0" anchor="t" bIns="45700" lIns="91425" spcFirstLastPara="1" rIns="91425" wrap="square" tIns="45700">
+          <a:bodyPr spcFirstLastPara="1" wrap="square" lIns="91425" tIns="45700" rIns="91425" bIns="45700" anchor="t" anchorCtr="0">
             <a:normAutofit/>
           </a:bodyPr>
           <a:lstStyle>
-            <a:lvl1pPr indent="-361950" lvl="0" marL="457200" marR="0" rtl="0" algn="l">
+            <a:lvl1pPr marL="457200" marR="0" lvl="0" indent="-361950" algn="l" rtl="0">
               <a:lnSpc>
                 <a:spcPct val="90000"/>
               </a:lnSpc>
@@ -12261,7 +12497,7 @@
               <a:buSzPts val="2100"/>
               <a:buFont typeface="Arial"/>
               <a:buChar char="•"/>
-              <a:defRPr b="0" i="0" sz="2100" u="none" cap="none" strike="noStrike">
+              <a:defRPr sz="2100" b="0" i="0" u="none" strike="noStrike" cap="none">
                 <a:solidFill>
                   <a:schemeClr val="dk1"/>
                 </a:solidFill>
@@ -12271,7 +12507,7 @@
                 <a:sym typeface="Arial"/>
               </a:defRPr>
             </a:lvl1pPr>
-            <a:lvl2pPr indent="-342900" lvl="1" marL="914400" marR="0" rtl="0" algn="l">
+            <a:lvl2pPr marL="914400" marR="0" lvl="1" indent="-342900" algn="l" rtl="0">
               <a:lnSpc>
                 <a:spcPct val="90000"/>
               </a:lnSpc>
@@ -12287,7 +12523,7 @@
               <a:buSzPts val="1800"/>
               <a:buFont typeface="Arial"/>
               <a:buChar char="•"/>
-              <a:defRPr b="0" i="0" sz="1800" u="none" cap="none" strike="noStrike">
+              <a:defRPr sz="1800" b="0" i="0" u="none" strike="noStrike" cap="none">
                 <a:solidFill>
                   <a:schemeClr val="dk1"/>
                 </a:solidFill>
@@ -12297,7 +12533,7 @@
                 <a:sym typeface="Arial"/>
               </a:defRPr>
             </a:lvl2pPr>
-            <a:lvl3pPr indent="-323850" lvl="2" marL="1371600" marR="0" rtl="0" algn="l">
+            <a:lvl3pPr marL="1371600" marR="0" lvl="2" indent="-323850" algn="l" rtl="0">
               <a:lnSpc>
                 <a:spcPct val="90000"/>
               </a:lnSpc>
@@ -12313,7 +12549,7 @@
               <a:buSzPts val="1500"/>
               <a:buFont typeface="Arial"/>
               <a:buChar char="•"/>
-              <a:defRPr b="0" i="0" sz="1500" u="none" cap="none" strike="noStrike">
+              <a:defRPr sz="1500" b="0" i="0" u="none" strike="noStrike" cap="none">
                 <a:solidFill>
                   <a:schemeClr val="dk1"/>
                 </a:solidFill>
@@ -12323,7 +12559,7 @@
                 <a:sym typeface="Arial"/>
               </a:defRPr>
             </a:lvl3pPr>
-            <a:lvl4pPr indent="-314325" lvl="3" marL="1828800" marR="0" rtl="0" algn="l">
+            <a:lvl4pPr marL="1828800" marR="0" lvl="3" indent="-314325" algn="l" rtl="0">
               <a:lnSpc>
                 <a:spcPct val="90000"/>
               </a:lnSpc>
@@ -12339,7 +12575,7 @@
               <a:buSzPts val="1350"/>
               <a:buFont typeface="Arial"/>
               <a:buChar char="•"/>
-              <a:defRPr b="0" i="0" sz="1350" u="none" cap="none" strike="noStrike">
+              <a:defRPr sz="1350" b="0" i="0" u="none" strike="noStrike" cap="none">
                 <a:solidFill>
                   <a:schemeClr val="dk1"/>
                 </a:solidFill>
@@ -12349,7 +12585,7 @@
                 <a:sym typeface="Arial"/>
               </a:defRPr>
             </a:lvl4pPr>
-            <a:lvl5pPr indent="-314325" lvl="4" marL="2286000" marR="0" rtl="0" algn="l">
+            <a:lvl5pPr marL="2286000" marR="0" lvl="4" indent="-314325" algn="l" rtl="0">
               <a:lnSpc>
                 <a:spcPct val="90000"/>
               </a:lnSpc>
@@ -12365,7 +12601,7 @@
               <a:buSzPts val="1350"/>
               <a:buFont typeface="Arial"/>
               <a:buChar char="•"/>
-              <a:defRPr b="0" i="0" sz="1350" u="none" cap="none" strike="noStrike">
+              <a:defRPr sz="1350" b="0" i="0" u="none" strike="noStrike" cap="none">
                 <a:solidFill>
                   <a:schemeClr val="dk1"/>
                 </a:solidFill>
@@ -12375,7 +12611,7 @@
                 <a:sym typeface="Arial"/>
               </a:defRPr>
             </a:lvl5pPr>
-            <a:lvl6pPr indent="-314325" lvl="5" marL="2743200" marR="0" rtl="0" algn="l">
+            <a:lvl6pPr marL="2743200" marR="0" lvl="5" indent="-314325" algn="l" rtl="0">
               <a:lnSpc>
                 <a:spcPct val="90000"/>
               </a:lnSpc>
@@ -12391,7 +12627,7 @@
               <a:buSzPts val="1350"/>
               <a:buFont typeface="Arial"/>
               <a:buChar char="•"/>
-              <a:defRPr b="0" i="0" sz="1350" u="none" cap="none" strike="noStrike">
+              <a:defRPr sz="1350" b="0" i="0" u="none" strike="noStrike" cap="none">
                 <a:solidFill>
                   <a:schemeClr val="dk1"/>
                 </a:solidFill>
@@ -12401,7 +12637,7 @@
                 <a:sym typeface="Arial"/>
               </a:defRPr>
             </a:lvl6pPr>
-            <a:lvl7pPr indent="-314325" lvl="6" marL="3200400" marR="0" rtl="0" algn="l">
+            <a:lvl7pPr marL="3200400" marR="0" lvl="6" indent="-314325" algn="l" rtl="0">
               <a:lnSpc>
                 <a:spcPct val="90000"/>
               </a:lnSpc>
@@ -12417,7 +12653,7 @@
               <a:buSzPts val="1350"/>
               <a:buFont typeface="Arial"/>
               <a:buChar char="•"/>
-              <a:defRPr b="0" i="0" sz="1350" u="none" cap="none" strike="noStrike">
+              <a:defRPr sz="1350" b="0" i="0" u="none" strike="noStrike" cap="none">
                 <a:solidFill>
                   <a:schemeClr val="dk1"/>
                 </a:solidFill>
@@ -12427,7 +12663,7 @@
                 <a:sym typeface="Arial"/>
               </a:defRPr>
             </a:lvl7pPr>
-            <a:lvl8pPr indent="-314325" lvl="7" marL="3657600" marR="0" rtl="0" algn="l">
+            <a:lvl8pPr marL="3657600" marR="0" lvl="7" indent="-314325" algn="l" rtl="0">
               <a:lnSpc>
                 <a:spcPct val="90000"/>
               </a:lnSpc>
@@ -12443,7 +12679,7 @@
               <a:buSzPts val="1350"/>
               <a:buFont typeface="Arial"/>
               <a:buChar char="•"/>
-              <a:defRPr b="0" i="0" sz="1350" u="none" cap="none" strike="noStrike">
+              <a:defRPr sz="1350" b="0" i="0" u="none" strike="noStrike" cap="none">
                 <a:solidFill>
                   <a:schemeClr val="dk1"/>
                 </a:solidFill>
@@ -12453,7 +12689,7 @@
                 <a:sym typeface="Arial"/>
               </a:defRPr>
             </a:lvl8pPr>
-            <a:lvl9pPr indent="-314325" lvl="8" marL="4114800" marR="0" rtl="0" algn="l">
+            <a:lvl9pPr marL="4114800" marR="0" lvl="8" indent="-314325" algn="l" rtl="0">
               <a:lnSpc>
                 <a:spcPct val="90000"/>
               </a:lnSpc>
@@ -12469,7 +12705,7 @@
               <a:buSzPts val="1350"/>
               <a:buFont typeface="Arial"/>
               <a:buChar char="•"/>
-              <a:defRPr b="0" i="0" sz="1350" u="none" cap="none" strike="noStrike">
+              <a:defRPr sz="1350" b="0" i="0" u="none" strike="noStrike" cap="none">
                 <a:solidFill>
                   <a:schemeClr val="dk1"/>
                 </a:solidFill>
@@ -12480,15 +12716,19 @@
               </a:defRPr>
             </a:lvl9pPr>
           </a:lstStyle>
-          <a:p/>
+          <a:p>
+            <a:endParaRPr/>
+          </a:p>
         </p:txBody>
       </p:sp>
       <p:sp>
         <p:nvSpPr>
           <p:cNvPr id="8" name="Google Shape;8;p2"/>
-          <p:cNvSpPr txBox="1"/>
+          <p:cNvSpPr txBox="1">
+            <a:spLocks noGrp="1"/>
+          </p:cNvSpPr>
           <p:nvPr>
-            <p:ph idx="10" type="dt"/>
+            <p:ph type="dt" idx="10"/>
           </p:nvPr>
         </p:nvSpPr>
         <p:spPr>
@@ -12505,11 +12745,11 @@
           </a:ln>
         </p:spPr>
         <p:txBody>
-          <a:bodyPr anchorCtr="0" anchor="ctr" bIns="45700" lIns="91425" spcFirstLastPara="1" rIns="91425" wrap="square" tIns="45700">
+          <a:bodyPr spcFirstLastPara="1" wrap="square" lIns="91425" tIns="45700" rIns="91425" bIns="45700" anchor="ctr" anchorCtr="0">
             <a:noAutofit/>
           </a:bodyPr>
           <a:lstStyle>
-            <a:lvl1pPr lvl="0" marR="0" rtl="0" algn="l">
+            <a:lvl1pPr marR="0" lvl="0" algn="l" rtl="0">
               <a:lnSpc>
                 <a:spcPct val="100000"/>
               </a:lnSpc>
@@ -12525,7 +12765,7 @@
               <a:buSzPts val="1400"/>
               <a:buFont typeface="Arial"/>
               <a:buNone/>
-              <a:defRPr b="0" i="0" sz="900" u="none" cap="none" strike="noStrike">
+              <a:defRPr sz="900" b="0" i="0" u="none" strike="noStrike" cap="none">
                 <a:solidFill>
                   <a:srgbClr val="757575"/>
                 </a:solidFill>
@@ -12535,7 +12775,7 @@
                 <a:sym typeface="Arial"/>
               </a:defRPr>
             </a:lvl1pPr>
-            <a:lvl2pPr lvl="1" marR="0" rtl="0" algn="l">
+            <a:lvl2pPr marR="0" lvl="1" algn="l" rtl="0">
               <a:lnSpc>
                 <a:spcPct val="100000"/>
               </a:lnSpc>
@@ -12551,7 +12791,7 @@
               <a:buSzPts val="1400"/>
               <a:buFont typeface="Arial"/>
               <a:buNone/>
-              <a:defRPr b="0" i="0" sz="1800" u="none" cap="none" strike="noStrike">
+              <a:defRPr sz="1800" b="0" i="0" u="none" strike="noStrike" cap="none">
                 <a:solidFill>
                   <a:schemeClr val="dk1"/>
                 </a:solidFill>
@@ -12561,7 +12801,7 @@
                 <a:sym typeface="Arial"/>
               </a:defRPr>
             </a:lvl2pPr>
-            <a:lvl3pPr lvl="2" marR="0" rtl="0" algn="l">
+            <a:lvl3pPr marR="0" lvl="2" algn="l" rtl="0">
               <a:lnSpc>
                 <a:spcPct val="100000"/>
               </a:lnSpc>
@@ -12577,7 +12817,7 @@
               <a:buSzPts val="1400"/>
               <a:buFont typeface="Arial"/>
               <a:buNone/>
-              <a:defRPr b="0" i="0" sz="1800" u="none" cap="none" strike="noStrike">
+              <a:defRPr sz="1800" b="0" i="0" u="none" strike="noStrike" cap="none">
                 <a:solidFill>
                   <a:schemeClr val="dk1"/>
                 </a:solidFill>
@@ -12587,7 +12827,7 @@
                 <a:sym typeface="Arial"/>
               </a:defRPr>
             </a:lvl3pPr>
-            <a:lvl4pPr lvl="3" marR="0" rtl="0" algn="l">
+            <a:lvl4pPr marR="0" lvl="3" algn="l" rtl="0">
               <a:lnSpc>
                 <a:spcPct val="100000"/>
               </a:lnSpc>
@@ -12603,7 +12843,7 @@
               <a:buSzPts val="1400"/>
               <a:buFont typeface="Arial"/>
               <a:buNone/>
-              <a:defRPr b="0" i="0" sz="1800" u="none" cap="none" strike="noStrike">
+              <a:defRPr sz="1800" b="0" i="0" u="none" strike="noStrike" cap="none">
                 <a:solidFill>
                   <a:schemeClr val="dk1"/>
                 </a:solidFill>
@@ -12613,7 +12853,7 @@
                 <a:sym typeface="Arial"/>
               </a:defRPr>
             </a:lvl4pPr>
-            <a:lvl5pPr lvl="4" marR="0" rtl="0" algn="l">
+            <a:lvl5pPr marR="0" lvl="4" algn="l" rtl="0">
               <a:lnSpc>
                 <a:spcPct val="100000"/>
               </a:lnSpc>
@@ -12629,7 +12869,7 @@
               <a:buSzPts val="1400"/>
               <a:buFont typeface="Arial"/>
               <a:buNone/>
-              <a:defRPr b="0" i="0" sz="1800" u="none" cap="none" strike="noStrike">
+              <a:defRPr sz="1800" b="0" i="0" u="none" strike="noStrike" cap="none">
                 <a:solidFill>
                   <a:schemeClr val="dk1"/>
                 </a:solidFill>
@@ -12639,7 +12879,7 @@
                 <a:sym typeface="Arial"/>
               </a:defRPr>
             </a:lvl5pPr>
-            <a:lvl6pPr lvl="5" marR="0" rtl="0" algn="l">
+            <a:lvl6pPr marR="0" lvl="5" algn="l" rtl="0">
               <a:lnSpc>
                 <a:spcPct val="100000"/>
               </a:lnSpc>
@@ -12655,7 +12895,7 @@
               <a:buSzPts val="1400"/>
               <a:buFont typeface="Arial"/>
               <a:buNone/>
-              <a:defRPr b="0" i="0" sz="1800" u="none" cap="none" strike="noStrike">
+              <a:defRPr sz="1800" b="0" i="0" u="none" strike="noStrike" cap="none">
                 <a:solidFill>
                   <a:schemeClr val="dk1"/>
                 </a:solidFill>
@@ -12665,7 +12905,7 @@
                 <a:sym typeface="Arial"/>
               </a:defRPr>
             </a:lvl6pPr>
-            <a:lvl7pPr lvl="6" marR="0" rtl="0" algn="l">
+            <a:lvl7pPr marR="0" lvl="6" algn="l" rtl="0">
               <a:lnSpc>
                 <a:spcPct val="100000"/>
               </a:lnSpc>
@@ -12681,7 +12921,7 @@
               <a:buSzPts val="1400"/>
               <a:buFont typeface="Arial"/>
               <a:buNone/>
-              <a:defRPr b="0" i="0" sz="1800" u="none" cap="none" strike="noStrike">
+              <a:defRPr sz="1800" b="0" i="0" u="none" strike="noStrike" cap="none">
                 <a:solidFill>
                   <a:schemeClr val="dk1"/>
                 </a:solidFill>
@@ -12691,7 +12931,7 @@
                 <a:sym typeface="Arial"/>
               </a:defRPr>
             </a:lvl7pPr>
-            <a:lvl8pPr lvl="7" marR="0" rtl="0" algn="l">
+            <a:lvl8pPr marR="0" lvl="7" algn="l" rtl="0">
               <a:lnSpc>
                 <a:spcPct val="100000"/>
               </a:lnSpc>
@@ -12707,7 +12947,7 @@
               <a:buSzPts val="1400"/>
               <a:buFont typeface="Arial"/>
               <a:buNone/>
-              <a:defRPr b="0" i="0" sz="1800" u="none" cap="none" strike="noStrike">
+              <a:defRPr sz="1800" b="0" i="0" u="none" strike="noStrike" cap="none">
                 <a:solidFill>
                   <a:schemeClr val="dk1"/>
                 </a:solidFill>
@@ -12717,7 +12957,7 @@
                 <a:sym typeface="Arial"/>
               </a:defRPr>
             </a:lvl8pPr>
-            <a:lvl9pPr lvl="8" marR="0" rtl="0" algn="l">
+            <a:lvl9pPr marR="0" lvl="8" algn="l" rtl="0">
               <a:lnSpc>
                 <a:spcPct val="100000"/>
               </a:lnSpc>
@@ -12733,7 +12973,7 @@
               <a:buSzPts val="1400"/>
               <a:buFont typeface="Arial"/>
               <a:buNone/>
-              <a:defRPr b="0" i="0" sz="1800" u="none" cap="none" strike="noStrike">
+              <a:defRPr sz="1800" b="0" i="0" u="none" strike="noStrike" cap="none">
                 <a:solidFill>
                   <a:schemeClr val="dk1"/>
                 </a:solidFill>
@@ -12744,15 +12984,19 @@
               </a:defRPr>
             </a:lvl9pPr>
           </a:lstStyle>
-          <a:p/>
+          <a:p>
+            <a:endParaRPr/>
+          </a:p>
         </p:txBody>
       </p:sp>
       <p:sp>
         <p:nvSpPr>
           <p:cNvPr id="9" name="Google Shape;9;p2"/>
-          <p:cNvSpPr txBox="1"/>
+          <p:cNvSpPr txBox="1">
+            <a:spLocks noGrp="1"/>
+          </p:cNvSpPr>
           <p:nvPr>
-            <p:ph idx="11" type="ftr"/>
+            <p:ph type="ftr" idx="11"/>
           </p:nvPr>
         </p:nvSpPr>
         <p:spPr>
@@ -12769,11 +13013,11 @@
           </a:ln>
         </p:spPr>
         <p:txBody>
-          <a:bodyPr anchorCtr="0" anchor="ctr" bIns="45700" lIns="91425" spcFirstLastPara="1" rIns="91425" wrap="square" tIns="45700">
+          <a:bodyPr spcFirstLastPara="1" wrap="square" lIns="91425" tIns="45700" rIns="91425" bIns="45700" anchor="ctr" anchorCtr="0">
             <a:noAutofit/>
           </a:bodyPr>
           <a:lstStyle>
-            <a:lvl1pPr lvl="0" marR="0" rtl="0" algn="ctr">
+            <a:lvl1pPr marR="0" lvl="0" algn="ctr" rtl="0">
               <a:lnSpc>
                 <a:spcPct val="100000"/>
               </a:lnSpc>
@@ -12789,7 +13033,7 @@
               <a:buSzPts val="1400"/>
               <a:buFont typeface="Arial"/>
               <a:buNone/>
-              <a:defRPr b="0" i="0" sz="900" u="none" cap="none" strike="noStrike">
+              <a:defRPr sz="900" b="0" i="0" u="none" strike="noStrike" cap="none">
                 <a:solidFill>
                   <a:srgbClr val="757575"/>
                 </a:solidFill>
@@ -12799,7 +13043,7 @@
                 <a:sym typeface="Arial"/>
               </a:defRPr>
             </a:lvl1pPr>
-            <a:lvl2pPr lvl="1" marR="0" rtl="0" algn="l">
+            <a:lvl2pPr marR="0" lvl="1" algn="l" rtl="0">
               <a:lnSpc>
                 <a:spcPct val="100000"/>
               </a:lnSpc>
@@ -12815,7 +13059,7 @@
               <a:buSzPts val="1400"/>
               <a:buFont typeface="Arial"/>
               <a:buNone/>
-              <a:defRPr b="0" i="0" sz="1800" u="none" cap="none" strike="noStrike">
+              <a:defRPr sz="1800" b="0" i="0" u="none" strike="noStrike" cap="none">
                 <a:solidFill>
                   <a:schemeClr val="dk1"/>
                 </a:solidFill>
@@ -12825,7 +13069,7 @@
                 <a:sym typeface="Arial"/>
               </a:defRPr>
             </a:lvl2pPr>
-            <a:lvl3pPr lvl="2" marR="0" rtl="0" algn="l">
+            <a:lvl3pPr marR="0" lvl="2" algn="l" rtl="0">
               <a:lnSpc>
                 <a:spcPct val="100000"/>
               </a:lnSpc>
@@ -12841,7 +13085,7 @@
               <a:buSzPts val="1400"/>
               <a:buFont typeface="Arial"/>
               <a:buNone/>
-              <a:defRPr b="0" i="0" sz="1800" u="none" cap="none" strike="noStrike">
+              <a:defRPr sz="1800" b="0" i="0" u="none" strike="noStrike" cap="none">
                 <a:solidFill>
                   <a:schemeClr val="dk1"/>
                 </a:solidFill>
@@ -12851,7 +13095,7 @@
                 <a:sym typeface="Arial"/>
               </a:defRPr>
             </a:lvl3pPr>
-            <a:lvl4pPr lvl="3" marR="0" rtl="0" algn="l">
+            <a:lvl4pPr marR="0" lvl="3" algn="l" rtl="0">
               <a:lnSpc>
                 <a:spcPct val="100000"/>
               </a:lnSpc>
@@ -12867,7 +13111,7 @@
               <a:buSzPts val="1400"/>
               <a:buFont typeface="Arial"/>
               <a:buNone/>
-              <a:defRPr b="0" i="0" sz="1800" u="none" cap="none" strike="noStrike">
+              <a:defRPr sz="1800" b="0" i="0" u="none" strike="noStrike" cap="none">
                 <a:solidFill>
                   <a:schemeClr val="dk1"/>
                 </a:solidFill>
@@ -12877,7 +13121,7 @@
                 <a:sym typeface="Arial"/>
               </a:defRPr>
             </a:lvl4pPr>
-            <a:lvl5pPr lvl="4" marR="0" rtl="0" algn="l">
+            <a:lvl5pPr marR="0" lvl="4" algn="l" rtl="0">
               <a:lnSpc>
                 <a:spcPct val="100000"/>
               </a:lnSpc>
@@ -12893,7 +13137,7 @@
               <a:buSzPts val="1400"/>
               <a:buFont typeface="Arial"/>
               <a:buNone/>
-              <a:defRPr b="0" i="0" sz="1800" u="none" cap="none" strike="noStrike">
+              <a:defRPr sz="1800" b="0" i="0" u="none" strike="noStrike" cap="none">
                 <a:solidFill>
                   <a:schemeClr val="dk1"/>
                 </a:solidFill>
@@ -12903,7 +13147,7 @@
                 <a:sym typeface="Arial"/>
               </a:defRPr>
             </a:lvl5pPr>
-            <a:lvl6pPr lvl="5" marR="0" rtl="0" algn="l">
+            <a:lvl6pPr marR="0" lvl="5" algn="l" rtl="0">
               <a:lnSpc>
                 <a:spcPct val="100000"/>
               </a:lnSpc>
@@ -12919,7 +13163,7 @@
               <a:buSzPts val="1400"/>
               <a:buFont typeface="Arial"/>
               <a:buNone/>
-              <a:defRPr b="0" i="0" sz="1800" u="none" cap="none" strike="noStrike">
+              <a:defRPr sz="1800" b="0" i="0" u="none" strike="noStrike" cap="none">
                 <a:solidFill>
                   <a:schemeClr val="dk1"/>
                 </a:solidFill>
@@ -12929,7 +13173,7 @@
                 <a:sym typeface="Arial"/>
               </a:defRPr>
             </a:lvl6pPr>
-            <a:lvl7pPr lvl="6" marR="0" rtl="0" algn="l">
+            <a:lvl7pPr marR="0" lvl="6" algn="l" rtl="0">
               <a:lnSpc>
                 <a:spcPct val="100000"/>
               </a:lnSpc>
@@ -12945,7 +13189,7 @@
               <a:buSzPts val="1400"/>
               <a:buFont typeface="Arial"/>
               <a:buNone/>
-              <a:defRPr b="0" i="0" sz="1800" u="none" cap="none" strike="noStrike">
+              <a:defRPr sz="1800" b="0" i="0" u="none" strike="noStrike" cap="none">
                 <a:solidFill>
                   <a:schemeClr val="dk1"/>
                 </a:solidFill>
@@ -12955,7 +13199,7 @@
                 <a:sym typeface="Arial"/>
               </a:defRPr>
             </a:lvl7pPr>
-            <a:lvl8pPr lvl="7" marR="0" rtl="0" algn="l">
+            <a:lvl8pPr marR="0" lvl="7" algn="l" rtl="0">
               <a:lnSpc>
                 <a:spcPct val="100000"/>
               </a:lnSpc>
@@ -12971,7 +13215,7 @@
               <a:buSzPts val="1400"/>
               <a:buFont typeface="Arial"/>
               <a:buNone/>
-              <a:defRPr b="0" i="0" sz="1800" u="none" cap="none" strike="noStrike">
+              <a:defRPr sz="1800" b="0" i="0" u="none" strike="noStrike" cap="none">
                 <a:solidFill>
                   <a:schemeClr val="dk1"/>
                 </a:solidFill>
@@ -12981,7 +13225,7 @@
                 <a:sym typeface="Arial"/>
               </a:defRPr>
             </a:lvl8pPr>
-            <a:lvl9pPr lvl="8" marR="0" rtl="0" algn="l">
+            <a:lvl9pPr marR="0" lvl="8" algn="l" rtl="0">
               <a:lnSpc>
                 <a:spcPct val="100000"/>
               </a:lnSpc>
@@ -12997,7 +13241,7 @@
               <a:buSzPts val="1400"/>
               <a:buFont typeface="Arial"/>
               <a:buNone/>
-              <a:defRPr b="0" i="0" sz="1800" u="none" cap="none" strike="noStrike">
+              <a:defRPr sz="1800" b="0" i="0" u="none" strike="noStrike" cap="none">
                 <a:solidFill>
                   <a:schemeClr val="dk1"/>
                 </a:solidFill>
@@ -13008,15 +13252,19 @@
               </a:defRPr>
             </a:lvl9pPr>
           </a:lstStyle>
-          <a:p/>
+          <a:p>
+            <a:endParaRPr/>
+          </a:p>
         </p:txBody>
       </p:sp>
       <p:sp>
         <p:nvSpPr>
           <p:cNvPr id="10" name="Google Shape;10;p2"/>
-          <p:cNvSpPr txBox="1"/>
+          <p:cNvSpPr txBox="1">
+            <a:spLocks noGrp="1"/>
+          </p:cNvSpPr>
           <p:nvPr>
-            <p:ph idx="12" type="sldNum"/>
+            <p:ph type="sldNum" idx="12"/>
           </p:nvPr>
         </p:nvSpPr>
         <p:spPr>
@@ -13033,11 +13281,11 @@
           </a:ln>
         </p:spPr>
         <p:txBody>
-          <a:bodyPr anchorCtr="0" anchor="ctr" bIns="45700" lIns="91425" spcFirstLastPara="1" rIns="91425" wrap="square" tIns="45700">
+          <a:bodyPr spcFirstLastPara="1" wrap="square" lIns="91425" tIns="45700" rIns="91425" bIns="45700" anchor="ctr" anchorCtr="0">
             <a:noAutofit/>
           </a:bodyPr>
           <a:lstStyle>
-            <a:lvl1pPr indent="0" lvl="0" marL="0" marR="0" rtl="0" algn="r">
+            <a:lvl1pPr marL="0" marR="0" lvl="0" indent="0" algn="r" rtl="0">
               <a:lnSpc>
                 <a:spcPct val="100000"/>
               </a:lnSpc>
@@ -13053,7 +13301,7 @@
               <a:buSzPts val="900"/>
               <a:buFont typeface="Arial"/>
               <a:buNone/>
-              <a:defRPr b="0" i="0" sz="900" u="none" cap="none" strike="noStrike">
+              <a:defRPr sz="900" b="0" i="0" u="none" strike="noStrike" cap="none">
                 <a:solidFill>
                   <a:srgbClr val="757575"/>
                 </a:solidFill>
@@ -13063,7 +13311,7 @@
                 <a:sym typeface="Arial"/>
               </a:defRPr>
             </a:lvl1pPr>
-            <a:lvl2pPr indent="0" lvl="1" marL="0" marR="0" rtl="0" algn="r">
+            <a:lvl2pPr marL="0" marR="0" lvl="1" indent="0" algn="r" rtl="0">
               <a:lnSpc>
                 <a:spcPct val="100000"/>
               </a:lnSpc>
@@ -13079,7 +13327,7 @@
               <a:buSzPts val="900"/>
               <a:buFont typeface="Arial"/>
               <a:buNone/>
-              <a:defRPr b="0" i="0" sz="900" u="none" cap="none" strike="noStrike">
+              <a:defRPr sz="900" b="0" i="0" u="none" strike="noStrike" cap="none">
                 <a:solidFill>
                   <a:srgbClr val="757575"/>
                 </a:solidFill>
@@ -13089,7 +13337,7 @@
                 <a:sym typeface="Arial"/>
               </a:defRPr>
             </a:lvl2pPr>
-            <a:lvl3pPr indent="0" lvl="2" marL="0" marR="0" rtl="0" algn="r">
+            <a:lvl3pPr marL="0" marR="0" lvl="2" indent="0" algn="r" rtl="0">
               <a:lnSpc>
                 <a:spcPct val="100000"/>
               </a:lnSpc>
@@ -13105,7 +13353,7 @@
               <a:buSzPts val="900"/>
               <a:buFont typeface="Arial"/>
               <a:buNone/>
-              <a:defRPr b="0" i="0" sz="900" u="none" cap="none" strike="noStrike">
+              <a:defRPr sz="900" b="0" i="0" u="none" strike="noStrike" cap="none">
                 <a:solidFill>
                   <a:srgbClr val="757575"/>
                 </a:solidFill>
@@ -13115,7 +13363,7 @@
                 <a:sym typeface="Arial"/>
               </a:defRPr>
             </a:lvl3pPr>
-            <a:lvl4pPr indent="0" lvl="3" marL="0" marR="0" rtl="0" algn="r">
+            <a:lvl4pPr marL="0" marR="0" lvl="3" indent="0" algn="r" rtl="0">
               <a:lnSpc>
                 <a:spcPct val="100000"/>
               </a:lnSpc>
@@ -13131,7 +13379,7 @@
               <a:buSzPts val="900"/>
               <a:buFont typeface="Arial"/>
               <a:buNone/>
-              <a:defRPr b="0" i="0" sz="900" u="none" cap="none" strike="noStrike">
+              <a:defRPr sz="900" b="0" i="0" u="none" strike="noStrike" cap="none">
                 <a:solidFill>
                   <a:srgbClr val="757575"/>
                 </a:solidFill>
@@ -13141,7 +13389,7 @@
                 <a:sym typeface="Arial"/>
               </a:defRPr>
             </a:lvl4pPr>
-            <a:lvl5pPr indent="0" lvl="4" marL="0" marR="0" rtl="0" algn="r">
+            <a:lvl5pPr marL="0" marR="0" lvl="4" indent="0" algn="r" rtl="0">
               <a:lnSpc>
                 <a:spcPct val="100000"/>
               </a:lnSpc>
@@ -13157,7 +13405,7 @@
               <a:buSzPts val="900"/>
               <a:buFont typeface="Arial"/>
               <a:buNone/>
-              <a:defRPr b="0" i="0" sz="900" u="none" cap="none" strike="noStrike">
+              <a:defRPr sz="900" b="0" i="0" u="none" strike="noStrike" cap="none">
                 <a:solidFill>
                   <a:srgbClr val="757575"/>
                 </a:solidFill>
@@ -13167,7 +13415,7 @@
                 <a:sym typeface="Arial"/>
               </a:defRPr>
             </a:lvl5pPr>
-            <a:lvl6pPr indent="0" lvl="5" marL="0" marR="0" rtl="0" algn="r">
+            <a:lvl6pPr marL="0" marR="0" lvl="5" indent="0" algn="r" rtl="0">
               <a:lnSpc>
                 <a:spcPct val="100000"/>
               </a:lnSpc>
@@ -13183,7 +13431,7 @@
               <a:buSzPts val="900"/>
               <a:buFont typeface="Arial"/>
               <a:buNone/>
-              <a:defRPr b="0" i="0" sz="900" u="none" cap="none" strike="noStrike">
+              <a:defRPr sz="900" b="0" i="0" u="none" strike="noStrike" cap="none">
                 <a:solidFill>
                   <a:srgbClr val="757575"/>
                 </a:solidFill>
@@ -13193,7 +13441,7 @@
                 <a:sym typeface="Arial"/>
               </a:defRPr>
             </a:lvl6pPr>
-            <a:lvl7pPr indent="0" lvl="6" marL="0" marR="0" rtl="0" algn="r">
+            <a:lvl7pPr marL="0" marR="0" lvl="6" indent="0" algn="r" rtl="0">
               <a:lnSpc>
                 <a:spcPct val="100000"/>
               </a:lnSpc>
@@ -13209,7 +13457,7 @@
               <a:buSzPts val="900"/>
               <a:buFont typeface="Arial"/>
               <a:buNone/>
-              <a:defRPr b="0" i="0" sz="900" u="none" cap="none" strike="noStrike">
+              <a:defRPr sz="900" b="0" i="0" u="none" strike="noStrike" cap="none">
                 <a:solidFill>
                   <a:srgbClr val="757575"/>
                 </a:solidFill>
@@ -13219,7 +13467,7 @@
                 <a:sym typeface="Arial"/>
               </a:defRPr>
             </a:lvl7pPr>
-            <a:lvl8pPr indent="0" lvl="7" marL="0" marR="0" rtl="0" algn="r">
+            <a:lvl8pPr marL="0" marR="0" lvl="7" indent="0" algn="r" rtl="0">
               <a:lnSpc>
                 <a:spcPct val="100000"/>
               </a:lnSpc>
@@ -13235,7 +13483,7 @@
               <a:buSzPts val="900"/>
               <a:buFont typeface="Arial"/>
               <a:buNone/>
-              <a:defRPr b="0" i="0" sz="900" u="none" cap="none" strike="noStrike">
+              <a:defRPr sz="900" b="0" i="0" u="none" strike="noStrike" cap="none">
                 <a:solidFill>
                   <a:srgbClr val="757575"/>
                 </a:solidFill>
@@ -13245,7 +13493,7 @@
                 <a:sym typeface="Arial"/>
               </a:defRPr>
             </a:lvl8pPr>
-            <a:lvl9pPr indent="0" lvl="8" marL="0" marR="0" rtl="0" algn="r">
+            <a:lvl9pPr marL="0" marR="0" lvl="8" indent="0" algn="r" rtl="0">
               <a:lnSpc>
                 <a:spcPct val="100000"/>
               </a:lnSpc>
@@ -13261,7 +13509,7 @@
               <a:buSzPts val="900"/>
               <a:buFont typeface="Arial"/>
               <a:buNone/>
-              <a:defRPr b="0" i="0" sz="900" u="none" cap="none" strike="noStrike">
+              <a:defRPr sz="900" b="0" i="0" u="none" strike="noStrike" cap="none">
                 <a:solidFill>
                   <a:srgbClr val="757575"/>
                 </a:solidFill>
@@ -13273,7 +13521,7 @@
             </a:lvl9pPr>
           </a:lstStyle>
           <a:p>
-            <a:pPr indent="0" lvl="0" marL="0" rtl="0" algn="r">
+            <a:pPr marL="0" lvl="0" indent="0" algn="r" rtl="0">
               <a:spcBef>
                 <a:spcPts val="0"/>
               </a:spcBef>
@@ -13292,7 +13540,7 @@
       </p:sp>
     </p:spTree>
   </p:cSld>
-  <p:clrMap accent1="accent1" accent2="accent2" accent3="accent3" accent4="accent4" accent5="accent5" accent6="accent6" bg1="lt1" bg2="dk2" tx1="dk1" tx2="lt2" folHlink="folHlink" hlink="hlink"/>
+  <p:clrMap bg1="lt1" tx1="dk1" bg2="dk2" tx2="lt2" accent1="accent1" accent2="accent2" accent3="accent3" accent4="accent4" accent5="accent5" accent6="accent6" hlink="hlink" folHlink="folHlink"/>
   <p:sldLayoutIdLst>
     <p:sldLayoutId id="2147483649" r:id="rId1"/>
     <p:sldLayoutId id="2147483650" r:id="rId2"/>
@@ -13306,10 +13554,10 @@
     <p:sldLayoutId id="2147483658" r:id="rId10"/>
     <p:sldLayoutId id="2147483659" r:id="rId11"/>
   </p:sldLayoutIdLst>
-  <p:hf dt="0" ftr="0" hdr="0" sldNum="0"/>
+  <p:hf sldNum="0" hdr="0" ftr="0" dt="0"/>
   <p:txStyles>
     <p:titleStyle>
-      <a:defPPr lvl="0" marR="0" rtl="0" algn="l">
+      <a:defPPr marR="0" lvl="0" algn="l" rtl="0">
         <a:lnSpc>
           <a:spcPct val="100000"/>
         </a:lnSpc>
@@ -13320,7 +13568,7 @@
           <a:spcPts val="0"/>
         </a:spcAft>
       </a:defPPr>
-      <a:lvl1pPr lvl="0" marR="0" rtl="0" algn="l">
+      <a:lvl1pPr marR="0" lvl="0" algn="l" rtl="0">
         <a:lnSpc>
           <a:spcPct val="100000"/>
         </a:lnSpc>
@@ -13334,7 +13582,7 @@
           <a:srgbClr val="000000"/>
         </a:buClr>
         <a:buFont typeface="Arial"/>
-        <a:defRPr b="0" i="0" sz="1400" u="none" cap="none" strike="noStrike">
+        <a:defRPr sz="1400" b="0" i="0" u="none" strike="noStrike" cap="none">
           <a:solidFill>
             <a:srgbClr val="000000"/>
           </a:solidFill>
@@ -13344,7 +13592,7 @@
           <a:sym typeface="Arial"/>
         </a:defRPr>
       </a:lvl1pPr>
-      <a:lvl2pPr lvl="1" marR="0" rtl="0" algn="l">
+      <a:lvl2pPr marR="0" lvl="1" algn="l" rtl="0">
         <a:lnSpc>
           <a:spcPct val="100000"/>
         </a:lnSpc>
@@ -13358,7 +13606,7 @@
           <a:srgbClr val="000000"/>
         </a:buClr>
         <a:buFont typeface="Arial"/>
-        <a:defRPr b="0" i="0" sz="1400" u="none" cap="none" strike="noStrike">
+        <a:defRPr sz="1400" b="0" i="0" u="none" strike="noStrike" cap="none">
           <a:solidFill>
             <a:srgbClr val="000000"/>
           </a:solidFill>
@@ -13368,7 +13616,7 @@
           <a:sym typeface="Arial"/>
         </a:defRPr>
       </a:lvl2pPr>
-      <a:lvl3pPr lvl="2" marR="0" rtl="0" algn="l">
+      <a:lvl3pPr marR="0" lvl="2" algn="l" rtl="0">
         <a:lnSpc>
           <a:spcPct val="100000"/>
         </a:lnSpc>
@@ -13382,7 +13630,7 @@
           <a:srgbClr val="000000"/>
         </a:buClr>
         <a:buFont typeface="Arial"/>
-        <a:defRPr b="0" i="0" sz="1400" u="none" cap="none" strike="noStrike">
+        <a:defRPr sz="1400" b="0" i="0" u="none" strike="noStrike" cap="none">
           <a:solidFill>
             <a:srgbClr val="000000"/>
           </a:solidFill>
@@ -13392,7 +13640,7 @@
           <a:sym typeface="Arial"/>
         </a:defRPr>
       </a:lvl3pPr>
-      <a:lvl4pPr lvl="3" marR="0" rtl="0" algn="l">
+      <a:lvl4pPr marR="0" lvl="3" algn="l" rtl="0">
         <a:lnSpc>
           <a:spcPct val="100000"/>
         </a:lnSpc>
@@ -13406,7 +13654,7 @@
           <a:srgbClr val="000000"/>
         </a:buClr>
         <a:buFont typeface="Arial"/>
-        <a:defRPr b="0" i="0" sz="1400" u="none" cap="none" strike="noStrike">
+        <a:defRPr sz="1400" b="0" i="0" u="none" strike="noStrike" cap="none">
           <a:solidFill>
             <a:srgbClr val="000000"/>
           </a:solidFill>
@@ -13416,7 +13664,7 @@
           <a:sym typeface="Arial"/>
         </a:defRPr>
       </a:lvl4pPr>
-      <a:lvl5pPr lvl="4" marR="0" rtl="0" algn="l">
+      <a:lvl5pPr marR="0" lvl="4" algn="l" rtl="0">
         <a:lnSpc>
           <a:spcPct val="100000"/>
         </a:lnSpc>
@@ -13430,7 +13678,7 @@
           <a:srgbClr val="000000"/>
         </a:buClr>
         <a:buFont typeface="Arial"/>
-        <a:defRPr b="0" i="0" sz="1400" u="none" cap="none" strike="noStrike">
+        <a:defRPr sz="1400" b="0" i="0" u="none" strike="noStrike" cap="none">
           <a:solidFill>
             <a:srgbClr val="000000"/>
           </a:solidFill>
@@ -13440,7 +13688,7 @@
           <a:sym typeface="Arial"/>
         </a:defRPr>
       </a:lvl5pPr>
-      <a:lvl6pPr lvl="5" marR="0" rtl="0" algn="l">
+      <a:lvl6pPr marR="0" lvl="5" algn="l" rtl="0">
         <a:lnSpc>
           <a:spcPct val="100000"/>
         </a:lnSpc>
@@ -13454,7 +13702,7 @@
           <a:srgbClr val="000000"/>
         </a:buClr>
         <a:buFont typeface="Arial"/>
-        <a:defRPr b="0" i="0" sz="1400" u="none" cap="none" strike="noStrike">
+        <a:defRPr sz="1400" b="0" i="0" u="none" strike="noStrike" cap="none">
           <a:solidFill>
             <a:srgbClr val="000000"/>
           </a:solidFill>
@@ -13464,7 +13712,7 @@
           <a:sym typeface="Arial"/>
         </a:defRPr>
       </a:lvl6pPr>
-      <a:lvl7pPr lvl="6" marR="0" rtl="0" algn="l">
+      <a:lvl7pPr marR="0" lvl="6" algn="l" rtl="0">
         <a:lnSpc>
           <a:spcPct val="100000"/>
         </a:lnSpc>
@@ -13478,7 +13726,7 @@
           <a:srgbClr val="000000"/>
         </a:buClr>
         <a:buFont typeface="Arial"/>
-        <a:defRPr b="0" i="0" sz="1400" u="none" cap="none" strike="noStrike">
+        <a:defRPr sz="1400" b="0" i="0" u="none" strike="noStrike" cap="none">
           <a:solidFill>
             <a:srgbClr val="000000"/>
           </a:solidFill>
@@ -13488,7 +13736,7 @@
           <a:sym typeface="Arial"/>
         </a:defRPr>
       </a:lvl7pPr>
-      <a:lvl8pPr lvl="7" marR="0" rtl="0" algn="l">
+      <a:lvl8pPr marR="0" lvl="7" algn="l" rtl="0">
         <a:lnSpc>
           <a:spcPct val="100000"/>
         </a:lnSpc>
@@ -13502,7 +13750,7 @@
           <a:srgbClr val="000000"/>
         </a:buClr>
         <a:buFont typeface="Arial"/>
-        <a:defRPr b="0" i="0" sz="1400" u="none" cap="none" strike="noStrike">
+        <a:defRPr sz="1400" b="0" i="0" u="none" strike="noStrike" cap="none">
           <a:solidFill>
             <a:srgbClr val="000000"/>
           </a:solidFill>
@@ -13512,7 +13760,7 @@
           <a:sym typeface="Arial"/>
         </a:defRPr>
       </a:lvl8pPr>
-      <a:lvl9pPr lvl="8" marR="0" rtl="0" algn="l">
+      <a:lvl9pPr marR="0" lvl="8" algn="l" rtl="0">
         <a:lnSpc>
           <a:spcPct val="100000"/>
         </a:lnSpc>
@@ -13526,7 +13774,7 @@
           <a:srgbClr val="000000"/>
         </a:buClr>
         <a:buFont typeface="Arial"/>
-        <a:defRPr b="0" i="0" sz="1400" u="none" cap="none" strike="noStrike">
+        <a:defRPr sz="1400" b="0" i="0" u="none" strike="noStrike" cap="none">
           <a:solidFill>
             <a:srgbClr val="000000"/>
           </a:solidFill>
@@ -13538,7 +13786,7 @@
       </a:lvl9pPr>
     </p:titleStyle>
     <p:bodyStyle>
-      <a:defPPr lvl="0" marR="0" rtl="0" algn="l">
+      <a:defPPr marR="0" lvl="0" algn="l" rtl="0">
         <a:lnSpc>
           <a:spcPct val="100000"/>
         </a:lnSpc>
@@ -13549,7 +13797,7 @@
           <a:spcPts val="0"/>
         </a:spcAft>
       </a:defPPr>
-      <a:lvl1pPr lvl="0" marR="0" rtl="0" algn="l">
+      <a:lvl1pPr marR="0" lvl="0" algn="l" rtl="0">
         <a:lnSpc>
           <a:spcPct val="100000"/>
         </a:lnSpc>
@@ -13563,7 +13811,7 @@
           <a:srgbClr val="000000"/>
         </a:buClr>
         <a:buFont typeface="Arial"/>
-        <a:defRPr b="0" i="0" sz="1400" u="none" cap="none" strike="noStrike">
+        <a:defRPr sz="1400" b="0" i="0" u="none" strike="noStrike" cap="none">
           <a:solidFill>
             <a:srgbClr val="000000"/>
           </a:solidFill>
@@ -13573,7 +13821,7 @@
           <a:sym typeface="Arial"/>
         </a:defRPr>
       </a:lvl1pPr>
-      <a:lvl2pPr lvl="1" marR="0" rtl="0" algn="l">
+      <a:lvl2pPr marR="0" lvl="1" algn="l" rtl="0">
         <a:lnSpc>
           <a:spcPct val="100000"/>
         </a:lnSpc>
@@ -13587,7 +13835,7 @@
           <a:srgbClr val="000000"/>
         </a:buClr>
         <a:buFont typeface="Arial"/>
-        <a:defRPr b="0" i="0" sz="1400" u="none" cap="none" strike="noStrike">
+        <a:defRPr sz="1400" b="0" i="0" u="none" strike="noStrike" cap="none">
           <a:solidFill>
             <a:srgbClr val="000000"/>
           </a:solidFill>
@@ -13597,7 +13845,7 @@
           <a:sym typeface="Arial"/>
         </a:defRPr>
       </a:lvl2pPr>
-      <a:lvl3pPr lvl="2" marR="0" rtl="0" algn="l">
+      <a:lvl3pPr marR="0" lvl="2" algn="l" rtl="0">
         <a:lnSpc>
           <a:spcPct val="100000"/>
         </a:lnSpc>
@@ -13611,7 +13859,7 @@
           <a:srgbClr val="000000"/>
         </a:buClr>
         <a:buFont typeface="Arial"/>
-        <a:defRPr b="0" i="0" sz="1400" u="none" cap="none" strike="noStrike">
+        <a:defRPr sz="1400" b="0" i="0" u="none" strike="noStrike" cap="none">
           <a:solidFill>
             <a:srgbClr val="000000"/>
           </a:solidFill>
@@ -13621,7 +13869,7 @@
           <a:sym typeface="Arial"/>
         </a:defRPr>
       </a:lvl3pPr>
-      <a:lvl4pPr lvl="3" marR="0" rtl="0" algn="l">
+      <a:lvl4pPr marR="0" lvl="3" algn="l" rtl="0">
         <a:lnSpc>
           <a:spcPct val="100000"/>
         </a:lnSpc>
@@ -13635,7 +13883,7 @@
           <a:srgbClr val="000000"/>
         </a:buClr>
         <a:buFont typeface="Arial"/>
-        <a:defRPr b="0" i="0" sz="1400" u="none" cap="none" strike="noStrike">
+        <a:defRPr sz="1400" b="0" i="0" u="none" strike="noStrike" cap="none">
           <a:solidFill>
             <a:srgbClr val="000000"/>
           </a:solidFill>
@@ -13645,7 +13893,7 @@
           <a:sym typeface="Arial"/>
         </a:defRPr>
       </a:lvl4pPr>
-      <a:lvl5pPr lvl="4" marR="0" rtl="0" algn="l">
+      <a:lvl5pPr marR="0" lvl="4" algn="l" rtl="0">
         <a:lnSpc>
           <a:spcPct val="100000"/>
         </a:lnSpc>
@@ -13659,7 +13907,7 @@
           <a:srgbClr val="000000"/>
         </a:buClr>
         <a:buFont typeface="Arial"/>
-        <a:defRPr b="0" i="0" sz="1400" u="none" cap="none" strike="noStrike">
+        <a:defRPr sz="1400" b="0" i="0" u="none" strike="noStrike" cap="none">
           <a:solidFill>
             <a:srgbClr val="000000"/>
           </a:solidFill>
@@ -13669,7 +13917,7 @@
           <a:sym typeface="Arial"/>
         </a:defRPr>
       </a:lvl5pPr>
-      <a:lvl6pPr lvl="5" marR="0" rtl="0" algn="l">
+      <a:lvl6pPr marR="0" lvl="5" algn="l" rtl="0">
         <a:lnSpc>
           <a:spcPct val="100000"/>
         </a:lnSpc>
@@ -13683,7 +13931,7 @@
           <a:srgbClr val="000000"/>
         </a:buClr>
         <a:buFont typeface="Arial"/>
-        <a:defRPr b="0" i="0" sz="1400" u="none" cap="none" strike="noStrike">
+        <a:defRPr sz="1400" b="0" i="0" u="none" strike="noStrike" cap="none">
           <a:solidFill>
             <a:srgbClr val="000000"/>
           </a:solidFill>
@@ -13693,7 +13941,7 @@
           <a:sym typeface="Arial"/>
         </a:defRPr>
       </a:lvl6pPr>
-      <a:lvl7pPr lvl="6" marR="0" rtl="0" algn="l">
+      <a:lvl7pPr marR="0" lvl="6" algn="l" rtl="0">
         <a:lnSpc>
           <a:spcPct val="100000"/>
         </a:lnSpc>
@@ -13707,7 +13955,7 @@
           <a:srgbClr val="000000"/>
         </a:buClr>
         <a:buFont typeface="Arial"/>
-        <a:defRPr b="0" i="0" sz="1400" u="none" cap="none" strike="noStrike">
+        <a:defRPr sz="1400" b="0" i="0" u="none" strike="noStrike" cap="none">
           <a:solidFill>
             <a:srgbClr val="000000"/>
           </a:solidFill>
@@ -13717,7 +13965,7 @@
           <a:sym typeface="Arial"/>
         </a:defRPr>
       </a:lvl7pPr>
-      <a:lvl8pPr lvl="7" marR="0" rtl="0" algn="l">
+      <a:lvl8pPr marR="0" lvl="7" algn="l" rtl="0">
         <a:lnSpc>
           <a:spcPct val="100000"/>
         </a:lnSpc>
@@ -13731,7 +13979,7 @@
           <a:srgbClr val="000000"/>
         </a:buClr>
         <a:buFont typeface="Arial"/>
-        <a:defRPr b="0" i="0" sz="1400" u="none" cap="none" strike="noStrike">
+        <a:defRPr sz="1400" b="0" i="0" u="none" strike="noStrike" cap="none">
           <a:solidFill>
             <a:srgbClr val="000000"/>
           </a:solidFill>
@@ -13741,7 +13989,7 @@
           <a:sym typeface="Arial"/>
         </a:defRPr>
       </a:lvl8pPr>
-      <a:lvl9pPr lvl="8" marR="0" rtl="0" algn="l">
+      <a:lvl9pPr marR="0" lvl="8" algn="l" rtl="0">
         <a:lnSpc>
           <a:spcPct val="100000"/>
         </a:lnSpc>
@@ -13755,7 +14003,7 @@
           <a:srgbClr val="000000"/>
         </a:buClr>
         <a:buFont typeface="Arial"/>
-        <a:defRPr b="0" i="0" sz="1400" u="none" cap="none" strike="noStrike">
+        <a:defRPr sz="1400" b="0" i="0" u="none" strike="noStrike" cap="none">
           <a:solidFill>
             <a:srgbClr val="000000"/>
           </a:solidFill>
@@ -13767,7 +14015,7 @@
       </a:lvl9pPr>
     </p:bodyStyle>
     <p:otherStyle>
-      <a:defPPr lvl="0" marR="0" rtl="0" algn="l">
+      <a:defPPr marR="0" lvl="0" algn="l" rtl="0">
         <a:lnSpc>
           <a:spcPct val="100000"/>
         </a:lnSpc>
@@ -13778,7 +14026,7 @@
           <a:spcPts val="0"/>
         </a:spcAft>
       </a:defPPr>
-      <a:lvl1pPr lvl="0" marR="0" rtl="0" algn="l">
+      <a:lvl1pPr marR="0" lvl="0" algn="l" rtl="0">
         <a:lnSpc>
           <a:spcPct val="100000"/>
         </a:lnSpc>
@@ -13792,7 +14040,7 @@
           <a:srgbClr val="000000"/>
         </a:buClr>
         <a:buFont typeface="Arial"/>
-        <a:defRPr b="0" i="0" sz="1400" u="none" cap="none" strike="noStrike">
+        <a:defRPr sz="1400" b="0" i="0" u="none" strike="noStrike" cap="none">
           <a:solidFill>
             <a:srgbClr val="000000"/>
           </a:solidFill>
@@ -13802,7 +14050,7 @@
           <a:sym typeface="Arial"/>
         </a:defRPr>
       </a:lvl1pPr>
-      <a:lvl2pPr lvl="1" marR="0" rtl="0" algn="l">
+      <a:lvl2pPr marR="0" lvl="1" algn="l" rtl="0">
         <a:lnSpc>
           <a:spcPct val="100000"/>
         </a:lnSpc>
@@ -13816,7 +14064,7 @@
           <a:srgbClr val="000000"/>
         </a:buClr>
         <a:buFont typeface="Arial"/>
-        <a:defRPr b="0" i="0" sz="1400" u="none" cap="none" strike="noStrike">
+        <a:defRPr sz="1400" b="0" i="0" u="none" strike="noStrike" cap="none">
           <a:solidFill>
             <a:srgbClr val="000000"/>
           </a:solidFill>
@@ -13826,7 +14074,7 @@
           <a:sym typeface="Arial"/>
         </a:defRPr>
       </a:lvl2pPr>
-      <a:lvl3pPr lvl="2" marR="0" rtl="0" algn="l">
+      <a:lvl3pPr marR="0" lvl="2" algn="l" rtl="0">
         <a:lnSpc>
           <a:spcPct val="100000"/>
         </a:lnSpc>
@@ -13840,7 +14088,7 @@
           <a:srgbClr val="000000"/>
         </a:buClr>
         <a:buFont typeface="Arial"/>
-        <a:defRPr b="0" i="0" sz="1400" u="none" cap="none" strike="noStrike">
+        <a:defRPr sz="1400" b="0" i="0" u="none" strike="noStrike" cap="none">
           <a:solidFill>
             <a:srgbClr val="000000"/>
           </a:solidFill>
@@ -13850,7 +14098,7 @@
           <a:sym typeface="Arial"/>
         </a:defRPr>
       </a:lvl3pPr>
-      <a:lvl4pPr lvl="3" marR="0" rtl="0" algn="l">
+      <a:lvl4pPr marR="0" lvl="3" algn="l" rtl="0">
         <a:lnSpc>
           <a:spcPct val="100000"/>
         </a:lnSpc>
@@ -13864,7 +14112,7 @@
           <a:srgbClr val="000000"/>
         </a:buClr>
         <a:buFont typeface="Arial"/>
-        <a:defRPr b="0" i="0" sz="1400" u="none" cap="none" strike="noStrike">
+        <a:defRPr sz="1400" b="0" i="0" u="none" strike="noStrike" cap="none">
           <a:solidFill>
             <a:srgbClr val="000000"/>
           </a:solidFill>
@@ -13874,7 +14122,7 @@
           <a:sym typeface="Arial"/>
         </a:defRPr>
       </a:lvl4pPr>
-      <a:lvl5pPr lvl="4" marR="0" rtl="0" algn="l">
+      <a:lvl5pPr marR="0" lvl="4" algn="l" rtl="0">
         <a:lnSpc>
           <a:spcPct val="100000"/>
         </a:lnSpc>
@@ -13888,7 +14136,7 @@
           <a:srgbClr val="000000"/>
         </a:buClr>
         <a:buFont typeface="Arial"/>
-        <a:defRPr b="0" i="0" sz="1400" u="none" cap="none" strike="noStrike">
+        <a:defRPr sz="1400" b="0" i="0" u="none" strike="noStrike" cap="none">
           <a:solidFill>
             <a:srgbClr val="000000"/>
           </a:solidFill>
@@ -13898,7 +14146,7 @@
           <a:sym typeface="Arial"/>
         </a:defRPr>
       </a:lvl5pPr>
-      <a:lvl6pPr lvl="5" marR="0" rtl="0" algn="l">
+      <a:lvl6pPr marR="0" lvl="5" algn="l" rtl="0">
         <a:lnSpc>
           <a:spcPct val="100000"/>
         </a:lnSpc>
@@ -13912,7 +14160,7 @@
           <a:srgbClr val="000000"/>
         </a:buClr>
         <a:buFont typeface="Arial"/>
-        <a:defRPr b="0" i="0" sz="1400" u="none" cap="none" strike="noStrike">
+        <a:defRPr sz="1400" b="0" i="0" u="none" strike="noStrike" cap="none">
           <a:solidFill>
             <a:srgbClr val="000000"/>
           </a:solidFill>
@@ -13922,7 +14170,7 @@
           <a:sym typeface="Arial"/>
         </a:defRPr>
       </a:lvl6pPr>
-      <a:lvl7pPr lvl="6" marR="0" rtl="0" algn="l">
+      <a:lvl7pPr marR="0" lvl="6" algn="l" rtl="0">
         <a:lnSpc>
           <a:spcPct val="100000"/>
         </a:lnSpc>
@@ -13936,7 +14184,7 @@
           <a:srgbClr val="000000"/>
         </a:buClr>
         <a:buFont typeface="Arial"/>
-        <a:defRPr b="0" i="0" sz="1400" u="none" cap="none" strike="noStrike">
+        <a:defRPr sz="1400" b="0" i="0" u="none" strike="noStrike" cap="none">
           <a:solidFill>
             <a:srgbClr val="000000"/>
           </a:solidFill>
@@ -13946,7 +14194,7 @@
           <a:sym typeface="Arial"/>
         </a:defRPr>
       </a:lvl7pPr>
-      <a:lvl8pPr lvl="7" marR="0" rtl="0" algn="l">
+      <a:lvl8pPr marR="0" lvl="7" algn="l" rtl="0">
         <a:lnSpc>
           <a:spcPct val="100000"/>
         </a:lnSpc>
@@ -13960,7 +14208,7 @@
           <a:srgbClr val="000000"/>
         </a:buClr>
         <a:buFont typeface="Arial"/>
-        <a:defRPr b="0" i="0" sz="1400" u="none" cap="none" strike="noStrike">
+        <a:defRPr sz="1400" b="0" i="0" u="none" strike="noStrike" cap="none">
           <a:solidFill>
             <a:srgbClr val="000000"/>
           </a:solidFill>
@@ -13970,7 +14218,7 @@
           <a:sym typeface="Arial"/>
         </a:defRPr>
       </a:lvl8pPr>
-      <a:lvl9pPr lvl="8" marR="0" rtl="0" algn="l">
+      <a:lvl9pPr marR="0" lvl="8" algn="l" rtl="0">
         <a:lnSpc>
           <a:spcPct val="100000"/>
         </a:lnSpc>
@@ -13984,7 +14232,7 @@
           <a:srgbClr val="000000"/>
         </a:buClr>
         <a:buFont typeface="Arial"/>
-        <a:defRPr b="0" i="0" sz="1400" u="none" cap="none" strike="noStrike">
+        <a:defRPr sz="1400" b="0" i="0" u="none" strike="noStrike" cap="none">
           <a:solidFill>
             <a:srgbClr val="000000"/>
           </a:solidFill>
@@ -14000,11 +14248,11 @@
 </file>
 
 <file path=ppt/slides/slide1.xml><?xml version="1.0" encoding="utf-8"?>
-<p:sld xmlns:a="http://schemas.openxmlformats.org/drawingml/2006/main" xmlns:r="http://schemas.openxmlformats.org/officeDocument/2006/relationships" xmlns:mc="http://schemas.openxmlformats.org/markup-compatibility/2006" xmlns:mv="urn:schemas-microsoft-com:mac:vml" xmlns:p="http://schemas.openxmlformats.org/presentationml/2006/main" xmlns:c="http://schemas.openxmlformats.org/drawingml/2006/chart" xmlns:dgm="http://schemas.openxmlformats.org/drawingml/2006/diagram" xmlns:o="urn:schemas-microsoft-com:office:office" xmlns:v="urn:schemas-microsoft-com:vml" xmlns:pvml="urn:schemas-microsoft-com:office:powerpoint" xmlns:com="http://schemas.openxmlformats.org/drawingml/2006/compatibility" xmlns:p14="http://schemas.microsoft.com/office/powerpoint/2010/main" xmlns:p15="http://schemas.microsoft.com/office/powerpoint/2012/main" xmlns:ahyp="http://schemas.microsoft.com/office/drawing/2018/hyperlinkcolor">
+<p:sld xmlns:a="http://schemas.openxmlformats.org/drawingml/2006/main" xmlns:r="http://schemas.openxmlformats.org/officeDocument/2006/relationships" xmlns:p="http://schemas.openxmlformats.org/presentationml/2006/main">
   <p:cSld>
     <p:spTree>
       <p:nvGrpSpPr>
-        <p:cNvPr id="83" name="Shape 83"/>
+        <p:cNvPr id="1" name="Shape 83"/>
         <p:cNvGrpSpPr/>
         <p:nvPr/>
       </p:nvGrpSpPr>
@@ -14024,17 +14272,23 @@
         </p:nvGraphicFramePr>
         <p:xfrm>
           <a:off x="460562" y="422462"/>
-          <a:ext cx="3000000" cy="3000000"/>
+          <a:ext cx="5936875" cy="9061075"/>
         </p:xfrm>
         <a:graphic>
           <a:graphicData uri="http://schemas.openxmlformats.org/drawingml/2006/table">
             <a:tbl>
-              <a:tblPr bandRow="1" firstRow="1">
+              <a:tblPr firstRow="1" bandRow="1">
                 <a:noFill/>
                 <a:tableStyleId>{4E99D34A-ADBA-4537-8B12-841D62B675AC}</a:tableStyleId>
               </a:tblPr>
               <a:tblGrid>
-                <a:gridCol w="5936875"/>
+                <a:gridCol w="5936875">
+                  <a:extLst>
+                    <a:ext uri="{9D8B030D-6E8A-4147-A177-3AD203B41FA5}">
+                      <a16:colId xmlns:a16="http://schemas.microsoft.com/office/drawing/2014/main" val="20000"/>
+                    </a:ext>
+                  </a:extLst>
+                </a:gridCol>
               </a:tblGrid>
               <a:tr h="9061075">
                 <a:tc>
@@ -14042,7 +14296,7 @@
                     <a:bodyPr/>
                     <a:lstStyle/>
                     <a:p>
-                      <a:pPr indent="0" lvl="0" marL="0" marR="0" rtl="0" algn="l">
+                      <a:pPr marL="0" marR="0" lvl="0" indent="0" algn="l" rtl="0">
                         <a:lnSpc>
                           <a:spcPct val="100000"/>
                         </a:lnSpc>
@@ -14059,54 +14313,56 @@
                         <a:buFont typeface="Arial"/>
                         <a:buNone/>
                       </a:pPr>
-                      <a:r>
-                        <a:t/>
-                      </a:r>
-                      <a:endParaRPr sz="1350" u="none" cap="none" strike="noStrike"/>
+                      <a:endParaRPr sz="1350" u="none" strike="noStrike" cap="none"/>
                     </a:p>
                   </a:txBody>
-                  <a:tcPr marT="45725" marB="45725" marR="91450" marL="91450">
-                    <a:lnL cap="flat" cmpd="sng" w="12700">
+                  <a:tcPr marL="91450" marR="91450" marT="45725" marB="45725">
+                    <a:lnL w="12700" cap="flat" cmpd="sng">
                       <a:solidFill>
                         <a:schemeClr val="dk1"/>
                       </a:solidFill>
                       <a:prstDash val="solid"/>
                       <a:round/>
-                      <a:headEnd len="sm" w="sm" type="none"/>
-                      <a:tailEnd len="sm" w="sm" type="none"/>
+                      <a:headEnd type="none" w="sm" len="sm"/>
+                      <a:tailEnd type="none" w="sm" len="sm"/>
                     </a:lnL>
-                    <a:lnR cap="flat" cmpd="sng" w="12700">
+                    <a:lnR w="12700" cap="flat" cmpd="sng">
                       <a:solidFill>
                         <a:schemeClr val="dk1"/>
                       </a:solidFill>
                       <a:prstDash val="solid"/>
                       <a:round/>
-                      <a:headEnd len="sm" w="sm" type="none"/>
-                      <a:tailEnd len="sm" w="sm" type="none"/>
+                      <a:headEnd type="none" w="sm" len="sm"/>
+                      <a:tailEnd type="none" w="sm" len="sm"/>
                     </a:lnR>
-                    <a:lnT cap="flat" cmpd="sng" w="12700">
+                    <a:lnT w="12700" cap="flat" cmpd="sng">
                       <a:solidFill>
                         <a:schemeClr val="dk1"/>
                       </a:solidFill>
                       <a:prstDash val="solid"/>
                       <a:round/>
-                      <a:headEnd len="sm" w="sm" type="none"/>
-                      <a:tailEnd len="sm" w="sm" type="none"/>
+                      <a:headEnd type="none" w="sm" len="sm"/>
+                      <a:tailEnd type="none" w="sm" len="sm"/>
                     </a:lnT>
-                    <a:lnB cap="flat" cmpd="sng" w="12700">
+                    <a:lnB w="12700" cap="flat" cmpd="sng">
                       <a:solidFill>
                         <a:schemeClr val="dk1"/>
                       </a:solidFill>
                       <a:prstDash val="solid"/>
                       <a:round/>
-                      <a:headEnd len="sm" w="sm" type="none"/>
-                      <a:tailEnd len="sm" w="sm" type="none"/>
+                      <a:headEnd type="none" w="sm" len="sm"/>
+                      <a:tailEnd type="none" w="sm" len="sm"/>
                     </a:lnB>
                     <a:solidFill>
                       <a:schemeClr val="lt1"/>
                     </a:solidFill>
                   </a:tcPr>
                 </a:tc>
+                <a:extLst>
+                  <a:ext uri="{0D108BD9-81ED-4DB2-BD59-A6C34878D82A}">
+                    <a16:rowId xmlns:a16="http://schemas.microsoft.com/office/drawing/2014/main" val="10000"/>
+                  </a:ext>
+                </a:extLst>
               </a:tr>
             </a:tbl>
           </a:graphicData>
@@ -14115,7 +14371,9 @@
       <p:sp>
         <p:nvSpPr>
           <p:cNvPr id="85" name="Google Shape;85;p1"/>
-          <p:cNvSpPr txBox="1"/>
+          <p:cNvSpPr txBox="1">
+            <a:spLocks noGrp="1"/>
+          </p:cNvSpPr>
           <p:nvPr>
             <p:ph type="ctrTitle"/>
           </p:nvPr>
@@ -14134,12 +14392,12 @@
           </a:ln>
         </p:spPr>
         <p:txBody>
-          <a:bodyPr anchorCtr="0" anchor="b" bIns="45700" lIns="91425" spcFirstLastPara="1" rIns="91425" wrap="square" tIns="45700">
+          <a:bodyPr spcFirstLastPara="1" wrap="square" lIns="91425" tIns="45700" rIns="91425" bIns="45700" anchor="b" anchorCtr="0">
             <a:normAutofit/>
           </a:bodyPr>
           <a:lstStyle/>
           <a:p>
-            <a:pPr indent="0" lvl="0" marL="0" rtl="0" algn="ctr">
+            <a:pPr marL="0" lvl="0" indent="0" algn="ctr" rtl="0">
               <a:lnSpc>
                 <a:spcPct val="90000"/>
               </a:lnSpc>
@@ -14157,16 +14415,24 @@
               <a:buNone/>
             </a:pPr>
             <a:r>
-              <a:rPr b="1" lang="ko-KR" sz="3200"/>
+              <a:rPr lang="ko-KR" sz="3200" b="1">
+                <a:latin typeface="Pretendard" panose="02000503000000020004" pitchFamily="2" charset="-127"/>
+                <a:ea typeface="Pretendard" panose="02000503000000020004" pitchFamily="2" charset="-127"/>
+                <a:cs typeface="Pretendard" panose="02000503000000020004" pitchFamily="2" charset="-127"/>
+              </a:rPr>
               <a:t>수료증</a:t>
             </a:r>
-            <a:endParaRPr/>
+            <a:endParaRPr>
+              <a:latin typeface="Pretendard" panose="02000503000000020004" pitchFamily="2" charset="-127"/>
+              <a:ea typeface="Pretendard" panose="02000503000000020004" pitchFamily="2" charset="-127"/>
+              <a:cs typeface="Pretendard" panose="02000503000000020004" pitchFamily="2" charset="-127"/>
+            </a:endParaRPr>
           </a:p>
         </p:txBody>
       </p:sp>
       <p:pic>
         <p:nvPicPr>
-          <p:cNvPr descr="패턴, 레드, 예술, 그래픽이(가) 표시된 사진&#10;&#10;자동 생성된 설명" id="86" name="Google Shape;86;p1"/>
+          <p:cNvPr id="86" name="Google Shape;86;p1" descr="패턴, 레드, 예술, 그래픽이(가) 표시된 사진&#10;&#10;자동 생성된 설명"/>
           <p:cNvPicPr preferRelativeResize="0"/>
           <p:nvPr/>
         </p:nvPicPr>
@@ -14174,7 +14440,7 @@
           <a:blip r:embed="rId3">
             <a:alphaModFix/>
           </a:blip>
-          <a:srcRect b="0" l="0" r="0" t="0"/>
+          <a:srcRect/>
           <a:stretch/>
         </p:blipFill>
         <p:spPr>
@@ -14211,12 +14477,12 @@
           </a:ln>
         </p:spPr>
         <p:txBody>
-          <a:bodyPr anchorCtr="0" anchor="b" bIns="45700" lIns="91425" spcFirstLastPara="1" rIns="91425" wrap="square" tIns="45700">
+          <a:bodyPr spcFirstLastPara="1" wrap="square" lIns="91425" tIns="45700" rIns="91425" bIns="45700" anchor="b" anchorCtr="0">
             <a:normAutofit/>
           </a:bodyPr>
           <a:lstStyle/>
           <a:p>
-            <a:pPr indent="0" lvl="0" marL="0" marR="0" rtl="0" algn="ctr">
+            <a:pPr marL="0" marR="0" lvl="0" indent="0" algn="ctr" rtl="0">
               <a:lnSpc>
                 <a:spcPct val="90000"/>
               </a:lnSpc>
@@ -14234,24 +14500,24 @@
               <a:buNone/>
             </a:pPr>
             <a:r>
-              <a:rPr b="1" i="0" lang="ko-KR" sz="2000" u="none" cap="none" strike="noStrike">
+              <a:rPr lang="ko-KR" sz="2000" b="1" i="0" u="none" strike="noStrike" cap="none">
                 <a:solidFill>
                   <a:schemeClr val="dk1"/>
                 </a:solidFill>
-                <a:latin typeface="Play"/>
-                <a:ea typeface="Play"/>
-                <a:cs typeface="Play"/>
+                <a:latin typeface="Pretendard" panose="02000503000000020004" pitchFamily="2" charset="-127"/>
+                <a:ea typeface="Pretendard" panose="02000503000000020004" pitchFamily="2" charset="-127"/>
+                <a:cs typeface="Pretendard" panose="02000503000000020004" pitchFamily="2" charset="-127"/>
                 <a:sym typeface="Play"/>
               </a:rPr>
               <a:t>한국범죄예방교육센터</a:t>
             </a:r>
-            <a:endParaRPr b="0" i="0" sz="1400" u="none" cap="none" strike="noStrike">
+            <a:endParaRPr sz="1400" b="0" i="0" u="none" strike="noStrike" cap="none">
               <a:solidFill>
                 <a:srgbClr val="000000"/>
               </a:solidFill>
-              <a:latin typeface="Arial"/>
-              <a:ea typeface="Arial"/>
-              <a:cs typeface="Arial"/>
+              <a:latin typeface="Pretendard" panose="02000503000000020004" pitchFamily="2" charset="-127"/>
+              <a:ea typeface="Pretendard" panose="02000503000000020004" pitchFamily="2" charset="-127"/>
+              <a:cs typeface="Pretendard" panose="02000503000000020004" pitchFamily="2" charset="-127"/>
               <a:sym typeface="Arial"/>
             </a:endParaRPr>
           </a:p>
@@ -14277,12 +14543,12 @@
           </a:ln>
         </p:spPr>
         <p:txBody>
-          <a:bodyPr anchorCtr="0" anchor="b" bIns="45700" lIns="91425" spcFirstLastPara="1" rIns="91425" wrap="square" tIns="45700">
+          <a:bodyPr spcFirstLastPara="1" wrap="square" lIns="91425" tIns="45700" rIns="91425" bIns="45700" anchor="b" anchorCtr="0">
             <a:normAutofit/>
           </a:bodyPr>
           <a:lstStyle/>
           <a:p>
-            <a:pPr indent="0" lvl="0" marL="0" marR="0" rtl="0" algn="ctr">
+            <a:pPr marL="0" marR="0" lvl="0" indent="0" algn="ctr" rtl="0">
               <a:lnSpc>
                 <a:spcPct val="90000"/>
               </a:lnSpc>
@@ -14300,13 +14566,13 @@
               <a:buNone/>
             </a:pPr>
             <a:r>
-              <a:rPr b="0" i="0" lang="ko-KR" sz="1600" u="none" cap="none" strike="noStrike">
+              <a:rPr lang="ko-KR" sz="1600" b="0" i="0" u="none" strike="noStrike" cap="none">
                 <a:solidFill>
                   <a:schemeClr val="dk1"/>
                 </a:solidFill>
-                <a:latin typeface="Play"/>
-                <a:ea typeface="Play"/>
-                <a:cs typeface="Play"/>
+                <a:latin typeface="Pretendard" panose="02000503000000020004" pitchFamily="2" charset="-127"/>
+                <a:ea typeface="Pretendard" panose="02000503000000020004" pitchFamily="2" charset="-127"/>
+                <a:cs typeface="Pretendard" panose="02000503000000020004" pitchFamily="2" charset="-127"/>
                 <a:sym typeface="Play"/>
               </a:rPr>
               <a:t>발급일자 : 202</a:t>
@@ -14316,21 +14582,21 @@
                 <a:solidFill>
                   <a:schemeClr val="dk1"/>
                 </a:solidFill>
-                <a:latin typeface="Play"/>
-                <a:ea typeface="Play"/>
-                <a:cs typeface="Play"/>
+                <a:latin typeface="Pretendard" panose="02000503000000020004" pitchFamily="2" charset="-127"/>
+                <a:ea typeface="Pretendard" panose="02000503000000020004" pitchFamily="2" charset="-127"/>
+                <a:cs typeface="Pretendard" panose="02000503000000020004" pitchFamily="2" charset="-127"/>
                 <a:sym typeface="Play"/>
               </a:rPr>
               <a:t>6</a:t>
             </a:r>
             <a:r>
-              <a:rPr b="0" i="0" lang="ko-KR" sz="1600" u="none" cap="none" strike="noStrike">
+              <a:rPr lang="ko-KR" sz="1600" b="0" i="0" u="none" strike="noStrike" cap="none">
                 <a:solidFill>
                   <a:schemeClr val="dk1"/>
                 </a:solidFill>
-                <a:latin typeface="Play"/>
-                <a:ea typeface="Play"/>
-                <a:cs typeface="Play"/>
+                <a:latin typeface="Pretendard" panose="02000503000000020004" pitchFamily="2" charset="-127"/>
+                <a:ea typeface="Pretendard" panose="02000503000000020004" pitchFamily="2" charset="-127"/>
+                <a:cs typeface="Pretendard" panose="02000503000000020004" pitchFamily="2" charset="-127"/>
                 <a:sym typeface="Play"/>
               </a:rPr>
               <a:t>년   </a:t>
@@ -14340,21 +14606,21 @@
                 <a:solidFill>
                   <a:schemeClr val="dk1"/>
                 </a:solidFill>
-                <a:latin typeface="Play"/>
-                <a:ea typeface="Play"/>
-                <a:cs typeface="Play"/>
+                <a:latin typeface="Pretendard" panose="02000503000000020004" pitchFamily="2" charset="-127"/>
+                <a:ea typeface="Pretendard" panose="02000503000000020004" pitchFamily="2" charset="-127"/>
+                <a:cs typeface="Pretendard" panose="02000503000000020004" pitchFamily="2" charset="-127"/>
                 <a:sym typeface="Play"/>
               </a:rPr>
               <a:t>4</a:t>
             </a:r>
             <a:r>
-              <a:rPr b="0" i="0" lang="ko-KR" sz="1600" u="none" cap="none" strike="noStrike">
+              <a:rPr lang="ko-KR" sz="1600" b="0" i="0" u="none" strike="noStrike" cap="none">
                 <a:solidFill>
                   <a:schemeClr val="dk1"/>
                 </a:solidFill>
-                <a:latin typeface="Play"/>
-                <a:ea typeface="Play"/>
-                <a:cs typeface="Play"/>
+                <a:latin typeface="Pretendard" panose="02000503000000020004" pitchFamily="2" charset="-127"/>
+                <a:ea typeface="Pretendard" panose="02000503000000020004" pitchFamily="2" charset="-127"/>
+                <a:cs typeface="Pretendard" panose="02000503000000020004" pitchFamily="2" charset="-127"/>
                 <a:sym typeface="Play"/>
               </a:rPr>
               <a:t>월 </a:t>
@@ -14364,32 +14630,32 @@
                 <a:solidFill>
                   <a:schemeClr val="dk1"/>
                 </a:solidFill>
-                <a:latin typeface="Play"/>
-                <a:ea typeface="Play"/>
-                <a:cs typeface="Play"/>
+                <a:latin typeface="Pretendard" panose="02000503000000020004" pitchFamily="2" charset="-127"/>
+                <a:ea typeface="Pretendard" panose="02000503000000020004" pitchFamily="2" charset="-127"/>
+                <a:cs typeface="Pretendard" panose="02000503000000020004" pitchFamily="2" charset="-127"/>
                 <a:sym typeface="Play"/>
               </a:rPr>
               <a:t>  24</a:t>
             </a:r>
             <a:r>
-              <a:rPr b="0" i="0" lang="ko-KR" sz="1600" u="none" cap="none" strike="noStrike">
+              <a:rPr lang="ko-KR" sz="1600" b="0" i="0" u="none" strike="noStrike" cap="none">
                 <a:solidFill>
                   <a:schemeClr val="dk1"/>
                 </a:solidFill>
-                <a:latin typeface="Play"/>
-                <a:ea typeface="Play"/>
-                <a:cs typeface="Play"/>
+                <a:latin typeface="Pretendard" panose="02000503000000020004" pitchFamily="2" charset="-127"/>
+                <a:ea typeface="Pretendard" panose="02000503000000020004" pitchFamily="2" charset="-127"/>
+                <a:cs typeface="Pretendard" panose="02000503000000020004" pitchFamily="2" charset="-127"/>
                 <a:sym typeface="Play"/>
               </a:rPr>
               <a:t>일</a:t>
             </a:r>
-            <a:endParaRPr b="0" i="0" sz="1400" u="none" cap="none" strike="noStrike">
+            <a:endParaRPr sz="1400" b="0" i="0" u="none" strike="noStrike" cap="none">
               <a:solidFill>
                 <a:srgbClr val="000000"/>
               </a:solidFill>
-              <a:latin typeface="Arial"/>
-              <a:ea typeface="Arial"/>
-              <a:cs typeface="Arial"/>
+              <a:latin typeface="Pretendard" panose="02000503000000020004" pitchFamily="2" charset="-127"/>
+              <a:ea typeface="Pretendard" panose="02000503000000020004" pitchFamily="2" charset="-127"/>
+              <a:cs typeface="Pretendard" panose="02000503000000020004" pitchFamily="2" charset="-127"/>
               <a:sym typeface="Arial"/>
             </a:endParaRPr>
           </a:p>
@@ -14397,7 +14663,7 @@
       </p:sp>
       <p:pic>
         <p:nvPicPr>
-          <p:cNvPr descr="텍스트, 원, 폰트, 로고이(가) 표시된 사진&#10;&#10;자동 생성된 설명" id="89" name="Google Shape;89;p1"/>
+          <p:cNvPr id="89" name="Google Shape;89;p1" descr="텍스트, 원, 폰트, 로고이(가) 표시된 사진&#10;&#10;자동 생성된 설명"/>
           <p:cNvPicPr preferRelativeResize="0"/>
           <p:nvPr/>
         </p:nvPicPr>
@@ -14405,7 +14671,7 @@
           <a:blip r:embed="rId4">
             <a:alphaModFix amt="50000"/>
           </a:blip>
-          <a:srcRect b="0" l="0" r="0" t="0"/>
+          <a:srcRect/>
           <a:stretch/>
         </p:blipFill>
         <p:spPr>
@@ -14442,12 +14708,12 @@
           </a:ln>
         </p:spPr>
         <p:txBody>
-          <a:bodyPr anchorCtr="0" anchor="b" bIns="45700" lIns="91425" spcFirstLastPara="1" rIns="91425" wrap="square" tIns="45700">
+          <a:bodyPr spcFirstLastPara="1" wrap="square" lIns="91425" tIns="45700" rIns="91425" bIns="45700" anchor="b" anchorCtr="0">
             <a:normAutofit/>
           </a:bodyPr>
           <a:lstStyle/>
           <a:p>
-            <a:pPr indent="0" lvl="0" marL="0" marR="0" rtl="0" algn="l">
+            <a:pPr marL="0" marR="0" lvl="0" indent="0" algn="l" rtl="0">
               <a:lnSpc>
                 <a:spcPct val="90000"/>
               </a:lnSpc>
@@ -14465,13 +14731,13 @@
               <a:buNone/>
             </a:pPr>
             <a:r>
-              <a:rPr b="0" i="0" lang="ko-KR" sz="1400" u="none" cap="none" strike="noStrike">
+              <a:rPr lang="ko-KR" sz="1400" b="0" i="0" u="none" strike="noStrike" cap="none">
                 <a:solidFill>
                   <a:schemeClr val="dk1"/>
                 </a:solidFill>
-                <a:latin typeface="Play"/>
-                <a:ea typeface="Play"/>
-                <a:cs typeface="Play"/>
+                <a:latin typeface="Pretendard" panose="02000503000000020004" pitchFamily="2" charset="-127"/>
+                <a:ea typeface="Pretendard" panose="02000503000000020004" pitchFamily="2" charset="-127"/>
+                <a:cs typeface="Pretendard" panose="02000503000000020004" pitchFamily="2" charset="-127"/>
                 <a:sym typeface="Play"/>
               </a:rPr>
               <a:t>증 202</a:t>
@@ -14481,21 +14747,21 @@
                 <a:solidFill>
                   <a:schemeClr val="dk1"/>
                 </a:solidFill>
-                <a:latin typeface="Play"/>
-                <a:ea typeface="Play"/>
-                <a:cs typeface="Play"/>
+                <a:latin typeface="Pretendard" panose="02000503000000020004" pitchFamily="2" charset="-127"/>
+                <a:ea typeface="Pretendard" panose="02000503000000020004" pitchFamily="2" charset="-127"/>
+                <a:cs typeface="Pretendard" panose="02000503000000020004" pitchFamily="2" charset="-127"/>
                 <a:sym typeface="Play"/>
               </a:rPr>
               <a:t>6</a:t>
             </a:r>
             <a:r>
-              <a:rPr b="0" i="0" lang="ko-KR" sz="1400" u="none" cap="none" strike="noStrike">
+              <a:rPr lang="ko-KR" sz="1400" b="0" i="0" u="none" strike="noStrike" cap="none">
                 <a:solidFill>
                   <a:schemeClr val="dk1"/>
                 </a:solidFill>
-                <a:latin typeface="Play"/>
-                <a:ea typeface="Play"/>
-                <a:cs typeface="Play"/>
+                <a:latin typeface="Pretendard" panose="02000503000000020004" pitchFamily="2" charset="-127"/>
+                <a:ea typeface="Pretendard" panose="02000503000000020004" pitchFamily="2" charset="-127"/>
+                <a:cs typeface="Pretendard" panose="02000503000000020004" pitchFamily="2" charset="-127"/>
                 <a:sym typeface="Play"/>
               </a:rPr>
               <a:t>-kcpec-</a:t>
@@ -14505,21 +14771,21 @@
                 <a:solidFill>
                   <a:schemeClr val="dk1"/>
                 </a:solidFill>
-                <a:latin typeface="Play"/>
-                <a:ea typeface="Play"/>
-                <a:cs typeface="Play"/>
+                <a:latin typeface="Pretendard" panose="02000503000000020004" pitchFamily="2" charset="-127"/>
+                <a:ea typeface="Pretendard" panose="02000503000000020004" pitchFamily="2" charset="-127"/>
+                <a:cs typeface="Pretendard" panose="02000503000000020004" pitchFamily="2" charset="-127"/>
                 <a:sym typeface="Play"/>
               </a:rPr>
               <a:t>6</a:t>
             </a:r>
             <a:r>
-              <a:rPr b="0" i="0" lang="ko-KR" sz="1400" u="none" cap="none" strike="noStrike">
+              <a:rPr lang="ko-KR" sz="1400" b="0" i="0" u="none" strike="noStrike" cap="none">
                 <a:solidFill>
                   <a:schemeClr val="dk1"/>
                 </a:solidFill>
-                <a:latin typeface="Play"/>
-                <a:ea typeface="Play"/>
-                <a:cs typeface="Play"/>
+                <a:latin typeface="Pretendard" panose="02000503000000020004" pitchFamily="2" charset="-127"/>
+                <a:ea typeface="Pretendard" panose="02000503000000020004" pitchFamily="2" charset="-127"/>
+                <a:cs typeface="Pretendard" panose="02000503000000020004" pitchFamily="2" charset="-127"/>
                 <a:sym typeface="Play"/>
               </a:rPr>
               <a:t>0- 000</a:t>
@@ -14529,32 +14795,32 @@
                 <a:solidFill>
                   <a:schemeClr val="dk1"/>
                 </a:solidFill>
-                <a:latin typeface="Play"/>
-                <a:ea typeface="Play"/>
-                <a:cs typeface="Play"/>
+                <a:latin typeface="Pretendard" panose="02000503000000020004" pitchFamily="2" charset="-127"/>
+                <a:ea typeface="Pretendard" panose="02000503000000020004" pitchFamily="2" charset="-127"/>
+                <a:cs typeface="Pretendard" panose="02000503000000020004" pitchFamily="2" charset="-127"/>
                 <a:sym typeface="Play"/>
               </a:rPr>
               <a:t>17</a:t>
             </a:r>
             <a:r>
-              <a:rPr b="0" i="0" lang="ko-KR" sz="1400" u="none" cap="none" strike="noStrike">
+              <a:rPr lang="ko-KR" sz="1400" b="0" i="0" u="none" strike="noStrike" cap="none">
                 <a:solidFill>
                   <a:schemeClr val="dk1"/>
                 </a:solidFill>
-                <a:latin typeface="Play"/>
-                <a:ea typeface="Play"/>
-                <a:cs typeface="Play"/>
+                <a:latin typeface="Pretendard" panose="02000503000000020004" pitchFamily="2" charset="-127"/>
+                <a:ea typeface="Pretendard" panose="02000503000000020004" pitchFamily="2" charset="-127"/>
+                <a:cs typeface="Pretendard" panose="02000503000000020004" pitchFamily="2" charset="-127"/>
                 <a:sym typeface="Play"/>
               </a:rPr>
               <a:t> 호   </a:t>
             </a:r>
-            <a:endParaRPr b="0" i="0" sz="1400" u="none" cap="none" strike="noStrike">
+            <a:endParaRPr sz="1400" b="0" i="0" u="none" strike="noStrike" cap="none">
               <a:solidFill>
                 <a:srgbClr val="000000"/>
               </a:solidFill>
-              <a:latin typeface="Arial"/>
-              <a:ea typeface="Arial"/>
-              <a:cs typeface="Arial"/>
+              <a:latin typeface="Pretendard" panose="02000503000000020004" pitchFamily="2" charset="-127"/>
+              <a:ea typeface="Pretendard" panose="02000503000000020004" pitchFamily="2" charset="-127"/>
+              <a:cs typeface="Pretendard" panose="02000503000000020004" pitchFamily="2" charset="-127"/>
               <a:sym typeface="Arial"/>
             </a:endParaRPr>
           </a:p>
@@ -14563,9 +14829,11 @@
       <p:sp>
         <p:nvSpPr>
           <p:cNvPr id="91" name="Google Shape;91;p1"/>
-          <p:cNvSpPr txBox="1"/>
+          <p:cNvSpPr txBox="1">
+            <a:spLocks noGrp="1"/>
+          </p:cNvSpPr>
           <p:nvPr>
-            <p:ph idx="1" type="subTitle"/>
+            <p:ph type="subTitle" idx="1"/>
           </p:nvPr>
         </p:nvSpPr>
         <p:spPr>
@@ -14582,12 +14850,12 @@
           </a:ln>
         </p:spPr>
         <p:txBody>
-          <a:bodyPr anchorCtr="0" anchor="t" bIns="45700" lIns="91425" spcFirstLastPara="1" rIns="91425" wrap="square" tIns="45700">
+          <a:bodyPr spcFirstLastPara="1" wrap="square" lIns="91425" tIns="45700" rIns="91425" bIns="45700" anchor="t" anchorCtr="0">
             <a:normAutofit/>
           </a:bodyPr>
           <a:lstStyle/>
           <a:p>
-            <a:pPr indent="0" lvl="0" marL="0" rtl="0" algn="ctr">
+            <a:pPr marL="0" lvl="0" indent="0" algn="ctr" rtl="0">
               <a:lnSpc>
                 <a:spcPct val="90000"/>
               </a:lnSpc>
@@ -14605,22 +14873,22 @@
             </a:pPr>
             <a:r>
               <a:rPr lang="ko-KR" sz="1600">
-                <a:latin typeface="Arial"/>
-                <a:ea typeface="Arial"/>
-                <a:cs typeface="Arial"/>
+                <a:latin typeface="Pretendard" panose="02000503000000020004" pitchFamily="2" charset="-127"/>
+                <a:ea typeface="Pretendard" panose="02000503000000020004" pitchFamily="2" charset="-127"/>
+                <a:cs typeface="Pretendard" panose="02000503000000020004" pitchFamily="2" charset="-127"/>
                 <a:sym typeface="Arial"/>
               </a:rPr>
               <a:t>위 사람은 한국범죄예방교육센터에서 실시한</a:t>
             </a:r>
             <a:endParaRPr sz="1600">
-              <a:latin typeface="Arial"/>
-              <a:ea typeface="Arial"/>
-              <a:cs typeface="Arial"/>
+              <a:latin typeface="Pretendard" panose="02000503000000020004" pitchFamily="2" charset="-127"/>
+              <a:ea typeface="Pretendard" panose="02000503000000020004" pitchFamily="2" charset="-127"/>
+              <a:cs typeface="Pretendard" panose="02000503000000020004" pitchFamily="2" charset="-127"/>
               <a:sym typeface="Arial"/>
             </a:endParaRPr>
           </a:p>
           <a:p>
-            <a:pPr indent="0" lvl="0" marL="0" rtl="0" algn="ctr">
+            <a:pPr marL="0" lvl="0" indent="0" algn="ctr" rtl="0">
               <a:lnSpc>
                 <a:spcPct val="90000"/>
               </a:lnSpc>
@@ -14638,22 +14906,22 @@
             </a:pPr>
             <a:r>
               <a:rPr lang="ko-KR" sz="1600">
-                <a:latin typeface="Arial"/>
-                <a:ea typeface="Arial"/>
-                <a:cs typeface="Arial"/>
+                <a:latin typeface="Pretendard" panose="02000503000000020004" pitchFamily="2" charset="-127"/>
+                <a:ea typeface="Pretendard" panose="02000503000000020004" pitchFamily="2" charset="-127"/>
+                <a:cs typeface="Pretendard" panose="02000503000000020004" pitchFamily="2" charset="-127"/>
                 <a:sym typeface="Arial"/>
               </a:rPr>
               <a:t>상기 교육과정을 성실히 이수하였으므로</a:t>
             </a:r>
             <a:endParaRPr sz="1600">
-              <a:latin typeface="Arial"/>
-              <a:ea typeface="Arial"/>
-              <a:cs typeface="Arial"/>
+              <a:latin typeface="Pretendard" panose="02000503000000020004" pitchFamily="2" charset="-127"/>
+              <a:ea typeface="Pretendard" panose="02000503000000020004" pitchFamily="2" charset="-127"/>
+              <a:cs typeface="Pretendard" panose="02000503000000020004" pitchFamily="2" charset="-127"/>
               <a:sym typeface="Arial"/>
             </a:endParaRPr>
           </a:p>
           <a:p>
-            <a:pPr indent="0" lvl="0" marL="0" rtl="0" algn="ctr">
+            <a:pPr marL="0" lvl="0" indent="0" algn="ctr" rtl="0">
               <a:lnSpc>
                 <a:spcPct val="90000"/>
               </a:lnSpc>
@@ -14671,14 +14939,18 @@
             </a:pPr>
             <a:r>
               <a:rPr lang="ko-KR" sz="1600">
-                <a:latin typeface="Arial"/>
-                <a:ea typeface="Arial"/>
-                <a:cs typeface="Arial"/>
+                <a:latin typeface="Pretendard" panose="02000503000000020004" pitchFamily="2" charset="-127"/>
+                <a:ea typeface="Pretendard" panose="02000503000000020004" pitchFamily="2" charset="-127"/>
+                <a:cs typeface="Pretendard" panose="02000503000000020004" pitchFamily="2" charset="-127"/>
                 <a:sym typeface="Arial"/>
               </a:rPr>
               <a:t>본 증서를 수여합니다.</a:t>
             </a:r>
-            <a:endParaRPr/>
+            <a:endParaRPr>
+              <a:latin typeface="Pretendard" panose="02000503000000020004" pitchFamily="2" charset="-127"/>
+              <a:ea typeface="Pretendard" panose="02000503000000020004" pitchFamily="2" charset="-127"/>
+              <a:cs typeface="Pretendard" panose="02000503000000020004" pitchFamily="2" charset="-127"/>
+            </a:endParaRPr>
           </a:p>
         </p:txBody>
       </p:sp>
@@ -14690,20 +14962,44 @@
         </p:nvGraphicFramePr>
         <p:xfrm>
           <a:off x="813546" y="2245640"/>
-          <a:ext cx="3000000" cy="3000000"/>
+          <a:ext cx="5197275" cy="3659675"/>
         </p:xfrm>
         <a:graphic>
           <a:graphicData uri="http://schemas.openxmlformats.org/drawingml/2006/table">
             <a:tbl>
-              <a:tblPr bandRow="1" firstRow="1">
+              <a:tblPr firstRow="1" bandRow="1">
                 <a:noFill/>
                 <a:tableStyleId>{76C34E99-6266-4279-BEDC-D33A93AAC897}</a:tableStyleId>
               </a:tblPr>
               <a:tblGrid>
-                <a:gridCol w="1035450"/>
-                <a:gridCol w="1563175"/>
-                <a:gridCol w="1129600"/>
-                <a:gridCol w="1469050"/>
+                <a:gridCol w="1035450">
+                  <a:extLst>
+                    <a:ext uri="{9D8B030D-6E8A-4147-A177-3AD203B41FA5}">
+                      <a16:colId xmlns:a16="http://schemas.microsoft.com/office/drawing/2014/main" val="20000"/>
+                    </a:ext>
+                  </a:extLst>
+                </a:gridCol>
+                <a:gridCol w="1563175">
+                  <a:extLst>
+                    <a:ext uri="{9D8B030D-6E8A-4147-A177-3AD203B41FA5}">
+                      <a16:colId xmlns:a16="http://schemas.microsoft.com/office/drawing/2014/main" val="20001"/>
+                    </a:ext>
+                  </a:extLst>
+                </a:gridCol>
+                <a:gridCol w="1129600">
+                  <a:extLst>
+                    <a:ext uri="{9D8B030D-6E8A-4147-A177-3AD203B41FA5}">
+                      <a16:colId xmlns:a16="http://schemas.microsoft.com/office/drawing/2014/main" val="20002"/>
+                    </a:ext>
+                  </a:extLst>
+                </a:gridCol>
+                <a:gridCol w="1469050">
+                  <a:extLst>
+                    <a:ext uri="{9D8B030D-6E8A-4147-A177-3AD203B41FA5}">
+                      <a16:colId xmlns:a16="http://schemas.microsoft.com/office/drawing/2014/main" val="20003"/>
+                    </a:ext>
+                  </a:extLst>
+                </a:gridCol>
               </a:tblGrid>
               <a:tr h="562550">
                 <a:tc>
@@ -14711,7 +15007,7 @@
                     <a:bodyPr/>
                     <a:lstStyle/>
                     <a:p>
-                      <a:pPr indent="0" lvl="0" marL="0" marR="0" rtl="0" algn="ctr">
+                      <a:pPr marL="0" marR="0" lvl="0" indent="0" algn="ctr" rtl="0">
                         <a:lnSpc>
                           <a:spcPct val="100000"/>
                         </a:lnSpc>
@@ -14729,14 +15025,14 @@
                         <a:buNone/>
                       </a:pPr>
                       <a:r>
-                        <a:rPr b="0" lang="ko-KR" sz="1200" u="none" cap="none" strike="noStrike">
+                        <a:rPr lang="ko-KR" sz="1200" b="0" u="none" strike="noStrike" cap="none">
                           <a:solidFill>
                             <a:schemeClr val="dk1"/>
                           </a:solidFill>
                         </a:rPr>
                         <a:t>이수과정</a:t>
                       </a:r>
-                      <a:endParaRPr b="0" sz="1200" u="none" cap="none" strike="noStrike">
+                      <a:endParaRPr sz="1200" b="0" u="none" strike="noStrike" cap="none">
                         <a:solidFill>
                           <a:schemeClr val="dk1"/>
                         </a:solidFill>
@@ -14747,42 +15043,42 @@
                       </a:endParaRPr>
                     </a:p>
                   </a:txBody>
-                  <a:tcPr marT="45725" marB="45725" marR="91450" marL="91450" anchor="ctr">
-                    <a:lnL cap="flat" cmpd="sng" w="12700">
+                  <a:tcPr marL="91450" marR="91450" marT="45725" marB="45725" anchor="ctr">
+                    <a:lnL w="12700" cap="flat" cmpd="sng">
                       <a:solidFill>
                         <a:srgbClr val="747474"/>
                       </a:solidFill>
                       <a:prstDash val="solid"/>
                       <a:round/>
-                      <a:headEnd len="sm" w="sm" type="none"/>
-                      <a:tailEnd len="sm" w="sm" type="none"/>
+                      <a:headEnd type="none" w="sm" len="sm"/>
+                      <a:tailEnd type="none" w="sm" len="sm"/>
                     </a:lnL>
-                    <a:lnR cap="flat" cmpd="sng" w="12700">
+                    <a:lnR w="12700" cap="flat" cmpd="sng">
                       <a:solidFill>
                         <a:srgbClr val="747474"/>
                       </a:solidFill>
                       <a:prstDash val="solid"/>
                       <a:round/>
-                      <a:headEnd len="sm" w="sm" type="none"/>
-                      <a:tailEnd len="sm" w="sm" type="none"/>
+                      <a:headEnd type="none" w="sm" len="sm"/>
+                      <a:tailEnd type="none" w="sm" len="sm"/>
                     </a:lnR>
-                    <a:lnT cap="flat" cmpd="sng" w="12700">
+                    <a:lnT w="12700" cap="flat" cmpd="sng">
                       <a:solidFill>
                         <a:srgbClr val="747474"/>
                       </a:solidFill>
                       <a:prstDash val="solid"/>
                       <a:round/>
-                      <a:headEnd len="sm" w="sm" type="none"/>
-                      <a:tailEnd len="sm" w="sm" type="none"/>
+                      <a:headEnd type="none" w="sm" len="sm"/>
+                      <a:tailEnd type="none" w="sm" len="sm"/>
                     </a:lnT>
-                    <a:lnB cap="flat" cmpd="sng" w="12700">
+                    <a:lnB w="12700" cap="flat" cmpd="sng">
                       <a:solidFill>
                         <a:srgbClr val="747474"/>
                       </a:solidFill>
                       <a:prstDash val="solid"/>
                       <a:round/>
-                      <a:headEnd len="sm" w="sm" type="none"/>
-                      <a:tailEnd len="sm" w="sm" type="none"/>
+                      <a:headEnd type="none" w="sm" len="sm"/>
+                      <a:tailEnd type="none" w="sm" len="sm"/>
                     </a:lnB>
                   </a:tcPr>
                 </a:tc>
@@ -14791,7 +15087,7 @@
                     <a:bodyPr/>
                     <a:lstStyle/>
                     <a:p>
-                      <a:pPr indent="0" lvl="0" marL="0" marR="0" rtl="0" algn="ctr">
+                      <a:pPr marL="0" marR="0" lvl="0" indent="0" algn="ctr" rtl="0">
                         <a:lnSpc>
                           <a:spcPct val="100000"/>
                         </a:lnSpc>
@@ -14809,7 +15105,7 @@
                         <a:buNone/>
                       </a:pPr>
                       <a:r>
-                        <a:rPr b="0" lang="ko-KR" sz="1200">
+                        <a:rPr lang="ko-KR" sz="1200" b="0">
                           <a:latin typeface="Arial"/>
                           <a:ea typeface="Arial"/>
                           <a:cs typeface="Arial"/>
@@ -14818,7 +15114,7 @@
                         <a:t>성매매 </a:t>
                       </a:r>
                       <a:r>
-                        <a:rPr b="0" lang="ko-KR" sz="1200" u="none" cap="none" strike="noStrike">
+                        <a:rPr lang="ko-KR" sz="1200" b="0" u="none" strike="noStrike" cap="none">
                           <a:solidFill>
                             <a:schemeClr val="dk1"/>
                           </a:solidFill>
@@ -14829,7 +15125,7 @@
                         </a:rPr>
                         <a:t>예방교육</a:t>
                       </a:r>
-                      <a:endParaRPr b="0" sz="1200" u="none" cap="none" strike="noStrike">
+                      <a:endParaRPr sz="1200" b="0" u="none" strike="noStrike" cap="none">
                         <a:solidFill>
                           <a:schemeClr val="dk1"/>
                         </a:solidFill>
@@ -14840,42 +15136,42 @@
                       </a:endParaRPr>
                     </a:p>
                   </a:txBody>
-                  <a:tcPr marT="45725" marB="45725" marR="91450" marL="91450" anchor="ctr">
-                    <a:lnL cap="flat" cmpd="sng" w="12700">
+                  <a:tcPr marL="91450" marR="91450" marT="45725" marB="45725" anchor="ctr">
+                    <a:lnL w="12700" cap="flat" cmpd="sng">
                       <a:solidFill>
                         <a:srgbClr val="747474"/>
                       </a:solidFill>
                       <a:prstDash val="solid"/>
                       <a:round/>
-                      <a:headEnd len="sm" w="sm" type="none"/>
-                      <a:tailEnd len="sm" w="sm" type="none"/>
+                      <a:headEnd type="none" w="sm" len="sm"/>
+                      <a:tailEnd type="none" w="sm" len="sm"/>
                     </a:lnL>
-                    <a:lnR cap="flat" cmpd="sng" w="12700">
+                    <a:lnR w="12700" cap="flat" cmpd="sng">
                       <a:solidFill>
                         <a:srgbClr val="747474"/>
                       </a:solidFill>
                       <a:prstDash val="solid"/>
                       <a:round/>
-                      <a:headEnd len="sm" w="sm" type="none"/>
-                      <a:tailEnd len="sm" w="sm" type="none"/>
+                      <a:headEnd type="none" w="sm" len="sm"/>
+                      <a:tailEnd type="none" w="sm" len="sm"/>
                     </a:lnR>
-                    <a:lnT cap="flat" cmpd="sng" w="12700">
+                    <a:lnT w="12700" cap="flat" cmpd="sng">
                       <a:solidFill>
                         <a:srgbClr val="747474"/>
                       </a:solidFill>
                       <a:prstDash val="solid"/>
                       <a:round/>
-                      <a:headEnd len="sm" w="sm" type="none"/>
-                      <a:tailEnd len="sm" w="sm" type="none"/>
+                      <a:headEnd type="none" w="sm" len="sm"/>
+                      <a:tailEnd type="none" w="sm" len="sm"/>
                     </a:lnT>
-                    <a:lnB cap="flat" cmpd="sng" w="12700">
+                    <a:lnB w="12700" cap="flat" cmpd="sng">
                       <a:solidFill>
                         <a:srgbClr val="747474"/>
                       </a:solidFill>
                       <a:prstDash val="solid"/>
                       <a:round/>
-                      <a:headEnd len="sm" w="sm" type="none"/>
-                      <a:tailEnd len="sm" w="sm" type="none"/>
+                      <a:headEnd type="none" w="sm" len="sm"/>
+                      <a:tailEnd type="none" w="sm" len="sm"/>
                     </a:lnB>
                   </a:tcPr>
                 </a:tc>
@@ -14884,7 +15180,7 @@
                     <a:bodyPr/>
                     <a:lstStyle/>
                     <a:p>
-                      <a:pPr indent="0" lvl="0" marL="0" marR="0" rtl="0" algn="ctr">
+                      <a:pPr marL="0" marR="0" lvl="0" indent="0" algn="ctr" rtl="0">
                         <a:lnSpc>
                           <a:spcPct val="100000"/>
                         </a:lnSpc>
@@ -14902,14 +15198,14 @@
                         <a:buNone/>
                       </a:pPr>
                       <a:r>
-                        <a:rPr b="0" lang="ko-KR" sz="1200" u="none" cap="none" strike="noStrike">
+                        <a:rPr lang="ko-KR" sz="1200" b="0" u="none" strike="noStrike" cap="none">
                           <a:solidFill>
                             <a:schemeClr val="dk1"/>
                           </a:solidFill>
                         </a:rPr>
                         <a:t>이수일자</a:t>
                       </a:r>
-                      <a:endParaRPr b="0" sz="1200" u="none" cap="none" strike="noStrike">
+                      <a:endParaRPr sz="1200" b="0" u="none" strike="noStrike" cap="none">
                         <a:solidFill>
                           <a:schemeClr val="dk1"/>
                         </a:solidFill>
@@ -14920,42 +15216,42 @@
                       </a:endParaRPr>
                     </a:p>
                   </a:txBody>
-                  <a:tcPr marT="45725" marB="45725" marR="91450" marL="91450" anchor="ctr">
-                    <a:lnL cap="flat" cmpd="sng" w="12700">
+                  <a:tcPr marL="91450" marR="91450" marT="45725" marB="45725" anchor="ctr">
+                    <a:lnL w="12700" cap="flat" cmpd="sng">
                       <a:solidFill>
                         <a:srgbClr val="747474"/>
                       </a:solidFill>
                       <a:prstDash val="solid"/>
                       <a:round/>
-                      <a:headEnd len="sm" w="sm" type="none"/>
-                      <a:tailEnd len="sm" w="sm" type="none"/>
+                      <a:headEnd type="none" w="sm" len="sm"/>
+                      <a:tailEnd type="none" w="sm" len="sm"/>
                     </a:lnL>
-                    <a:lnR cap="flat" cmpd="sng" w="12700">
+                    <a:lnR w="12700" cap="flat" cmpd="sng">
                       <a:solidFill>
                         <a:srgbClr val="747474"/>
                       </a:solidFill>
                       <a:prstDash val="solid"/>
                       <a:round/>
-                      <a:headEnd len="sm" w="sm" type="none"/>
-                      <a:tailEnd len="sm" w="sm" type="none"/>
+                      <a:headEnd type="none" w="sm" len="sm"/>
+                      <a:tailEnd type="none" w="sm" len="sm"/>
                     </a:lnR>
-                    <a:lnT cap="flat" cmpd="sng" w="12700">
+                    <a:lnT w="12700" cap="flat" cmpd="sng">
                       <a:solidFill>
                         <a:srgbClr val="747474"/>
                       </a:solidFill>
                       <a:prstDash val="solid"/>
                       <a:round/>
-                      <a:headEnd len="sm" w="sm" type="none"/>
-                      <a:tailEnd len="sm" w="sm" type="none"/>
+                      <a:headEnd type="none" w="sm" len="sm"/>
+                      <a:tailEnd type="none" w="sm" len="sm"/>
                     </a:lnT>
-                    <a:lnB cap="flat" cmpd="sng" w="12700">
+                    <a:lnB w="12700" cap="flat" cmpd="sng">
                       <a:solidFill>
                         <a:srgbClr val="747474"/>
                       </a:solidFill>
                       <a:prstDash val="solid"/>
                       <a:round/>
-                      <a:headEnd len="sm" w="sm" type="none"/>
-                      <a:tailEnd len="sm" w="sm" type="none"/>
+                      <a:headEnd type="none" w="sm" len="sm"/>
+                      <a:tailEnd type="none" w="sm" len="sm"/>
                     </a:lnB>
                   </a:tcPr>
                 </a:tc>
@@ -14964,7 +15260,7 @@
                     <a:bodyPr/>
                     <a:lstStyle/>
                     <a:p>
-                      <a:pPr indent="0" lvl="0" marL="0" marR="0" rtl="0" algn="ctr">
+                      <a:pPr marL="0" marR="0" lvl="0" indent="0" algn="ctr" rtl="0">
                         <a:lnSpc>
                           <a:spcPct val="100000"/>
                         </a:lnSpc>
@@ -14982,26 +15278,26 @@
                         <a:buNone/>
                       </a:pPr>
                       <a:r>
-                        <a:rPr b="0" lang="ko-KR" sz="1200" u="none" cap="none" strike="noStrike"/>
+                        <a:rPr lang="ko-KR" sz="1200" b="0" u="none" strike="noStrike" cap="none"/>
                         <a:t>202</a:t>
                       </a:r>
                       <a:r>
-                        <a:rPr b="0" lang="ko-KR" sz="1200"/>
+                        <a:rPr lang="ko-KR" sz="1200" b="0"/>
                         <a:t>6</a:t>
                       </a:r>
                       <a:r>
-                        <a:rPr b="0" lang="ko-KR" sz="1200" u="none" cap="none" strike="noStrike"/>
+                        <a:rPr lang="ko-KR" sz="1200" b="0" u="none" strike="noStrike" cap="none"/>
                         <a:t>년</a:t>
                       </a:r>
                       <a:r>
-                        <a:rPr b="0" lang="ko-KR" sz="1200"/>
+                        <a:rPr lang="ko-KR" sz="1200" b="0"/>
                         <a:t>  4월  24</a:t>
                       </a:r>
                       <a:r>
-                        <a:rPr b="0" lang="ko-KR" sz="1200" u="none" cap="none" strike="noStrike"/>
+                        <a:rPr lang="ko-KR" sz="1200" b="0" u="none" strike="noStrike" cap="none"/>
                         <a:t>일</a:t>
                       </a:r>
-                      <a:endParaRPr b="0" sz="1200" u="none" cap="none" strike="noStrike">
+                      <a:endParaRPr sz="1200" b="0" u="none" strike="noStrike" cap="none">
                         <a:solidFill>
                           <a:schemeClr val="dk1"/>
                         </a:solidFill>
@@ -15012,45 +15308,50 @@
                       </a:endParaRPr>
                     </a:p>
                   </a:txBody>
-                  <a:tcPr marT="45725" marB="45725" marR="91450" marL="91450" anchor="ctr">
-                    <a:lnL cap="flat" cmpd="sng" w="12700">
+                  <a:tcPr marL="91450" marR="91450" marT="45725" marB="45725" anchor="ctr">
+                    <a:lnL w="12700" cap="flat" cmpd="sng">
                       <a:solidFill>
                         <a:srgbClr val="747474"/>
                       </a:solidFill>
                       <a:prstDash val="solid"/>
                       <a:round/>
-                      <a:headEnd len="sm" w="sm" type="none"/>
-                      <a:tailEnd len="sm" w="sm" type="none"/>
+                      <a:headEnd type="none" w="sm" len="sm"/>
+                      <a:tailEnd type="none" w="sm" len="sm"/>
                     </a:lnL>
-                    <a:lnR cap="flat" cmpd="sng" w="12700">
+                    <a:lnR w="12700" cap="flat" cmpd="sng">
                       <a:solidFill>
                         <a:srgbClr val="747474"/>
                       </a:solidFill>
                       <a:prstDash val="solid"/>
                       <a:round/>
-                      <a:headEnd len="sm" w="sm" type="none"/>
-                      <a:tailEnd len="sm" w="sm" type="none"/>
+                      <a:headEnd type="none" w="sm" len="sm"/>
+                      <a:tailEnd type="none" w="sm" len="sm"/>
                     </a:lnR>
-                    <a:lnT cap="flat" cmpd="sng" w="12700">
+                    <a:lnT w="12700" cap="flat" cmpd="sng">
                       <a:solidFill>
                         <a:srgbClr val="747474"/>
                       </a:solidFill>
                       <a:prstDash val="solid"/>
                       <a:round/>
-                      <a:headEnd len="sm" w="sm" type="none"/>
-                      <a:tailEnd len="sm" w="sm" type="none"/>
+                      <a:headEnd type="none" w="sm" len="sm"/>
+                      <a:tailEnd type="none" w="sm" len="sm"/>
                     </a:lnT>
-                    <a:lnB cap="flat" cmpd="sng" w="12700">
+                    <a:lnB w="12700" cap="flat" cmpd="sng">
                       <a:solidFill>
                         <a:srgbClr val="747474"/>
                       </a:solidFill>
                       <a:prstDash val="solid"/>
                       <a:round/>
-                      <a:headEnd len="sm" w="sm" type="none"/>
-                      <a:tailEnd len="sm" w="sm" type="none"/>
+                      <a:headEnd type="none" w="sm" len="sm"/>
+                      <a:tailEnd type="none" w="sm" len="sm"/>
                     </a:lnB>
                   </a:tcPr>
                 </a:tc>
+                <a:extLst>
+                  <a:ext uri="{0D108BD9-81ED-4DB2-BD59-A6C34878D82A}">
+                    <a16:rowId xmlns:a16="http://schemas.microsoft.com/office/drawing/2014/main" val="10000"/>
+                  </a:ext>
+                </a:extLst>
               </a:tr>
               <a:tr h="530075">
                 <a:tc>
@@ -15058,7 +15359,7 @@
                     <a:bodyPr/>
                     <a:lstStyle/>
                     <a:p>
-                      <a:pPr indent="0" lvl="0" marL="0" marR="0" rtl="0" algn="ctr">
+                      <a:pPr marL="0" marR="0" lvl="0" indent="0" algn="ctr" rtl="0">
                         <a:lnSpc>
                           <a:spcPct val="100000"/>
                         </a:lnSpc>
@@ -15076,14 +15377,14 @@
                         <a:buNone/>
                       </a:pPr>
                       <a:r>
-                        <a:rPr b="0" lang="ko-KR" sz="1200" u="none" cap="none" strike="noStrike">
+                        <a:rPr lang="ko-KR" sz="1200" b="0" u="none" strike="noStrike" cap="none">
                           <a:solidFill>
                             <a:schemeClr val="dk1"/>
                           </a:solidFill>
                         </a:rPr>
                         <a:t>성명</a:t>
                       </a:r>
-                      <a:endParaRPr b="0" sz="1200" u="none" cap="none" strike="noStrike">
+                      <a:endParaRPr sz="1200" b="0" u="none" strike="noStrike" cap="none">
                         <a:solidFill>
                           <a:schemeClr val="dk1"/>
                         </a:solidFill>
@@ -15094,42 +15395,42 @@
                       </a:endParaRPr>
                     </a:p>
                   </a:txBody>
-                  <a:tcPr marT="45725" marB="45725" marR="91450" marL="91450" anchor="ctr">
-                    <a:lnL cap="flat" cmpd="sng" w="12700">
+                  <a:tcPr marL="91450" marR="91450" marT="45725" marB="45725" anchor="ctr">
+                    <a:lnL w="12700" cap="flat" cmpd="sng">
                       <a:solidFill>
                         <a:srgbClr val="747474"/>
                       </a:solidFill>
                       <a:prstDash val="solid"/>
                       <a:round/>
-                      <a:headEnd len="sm" w="sm" type="none"/>
-                      <a:tailEnd len="sm" w="sm" type="none"/>
+                      <a:headEnd type="none" w="sm" len="sm"/>
+                      <a:tailEnd type="none" w="sm" len="sm"/>
                     </a:lnL>
-                    <a:lnR cap="flat" cmpd="sng" w="12700">
+                    <a:lnR w="12700" cap="flat" cmpd="sng">
                       <a:solidFill>
                         <a:srgbClr val="747474"/>
                       </a:solidFill>
                       <a:prstDash val="solid"/>
                       <a:round/>
-                      <a:headEnd len="sm" w="sm" type="none"/>
-                      <a:tailEnd len="sm" w="sm" type="none"/>
+                      <a:headEnd type="none" w="sm" len="sm"/>
+                      <a:tailEnd type="none" w="sm" len="sm"/>
                     </a:lnR>
-                    <a:lnT cap="flat" cmpd="sng" w="12700">
+                    <a:lnT w="12700" cap="flat" cmpd="sng">
                       <a:solidFill>
                         <a:srgbClr val="747474"/>
                       </a:solidFill>
                       <a:prstDash val="solid"/>
                       <a:round/>
-                      <a:headEnd len="sm" w="sm" type="none"/>
-                      <a:tailEnd len="sm" w="sm" type="none"/>
+                      <a:headEnd type="none" w="sm" len="sm"/>
+                      <a:tailEnd type="none" w="sm" len="sm"/>
                     </a:lnT>
-                    <a:lnB cap="flat" cmpd="sng" w="12700">
+                    <a:lnB w="12700" cap="flat" cmpd="sng">
                       <a:solidFill>
                         <a:srgbClr val="747474"/>
                       </a:solidFill>
                       <a:prstDash val="solid"/>
                       <a:round/>
-                      <a:headEnd len="sm" w="sm" type="none"/>
-                      <a:tailEnd len="sm" w="sm" type="none"/>
+                      <a:headEnd type="none" w="sm" len="sm"/>
+                      <a:tailEnd type="none" w="sm" len="sm"/>
                     </a:lnB>
                   </a:tcPr>
                 </a:tc>
@@ -15138,7 +15439,7 @@
                     <a:bodyPr/>
                     <a:lstStyle/>
                     <a:p>
-                      <a:pPr indent="0" lvl="0" marL="0" marR="0" rtl="0" algn="ctr">
+                      <a:pPr marL="0" marR="0" lvl="0" indent="0" algn="ctr" rtl="0">
                         <a:lnSpc>
                           <a:spcPct val="100000"/>
                         </a:lnSpc>
@@ -15164,7 +15465,7 @@
                         </a:rPr>
                         <a:t>여 윤 수 </a:t>
                       </a:r>
-                      <a:endParaRPr b="0" sz="1200" u="none" cap="none" strike="noStrike">
+                      <a:endParaRPr sz="1200" b="0" u="none" strike="noStrike" cap="none">
                         <a:solidFill>
                           <a:schemeClr val="dk1"/>
                         </a:solidFill>
@@ -15175,42 +15476,42 @@
                       </a:endParaRPr>
                     </a:p>
                   </a:txBody>
-                  <a:tcPr marT="45725" marB="45725" marR="91450" marL="91450" anchor="ctr">
-                    <a:lnL cap="flat" cmpd="sng" w="12700">
+                  <a:tcPr marL="91450" marR="91450" marT="45725" marB="45725" anchor="ctr">
+                    <a:lnL w="12700" cap="flat" cmpd="sng">
                       <a:solidFill>
                         <a:srgbClr val="747474"/>
                       </a:solidFill>
                       <a:prstDash val="solid"/>
                       <a:round/>
-                      <a:headEnd len="sm" w="sm" type="none"/>
-                      <a:tailEnd len="sm" w="sm" type="none"/>
+                      <a:headEnd type="none" w="sm" len="sm"/>
+                      <a:tailEnd type="none" w="sm" len="sm"/>
                     </a:lnL>
-                    <a:lnR cap="flat" cmpd="sng" w="12700">
+                    <a:lnR w="12700" cap="flat" cmpd="sng">
                       <a:solidFill>
                         <a:srgbClr val="747474"/>
                       </a:solidFill>
                       <a:prstDash val="solid"/>
                       <a:round/>
-                      <a:headEnd len="sm" w="sm" type="none"/>
-                      <a:tailEnd len="sm" w="sm" type="none"/>
+                      <a:headEnd type="none" w="sm" len="sm"/>
+                      <a:tailEnd type="none" w="sm" len="sm"/>
                     </a:lnR>
-                    <a:lnT cap="flat" cmpd="sng" w="12700">
+                    <a:lnT w="12700" cap="flat" cmpd="sng">
                       <a:solidFill>
                         <a:srgbClr val="747474"/>
                       </a:solidFill>
                       <a:prstDash val="solid"/>
                       <a:round/>
-                      <a:headEnd len="sm" w="sm" type="none"/>
-                      <a:tailEnd len="sm" w="sm" type="none"/>
+                      <a:headEnd type="none" w="sm" len="sm"/>
+                      <a:tailEnd type="none" w="sm" len="sm"/>
                     </a:lnT>
-                    <a:lnB cap="flat" cmpd="sng" w="12700">
+                    <a:lnB w="12700" cap="flat" cmpd="sng">
                       <a:solidFill>
                         <a:srgbClr val="747474"/>
                       </a:solidFill>
                       <a:prstDash val="solid"/>
                       <a:round/>
-                      <a:headEnd len="sm" w="sm" type="none"/>
-                      <a:tailEnd len="sm" w="sm" type="none"/>
+                      <a:headEnd type="none" w="sm" len="sm"/>
+                      <a:tailEnd type="none" w="sm" len="sm"/>
                     </a:lnB>
                   </a:tcPr>
                 </a:tc>
@@ -15219,7 +15520,7 @@
                     <a:bodyPr/>
                     <a:lstStyle/>
                     <a:p>
-                      <a:pPr indent="0" lvl="0" marL="0" marR="0" rtl="0" algn="ctr">
+                      <a:pPr marL="0" marR="0" lvl="0" indent="0" algn="ctr" rtl="0">
                         <a:lnSpc>
                           <a:spcPct val="100000"/>
                         </a:lnSpc>
@@ -15237,7 +15538,7 @@
                         <a:buNone/>
                       </a:pPr>
                       <a:r>
-                        <a:rPr b="0" lang="ko-KR" sz="1200" u="none" cap="none" strike="noStrike">
+                        <a:rPr lang="ko-KR" sz="1200" b="0" u="none" strike="noStrike" cap="none">
                           <a:solidFill>
                             <a:schemeClr val="dk1"/>
                           </a:solidFill>
@@ -15248,45 +15549,45 @@
                         </a:rPr>
                         <a:t>생년월일</a:t>
                       </a:r>
-                      <a:endParaRPr sz="1400" u="none" cap="none" strike="noStrike"/>
+                      <a:endParaRPr sz="1400" u="none" strike="noStrike" cap="none"/>
                     </a:p>
                   </a:txBody>
-                  <a:tcPr marT="45725" marB="45725" marR="91450" marL="91450" anchor="ctr">
-                    <a:lnL cap="flat" cmpd="sng" w="12700">
+                  <a:tcPr marL="91450" marR="91450" marT="45725" marB="45725" anchor="ctr">
+                    <a:lnL w="12700" cap="flat" cmpd="sng">
                       <a:solidFill>
                         <a:srgbClr val="747474"/>
                       </a:solidFill>
                       <a:prstDash val="solid"/>
                       <a:round/>
-                      <a:headEnd len="sm" w="sm" type="none"/>
-                      <a:tailEnd len="sm" w="sm" type="none"/>
+                      <a:headEnd type="none" w="sm" len="sm"/>
+                      <a:tailEnd type="none" w="sm" len="sm"/>
                     </a:lnL>
-                    <a:lnR cap="flat" cmpd="sng" w="12700">
+                    <a:lnR w="12700" cap="flat" cmpd="sng">
                       <a:solidFill>
                         <a:srgbClr val="747474"/>
                       </a:solidFill>
                       <a:prstDash val="solid"/>
                       <a:round/>
-                      <a:headEnd len="sm" w="sm" type="none"/>
-                      <a:tailEnd len="sm" w="sm" type="none"/>
+                      <a:headEnd type="none" w="sm" len="sm"/>
+                      <a:tailEnd type="none" w="sm" len="sm"/>
                     </a:lnR>
-                    <a:lnT cap="flat" cmpd="sng" w="12700">
+                    <a:lnT w="12700" cap="flat" cmpd="sng">
                       <a:solidFill>
                         <a:srgbClr val="747474"/>
                       </a:solidFill>
                       <a:prstDash val="solid"/>
                       <a:round/>
-                      <a:headEnd len="sm" w="sm" type="none"/>
-                      <a:tailEnd len="sm" w="sm" type="none"/>
+                      <a:headEnd type="none" w="sm" len="sm"/>
+                      <a:tailEnd type="none" w="sm" len="sm"/>
                     </a:lnT>
-                    <a:lnB cap="flat" cmpd="sng" w="12700">
+                    <a:lnB w="12700" cap="flat" cmpd="sng">
                       <a:solidFill>
                         <a:srgbClr val="747474"/>
                       </a:solidFill>
                       <a:prstDash val="solid"/>
                       <a:round/>
-                      <a:headEnd len="sm" w="sm" type="none"/>
-                      <a:tailEnd len="sm" w="sm" type="none"/>
+                      <a:headEnd type="none" w="sm" len="sm"/>
+                      <a:tailEnd type="none" w="sm" len="sm"/>
                     </a:lnB>
                   </a:tcPr>
                 </a:tc>
@@ -15295,7 +15596,7 @@
                     <a:bodyPr/>
                     <a:lstStyle/>
                     <a:p>
-                      <a:pPr indent="0" lvl="0" marL="0" marR="0" rtl="0" algn="ctr">
+                      <a:pPr marL="0" marR="0" lvl="0" indent="0" algn="ctr" rtl="0">
                         <a:lnSpc>
                           <a:spcPct val="100000"/>
                         </a:lnSpc>
@@ -15317,7 +15618,7 @@
                         <a:t> 1988</a:t>
                       </a:r>
                       <a:r>
-                        <a:rPr lang="ko-KR" sz="1200" u="none" cap="none" strike="noStrike"/>
+                        <a:rPr lang="ko-KR" sz="1200" u="none" strike="noStrike" cap="none"/>
                         <a:t>년 </a:t>
                       </a:r>
                       <a:r>
@@ -15325,7 +15626,7 @@
                         <a:t> 9</a:t>
                       </a:r>
                       <a:r>
-                        <a:rPr lang="ko-KR" sz="1200" u="none" cap="none" strike="noStrike"/>
+                        <a:rPr lang="ko-KR" sz="1200" u="none" strike="noStrike" cap="none"/>
                         <a:t>월</a:t>
                       </a:r>
                       <a:r>
@@ -15333,10 +15634,10 @@
                         <a:t> 15</a:t>
                       </a:r>
                       <a:r>
-                        <a:rPr lang="ko-KR" sz="1200" u="none" cap="none" strike="noStrike"/>
+                        <a:rPr lang="ko-KR" sz="1200" u="none" strike="noStrike" cap="none"/>
                         <a:t>일</a:t>
                       </a:r>
-                      <a:endParaRPr b="0" sz="1200" u="none" cap="none" strike="noStrike">
+                      <a:endParaRPr sz="1200" b="0" u="none" strike="noStrike" cap="none">
                         <a:solidFill>
                           <a:schemeClr val="dk1"/>
                         </a:solidFill>
@@ -15347,45 +15648,50 @@
                       </a:endParaRPr>
                     </a:p>
                   </a:txBody>
-                  <a:tcPr marT="45725" marB="45725" marR="91450" marL="91450" anchor="ctr">
-                    <a:lnL cap="flat" cmpd="sng" w="12700">
+                  <a:tcPr marL="91450" marR="91450" marT="45725" marB="45725" anchor="ctr">
+                    <a:lnL w="12700" cap="flat" cmpd="sng">
                       <a:solidFill>
                         <a:srgbClr val="747474"/>
                       </a:solidFill>
                       <a:prstDash val="solid"/>
                       <a:round/>
-                      <a:headEnd len="sm" w="sm" type="none"/>
-                      <a:tailEnd len="sm" w="sm" type="none"/>
+                      <a:headEnd type="none" w="sm" len="sm"/>
+                      <a:tailEnd type="none" w="sm" len="sm"/>
                     </a:lnL>
-                    <a:lnR cap="flat" cmpd="sng" w="12700">
+                    <a:lnR w="12700" cap="flat" cmpd="sng">
                       <a:solidFill>
                         <a:srgbClr val="747474"/>
                       </a:solidFill>
                       <a:prstDash val="solid"/>
                       <a:round/>
-                      <a:headEnd len="sm" w="sm" type="none"/>
-                      <a:tailEnd len="sm" w="sm" type="none"/>
+                      <a:headEnd type="none" w="sm" len="sm"/>
+                      <a:tailEnd type="none" w="sm" len="sm"/>
                     </a:lnR>
-                    <a:lnT cap="flat" cmpd="sng" w="12700">
+                    <a:lnT w="12700" cap="flat" cmpd="sng">
                       <a:solidFill>
                         <a:srgbClr val="747474"/>
                       </a:solidFill>
                       <a:prstDash val="solid"/>
                       <a:round/>
-                      <a:headEnd len="sm" w="sm" type="none"/>
-                      <a:tailEnd len="sm" w="sm" type="none"/>
+                      <a:headEnd type="none" w="sm" len="sm"/>
+                      <a:tailEnd type="none" w="sm" len="sm"/>
                     </a:lnT>
-                    <a:lnB cap="flat" cmpd="sng" w="12700">
+                    <a:lnB w="12700" cap="flat" cmpd="sng">
                       <a:solidFill>
                         <a:srgbClr val="747474"/>
                       </a:solidFill>
                       <a:prstDash val="solid"/>
                       <a:round/>
-                      <a:headEnd len="sm" w="sm" type="none"/>
-                      <a:tailEnd len="sm" w="sm" type="none"/>
+                      <a:headEnd type="none" w="sm" len="sm"/>
+                      <a:tailEnd type="none" w="sm" len="sm"/>
                     </a:lnB>
                   </a:tcPr>
                 </a:tc>
+                <a:extLst>
+                  <a:ext uri="{0D108BD9-81ED-4DB2-BD59-A6C34878D82A}">
+                    <a16:rowId xmlns:a16="http://schemas.microsoft.com/office/drawing/2014/main" val="10001"/>
+                  </a:ext>
+                </a:extLst>
               </a:tr>
               <a:tr h="2567050">
                 <a:tc>
@@ -15393,7 +15699,7 @@
                     <a:bodyPr/>
                     <a:lstStyle/>
                     <a:p>
-                      <a:pPr indent="0" lvl="0" marL="0" marR="0" rtl="0" algn="ctr">
+                      <a:pPr marL="0" marR="0" lvl="0" indent="0" algn="ctr" rtl="0">
                         <a:lnSpc>
                           <a:spcPct val="100000"/>
                         </a:lnSpc>
@@ -15410,13 +15716,10 @@
                         <a:buFont typeface="Arial"/>
                         <a:buNone/>
                       </a:pPr>
-                      <a:r>
-                        <a:t/>
-                      </a:r>
-                      <a:endParaRPr b="0" sz="1350" u="none" cap="none" strike="noStrike"/>
+                      <a:endParaRPr sz="1350" b="0" u="none" strike="noStrike" cap="none"/>
                     </a:p>
                     <a:p>
-                      <a:pPr indent="0" lvl="0" marL="0" marR="0" rtl="0" algn="ctr">
+                      <a:pPr marL="0" marR="0" lvl="0" indent="0" algn="ctr" rtl="0">
                         <a:lnSpc>
                           <a:spcPct val="100000"/>
                         </a:lnSpc>
@@ -15434,48 +15737,48 @@
                         <a:buNone/>
                       </a:pPr>
                       <a:r>
-                        <a:rPr b="0" lang="ko-KR" sz="1200" u="none" cap="none" strike="noStrike"/>
+                        <a:rPr lang="ko-KR" sz="1200" b="0" u="none" strike="noStrike" cap="none"/>
                         <a:t>교육내용</a:t>
                       </a:r>
-                      <a:endParaRPr sz="1400" u="none" cap="none" strike="noStrike"/>
+                      <a:endParaRPr sz="1400" u="none" strike="noStrike" cap="none"/>
                     </a:p>
                   </a:txBody>
-                  <a:tcPr marT="45725" marB="45725" marR="91450" marL="91450">
-                    <a:lnL cap="flat" cmpd="sng" w="12700">
+                  <a:tcPr marL="91450" marR="91450" marT="45725" marB="45725">
+                    <a:lnL w="12700" cap="flat" cmpd="sng">
                       <a:solidFill>
                         <a:srgbClr val="747474"/>
                       </a:solidFill>
                       <a:prstDash val="solid"/>
                       <a:round/>
-                      <a:headEnd len="sm" w="sm" type="none"/>
-                      <a:tailEnd len="sm" w="sm" type="none"/>
+                      <a:headEnd type="none" w="sm" len="sm"/>
+                      <a:tailEnd type="none" w="sm" len="sm"/>
                     </a:lnL>
-                    <a:lnR cap="flat" cmpd="sng" w="12700">
+                    <a:lnR w="12700" cap="flat" cmpd="sng">
                       <a:solidFill>
                         <a:srgbClr val="747474"/>
                       </a:solidFill>
                       <a:prstDash val="solid"/>
                       <a:round/>
-                      <a:headEnd len="sm" w="sm" type="none"/>
-                      <a:tailEnd len="sm" w="sm" type="none"/>
+                      <a:headEnd type="none" w="sm" len="sm"/>
+                      <a:tailEnd type="none" w="sm" len="sm"/>
                     </a:lnR>
-                    <a:lnT cap="flat" cmpd="sng" w="12700">
+                    <a:lnT w="12700" cap="flat" cmpd="sng">
                       <a:solidFill>
                         <a:srgbClr val="747474"/>
                       </a:solidFill>
                       <a:prstDash val="solid"/>
                       <a:round/>
-                      <a:headEnd len="sm" w="sm" type="none"/>
-                      <a:tailEnd len="sm" w="sm" type="none"/>
+                      <a:headEnd type="none" w="sm" len="sm"/>
+                      <a:tailEnd type="none" w="sm" len="sm"/>
                     </a:lnT>
-                    <a:lnB cap="flat" cmpd="sng" w="12700">
+                    <a:lnB w="12700" cap="flat" cmpd="sng">
                       <a:solidFill>
                         <a:srgbClr val="747474"/>
                       </a:solidFill>
                       <a:prstDash val="solid"/>
                       <a:round/>
-                      <a:headEnd len="sm" w="sm" type="none"/>
-                      <a:tailEnd len="sm" w="sm" type="none"/>
+                      <a:headEnd type="none" w="sm" len="sm"/>
+                      <a:tailEnd type="none" w="sm" len="sm"/>
                     </a:lnB>
                   </a:tcPr>
                 </a:tc>
@@ -15484,7 +15787,7 @@
                     <a:bodyPr/>
                     <a:lstStyle/>
                     <a:p>
-                      <a:pPr indent="0" lvl="0" marL="0" marR="0" rtl="0" algn="l">
+                      <a:pPr marL="0" marR="0" lvl="0" indent="0" algn="l" rtl="0">
                         <a:lnSpc>
                           <a:spcPct val="100000"/>
                         </a:lnSpc>
@@ -15501,13 +15804,10 @@
                         <a:buFont typeface="Arial"/>
                         <a:buNone/>
                       </a:pPr>
-                      <a:r>
-                        <a:t/>
-                      </a:r>
-                      <a:endParaRPr b="0" sz="1350" u="none" cap="none" strike="noStrike"/>
+                      <a:endParaRPr sz="1350" b="0" u="none" strike="noStrike" cap="none"/>
                     </a:p>
                     <a:p>
-                      <a:pPr indent="-228600" lvl="0" marL="228600" marR="0" rtl="0" algn="l">
+                      <a:pPr marL="228600" marR="0" lvl="0" indent="-228600" algn="l" rtl="0">
                         <a:lnSpc>
                           <a:spcPct val="100000"/>
                         </a:lnSpc>
@@ -15531,7 +15831,7 @@
                       <a:endParaRPr sz="1200"/>
                     </a:p>
                     <a:p>
-                      <a:pPr indent="-228600" lvl="0" marL="228600" marR="0" rtl="0" algn="l">
+                      <a:pPr marL="228600" marR="0" lvl="0" indent="-228600" algn="l" rtl="0">
                         <a:lnSpc>
                           <a:spcPct val="100000"/>
                         </a:lnSpc>
@@ -15555,7 +15855,7 @@
                       <a:endParaRPr sz="1200"/>
                     </a:p>
                     <a:p>
-                      <a:pPr indent="-228600" lvl="0" marL="228600" marR="0" rtl="0" algn="l">
+                      <a:pPr marL="228600" marR="0" lvl="0" indent="-228600" algn="l" rtl="0">
                         <a:lnSpc>
                           <a:spcPct val="100000"/>
                         </a:lnSpc>
@@ -15579,7 +15879,7 @@
                       <a:endParaRPr sz="1200"/>
                     </a:p>
                     <a:p>
-                      <a:pPr indent="-228600" lvl="0" marL="228600" marR="0" rtl="0" algn="l">
+                      <a:pPr marL="228600" marR="0" lvl="0" indent="-228600" algn="l" rtl="0">
                         <a:lnSpc>
                           <a:spcPct val="100000"/>
                         </a:lnSpc>
@@ -15603,7 +15903,7 @@
                       <a:endParaRPr sz="1200"/>
                     </a:p>
                     <a:p>
-                      <a:pPr indent="-228600" lvl="0" marL="228600" marR="0" rtl="0" algn="l">
+                      <a:pPr marL="228600" marR="0" lvl="0" indent="-228600" algn="l" rtl="0">
                         <a:lnSpc>
                           <a:spcPct val="100000"/>
                         </a:lnSpc>
@@ -15627,7 +15927,7 @@
                       <a:endParaRPr sz="1200"/>
                     </a:p>
                     <a:p>
-                      <a:pPr indent="-228600" lvl="0" marL="228600" marR="0" rtl="0" algn="l">
+                      <a:pPr marL="228600" marR="0" lvl="0" indent="-228600" algn="l" rtl="0">
                         <a:lnSpc>
                           <a:spcPct val="100000"/>
                         </a:lnSpc>
@@ -15647,47 +15947,70 @@
                       <a:endParaRPr sz="1200"/>
                     </a:p>
                   </a:txBody>
-                  <a:tcPr marT="45725" marB="45725" marR="91450" marL="91450">
-                    <a:lnL cap="flat" cmpd="sng" w="12700">
+                  <a:tcPr marL="91450" marR="91450" marT="45725" marB="45725">
+                    <a:lnL w="12700" cap="flat" cmpd="sng">
                       <a:solidFill>
                         <a:srgbClr val="747474"/>
                       </a:solidFill>
                       <a:prstDash val="solid"/>
                       <a:round/>
-                      <a:headEnd len="sm" w="sm" type="none"/>
-                      <a:tailEnd len="sm" w="sm" type="none"/>
+                      <a:headEnd type="none" w="sm" len="sm"/>
+                      <a:tailEnd type="none" w="sm" len="sm"/>
                     </a:lnL>
-                    <a:lnR cap="flat" cmpd="sng" w="12700">
+                    <a:lnR w="12700" cap="flat" cmpd="sng">
                       <a:solidFill>
                         <a:srgbClr val="747474"/>
                       </a:solidFill>
                       <a:prstDash val="solid"/>
                       <a:round/>
-                      <a:headEnd len="sm" w="sm" type="none"/>
-                      <a:tailEnd len="sm" w="sm" type="none"/>
+                      <a:headEnd type="none" w="sm" len="sm"/>
+                      <a:tailEnd type="none" w="sm" len="sm"/>
                     </a:lnR>
-                    <a:lnT cap="flat" cmpd="sng" w="12700">
+                    <a:lnT w="12700" cap="flat" cmpd="sng">
                       <a:solidFill>
                         <a:srgbClr val="747474"/>
                       </a:solidFill>
                       <a:prstDash val="solid"/>
                       <a:round/>
-                      <a:headEnd len="sm" w="sm" type="none"/>
-                      <a:tailEnd len="sm" w="sm" type="none"/>
+                      <a:headEnd type="none" w="sm" len="sm"/>
+                      <a:tailEnd type="none" w="sm" len="sm"/>
                     </a:lnT>
-                    <a:lnB cap="flat" cmpd="sng" w="12700">
+                    <a:lnB w="12700" cap="flat" cmpd="sng">
                       <a:solidFill>
                         <a:srgbClr val="747474"/>
                       </a:solidFill>
                       <a:prstDash val="solid"/>
                       <a:round/>
-                      <a:headEnd len="sm" w="sm" type="none"/>
-                      <a:tailEnd len="sm" w="sm" type="none"/>
+                      <a:headEnd type="none" w="sm" len="sm"/>
+                      <a:tailEnd type="none" w="sm" len="sm"/>
                     </a:lnB>
                   </a:tcPr>
                 </a:tc>
-                <a:tc hMerge="1"/>
-                <a:tc hMerge="1"/>
+                <a:tc hMerge="1">
+                  <a:txBody>
+                    <a:bodyPr/>
+                    <a:lstStyle/>
+                    <a:p>
+                      <a:endParaRPr lang="ko-KR"/>
+                    </a:p>
+                  </a:txBody>
+                  <a:tcPr/>
+                </a:tc>
+                <a:tc hMerge="1">
+                  <a:txBody>
+                    <a:bodyPr/>
+                    <a:lstStyle/>
+                    <a:p>
+                      <a:endParaRPr lang="ko-KR"/>
+                    </a:p>
+                  </a:txBody>
+                  <a:tcPr/>
+                </a:tc>
+                <a:extLst>
+                  <a:ext uri="{0D108BD9-81ED-4DB2-BD59-A6C34878D82A}">
+                    <a16:rowId xmlns:a16="http://schemas.microsoft.com/office/drawing/2014/main" val="10002"/>
+                  </a:ext>
+                </a:extLst>
               </a:tr>
             </a:tbl>
           </a:graphicData>
@@ -15702,7 +16025,7 @@
 </file>
 
 <file path=ppt/theme/theme1.xml><?xml version="1.0" encoding="utf-8"?>
-<a:theme xmlns:a="http://schemas.openxmlformats.org/drawingml/2006/main" xmlns:r="http://schemas.openxmlformats.org/officeDocument/2006/relationships" name="Office 테마">
+<a:theme xmlns:a="http://schemas.openxmlformats.org/drawingml/2006/main" name="Office 테마">
   <a:themeElements>
     <a:clrScheme name="Office 테마">
       <a:dk1>
@@ -15977,11 +16300,13 @@
       </a:bgFillStyleLst>
     </a:fmtScheme>
   </a:themeElements>
+  <a:objectDefaults/>
+  <a:extraClrSchemeLst/>
 </a:theme>
 </file>
 
 <file path=ppt/theme/theme2.xml><?xml version="1.0" encoding="utf-8"?>
-<a:theme xmlns:a="http://schemas.openxmlformats.org/drawingml/2006/main" xmlns:r="http://schemas.openxmlformats.org/officeDocument/2006/relationships">
+<a:theme xmlns:a="http://schemas.openxmlformats.org/drawingml/2006/main">
   <a:themeElements>
     <a:clrScheme name="Default">
       <a:dk1>
@@ -16256,5 +16581,7 @@
       </a:bgFillStyleLst>
     </a:fmtScheme>
   </a:themeElements>
+  <a:objectDefaults/>
+  <a:extraClrSchemeLst/>
 </a:theme>
 </file>
--- a/backend/static/templates/certificates/6. 성매매예방 수료증.pptx
+++ b/backend/static/templates/certificates/6. 성매매예방 수료증.pptx
@@ -1,31 +1,26 @@
 
 <file path=ppt/presentation.xml><?xml version="1.0" encoding="utf-8"?>
-<p:presentation xmlns:a="http://schemas.openxmlformats.org/drawingml/2006/main" xmlns:r="http://schemas.openxmlformats.org/officeDocument/2006/relationships" xmlns:p="http://schemas.openxmlformats.org/presentationml/2006/main" strictFirstAndLastChars="0" embedTrueTypeFonts="1" saveSubsetFonts="1" autoCompressPictures="0">
+<p:presentation xmlns:a="http://schemas.openxmlformats.org/drawingml/2006/main" xmlns:r="http://schemas.openxmlformats.org/officeDocument/2006/relationships" xmlns:mc="http://schemas.openxmlformats.org/markup-compatibility/2006" xmlns:mv="urn:schemas-microsoft-com:mac:vml" xmlns:p="http://schemas.openxmlformats.org/presentationml/2006/main" xmlns:c="http://schemas.openxmlformats.org/drawingml/2006/chart" xmlns:dgm="http://schemas.openxmlformats.org/drawingml/2006/diagram" xmlns:o="urn:schemas-microsoft-com:office:office" xmlns:v="urn:schemas-microsoft-com:vml" xmlns:pvml="urn:schemas-microsoft-com:office:powerpoint" xmlns:com="http://schemas.openxmlformats.org/drawingml/2006/compatibility" xmlns:p14="http://schemas.microsoft.com/office/powerpoint/2010/main" xmlns:p15="http://schemas.microsoft.com/office/powerpoint/2012/main" xmlns:ahyp="http://schemas.microsoft.com/office/drawing/2018/hyperlinkcolor" autoCompressPictures="0" embedTrueTypeFonts="1" strictFirstAndLastChars="0" saveSubsetFonts="1">
   <p:sldMasterIdLst>
-    <p:sldMasterId id="2147483648" r:id="rId1"/>
+    <p:sldMasterId id="2147483648" r:id="rId4"/>
   </p:sldMasterIdLst>
   <p:notesMasterIdLst>
-    <p:notesMasterId r:id="rId3"/>
+    <p:notesMasterId r:id="rId5"/>
   </p:notesMasterIdLst>
   <p:sldIdLst>
-    <p:sldId id="256" r:id="rId2"/>
+    <p:sldId id="256" r:id="rId6"/>
   </p:sldIdLst>
-  <p:sldSz cx="6858000" cy="9906000" type="A4"/>
+  <p:sldSz cy="9906000" cx="6858000"/>
   <p:notesSz cx="6858000" cy="9144000"/>
   <p:embeddedFontLst>
     <p:embeddedFont>
-      <p:font typeface="Pretendard" panose="02000503000000020004" pitchFamily="2" charset="-127"/>
-      <p:regular r:id="rId4"/>
-      <p:bold r:id="rId5"/>
-    </p:embeddedFont>
-    <p:embeddedFont>
       <p:font typeface="Play"/>
-      <p:regular r:id="rId6"/>
-      <p:bold r:id="rId7"/>
+      <p:regular r:id="rId7"/>
+      <p:bold r:id="rId8"/>
     </p:embeddedFont>
   </p:embeddedFontLst>
   <p:defaultTextStyle>
-    <a:defPPr marR="0" lvl="0" algn="l" rtl="0">
+    <a:defPPr lvl="0" marR="0" rtl="0" algn="l">
       <a:lnSpc>
         <a:spcPct val="100000"/>
       </a:lnSpc>
@@ -36,7 +31,7 @@
         <a:spcPts val="0"/>
       </a:spcAft>
     </a:defPPr>
-    <a:lvl1pPr marR="0" lvl="0" algn="l" rtl="0">
+    <a:lvl1pPr lvl="0" marR="0" rtl="0" algn="l">
       <a:lnSpc>
         <a:spcPct val="100000"/>
       </a:lnSpc>
@@ -50,7 +45,7 @@
         <a:srgbClr val="000000"/>
       </a:buClr>
       <a:buFont typeface="Arial"/>
-      <a:defRPr sz="1400" b="0" i="0" u="none" strike="noStrike" cap="none">
+      <a:defRPr b="0" i="0" spc="0" sz="1400" u="none" cap="none" strike="noStrike">
         <a:solidFill>
           <a:srgbClr val="000000"/>
         </a:solidFill>
@@ -60,7 +55,7 @@
         <a:sym typeface="Arial"/>
       </a:defRPr>
     </a:lvl1pPr>
-    <a:lvl2pPr marR="0" lvl="1" algn="l" rtl="0">
+    <a:lvl2pPr lvl="1" marR="0" rtl="0" algn="l">
       <a:lnSpc>
         <a:spcPct val="100000"/>
       </a:lnSpc>
@@ -74,7 +69,7 @@
         <a:srgbClr val="000000"/>
       </a:buClr>
       <a:buFont typeface="Arial"/>
-      <a:defRPr sz="1400" b="0" i="0" u="none" strike="noStrike" cap="none">
+      <a:defRPr b="0" i="0" spc="0" sz="1400" u="none" cap="none" strike="noStrike">
         <a:solidFill>
           <a:srgbClr val="000000"/>
         </a:solidFill>
@@ -84,7 +79,7 @@
         <a:sym typeface="Arial"/>
       </a:defRPr>
     </a:lvl2pPr>
-    <a:lvl3pPr marR="0" lvl="2" algn="l" rtl="0">
+    <a:lvl3pPr lvl="2" marR="0" rtl="0" algn="l">
       <a:lnSpc>
         <a:spcPct val="100000"/>
       </a:lnSpc>
@@ -98,7 +93,7 @@
         <a:srgbClr val="000000"/>
       </a:buClr>
       <a:buFont typeface="Arial"/>
-      <a:defRPr sz="1400" b="0" i="0" u="none" strike="noStrike" cap="none">
+      <a:defRPr b="0" i="0" spc="0" sz="1400" u="none" cap="none" strike="noStrike">
         <a:solidFill>
           <a:srgbClr val="000000"/>
         </a:solidFill>
@@ -108,7 +103,7 @@
         <a:sym typeface="Arial"/>
       </a:defRPr>
     </a:lvl3pPr>
-    <a:lvl4pPr marR="0" lvl="3" algn="l" rtl="0">
+    <a:lvl4pPr lvl="3" marR="0" rtl="0" algn="l">
       <a:lnSpc>
         <a:spcPct val="100000"/>
       </a:lnSpc>
@@ -122,7 +117,7 @@
         <a:srgbClr val="000000"/>
       </a:buClr>
       <a:buFont typeface="Arial"/>
-      <a:defRPr sz="1400" b="0" i="0" u="none" strike="noStrike" cap="none">
+      <a:defRPr b="0" i="0" spc="0" sz="1400" u="none" cap="none" strike="noStrike">
         <a:solidFill>
           <a:srgbClr val="000000"/>
         </a:solidFill>
@@ -132,7 +127,7 @@
         <a:sym typeface="Arial"/>
       </a:defRPr>
     </a:lvl4pPr>
-    <a:lvl5pPr marR="0" lvl="4" algn="l" rtl="0">
+    <a:lvl5pPr lvl="4" marR="0" rtl="0" algn="l">
       <a:lnSpc>
         <a:spcPct val="100000"/>
       </a:lnSpc>
@@ -146,7 +141,7 @@
         <a:srgbClr val="000000"/>
       </a:buClr>
       <a:buFont typeface="Arial"/>
-      <a:defRPr sz="1400" b="0" i="0" u="none" strike="noStrike" cap="none">
+      <a:defRPr b="0" i="0" spc="0" sz="1400" u="none" cap="none" strike="noStrike">
         <a:solidFill>
           <a:srgbClr val="000000"/>
         </a:solidFill>
@@ -156,7 +151,7 @@
         <a:sym typeface="Arial"/>
       </a:defRPr>
     </a:lvl5pPr>
-    <a:lvl6pPr marR="0" lvl="5" algn="l" rtl="0">
+    <a:lvl6pPr lvl="5" marR="0" rtl="0" algn="l">
       <a:lnSpc>
         <a:spcPct val="100000"/>
       </a:lnSpc>
@@ -170,7 +165,7 @@
         <a:srgbClr val="000000"/>
       </a:buClr>
       <a:buFont typeface="Arial"/>
-      <a:defRPr sz="1400" b="0" i="0" u="none" strike="noStrike" cap="none">
+      <a:defRPr b="0" i="0" spc="0" sz="1400" u="none" cap="none" strike="noStrike">
         <a:solidFill>
           <a:srgbClr val="000000"/>
         </a:solidFill>
@@ -180,7 +175,7 @@
         <a:sym typeface="Arial"/>
       </a:defRPr>
     </a:lvl6pPr>
-    <a:lvl7pPr marR="0" lvl="6" algn="l" rtl="0">
+    <a:lvl7pPr lvl="6" marR="0" rtl="0" algn="l">
       <a:lnSpc>
         <a:spcPct val="100000"/>
       </a:lnSpc>
@@ -194,7 +189,7 @@
         <a:srgbClr val="000000"/>
       </a:buClr>
       <a:buFont typeface="Arial"/>
-      <a:defRPr sz="1400" b="0" i="0" u="none" strike="noStrike" cap="none">
+      <a:defRPr b="0" i="0" spc="0" sz="1400" u="none" cap="none" strike="noStrike">
         <a:solidFill>
           <a:srgbClr val="000000"/>
         </a:solidFill>
@@ -204,7 +199,7 @@
         <a:sym typeface="Arial"/>
       </a:defRPr>
     </a:lvl7pPr>
-    <a:lvl8pPr marR="0" lvl="7" algn="l" rtl="0">
+    <a:lvl8pPr lvl="7" marR="0" rtl="0" algn="l">
       <a:lnSpc>
         <a:spcPct val="100000"/>
       </a:lnSpc>
@@ -218,7 +213,7 @@
         <a:srgbClr val="000000"/>
       </a:buClr>
       <a:buFont typeface="Arial"/>
-      <a:defRPr sz="1400" b="0" i="0" u="none" strike="noStrike" cap="none">
+      <a:defRPr b="0" i="0" spc="0" sz="1400" u="none" cap="none" strike="noStrike">
         <a:solidFill>
           <a:srgbClr val="000000"/>
         </a:solidFill>
@@ -228,7 +223,7 @@
         <a:sym typeface="Arial"/>
       </a:defRPr>
     </a:lvl8pPr>
-    <a:lvl9pPr marR="0" lvl="8" algn="l" rtl="0">
+    <a:lvl9pPr lvl="8" marR="0" rtl="0" algn="l">
       <a:lnSpc>
         <a:spcPct val="100000"/>
       </a:lnSpc>
@@ -242,7 +237,7 @@
         <a:srgbClr val="000000"/>
       </a:buClr>
       <a:buFont typeface="Arial"/>
-      <a:defRPr sz="1400" b="0" i="0" u="none" strike="noStrike" cap="none">
+      <a:defRPr b="0" i="0" spc="0" sz="1400" u="none" cap="none" strike="noStrike">
         <a:solidFill>
           <a:srgbClr val="000000"/>
         </a:solidFill>
@@ -255,26 +250,25 @@
   </p:defaultTextStyle>
   <p:extLst>
     <p:ext uri="GoogleSlidesCustomDataVersion2">
-      <go:slidesCustomData xmlns:go="http://customooxmlschemas.google.com/" xmlns:ahyp="http://schemas.microsoft.com/office/drawing/2018/hyperlinkcolor" xmlns:p15="http://schemas.microsoft.com/office/powerpoint/2012/main" xmlns:p14="http://schemas.microsoft.com/office/powerpoint/2010/main" xmlns:com="http://schemas.openxmlformats.org/drawingml/2006/compatibility" xmlns:pvml="urn:schemas-microsoft-com:office:powerpoint" xmlns:v="urn:schemas-microsoft-com:vml" xmlns:o="urn:schemas-microsoft-com:office:office" xmlns:dgm="http://schemas.openxmlformats.org/drawingml/2006/diagram" xmlns:c="http://schemas.openxmlformats.org/drawingml/2006/chart" xmlns:mv="urn:schemas-microsoft-com:mac:vml" xmlns:mc="http://schemas.openxmlformats.org/markup-compatibility/2006" xmlns="" r:id="rId9" roundtripDataSignature="AMtx7mjHcK0S6GQmcZle7c4f5W8JB9gUAA=="/>
+      <go:slidesCustomData xmlns:go="http://customooxmlschemas.google.com/" r:id="rId9" roundtripDataSignature="AMtx7mjHcK0S6GQmcZle7c4f5W8JB9gUAA=="/>
     </p:ext>
   </p:extLst>
 </p:presentation>
 </file>
 
 <file path=ppt/notesMasters/notesMaster1.xml><?xml version="1.0" encoding="utf-8"?>
-<p:notesMaster xmlns:a="http://schemas.openxmlformats.org/drawingml/2006/main" xmlns:r="http://schemas.openxmlformats.org/officeDocument/2006/relationships" xmlns:p="http://schemas.openxmlformats.org/presentationml/2006/main">
+<p:notesMaster xmlns:a="http://schemas.openxmlformats.org/drawingml/2006/main" xmlns:r="http://schemas.openxmlformats.org/officeDocument/2006/relationships" xmlns:mc="http://schemas.openxmlformats.org/markup-compatibility/2006" xmlns:mv="urn:schemas-microsoft-com:mac:vml" xmlns:p="http://schemas.openxmlformats.org/presentationml/2006/main" xmlns:c="http://schemas.openxmlformats.org/drawingml/2006/chart" xmlns:dgm="http://schemas.openxmlformats.org/drawingml/2006/diagram" xmlns:o="urn:schemas-microsoft-com:office:office" xmlns:v="urn:schemas-microsoft-com:vml" xmlns:pvml="urn:schemas-microsoft-com:office:powerpoint" xmlns:com="http://schemas.openxmlformats.org/drawingml/2006/compatibility" xmlns:p14="http://schemas.microsoft.com/office/powerpoint/2010/main" xmlns:p15="http://schemas.microsoft.com/office/powerpoint/2012/main" xmlns:ahyp="http://schemas.microsoft.com/office/drawing/2018/hyperlinkcolor">
   <p:cSld>
     <p:bg>
       <p:bgPr>
         <a:solidFill>
           <a:schemeClr val="lt1"/>
         </a:solidFill>
-        <a:effectLst/>
       </p:bgPr>
     </p:bg>
     <p:spTree>
       <p:nvGrpSpPr>
-        <p:cNvPr id="1" name="Shape 2"/>
+        <p:cNvPr id="2" name="Shape 2"/>
         <p:cNvGrpSpPr/>
         <p:nvPr/>
       </p:nvGrpSpPr>
@@ -289,11 +283,9 @@
       <p:sp>
         <p:nvSpPr>
           <p:cNvPr id="3" name="Google Shape;3;n"/>
-          <p:cNvSpPr>
-            <a:spLocks noGrp="1" noRot="1" noChangeAspect="1"/>
-          </p:cNvSpPr>
+          <p:cNvSpPr/>
           <p:nvPr>
-            <p:ph type="sldImg" idx="2"/>
+            <p:ph idx="2" type="sldImg"/>
           </p:nvPr>
         </p:nvSpPr>
         <p:spPr>
@@ -302,13 +294,9 @@
             <a:ext cx="4572225" cy="3429000"/>
           </a:xfrm>
           <a:custGeom>
-            <a:avLst/>
-            <a:gdLst/>
-            <a:ahLst/>
-            <a:cxnLst/>
-            <a:rect l="l" t="t" r="r" b="b"/>
+            <a:rect b="b" l="l" r="r" t="t"/>
             <a:pathLst>
-              <a:path w="120000" h="120000" extrusionOk="0">
+              <a:path extrusionOk="0" h="120000" w="120000">
                 <a:moveTo>
                   <a:pt x="0" y="0"/>
                 </a:moveTo>
@@ -326,25 +314,23 @@
             </a:pathLst>
           </a:custGeom>
           <a:noFill/>
-          <a:ln w="9525" cap="flat" cmpd="sng">
+          <a:ln cap="flat" cmpd="sng" w="9525">
             <a:solidFill>
               <a:srgbClr val="000000"/>
             </a:solidFill>
             <a:prstDash val="solid"/>
             <a:round/>
-            <a:headEnd type="none" w="sm" len="sm"/>
-            <a:tailEnd type="none" w="sm" len="sm"/>
+            <a:headEnd len="sm" w="sm" type="none"/>
+            <a:tailEnd len="sm" w="sm" type="none"/>
           </a:ln>
         </p:spPr>
       </p:sp>
       <p:sp>
         <p:nvSpPr>
           <p:cNvPr id="4" name="Google Shape;4;n"/>
-          <p:cNvSpPr txBox="1">
-            <a:spLocks noGrp="1"/>
-          </p:cNvSpPr>
+          <p:cNvSpPr txBox="1"/>
           <p:nvPr>
-            <p:ph type="body" idx="1"/>
+            <p:ph idx="1" type="body"/>
           </p:nvPr>
         </p:nvSpPr>
         <p:spPr>
@@ -361,11 +347,11 @@
           </a:ln>
         </p:spPr>
         <p:txBody>
-          <a:bodyPr spcFirstLastPara="1" wrap="square" lIns="91425" tIns="91425" rIns="91425" bIns="91425" anchor="t" anchorCtr="0">
+          <a:bodyPr anchorCtr="0" anchor="t" bIns="91425" lIns="91425" spcFirstLastPara="1" rIns="91425" wrap="square" tIns="91425">
             <a:noAutofit/>
           </a:bodyPr>
           <a:lstStyle>
-            <a:lvl1pPr marL="457200" marR="0" lvl="0" indent="-298450" algn="l" rtl="0">
+            <a:lvl1pPr indent="-298450" lvl="0" marL="457200" marR="0" rtl="0" algn="l">
               <a:lnSpc>
                 <a:spcPct val="100000"/>
               </a:lnSpc>
@@ -381,7 +367,7 @@
               <a:buSzPts val="1100"/>
               <a:buFont typeface="Arial"/>
               <a:buChar char="●"/>
-              <a:defRPr sz="1100" b="0" i="0" u="none" strike="noStrike" cap="none">
+              <a:defRPr b="0" i="0" sz="1100" u="none" cap="none" strike="noStrike">
                 <a:solidFill>
                   <a:srgbClr val="000000"/>
                 </a:solidFill>
@@ -391,7 +377,7 @@
                 <a:sym typeface="Arial"/>
               </a:defRPr>
             </a:lvl1pPr>
-            <a:lvl2pPr marL="914400" marR="0" lvl="1" indent="-298450" algn="l" rtl="0">
+            <a:lvl2pPr indent="-298450" lvl="1" marL="914400" marR="0" rtl="0" algn="l">
               <a:lnSpc>
                 <a:spcPct val="100000"/>
               </a:lnSpc>
@@ -407,7 +393,7 @@
               <a:buSzPts val="1100"/>
               <a:buFont typeface="Arial"/>
               <a:buChar char="○"/>
-              <a:defRPr sz="1100" b="0" i="0" u="none" strike="noStrike" cap="none">
+              <a:defRPr b="0" i="0" sz="1100" u="none" cap="none" strike="noStrike">
                 <a:solidFill>
                   <a:srgbClr val="000000"/>
                 </a:solidFill>
@@ -417,7 +403,7 @@
                 <a:sym typeface="Arial"/>
               </a:defRPr>
             </a:lvl2pPr>
-            <a:lvl3pPr marL="1371600" marR="0" lvl="2" indent="-298450" algn="l" rtl="0">
+            <a:lvl3pPr indent="-298450" lvl="2" marL="1371600" marR="0" rtl="0" algn="l">
               <a:lnSpc>
                 <a:spcPct val="100000"/>
               </a:lnSpc>
@@ -433,7 +419,7 @@
               <a:buSzPts val="1100"/>
               <a:buFont typeface="Arial"/>
               <a:buChar char="■"/>
-              <a:defRPr sz="1100" b="0" i="0" u="none" strike="noStrike" cap="none">
+              <a:defRPr b="0" i="0" sz="1100" u="none" cap="none" strike="noStrike">
                 <a:solidFill>
                   <a:srgbClr val="000000"/>
                 </a:solidFill>
@@ -443,7 +429,7 @@
                 <a:sym typeface="Arial"/>
               </a:defRPr>
             </a:lvl3pPr>
-            <a:lvl4pPr marL="1828800" marR="0" lvl="3" indent="-298450" algn="l" rtl="0">
+            <a:lvl4pPr indent="-298450" lvl="3" marL="1828800" marR="0" rtl="0" algn="l">
               <a:lnSpc>
                 <a:spcPct val="100000"/>
               </a:lnSpc>
@@ -459,7 +445,7 @@
               <a:buSzPts val="1100"/>
               <a:buFont typeface="Arial"/>
               <a:buChar char="●"/>
-              <a:defRPr sz="1100" b="0" i="0" u="none" strike="noStrike" cap="none">
+              <a:defRPr b="0" i="0" sz="1100" u="none" cap="none" strike="noStrike">
                 <a:solidFill>
                   <a:srgbClr val="000000"/>
                 </a:solidFill>
@@ -469,7 +455,7 @@
                 <a:sym typeface="Arial"/>
               </a:defRPr>
             </a:lvl4pPr>
-            <a:lvl5pPr marL="2286000" marR="0" lvl="4" indent="-298450" algn="l" rtl="0">
+            <a:lvl5pPr indent="-298450" lvl="4" marL="2286000" marR="0" rtl="0" algn="l">
               <a:lnSpc>
                 <a:spcPct val="100000"/>
               </a:lnSpc>
@@ -485,7 +471,7 @@
               <a:buSzPts val="1100"/>
               <a:buFont typeface="Arial"/>
               <a:buChar char="○"/>
-              <a:defRPr sz="1100" b="0" i="0" u="none" strike="noStrike" cap="none">
+              <a:defRPr b="0" i="0" sz="1100" u="none" cap="none" strike="noStrike">
                 <a:solidFill>
                   <a:srgbClr val="000000"/>
                 </a:solidFill>
@@ -495,7 +481,7 @@
                 <a:sym typeface="Arial"/>
               </a:defRPr>
             </a:lvl5pPr>
-            <a:lvl6pPr marL="2743200" marR="0" lvl="5" indent="-298450" algn="l" rtl="0">
+            <a:lvl6pPr indent="-298450" lvl="5" marL="2743200" marR="0" rtl="0" algn="l">
               <a:lnSpc>
                 <a:spcPct val="100000"/>
               </a:lnSpc>
@@ -511,7 +497,7 @@
               <a:buSzPts val="1100"/>
               <a:buFont typeface="Arial"/>
               <a:buChar char="■"/>
-              <a:defRPr sz="1100" b="0" i="0" u="none" strike="noStrike" cap="none">
+              <a:defRPr b="0" i="0" sz="1100" u="none" cap="none" strike="noStrike">
                 <a:solidFill>
                   <a:srgbClr val="000000"/>
                 </a:solidFill>
@@ -521,7 +507,7 @@
                 <a:sym typeface="Arial"/>
               </a:defRPr>
             </a:lvl6pPr>
-            <a:lvl7pPr marL="3200400" marR="0" lvl="6" indent="-298450" algn="l" rtl="0">
+            <a:lvl7pPr indent="-298450" lvl="6" marL="3200400" marR="0" rtl="0" algn="l">
               <a:lnSpc>
                 <a:spcPct val="100000"/>
               </a:lnSpc>
@@ -537,7 +523,7 @@
               <a:buSzPts val="1100"/>
               <a:buFont typeface="Arial"/>
               <a:buChar char="●"/>
-              <a:defRPr sz="1100" b="0" i="0" u="none" strike="noStrike" cap="none">
+              <a:defRPr b="0" i="0" sz="1100" u="none" cap="none" strike="noStrike">
                 <a:solidFill>
                   <a:srgbClr val="000000"/>
                 </a:solidFill>
@@ -547,7 +533,7 @@
                 <a:sym typeface="Arial"/>
               </a:defRPr>
             </a:lvl7pPr>
-            <a:lvl8pPr marL="3657600" marR="0" lvl="7" indent="-298450" algn="l" rtl="0">
+            <a:lvl8pPr indent="-298450" lvl="7" marL="3657600" marR="0" rtl="0" algn="l">
               <a:lnSpc>
                 <a:spcPct val="100000"/>
               </a:lnSpc>
@@ -563,7 +549,7 @@
               <a:buSzPts val="1100"/>
               <a:buFont typeface="Arial"/>
               <a:buChar char="○"/>
-              <a:defRPr sz="1100" b="0" i="0" u="none" strike="noStrike" cap="none">
+              <a:defRPr b="0" i="0" sz="1100" u="none" cap="none" strike="noStrike">
                 <a:solidFill>
                   <a:srgbClr val="000000"/>
                 </a:solidFill>
@@ -573,7 +559,7 @@
                 <a:sym typeface="Arial"/>
               </a:defRPr>
             </a:lvl8pPr>
-            <a:lvl9pPr marL="4114800" marR="0" lvl="8" indent="-298450" algn="l" rtl="0">
+            <a:lvl9pPr indent="-298450" lvl="8" marL="4114800" marR="0" rtl="0" algn="l">
               <a:lnSpc>
                 <a:spcPct val="100000"/>
               </a:lnSpc>
@@ -589,7 +575,7 @@
               <a:buSzPts val="1100"/>
               <a:buFont typeface="Arial"/>
               <a:buChar char="■"/>
-              <a:defRPr sz="1100" b="0" i="0" u="none" strike="noStrike" cap="none">
+              <a:defRPr b="0" i="0" sz="1100" u="none" cap="none" strike="noStrike">
                 <a:solidFill>
                   <a:srgbClr val="000000"/>
                 </a:solidFill>
@@ -600,16 +586,14 @@
               </a:defRPr>
             </a:lvl9pPr>
           </a:lstStyle>
-          <a:p>
-            <a:endParaRPr/>
-          </a:p>
+          <a:p/>
         </p:txBody>
       </p:sp>
     </p:spTree>
   </p:cSld>
-  <p:clrMap bg1="lt1" tx1="dk1" bg2="dk2" tx2="lt2" accent1="accent1" accent2="accent2" accent3="accent3" accent4="accent4" accent5="accent5" accent6="accent6" hlink="hlink" folHlink="folHlink"/>
+  <p:clrMap accent1="accent1" accent2="accent2" accent3="accent3" accent4="accent4" accent5="accent5" accent6="accent6" bg1="lt1" bg2="dk2" tx1="dk1" tx2="lt2" folHlink="folHlink" hlink="hlink"/>
   <p:notesStyle>
-    <a:defPPr marR="0" lvl="0" algn="l" rtl="0">
+    <a:defPPr lvl="0" marR="0" rtl="0" algn="l">
       <a:lnSpc>
         <a:spcPct val="100000"/>
       </a:lnSpc>
@@ -620,7 +604,7 @@
         <a:spcPts val="0"/>
       </a:spcAft>
     </a:defPPr>
-    <a:lvl1pPr marR="0" lvl="0" algn="l" rtl="0">
+    <a:lvl1pPr lvl="0" marR="0" rtl="0" algn="l">
       <a:lnSpc>
         <a:spcPct val="100000"/>
       </a:lnSpc>
@@ -634,7 +618,7 @@
         <a:srgbClr val="000000"/>
       </a:buClr>
       <a:buFont typeface="Arial"/>
-      <a:defRPr sz="1400" b="0" i="0" u="none" strike="noStrike" cap="none">
+      <a:defRPr b="0" i="0" spc="0" sz="1400" u="none" cap="none" strike="noStrike">
         <a:solidFill>
           <a:srgbClr val="000000"/>
         </a:solidFill>
@@ -644,7 +628,7 @@
         <a:sym typeface="Arial"/>
       </a:defRPr>
     </a:lvl1pPr>
-    <a:lvl2pPr marR="0" lvl="1" algn="l" rtl="0">
+    <a:lvl2pPr lvl="1" marR="0" rtl="0" algn="l">
       <a:lnSpc>
         <a:spcPct val="100000"/>
       </a:lnSpc>
@@ -658,7 +642,7 @@
         <a:srgbClr val="000000"/>
       </a:buClr>
       <a:buFont typeface="Arial"/>
-      <a:defRPr sz="1400" b="0" i="0" u="none" strike="noStrike" cap="none">
+      <a:defRPr b="0" i="0" spc="0" sz="1400" u="none" cap="none" strike="noStrike">
         <a:solidFill>
           <a:srgbClr val="000000"/>
         </a:solidFill>
@@ -668,7 +652,7 @@
         <a:sym typeface="Arial"/>
       </a:defRPr>
     </a:lvl2pPr>
-    <a:lvl3pPr marR="0" lvl="2" algn="l" rtl="0">
+    <a:lvl3pPr lvl="2" marR="0" rtl="0" algn="l">
       <a:lnSpc>
         <a:spcPct val="100000"/>
       </a:lnSpc>
@@ -682,7 +666,7 @@
         <a:srgbClr val="000000"/>
       </a:buClr>
       <a:buFont typeface="Arial"/>
-      <a:defRPr sz="1400" b="0" i="0" u="none" strike="noStrike" cap="none">
+      <a:defRPr b="0" i="0" spc="0" sz="1400" u="none" cap="none" strike="noStrike">
         <a:solidFill>
           <a:srgbClr val="000000"/>
         </a:solidFill>
@@ -692,7 +676,7 @@
         <a:sym typeface="Arial"/>
       </a:defRPr>
     </a:lvl3pPr>
-    <a:lvl4pPr marR="0" lvl="3" algn="l" rtl="0">
+    <a:lvl4pPr lvl="3" marR="0" rtl="0" algn="l">
       <a:lnSpc>
         <a:spcPct val="100000"/>
       </a:lnSpc>
@@ -706,7 +690,7 @@
         <a:srgbClr val="000000"/>
       </a:buClr>
       <a:buFont typeface="Arial"/>
-      <a:defRPr sz="1400" b="0" i="0" u="none" strike="noStrike" cap="none">
+      <a:defRPr b="0" i="0" spc="0" sz="1400" u="none" cap="none" strike="noStrike">
         <a:solidFill>
           <a:srgbClr val="000000"/>
         </a:solidFill>
@@ -716,7 +700,7 @@
         <a:sym typeface="Arial"/>
       </a:defRPr>
     </a:lvl4pPr>
-    <a:lvl5pPr marR="0" lvl="4" algn="l" rtl="0">
+    <a:lvl5pPr lvl="4" marR="0" rtl="0" algn="l">
       <a:lnSpc>
         <a:spcPct val="100000"/>
       </a:lnSpc>
@@ -730,7 +714,7 @@
         <a:srgbClr val="000000"/>
       </a:buClr>
       <a:buFont typeface="Arial"/>
-      <a:defRPr sz="1400" b="0" i="0" u="none" strike="noStrike" cap="none">
+      <a:defRPr b="0" i="0" spc="0" sz="1400" u="none" cap="none" strike="noStrike">
         <a:solidFill>
           <a:srgbClr val="000000"/>
         </a:solidFill>
@@ -740,7 +724,7 @@
         <a:sym typeface="Arial"/>
       </a:defRPr>
     </a:lvl5pPr>
-    <a:lvl6pPr marR="0" lvl="5" algn="l" rtl="0">
+    <a:lvl6pPr lvl="5" marR="0" rtl="0" algn="l">
       <a:lnSpc>
         <a:spcPct val="100000"/>
       </a:lnSpc>
@@ -754,7 +738,7 @@
         <a:srgbClr val="000000"/>
       </a:buClr>
       <a:buFont typeface="Arial"/>
-      <a:defRPr sz="1400" b="0" i="0" u="none" strike="noStrike" cap="none">
+      <a:defRPr b="0" i="0" spc="0" sz="1400" u="none" cap="none" strike="noStrike">
         <a:solidFill>
           <a:srgbClr val="000000"/>
         </a:solidFill>
@@ -764,7 +748,7 @@
         <a:sym typeface="Arial"/>
       </a:defRPr>
     </a:lvl6pPr>
-    <a:lvl7pPr marR="0" lvl="6" algn="l" rtl="0">
+    <a:lvl7pPr lvl="6" marR="0" rtl="0" algn="l">
       <a:lnSpc>
         <a:spcPct val="100000"/>
       </a:lnSpc>
@@ -778,7 +762,7 @@
         <a:srgbClr val="000000"/>
       </a:buClr>
       <a:buFont typeface="Arial"/>
-      <a:defRPr sz="1400" b="0" i="0" u="none" strike="noStrike" cap="none">
+      <a:defRPr b="0" i="0" spc="0" sz="1400" u="none" cap="none" strike="noStrike">
         <a:solidFill>
           <a:srgbClr val="000000"/>
         </a:solidFill>
@@ -788,7 +772,7 @@
         <a:sym typeface="Arial"/>
       </a:defRPr>
     </a:lvl7pPr>
-    <a:lvl8pPr marR="0" lvl="7" algn="l" rtl="0">
+    <a:lvl8pPr lvl="7" marR="0" rtl="0" algn="l">
       <a:lnSpc>
         <a:spcPct val="100000"/>
       </a:lnSpc>
@@ -802,7 +786,7 @@
         <a:srgbClr val="000000"/>
       </a:buClr>
       <a:buFont typeface="Arial"/>
-      <a:defRPr sz="1400" b="0" i="0" u="none" strike="noStrike" cap="none">
+      <a:defRPr b="0" i="0" spc="0" sz="1400" u="none" cap="none" strike="noStrike">
         <a:solidFill>
           <a:srgbClr val="000000"/>
         </a:solidFill>
@@ -812,7 +796,7 @@
         <a:sym typeface="Arial"/>
       </a:defRPr>
     </a:lvl8pPr>
-    <a:lvl9pPr marR="0" lvl="8" algn="l" rtl="0">
+    <a:lvl9pPr lvl="8" marR="0" rtl="0" algn="l">
       <a:lnSpc>
         <a:spcPct val="100000"/>
       </a:lnSpc>
@@ -826,7 +810,7 @@
         <a:srgbClr val="000000"/>
       </a:buClr>
       <a:buFont typeface="Arial"/>
-      <a:defRPr sz="1400" b="0" i="0" u="none" strike="noStrike" cap="none">
+      <a:defRPr b="0" i="0" spc="0" sz="1400" u="none" cap="none" strike="noStrike">
         <a:solidFill>
           <a:srgbClr val="000000"/>
         </a:solidFill>
@@ -841,11 +825,11 @@
 </file>
 
 <file path=ppt/notesSlides/notesSlide1.xml><?xml version="1.0" encoding="utf-8"?>
-<p:notes xmlns:a="http://schemas.openxmlformats.org/drawingml/2006/main" xmlns:r="http://schemas.openxmlformats.org/officeDocument/2006/relationships" xmlns:p="http://schemas.openxmlformats.org/presentationml/2006/main" showMasterSp="0" showMasterPhAnim="0">
+<p:notes xmlns:a="http://schemas.openxmlformats.org/drawingml/2006/main" xmlns:r="http://schemas.openxmlformats.org/officeDocument/2006/relationships" xmlns:mc="http://schemas.openxmlformats.org/markup-compatibility/2006" xmlns:mv="urn:schemas-microsoft-com:mac:vml" xmlns:p="http://schemas.openxmlformats.org/presentationml/2006/main" xmlns:c="http://schemas.openxmlformats.org/drawingml/2006/chart" xmlns:dgm="http://schemas.openxmlformats.org/drawingml/2006/diagram" xmlns:o="urn:schemas-microsoft-com:office:office" xmlns:v="urn:schemas-microsoft-com:vml" xmlns:pvml="urn:schemas-microsoft-com:office:powerpoint" xmlns:com="http://schemas.openxmlformats.org/drawingml/2006/compatibility" xmlns:p14="http://schemas.microsoft.com/office/powerpoint/2010/main" xmlns:p15="http://schemas.microsoft.com/office/powerpoint/2012/main" xmlns:ahyp="http://schemas.microsoft.com/office/drawing/2018/hyperlinkcolor" showMasterPhAnim="0" showMasterSp="0">
   <p:cSld>
     <p:spTree>
       <p:nvGrpSpPr>
-        <p:cNvPr id="1" name="Shape 80"/>
+        <p:cNvPr id="80" name="Shape 80"/>
         <p:cNvGrpSpPr/>
         <p:nvPr/>
       </p:nvGrpSpPr>
@@ -860,11 +844,9 @@
       <p:sp>
         <p:nvSpPr>
           <p:cNvPr id="81" name="Google Shape;81;p1:notes"/>
-          <p:cNvSpPr txBox="1">
-            <a:spLocks noGrp="1"/>
-          </p:cNvSpPr>
+          <p:cNvSpPr txBox="1"/>
           <p:nvPr>
-            <p:ph type="body" idx="1"/>
+            <p:ph idx="1" type="body"/>
           </p:nvPr>
         </p:nvSpPr>
         <p:spPr>
@@ -881,12 +863,12 @@
           </a:ln>
         </p:spPr>
         <p:txBody>
-          <a:bodyPr spcFirstLastPara="1" wrap="square" lIns="91425" tIns="91425" rIns="91425" bIns="91425" anchor="t" anchorCtr="0">
+          <a:bodyPr anchorCtr="0" anchor="t" bIns="91425" lIns="91425" spcFirstLastPara="1" rIns="91425" wrap="square" tIns="91425">
             <a:noAutofit/>
           </a:bodyPr>
           <a:lstStyle/>
           <a:p>
-            <a:pPr marL="0" lvl="0" indent="0" algn="l" rtl="0">
+            <a:pPr indent="0" lvl="0" marL="0" rtl="0" algn="l">
               <a:lnSpc>
                 <a:spcPct val="100000"/>
               </a:lnSpc>
@@ -899,6 +881,9 @@
               <a:buSzPts val="1100"/>
               <a:buNone/>
             </a:pPr>
+            <a:r>
+              <a:t/>
+            </a:r>
             <a:endParaRPr/>
           </a:p>
         </p:txBody>
@@ -906,11 +891,9 @@
       <p:sp>
         <p:nvSpPr>
           <p:cNvPr id="82" name="Google Shape;82;p1:notes"/>
-          <p:cNvSpPr>
-            <a:spLocks noGrp="1" noRot="1" noChangeAspect="1"/>
-          </p:cNvSpPr>
+          <p:cNvSpPr/>
           <p:nvPr>
-            <p:ph type="sldImg" idx="2"/>
+            <p:ph idx="2" type="sldImg"/>
           </p:nvPr>
         </p:nvSpPr>
         <p:spPr>
@@ -919,13 +902,9 @@
             <a:ext cx="2374900" cy="3429000"/>
           </a:xfrm>
           <a:custGeom>
-            <a:avLst/>
-            <a:gdLst/>
-            <a:ahLst/>
-            <a:cxnLst/>
-            <a:rect l="l" t="t" r="r" b="b"/>
+            <a:rect b="b" l="l" r="r" t="t"/>
             <a:pathLst>
-              <a:path w="120000" h="120000" extrusionOk="0">
+              <a:path extrusionOk="0" h="120000" w="120000">
                 <a:moveTo>
                   <a:pt x="0" y="0"/>
                 </a:moveTo>
@@ -943,14 +922,14 @@
             </a:pathLst>
           </a:custGeom>
           <a:noFill/>
-          <a:ln w="9525" cap="flat" cmpd="sng">
+          <a:ln cap="flat" cmpd="sng" w="9525">
             <a:solidFill>
               <a:srgbClr val="000000"/>
             </a:solidFill>
             <a:prstDash val="solid"/>
             <a:round/>
-            <a:headEnd type="none" w="sm" len="sm"/>
-            <a:tailEnd type="none" w="sm" len="sm"/>
+            <a:headEnd len="sm" w="sm" type="none"/>
+            <a:tailEnd len="sm" w="sm" type="none"/>
           </a:ln>
         </p:spPr>
       </p:sp>
@@ -963,11 +942,11 @@
 </file>
 
 <file path=ppt/slideLayouts/slideLayout1.xml><?xml version="1.0" encoding="utf-8"?>
-<p:sldLayout xmlns:a="http://schemas.openxmlformats.org/drawingml/2006/main" xmlns:r="http://schemas.openxmlformats.org/officeDocument/2006/relationships" xmlns:p="http://schemas.openxmlformats.org/presentationml/2006/main" matchingName="제목 슬라이드" type="title">
+<p:sldLayout xmlns:a="http://schemas.openxmlformats.org/drawingml/2006/main" xmlns:r="http://schemas.openxmlformats.org/officeDocument/2006/relationships" xmlns:mc="http://schemas.openxmlformats.org/markup-compatibility/2006" xmlns:mv="urn:schemas-microsoft-com:mac:vml" xmlns:p="http://schemas.openxmlformats.org/presentationml/2006/main" xmlns:c="http://schemas.openxmlformats.org/drawingml/2006/chart" xmlns:dgm="http://schemas.openxmlformats.org/drawingml/2006/diagram" xmlns:o="urn:schemas-microsoft-com:office:office" xmlns:v="urn:schemas-microsoft-com:vml" xmlns:pvml="urn:schemas-microsoft-com:office:powerpoint" xmlns:com="http://schemas.openxmlformats.org/drawingml/2006/compatibility" xmlns:p14="http://schemas.microsoft.com/office/powerpoint/2010/main" xmlns:p15="http://schemas.microsoft.com/office/powerpoint/2012/main" xmlns:ahyp="http://schemas.microsoft.com/office/drawing/2018/hyperlinkcolor" matchingName="제목 슬라이드" type="title">
   <p:cSld name="TITLE">
     <p:spTree>
       <p:nvGrpSpPr>
-        <p:cNvPr id="1" name="Shape 11"/>
+        <p:cNvPr id="11" name="Shape 11"/>
         <p:cNvGrpSpPr/>
         <p:nvPr/>
       </p:nvGrpSpPr>
@@ -982,9 +961,7 @@
       <p:sp>
         <p:nvSpPr>
           <p:cNvPr id="12" name="Google Shape;12;p3"/>
-          <p:cNvSpPr txBox="1">
-            <a:spLocks noGrp="1"/>
-          </p:cNvSpPr>
+          <p:cNvSpPr txBox="1"/>
           <p:nvPr>
             <p:ph type="ctrTitle"/>
           </p:nvPr>
@@ -1003,7 +980,7 @@
           </a:ln>
         </p:spPr>
         <p:txBody>
-          <a:bodyPr spcFirstLastPara="1" wrap="square" lIns="91425" tIns="45700" rIns="91425" bIns="45700" anchor="b" anchorCtr="0">
+          <a:bodyPr anchorCtr="0" anchor="b" bIns="45700" lIns="91425" spcFirstLastPara="1" rIns="91425" wrap="square" tIns="45700">
             <a:normAutofit/>
           </a:bodyPr>
           <a:lstStyle>
@@ -1138,19 +1115,15 @@
               <a:defRPr/>
             </a:lvl9pPr>
           </a:lstStyle>
-          <a:p>
-            <a:endParaRPr/>
-          </a:p>
+          <a:p/>
         </p:txBody>
       </p:sp>
       <p:sp>
         <p:nvSpPr>
           <p:cNvPr id="13" name="Google Shape;13;p3"/>
-          <p:cNvSpPr txBox="1">
-            <a:spLocks noGrp="1"/>
-          </p:cNvSpPr>
+          <p:cNvSpPr txBox="1"/>
           <p:nvPr>
-            <p:ph type="subTitle" idx="1"/>
+            <p:ph idx="1" type="subTitle"/>
           </p:nvPr>
         </p:nvSpPr>
         <p:spPr>
@@ -1167,7 +1140,7 @@
           </a:ln>
         </p:spPr>
         <p:txBody>
-          <a:bodyPr spcFirstLastPara="1" wrap="square" lIns="91425" tIns="45700" rIns="91425" bIns="45700" anchor="t" anchorCtr="0">
+          <a:bodyPr anchorCtr="0" anchor="t" bIns="45700" lIns="91425" spcFirstLastPara="1" rIns="91425" wrap="square" tIns="45700">
             <a:normAutofit/>
           </a:bodyPr>
           <a:lstStyle>
@@ -1325,19 +1298,15 @@
               <a:defRPr sz="1200"/>
             </a:lvl9pPr>
           </a:lstStyle>
-          <a:p>
-            <a:endParaRPr/>
-          </a:p>
+          <a:p/>
         </p:txBody>
       </p:sp>
       <p:sp>
         <p:nvSpPr>
           <p:cNvPr id="14" name="Google Shape;14;p3"/>
-          <p:cNvSpPr txBox="1">
-            <a:spLocks noGrp="1"/>
-          </p:cNvSpPr>
+          <p:cNvSpPr txBox="1"/>
           <p:nvPr>
-            <p:ph type="dt" idx="10"/>
+            <p:ph idx="10" type="dt"/>
           </p:nvPr>
         </p:nvSpPr>
         <p:spPr>
@@ -1354,7 +1323,7 @@
           </a:ln>
         </p:spPr>
         <p:txBody>
-          <a:bodyPr spcFirstLastPara="1" wrap="square" lIns="91425" tIns="45700" rIns="91425" bIns="45700" anchor="ctr" anchorCtr="0">
+          <a:bodyPr anchorCtr="0" anchor="ctr" bIns="45700" lIns="91425" spcFirstLastPara="1" rIns="91425" wrap="square" tIns="45700">
             <a:noAutofit/>
           </a:bodyPr>
           <a:lstStyle>
@@ -1485,19 +1454,15 @@
               <a:defRPr/>
             </a:lvl9pPr>
           </a:lstStyle>
-          <a:p>
-            <a:endParaRPr/>
-          </a:p>
+          <a:p/>
         </p:txBody>
       </p:sp>
       <p:sp>
         <p:nvSpPr>
           <p:cNvPr id="15" name="Google Shape;15;p3"/>
-          <p:cNvSpPr txBox="1">
-            <a:spLocks noGrp="1"/>
-          </p:cNvSpPr>
+          <p:cNvSpPr txBox="1"/>
           <p:nvPr>
-            <p:ph type="ftr" idx="11"/>
+            <p:ph idx="11" type="ftr"/>
           </p:nvPr>
         </p:nvSpPr>
         <p:spPr>
@@ -1514,7 +1479,7 @@
           </a:ln>
         </p:spPr>
         <p:txBody>
-          <a:bodyPr spcFirstLastPara="1" wrap="square" lIns="91425" tIns="45700" rIns="91425" bIns="45700" anchor="ctr" anchorCtr="0">
+          <a:bodyPr anchorCtr="0" anchor="ctr" bIns="45700" lIns="91425" spcFirstLastPara="1" rIns="91425" wrap="square" tIns="45700">
             <a:noAutofit/>
           </a:bodyPr>
           <a:lstStyle>
@@ -1645,19 +1610,15 @@
               <a:defRPr/>
             </a:lvl9pPr>
           </a:lstStyle>
-          <a:p>
-            <a:endParaRPr/>
-          </a:p>
+          <a:p/>
         </p:txBody>
       </p:sp>
       <p:sp>
         <p:nvSpPr>
           <p:cNvPr id="16" name="Google Shape;16;p3"/>
-          <p:cNvSpPr txBox="1">
-            <a:spLocks noGrp="1"/>
-          </p:cNvSpPr>
+          <p:cNvSpPr txBox="1"/>
           <p:nvPr>
-            <p:ph type="sldNum" idx="12"/>
+            <p:ph idx="12" type="sldNum"/>
           </p:nvPr>
         </p:nvSpPr>
         <p:spPr>
@@ -1674,11 +1635,11 @@
           </a:ln>
         </p:spPr>
         <p:txBody>
-          <a:bodyPr spcFirstLastPara="1" wrap="square" lIns="91425" tIns="45700" rIns="91425" bIns="45700" anchor="ctr" anchorCtr="0">
+          <a:bodyPr anchorCtr="0" anchor="ctr" bIns="45700" lIns="91425" spcFirstLastPara="1" rIns="91425" wrap="square" tIns="45700">
             <a:noAutofit/>
           </a:bodyPr>
           <a:lstStyle>
-            <a:lvl1pPr marL="0" marR="0" lvl="0" indent="0" algn="r">
+            <a:lvl1pPr indent="0" lvl="0" marL="0" marR="0" algn="r">
               <a:lnSpc>
                 <a:spcPct val="100000"/>
               </a:lnSpc>
@@ -1694,7 +1655,7 @@
               <a:buSzPts val="900"/>
               <a:buFont typeface="Arial"/>
               <a:buNone/>
-              <a:defRPr sz="900" b="0" i="0" u="none" strike="noStrike" cap="none">
+              <a:defRPr b="0" i="0" sz="900" u="none" cap="none" strike="noStrike">
                 <a:solidFill>
                   <a:srgbClr val="757575"/>
                 </a:solidFill>
@@ -1704,7 +1665,7 @@
                 <a:sym typeface="Arial"/>
               </a:defRPr>
             </a:lvl1pPr>
-            <a:lvl2pPr marL="0" marR="0" lvl="1" indent="0" algn="r">
+            <a:lvl2pPr indent="0" lvl="1" marL="0" marR="0" algn="r">
               <a:lnSpc>
                 <a:spcPct val="100000"/>
               </a:lnSpc>
@@ -1720,7 +1681,7 @@
               <a:buSzPts val="900"/>
               <a:buFont typeface="Arial"/>
               <a:buNone/>
-              <a:defRPr sz="900" b="0" i="0" u="none" strike="noStrike" cap="none">
+              <a:defRPr b="0" i="0" sz="900" u="none" cap="none" strike="noStrike">
                 <a:solidFill>
                   <a:srgbClr val="757575"/>
                 </a:solidFill>
@@ -1730,7 +1691,7 @@
                 <a:sym typeface="Arial"/>
               </a:defRPr>
             </a:lvl2pPr>
-            <a:lvl3pPr marL="0" marR="0" lvl="2" indent="0" algn="r">
+            <a:lvl3pPr indent="0" lvl="2" marL="0" marR="0" algn="r">
               <a:lnSpc>
                 <a:spcPct val="100000"/>
               </a:lnSpc>
@@ -1746,7 +1707,7 @@
               <a:buSzPts val="900"/>
               <a:buFont typeface="Arial"/>
               <a:buNone/>
-              <a:defRPr sz="900" b="0" i="0" u="none" strike="noStrike" cap="none">
+              <a:defRPr b="0" i="0" sz="900" u="none" cap="none" strike="noStrike">
                 <a:solidFill>
                   <a:srgbClr val="757575"/>
                 </a:solidFill>
@@ -1756,7 +1717,7 @@
                 <a:sym typeface="Arial"/>
               </a:defRPr>
             </a:lvl3pPr>
-            <a:lvl4pPr marL="0" marR="0" lvl="3" indent="0" algn="r">
+            <a:lvl4pPr indent="0" lvl="3" marL="0" marR="0" algn="r">
               <a:lnSpc>
                 <a:spcPct val="100000"/>
               </a:lnSpc>
@@ -1772,7 +1733,7 @@
               <a:buSzPts val="900"/>
               <a:buFont typeface="Arial"/>
               <a:buNone/>
-              <a:defRPr sz="900" b="0" i="0" u="none" strike="noStrike" cap="none">
+              <a:defRPr b="0" i="0" sz="900" u="none" cap="none" strike="noStrike">
                 <a:solidFill>
                   <a:srgbClr val="757575"/>
                 </a:solidFill>
@@ -1782,7 +1743,7 @@
                 <a:sym typeface="Arial"/>
               </a:defRPr>
             </a:lvl4pPr>
-            <a:lvl5pPr marL="0" marR="0" lvl="4" indent="0" algn="r">
+            <a:lvl5pPr indent="0" lvl="4" marL="0" marR="0" algn="r">
               <a:lnSpc>
                 <a:spcPct val="100000"/>
               </a:lnSpc>
@@ -1798,7 +1759,7 @@
               <a:buSzPts val="900"/>
               <a:buFont typeface="Arial"/>
               <a:buNone/>
-              <a:defRPr sz="900" b="0" i="0" u="none" strike="noStrike" cap="none">
+              <a:defRPr b="0" i="0" sz="900" u="none" cap="none" strike="noStrike">
                 <a:solidFill>
                   <a:srgbClr val="757575"/>
                 </a:solidFill>
@@ -1808,7 +1769,7 @@
                 <a:sym typeface="Arial"/>
               </a:defRPr>
             </a:lvl5pPr>
-            <a:lvl6pPr marL="0" marR="0" lvl="5" indent="0" algn="r">
+            <a:lvl6pPr indent="0" lvl="5" marL="0" marR="0" algn="r">
               <a:lnSpc>
                 <a:spcPct val="100000"/>
               </a:lnSpc>
@@ -1824,7 +1785,7 @@
               <a:buSzPts val="900"/>
               <a:buFont typeface="Arial"/>
               <a:buNone/>
-              <a:defRPr sz="900" b="0" i="0" u="none" strike="noStrike" cap="none">
+              <a:defRPr b="0" i="0" sz="900" u="none" cap="none" strike="noStrike">
                 <a:solidFill>
                   <a:srgbClr val="757575"/>
                 </a:solidFill>
@@ -1834,7 +1795,7 @@
                 <a:sym typeface="Arial"/>
               </a:defRPr>
             </a:lvl6pPr>
-            <a:lvl7pPr marL="0" marR="0" lvl="6" indent="0" algn="r">
+            <a:lvl7pPr indent="0" lvl="6" marL="0" marR="0" algn="r">
               <a:lnSpc>
                 <a:spcPct val="100000"/>
               </a:lnSpc>
@@ -1850,7 +1811,7 @@
               <a:buSzPts val="900"/>
               <a:buFont typeface="Arial"/>
               <a:buNone/>
-              <a:defRPr sz="900" b="0" i="0" u="none" strike="noStrike" cap="none">
+              <a:defRPr b="0" i="0" sz="900" u="none" cap="none" strike="noStrike">
                 <a:solidFill>
                   <a:srgbClr val="757575"/>
                 </a:solidFill>
@@ -1860,7 +1821,7 @@
                 <a:sym typeface="Arial"/>
               </a:defRPr>
             </a:lvl7pPr>
-            <a:lvl8pPr marL="0" marR="0" lvl="7" indent="0" algn="r">
+            <a:lvl8pPr indent="0" lvl="7" marL="0" marR="0" algn="r">
               <a:lnSpc>
                 <a:spcPct val="100000"/>
               </a:lnSpc>
@@ -1876,7 +1837,7 @@
               <a:buSzPts val="900"/>
               <a:buFont typeface="Arial"/>
               <a:buNone/>
-              <a:defRPr sz="900" b="0" i="0" u="none" strike="noStrike" cap="none">
+              <a:defRPr b="0" i="0" sz="900" u="none" cap="none" strike="noStrike">
                 <a:solidFill>
                   <a:srgbClr val="757575"/>
                 </a:solidFill>
@@ -1886,7 +1847,7 @@
                 <a:sym typeface="Arial"/>
               </a:defRPr>
             </a:lvl8pPr>
-            <a:lvl9pPr marL="0" marR="0" lvl="8" indent="0" algn="r">
+            <a:lvl9pPr indent="0" lvl="8" marL="0" marR="0" algn="r">
               <a:lnSpc>
                 <a:spcPct val="100000"/>
               </a:lnSpc>
@@ -1902,7 +1863,7 @@
               <a:buSzPts val="900"/>
               <a:buFont typeface="Arial"/>
               <a:buNone/>
-              <a:defRPr sz="900" b="0" i="0" u="none" strike="noStrike" cap="none">
+              <a:defRPr b="0" i="0" sz="900" u="none" cap="none" strike="noStrike">
                 <a:solidFill>
                   <a:srgbClr val="757575"/>
                 </a:solidFill>
@@ -1914,7 +1875,7 @@
             </a:lvl9pPr>
           </a:lstStyle>
           <a:p>
-            <a:pPr marL="0" lvl="0" indent="0" algn="r" rtl="0">
+            <a:pPr indent="0" lvl="0" marL="0" rtl="0" algn="r">
               <a:spcBef>
                 <a:spcPts val="0"/>
               </a:spcBef>
@@ -1940,11 +1901,11 @@
 </file>
 
 <file path=ppt/slideLayouts/slideLayout10.xml><?xml version="1.0" encoding="utf-8"?>
-<p:sldLayout xmlns:a="http://schemas.openxmlformats.org/drawingml/2006/main" xmlns:r="http://schemas.openxmlformats.org/officeDocument/2006/relationships" xmlns:p="http://schemas.openxmlformats.org/presentationml/2006/main" matchingName="제목 및 세로 텍스트" type="vertTx">
+<p:sldLayout xmlns:a="http://schemas.openxmlformats.org/drawingml/2006/main" xmlns:r="http://schemas.openxmlformats.org/officeDocument/2006/relationships" xmlns:mc="http://schemas.openxmlformats.org/markup-compatibility/2006" xmlns:mv="urn:schemas-microsoft-com:mac:vml" xmlns:p="http://schemas.openxmlformats.org/presentationml/2006/main" xmlns:c="http://schemas.openxmlformats.org/drawingml/2006/chart" xmlns:dgm="http://schemas.openxmlformats.org/drawingml/2006/diagram" xmlns:o="urn:schemas-microsoft-com:office:office" xmlns:v="urn:schemas-microsoft-com:vml" xmlns:pvml="urn:schemas-microsoft-com:office:powerpoint" xmlns:com="http://schemas.openxmlformats.org/drawingml/2006/compatibility" xmlns:p14="http://schemas.microsoft.com/office/powerpoint/2010/main" xmlns:p15="http://schemas.microsoft.com/office/powerpoint/2012/main" xmlns:ahyp="http://schemas.microsoft.com/office/drawing/2018/hyperlinkcolor" matchingName="제목 및 세로 텍스트" type="vertTx">
   <p:cSld name="VERTICAL_TEXT">
     <p:spTree>
       <p:nvGrpSpPr>
-        <p:cNvPr id="1" name="Shape 68"/>
+        <p:cNvPr id="68" name="Shape 68"/>
         <p:cNvGrpSpPr/>
         <p:nvPr/>
       </p:nvGrpSpPr>
@@ -1959,9 +1920,7 @@
       <p:sp>
         <p:nvSpPr>
           <p:cNvPr id="69" name="Google Shape;69;p12"/>
-          <p:cNvSpPr txBox="1">
-            <a:spLocks noGrp="1"/>
-          </p:cNvSpPr>
+          <p:cNvSpPr txBox="1"/>
           <p:nvPr>
             <p:ph type="title"/>
           </p:nvPr>
@@ -1980,7 +1939,7 @@
           </a:ln>
         </p:spPr>
         <p:txBody>
-          <a:bodyPr spcFirstLastPara="1" wrap="square" lIns="91425" tIns="45700" rIns="91425" bIns="45700" anchor="ctr" anchorCtr="0">
+          <a:bodyPr anchorCtr="0" anchor="ctr" bIns="45700" lIns="91425" spcFirstLastPara="1" rIns="91425" wrap="square" tIns="45700">
             <a:normAutofit/>
           </a:bodyPr>
           <a:lstStyle>
@@ -2114,19 +2073,15 @@
               <a:defRPr/>
             </a:lvl9pPr>
           </a:lstStyle>
-          <a:p>
-            <a:endParaRPr/>
-          </a:p>
+          <a:p/>
         </p:txBody>
       </p:sp>
       <p:sp>
         <p:nvSpPr>
           <p:cNvPr id="70" name="Google Shape;70;p12"/>
-          <p:cNvSpPr txBox="1">
-            <a:spLocks noGrp="1"/>
-          </p:cNvSpPr>
+          <p:cNvSpPr txBox="1"/>
           <p:nvPr>
-            <p:ph type="body" idx="1"/>
+            <p:ph idx="1" type="body"/>
           </p:nvPr>
         </p:nvSpPr>
         <p:spPr>
@@ -2143,11 +2098,11 @@
           </a:ln>
         </p:spPr>
         <p:txBody>
-          <a:bodyPr spcFirstLastPara="1" wrap="square" lIns="91425" tIns="45700" rIns="91425" bIns="45700" anchor="t" anchorCtr="0">
+          <a:bodyPr anchorCtr="0" anchor="t" bIns="45700" lIns="91425" spcFirstLastPara="1" rIns="91425" wrap="square" tIns="45700">
             <a:normAutofit/>
           </a:bodyPr>
           <a:lstStyle>
-            <a:lvl1pPr marL="457200" lvl="0" indent="-342900" algn="l">
+            <a:lvl1pPr indent="-342900" lvl="0" marL="457200" algn="l">
               <a:lnSpc>
                 <a:spcPct val="90000"/>
               </a:lnSpc>
@@ -2164,7 +2119,7 @@
               <a:buChar char="•"/>
               <a:defRPr/>
             </a:lvl1pPr>
-            <a:lvl2pPr marL="914400" lvl="1" indent="-342900" algn="l">
+            <a:lvl2pPr indent="-342900" lvl="1" marL="914400" algn="l">
               <a:lnSpc>
                 <a:spcPct val="90000"/>
               </a:lnSpc>
@@ -2181,7 +2136,7 @@
               <a:buChar char="•"/>
               <a:defRPr/>
             </a:lvl2pPr>
-            <a:lvl3pPr marL="1371600" lvl="2" indent="-342900" algn="l">
+            <a:lvl3pPr indent="-342900" lvl="2" marL="1371600" algn="l">
               <a:lnSpc>
                 <a:spcPct val="90000"/>
               </a:lnSpc>
@@ -2198,7 +2153,7 @@
               <a:buChar char="•"/>
               <a:defRPr/>
             </a:lvl3pPr>
-            <a:lvl4pPr marL="1828800" lvl="3" indent="-342900" algn="l">
+            <a:lvl4pPr indent="-342900" lvl="3" marL="1828800" algn="l">
               <a:lnSpc>
                 <a:spcPct val="90000"/>
               </a:lnSpc>
@@ -2215,7 +2170,7 @@
               <a:buChar char="•"/>
               <a:defRPr/>
             </a:lvl4pPr>
-            <a:lvl5pPr marL="2286000" lvl="4" indent="-342900" algn="l">
+            <a:lvl5pPr indent="-342900" lvl="4" marL="2286000" algn="l">
               <a:lnSpc>
                 <a:spcPct val="90000"/>
               </a:lnSpc>
@@ -2232,7 +2187,7 @@
               <a:buChar char="•"/>
               <a:defRPr/>
             </a:lvl5pPr>
-            <a:lvl6pPr marL="2743200" lvl="5" indent="-342900" algn="l">
+            <a:lvl6pPr indent="-342900" lvl="5" marL="2743200" algn="l">
               <a:lnSpc>
                 <a:spcPct val="90000"/>
               </a:lnSpc>
@@ -2249,7 +2204,7 @@
               <a:buChar char="•"/>
               <a:defRPr/>
             </a:lvl6pPr>
-            <a:lvl7pPr marL="3200400" lvl="6" indent="-342900" algn="l">
+            <a:lvl7pPr indent="-342900" lvl="6" marL="3200400" algn="l">
               <a:lnSpc>
                 <a:spcPct val="90000"/>
               </a:lnSpc>
@@ -2266,7 +2221,7 @@
               <a:buChar char="•"/>
               <a:defRPr/>
             </a:lvl7pPr>
-            <a:lvl8pPr marL="3657600" lvl="7" indent="-342900" algn="l">
+            <a:lvl8pPr indent="-342900" lvl="7" marL="3657600" algn="l">
               <a:lnSpc>
                 <a:spcPct val="90000"/>
               </a:lnSpc>
@@ -2283,7 +2238,7 @@
               <a:buChar char="•"/>
               <a:defRPr/>
             </a:lvl8pPr>
-            <a:lvl9pPr marL="4114800" lvl="8" indent="-342900" algn="l">
+            <a:lvl9pPr indent="-342900" lvl="8" marL="4114800" algn="l">
               <a:lnSpc>
                 <a:spcPct val="90000"/>
               </a:lnSpc>
@@ -2301,19 +2256,15 @@
               <a:defRPr/>
             </a:lvl9pPr>
           </a:lstStyle>
-          <a:p>
-            <a:endParaRPr/>
-          </a:p>
+          <a:p/>
         </p:txBody>
       </p:sp>
       <p:sp>
         <p:nvSpPr>
           <p:cNvPr id="71" name="Google Shape;71;p12"/>
-          <p:cNvSpPr txBox="1">
-            <a:spLocks noGrp="1"/>
-          </p:cNvSpPr>
+          <p:cNvSpPr txBox="1"/>
           <p:nvPr>
-            <p:ph type="dt" idx="10"/>
+            <p:ph idx="10" type="dt"/>
           </p:nvPr>
         </p:nvSpPr>
         <p:spPr>
@@ -2330,7 +2281,7 @@
           </a:ln>
         </p:spPr>
         <p:txBody>
-          <a:bodyPr spcFirstLastPara="1" wrap="square" lIns="91425" tIns="45700" rIns="91425" bIns="45700" anchor="ctr" anchorCtr="0">
+          <a:bodyPr anchorCtr="0" anchor="ctr" bIns="45700" lIns="91425" spcFirstLastPara="1" rIns="91425" wrap="square" tIns="45700">
             <a:noAutofit/>
           </a:bodyPr>
           <a:lstStyle>
@@ -2461,19 +2412,15 @@
               <a:defRPr/>
             </a:lvl9pPr>
           </a:lstStyle>
-          <a:p>
-            <a:endParaRPr/>
-          </a:p>
+          <a:p/>
         </p:txBody>
       </p:sp>
       <p:sp>
         <p:nvSpPr>
           <p:cNvPr id="72" name="Google Shape;72;p12"/>
-          <p:cNvSpPr txBox="1">
-            <a:spLocks noGrp="1"/>
-          </p:cNvSpPr>
+          <p:cNvSpPr txBox="1"/>
           <p:nvPr>
-            <p:ph type="ftr" idx="11"/>
+            <p:ph idx="11" type="ftr"/>
           </p:nvPr>
         </p:nvSpPr>
         <p:spPr>
@@ -2490,7 +2437,7 @@
           </a:ln>
         </p:spPr>
         <p:txBody>
-          <a:bodyPr spcFirstLastPara="1" wrap="square" lIns="91425" tIns="45700" rIns="91425" bIns="45700" anchor="ctr" anchorCtr="0">
+          <a:bodyPr anchorCtr="0" anchor="ctr" bIns="45700" lIns="91425" spcFirstLastPara="1" rIns="91425" wrap="square" tIns="45700">
             <a:noAutofit/>
           </a:bodyPr>
           <a:lstStyle>
@@ -2621,19 +2568,15 @@
               <a:defRPr/>
             </a:lvl9pPr>
           </a:lstStyle>
-          <a:p>
-            <a:endParaRPr/>
-          </a:p>
+          <a:p/>
         </p:txBody>
       </p:sp>
       <p:sp>
         <p:nvSpPr>
           <p:cNvPr id="73" name="Google Shape;73;p12"/>
-          <p:cNvSpPr txBox="1">
-            <a:spLocks noGrp="1"/>
-          </p:cNvSpPr>
+          <p:cNvSpPr txBox="1"/>
           <p:nvPr>
-            <p:ph type="sldNum" idx="12"/>
+            <p:ph idx="12" type="sldNum"/>
           </p:nvPr>
         </p:nvSpPr>
         <p:spPr>
@@ -2650,11 +2593,11 @@
           </a:ln>
         </p:spPr>
         <p:txBody>
-          <a:bodyPr spcFirstLastPara="1" wrap="square" lIns="91425" tIns="45700" rIns="91425" bIns="45700" anchor="ctr" anchorCtr="0">
+          <a:bodyPr anchorCtr="0" anchor="ctr" bIns="45700" lIns="91425" spcFirstLastPara="1" rIns="91425" wrap="square" tIns="45700">
             <a:noAutofit/>
           </a:bodyPr>
           <a:lstStyle>
-            <a:lvl1pPr marL="0" marR="0" lvl="0" indent="0" algn="r">
+            <a:lvl1pPr indent="0" lvl="0" marL="0" marR="0" algn="r">
               <a:lnSpc>
                 <a:spcPct val="100000"/>
               </a:lnSpc>
@@ -2670,7 +2613,7 @@
               <a:buSzPts val="900"/>
               <a:buFont typeface="Arial"/>
               <a:buNone/>
-              <a:defRPr sz="900" b="0" i="0" u="none" strike="noStrike" cap="none">
+              <a:defRPr b="0" i="0" sz="900" u="none" cap="none" strike="noStrike">
                 <a:solidFill>
                   <a:srgbClr val="757575"/>
                 </a:solidFill>
@@ -2680,7 +2623,7 @@
                 <a:sym typeface="Arial"/>
               </a:defRPr>
             </a:lvl1pPr>
-            <a:lvl2pPr marL="0" marR="0" lvl="1" indent="0" algn="r">
+            <a:lvl2pPr indent="0" lvl="1" marL="0" marR="0" algn="r">
               <a:lnSpc>
                 <a:spcPct val="100000"/>
               </a:lnSpc>
@@ -2696,7 +2639,7 @@
               <a:buSzPts val="900"/>
               <a:buFont typeface="Arial"/>
               <a:buNone/>
-              <a:defRPr sz="900" b="0" i="0" u="none" strike="noStrike" cap="none">
+              <a:defRPr b="0" i="0" sz="900" u="none" cap="none" strike="noStrike">
                 <a:solidFill>
                   <a:srgbClr val="757575"/>
                 </a:solidFill>
@@ -2706,7 +2649,7 @@
                 <a:sym typeface="Arial"/>
               </a:defRPr>
             </a:lvl2pPr>
-            <a:lvl3pPr marL="0" marR="0" lvl="2" indent="0" algn="r">
+            <a:lvl3pPr indent="0" lvl="2" marL="0" marR="0" algn="r">
               <a:lnSpc>
                 <a:spcPct val="100000"/>
               </a:lnSpc>
@@ -2722,7 +2665,7 @@
               <a:buSzPts val="900"/>
               <a:buFont typeface="Arial"/>
               <a:buNone/>
-              <a:defRPr sz="900" b="0" i="0" u="none" strike="noStrike" cap="none">
+              <a:defRPr b="0" i="0" sz="900" u="none" cap="none" strike="noStrike">
                 <a:solidFill>
                   <a:srgbClr val="757575"/>
                 </a:solidFill>
@@ -2732,7 +2675,7 @@
                 <a:sym typeface="Arial"/>
               </a:defRPr>
             </a:lvl3pPr>
-            <a:lvl4pPr marL="0" marR="0" lvl="3" indent="0" algn="r">
+            <a:lvl4pPr indent="0" lvl="3" marL="0" marR="0" algn="r">
               <a:lnSpc>
                 <a:spcPct val="100000"/>
               </a:lnSpc>
@@ -2748,7 +2691,7 @@
               <a:buSzPts val="900"/>
               <a:buFont typeface="Arial"/>
               <a:buNone/>
-              <a:defRPr sz="900" b="0" i="0" u="none" strike="noStrike" cap="none">
+              <a:defRPr b="0" i="0" sz="900" u="none" cap="none" strike="noStrike">
                 <a:solidFill>
                   <a:srgbClr val="757575"/>
                 </a:solidFill>
@@ -2758,7 +2701,7 @@
                 <a:sym typeface="Arial"/>
               </a:defRPr>
             </a:lvl4pPr>
-            <a:lvl5pPr marL="0" marR="0" lvl="4" indent="0" algn="r">
+            <a:lvl5pPr indent="0" lvl="4" marL="0" marR="0" algn="r">
               <a:lnSpc>
                 <a:spcPct val="100000"/>
               </a:lnSpc>
@@ -2774,7 +2717,7 @@
               <a:buSzPts val="900"/>
               <a:buFont typeface="Arial"/>
               <a:buNone/>
-              <a:defRPr sz="900" b="0" i="0" u="none" strike="noStrike" cap="none">
+              <a:defRPr b="0" i="0" sz="900" u="none" cap="none" strike="noStrike">
                 <a:solidFill>
                   <a:srgbClr val="757575"/>
                 </a:solidFill>
@@ -2784,7 +2727,7 @@
                 <a:sym typeface="Arial"/>
               </a:defRPr>
             </a:lvl5pPr>
-            <a:lvl6pPr marL="0" marR="0" lvl="5" indent="0" algn="r">
+            <a:lvl6pPr indent="0" lvl="5" marL="0" marR="0" algn="r">
               <a:lnSpc>
                 <a:spcPct val="100000"/>
               </a:lnSpc>
@@ -2800,7 +2743,7 @@
               <a:buSzPts val="900"/>
               <a:buFont typeface="Arial"/>
               <a:buNone/>
-              <a:defRPr sz="900" b="0" i="0" u="none" strike="noStrike" cap="none">
+              <a:defRPr b="0" i="0" sz="900" u="none" cap="none" strike="noStrike">
                 <a:solidFill>
                   <a:srgbClr val="757575"/>
                 </a:solidFill>
@@ -2810,7 +2753,7 @@
                 <a:sym typeface="Arial"/>
               </a:defRPr>
             </a:lvl6pPr>
-            <a:lvl7pPr marL="0" marR="0" lvl="6" indent="0" algn="r">
+            <a:lvl7pPr indent="0" lvl="6" marL="0" marR="0" algn="r">
               <a:lnSpc>
                 <a:spcPct val="100000"/>
               </a:lnSpc>
@@ -2826,7 +2769,7 @@
               <a:buSzPts val="900"/>
               <a:buFont typeface="Arial"/>
               <a:buNone/>
-              <a:defRPr sz="900" b="0" i="0" u="none" strike="noStrike" cap="none">
+              <a:defRPr b="0" i="0" sz="900" u="none" cap="none" strike="noStrike">
                 <a:solidFill>
                   <a:srgbClr val="757575"/>
                 </a:solidFill>
@@ -2836,7 +2779,7 @@
                 <a:sym typeface="Arial"/>
               </a:defRPr>
             </a:lvl7pPr>
-            <a:lvl8pPr marL="0" marR="0" lvl="7" indent="0" algn="r">
+            <a:lvl8pPr indent="0" lvl="7" marL="0" marR="0" algn="r">
               <a:lnSpc>
                 <a:spcPct val="100000"/>
               </a:lnSpc>
@@ -2852,7 +2795,7 @@
               <a:buSzPts val="900"/>
               <a:buFont typeface="Arial"/>
               <a:buNone/>
-              <a:defRPr sz="900" b="0" i="0" u="none" strike="noStrike" cap="none">
+              <a:defRPr b="0" i="0" sz="900" u="none" cap="none" strike="noStrike">
                 <a:solidFill>
                   <a:srgbClr val="757575"/>
                 </a:solidFill>
@@ -2862,7 +2805,7 @@
                 <a:sym typeface="Arial"/>
               </a:defRPr>
             </a:lvl8pPr>
-            <a:lvl9pPr marL="0" marR="0" lvl="8" indent="0" algn="r">
+            <a:lvl9pPr indent="0" lvl="8" marL="0" marR="0" algn="r">
               <a:lnSpc>
                 <a:spcPct val="100000"/>
               </a:lnSpc>
@@ -2878,7 +2821,7 @@
               <a:buSzPts val="900"/>
               <a:buFont typeface="Arial"/>
               <a:buNone/>
-              <a:defRPr sz="900" b="0" i="0" u="none" strike="noStrike" cap="none">
+              <a:defRPr b="0" i="0" sz="900" u="none" cap="none" strike="noStrike">
                 <a:solidFill>
                   <a:srgbClr val="757575"/>
                 </a:solidFill>
@@ -2890,7 +2833,7 @@
             </a:lvl9pPr>
           </a:lstStyle>
           <a:p>
-            <a:pPr marL="0" lvl="0" indent="0" algn="r" rtl="0">
+            <a:pPr indent="0" lvl="0" marL="0" rtl="0" algn="r">
               <a:spcBef>
                 <a:spcPts val="0"/>
               </a:spcBef>
@@ -2916,11 +2859,11 @@
 </file>
 
 <file path=ppt/slideLayouts/slideLayout11.xml><?xml version="1.0" encoding="utf-8"?>
-<p:sldLayout xmlns:a="http://schemas.openxmlformats.org/drawingml/2006/main" xmlns:r="http://schemas.openxmlformats.org/officeDocument/2006/relationships" xmlns:p="http://schemas.openxmlformats.org/presentationml/2006/main" matchingName="세로 제목 및 텍스트" type="vertTitleAndTx">
+<p:sldLayout xmlns:a="http://schemas.openxmlformats.org/drawingml/2006/main" xmlns:r="http://schemas.openxmlformats.org/officeDocument/2006/relationships" xmlns:mc="http://schemas.openxmlformats.org/markup-compatibility/2006" xmlns:mv="urn:schemas-microsoft-com:mac:vml" xmlns:p="http://schemas.openxmlformats.org/presentationml/2006/main" xmlns:c="http://schemas.openxmlformats.org/drawingml/2006/chart" xmlns:dgm="http://schemas.openxmlformats.org/drawingml/2006/diagram" xmlns:o="urn:schemas-microsoft-com:office:office" xmlns:v="urn:schemas-microsoft-com:vml" xmlns:pvml="urn:schemas-microsoft-com:office:powerpoint" xmlns:com="http://schemas.openxmlformats.org/drawingml/2006/compatibility" xmlns:p14="http://schemas.microsoft.com/office/powerpoint/2010/main" xmlns:p15="http://schemas.microsoft.com/office/powerpoint/2012/main" xmlns:ahyp="http://schemas.microsoft.com/office/drawing/2018/hyperlinkcolor" matchingName="세로 제목 및 텍스트" type="vertTitleAndTx">
   <p:cSld name="VERTICAL_TITLE_AND_VERTICAL_TEXT">
     <p:spTree>
       <p:nvGrpSpPr>
-        <p:cNvPr id="1" name="Shape 74"/>
+        <p:cNvPr id="74" name="Shape 74"/>
         <p:cNvGrpSpPr/>
         <p:nvPr/>
       </p:nvGrpSpPr>
@@ -2935,9 +2878,7 @@
       <p:sp>
         <p:nvSpPr>
           <p:cNvPr id="75" name="Google Shape;75;p13"/>
-          <p:cNvSpPr txBox="1">
-            <a:spLocks noGrp="1"/>
-          </p:cNvSpPr>
+          <p:cNvSpPr txBox="1"/>
           <p:nvPr>
             <p:ph type="title"/>
           </p:nvPr>
@@ -2956,7 +2897,7 @@
           </a:ln>
         </p:spPr>
         <p:txBody>
-          <a:bodyPr spcFirstLastPara="1" wrap="square" lIns="91425" tIns="45700" rIns="91425" bIns="45700" anchor="ctr" anchorCtr="0">
+          <a:bodyPr anchorCtr="0" anchor="ctr" bIns="45700" lIns="91425" spcFirstLastPara="1" rIns="91425" wrap="square" tIns="45700">
             <a:normAutofit/>
           </a:bodyPr>
           <a:lstStyle>
@@ -3090,19 +3031,15 @@
               <a:defRPr/>
             </a:lvl9pPr>
           </a:lstStyle>
-          <a:p>
-            <a:endParaRPr/>
-          </a:p>
+          <a:p/>
         </p:txBody>
       </p:sp>
       <p:sp>
         <p:nvSpPr>
           <p:cNvPr id="76" name="Google Shape;76;p13"/>
-          <p:cNvSpPr txBox="1">
-            <a:spLocks noGrp="1"/>
-          </p:cNvSpPr>
+          <p:cNvSpPr txBox="1"/>
           <p:nvPr>
-            <p:ph type="body" idx="1"/>
+            <p:ph idx="1" type="body"/>
           </p:nvPr>
         </p:nvSpPr>
         <p:spPr>
@@ -3119,11 +3056,11 @@
           </a:ln>
         </p:spPr>
         <p:txBody>
-          <a:bodyPr spcFirstLastPara="1" wrap="square" lIns="91425" tIns="45700" rIns="91425" bIns="45700" anchor="t" anchorCtr="0">
+          <a:bodyPr anchorCtr="0" anchor="t" bIns="45700" lIns="91425" spcFirstLastPara="1" rIns="91425" wrap="square" tIns="45700">
             <a:normAutofit/>
           </a:bodyPr>
           <a:lstStyle>
-            <a:lvl1pPr marL="457200" lvl="0" indent="-342900" algn="l">
+            <a:lvl1pPr indent="-342900" lvl="0" marL="457200" algn="l">
               <a:lnSpc>
                 <a:spcPct val="90000"/>
               </a:lnSpc>
@@ -3140,7 +3077,7 @@
               <a:buChar char="•"/>
               <a:defRPr/>
             </a:lvl1pPr>
-            <a:lvl2pPr marL="914400" lvl="1" indent="-342900" algn="l">
+            <a:lvl2pPr indent="-342900" lvl="1" marL="914400" algn="l">
               <a:lnSpc>
                 <a:spcPct val="90000"/>
               </a:lnSpc>
@@ -3157,7 +3094,7 @@
               <a:buChar char="•"/>
               <a:defRPr/>
             </a:lvl2pPr>
-            <a:lvl3pPr marL="1371600" lvl="2" indent="-342900" algn="l">
+            <a:lvl3pPr indent="-342900" lvl="2" marL="1371600" algn="l">
               <a:lnSpc>
                 <a:spcPct val="90000"/>
               </a:lnSpc>
@@ -3174,7 +3111,7 @@
               <a:buChar char="•"/>
               <a:defRPr/>
             </a:lvl3pPr>
-            <a:lvl4pPr marL="1828800" lvl="3" indent="-342900" algn="l">
+            <a:lvl4pPr indent="-342900" lvl="3" marL="1828800" algn="l">
               <a:lnSpc>
                 <a:spcPct val="90000"/>
               </a:lnSpc>
@@ -3191,7 +3128,7 @@
               <a:buChar char="•"/>
               <a:defRPr/>
             </a:lvl4pPr>
-            <a:lvl5pPr marL="2286000" lvl="4" indent="-342900" algn="l">
+            <a:lvl5pPr indent="-342900" lvl="4" marL="2286000" algn="l">
               <a:lnSpc>
                 <a:spcPct val="90000"/>
               </a:lnSpc>
@@ -3208,7 +3145,7 @@
               <a:buChar char="•"/>
               <a:defRPr/>
             </a:lvl5pPr>
-            <a:lvl6pPr marL="2743200" lvl="5" indent="-342900" algn="l">
+            <a:lvl6pPr indent="-342900" lvl="5" marL="2743200" algn="l">
               <a:lnSpc>
                 <a:spcPct val="90000"/>
               </a:lnSpc>
@@ -3225,7 +3162,7 @@
               <a:buChar char="•"/>
               <a:defRPr/>
             </a:lvl6pPr>
-            <a:lvl7pPr marL="3200400" lvl="6" indent="-342900" algn="l">
+            <a:lvl7pPr indent="-342900" lvl="6" marL="3200400" algn="l">
               <a:lnSpc>
                 <a:spcPct val="90000"/>
               </a:lnSpc>
@@ -3242,7 +3179,7 @@
               <a:buChar char="•"/>
               <a:defRPr/>
             </a:lvl7pPr>
-            <a:lvl8pPr marL="3657600" lvl="7" indent="-342900" algn="l">
+            <a:lvl8pPr indent="-342900" lvl="7" marL="3657600" algn="l">
               <a:lnSpc>
                 <a:spcPct val="90000"/>
               </a:lnSpc>
@@ -3259,7 +3196,7 @@
               <a:buChar char="•"/>
               <a:defRPr/>
             </a:lvl8pPr>
-            <a:lvl9pPr marL="4114800" lvl="8" indent="-342900" algn="l">
+            <a:lvl9pPr indent="-342900" lvl="8" marL="4114800" algn="l">
               <a:lnSpc>
                 <a:spcPct val="90000"/>
               </a:lnSpc>
@@ -3277,19 +3214,15 @@
               <a:defRPr/>
             </a:lvl9pPr>
           </a:lstStyle>
-          <a:p>
-            <a:endParaRPr/>
-          </a:p>
+          <a:p/>
         </p:txBody>
       </p:sp>
       <p:sp>
         <p:nvSpPr>
           <p:cNvPr id="77" name="Google Shape;77;p13"/>
-          <p:cNvSpPr txBox="1">
-            <a:spLocks noGrp="1"/>
-          </p:cNvSpPr>
+          <p:cNvSpPr txBox="1"/>
           <p:nvPr>
-            <p:ph type="dt" idx="10"/>
+            <p:ph idx="10" type="dt"/>
           </p:nvPr>
         </p:nvSpPr>
         <p:spPr>
@@ -3306,7 +3239,7 @@
           </a:ln>
         </p:spPr>
         <p:txBody>
-          <a:bodyPr spcFirstLastPara="1" wrap="square" lIns="91425" tIns="45700" rIns="91425" bIns="45700" anchor="ctr" anchorCtr="0">
+          <a:bodyPr anchorCtr="0" anchor="ctr" bIns="45700" lIns="91425" spcFirstLastPara="1" rIns="91425" wrap="square" tIns="45700">
             <a:noAutofit/>
           </a:bodyPr>
           <a:lstStyle>
@@ -3437,19 +3370,15 @@
               <a:defRPr/>
             </a:lvl9pPr>
           </a:lstStyle>
-          <a:p>
-            <a:endParaRPr/>
-          </a:p>
+          <a:p/>
         </p:txBody>
       </p:sp>
       <p:sp>
         <p:nvSpPr>
           <p:cNvPr id="78" name="Google Shape;78;p13"/>
-          <p:cNvSpPr txBox="1">
-            <a:spLocks noGrp="1"/>
-          </p:cNvSpPr>
+          <p:cNvSpPr txBox="1"/>
           <p:nvPr>
-            <p:ph type="ftr" idx="11"/>
+            <p:ph idx="11" type="ftr"/>
           </p:nvPr>
         </p:nvSpPr>
         <p:spPr>
@@ -3466,7 +3395,7 @@
           </a:ln>
         </p:spPr>
         <p:txBody>
-          <a:bodyPr spcFirstLastPara="1" wrap="square" lIns="91425" tIns="45700" rIns="91425" bIns="45700" anchor="ctr" anchorCtr="0">
+          <a:bodyPr anchorCtr="0" anchor="ctr" bIns="45700" lIns="91425" spcFirstLastPara="1" rIns="91425" wrap="square" tIns="45700">
             <a:noAutofit/>
           </a:bodyPr>
           <a:lstStyle>
@@ -3597,19 +3526,15 @@
               <a:defRPr/>
             </a:lvl9pPr>
           </a:lstStyle>
-          <a:p>
-            <a:endParaRPr/>
-          </a:p>
+          <a:p/>
         </p:txBody>
       </p:sp>
       <p:sp>
         <p:nvSpPr>
           <p:cNvPr id="79" name="Google Shape;79;p13"/>
-          <p:cNvSpPr txBox="1">
-            <a:spLocks noGrp="1"/>
-          </p:cNvSpPr>
+          <p:cNvSpPr txBox="1"/>
           <p:nvPr>
-            <p:ph type="sldNum" idx="12"/>
+            <p:ph idx="12" type="sldNum"/>
           </p:nvPr>
         </p:nvSpPr>
         <p:spPr>
@@ -3626,11 +3551,11 @@
           </a:ln>
         </p:spPr>
         <p:txBody>
-          <a:bodyPr spcFirstLastPara="1" wrap="square" lIns="91425" tIns="45700" rIns="91425" bIns="45700" anchor="ctr" anchorCtr="0">
+          <a:bodyPr anchorCtr="0" anchor="ctr" bIns="45700" lIns="91425" spcFirstLastPara="1" rIns="91425" wrap="square" tIns="45700">
             <a:noAutofit/>
           </a:bodyPr>
           <a:lstStyle>
-            <a:lvl1pPr marL="0" marR="0" lvl="0" indent="0" algn="r">
+            <a:lvl1pPr indent="0" lvl="0" marL="0" marR="0" algn="r">
               <a:lnSpc>
                 <a:spcPct val="100000"/>
               </a:lnSpc>
@@ -3646,7 +3571,7 @@
               <a:buSzPts val="900"/>
               <a:buFont typeface="Arial"/>
               <a:buNone/>
-              <a:defRPr sz="900" b="0" i="0" u="none" strike="noStrike" cap="none">
+              <a:defRPr b="0" i="0" sz="900" u="none" cap="none" strike="noStrike">
                 <a:solidFill>
                   <a:srgbClr val="757575"/>
                 </a:solidFill>
@@ -3656,7 +3581,7 @@
                 <a:sym typeface="Arial"/>
               </a:defRPr>
             </a:lvl1pPr>
-            <a:lvl2pPr marL="0" marR="0" lvl="1" indent="0" algn="r">
+            <a:lvl2pPr indent="0" lvl="1" marL="0" marR="0" algn="r">
               <a:lnSpc>
                 <a:spcPct val="100000"/>
               </a:lnSpc>
@@ -3672,7 +3597,7 @@
               <a:buSzPts val="900"/>
               <a:buFont typeface="Arial"/>
               <a:buNone/>
-              <a:defRPr sz="900" b="0" i="0" u="none" strike="noStrike" cap="none">
+              <a:defRPr b="0" i="0" sz="900" u="none" cap="none" strike="noStrike">
                 <a:solidFill>
                   <a:srgbClr val="757575"/>
                 </a:solidFill>
@@ -3682,7 +3607,7 @@
                 <a:sym typeface="Arial"/>
               </a:defRPr>
             </a:lvl2pPr>
-            <a:lvl3pPr marL="0" marR="0" lvl="2" indent="0" algn="r">
+            <a:lvl3pPr indent="0" lvl="2" marL="0" marR="0" algn="r">
               <a:lnSpc>
                 <a:spcPct val="100000"/>
               </a:lnSpc>
@@ -3698,7 +3623,7 @@
               <a:buSzPts val="900"/>
               <a:buFont typeface="Arial"/>
               <a:buNone/>
-              <a:defRPr sz="900" b="0" i="0" u="none" strike="noStrike" cap="none">
+              <a:defRPr b="0" i="0" sz="900" u="none" cap="none" strike="noStrike">
                 <a:solidFill>
                   <a:srgbClr val="757575"/>
                 </a:solidFill>
@@ -3708,7 +3633,7 @@
                 <a:sym typeface="Arial"/>
               </a:defRPr>
             </a:lvl3pPr>
-            <a:lvl4pPr marL="0" marR="0" lvl="3" indent="0" algn="r">
+            <a:lvl4pPr indent="0" lvl="3" marL="0" marR="0" algn="r">
               <a:lnSpc>
                 <a:spcPct val="100000"/>
               </a:lnSpc>
@@ -3724,7 +3649,7 @@
               <a:buSzPts val="900"/>
               <a:buFont typeface="Arial"/>
               <a:buNone/>
-              <a:defRPr sz="900" b="0" i="0" u="none" strike="noStrike" cap="none">
+              <a:defRPr b="0" i="0" sz="900" u="none" cap="none" strike="noStrike">
                 <a:solidFill>
                   <a:srgbClr val="757575"/>
                 </a:solidFill>
@@ -3734,7 +3659,7 @@
                 <a:sym typeface="Arial"/>
               </a:defRPr>
             </a:lvl4pPr>
-            <a:lvl5pPr marL="0" marR="0" lvl="4" indent="0" algn="r">
+            <a:lvl5pPr indent="0" lvl="4" marL="0" marR="0" algn="r">
               <a:lnSpc>
                 <a:spcPct val="100000"/>
               </a:lnSpc>
@@ -3750,7 +3675,7 @@
               <a:buSzPts val="900"/>
               <a:buFont typeface="Arial"/>
               <a:buNone/>
-              <a:defRPr sz="900" b="0" i="0" u="none" strike="noStrike" cap="none">
+              <a:defRPr b="0" i="0" sz="900" u="none" cap="none" strike="noStrike">
                 <a:solidFill>
                   <a:srgbClr val="757575"/>
                 </a:solidFill>
@@ -3760,7 +3685,7 @@
                 <a:sym typeface="Arial"/>
               </a:defRPr>
             </a:lvl5pPr>
-            <a:lvl6pPr marL="0" marR="0" lvl="5" indent="0" algn="r">
+            <a:lvl6pPr indent="0" lvl="5" marL="0" marR="0" algn="r">
               <a:lnSpc>
                 <a:spcPct val="100000"/>
               </a:lnSpc>
@@ -3776,7 +3701,7 @@
               <a:buSzPts val="900"/>
               <a:buFont typeface="Arial"/>
               <a:buNone/>
-              <a:defRPr sz="900" b="0" i="0" u="none" strike="noStrike" cap="none">
+              <a:defRPr b="0" i="0" sz="900" u="none" cap="none" strike="noStrike">
                 <a:solidFill>
                   <a:srgbClr val="757575"/>
                 </a:solidFill>
@@ -3786,7 +3711,7 @@
                 <a:sym typeface="Arial"/>
               </a:defRPr>
             </a:lvl6pPr>
-            <a:lvl7pPr marL="0" marR="0" lvl="6" indent="0" algn="r">
+            <a:lvl7pPr indent="0" lvl="6" marL="0" marR="0" algn="r">
               <a:lnSpc>
                 <a:spcPct val="100000"/>
               </a:lnSpc>
@@ -3802,7 +3727,7 @@
               <a:buSzPts val="900"/>
               <a:buFont typeface="Arial"/>
               <a:buNone/>
-              <a:defRPr sz="900" b="0" i="0" u="none" strike="noStrike" cap="none">
+              <a:defRPr b="0" i="0" sz="900" u="none" cap="none" strike="noStrike">
                 <a:solidFill>
                   <a:srgbClr val="757575"/>
                 </a:solidFill>
@@ -3812,7 +3737,7 @@
                 <a:sym typeface="Arial"/>
               </a:defRPr>
             </a:lvl7pPr>
-            <a:lvl8pPr marL="0" marR="0" lvl="7" indent="0" algn="r">
+            <a:lvl8pPr indent="0" lvl="7" marL="0" marR="0" algn="r">
               <a:lnSpc>
                 <a:spcPct val="100000"/>
               </a:lnSpc>
@@ -3828,7 +3753,7 @@
               <a:buSzPts val="900"/>
               <a:buFont typeface="Arial"/>
               <a:buNone/>
-              <a:defRPr sz="900" b="0" i="0" u="none" strike="noStrike" cap="none">
+              <a:defRPr b="0" i="0" sz="900" u="none" cap="none" strike="noStrike">
                 <a:solidFill>
                   <a:srgbClr val="757575"/>
                 </a:solidFill>
@@ -3838,7 +3763,7 @@
                 <a:sym typeface="Arial"/>
               </a:defRPr>
             </a:lvl8pPr>
-            <a:lvl9pPr marL="0" marR="0" lvl="8" indent="0" algn="r">
+            <a:lvl9pPr indent="0" lvl="8" marL="0" marR="0" algn="r">
               <a:lnSpc>
                 <a:spcPct val="100000"/>
               </a:lnSpc>
@@ -3854,7 +3779,7 @@
               <a:buSzPts val="900"/>
               <a:buFont typeface="Arial"/>
               <a:buNone/>
-              <a:defRPr sz="900" b="0" i="0" u="none" strike="noStrike" cap="none">
+              <a:defRPr b="0" i="0" sz="900" u="none" cap="none" strike="noStrike">
                 <a:solidFill>
                   <a:srgbClr val="757575"/>
                 </a:solidFill>
@@ -3866,7 +3791,7 @@
             </a:lvl9pPr>
           </a:lstStyle>
           <a:p>
-            <a:pPr marL="0" lvl="0" indent="0" algn="r" rtl="0">
+            <a:pPr indent="0" lvl="0" marL="0" rtl="0" algn="r">
               <a:spcBef>
                 <a:spcPts val="0"/>
               </a:spcBef>
@@ -3892,11 +3817,11 @@
 </file>
 
 <file path=ppt/slideLayouts/slideLayout2.xml><?xml version="1.0" encoding="utf-8"?>
-<p:sldLayout xmlns:a="http://schemas.openxmlformats.org/drawingml/2006/main" xmlns:r="http://schemas.openxmlformats.org/officeDocument/2006/relationships" xmlns:p="http://schemas.openxmlformats.org/presentationml/2006/main" matchingName="제목 및 내용" type="obj">
+<p:sldLayout xmlns:a="http://schemas.openxmlformats.org/drawingml/2006/main" xmlns:r="http://schemas.openxmlformats.org/officeDocument/2006/relationships" xmlns:mc="http://schemas.openxmlformats.org/markup-compatibility/2006" xmlns:mv="urn:schemas-microsoft-com:mac:vml" xmlns:p="http://schemas.openxmlformats.org/presentationml/2006/main" xmlns:c="http://schemas.openxmlformats.org/drawingml/2006/chart" xmlns:dgm="http://schemas.openxmlformats.org/drawingml/2006/diagram" xmlns:o="urn:schemas-microsoft-com:office:office" xmlns:v="urn:schemas-microsoft-com:vml" xmlns:pvml="urn:schemas-microsoft-com:office:powerpoint" xmlns:com="http://schemas.openxmlformats.org/drawingml/2006/compatibility" xmlns:p14="http://schemas.microsoft.com/office/powerpoint/2010/main" xmlns:p15="http://schemas.microsoft.com/office/powerpoint/2012/main" xmlns:ahyp="http://schemas.microsoft.com/office/drawing/2018/hyperlinkcolor" matchingName="제목 및 내용" type="obj">
   <p:cSld name="OBJECT">
     <p:spTree>
       <p:nvGrpSpPr>
-        <p:cNvPr id="1" name="Shape 17"/>
+        <p:cNvPr id="17" name="Shape 17"/>
         <p:cNvGrpSpPr/>
         <p:nvPr/>
       </p:nvGrpSpPr>
@@ -3911,9 +3836,7 @@
       <p:sp>
         <p:nvSpPr>
           <p:cNvPr id="18" name="Google Shape;18;p4"/>
-          <p:cNvSpPr txBox="1">
-            <a:spLocks noGrp="1"/>
-          </p:cNvSpPr>
+          <p:cNvSpPr txBox="1"/>
           <p:nvPr>
             <p:ph type="title"/>
           </p:nvPr>
@@ -3932,7 +3855,7 @@
           </a:ln>
         </p:spPr>
         <p:txBody>
-          <a:bodyPr spcFirstLastPara="1" wrap="square" lIns="91425" tIns="45700" rIns="91425" bIns="45700" anchor="ctr" anchorCtr="0">
+          <a:bodyPr anchorCtr="0" anchor="ctr" bIns="45700" lIns="91425" spcFirstLastPara="1" rIns="91425" wrap="square" tIns="45700">
             <a:normAutofit/>
           </a:bodyPr>
           <a:lstStyle>
@@ -4066,19 +3989,15 @@
               <a:defRPr/>
             </a:lvl9pPr>
           </a:lstStyle>
-          <a:p>
-            <a:endParaRPr/>
-          </a:p>
+          <a:p/>
         </p:txBody>
       </p:sp>
       <p:sp>
         <p:nvSpPr>
           <p:cNvPr id="19" name="Google Shape;19;p4"/>
-          <p:cNvSpPr txBox="1">
-            <a:spLocks noGrp="1"/>
-          </p:cNvSpPr>
+          <p:cNvSpPr txBox="1"/>
           <p:nvPr>
-            <p:ph type="body" idx="1"/>
+            <p:ph idx="1" type="body"/>
           </p:nvPr>
         </p:nvSpPr>
         <p:spPr>
@@ -4095,11 +4014,11 @@
           </a:ln>
         </p:spPr>
         <p:txBody>
-          <a:bodyPr spcFirstLastPara="1" wrap="square" lIns="91425" tIns="45700" rIns="91425" bIns="45700" anchor="t" anchorCtr="0">
+          <a:bodyPr anchorCtr="0" anchor="t" bIns="45700" lIns="91425" spcFirstLastPara="1" rIns="91425" wrap="square" tIns="45700">
             <a:normAutofit/>
           </a:bodyPr>
           <a:lstStyle>
-            <a:lvl1pPr marL="457200" lvl="0" indent="-342900" algn="l">
+            <a:lvl1pPr indent="-342900" lvl="0" marL="457200" algn="l">
               <a:lnSpc>
                 <a:spcPct val="90000"/>
               </a:lnSpc>
@@ -4116,7 +4035,7 @@
               <a:buChar char="•"/>
               <a:defRPr/>
             </a:lvl1pPr>
-            <a:lvl2pPr marL="914400" lvl="1" indent="-342900" algn="l">
+            <a:lvl2pPr indent="-342900" lvl="1" marL="914400" algn="l">
               <a:lnSpc>
                 <a:spcPct val="90000"/>
               </a:lnSpc>
@@ -4133,7 +4052,7 @@
               <a:buChar char="•"/>
               <a:defRPr/>
             </a:lvl2pPr>
-            <a:lvl3pPr marL="1371600" lvl="2" indent="-342900" algn="l">
+            <a:lvl3pPr indent="-342900" lvl="2" marL="1371600" algn="l">
               <a:lnSpc>
                 <a:spcPct val="90000"/>
               </a:lnSpc>
@@ -4150,7 +4069,7 @@
               <a:buChar char="•"/>
               <a:defRPr/>
             </a:lvl3pPr>
-            <a:lvl4pPr marL="1828800" lvl="3" indent="-342900" algn="l">
+            <a:lvl4pPr indent="-342900" lvl="3" marL="1828800" algn="l">
               <a:lnSpc>
                 <a:spcPct val="90000"/>
               </a:lnSpc>
@@ -4167,7 +4086,7 @@
               <a:buChar char="•"/>
               <a:defRPr/>
             </a:lvl4pPr>
-            <a:lvl5pPr marL="2286000" lvl="4" indent="-342900" algn="l">
+            <a:lvl5pPr indent="-342900" lvl="4" marL="2286000" algn="l">
               <a:lnSpc>
                 <a:spcPct val="90000"/>
               </a:lnSpc>
@@ -4184,7 +4103,7 @@
               <a:buChar char="•"/>
               <a:defRPr/>
             </a:lvl5pPr>
-            <a:lvl6pPr marL="2743200" lvl="5" indent="-342900" algn="l">
+            <a:lvl6pPr indent="-342900" lvl="5" marL="2743200" algn="l">
               <a:lnSpc>
                 <a:spcPct val="90000"/>
               </a:lnSpc>
@@ -4201,7 +4120,7 @@
               <a:buChar char="•"/>
               <a:defRPr/>
             </a:lvl6pPr>
-            <a:lvl7pPr marL="3200400" lvl="6" indent="-342900" algn="l">
+            <a:lvl7pPr indent="-342900" lvl="6" marL="3200400" algn="l">
               <a:lnSpc>
                 <a:spcPct val="90000"/>
               </a:lnSpc>
@@ -4218,7 +4137,7 @@
               <a:buChar char="•"/>
               <a:defRPr/>
             </a:lvl7pPr>
-            <a:lvl8pPr marL="3657600" lvl="7" indent="-342900" algn="l">
+            <a:lvl8pPr indent="-342900" lvl="7" marL="3657600" algn="l">
               <a:lnSpc>
                 <a:spcPct val="90000"/>
               </a:lnSpc>
@@ -4235,7 +4154,7 @@
               <a:buChar char="•"/>
               <a:defRPr/>
             </a:lvl8pPr>
-            <a:lvl9pPr marL="4114800" lvl="8" indent="-342900" algn="l">
+            <a:lvl9pPr indent="-342900" lvl="8" marL="4114800" algn="l">
               <a:lnSpc>
                 <a:spcPct val="90000"/>
               </a:lnSpc>
@@ -4253,19 +4172,15 @@
               <a:defRPr/>
             </a:lvl9pPr>
           </a:lstStyle>
-          <a:p>
-            <a:endParaRPr/>
-          </a:p>
+          <a:p/>
         </p:txBody>
       </p:sp>
       <p:sp>
         <p:nvSpPr>
           <p:cNvPr id="20" name="Google Shape;20;p4"/>
-          <p:cNvSpPr txBox="1">
-            <a:spLocks noGrp="1"/>
-          </p:cNvSpPr>
+          <p:cNvSpPr txBox="1"/>
           <p:nvPr>
-            <p:ph type="dt" idx="10"/>
+            <p:ph idx="10" type="dt"/>
           </p:nvPr>
         </p:nvSpPr>
         <p:spPr>
@@ -4282,7 +4197,7 @@
           </a:ln>
         </p:spPr>
         <p:txBody>
-          <a:bodyPr spcFirstLastPara="1" wrap="square" lIns="91425" tIns="45700" rIns="91425" bIns="45700" anchor="ctr" anchorCtr="0">
+          <a:bodyPr anchorCtr="0" anchor="ctr" bIns="45700" lIns="91425" spcFirstLastPara="1" rIns="91425" wrap="square" tIns="45700">
             <a:noAutofit/>
           </a:bodyPr>
           <a:lstStyle>
@@ -4413,19 +4328,15 @@
               <a:defRPr/>
             </a:lvl9pPr>
           </a:lstStyle>
-          <a:p>
-            <a:endParaRPr/>
-          </a:p>
+          <a:p/>
         </p:txBody>
       </p:sp>
       <p:sp>
         <p:nvSpPr>
           <p:cNvPr id="21" name="Google Shape;21;p4"/>
-          <p:cNvSpPr txBox="1">
-            <a:spLocks noGrp="1"/>
-          </p:cNvSpPr>
+          <p:cNvSpPr txBox="1"/>
           <p:nvPr>
-            <p:ph type="ftr" idx="11"/>
+            <p:ph idx="11" type="ftr"/>
           </p:nvPr>
         </p:nvSpPr>
         <p:spPr>
@@ -4442,7 +4353,7 @@
           </a:ln>
         </p:spPr>
         <p:txBody>
-          <a:bodyPr spcFirstLastPara="1" wrap="square" lIns="91425" tIns="45700" rIns="91425" bIns="45700" anchor="ctr" anchorCtr="0">
+          <a:bodyPr anchorCtr="0" anchor="ctr" bIns="45700" lIns="91425" spcFirstLastPara="1" rIns="91425" wrap="square" tIns="45700">
             <a:noAutofit/>
           </a:bodyPr>
           <a:lstStyle>
@@ -4573,19 +4484,15 @@
               <a:defRPr/>
             </a:lvl9pPr>
           </a:lstStyle>
-          <a:p>
-            <a:endParaRPr/>
-          </a:p>
+          <a:p/>
         </p:txBody>
       </p:sp>
       <p:sp>
         <p:nvSpPr>
           <p:cNvPr id="22" name="Google Shape;22;p4"/>
-          <p:cNvSpPr txBox="1">
-            <a:spLocks noGrp="1"/>
-          </p:cNvSpPr>
+          <p:cNvSpPr txBox="1"/>
           <p:nvPr>
-            <p:ph type="sldNum" idx="12"/>
+            <p:ph idx="12" type="sldNum"/>
           </p:nvPr>
         </p:nvSpPr>
         <p:spPr>
@@ -4602,11 +4509,11 @@
           </a:ln>
         </p:spPr>
         <p:txBody>
-          <a:bodyPr spcFirstLastPara="1" wrap="square" lIns="91425" tIns="45700" rIns="91425" bIns="45700" anchor="ctr" anchorCtr="0">
+          <a:bodyPr anchorCtr="0" anchor="ctr" bIns="45700" lIns="91425" spcFirstLastPara="1" rIns="91425" wrap="square" tIns="45700">
             <a:noAutofit/>
           </a:bodyPr>
           <a:lstStyle>
-            <a:lvl1pPr marL="0" marR="0" lvl="0" indent="0" algn="r">
+            <a:lvl1pPr indent="0" lvl="0" marL="0" marR="0" algn="r">
               <a:lnSpc>
                 <a:spcPct val="100000"/>
               </a:lnSpc>
@@ -4622,7 +4529,7 @@
               <a:buSzPts val="900"/>
               <a:buFont typeface="Arial"/>
               <a:buNone/>
-              <a:defRPr sz="900" b="0" i="0" u="none" strike="noStrike" cap="none">
+              <a:defRPr b="0" i="0" sz="900" u="none" cap="none" strike="noStrike">
                 <a:solidFill>
                   <a:srgbClr val="757575"/>
                 </a:solidFill>
@@ -4632,7 +4539,7 @@
                 <a:sym typeface="Arial"/>
               </a:defRPr>
             </a:lvl1pPr>
-            <a:lvl2pPr marL="0" marR="0" lvl="1" indent="0" algn="r">
+            <a:lvl2pPr indent="0" lvl="1" marL="0" marR="0" algn="r">
               <a:lnSpc>
                 <a:spcPct val="100000"/>
               </a:lnSpc>
@@ -4648,7 +4555,7 @@
               <a:buSzPts val="900"/>
               <a:buFont typeface="Arial"/>
               <a:buNone/>
-              <a:defRPr sz="900" b="0" i="0" u="none" strike="noStrike" cap="none">
+              <a:defRPr b="0" i="0" sz="900" u="none" cap="none" strike="noStrike">
                 <a:solidFill>
                   <a:srgbClr val="757575"/>
                 </a:solidFill>
@@ -4658,7 +4565,7 @@
                 <a:sym typeface="Arial"/>
               </a:defRPr>
             </a:lvl2pPr>
-            <a:lvl3pPr marL="0" marR="0" lvl="2" indent="0" algn="r">
+            <a:lvl3pPr indent="0" lvl="2" marL="0" marR="0" algn="r">
               <a:lnSpc>
                 <a:spcPct val="100000"/>
               </a:lnSpc>
@@ -4674,7 +4581,7 @@
               <a:buSzPts val="900"/>
               <a:buFont typeface="Arial"/>
               <a:buNone/>
-              <a:defRPr sz="900" b="0" i="0" u="none" strike="noStrike" cap="none">
+              <a:defRPr b="0" i="0" sz="900" u="none" cap="none" strike="noStrike">
                 <a:solidFill>
                   <a:srgbClr val="757575"/>
                 </a:solidFill>
@@ -4684,7 +4591,7 @@
                 <a:sym typeface="Arial"/>
               </a:defRPr>
             </a:lvl3pPr>
-            <a:lvl4pPr marL="0" marR="0" lvl="3" indent="0" algn="r">
+            <a:lvl4pPr indent="0" lvl="3" marL="0" marR="0" algn="r">
               <a:lnSpc>
                 <a:spcPct val="100000"/>
               </a:lnSpc>
@@ -4700,7 +4607,7 @@
               <a:buSzPts val="900"/>
               <a:buFont typeface="Arial"/>
               <a:buNone/>
-              <a:defRPr sz="900" b="0" i="0" u="none" strike="noStrike" cap="none">
+              <a:defRPr b="0" i="0" sz="900" u="none" cap="none" strike="noStrike">
                 <a:solidFill>
                   <a:srgbClr val="757575"/>
                 </a:solidFill>
@@ -4710,7 +4617,7 @@
                 <a:sym typeface="Arial"/>
               </a:defRPr>
             </a:lvl4pPr>
-            <a:lvl5pPr marL="0" marR="0" lvl="4" indent="0" algn="r">
+            <a:lvl5pPr indent="0" lvl="4" marL="0" marR="0" algn="r">
               <a:lnSpc>
                 <a:spcPct val="100000"/>
               </a:lnSpc>
@@ -4726,7 +4633,7 @@
               <a:buSzPts val="900"/>
               <a:buFont typeface="Arial"/>
               <a:buNone/>
-              <a:defRPr sz="900" b="0" i="0" u="none" strike="noStrike" cap="none">
+              <a:defRPr b="0" i="0" sz="900" u="none" cap="none" strike="noStrike">
                 <a:solidFill>
                   <a:srgbClr val="757575"/>
                 </a:solidFill>
@@ -4736,7 +4643,7 @@
                 <a:sym typeface="Arial"/>
               </a:defRPr>
             </a:lvl5pPr>
-            <a:lvl6pPr marL="0" marR="0" lvl="5" indent="0" algn="r">
+            <a:lvl6pPr indent="0" lvl="5" marL="0" marR="0" algn="r">
               <a:lnSpc>
                 <a:spcPct val="100000"/>
               </a:lnSpc>
@@ -4752,7 +4659,7 @@
               <a:buSzPts val="900"/>
               <a:buFont typeface="Arial"/>
               <a:buNone/>
-              <a:defRPr sz="900" b="0" i="0" u="none" strike="noStrike" cap="none">
+              <a:defRPr b="0" i="0" sz="900" u="none" cap="none" strike="noStrike">
                 <a:solidFill>
                   <a:srgbClr val="757575"/>
                 </a:solidFill>
@@ -4762,7 +4669,7 @@
                 <a:sym typeface="Arial"/>
               </a:defRPr>
             </a:lvl6pPr>
-            <a:lvl7pPr marL="0" marR="0" lvl="6" indent="0" algn="r">
+            <a:lvl7pPr indent="0" lvl="6" marL="0" marR="0" algn="r">
               <a:lnSpc>
                 <a:spcPct val="100000"/>
               </a:lnSpc>
@@ -4778,7 +4685,7 @@
               <a:buSzPts val="900"/>
               <a:buFont typeface="Arial"/>
               <a:buNone/>
-              <a:defRPr sz="900" b="0" i="0" u="none" strike="noStrike" cap="none">
+              <a:defRPr b="0" i="0" sz="900" u="none" cap="none" strike="noStrike">
                 <a:solidFill>
                   <a:srgbClr val="757575"/>
                 </a:solidFill>
@@ -4788,7 +4695,7 @@
                 <a:sym typeface="Arial"/>
               </a:defRPr>
             </a:lvl7pPr>
-            <a:lvl8pPr marL="0" marR="0" lvl="7" indent="0" algn="r">
+            <a:lvl8pPr indent="0" lvl="7" marL="0" marR="0" algn="r">
               <a:lnSpc>
                 <a:spcPct val="100000"/>
               </a:lnSpc>
@@ -4804,7 +4711,7 @@
               <a:buSzPts val="900"/>
               <a:buFont typeface="Arial"/>
               <a:buNone/>
-              <a:defRPr sz="900" b="0" i="0" u="none" strike="noStrike" cap="none">
+              <a:defRPr b="0" i="0" sz="900" u="none" cap="none" strike="noStrike">
                 <a:solidFill>
                   <a:srgbClr val="757575"/>
                 </a:solidFill>
@@ -4814,7 +4721,7 @@
                 <a:sym typeface="Arial"/>
               </a:defRPr>
             </a:lvl8pPr>
-            <a:lvl9pPr marL="0" marR="0" lvl="8" indent="0" algn="r">
+            <a:lvl9pPr indent="0" lvl="8" marL="0" marR="0" algn="r">
               <a:lnSpc>
                 <a:spcPct val="100000"/>
               </a:lnSpc>
@@ -4830,7 +4737,7 @@
               <a:buSzPts val="900"/>
               <a:buFont typeface="Arial"/>
               <a:buNone/>
-              <a:defRPr sz="900" b="0" i="0" u="none" strike="noStrike" cap="none">
+              <a:defRPr b="0" i="0" sz="900" u="none" cap="none" strike="noStrike">
                 <a:solidFill>
                   <a:srgbClr val="757575"/>
                 </a:solidFill>
@@ -4842,7 +4749,7 @@
             </a:lvl9pPr>
           </a:lstStyle>
           <a:p>
-            <a:pPr marL="0" lvl="0" indent="0" algn="r" rtl="0">
+            <a:pPr indent="0" lvl="0" marL="0" rtl="0" algn="r">
               <a:spcBef>
                 <a:spcPts val="0"/>
               </a:spcBef>
@@ -4868,11 +4775,11 @@
 </file>
 
 <file path=ppt/slideLayouts/slideLayout3.xml><?xml version="1.0" encoding="utf-8"?>
-<p:sldLayout xmlns:a="http://schemas.openxmlformats.org/drawingml/2006/main" xmlns:r="http://schemas.openxmlformats.org/officeDocument/2006/relationships" xmlns:p="http://schemas.openxmlformats.org/presentationml/2006/main" matchingName="구역 머리글" type="secHead">
+<p:sldLayout xmlns:a="http://schemas.openxmlformats.org/drawingml/2006/main" xmlns:r="http://schemas.openxmlformats.org/officeDocument/2006/relationships" xmlns:mc="http://schemas.openxmlformats.org/markup-compatibility/2006" xmlns:mv="urn:schemas-microsoft-com:mac:vml" xmlns:p="http://schemas.openxmlformats.org/presentationml/2006/main" xmlns:c="http://schemas.openxmlformats.org/drawingml/2006/chart" xmlns:dgm="http://schemas.openxmlformats.org/drawingml/2006/diagram" xmlns:o="urn:schemas-microsoft-com:office:office" xmlns:v="urn:schemas-microsoft-com:vml" xmlns:pvml="urn:schemas-microsoft-com:office:powerpoint" xmlns:com="http://schemas.openxmlformats.org/drawingml/2006/compatibility" xmlns:p14="http://schemas.microsoft.com/office/powerpoint/2010/main" xmlns:p15="http://schemas.microsoft.com/office/powerpoint/2012/main" xmlns:ahyp="http://schemas.microsoft.com/office/drawing/2018/hyperlinkcolor" matchingName="구역 머리글" type="secHead">
   <p:cSld name="SECTION_HEADER">
     <p:spTree>
       <p:nvGrpSpPr>
-        <p:cNvPr id="1" name="Shape 23"/>
+        <p:cNvPr id="23" name="Shape 23"/>
         <p:cNvGrpSpPr/>
         <p:nvPr/>
       </p:nvGrpSpPr>
@@ -4887,9 +4794,7 @@
       <p:sp>
         <p:nvSpPr>
           <p:cNvPr id="24" name="Google Shape;24;p5"/>
-          <p:cNvSpPr txBox="1">
-            <a:spLocks noGrp="1"/>
-          </p:cNvSpPr>
+          <p:cNvSpPr txBox="1"/>
           <p:nvPr>
             <p:ph type="title"/>
           </p:nvPr>
@@ -4908,7 +4813,7 @@
           </a:ln>
         </p:spPr>
         <p:txBody>
-          <a:bodyPr spcFirstLastPara="1" wrap="square" lIns="91425" tIns="45700" rIns="91425" bIns="45700" anchor="b" anchorCtr="0">
+          <a:bodyPr anchorCtr="0" anchor="b" bIns="45700" lIns="91425" spcFirstLastPara="1" rIns="91425" wrap="square" tIns="45700">
             <a:normAutofit/>
           </a:bodyPr>
           <a:lstStyle>
@@ -5043,19 +4948,15 @@
               <a:defRPr/>
             </a:lvl9pPr>
           </a:lstStyle>
-          <a:p>
-            <a:endParaRPr/>
-          </a:p>
+          <a:p/>
         </p:txBody>
       </p:sp>
       <p:sp>
         <p:nvSpPr>
           <p:cNvPr id="25" name="Google Shape;25;p5"/>
-          <p:cNvSpPr txBox="1">
-            <a:spLocks noGrp="1"/>
-          </p:cNvSpPr>
+          <p:cNvSpPr txBox="1"/>
           <p:nvPr>
-            <p:ph type="body" idx="1"/>
+            <p:ph idx="1" type="body"/>
           </p:nvPr>
         </p:nvSpPr>
         <p:spPr>
@@ -5072,11 +4973,11 @@
           </a:ln>
         </p:spPr>
         <p:txBody>
-          <a:bodyPr spcFirstLastPara="1" wrap="square" lIns="91425" tIns="45700" rIns="91425" bIns="45700" anchor="t" anchorCtr="0">
+          <a:bodyPr anchorCtr="0" anchor="t" bIns="45700" lIns="91425" spcFirstLastPara="1" rIns="91425" wrap="square" tIns="45700">
             <a:normAutofit/>
           </a:bodyPr>
           <a:lstStyle>
-            <a:lvl1pPr marL="457200" lvl="0" indent="-228600" algn="l">
+            <a:lvl1pPr indent="-228600" lvl="0" marL="457200" algn="l">
               <a:lnSpc>
                 <a:spcPct val="90000"/>
               </a:lnSpc>
@@ -5097,7 +4998,7 @@
                 </a:solidFill>
               </a:defRPr>
             </a:lvl1pPr>
-            <a:lvl2pPr marL="914400" lvl="1" indent="-228600" algn="l">
+            <a:lvl2pPr indent="-228600" lvl="1" marL="914400" algn="l">
               <a:lnSpc>
                 <a:spcPct val="90000"/>
               </a:lnSpc>
@@ -5118,7 +5019,7 @@
                 </a:solidFill>
               </a:defRPr>
             </a:lvl2pPr>
-            <a:lvl3pPr marL="1371600" lvl="2" indent="-228600" algn="l">
+            <a:lvl3pPr indent="-228600" lvl="2" marL="1371600" algn="l">
               <a:lnSpc>
                 <a:spcPct val="90000"/>
               </a:lnSpc>
@@ -5139,7 +5040,7 @@
                 </a:solidFill>
               </a:defRPr>
             </a:lvl3pPr>
-            <a:lvl4pPr marL="1828800" lvl="3" indent="-228600" algn="l">
+            <a:lvl4pPr indent="-228600" lvl="3" marL="1828800" algn="l">
               <a:lnSpc>
                 <a:spcPct val="90000"/>
               </a:lnSpc>
@@ -5160,7 +5061,7 @@
                 </a:solidFill>
               </a:defRPr>
             </a:lvl4pPr>
-            <a:lvl5pPr marL="2286000" lvl="4" indent="-228600" algn="l">
+            <a:lvl5pPr indent="-228600" lvl="4" marL="2286000" algn="l">
               <a:lnSpc>
                 <a:spcPct val="90000"/>
               </a:lnSpc>
@@ -5181,7 +5082,7 @@
                 </a:solidFill>
               </a:defRPr>
             </a:lvl5pPr>
-            <a:lvl6pPr marL="2743200" lvl="5" indent="-228600" algn="l">
+            <a:lvl6pPr indent="-228600" lvl="5" marL="2743200" algn="l">
               <a:lnSpc>
                 <a:spcPct val="90000"/>
               </a:lnSpc>
@@ -5202,7 +5103,7 @@
                 </a:solidFill>
               </a:defRPr>
             </a:lvl6pPr>
-            <a:lvl7pPr marL="3200400" lvl="6" indent="-228600" algn="l">
+            <a:lvl7pPr indent="-228600" lvl="6" marL="3200400" algn="l">
               <a:lnSpc>
                 <a:spcPct val="90000"/>
               </a:lnSpc>
@@ -5223,7 +5124,7 @@
                 </a:solidFill>
               </a:defRPr>
             </a:lvl7pPr>
-            <a:lvl8pPr marL="3657600" lvl="7" indent="-228600" algn="l">
+            <a:lvl8pPr indent="-228600" lvl="7" marL="3657600" algn="l">
               <a:lnSpc>
                 <a:spcPct val="90000"/>
               </a:lnSpc>
@@ -5244,7 +5145,7 @@
                 </a:solidFill>
               </a:defRPr>
             </a:lvl8pPr>
-            <a:lvl9pPr marL="4114800" lvl="8" indent="-228600" algn="l">
+            <a:lvl9pPr indent="-228600" lvl="8" marL="4114800" algn="l">
               <a:lnSpc>
                 <a:spcPct val="90000"/>
               </a:lnSpc>
@@ -5266,19 +5167,15 @@
               </a:defRPr>
             </a:lvl9pPr>
           </a:lstStyle>
-          <a:p>
-            <a:endParaRPr/>
-          </a:p>
+          <a:p/>
         </p:txBody>
       </p:sp>
       <p:sp>
         <p:nvSpPr>
           <p:cNvPr id="26" name="Google Shape;26;p5"/>
-          <p:cNvSpPr txBox="1">
-            <a:spLocks noGrp="1"/>
-          </p:cNvSpPr>
+          <p:cNvSpPr txBox="1"/>
           <p:nvPr>
-            <p:ph type="dt" idx="10"/>
+            <p:ph idx="10" type="dt"/>
           </p:nvPr>
         </p:nvSpPr>
         <p:spPr>
@@ -5295,7 +5192,7 @@
           </a:ln>
         </p:spPr>
         <p:txBody>
-          <a:bodyPr spcFirstLastPara="1" wrap="square" lIns="91425" tIns="45700" rIns="91425" bIns="45700" anchor="ctr" anchorCtr="0">
+          <a:bodyPr anchorCtr="0" anchor="ctr" bIns="45700" lIns="91425" spcFirstLastPara="1" rIns="91425" wrap="square" tIns="45700">
             <a:noAutofit/>
           </a:bodyPr>
           <a:lstStyle>
@@ -5426,19 +5323,15 @@
               <a:defRPr/>
             </a:lvl9pPr>
           </a:lstStyle>
-          <a:p>
-            <a:endParaRPr/>
-          </a:p>
+          <a:p/>
         </p:txBody>
       </p:sp>
       <p:sp>
         <p:nvSpPr>
           <p:cNvPr id="27" name="Google Shape;27;p5"/>
-          <p:cNvSpPr txBox="1">
-            <a:spLocks noGrp="1"/>
-          </p:cNvSpPr>
+          <p:cNvSpPr txBox="1"/>
           <p:nvPr>
-            <p:ph type="ftr" idx="11"/>
+            <p:ph idx="11" type="ftr"/>
           </p:nvPr>
         </p:nvSpPr>
         <p:spPr>
@@ -5455,7 +5348,7 @@
           </a:ln>
         </p:spPr>
         <p:txBody>
-          <a:bodyPr spcFirstLastPara="1" wrap="square" lIns="91425" tIns="45700" rIns="91425" bIns="45700" anchor="ctr" anchorCtr="0">
+          <a:bodyPr anchorCtr="0" anchor="ctr" bIns="45700" lIns="91425" spcFirstLastPara="1" rIns="91425" wrap="square" tIns="45700">
             <a:noAutofit/>
           </a:bodyPr>
           <a:lstStyle>
@@ -5586,19 +5479,15 @@
               <a:defRPr/>
             </a:lvl9pPr>
           </a:lstStyle>
-          <a:p>
-            <a:endParaRPr/>
-          </a:p>
+          <a:p/>
         </p:txBody>
       </p:sp>
       <p:sp>
         <p:nvSpPr>
           <p:cNvPr id="28" name="Google Shape;28;p5"/>
-          <p:cNvSpPr txBox="1">
-            <a:spLocks noGrp="1"/>
-          </p:cNvSpPr>
+          <p:cNvSpPr txBox="1"/>
           <p:nvPr>
-            <p:ph type="sldNum" idx="12"/>
+            <p:ph idx="12" type="sldNum"/>
           </p:nvPr>
         </p:nvSpPr>
         <p:spPr>
@@ -5615,11 +5504,11 @@
           </a:ln>
         </p:spPr>
         <p:txBody>
-          <a:bodyPr spcFirstLastPara="1" wrap="square" lIns="91425" tIns="45700" rIns="91425" bIns="45700" anchor="ctr" anchorCtr="0">
+          <a:bodyPr anchorCtr="0" anchor="ctr" bIns="45700" lIns="91425" spcFirstLastPara="1" rIns="91425" wrap="square" tIns="45700">
             <a:noAutofit/>
           </a:bodyPr>
           <a:lstStyle>
-            <a:lvl1pPr marL="0" marR="0" lvl="0" indent="0" algn="r">
+            <a:lvl1pPr indent="0" lvl="0" marL="0" marR="0" algn="r">
               <a:lnSpc>
                 <a:spcPct val="100000"/>
               </a:lnSpc>
@@ -5635,7 +5524,7 @@
               <a:buSzPts val="900"/>
               <a:buFont typeface="Arial"/>
               <a:buNone/>
-              <a:defRPr sz="900" b="0" i="0" u="none" strike="noStrike" cap="none">
+              <a:defRPr b="0" i="0" sz="900" u="none" cap="none" strike="noStrike">
                 <a:solidFill>
                   <a:srgbClr val="757575"/>
                 </a:solidFill>
@@ -5645,7 +5534,7 @@
                 <a:sym typeface="Arial"/>
               </a:defRPr>
             </a:lvl1pPr>
-            <a:lvl2pPr marL="0" marR="0" lvl="1" indent="0" algn="r">
+            <a:lvl2pPr indent="0" lvl="1" marL="0" marR="0" algn="r">
               <a:lnSpc>
                 <a:spcPct val="100000"/>
               </a:lnSpc>
@@ -5661,7 +5550,7 @@
               <a:buSzPts val="900"/>
               <a:buFont typeface="Arial"/>
               <a:buNone/>
-              <a:defRPr sz="900" b="0" i="0" u="none" strike="noStrike" cap="none">
+              <a:defRPr b="0" i="0" sz="900" u="none" cap="none" strike="noStrike">
                 <a:solidFill>
                   <a:srgbClr val="757575"/>
                 </a:solidFill>
@@ -5671,7 +5560,7 @@
                 <a:sym typeface="Arial"/>
               </a:defRPr>
             </a:lvl2pPr>
-            <a:lvl3pPr marL="0" marR="0" lvl="2" indent="0" algn="r">
+            <a:lvl3pPr indent="0" lvl="2" marL="0" marR="0" algn="r">
               <a:lnSpc>
                 <a:spcPct val="100000"/>
               </a:lnSpc>
@@ -5687,7 +5576,7 @@
               <a:buSzPts val="900"/>
               <a:buFont typeface="Arial"/>
               <a:buNone/>
-              <a:defRPr sz="900" b="0" i="0" u="none" strike="noStrike" cap="none">
+              <a:defRPr b="0" i="0" sz="900" u="none" cap="none" strike="noStrike">
                 <a:solidFill>
                   <a:srgbClr val="757575"/>
                 </a:solidFill>
@@ -5697,7 +5586,7 @@
                 <a:sym typeface="Arial"/>
               </a:defRPr>
             </a:lvl3pPr>
-            <a:lvl4pPr marL="0" marR="0" lvl="3" indent="0" algn="r">
+            <a:lvl4pPr indent="0" lvl="3" marL="0" marR="0" algn="r">
               <a:lnSpc>
                 <a:spcPct val="100000"/>
               </a:lnSpc>
@@ -5713,7 +5602,7 @@
               <a:buSzPts val="900"/>
               <a:buFont typeface="Arial"/>
               <a:buNone/>
-              <a:defRPr sz="900" b="0" i="0" u="none" strike="noStrike" cap="none">
+              <a:defRPr b="0" i="0" sz="900" u="none" cap="none" strike="noStrike">
                 <a:solidFill>
                   <a:srgbClr val="757575"/>
                 </a:solidFill>
@@ -5723,7 +5612,7 @@
                 <a:sym typeface="Arial"/>
               </a:defRPr>
             </a:lvl4pPr>
-            <a:lvl5pPr marL="0" marR="0" lvl="4" indent="0" algn="r">
+            <a:lvl5pPr indent="0" lvl="4" marL="0" marR="0" algn="r">
               <a:lnSpc>
                 <a:spcPct val="100000"/>
               </a:lnSpc>
@@ -5739,7 +5628,7 @@
               <a:buSzPts val="900"/>
               <a:buFont typeface="Arial"/>
               <a:buNone/>
-              <a:defRPr sz="900" b="0" i="0" u="none" strike="noStrike" cap="none">
+              <a:defRPr b="0" i="0" sz="900" u="none" cap="none" strike="noStrike">
                 <a:solidFill>
                   <a:srgbClr val="757575"/>
                 </a:solidFill>
@@ -5749,7 +5638,7 @@
                 <a:sym typeface="Arial"/>
               </a:defRPr>
             </a:lvl5pPr>
-            <a:lvl6pPr marL="0" marR="0" lvl="5" indent="0" algn="r">
+            <a:lvl6pPr indent="0" lvl="5" marL="0" marR="0" algn="r">
               <a:lnSpc>
                 <a:spcPct val="100000"/>
               </a:lnSpc>
@@ -5765,7 +5654,7 @@
               <a:buSzPts val="900"/>
               <a:buFont typeface="Arial"/>
               <a:buNone/>
-              <a:defRPr sz="900" b="0" i="0" u="none" strike="noStrike" cap="none">
+              <a:defRPr b="0" i="0" sz="900" u="none" cap="none" strike="noStrike">
                 <a:solidFill>
                   <a:srgbClr val="757575"/>
                 </a:solidFill>
@@ -5775,7 +5664,7 @@
                 <a:sym typeface="Arial"/>
               </a:defRPr>
             </a:lvl6pPr>
-            <a:lvl7pPr marL="0" marR="0" lvl="6" indent="0" algn="r">
+            <a:lvl7pPr indent="0" lvl="6" marL="0" marR="0" algn="r">
               <a:lnSpc>
                 <a:spcPct val="100000"/>
               </a:lnSpc>
@@ -5791,7 +5680,7 @@
               <a:buSzPts val="900"/>
               <a:buFont typeface="Arial"/>
               <a:buNone/>
-              <a:defRPr sz="900" b="0" i="0" u="none" strike="noStrike" cap="none">
+              <a:defRPr b="0" i="0" sz="900" u="none" cap="none" strike="noStrike">
                 <a:solidFill>
                   <a:srgbClr val="757575"/>
                 </a:solidFill>
@@ -5801,7 +5690,7 @@
                 <a:sym typeface="Arial"/>
               </a:defRPr>
             </a:lvl7pPr>
-            <a:lvl8pPr marL="0" marR="0" lvl="7" indent="0" algn="r">
+            <a:lvl8pPr indent="0" lvl="7" marL="0" marR="0" algn="r">
               <a:lnSpc>
                 <a:spcPct val="100000"/>
               </a:lnSpc>
@@ -5817,7 +5706,7 @@
               <a:buSzPts val="900"/>
               <a:buFont typeface="Arial"/>
               <a:buNone/>
-              <a:defRPr sz="900" b="0" i="0" u="none" strike="noStrike" cap="none">
+              <a:defRPr b="0" i="0" sz="900" u="none" cap="none" strike="noStrike">
                 <a:solidFill>
                   <a:srgbClr val="757575"/>
                 </a:solidFill>
@@ -5827,7 +5716,7 @@
                 <a:sym typeface="Arial"/>
               </a:defRPr>
             </a:lvl8pPr>
-            <a:lvl9pPr marL="0" marR="0" lvl="8" indent="0" algn="r">
+            <a:lvl9pPr indent="0" lvl="8" marL="0" marR="0" algn="r">
               <a:lnSpc>
                 <a:spcPct val="100000"/>
               </a:lnSpc>
@@ -5843,7 +5732,7 @@
               <a:buSzPts val="900"/>
               <a:buFont typeface="Arial"/>
               <a:buNone/>
-              <a:defRPr sz="900" b="0" i="0" u="none" strike="noStrike" cap="none">
+              <a:defRPr b="0" i="0" sz="900" u="none" cap="none" strike="noStrike">
                 <a:solidFill>
                   <a:srgbClr val="757575"/>
                 </a:solidFill>
@@ -5855,7 +5744,7 @@
             </a:lvl9pPr>
           </a:lstStyle>
           <a:p>
-            <a:pPr marL="0" lvl="0" indent="0" algn="r" rtl="0">
+            <a:pPr indent="0" lvl="0" marL="0" rtl="0" algn="r">
               <a:spcBef>
                 <a:spcPts val="0"/>
               </a:spcBef>
@@ -5881,11 +5770,11 @@
 </file>
 
 <file path=ppt/slideLayouts/slideLayout4.xml><?xml version="1.0" encoding="utf-8"?>
-<p:sldLayout xmlns:a="http://schemas.openxmlformats.org/drawingml/2006/main" xmlns:r="http://schemas.openxmlformats.org/officeDocument/2006/relationships" xmlns:p="http://schemas.openxmlformats.org/presentationml/2006/main" matchingName="콘텐츠 2개" type="twoObj">
+<p:sldLayout xmlns:a="http://schemas.openxmlformats.org/drawingml/2006/main" xmlns:r="http://schemas.openxmlformats.org/officeDocument/2006/relationships" xmlns:mc="http://schemas.openxmlformats.org/markup-compatibility/2006" xmlns:mv="urn:schemas-microsoft-com:mac:vml" xmlns:p="http://schemas.openxmlformats.org/presentationml/2006/main" xmlns:c="http://schemas.openxmlformats.org/drawingml/2006/chart" xmlns:dgm="http://schemas.openxmlformats.org/drawingml/2006/diagram" xmlns:o="urn:schemas-microsoft-com:office:office" xmlns:v="urn:schemas-microsoft-com:vml" xmlns:pvml="urn:schemas-microsoft-com:office:powerpoint" xmlns:com="http://schemas.openxmlformats.org/drawingml/2006/compatibility" xmlns:p14="http://schemas.microsoft.com/office/powerpoint/2010/main" xmlns:p15="http://schemas.microsoft.com/office/powerpoint/2012/main" xmlns:ahyp="http://schemas.microsoft.com/office/drawing/2018/hyperlinkcolor" matchingName="콘텐츠 2개" type="twoObj">
   <p:cSld name="TWO_OBJECTS">
     <p:spTree>
       <p:nvGrpSpPr>
-        <p:cNvPr id="1" name="Shape 29"/>
+        <p:cNvPr id="29" name="Shape 29"/>
         <p:cNvGrpSpPr/>
         <p:nvPr/>
       </p:nvGrpSpPr>
@@ -5900,9 +5789,7 @@
       <p:sp>
         <p:nvSpPr>
           <p:cNvPr id="30" name="Google Shape;30;p6"/>
-          <p:cNvSpPr txBox="1">
-            <a:spLocks noGrp="1"/>
-          </p:cNvSpPr>
+          <p:cNvSpPr txBox="1"/>
           <p:nvPr>
             <p:ph type="title"/>
           </p:nvPr>
@@ -5921,7 +5808,7 @@
           </a:ln>
         </p:spPr>
         <p:txBody>
-          <a:bodyPr spcFirstLastPara="1" wrap="square" lIns="91425" tIns="45700" rIns="91425" bIns="45700" anchor="ctr" anchorCtr="0">
+          <a:bodyPr anchorCtr="0" anchor="ctr" bIns="45700" lIns="91425" spcFirstLastPara="1" rIns="91425" wrap="square" tIns="45700">
             <a:normAutofit/>
           </a:bodyPr>
           <a:lstStyle>
@@ -6055,19 +5942,15 @@
               <a:defRPr/>
             </a:lvl9pPr>
           </a:lstStyle>
-          <a:p>
-            <a:endParaRPr/>
-          </a:p>
+          <a:p/>
         </p:txBody>
       </p:sp>
       <p:sp>
         <p:nvSpPr>
           <p:cNvPr id="31" name="Google Shape;31;p6"/>
-          <p:cNvSpPr txBox="1">
-            <a:spLocks noGrp="1"/>
-          </p:cNvSpPr>
+          <p:cNvSpPr txBox="1"/>
           <p:nvPr>
-            <p:ph type="body" idx="1"/>
+            <p:ph idx="1" type="body"/>
           </p:nvPr>
         </p:nvSpPr>
         <p:spPr>
@@ -6084,11 +5967,11 @@
           </a:ln>
         </p:spPr>
         <p:txBody>
-          <a:bodyPr spcFirstLastPara="1" wrap="square" lIns="91425" tIns="45700" rIns="91425" bIns="45700" anchor="t" anchorCtr="0">
+          <a:bodyPr anchorCtr="0" anchor="t" bIns="45700" lIns="91425" spcFirstLastPara="1" rIns="91425" wrap="square" tIns="45700">
             <a:normAutofit/>
           </a:bodyPr>
           <a:lstStyle>
-            <a:lvl1pPr marL="457200" lvl="0" indent="-342900" algn="l">
+            <a:lvl1pPr indent="-342900" lvl="0" marL="457200" algn="l">
               <a:lnSpc>
                 <a:spcPct val="90000"/>
               </a:lnSpc>
@@ -6105,7 +5988,7 @@
               <a:buChar char="•"/>
               <a:defRPr/>
             </a:lvl1pPr>
-            <a:lvl2pPr marL="914400" lvl="1" indent="-342900" algn="l">
+            <a:lvl2pPr indent="-342900" lvl="1" marL="914400" algn="l">
               <a:lnSpc>
                 <a:spcPct val="90000"/>
               </a:lnSpc>
@@ -6122,7 +6005,7 @@
               <a:buChar char="•"/>
               <a:defRPr/>
             </a:lvl2pPr>
-            <a:lvl3pPr marL="1371600" lvl="2" indent="-342900" algn="l">
+            <a:lvl3pPr indent="-342900" lvl="2" marL="1371600" algn="l">
               <a:lnSpc>
                 <a:spcPct val="90000"/>
               </a:lnSpc>
@@ -6139,7 +6022,7 @@
               <a:buChar char="•"/>
               <a:defRPr/>
             </a:lvl3pPr>
-            <a:lvl4pPr marL="1828800" lvl="3" indent="-342900" algn="l">
+            <a:lvl4pPr indent="-342900" lvl="3" marL="1828800" algn="l">
               <a:lnSpc>
                 <a:spcPct val="90000"/>
               </a:lnSpc>
@@ -6156,7 +6039,7 @@
               <a:buChar char="•"/>
               <a:defRPr/>
             </a:lvl4pPr>
-            <a:lvl5pPr marL="2286000" lvl="4" indent="-342900" algn="l">
+            <a:lvl5pPr indent="-342900" lvl="4" marL="2286000" algn="l">
               <a:lnSpc>
                 <a:spcPct val="90000"/>
               </a:lnSpc>
@@ -6173,7 +6056,7 @@
               <a:buChar char="•"/>
               <a:defRPr/>
             </a:lvl5pPr>
-            <a:lvl6pPr marL="2743200" lvl="5" indent="-342900" algn="l">
+            <a:lvl6pPr indent="-342900" lvl="5" marL="2743200" algn="l">
               <a:lnSpc>
                 <a:spcPct val="90000"/>
               </a:lnSpc>
@@ -6190,7 +6073,7 @@
               <a:buChar char="•"/>
               <a:defRPr/>
             </a:lvl6pPr>
-            <a:lvl7pPr marL="3200400" lvl="6" indent="-342900" algn="l">
+            <a:lvl7pPr indent="-342900" lvl="6" marL="3200400" algn="l">
               <a:lnSpc>
                 <a:spcPct val="90000"/>
               </a:lnSpc>
@@ -6207,7 +6090,7 @@
               <a:buChar char="•"/>
               <a:defRPr/>
             </a:lvl7pPr>
-            <a:lvl8pPr marL="3657600" lvl="7" indent="-342900" algn="l">
+            <a:lvl8pPr indent="-342900" lvl="7" marL="3657600" algn="l">
               <a:lnSpc>
                 <a:spcPct val="90000"/>
               </a:lnSpc>
@@ -6224,7 +6107,7 @@
               <a:buChar char="•"/>
               <a:defRPr/>
             </a:lvl8pPr>
-            <a:lvl9pPr marL="4114800" lvl="8" indent="-342900" algn="l">
+            <a:lvl9pPr indent="-342900" lvl="8" marL="4114800" algn="l">
               <a:lnSpc>
                 <a:spcPct val="90000"/>
               </a:lnSpc>
@@ -6242,19 +6125,15 @@
               <a:defRPr/>
             </a:lvl9pPr>
           </a:lstStyle>
-          <a:p>
-            <a:endParaRPr/>
-          </a:p>
+          <a:p/>
         </p:txBody>
       </p:sp>
       <p:sp>
         <p:nvSpPr>
           <p:cNvPr id="32" name="Google Shape;32;p6"/>
-          <p:cNvSpPr txBox="1">
-            <a:spLocks noGrp="1"/>
-          </p:cNvSpPr>
+          <p:cNvSpPr txBox="1"/>
           <p:nvPr>
-            <p:ph type="body" idx="2"/>
+            <p:ph idx="2" type="body"/>
           </p:nvPr>
         </p:nvSpPr>
         <p:spPr>
@@ -6271,11 +6150,11 @@
           </a:ln>
         </p:spPr>
         <p:txBody>
-          <a:bodyPr spcFirstLastPara="1" wrap="square" lIns="91425" tIns="45700" rIns="91425" bIns="45700" anchor="t" anchorCtr="0">
+          <a:bodyPr anchorCtr="0" anchor="t" bIns="45700" lIns="91425" spcFirstLastPara="1" rIns="91425" wrap="square" tIns="45700">
             <a:normAutofit/>
           </a:bodyPr>
           <a:lstStyle>
-            <a:lvl1pPr marL="457200" lvl="0" indent="-342900" algn="l">
+            <a:lvl1pPr indent="-342900" lvl="0" marL="457200" algn="l">
               <a:lnSpc>
                 <a:spcPct val="90000"/>
               </a:lnSpc>
@@ -6292,7 +6171,7 @@
               <a:buChar char="•"/>
               <a:defRPr/>
             </a:lvl1pPr>
-            <a:lvl2pPr marL="914400" lvl="1" indent="-342900" algn="l">
+            <a:lvl2pPr indent="-342900" lvl="1" marL="914400" algn="l">
               <a:lnSpc>
                 <a:spcPct val="90000"/>
               </a:lnSpc>
@@ -6309,7 +6188,7 @@
               <a:buChar char="•"/>
               <a:defRPr/>
             </a:lvl2pPr>
-            <a:lvl3pPr marL="1371600" lvl="2" indent="-342900" algn="l">
+            <a:lvl3pPr indent="-342900" lvl="2" marL="1371600" algn="l">
               <a:lnSpc>
                 <a:spcPct val="90000"/>
               </a:lnSpc>
@@ -6326,7 +6205,7 @@
               <a:buChar char="•"/>
               <a:defRPr/>
             </a:lvl3pPr>
-            <a:lvl4pPr marL="1828800" lvl="3" indent="-342900" algn="l">
+            <a:lvl4pPr indent="-342900" lvl="3" marL="1828800" algn="l">
               <a:lnSpc>
                 <a:spcPct val="90000"/>
               </a:lnSpc>
@@ -6343,7 +6222,7 @@
               <a:buChar char="•"/>
               <a:defRPr/>
             </a:lvl4pPr>
-            <a:lvl5pPr marL="2286000" lvl="4" indent="-342900" algn="l">
+            <a:lvl5pPr indent="-342900" lvl="4" marL="2286000" algn="l">
               <a:lnSpc>
                 <a:spcPct val="90000"/>
               </a:lnSpc>
@@ -6360,7 +6239,7 @@
               <a:buChar char="•"/>
               <a:defRPr/>
             </a:lvl5pPr>
-            <a:lvl6pPr marL="2743200" lvl="5" indent="-342900" algn="l">
+            <a:lvl6pPr indent="-342900" lvl="5" marL="2743200" algn="l">
               <a:lnSpc>
                 <a:spcPct val="90000"/>
               </a:lnSpc>
@@ -6377,7 +6256,7 @@
               <a:buChar char="•"/>
               <a:defRPr/>
             </a:lvl6pPr>
-            <a:lvl7pPr marL="3200400" lvl="6" indent="-342900" algn="l">
+            <a:lvl7pPr indent="-342900" lvl="6" marL="3200400" algn="l">
               <a:lnSpc>
                 <a:spcPct val="90000"/>
               </a:lnSpc>
@@ -6394,7 +6273,7 @@
               <a:buChar char="•"/>
               <a:defRPr/>
             </a:lvl7pPr>
-            <a:lvl8pPr marL="3657600" lvl="7" indent="-342900" algn="l">
+            <a:lvl8pPr indent="-342900" lvl="7" marL="3657600" algn="l">
               <a:lnSpc>
                 <a:spcPct val="90000"/>
               </a:lnSpc>
@@ -6411,7 +6290,7 @@
               <a:buChar char="•"/>
               <a:defRPr/>
             </a:lvl8pPr>
-            <a:lvl9pPr marL="4114800" lvl="8" indent="-342900" algn="l">
+            <a:lvl9pPr indent="-342900" lvl="8" marL="4114800" algn="l">
               <a:lnSpc>
                 <a:spcPct val="90000"/>
               </a:lnSpc>
@@ -6429,19 +6308,15 @@
               <a:defRPr/>
             </a:lvl9pPr>
           </a:lstStyle>
-          <a:p>
-            <a:endParaRPr/>
-          </a:p>
+          <a:p/>
         </p:txBody>
       </p:sp>
       <p:sp>
         <p:nvSpPr>
           <p:cNvPr id="33" name="Google Shape;33;p6"/>
-          <p:cNvSpPr txBox="1">
-            <a:spLocks noGrp="1"/>
-          </p:cNvSpPr>
+          <p:cNvSpPr txBox="1"/>
           <p:nvPr>
-            <p:ph type="dt" idx="10"/>
+            <p:ph idx="10" type="dt"/>
           </p:nvPr>
         </p:nvSpPr>
         <p:spPr>
@@ -6458,7 +6333,7 @@
           </a:ln>
         </p:spPr>
         <p:txBody>
-          <a:bodyPr spcFirstLastPara="1" wrap="square" lIns="91425" tIns="45700" rIns="91425" bIns="45700" anchor="ctr" anchorCtr="0">
+          <a:bodyPr anchorCtr="0" anchor="ctr" bIns="45700" lIns="91425" spcFirstLastPara="1" rIns="91425" wrap="square" tIns="45700">
             <a:noAutofit/>
           </a:bodyPr>
           <a:lstStyle>
@@ -6589,19 +6464,15 @@
               <a:defRPr/>
             </a:lvl9pPr>
           </a:lstStyle>
-          <a:p>
-            <a:endParaRPr/>
-          </a:p>
+          <a:p/>
         </p:txBody>
       </p:sp>
       <p:sp>
         <p:nvSpPr>
           <p:cNvPr id="34" name="Google Shape;34;p6"/>
-          <p:cNvSpPr txBox="1">
-            <a:spLocks noGrp="1"/>
-          </p:cNvSpPr>
+          <p:cNvSpPr txBox="1"/>
           <p:nvPr>
-            <p:ph type="ftr" idx="11"/>
+            <p:ph idx="11" type="ftr"/>
           </p:nvPr>
         </p:nvSpPr>
         <p:spPr>
@@ -6618,7 +6489,7 @@
           </a:ln>
         </p:spPr>
         <p:txBody>
-          <a:bodyPr spcFirstLastPara="1" wrap="square" lIns="91425" tIns="45700" rIns="91425" bIns="45700" anchor="ctr" anchorCtr="0">
+          <a:bodyPr anchorCtr="0" anchor="ctr" bIns="45700" lIns="91425" spcFirstLastPara="1" rIns="91425" wrap="square" tIns="45700">
             <a:noAutofit/>
           </a:bodyPr>
           <a:lstStyle>
@@ -6749,19 +6620,15 @@
               <a:defRPr/>
             </a:lvl9pPr>
           </a:lstStyle>
-          <a:p>
-            <a:endParaRPr/>
-          </a:p>
+          <a:p/>
         </p:txBody>
       </p:sp>
       <p:sp>
         <p:nvSpPr>
           <p:cNvPr id="35" name="Google Shape;35;p6"/>
-          <p:cNvSpPr txBox="1">
-            <a:spLocks noGrp="1"/>
-          </p:cNvSpPr>
+          <p:cNvSpPr txBox="1"/>
           <p:nvPr>
-            <p:ph type="sldNum" idx="12"/>
+            <p:ph idx="12" type="sldNum"/>
           </p:nvPr>
         </p:nvSpPr>
         <p:spPr>
@@ -6778,11 +6645,11 @@
           </a:ln>
         </p:spPr>
         <p:txBody>
-          <a:bodyPr spcFirstLastPara="1" wrap="square" lIns="91425" tIns="45700" rIns="91425" bIns="45700" anchor="ctr" anchorCtr="0">
+          <a:bodyPr anchorCtr="0" anchor="ctr" bIns="45700" lIns="91425" spcFirstLastPara="1" rIns="91425" wrap="square" tIns="45700">
             <a:noAutofit/>
           </a:bodyPr>
           <a:lstStyle>
-            <a:lvl1pPr marL="0" marR="0" lvl="0" indent="0" algn="r">
+            <a:lvl1pPr indent="0" lvl="0" marL="0" marR="0" algn="r">
               <a:lnSpc>
                 <a:spcPct val="100000"/>
               </a:lnSpc>
@@ -6798,7 +6665,7 @@
               <a:buSzPts val="900"/>
               <a:buFont typeface="Arial"/>
               <a:buNone/>
-              <a:defRPr sz="900" b="0" i="0" u="none" strike="noStrike" cap="none">
+              <a:defRPr b="0" i="0" sz="900" u="none" cap="none" strike="noStrike">
                 <a:solidFill>
                   <a:srgbClr val="757575"/>
                 </a:solidFill>
@@ -6808,7 +6675,7 @@
                 <a:sym typeface="Arial"/>
               </a:defRPr>
             </a:lvl1pPr>
-            <a:lvl2pPr marL="0" marR="0" lvl="1" indent="0" algn="r">
+            <a:lvl2pPr indent="0" lvl="1" marL="0" marR="0" algn="r">
               <a:lnSpc>
                 <a:spcPct val="100000"/>
               </a:lnSpc>
@@ -6824,7 +6691,7 @@
               <a:buSzPts val="900"/>
               <a:buFont typeface="Arial"/>
               <a:buNone/>
-              <a:defRPr sz="900" b="0" i="0" u="none" strike="noStrike" cap="none">
+              <a:defRPr b="0" i="0" sz="900" u="none" cap="none" strike="noStrike">
                 <a:solidFill>
                   <a:srgbClr val="757575"/>
                 </a:solidFill>
@@ -6834,7 +6701,7 @@
                 <a:sym typeface="Arial"/>
               </a:defRPr>
             </a:lvl2pPr>
-            <a:lvl3pPr marL="0" marR="0" lvl="2" indent="0" algn="r">
+            <a:lvl3pPr indent="0" lvl="2" marL="0" marR="0" algn="r">
               <a:lnSpc>
                 <a:spcPct val="100000"/>
               </a:lnSpc>
@@ -6850,7 +6717,7 @@
               <a:buSzPts val="900"/>
               <a:buFont typeface="Arial"/>
               <a:buNone/>
-              <a:defRPr sz="900" b="0" i="0" u="none" strike="noStrike" cap="none">
+              <a:defRPr b="0" i="0" sz="900" u="none" cap="none" strike="noStrike">
                 <a:solidFill>
                   <a:srgbClr val="757575"/>
                 </a:solidFill>
@@ -6860,7 +6727,7 @@
                 <a:sym typeface="Arial"/>
               </a:defRPr>
             </a:lvl3pPr>
-            <a:lvl4pPr marL="0" marR="0" lvl="3" indent="0" algn="r">
+            <a:lvl4pPr indent="0" lvl="3" marL="0" marR="0" algn="r">
               <a:lnSpc>
                 <a:spcPct val="100000"/>
               </a:lnSpc>
@@ -6876,7 +6743,7 @@
               <a:buSzPts val="900"/>
               <a:buFont typeface="Arial"/>
               <a:buNone/>
-              <a:defRPr sz="900" b="0" i="0" u="none" strike="noStrike" cap="none">
+              <a:defRPr b="0" i="0" sz="900" u="none" cap="none" strike="noStrike">
                 <a:solidFill>
                   <a:srgbClr val="757575"/>
                 </a:solidFill>
@@ -6886,7 +6753,7 @@
                 <a:sym typeface="Arial"/>
               </a:defRPr>
             </a:lvl4pPr>
-            <a:lvl5pPr marL="0" marR="0" lvl="4" indent="0" algn="r">
+            <a:lvl5pPr indent="0" lvl="4" marL="0" marR="0" algn="r">
               <a:lnSpc>
                 <a:spcPct val="100000"/>
               </a:lnSpc>
@@ -6902,7 +6769,7 @@
               <a:buSzPts val="900"/>
               <a:buFont typeface="Arial"/>
               <a:buNone/>
-              <a:defRPr sz="900" b="0" i="0" u="none" strike="noStrike" cap="none">
+              <a:defRPr b="0" i="0" sz="900" u="none" cap="none" strike="noStrike">
                 <a:solidFill>
                   <a:srgbClr val="757575"/>
                 </a:solidFill>
@@ -6912,7 +6779,7 @@
                 <a:sym typeface="Arial"/>
               </a:defRPr>
             </a:lvl5pPr>
-            <a:lvl6pPr marL="0" marR="0" lvl="5" indent="0" algn="r">
+            <a:lvl6pPr indent="0" lvl="5" marL="0" marR="0" algn="r">
               <a:lnSpc>
                 <a:spcPct val="100000"/>
               </a:lnSpc>
@@ -6928,7 +6795,7 @@
               <a:buSzPts val="900"/>
               <a:buFont typeface="Arial"/>
               <a:buNone/>
-              <a:defRPr sz="900" b="0" i="0" u="none" strike="noStrike" cap="none">
+              <a:defRPr b="0" i="0" sz="900" u="none" cap="none" strike="noStrike">
                 <a:solidFill>
                   <a:srgbClr val="757575"/>
                 </a:solidFill>
@@ -6938,7 +6805,7 @@
                 <a:sym typeface="Arial"/>
               </a:defRPr>
             </a:lvl6pPr>
-            <a:lvl7pPr marL="0" marR="0" lvl="6" indent="0" algn="r">
+            <a:lvl7pPr indent="0" lvl="6" marL="0" marR="0" algn="r">
               <a:lnSpc>
                 <a:spcPct val="100000"/>
               </a:lnSpc>
@@ -6954,7 +6821,7 @@
               <a:buSzPts val="900"/>
               <a:buFont typeface="Arial"/>
               <a:buNone/>
-              <a:defRPr sz="900" b="0" i="0" u="none" strike="noStrike" cap="none">
+              <a:defRPr b="0" i="0" sz="900" u="none" cap="none" strike="noStrike">
                 <a:solidFill>
                   <a:srgbClr val="757575"/>
                 </a:solidFill>
@@ -6964,7 +6831,7 @@
                 <a:sym typeface="Arial"/>
               </a:defRPr>
             </a:lvl7pPr>
-            <a:lvl8pPr marL="0" marR="0" lvl="7" indent="0" algn="r">
+            <a:lvl8pPr indent="0" lvl="7" marL="0" marR="0" algn="r">
               <a:lnSpc>
                 <a:spcPct val="100000"/>
               </a:lnSpc>
@@ -6980,7 +6847,7 @@
               <a:buSzPts val="900"/>
               <a:buFont typeface="Arial"/>
               <a:buNone/>
-              <a:defRPr sz="900" b="0" i="0" u="none" strike="noStrike" cap="none">
+              <a:defRPr b="0" i="0" sz="900" u="none" cap="none" strike="noStrike">
                 <a:solidFill>
                   <a:srgbClr val="757575"/>
                 </a:solidFill>
@@ -6990,7 +6857,7 @@
                 <a:sym typeface="Arial"/>
               </a:defRPr>
             </a:lvl8pPr>
-            <a:lvl9pPr marL="0" marR="0" lvl="8" indent="0" algn="r">
+            <a:lvl9pPr indent="0" lvl="8" marL="0" marR="0" algn="r">
               <a:lnSpc>
                 <a:spcPct val="100000"/>
               </a:lnSpc>
@@ -7006,7 +6873,7 @@
               <a:buSzPts val="900"/>
               <a:buFont typeface="Arial"/>
               <a:buNone/>
-              <a:defRPr sz="900" b="0" i="0" u="none" strike="noStrike" cap="none">
+              <a:defRPr b="0" i="0" sz="900" u="none" cap="none" strike="noStrike">
                 <a:solidFill>
                   <a:srgbClr val="757575"/>
                 </a:solidFill>
@@ -7018,7 +6885,7 @@
             </a:lvl9pPr>
           </a:lstStyle>
           <a:p>
-            <a:pPr marL="0" lvl="0" indent="0" algn="r" rtl="0">
+            <a:pPr indent="0" lvl="0" marL="0" rtl="0" algn="r">
               <a:spcBef>
                 <a:spcPts val="0"/>
               </a:spcBef>
@@ -7044,11 +6911,11 @@
 </file>
 
 <file path=ppt/slideLayouts/slideLayout5.xml><?xml version="1.0" encoding="utf-8"?>
-<p:sldLayout xmlns:a="http://schemas.openxmlformats.org/drawingml/2006/main" xmlns:r="http://schemas.openxmlformats.org/officeDocument/2006/relationships" xmlns:p="http://schemas.openxmlformats.org/presentationml/2006/main" matchingName="비교" type="twoTxTwoObj">
+<p:sldLayout xmlns:a="http://schemas.openxmlformats.org/drawingml/2006/main" xmlns:r="http://schemas.openxmlformats.org/officeDocument/2006/relationships" xmlns:mc="http://schemas.openxmlformats.org/markup-compatibility/2006" xmlns:mv="urn:schemas-microsoft-com:mac:vml" xmlns:p="http://schemas.openxmlformats.org/presentationml/2006/main" xmlns:c="http://schemas.openxmlformats.org/drawingml/2006/chart" xmlns:dgm="http://schemas.openxmlformats.org/drawingml/2006/diagram" xmlns:o="urn:schemas-microsoft-com:office:office" xmlns:v="urn:schemas-microsoft-com:vml" xmlns:pvml="urn:schemas-microsoft-com:office:powerpoint" xmlns:com="http://schemas.openxmlformats.org/drawingml/2006/compatibility" xmlns:p14="http://schemas.microsoft.com/office/powerpoint/2010/main" xmlns:p15="http://schemas.microsoft.com/office/powerpoint/2012/main" xmlns:ahyp="http://schemas.microsoft.com/office/drawing/2018/hyperlinkcolor" matchingName="비교" type="twoTxTwoObj">
   <p:cSld name="TWO_OBJECTS_WITH_TEXT">
     <p:spTree>
       <p:nvGrpSpPr>
-        <p:cNvPr id="1" name="Shape 36"/>
+        <p:cNvPr id="36" name="Shape 36"/>
         <p:cNvGrpSpPr/>
         <p:nvPr/>
       </p:nvGrpSpPr>
@@ -7063,9 +6930,7 @@
       <p:sp>
         <p:nvSpPr>
           <p:cNvPr id="37" name="Google Shape;37;p7"/>
-          <p:cNvSpPr txBox="1">
-            <a:spLocks noGrp="1"/>
-          </p:cNvSpPr>
+          <p:cNvSpPr txBox="1"/>
           <p:nvPr>
             <p:ph type="title"/>
           </p:nvPr>
@@ -7084,7 +6949,7 @@
           </a:ln>
         </p:spPr>
         <p:txBody>
-          <a:bodyPr spcFirstLastPara="1" wrap="square" lIns="91425" tIns="45700" rIns="91425" bIns="45700" anchor="ctr" anchorCtr="0">
+          <a:bodyPr anchorCtr="0" anchor="ctr" bIns="45700" lIns="91425" spcFirstLastPara="1" rIns="91425" wrap="square" tIns="45700">
             <a:normAutofit/>
           </a:bodyPr>
           <a:lstStyle>
@@ -7218,19 +7083,15 @@
               <a:defRPr/>
             </a:lvl9pPr>
           </a:lstStyle>
-          <a:p>
-            <a:endParaRPr/>
-          </a:p>
+          <a:p/>
         </p:txBody>
       </p:sp>
       <p:sp>
         <p:nvSpPr>
           <p:cNvPr id="38" name="Google Shape;38;p7"/>
-          <p:cNvSpPr txBox="1">
-            <a:spLocks noGrp="1"/>
-          </p:cNvSpPr>
+          <p:cNvSpPr txBox="1"/>
           <p:nvPr>
-            <p:ph type="body" idx="1"/>
+            <p:ph idx="1" type="body"/>
           </p:nvPr>
         </p:nvSpPr>
         <p:spPr>
@@ -7247,11 +7108,11 @@
           </a:ln>
         </p:spPr>
         <p:txBody>
-          <a:bodyPr spcFirstLastPara="1" wrap="square" lIns="91425" tIns="45700" rIns="91425" bIns="45700" anchor="b" anchorCtr="0">
+          <a:bodyPr anchorCtr="0" anchor="b" bIns="45700" lIns="91425" spcFirstLastPara="1" rIns="91425" wrap="square" tIns="45700">
             <a:normAutofit/>
           </a:bodyPr>
           <a:lstStyle>
-            <a:lvl1pPr marL="457200" lvl="0" indent="-228600" algn="l">
+            <a:lvl1pPr indent="-228600" lvl="0" marL="457200" algn="l">
               <a:lnSpc>
                 <a:spcPct val="90000"/>
               </a:lnSpc>
@@ -7266,9 +7127,9 @@
               </a:buClr>
               <a:buSzPts val="1800"/>
               <a:buNone/>
-              <a:defRPr sz="1800" b="1"/>
+              <a:defRPr b="1" sz="1800"/>
             </a:lvl1pPr>
-            <a:lvl2pPr marL="914400" lvl="1" indent="-228600" algn="l">
+            <a:lvl2pPr indent="-228600" lvl="1" marL="914400" algn="l">
               <a:lnSpc>
                 <a:spcPct val="90000"/>
               </a:lnSpc>
@@ -7283,9 +7144,9 @@
               </a:buClr>
               <a:buSzPts val="1500"/>
               <a:buNone/>
-              <a:defRPr sz="1500" b="1"/>
+              <a:defRPr b="1" sz="1500"/>
             </a:lvl2pPr>
-            <a:lvl3pPr marL="1371600" lvl="2" indent="-228600" algn="l">
+            <a:lvl3pPr indent="-228600" lvl="2" marL="1371600" algn="l">
               <a:lnSpc>
                 <a:spcPct val="90000"/>
               </a:lnSpc>
@@ -7300,9 +7161,9 @@
               </a:buClr>
               <a:buSzPts val="1350"/>
               <a:buNone/>
-              <a:defRPr sz="1350" b="1"/>
+              <a:defRPr b="1" sz="1350"/>
             </a:lvl3pPr>
-            <a:lvl4pPr marL="1828800" lvl="3" indent="-228600" algn="l">
+            <a:lvl4pPr indent="-228600" lvl="3" marL="1828800" algn="l">
               <a:lnSpc>
                 <a:spcPct val="90000"/>
               </a:lnSpc>
@@ -7317,9 +7178,9 @@
               </a:buClr>
               <a:buSzPts val="1200"/>
               <a:buNone/>
-              <a:defRPr sz="1200" b="1"/>
+              <a:defRPr b="1" sz="1200"/>
             </a:lvl4pPr>
-            <a:lvl5pPr marL="2286000" lvl="4" indent="-228600" algn="l">
+            <a:lvl5pPr indent="-228600" lvl="4" marL="2286000" algn="l">
               <a:lnSpc>
                 <a:spcPct val="90000"/>
               </a:lnSpc>
@@ -7334,9 +7195,9 @@
               </a:buClr>
               <a:buSzPts val="1200"/>
               <a:buNone/>
-              <a:defRPr sz="1200" b="1"/>
+              <a:defRPr b="1" sz="1200"/>
             </a:lvl5pPr>
-            <a:lvl6pPr marL="2743200" lvl="5" indent="-228600" algn="l">
+            <a:lvl6pPr indent="-228600" lvl="5" marL="2743200" algn="l">
               <a:lnSpc>
                 <a:spcPct val="90000"/>
               </a:lnSpc>
@@ -7351,9 +7212,9 @@
               </a:buClr>
               <a:buSzPts val="1200"/>
               <a:buNone/>
-              <a:defRPr sz="1200" b="1"/>
+              <a:defRPr b="1" sz="1200"/>
             </a:lvl6pPr>
-            <a:lvl7pPr marL="3200400" lvl="6" indent="-228600" algn="l">
+            <a:lvl7pPr indent="-228600" lvl="6" marL="3200400" algn="l">
               <a:lnSpc>
                 <a:spcPct val="90000"/>
               </a:lnSpc>
@@ -7368,9 +7229,9 @@
               </a:buClr>
               <a:buSzPts val="1200"/>
               <a:buNone/>
-              <a:defRPr sz="1200" b="1"/>
+              <a:defRPr b="1" sz="1200"/>
             </a:lvl7pPr>
-            <a:lvl8pPr marL="3657600" lvl="7" indent="-228600" algn="l">
+            <a:lvl8pPr indent="-228600" lvl="7" marL="3657600" algn="l">
               <a:lnSpc>
                 <a:spcPct val="90000"/>
               </a:lnSpc>
@@ -7385,9 +7246,9 @@
               </a:buClr>
               <a:buSzPts val="1200"/>
               <a:buNone/>
-              <a:defRPr sz="1200" b="1"/>
+              <a:defRPr b="1" sz="1200"/>
             </a:lvl8pPr>
-            <a:lvl9pPr marL="4114800" lvl="8" indent="-228600" algn="l">
+            <a:lvl9pPr indent="-228600" lvl="8" marL="4114800" algn="l">
               <a:lnSpc>
                 <a:spcPct val="90000"/>
               </a:lnSpc>
@@ -7402,22 +7263,18 @@
               </a:buClr>
               <a:buSzPts val="1200"/>
               <a:buNone/>
-              <a:defRPr sz="1200" b="1"/>
+              <a:defRPr b="1" sz="1200"/>
             </a:lvl9pPr>
           </a:lstStyle>
-          <a:p>
-            <a:endParaRPr/>
-          </a:p>
+          <a:p/>
         </p:txBody>
       </p:sp>
       <p:sp>
         <p:nvSpPr>
           <p:cNvPr id="39" name="Google Shape;39;p7"/>
-          <p:cNvSpPr txBox="1">
-            <a:spLocks noGrp="1"/>
-          </p:cNvSpPr>
+          <p:cNvSpPr txBox="1"/>
           <p:nvPr>
-            <p:ph type="body" idx="2"/>
+            <p:ph idx="2" type="body"/>
           </p:nvPr>
         </p:nvSpPr>
         <p:spPr>
@@ -7434,11 +7291,11 @@
           </a:ln>
         </p:spPr>
         <p:txBody>
-          <a:bodyPr spcFirstLastPara="1" wrap="square" lIns="91425" tIns="45700" rIns="91425" bIns="45700" anchor="t" anchorCtr="0">
+          <a:bodyPr anchorCtr="0" anchor="t" bIns="45700" lIns="91425" spcFirstLastPara="1" rIns="91425" wrap="square" tIns="45700">
             <a:normAutofit/>
           </a:bodyPr>
           <a:lstStyle>
-            <a:lvl1pPr marL="457200" lvl="0" indent="-342900" algn="l">
+            <a:lvl1pPr indent="-342900" lvl="0" marL="457200" algn="l">
               <a:lnSpc>
                 <a:spcPct val="90000"/>
               </a:lnSpc>
@@ -7455,7 +7312,7 @@
               <a:buChar char="•"/>
               <a:defRPr/>
             </a:lvl1pPr>
-            <a:lvl2pPr marL="914400" lvl="1" indent="-342900" algn="l">
+            <a:lvl2pPr indent="-342900" lvl="1" marL="914400" algn="l">
               <a:lnSpc>
                 <a:spcPct val="90000"/>
               </a:lnSpc>
@@ -7472,7 +7329,7 @@
               <a:buChar char="•"/>
               <a:defRPr/>
             </a:lvl2pPr>
-            <a:lvl3pPr marL="1371600" lvl="2" indent="-342900" algn="l">
+            <a:lvl3pPr indent="-342900" lvl="2" marL="1371600" algn="l">
               <a:lnSpc>
                 <a:spcPct val="90000"/>
               </a:lnSpc>
@@ -7489,7 +7346,7 @@
               <a:buChar char="•"/>
               <a:defRPr/>
             </a:lvl3pPr>
-            <a:lvl4pPr marL="1828800" lvl="3" indent="-342900" algn="l">
+            <a:lvl4pPr indent="-342900" lvl="3" marL="1828800" algn="l">
               <a:lnSpc>
                 <a:spcPct val="90000"/>
               </a:lnSpc>
@@ -7506,7 +7363,7 @@
               <a:buChar char="•"/>
               <a:defRPr/>
             </a:lvl4pPr>
-            <a:lvl5pPr marL="2286000" lvl="4" indent="-342900" algn="l">
+            <a:lvl5pPr indent="-342900" lvl="4" marL="2286000" algn="l">
               <a:lnSpc>
                 <a:spcPct val="90000"/>
               </a:lnSpc>
@@ -7523,7 +7380,7 @@
               <a:buChar char="•"/>
               <a:defRPr/>
             </a:lvl5pPr>
-            <a:lvl6pPr marL="2743200" lvl="5" indent="-342900" algn="l">
+            <a:lvl6pPr indent="-342900" lvl="5" marL="2743200" algn="l">
               <a:lnSpc>
                 <a:spcPct val="90000"/>
               </a:lnSpc>
@@ -7540,7 +7397,7 @@
               <a:buChar char="•"/>
               <a:defRPr/>
             </a:lvl6pPr>
-            <a:lvl7pPr marL="3200400" lvl="6" indent="-342900" algn="l">
+            <a:lvl7pPr indent="-342900" lvl="6" marL="3200400" algn="l">
               <a:lnSpc>
                 <a:spcPct val="90000"/>
               </a:lnSpc>
@@ -7557,7 +7414,7 @@
               <a:buChar char="•"/>
               <a:defRPr/>
             </a:lvl7pPr>
-            <a:lvl8pPr marL="3657600" lvl="7" indent="-342900" algn="l">
+            <a:lvl8pPr indent="-342900" lvl="7" marL="3657600" algn="l">
               <a:lnSpc>
                 <a:spcPct val="90000"/>
               </a:lnSpc>
@@ -7574,7 +7431,7 @@
               <a:buChar char="•"/>
               <a:defRPr/>
             </a:lvl8pPr>
-            <a:lvl9pPr marL="4114800" lvl="8" indent="-342900" algn="l">
+            <a:lvl9pPr indent="-342900" lvl="8" marL="4114800" algn="l">
               <a:lnSpc>
                 <a:spcPct val="90000"/>
               </a:lnSpc>
@@ -7592,19 +7449,15 @@
               <a:defRPr/>
             </a:lvl9pPr>
           </a:lstStyle>
-          <a:p>
-            <a:endParaRPr/>
-          </a:p>
+          <a:p/>
         </p:txBody>
       </p:sp>
       <p:sp>
         <p:nvSpPr>
           <p:cNvPr id="40" name="Google Shape;40;p7"/>
-          <p:cNvSpPr txBox="1">
-            <a:spLocks noGrp="1"/>
-          </p:cNvSpPr>
+          <p:cNvSpPr txBox="1"/>
           <p:nvPr>
-            <p:ph type="body" idx="3"/>
+            <p:ph idx="3" type="body"/>
           </p:nvPr>
         </p:nvSpPr>
         <p:spPr>
@@ -7621,11 +7474,11 @@
           </a:ln>
         </p:spPr>
         <p:txBody>
-          <a:bodyPr spcFirstLastPara="1" wrap="square" lIns="91425" tIns="45700" rIns="91425" bIns="45700" anchor="b" anchorCtr="0">
+          <a:bodyPr anchorCtr="0" anchor="b" bIns="45700" lIns="91425" spcFirstLastPara="1" rIns="91425" wrap="square" tIns="45700">
             <a:normAutofit/>
           </a:bodyPr>
           <a:lstStyle>
-            <a:lvl1pPr marL="457200" lvl="0" indent="-228600" algn="l">
+            <a:lvl1pPr indent="-228600" lvl="0" marL="457200" algn="l">
               <a:lnSpc>
                 <a:spcPct val="90000"/>
               </a:lnSpc>
@@ -7640,9 +7493,9 @@
               </a:buClr>
               <a:buSzPts val="1800"/>
               <a:buNone/>
-              <a:defRPr sz="1800" b="1"/>
+              <a:defRPr b="1" sz="1800"/>
             </a:lvl1pPr>
-            <a:lvl2pPr marL="914400" lvl="1" indent="-228600" algn="l">
+            <a:lvl2pPr indent="-228600" lvl="1" marL="914400" algn="l">
               <a:lnSpc>
                 <a:spcPct val="90000"/>
               </a:lnSpc>
@@ -7657,9 +7510,9 @@
               </a:buClr>
               <a:buSzPts val="1500"/>
               <a:buNone/>
-              <a:defRPr sz="1500" b="1"/>
+              <a:defRPr b="1" sz="1500"/>
             </a:lvl2pPr>
-            <a:lvl3pPr marL="1371600" lvl="2" indent="-228600" algn="l">
+            <a:lvl3pPr indent="-228600" lvl="2" marL="1371600" algn="l">
               <a:lnSpc>
                 <a:spcPct val="90000"/>
               </a:lnSpc>
@@ -7674,9 +7527,9 @@
               </a:buClr>
               <a:buSzPts val="1350"/>
               <a:buNone/>
-              <a:defRPr sz="1350" b="1"/>
+              <a:defRPr b="1" sz="1350"/>
             </a:lvl3pPr>
-            <a:lvl4pPr marL="1828800" lvl="3" indent="-228600" algn="l">
+            <a:lvl4pPr indent="-228600" lvl="3" marL="1828800" algn="l">
               <a:lnSpc>
                 <a:spcPct val="90000"/>
               </a:lnSpc>
@@ -7691,9 +7544,9 @@
               </a:buClr>
               <a:buSzPts val="1200"/>
               <a:buNone/>
-              <a:defRPr sz="1200" b="1"/>
+              <a:defRPr b="1" sz="1200"/>
             </a:lvl4pPr>
-            <a:lvl5pPr marL="2286000" lvl="4" indent="-228600" algn="l">
+            <a:lvl5pPr indent="-228600" lvl="4" marL="2286000" algn="l">
               <a:lnSpc>
                 <a:spcPct val="90000"/>
               </a:lnSpc>
@@ -7708,9 +7561,9 @@
               </a:buClr>
               <a:buSzPts val="1200"/>
               <a:buNone/>
-              <a:defRPr sz="1200" b="1"/>
+              <a:defRPr b="1" sz="1200"/>
             </a:lvl5pPr>
-            <a:lvl6pPr marL="2743200" lvl="5" indent="-228600" algn="l">
+            <a:lvl6pPr indent="-228600" lvl="5" marL="2743200" algn="l">
               <a:lnSpc>
                 <a:spcPct val="90000"/>
               </a:lnSpc>
@@ -7725,9 +7578,9 @@
               </a:buClr>
               <a:buSzPts val="1200"/>
               <a:buNone/>
-              <a:defRPr sz="1200" b="1"/>
+              <a:defRPr b="1" sz="1200"/>
             </a:lvl6pPr>
-            <a:lvl7pPr marL="3200400" lvl="6" indent="-228600" algn="l">
+            <a:lvl7pPr indent="-228600" lvl="6" marL="3200400" algn="l">
               <a:lnSpc>
                 <a:spcPct val="90000"/>
               </a:lnSpc>
@@ -7742,9 +7595,9 @@
               </a:buClr>
               <a:buSzPts val="1200"/>
               <a:buNone/>
-              <a:defRPr sz="1200" b="1"/>
+              <a:defRPr b="1" sz="1200"/>
             </a:lvl7pPr>
-            <a:lvl8pPr marL="3657600" lvl="7" indent="-228600" algn="l">
+            <a:lvl8pPr indent="-228600" lvl="7" marL="3657600" algn="l">
               <a:lnSpc>
                 <a:spcPct val="90000"/>
               </a:lnSpc>
@@ -7759,9 +7612,9 @@
               </a:buClr>
               <a:buSzPts val="1200"/>
               <a:buNone/>
-              <a:defRPr sz="1200" b="1"/>
+              <a:defRPr b="1" sz="1200"/>
             </a:lvl8pPr>
-            <a:lvl9pPr marL="4114800" lvl="8" indent="-228600" algn="l">
+            <a:lvl9pPr indent="-228600" lvl="8" marL="4114800" algn="l">
               <a:lnSpc>
                 <a:spcPct val="90000"/>
               </a:lnSpc>
@@ -7776,22 +7629,18 @@
               </a:buClr>
               <a:buSzPts val="1200"/>
               <a:buNone/>
-              <a:defRPr sz="1200" b="1"/>
+              <a:defRPr b="1" sz="1200"/>
             </a:lvl9pPr>
           </a:lstStyle>
-          <a:p>
-            <a:endParaRPr/>
-          </a:p>
+          <a:p/>
         </p:txBody>
       </p:sp>
       <p:sp>
         <p:nvSpPr>
           <p:cNvPr id="41" name="Google Shape;41;p7"/>
-          <p:cNvSpPr txBox="1">
-            <a:spLocks noGrp="1"/>
-          </p:cNvSpPr>
+          <p:cNvSpPr txBox="1"/>
           <p:nvPr>
-            <p:ph type="body" idx="4"/>
+            <p:ph idx="4" type="body"/>
           </p:nvPr>
         </p:nvSpPr>
         <p:spPr>
@@ -7808,11 +7657,11 @@
           </a:ln>
         </p:spPr>
         <p:txBody>
-          <a:bodyPr spcFirstLastPara="1" wrap="square" lIns="91425" tIns="45700" rIns="91425" bIns="45700" anchor="t" anchorCtr="0">
+          <a:bodyPr anchorCtr="0" anchor="t" bIns="45700" lIns="91425" spcFirstLastPara="1" rIns="91425" wrap="square" tIns="45700">
             <a:normAutofit/>
           </a:bodyPr>
           <a:lstStyle>
-            <a:lvl1pPr marL="457200" lvl="0" indent="-342900" algn="l">
+            <a:lvl1pPr indent="-342900" lvl="0" marL="457200" algn="l">
               <a:lnSpc>
                 <a:spcPct val="90000"/>
               </a:lnSpc>
@@ -7829,7 +7678,7 @@
               <a:buChar char="•"/>
               <a:defRPr/>
             </a:lvl1pPr>
-            <a:lvl2pPr marL="914400" lvl="1" indent="-342900" algn="l">
+            <a:lvl2pPr indent="-342900" lvl="1" marL="914400" algn="l">
               <a:lnSpc>
                 <a:spcPct val="90000"/>
               </a:lnSpc>
@@ -7846,7 +7695,7 @@
               <a:buChar char="•"/>
               <a:defRPr/>
             </a:lvl2pPr>
-            <a:lvl3pPr marL="1371600" lvl="2" indent="-342900" algn="l">
+            <a:lvl3pPr indent="-342900" lvl="2" marL="1371600" algn="l">
               <a:lnSpc>
                 <a:spcPct val="90000"/>
               </a:lnSpc>
@@ -7863,7 +7712,7 @@
               <a:buChar char="•"/>
               <a:defRPr/>
             </a:lvl3pPr>
-            <a:lvl4pPr marL="1828800" lvl="3" indent="-342900" algn="l">
+            <a:lvl4pPr indent="-342900" lvl="3" marL="1828800" algn="l">
               <a:lnSpc>
                 <a:spcPct val="90000"/>
               </a:lnSpc>
@@ -7880,7 +7729,7 @@
               <a:buChar char="•"/>
               <a:defRPr/>
             </a:lvl4pPr>
-            <a:lvl5pPr marL="2286000" lvl="4" indent="-342900" algn="l">
+            <a:lvl5pPr indent="-342900" lvl="4" marL="2286000" algn="l">
               <a:lnSpc>
                 <a:spcPct val="90000"/>
               </a:lnSpc>
@@ -7897,7 +7746,7 @@
               <a:buChar char="•"/>
               <a:defRPr/>
             </a:lvl5pPr>
-            <a:lvl6pPr marL="2743200" lvl="5" indent="-342900" algn="l">
+            <a:lvl6pPr indent="-342900" lvl="5" marL="2743200" algn="l">
               <a:lnSpc>
                 <a:spcPct val="90000"/>
               </a:lnSpc>
@@ -7914,7 +7763,7 @@
               <a:buChar char="•"/>
               <a:defRPr/>
             </a:lvl6pPr>
-            <a:lvl7pPr marL="3200400" lvl="6" indent="-342900" algn="l">
+            <a:lvl7pPr indent="-342900" lvl="6" marL="3200400" algn="l">
               <a:lnSpc>
                 <a:spcPct val="90000"/>
               </a:lnSpc>
@@ -7931,7 +7780,7 @@
               <a:buChar char="•"/>
               <a:defRPr/>
             </a:lvl7pPr>
-            <a:lvl8pPr marL="3657600" lvl="7" indent="-342900" algn="l">
+            <a:lvl8pPr indent="-342900" lvl="7" marL="3657600" algn="l">
               <a:lnSpc>
                 <a:spcPct val="90000"/>
               </a:lnSpc>
@@ -7948,7 +7797,7 @@
               <a:buChar char="•"/>
               <a:defRPr/>
             </a:lvl8pPr>
-            <a:lvl9pPr marL="4114800" lvl="8" indent="-342900" algn="l">
+            <a:lvl9pPr indent="-342900" lvl="8" marL="4114800" algn="l">
               <a:lnSpc>
                 <a:spcPct val="90000"/>
               </a:lnSpc>
@@ -7966,19 +7815,15 @@
               <a:defRPr/>
             </a:lvl9pPr>
           </a:lstStyle>
-          <a:p>
-            <a:endParaRPr/>
-          </a:p>
+          <a:p/>
         </p:txBody>
       </p:sp>
       <p:sp>
         <p:nvSpPr>
           <p:cNvPr id="42" name="Google Shape;42;p7"/>
-          <p:cNvSpPr txBox="1">
-            <a:spLocks noGrp="1"/>
-          </p:cNvSpPr>
+          <p:cNvSpPr txBox="1"/>
           <p:nvPr>
-            <p:ph type="dt" idx="10"/>
+            <p:ph idx="10" type="dt"/>
           </p:nvPr>
         </p:nvSpPr>
         <p:spPr>
@@ -7995,7 +7840,7 @@
           </a:ln>
         </p:spPr>
         <p:txBody>
-          <a:bodyPr spcFirstLastPara="1" wrap="square" lIns="91425" tIns="45700" rIns="91425" bIns="45700" anchor="ctr" anchorCtr="0">
+          <a:bodyPr anchorCtr="0" anchor="ctr" bIns="45700" lIns="91425" spcFirstLastPara="1" rIns="91425" wrap="square" tIns="45700">
             <a:noAutofit/>
           </a:bodyPr>
           <a:lstStyle>
@@ -8126,19 +7971,15 @@
               <a:defRPr/>
             </a:lvl9pPr>
           </a:lstStyle>
-          <a:p>
-            <a:endParaRPr/>
-          </a:p>
+          <a:p/>
         </p:txBody>
       </p:sp>
       <p:sp>
         <p:nvSpPr>
           <p:cNvPr id="43" name="Google Shape;43;p7"/>
-          <p:cNvSpPr txBox="1">
-            <a:spLocks noGrp="1"/>
-          </p:cNvSpPr>
+          <p:cNvSpPr txBox="1"/>
           <p:nvPr>
-            <p:ph type="ftr" idx="11"/>
+            <p:ph idx="11" type="ftr"/>
           </p:nvPr>
         </p:nvSpPr>
         <p:spPr>
@@ -8155,7 +7996,7 @@
           </a:ln>
         </p:spPr>
         <p:txBody>
-          <a:bodyPr spcFirstLastPara="1" wrap="square" lIns="91425" tIns="45700" rIns="91425" bIns="45700" anchor="ctr" anchorCtr="0">
+          <a:bodyPr anchorCtr="0" anchor="ctr" bIns="45700" lIns="91425" spcFirstLastPara="1" rIns="91425" wrap="square" tIns="45700">
             <a:noAutofit/>
           </a:bodyPr>
           <a:lstStyle>
@@ -8286,19 +8127,15 @@
               <a:defRPr/>
             </a:lvl9pPr>
           </a:lstStyle>
-          <a:p>
-            <a:endParaRPr/>
-          </a:p>
+          <a:p/>
         </p:txBody>
       </p:sp>
       <p:sp>
         <p:nvSpPr>
           <p:cNvPr id="44" name="Google Shape;44;p7"/>
-          <p:cNvSpPr txBox="1">
-            <a:spLocks noGrp="1"/>
-          </p:cNvSpPr>
+          <p:cNvSpPr txBox="1"/>
           <p:nvPr>
-            <p:ph type="sldNum" idx="12"/>
+            <p:ph idx="12" type="sldNum"/>
           </p:nvPr>
         </p:nvSpPr>
         <p:spPr>
@@ -8315,11 +8152,11 @@
           </a:ln>
         </p:spPr>
         <p:txBody>
-          <a:bodyPr spcFirstLastPara="1" wrap="square" lIns="91425" tIns="45700" rIns="91425" bIns="45700" anchor="ctr" anchorCtr="0">
+          <a:bodyPr anchorCtr="0" anchor="ctr" bIns="45700" lIns="91425" spcFirstLastPara="1" rIns="91425" wrap="square" tIns="45700">
             <a:noAutofit/>
           </a:bodyPr>
           <a:lstStyle>
-            <a:lvl1pPr marL="0" marR="0" lvl="0" indent="0" algn="r">
+            <a:lvl1pPr indent="0" lvl="0" marL="0" marR="0" algn="r">
               <a:lnSpc>
                 <a:spcPct val="100000"/>
               </a:lnSpc>
@@ -8335,7 +8172,7 @@
               <a:buSzPts val="900"/>
               <a:buFont typeface="Arial"/>
               <a:buNone/>
-              <a:defRPr sz="900" b="0" i="0" u="none" strike="noStrike" cap="none">
+              <a:defRPr b="0" i="0" sz="900" u="none" cap="none" strike="noStrike">
                 <a:solidFill>
                   <a:srgbClr val="757575"/>
                 </a:solidFill>
@@ -8345,7 +8182,7 @@
                 <a:sym typeface="Arial"/>
               </a:defRPr>
             </a:lvl1pPr>
-            <a:lvl2pPr marL="0" marR="0" lvl="1" indent="0" algn="r">
+            <a:lvl2pPr indent="0" lvl="1" marL="0" marR="0" algn="r">
               <a:lnSpc>
                 <a:spcPct val="100000"/>
               </a:lnSpc>
@@ -8361,7 +8198,7 @@
               <a:buSzPts val="900"/>
               <a:buFont typeface="Arial"/>
               <a:buNone/>
-              <a:defRPr sz="900" b="0" i="0" u="none" strike="noStrike" cap="none">
+              <a:defRPr b="0" i="0" sz="900" u="none" cap="none" strike="noStrike">
                 <a:solidFill>
                   <a:srgbClr val="757575"/>
                 </a:solidFill>
@@ -8371,7 +8208,7 @@
                 <a:sym typeface="Arial"/>
               </a:defRPr>
             </a:lvl2pPr>
-            <a:lvl3pPr marL="0" marR="0" lvl="2" indent="0" algn="r">
+            <a:lvl3pPr indent="0" lvl="2" marL="0" marR="0" algn="r">
               <a:lnSpc>
                 <a:spcPct val="100000"/>
               </a:lnSpc>
@@ -8387,7 +8224,7 @@
               <a:buSzPts val="900"/>
               <a:buFont typeface="Arial"/>
               <a:buNone/>
-              <a:defRPr sz="900" b="0" i="0" u="none" strike="noStrike" cap="none">
+              <a:defRPr b="0" i="0" sz="900" u="none" cap="none" strike="noStrike">
                 <a:solidFill>
                   <a:srgbClr val="757575"/>
                 </a:solidFill>
@@ -8397,7 +8234,7 @@
                 <a:sym typeface="Arial"/>
               </a:defRPr>
             </a:lvl3pPr>
-            <a:lvl4pPr marL="0" marR="0" lvl="3" indent="0" algn="r">
+            <a:lvl4pPr indent="0" lvl="3" marL="0" marR="0" algn="r">
               <a:lnSpc>
                 <a:spcPct val="100000"/>
               </a:lnSpc>
@@ -8413,7 +8250,7 @@
               <a:buSzPts val="900"/>
               <a:buFont typeface="Arial"/>
               <a:buNone/>
-              <a:defRPr sz="900" b="0" i="0" u="none" strike="noStrike" cap="none">
+              <a:defRPr b="0" i="0" sz="900" u="none" cap="none" strike="noStrike">
                 <a:solidFill>
                   <a:srgbClr val="757575"/>
                 </a:solidFill>
@@ -8423,7 +8260,7 @@
                 <a:sym typeface="Arial"/>
               </a:defRPr>
             </a:lvl4pPr>
-            <a:lvl5pPr marL="0" marR="0" lvl="4" indent="0" algn="r">
+            <a:lvl5pPr indent="0" lvl="4" marL="0" marR="0" algn="r">
               <a:lnSpc>
                 <a:spcPct val="100000"/>
               </a:lnSpc>
@@ -8439,7 +8276,7 @@
               <a:buSzPts val="900"/>
               <a:buFont typeface="Arial"/>
               <a:buNone/>
-              <a:defRPr sz="900" b="0" i="0" u="none" strike="noStrike" cap="none">
+              <a:defRPr b="0" i="0" sz="900" u="none" cap="none" strike="noStrike">
                 <a:solidFill>
                   <a:srgbClr val="757575"/>
                 </a:solidFill>
@@ -8449,7 +8286,7 @@
                 <a:sym typeface="Arial"/>
               </a:defRPr>
             </a:lvl5pPr>
-            <a:lvl6pPr marL="0" marR="0" lvl="5" indent="0" algn="r">
+            <a:lvl6pPr indent="0" lvl="5" marL="0" marR="0" algn="r">
               <a:lnSpc>
                 <a:spcPct val="100000"/>
               </a:lnSpc>
@@ -8465,7 +8302,7 @@
               <a:buSzPts val="900"/>
               <a:buFont typeface="Arial"/>
               <a:buNone/>
-              <a:defRPr sz="900" b="0" i="0" u="none" strike="noStrike" cap="none">
+              <a:defRPr b="0" i="0" sz="900" u="none" cap="none" strike="noStrike">
                 <a:solidFill>
                   <a:srgbClr val="757575"/>
                 </a:solidFill>
@@ -8475,7 +8312,7 @@
                 <a:sym typeface="Arial"/>
               </a:defRPr>
             </a:lvl6pPr>
-            <a:lvl7pPr marL="0" marR="0" lvl="6" indent="0" algn="r">
+            <a:lvl7pPr indent="0" lvl="6" marL="0" marR="0" algn="r">
               <a:lnSpc>
                 <a:spcPct val="100000"/>
               </a:lnSpc>
@@ -8491,7 +8328,7 @@
               <a:buSzPts val="900"/>
               <a:buFont typeface="Arial"/>
               <a:buNone/>
-              <a:defRPr sz="900" b="0" i="0" u="none" strike="noStrike" cap="none">
+              <a:defRPr b="0" i="0" sz="900" u="none" cap="none" strike="noStrike">
                 <a:solidFill>
                   <a:srgbClr val="757575"/>
                 </a:solidFill>
@@ -8501,7 +8338,7 @@
                 <a:sym typeface="Arial"/>
               </a:defRPr>
             </a:lvl7pPr>
-            <a:lvl8pPr marL="0" marR="0" lvl="7" indent="0" algn="r">
+            <a:lvl8pPr indent="0" lvl="7" marL="0" marR="0" algn="r">
               <a:lnSpc>
                 <a:spcPct val="100000"/>
               </a:lnSpc>
@@ -8517,7 +8354,7 @@
               <a:buSzPts val="900"/>
               <a:buFont typeface="Arial"/>
               <a:buNone/>
-              <a:defRPr sz="900" b="0" i="0" u="none" strike="noStrike" cap="none">
+              <a:defRPr b="0" i="0" sz="900" u="none" cap="none" strike="noStrike">
                 <a:solidFill>
                   <a:srgbClr val="757575"/>
                 </a:solidFill>
@@ -8527,7 +8364,7 @@
                 <a:sym typeface="Arial"/>
               </a:defRPr>
             </a:lvl8pPr>
-            <a:lvl9pPr marL="0" marR="0" lvl="8" indent="0" algn="r">
+            <a:lvl9pPr indent="0" lvl="8" marL="0" marR="0" algn="r">
               <a:lnSpc>
                 <a:spcPct val="100000"/>
               </a:lnSpc>
@@ -8543,7 +8380,7 @@
               <a:buSzPts val="900"/>
               <a:buFont typeface="Arial"/>
               <a:buNone/>
-              <a:defRPr sz="900" b="0" i="0" u="none" strike="noStrike" cap="none">
+              <a:defRPr b="0" i="0" sz="900" u="none" cap="none" strike="noStrike">
                 <a:solidFill>
                   <a:srgbClr val="757575"/>
                 </a:solidFill>
@@ -8555,7 +8392,7 @@
             </a:lvl9pPr>
           </a:lstStyle>
           <a:p>
-            <a:pPr marL="0" lvl="0" indent="0" algn="r" rtl="0">
+            <a:pPr indent="0" lvl="0" marL="0" rtl="0" algn="r">
               <a:spcBef>
                 <a:spcPts val="0"/>
               </a:spcBef>
@@ -8581,11 +8418,11 @@
 </file>
 
 <file path=ppt/slideLayouts/slideLayout6.xml><?xml version="1.0" encoding="utf-8"?>
-<p:sldLayout xmlns:a="http://schemas.openxmlformats.org/drawingml/2006/main" xmlns:r="http://schemas.openxmlformats.org/officeDocument/2006/relationships" xmlns:p="http://schemas.openxmlformats.org/presentationml/2006/main" matchingName="제목만" type="titleOnly">
+<p:sldLayout xmlns:a="http://schemas.openxmlformats.org/drawingml/2006/main" xmlns:r="http://schemas.openxmlformats.org/officeDocument/2006/relationships" xmlns:mc="http://schemas.openxmlformats.org/markup-compatibility/2006" xmlns:mv="urn:schemas-microsoft-com:mac:vml" xmlns:p="http://schemas.openxmlformats.org/presentationml/2006/main" xmlns:c="http://schemas.openxmlformats.org/drawingml/2006/chart" xmlns:dgm="http://schemas.openxmlformats.org/drawingml/2006/diagram" xmlns:o="urn:schemas-microsoft-com:office:office" xmlns:v="urn:schemas-microsoft-com:vml" xmlns:pvml="urn:schemas-microsoft-com:office:powerpoint" xmlns:com="http://schemas.openxmlformats.org/drawingml/2006/compatibility" xmlns:p14="http://schemas.microsoft.com/office/powerpoint/2010/main" xmlns:p15="http://schemas.microsoft.com/office/powerpoint/2012/main" xmlns:ahyp="http://schemas.microsoft.com/office/drawing/2018/hyperlinkcolor" matchingName="제목만" type="titleOnly">
   <p:cSld name="TITLE_ONLY">
     <p:spTree>
       <p:nvGrpSpPr>
-        <p:cNvPr id="1" name="Shape 45"/>
+        <p:cNvPr id="45" name="Shape 45"/>
         <p:cNvGrpSpPr/>
         <p:nvPr/>
       </p:nvGrpSpPr>
@@ -8600,9 +8437,7 @@
       <p:sp>
         <p:nvSpPr>
           <p:cNvPr id="46" name="Google Shape;46;p8"/>
-          <p:cNvSpPr txBox="1">
-            <a:spLocks noGrp="1"/>
-          </p:cNvSpPr>
+          <p:cNvSpPr txBox="1"/>
           <p:nvPr>
             <p:ph type="title"/>
           </p:nvPr>
@@ -8621,7 +8456,7 @@
           </a:ln>
         </p:spPr>
         <p:txBody>
-          <a:bodyPr spcFirstLastPara="1" wrap="square" lIns="91425" tIns="45700" rIns="91425" bIns="45700" anchor="ctr" anchorCtr="0">
+          <a:bodyPr anchorCtr="0" anchor="ctr" bIns="45700" lIns="91425" spcFirstLastPara="1" rIns="91425" wrap="square" tIns="45700">
             <a:normAutofit/>
           </a:bodyPr>
           <a:lstStyle>
@@ -8755,19 +8590,15 @@
               <a:defRPr/>
             </a:lvl9pPr>
           </a:lstStyle>
-          <a:p>
-            <a:endParaRPr/>
-          </a:p>
+          <a:p/>
         </p:txBody>
       </p:sp>
       <p:sp>
         <p:nvSpPr>
           <p:cNvPr id="47" name="Google Shape;47;p8"/>
-          <p:cNvSpPr txBox="1">
-            <a:spLocks noGrp="1"/>
-          </p:cNvSpPr>
+          <p:cNvSpPr txBox="1"/>
           <p:nvPr>
-            <p:ph type="dt" idx="10"/>
+            <p:ph idx="10" type="dt"/>
           </p:nvPr>
         </p:nvSpPr>
         <p:spPr>
@@ -8784,7 +8615,7 @@
           </a:ln>
         </p:spPr>
         <p:txBody>
-          <a:bodyPr spcFirstLastPara="1" wrap="square" lIns="91425" tIns="45700" rIns="91425" bIns="45700" anchor="ctr" anchorCtr="0">
+          <a:bodyPr anchorCtr="0" anchor="ctr" bIns="45700" lIns="91425" spcFirstLastPara="1" rIns="91425" wrap="square" tIns="45700">
             <a:noAutofit/>
           </a:bodyPr>
           <a:lstStyle>
@@ -8915,19 +8746,15 @@
               <a:defRPr/>
             </a:lvl9pPr>
           </a:lstStyle>
-          <a:p>
-            <a:endParaRPr/>
-          </a:p>
+          <a:p/>
         </p:txBody>
       </p:sp>
       <p:sp>
         <p:nvSpPr>
           <p:cNvPr id="48" name="Google Shape;48;p8"/>
-          <p:cNvSpPr txBox="1">
-            <a:spLocks noGrp="1"/>
-          </p:cNvSpPr>
+          <p:cNvSpPr txBox="1"/>
           <p:nvPr>
-            <p:ph type="ftr" idx="11"/>
+            <p:ph idx="11" type="ftr"/>
           </p:nvPr>
         </p:nvSpPr>
         <p:spPr>
@@ -8944,7 +8771,7 @@
           </a:ln>
         </p:spPr>
         <p:txBody>
-          <a:bodyPr spcFirstLastPara="1" wrap="square" lIns="91425" tIns="45700" rIns="91425" bIns="45700" anchor="ctr" anchorCtr="0">
+          <a:bodyPr anchorCtr="0" anchor="ctr" bIns="45700" lIns="91425" spcFirstLastPara="1" rIns="91425" wrap="square" tIns="45700">
             <a:noAutofit/>
           </a:bodyPr>
           <a:lstStyle>
@@ -9075,19 +8902,15 @@
               <a:defRPr/>
             </a:lvl9pPr>
           </a:lstStyle>
-          <a:p>
-            <a:endParaRPr/>
-          </a:p>
+          <a:p/>
         </p:txBody>
       </p:sp>
       <p:sp>
         <p:nvSpPr>
           <p:cNvPr id="49" name="Google Shape;49;p8"/>
-          <p:cNvSpPr txBox="1">
-            <a:spLocks noGrp="1"/>
-          </p:cNvSpPr>
+          <p:cNvSpPr txBox="1"/>
           <p:nvPr>
-            <p:ph type="sldNum" idx="12"/>
+            <p:ph idx="12" type="sldNum"/>
           </p:nvPr>
         </p:nvSpPr>
         <p:spPr>
@@ -9104,11 +8927,11 @@
           </a:ln>
         </p:spPr>
         <p:txBody>
-          <a:bodyPr spcFirstLastPara="1" wrap="square" lIns="91425" tIns="45700" rIns="91425" bIns="45700" anchor="ctr" anchorCtr="0">
+          <a:bodyPr anchorCtr="0" anchor="ctr" bIns="45700" lIns="91425" spcFirstLastPara="1" rIns="91425" wrap="square" tIns="45700">
             <a:noAutofit/>
           </a:bodyPr>
           <a:lstStyle>
-            <a:lvl1pPr marL="0" marR="0" lvl="0" indent="0" algn="r">
+            <a:lvl1pPr indent="0" lvl="0" marL="0" marR="0" algn="r">
               <a:lnSpc>
                 <a:spcPct val="100000"/>
               </a:lnSpc>
@@ -9124,7 +8947,7 @@
               <a:buSzPts val="900"/>
               <a:buFont typeface="Arial"/>
               <a:buNone/>
-              <a:defRPr sz="900" b="0" i="0" u="none" strike="noStrike" cap="none">
+              <a:defRPr b="0" i="0" sz="900" u="none" cap="none" strike="noStrike">
                 <a:solidFill>
                   <a:srgbClr val="757575"/>
                 </a:solidFill>
@@ -9134,7 +8957,7 @@
                 <a:sym typeface="Arial"/>
               </a:defRPr>
             </a:lvl1pPr>
-            <a:lvl2pPr marL="0" marR="0" lvl="1" indent="0" algn="r">
+            <a:lvl2pPr indent="0" lvl="1" marL="0" marR="0" algn="r">
               <a:lnSpc>
                 <a:spcPct val="100000"/>
               </a:lnSpc>
@@ -9150,7 +8973,7 @@
               <a:buSzPts val="900"/>
               <a:buFont typeface="Arial"/>
               <a:buNone/>
-              <a:defRPr sz="900" b="0" i="0" u="none" strike="noStrike" cap="none">
+              <a:defRPr b="0" i="0" sz="900" u="none" cap="none" strike="noStrike">
                 <a:solidFill>
                   <a:srgbClr val="757575"/>
                 </a:solidFill>
@@ -9160,7 +8983,7 @@
                 <a:sym typeface="Arial"/>
               </a:defRPr>
             </a:lvl2pPr>
-            <a:lvl3pPr marL="0" marR="0" lvl="2" indent="0" algn="r">
+            <a:lvl3pPr indent="0" lvl="2" marL="0" marR="0" algn="r">
               <a:lnSpc>
                 <a:spcPct val="100000"/>
               </a:lnSpc>
@@ -9176,7 +8999,7 @@
               <a:buSzPts val="900"/>
               <a:buFont typeface="Arial"/>
               <a:buNone/>
-              <a:defRPr sz="900" b="0" i="0" u="none" strike="noStrike" cap="none">
+              <a:defRPr b="0" i="0" sz="900" u="none" cap="none" strike="noStrike">
                 <a:solidFill>
                   <a:srgbClr val="757575"/>
                 </a:solidFill>
@@ -9186,7 +9009,7 @@
                 <a:sym typeface="Arial"/>
               </a:defRPr>
             </a:lvl3pPr>
-            <a:lvl4pPr marL="0" marR="0" lvl="3" indent="0" algn="r">
+            <a:lvl4pPr indent="0" lvl="3" marL="0" marR="0" algn="r">
               <a:lnSpc>
                 <a:spcPct val="100000"/>
               </a:lnSpc>
@@ -9202,7 +9025,7 @@
               <a:buSzPts val="900"/>
               <a:buFont typeface="Arial"/>
               <a:buNone/>
-              <a:defRPr sz="900" b="0" i="0" u="none" strike="noStrike" cap="none">
+              <a:defRPr b="0" i="0" sz="900" u="none" cap="none" strike="noStrike">
                 <a:solidFill>
                   <a:srgbClr val="757575"/>
                 </a:solidFill>
@@ -9212,7 +9035,7 @@
                 <a:sym typeface="Arial"/>
               </a:defRPr>
             </a:lvl4pPr>
-            <a:lvl5pPr marL="0" marR="0" lvl="4" indent="0" algn="r">
+            <a:lvl5pPr indent="0" lvl="4" marL="0" marR="0" algn="r">
               <a:lnSpc>
                 <a:spcPct val="100000"/>
               </a:lnSpc>
@@ -9228,7 +9051,7 @@
               <a:buSzPts val="900"/>
               <a:buFont typeface="Arial"/>
               <a:buNone/>
-              <a:defRPr sz="900" b="0" i="0" u="none" strike="noStrike" cap="none">
+              <a:defRPr b="0" i="0" sz="900" u="none" cap="none" strike="noStrike">
                 <a:solidFill>
                   <a:srgbClr val="757575"/>
                 </a:solidFill>
@@ -9238,7 +9061,7 @@
                 <a:sym typeface="Arial"/>
               </a:defRPr>
             </a:lvl5pPr>
-            <a:lvl6pPr marL="0" marR="0" lvl="5" indent="0" algn="r">
+            <a:lvl6pPr indent="0" lvl="5" marL="0" marR="0" algn="r">
               <a:lnSpc>
                 <a:spcPct val="100000"/>
               </a:lnSpc>
@@ -9254,7 +9077,7 @@
               <a:buSzPts val="900"/>
               <a:buFont typeface="Arial"/>
               <a:buNone/>
-              <a:defRPr sz="900" b="0" i="0" u="none" strike="noStrike" cap="none">
+              <a:defRPr b="0" i="0" sz="900" u="none" cap="none" strike="noStrike">
                 <a:solidFill>
                   <a:srgbClr val="757575"/>
                 </a:solidFill>
@@ -9264,7 +9087,7 @@
                 <a:sym typeface="Arial"/>
               </a:defRPr>
             </a:lvl6pPr>
-            <a:lvl7pPr marL="0" marR="0" lvl="6" indent="0" algn="r">
+            <a:lvl7pPr indent="0" lvl="6" marL="0" marR="0" algn="r">
               <a:lnSpc>
                 <a:spcPct val="100000"/>
               </a:lnSpc>
@@ -9280,7 +9103,7 @@
               <a:buSzPts val="900"/>
               <a:buFont typeface="Arial"/>
               <a:buNone/>
-              <a:defRPr sz="900" b="0" i="0" u="none" strike="noStrike" cap="none">
+              <a:defRPr b="0" i="0" sz="900" u="none" cap="none" strike="noStrike">
                 <a:solidFill>
                   <a:srgbClr val="757575"/>
                 </a:solidFill>
@@ -9290,7 +9113,7 @@
                 <a:sym typeface="Arial"/>
               </a:defRPr>
             </a:lvl7pPr>
-            <a:lvl8pPr marL="0" marR="0" lvl="7" indent="0" algn="r">
+            <a:lvl8pPr indent="0" lvl="7" marL="0" marR="0" algn="r">
               <a:lnSpc>
                 <a:spcPct val="100000"/>
               </a:lnSpc>
@@ -9306,7 +9129,7 @@
               <a:buSzPts val="900"/>
               <a:buFont typeface="Arial"/>
               <a:buNone/>
-              <a:defRPr sz="900" b="0" i="0" u="none" strike="noStrike" cap="none">
+              <a:defRPr b="0" i="0" sz="900" u="none" cap="none" strike="noStrike">
                 <a:solidFill>
                   <a:srgbClr val="757575"/>
                 </a:solidFill>
@@ -9316,7 +9139,7 @@
                 <a:sym typeface="Arial"/>
               </a:defRPr>
             </a:lvl8pPr>
-            <a:lvl9pPr marL="0" marR="0" lvl="8" indent="0" algn="r">
+            <a:lvl9pPr indent="0" lvl="8" marL="0" marR="0" algn="r">
               <a:lnSpc>
                 <a:spcPct val="100000"/>
               </a:lnSpc>
@@ -9332,7 +9155,7 @@
               <a:buSzPts val="900"/>
               <a:buFont typeface="Arial"/>
               <a:buNone/>
-              <a:defRPr sz="900" b="0" i="0" u="none" strike="noStrike" cap="none">
+              <a:defRPr b="0" i="0" sz="900" u="none" cap="none" strike="noStrike">
                 <a:solidFill>
                   <a:srgbClr val="757575"/>
                 </a:solidFill>
@@ -9344,7 +9167,7 @@
             </a:lvl9pPr>
           </a:lstStyle>
           <a:p>
-            <a:pPr marL="0" lvl="0" indent="0" algn="r" rtl="0">
+            <a:pPr indent="0" lvl="0" marL="0" rtl="0" algn="r">
               <a:spcBef>
                 <a:spcPts val="0"/>
               </a:spcBef>
@@ -9370,11 +9193,11 @@
 </file>
 
 <file path=ppt/slideLayouts/slideLayout7.xml><?xml version="1.0" encoding="utf-8"?>
-<p:sldLayout xmlns:a="http://schemas.openxmlformats.org/drawingml/2006/main" xmlns:r="http://schemas.openxmlformats.org/officeDocument/2006/relationships" xmlns:p="http://schemas.openxmlformats.org/presentationml/2006/main" matchingName="빈 화면" type="blank">
+<p:sldLayout xmlns:a="http://schemas.openxmlformats.org/drawingml/2006/main" xmlns:r="http://schemas.openxmlformats.org/officeDocument/2006/relationships" xmlns:mc="http://schemas.openxmlformats.org/markup-compatibility/2006" xmlns:mv="urn:schemas-microsoft-com:mac:vml" xmlns:p="http://schemas.openxmlformats.org/presentationml/2006/main" xmlns:c="http://schemas.openxmlformats.org/drawingml/2006/chart" xmlns:dgm="http://schemas.openxmlformats.org/drawingml/2006/diagram" xmlns:o="urn:schemas-microsoft-com:office:office" xmlns:v="urn:schemas-microsoft-com:vml" xmlns:pvml="urn:schemas-microsoft-com:office:powerpoint" xmlns:com="http://schemas.openxmlformats.org/drawingml/2006/compatibility" xmlns:p14="http://schemas.microsoft.com/office/powerpoint/2010/main" xmlns:p15="http://schemas.microsoft.com/office/powerpoint/2012/main" xmlns:ahyp="http://schemas.microsoft.com/office/drawing/2018/hyperlinkcolor" matchingName="빈 화면" type="blank">
   <p:cSld name="BLANK">
     <p:spTree>
       <p:nvGrpSpPr>
-        <p:cNvPr id="1" name="Shape 50"/>
+        <p:cNvPr id="50" name="Shape 50"/>
         <p:cNvGrpSpPr/>
         <p:nvPr/>
       </p:nvGrpSpPr>
@@ -9389,11 +9212,9 @@
       <p:sp>
         <p:nvSpPr>
           <p:cNvPr id="51" name="Google Shape;51;p9"/>
-          <p:cNvSpPr txBox="1">
-            <a:spLocks noGrp="1"/>
-          </p:cNvSpPr>
+          <p:cNvSpPr txBox="1"/>
           <p:nvPr>
-            <p:ph type="dt" idx="10"/>
+            <p:ph idx="10" type="dt"/>
           </p:nvPr>
         </p:nvSpPr>
         <p:spPr>
@@ -9410,7 +9231,7 @@
           </a:ln>
         </p:spPr>
         <p:txBody>
-          <a:bodyPr spcFirstLastPara="1" wrap="square" lIns="91425" tIns="45700" rIns="91425" bIns="45700" anchor="ctr" anchorCtr="0">
+          <a:bodyPr anchorCtr="0" anchor="ctr" bIns="45700" lIns="91425" spcFirstLastPara="1" rIns="91425" wrap="square" tIns="45700">
             <a:noAutofit/>
           </a:bodyPr>
           <a:lstStyle>
@@ -9541,19 +9362,15 @@
               <a:defRPr/>
             </a:lvl9pPr>
           </a:lstStyle>
-          <a:p>
-            <a:endParaRPr/>
-          </a:p>
+          <a:p/>
         </p:txBody>
       </p:sp>
       <p:sp>
         <p:nvSpPr>
           <p:cNvPr id="52" name="Google Shape;52;p9"/>
-          <p:cNvSpPr txBox="1">
-            <a:spLocks noGrp="1"/>
-          </p:cNvSpPr>
+          <p:cNvSpPr txBox="1"/>
           <p:nvPr>
-            <p:ph type="ftr" idx="11"/>
+            <p:ph idx="11" type="ftr"/>
           </p:nvPr>
         </p:nvSpPr>
         <p:spPr>
@@ -9570,7 +9387,7 @@
           </a:ln>
         </p:spPr>
         <p:txBody>
-          <a:bodyPr spcFirstLastPara="1" wrap="square" lIns="91425" tIns="45700" rIns="91425" bIns="45700" anchor="ctr" anchorCtr="0">
+          <a:bodyPr anchorCtr="0" anchor="ctr" bIns="45700" lIns="91425" spcFirstLastPara="1" rIns="91425" wrap="square" tIns="45700">
             <a:noAutofit/>
           </a:bodyPr>
           <a:lstStyle>
@@ -9701,19 +9518,15 @@
               <a:defRPr/>
             </a:lvl9pPr>
           </a:lstStyle>
-          <a:p>
-            <a:endParaRPr/>
-          </a:p>
+          <a:p/>
         </p:txBody>
       </p:sp>
       <p:sp>
         <p:nvSpPr>
           <p:cNvPr id="53" name="Google Shape;53;p9"/>
-          <p:cNvSpPr txBox="1">
-            <a:spLocks noGrp="1"/>
-          </p:cNvSpPr>
+          <p:cNvSpPr txBox="1"/>
           <p:nvPr>
-            <p:ph type="sldNum" idx="12"/>
+            <p:ph idx="12" type="sldNum"/>
           </p:nvPr>
         </p:nvSpPr>
         <p:spPr>
@@ -9730,11 +9543,11 @@
           </a:ln>
         </p:spPr>
         <p:txBody>
-          <a:bodyPr spcFirstLastPara="1" wrap="square" lIns="91425" tIns="45700" rIns="91425" bIns="45700" anchor="ctr" anchorCtr="0">
+          <a:bodyPr anchorCtr="0" anchor="ctr" bIns="45700" lIns="91425" spcFirstLastPara="1" rIns="91425" wrap="square" tIns="45700">
             <a:noAutofit/>
           </a:bodyPr>
           <a:lstStyle>
-            <a:lvl1pPr marL="0" marR="0" lvl="0" indent="0" algn="r">
+            <a:lvl1pPr indent="0" lvl="0" marL="0" marR="0" algn="r">
               <a:lnSpc>
                 <a:spcPct val="100000"/>
               </a:lnSpc>
@@ -9750,7 +9563,7 @@
               <a:buSzPts val="900"/>
               <a:buFont typeface="Arial"/>
               <a:buNone/>
-              <a:defRPr sz="900" b="0" i="0" u="none" strike="noStrike" cap="none">
+              <a:defRPr b="0" i="0" sz="900" u="none" cap="none" strike="noStrike">
                 <a:solidFill>
                   <a:srgbClr val="757575"/>
                 </a:solidFill>
@@ -9760,7 +9573,7 @@
                 <a:sym typeface="Arial"/>
               </a:defRPr>
             </a:lvl1pPr>
-            <a:lvl2pPr marL="0" marR="0" lvl="1" indent="0" algn="r">
+            <a:lvl2pPr indent="0" lvl="1" marL="0" marR="0" algn="r">
               <a:lnSpc>
                 <a:spcPct val="100000"/>
               </a:lnSpc>
@@ -9776,7 +9589,7 @@
               <a:buSzPts val="900"/>
               <a:buFont typeface="Arial"/>
               <a:buNone/>
-              <a:defRPr sz="900" b="0" i="0" u="none" strike="noStrike" cap="none">
+              <a:defRPr b="0" i="0" sz="900" u="none" cap="none" strike="noStrike">
                 <a:solidFill>
                   <a:srgbClr val="757575"/>
                 </a:solidFill>
@@ -9786,7 +9599,7 @@
                 <a:sym typeface="Arial"/>
               </a:defRPr>
             </a:lvl2pPr>
-            <a:lvl3pPr marL="0" marR="0" lvl="2" indent="0" algn="r">
+            <a:lvl3pPr indent="0" lvl="2" marL="0" marR="0" algn="r">
               <a:lnSpc>
                 <a:spcPct val="100000"/>
               </a:lnSpc>
@@ -9802,7 +9615,7 @@
               <a:buSzPts val="900"/>
               <a:buFont typeface="Arial"/>
               <a:buNone/>
-              <a:defRPr sz="900" b="0" i="0" u="none" strike="noStrike" cap="none">
+              <a:defRPr b="0" i="0" sz="900" u="none" cap="none" strike="noStrike">
                 <a:solidFill>
                   <a:srgbClr val="757575"/>
                 </a:solidFill>
@@ -9812,7 +9625,7 @@
                 <a:sym typeface="Arial"/>
               </a:defRPr>
             </a:lvl3pPr>
-            <a:lvl4pPr marL="0" marR="0" lvl="3" indent="0" algn="r">
+            <a:lvl4pPr indent="0" lvl="3" marL="0" marR="0" algn="r">
               <a:lnSpc>
                 <a:spcPct val="100000"/>
               </a:lnSpc>
@@ -9828,7 +9641,7 @@
               <a:buSzPts val="900"/>
               <a:buFont typeface="Arial"/>
               <a:buNone/>
-              <a:defRPr sz="900" b="0" i="0" u="none" strike="noStrike" cap="none">
+              <a:defRPr b="0" i="0" sz="900" u="none" cap="none" strike="noStrike">
                 <a:solidFill>
                   <a:srgbClr val="757575"/>
                 </a:solidFill>
@@ -9838,7 +9651,7 @@
                 <a:sym typeface="Arial"/>
               </a:defRPr>
             </a:lvl4pPr>
-            <a:lvl5pPr marL="0" marR="0" lvl="4" indent="0" algn="r">
+            <a:lvl5pPr indent="0" lvl="4" marL="0" marR="0" algn="r">
               <a:lnSpc>
                 <a:spcPct val="100000"/>
               </a:lnSpc>
@@ -9854,7 +9667,7 @@
               <a:buSzPts val="900"/>
               <a:buFont typeface="Arial"/>
               <a:buNone/>
-              <a:defRPr sz="900" b="0" i="0" u="none" strike="noStrike" cap="none">
+              <a:defRPr b="0" i="0" sz="900" u="none" cap="none" strike="noStrike">
                 <a:solidFill>
                   <a:srgbClr val="757575"/>
                 </a:solidFill>
@@ -9864,7 +9677,7 @@
                 <a:sym typeface="Arial"/>
               </a:defRPr>
             </a:lvl5pPr>
-            <a:lvl6pPr marL="0" marR="0" lvl="5" indent="0" algn="r">
+            <a:lvl6pPr indent="0" lvl="5" marL="0" marR="0" algn="r">
               <a:lnSpc>
                 <a:spcPct val="100000"/>
               </a:lnSpc>
@@ -9880,7 +9693,7 @@
               <a:buSzPts val="900"/>
               <a:buFont typeface="Arial"/>
               <a:buNone/>
-              <a:defRPr sz="900" b="0" i="0" u="none" strike="noStrike" cap="none">
+              <a:defRPr b="0" i="0" sz="900" u="none" cap="none" strike="noStrike">
                 <a:solidFill>
                   <a:srgbClr val="757575"/>
                 </a:solidFill>
@@ -9890,7 +9703,7 @@
                 <a:sym typeface="Arial"/>
               </a:defRPr>
             </a:lvl6pPr>
-            <a:lvl7pPr marL="0" marR="0" lvl="6" indent="0" algn="r">
+            <a:lvl7pPr indent="0" lvl="6" marL="0" marR="0" algn="r">
               <a:lnSpc>
                 <a:spcPct val="100000"/>
               </a:lnSpc>
@@ -9906,7 +9719,7 @@
               <a:buSzPts val="900"/>
               <a:buFont typeface="Arial"/>
               <a:buNone/>
-              <a:defRPr sz="900" b="0" i="0" u="none" strike="noStrike" cap="none">
+              <a:defRPr b="0" i="0" sz="900" u="none" cap="none" strike="noStrike">
                 <a:solidFill>
                   <a:srgbClr val="757575"/>
                 </a:solidFill>
@@ -9916,7 +9729,7 @@
                 <a:sym typeface="Arial"/>
               </a:defRPr>
             </a:lvl7pPr>
-            <a:lvl8pPr marL="0" marR="0" lvl="7" indent="0" algn="r">
+            <a:lvl8pPr indent="0" lvl="7" marL="0" marR="0" algn="r">
               <a:lnSpc>
                 <a:spcPct val="100000"/>
               </a:lnSpc>
@@ -9932,7 +9745,7 @@
               <a:buSzPts val="900"/>
               <a:buFont typeface="Arial"/>
               <a:buNone/>
-              <a:defRPr sz="900" b="0" i="0" u="none" strike="noStrike" cap="none">
+              <a:defRPr b="0" i="0" sz="900" u="none" cap="none" strike="noStrike">
                 <a:solidFill>
                   <a:srgbClr val="757575"/>
                 </a:solidFill>
@@ -9942,7 +9755,7 @@
                 <a:sym typeface="Arial"/>
               </a:defRPr>
             </a:lvl8pPr>
-            <a:lvl9pPr marL="0" marR="0" lvl="8" indent="0" algn="r">
+            <a:lvl9pPr indent="0" lvl="8" marL="0" marR="0" algn="r">
               <a:lnSpc>
                 <a:spcPct val="100000"/>
               </a:lnSpc>
@@ -9958,7 +9771,7 @@
               <a:buSzPts val="900"/>
               <a:buFont typeface="Arial"/>
               <a:buNone/>
-              <a:defRPr sz="900" b="0" i="0" u="none" strike="noStrike" cap="none">
+              <a:defRPr b="0" i="0" sz="900" u="none" cap="none" strike="noStrike">
                 <a:solidFill>
                   <a:srgbClr val="757575"/>
                 </a:solidFill>
@@ -9970,7 +9783,7 @@
             </a:lvl9pPr>
           </a:lstStyle>
           <a:p>
-            <a:pPr marL="0" lvl="0" indent="0" algn="r" rtl="0">
+            <a:pPr indent="0" lvl="0" marL="0" rtl="0" algn="r">
               <a:spcBef>
                 <a:spcPts val="0"/>
               </a:spcBef>
@@ -9996,11 +9809,11 @@
 </file>
 
 <file path=ppt/slideLayouts/slideLayout8.xml><?xml version="1.0" encoding="utf-8"?>
-<p:sldLayout xmlns:a="http://schemas.openxmlformats.org/drawingml/2006/main" xmlns:r="http://schemas.openxmlformats.org/officeDocument/2006/relationships" xmlns:p="http://schemas.openxmlformats.org/presentationml/2006/main" matchingName="캡션 있는 콘텐츠" type="objTx">
+<p:sldLayout xmlns:a="http://schemas.openxmlformats.org/drawingml/2006/main" xmlns:r="http://schemas.openxmlformats.org/officeDocument/2006/relationships" xmlns:mc="http://schemas.openxmlformats.org/markup-compatibility/2006" xmlns:mv="urn:schemas-microsoft-com:mac:vml" xmlns:p="http://schemas.openxmlformats.org/presentationml/2006/main" xmlns:c="http://schemas.openxmlformats.org/drawingml/2006/chart" xmlns:dgm="http://schemas.openxmlformats.org/drawingml/2006/diagram" xmlns:o="urn:schemas-microsoft-com:office:office" xmlns:v="urn:schemas-microsoft-com:vml" xmlns:pvml="urn:schemas-microsoft-com:office:powerpoint" xmlns:com="http://schemas.openxmlformats.org/drawingml/2006/compatibility" xmlns:p14="http://schemas.microsoft.com/office/powerpoint/2010/main" xmlns:p15="http://schemas.microsoft.com/office/powerpoint/2012/main" xmlns:ahyp="http://schemas.microsoft.com/office/drawing/2018/hyperlinkcolor" matchingName="캡션 있는 콘텐츠" type="objTx">
   <p:cSld name="OBJECT_WITH_CAPTION_TEXT">
     <p:spTree>
       <p:nvGrpSpPr>
-        <p:cNvPr id="1" name="Shape 54"/>
+        <p:cNvPr id="54" name="Shape 54"/>
         <p:cNvGrpSpPr/>
         <p:nvPr/>
       </p:nvGrpSpPr>
@@ -10015,9 +9828,7 @@
       <p:sp>
         <p:nvSpPr>
           <p:cNvPr id="55" name="Google Shape;55;p10"/>
-          <p:cNvSpPr txBox="1">
-            <a:spLocks noGrp="1"/>
-          </p:cNvSpPr>
+          <p:cNvSpPr txBox="1"/>
           <p:nvPr>
             <p:ph type="title"/>
           </p:nvPr>
@@ -10036,7 +9847,7 @@
           </a:ln>
         </p:spPr>
         <p:txBody>
-          <a:bodyPr spcFirstLastPara="1" wrap="square" lIns="91425" tIns="45700" rIns="91425" bIns="45700" anchor="b" anchorCtr="0">
+          <a:bodyPr anchorCtr="0" anchor="b" bIns="45700" lIns="91425" spcFirstLastPara="1" rIns="91425" wrap="square" tIns="45700">
             <a:normAutofit/>
           </a:bodyPr>
           <a:lstStyle>
@@ -10171,19 +9982,15 @@
               <a:defRPr/>
             </a:lvl9pPr>
           </a:lstStyle>
-          <a:p>
-            <a:endParaRPr/>
-          </a:p>
+          <a:p/>
         </p:txBody>
       </p:sp>
       <p:sp>
         <p:nvSpPr>
           <p:cNvPr id="56" name="Google Shape;56;p10"/>
-          <p:cNvSpPr txBox="1">
-            <a:spLocks noGrp="1"/>
-          </p:cNvSpPr>
+          <p:cNvSpPr txBox="1"/>
           <p:nvPr>
-            <p:ph type="body" idx="1"/>
+            <p:ph idx="1" type="body"/>
           </p:nvPr>
         </p:nvSpPr>
         <p:spPr>
@@ -10200,11 +10007,11 @@
           </a:ln>
         </p:spPr>
         <p:txBody>
-          <a:bodyPr spcFirstLastPara="1" wrap="square" lIns="91425" tIns="45700" rIns="91425" bIns="45700" anchor="t" anchorCtr="0">
+          <a:bodyPr anchorCtr="0" anchor="t" bIns="45700" lIns="91425" spcFirstLastPara="1" rIns="91425" wrap="square" tIns="45700">
             <a:normAutofit/>
           </a:bodyPr>
           <a:lstStyle>
-            <a:lvl1pPr marL="457200" lvl="0" indent="-381000" algn="l">
+            <a:lvl1pPr indent="-381000" lvl="0" marL="457200" algn="l">
               <a:lnSpc>
                 <a:spcPct val="90000"/>
               </a:lnSpc>
@@ -10221,7 +10028,7 @@
               <a:buChar char="•"/>
               <a:defRPr sz="2400"/>
             </a:lvl1pPr>
-            <a:lvl2pPr marL="914400" lvl="1" indent="-361950" algn="l">
+            <a:lvl2pPr indent="-361950" lvl="1" marL="914400" algn="l">
               <a:lnSpc>
                 <a:spcPct val="90000"/>
               </a:lnSpc>
@@ -10238,7 +10045,7 @@
               <a:buChar char="•"/>
               <a:defRPr sz="2100"/>
             </a:lvl2pPr>
-            <a:lvl3pPr marL="1371600" lvl="2" indent="-342900" algn="l">
+            <a:lvl3pPr indent="-342900" lvl="2" marL="1371600" algn="l">
               <a:lnSpc>
                 <a:spcPct val="90000"/>
               </a:lnSpc>
@@ -10255,7 +10062,7 @@
               <a:buChar char="•"/>
               <a:defRPr sz="1800"/>
             </a:lvl3pPr>
-            <a:lvl4pPr marL="1828800" lvl="3" indent="-323850" algn="l">
+            <a:lvl4pPr indent="-323850" lvl="3" marL="1828800" algn="l">
               <a:lnSpc>
                 <a:spcPct val="90000"/>
               </a:lnSpc>
@@ -10272,7 +10079,7 @@
               <a:buChar char="•"/>
               <a:defRPr sz="1500"/>
             </a:lvl4pPr>
-            <a:lvl5pPr marL="2286000" lvl="4" indent="-323850" algn="l">
+            <a:lvl5pPr indent="-323850" lvl="4" marL="2286000" algn="l">
               <a:lnSpc>
                 <a:spcPct val="90000"/>
               </a:lnSpc>
@@ -10289,7 +10096,7 @@
               <a:buChar char="•"/>
               <a:defRPr sz="1500"/>
             </a:lvl5pPr>
-            <a:lvl6pPr marL="2743200" lvl="5" indent="-323850" algn="l">
+            <a:lvl6pPr indent="-323850" lvl="5" marL="2743200" algn="l">
               <a:lnSpc>
                 <a:spcPct val="90000"/>
               </a:lnSpc>
@@ -10306,7 +10113,7 @@
               <a:buChar char="•"/>
               <a:defRPr sz="1500"/>
             </a:lvl6pPr>
-            <a:lvl7pPr marL="3200400" lvl="6" indent="-323850" algn="l">
+            <a:lvl7pPr indent="-323850" lvl="6" marL="3200400" algn="l">
               <a:lnSpc>
                 <a:spcPct val="90000"/>
               </a:lnSpc>
@@ -10323,7 +10130,7 @@
               <a:buChar char="•"/>
               <a:defRPr sz="1500"/>
             </a:lvl7pPr>
-            <a:lvl8pPr marL="3657600" lvl="7" indent="-323850" algn="l">
+            <a:lvl8pPr indent="-323850" lvl="7" marL="3657600" algn="l">
               <a:lnSpc>
                 <a:spcPct val="90000"/>
               </a:lnSpc>
@@ -10340,7 +10147,7 @@
               <a:buChar char="•"/>
               <a:defRPr sz="1500"/>
             </a:lvl8pPr>
-            <a:lvl9pPr marL="4114800" lvl="8" indent="-323850" algn="l">
+            <a:lvl9pPr indent="-323850" lvl="8" marL="4114800" algn="l">
               <a:lnSpc>
                 <a:spcPct val="90000"/>
               </a:lnSpc>
@@ -10358,19 +10165,15 @@
               <a:defRPr sz="1500"/>
             </a:lvl9pPr>
           </a:lstStyle>
-          <a:p>
-            <a:endParaRPr/>
-          </a:p>
+          <a:p/>
         </p:txBody>
       </p:sp>
       <p:sp>
         <p:nvSpPr>
           <p:cNvPr id="57" name="Google Shape;57;p10"/>
-          <p:cNvSpPr txBox="1">
-            <a:spLocks noGrp="1"/>
-          </p:cNvSpPr>
+          <p:cNvSpPr txBox="1"/>
           <p:nvPr>
-            <p:ph type="body" idx="2"/>
+            <p:ph idx="2" type="body"/>
           </p:nvPr>
         </p:nvSpPr>
         <p:spPr>
@@ -10387,11 +10190,11 @@
           </a:ln>
         </p:spPr>
         <p:txBody>
-          <a:bodyPr spcFirstLastPara="1" wrap="square" lIns="91425" tIns="45700" rIns="91425" bIns="45700" anchor="t" anchorCtr="0">
+          <a:bodyPr anchorCtr="0" anchor="t" bIns="45700" lIns="91425" spcFirstLastPara="1" rIns="91425" wrap="square" tIns="45700">
             <a:normAutofit/>
           </a:bodyPr>
           <a:lstStyle>
-            <a:lvl1pPr marL="457200" lvl="0" indent="-228600" algn="l">
+            <a:lvl1pPr indent="-228600" lvl="0" marL="457200" algn="l">
               <a:lnSpc>
                 <a:spcPct val="90000"/>
               </a:lnSpc>
@@ -10408,7 +10211,7 @@
               <a:buNone/>
               <a:defRPr sz="1200"/>
             </a:lvl1pPr>
-            <a:lvl2pPr marL="914400" lvl="1" indent="-228600" algn="l">
+            <a:lvl2pPr indent="-228600" lvl="1" marL="914400" algn="l">
               <a:lnSpc>
                 <a:spcPct val="90000"/>
               </a:lnSpc>
@@ -10425,7 +10228,7 @@
               <a:buNone/>
               <a:defRPr sz="1050"/>
             </a:lvl2pPr>
-            <a:lvl3pPr marL="1371600" lvl="2" indent="-228600" algn="l">
+            <a:lvl3pPr indent="-228600" lvl="2" marL="1371600" algn="l">
               <a:lnSpc>
                 <a:spcPct val="90000"/>
               </a:lnSpc>
@@ -10442,7 +10245,7 @@
               <a:buNone/>
               <a:defRPr sz="900"/>
             </a:lvl3pPr>
-            <a:lvl4pPr marL="1828800" lvl="3" indent="-228600" algn="l">
+            <a:lvl4pPr indent="-228600" lvl="3" marL="1828800" algn="l">
               <a:lnSpc>
                 <a:spcPct val="90000"/>
               </a:lnSpc>
@@ -10459,7 +10262,7 @@
               <a:buNone/>
               <a:defRPr sz="750"/>
             </a:lvl4pPr>
-            <a:lvl5pPr marL="2286000" lvl="4" indent="-228600" algn="l">
+            <a:lvl5pPr indent="-228600" lvl="4" marL="2286000" algn="l">
               <a:lnSpc>
                 <a:spcPct val="90000"/>
               </a:lnSpc>
@@ -10476,7 +10279,7 @@
               <a:buNone/>
               <a:defRPr sz="750"/>
             </a:lvl5pPr>
-            <a:lvl6pPr marL="2743200" lvl="5" indent="-228600" algn="l">
+            <a:lvl6pPr indent="-228600" lvl="5" marL="2743200" algn="l">
               <a:lnSpc>
                 <a:spcPct val="90000"/>
               </a:lnSpc>
@@ -10493,7 +10296,7 @@
               <a:buNone/>
               <a:defRPr sz="750"/>
             </a:lvl6pPr>
-            <a:lvl7pPr marL="3200400" lvl="6" indent="-228600" algn="l">
+            <a:lvl7pPr indent="-228600" lvl="6" marL="3200400" algn="l">
               <a:lnSpc>
                 <a:spcPct val="90000"/>
               </a:lnSpc>
@@ -10510,7 +10313,7 @@
               <a:buNone/>
               <a:defRPr sz="750"/>
             </a:lvl7pPr>
-            <a:lvl8pPr marL="3657600" lvl="7" indent="-228600" algn="l">
+            <a:lvl8pPr indent="-228600" lvl="7" marL="3657600" algn="l">
               <a:lnSpc>
                 <a:spcPct val="90000"/>
               </a:lnSpc>
@@ -10527,7 +10330,7 @@
               <a:buNone/>
               <a:defRPr sz="750"/>
             </a:lvl8pPr>
-            <a:lvl9pPr marL="4114800" lvl="8" indent="-228600" algn="l">
+            <a:lvl9pPr indent="-228600" lvl="8" marL="4114800" algn="l">
               <a:lnSpc>
                 <a:spcPct val="90000"/>
               </a:lnSpc>
@@ -10545,19 +10348,15 @@
               <a:defRPr sz="750"/>
             </a:lvl9pPr>
           </a:lstStyle>
-          <a:p>
-            <a:endParaRPr/>
-          </a:p>
+          <a:p/>
         </p:txBody>
       </p:sp>
       <p:sp>
         <p:nvSpPr>
           <p:cNvPr id="58" name="Google Shape;58;p10"/>
-          <p:cNvSpPr txBox="1">
-            <a:spLocks noGrp="1"/>
-          </p:cNvSpPr>
+          <p:cNvSpPr txBox="1"/>
           <p:nvPr>
-            <p:ph type="dt" idx="10"/>
+            <p:ph idx="10" type="dt"/>
           </p:nvPr>
         </p:nvSpPr>
         <p:spPr>
@@ -10574,7 +10373,7 @@
           </a:ln>
         </p:spPr>
         <p:txBody>
-          <a:bodyPr spcFirstLastPara="1" wrap="square" lIns="91425" tIns="45700" rIns="91425" bIns="45700" anchor="ctr" anchorCtr="0">
+          <a:bodyPr anchorCtr="0" anchor="ctr" bIns="45700" lIns="91425" spcFirstLastPara="1" rIns="91425" wrap="square" tIns="45700">
             <a:noAutofit/>
           </a:bodyPr>
           <a:lstStyle>
@@ -10705,19 +10504,15 @@
               <a:defRPr/>
             </a:lvl9pPr>
           </a:lstStyle>
-          <a:p>
-            <a:endParaRPr/>
-          </a:p>
+          <a:p/>
         </p:txBody>
       </p:sp>
       <p:sp>
         <p:nvSpPr>
           <p:cNvPr id="59" name="Google Shape;59;p10"/>
-          <p:cNvSpPr txBox="1">
-            <a:spLocks noGrp="1"/>
-          </p:cNvSpPr>
+          <p:cNvSpPr txBox="1"/>
           <p:nvPr>
-            <p:ph type="ftr" idx="11"/>
+            <p:ph idx="11" type="ftr"/>
           </p:nvPr>
         </p:nvSpPr>
         <p:spPr>
@@ -10734,7 +10529,7 @@
           </a:ln>
         </p:spPr>
         <p:txBody>
-          <a:bodyPr spcFirstLastPara="1" wrap="square" lIns="91425" tIns="45700" rIns="91425" bIns="45700" anchor="ctr" anchorCtr="0">
+          <a:bodyPr anchorCtr="0" anchor="ctr" bIns="45700" lIns="91425" spcFirstLastPara="1" rIns="91425" wrap="square" tIns="45700">
             <a:noAutofit/>
           </a:bodyPr>
           <a:lstStyle>
@@ -10865,19 +10660,15 @@
               <a:defRPr/>
             </a:lvl9pPr>
           </a:lstStyle>
-          <a:p>
-            <a:endParaRPr/>
-          </a:p>
+          <a:p/>
         </p:txBody>
       </p:sp>
       <p:sp>
         <p:nvSpPr>
           <p:cNvPr id="60" name="Google Shape;60;p10"/>
-          <p:cNvSpPr txBox="1">
-            <a:spLocks noGrp="1"/>
-          </p:cNvSpPr>
+          <p:cNvSpPr txBox="1"/>
           <p:nvPr>
-            <p:ph type="sldNum" idx="12"/>
+            <p:ph idx="12" type="sldNum"/>
           </p:nvPr>
         </p:nvSpPr>
         <p:spPr>
@@ -10894,11 +10685,11 @@
           </a:ln>
         </p:spPr>
         <p:txBody>
-          <a:bodyPr spcFirstLastPara="1" wrap="square" lIns="91425" tIns="45700" rIns="91425" bIns="45700" anchor="ctr" anchorCtr="0">
+          <a:bodyPr anchorCtr="0" anchor="ctr" bIns="45700" lIns="91425" spcFirstLastPara="1" rIns="91425" wrap="square" tIns="45700">
             <a:noAutofit/>
           </a:bodyPr>
           <a:lstStyle>
-            <a:lvl1pPr marL="0" marR="0" lvl="0" indent="0" algn="r">
+            <a:lvl1pPr indent="0" lvl="0" marL="0" marR="0" algn="r">
               <a:lnSpc>
                 <a:spcPct val="100000"/>
               </a:lnSpc>
@@ -10914,7 +10705,7 @@
               <a:buSzPts val="900"/>
               <a:buFont typeface="Arial"/>
               <a:buNone/>
-              <a:defRPr sz="900" b="0" i="0" u="none" strike="noStrike" cap="none">
+              <a:defRPr b="0" i="0" sz="900" u="none" cap="none" strike="noStrike">
                 <a:solidFill>
                   <a:srgbClr val="757575"/>
                 </a:solidFill>
@@ -10924,7 +10715,7 @@
                 <a:sym typeface="Arial"/>
               </a:defRPr>
             </a:lvl1pPr>
-            <a:lvl2pPr marL="0" marR="0" lvl="1" indent="0" algn="r">
+            <a:lvl2pPr indent="0" lvl="1" marL="0" marR="0" algn="r">
               <a:lnSpc>
                 <a:spcPct val="100000"/>
               </a:lnSpc>
@@ -10940,7 +10731,7 @@
               <a:buSzPts val="900"/>
               <a:buFont typeface="Arial"/>
               <a:buNone/>
-              <a:defRPr sz="900" b="0" i="0" u="none" strike="noStrike" cap="none">
+              <a:defRPr b="0" i="0" sz="900" u="none" cap="none" strike="noStrike">
                 <a:solidFill>
                   <a:srgbClr val="757575"/>
                 </a:solidFill>
@@ -10950,7 +10741,7 @@
                 <a:sym typeface="Arial"/>
               </a:defRPr>
             </a:lvl2pPr>
-            <a:lvl3pPr marL="0" marR="0" lvl="2" indent="0" algn="r">
+            <a:lvl3pPr indent="0" lvl="2" marL="0" marR="0" algn="r">
               <a:lnSpc>
                 <a:spcPct val="100000"/>
               </a:lnSpc>
@@ -10966,7 +10757,7 @@
               <a:buSzPts val="900"/>
               <a:buFont typeface="Arial"/>
               <a:buNone/>
-              <a:defRPr sz="900" b="0" i="0" u="none" strike="noStrike" cap="none">
+              <a:defRPr b="0" i="0" sz="900" u="none" cap="none" strike="noStrike">
                 <a:solidFill>
                   <a:srgbClr val="757575"/>
                 </a:solidFill>
@@ -10976,7 +10767,7 @@
                 <a:sym typeface="Arial"/>
               </a:defRPr>
             </a:lvl3pPr>
-            <a:lvl4pPr marL="0" marR="0" lvl="3" indent="0" algn="r">
+            <a:lvl4pPr indent="0" lvl="3" marL="0" marR="0" algn="r">
               <a:lnSpc>
                 <a:spcPct val="100000"/>
               </a:lnSpc>
@@ -10992,7 +10783,7 @@
               <a:buSzPts val="900"/>
               <a:buFont typeface="Arial"/>
               <a:buNone/>
-              <a:defRPr sz="900" b="0" i="0" u="none" strike="noStrike" cap="none">
+              <a:defRPr b="0" i="0" sz="900" u="none" cap="none" strike="noStrike">
                 <a:solidFill>
                   <a:srgbClr val="757575"/>
                 </a:solidFill>
@@ -11002,7 +10793,7 @@
                 <a:sym typeface="Arial"/>
               </a:defRPr>
             </a:lvl4pPr>
-            <a:lvl5pPr marL="0" marR="0" lvl="4" indent="0" algn="r">
+            <a:lvl5pPr indent="0" lvl="4" marL="0" marR="0" algn="r">
               <a:lnSpc>
                 <a:spcPct val="100000"/>
               </a:lnSpc>
@@ -11018,7 +10809,7 @@
               <a:buSzPts val="900"/>
               <a:buFont typeface="Arial"/>
               <a:buNone/>
-              <a:defRPr sz="900" b="0" i="0" u="none" strike="noStrike" cap="none">
+              <a:defRPr b="0" i="0" sz="900" u="none" cap="none" strike="noStrike">
                 <a:solidFill>
                   <a:srgbClr val="757575"/>
                 </a:solidFill>
@@ -11028,7 +10819,7 @@
                 <a:sym typeface="Arial"/>
               </a:defRPr>
             </a:lvl5pPr>
-            <a:lvl6pPr marL="0" marR="0" lvl="5" indent="0" algn="r">
+            <a:lvl6pPr indent="0" lvl="5" marL="0" marR="0" algn="r">
               <a:lnSpc>
                 <a:spcPct val="100000"/>
               </a:lnSpc>
@@ -11044,7 +10835,7 @@
               <a:buSzPts val="900"/>
               <a:buFont typeface="Arial"/>
               <a:buNone/>
-              <a:defRPr sz="900" b="0" i="0" u="none" strike="noStrike" cap="none">
+              <a:defRPr b="0" i="0" sz="900" u="none" cap="none" strike="noStrike">
                 <a:solidFill>
                   <a:srgbClr val="757575"/>
                 </a:solidFill>
@@ -11054,7 +10845,7 @@
                 <a:sym typeface="Arial"/>
               </a:defRPr>
             </a:lvl6pPr>
-            <a:lvl7pPr marL="0" marR="0" lvl="6" indent="0" algn="r">
+            <a:lvl7pPr indent="0" lvl="6" marL="0" marR="0" algn="r">
               <a:lnSpc>
                 <a:spcPct val="100000"/>
               </a:lnSpc>
@@ -11070,7 +10861,7 @@
               <a:buSzPts val="900"/>
               <a:buFont typeface="Arial"/>
               <a:buNone/>
-              <a:defRPr sz="900" b="0" i="0" u="none" strike="noStrike" cap="none">
+              <a:defRPr b="0" i="0" sz="900" u="none" cap="none" strike="noStrike">
                 <a:solidFill>
                   <a:srgbClr val="757575"/>
                 </a:solidFill>
@@ -11080,7 +10871,7 @@
                 <a:sym typeface="Arial"/>
               </a:defRPr>
             </a:lvl7pPr>
-            <a:lvl8pPr marL="0" marR="0" lvl="7" indent="0" algn="r">
+            <a:lvl8pPr indent="0" lvl="7" marL="0" marR="0" algn="r">
               <a:lnSpc>
                 <a:spcPct val="100000"/>
               </a:lnSpc>
@@ -11096,7 +10887,7 @@
               <a:buSzPts val="900"/>
               <a:buFont typeface="Arial"/>
               <a:buNone/>
-              <a:defRPr sz="900" b="0" i="0" u="none" strike="noStrike" cap="none">
+              <a:defRPr b="0" i="0" sz="900" u="none" cap="none" strike="noStrike">
                 <a:solidFill>
                   <a:srgbClr val="757575"/>
                 </a:solidFill>
@@ -11106,7 +10897,7 @@
                 <a:sym typeface="Arial"/>
               </a:defRPr>
             </a:lvl8pPr>
-            <a:lvl9pPr marL="0" marR="0" lvl="8" indent="0" algn="r">
+            <a:lvl9pPr indent="0" lvl="8" marL="0" marR="0" algn="r">
               <a:lnSpc>
                 <a:spcPct val="100000"/>
               </a:lnSpc>
@@ -11122,7 +10913,7 @@
               <a:buSzPts val="900"/>
               <a:buFont typeface="Arial"/>
               <a:buNone/>
-              <a:defRPr sz="900" b="0" i="0" u="none" strike="noStrike" cap="none">
+              <a:defRPr b="0" i="0" sz="900" u="none" cap="none" strike="noStrike">
                 <a:solidFill>
                   <a:srgbClr val="757575"/>
                 </a:solidFill>
@@ -11134,7 +10925,7 @@
             </a:lvl9pPr>
           </a:lstStyle>
           <a:p>
-            <a:pPr marL="0" lvl="0" indent="0" algn="r" rtl="0">
+            <a:pPr indent="0" lvl="0" marL="0" rtl="0" algn="r">
               <a:spcBef>
                 <a:spcPts val="0"/>
               </a:spcBef>
@@ -11160,11 +10951,11 @@
 </file>
 
 <file path=ppt/slideLayouts/slideLayout9.xml><?xml version="1.0" encoding="utf-8"?>
-<p:sldLayout xmlns:a="http://schemas.openxmlformats.org/drawingml/2006/main" xmlns:r="http://schemas.openxmlformats.org/officeDocument/2006/relationships" xmlns:p="http://schemas.openxmlformats.org/presentationml/2006/main" matchingName="캡션 있는 그림" type="picTx">
+<p:sldLayout xmlns:a="http://schemas.openxmlformats.org/drawingml/2006/main" xmlns:r="http://schemas.openxmlformats.org/officeDocument/2006/relationships" xmlns:mc="http://schemas.openxmlformats.org/markup-compatibility/2006" xmlns:mv="urn:schemas-microsoft-com:mac:vml" xmlns:p="http://schemas.openxmlformats.org/presentationml/2006/main" xmlns:c="http://schemas.openxmlformats.org/drawingml/2006/chart" xmlns:dgm="http://schemas.openxmlformats.org/drawingml/2006/diagram" xmlns:o="urn:schemas-microsoft-com:office:office" xmlns:v="urn:schemas-microsoft-com:vml" xmlns:pvml="urn:schemas-microsoft-com:office:powerpoint" xmlns:com="http://schemas.openxmlformats.org/drawingml/2006/compatibility" xmlns:p14="http://schemas.microsoft.com/office/powerpoint/2010/main" xmlns:p15="http://schemas.microsoft.com/office/powerpoint/2012/main" xmlns:ahyp="http://schemas.microsoft.com/office/drawing/2018/hyperlinkcolor" matchingName="캡션 있는 그림" type="picTx">
   <p:cSld name="PICTURE_WITH_CAPTION_TEXT">
     <p:spTree>
       <p:nvGrpSpPr>
-        <p:cNvPr id="1" name="Shape 61"/>
+        <p:cNvPr id="61" name="Shape 61"/>
         <p:cNvGrpSpPr/>
         <p:nvPr/>
       </p:nvGrpSpPr>
@@ -11179,9 +10970,7 @@
       <p:sp>
         <p:nvSpPr>
           <p:cNvPr id="62" name="Google Shape;62;p11"/>
-          <p:cNvSpPr txBox="1">
-            <a:spLocks noGrp="1"/>
-          </p:cNvSpPr>
+          <p:cNvSpPr txBox="1"/>
           <p:nvPr>
             <p:ph type="title"/>
           </p:nvPr>
@@ -11200,7 +10989,7 @@
           </a:ln>
         </p:spPr>
         <p:txBody>
-          <a:bodyPr spcFirstLastPara="1" wrap="square" lIns="91425" tIns="45700" rIns="91425" bIns="45700" anchor="b" anchorCtr="0">
+          <a:bodyPr anchorCtr="0" anchor="b" bIns="45700" lIns="91425" spcFirstLastPara="1" rIns="91425" wrap="square" tIns="45700">
             <a:normAutofit/>
           </a:bodyPr>
           <a:lstStyle>
@@ -11335,19 +11124,15 @@
               <a:defRPr/>
             </a:lvl9pPr>
           </a:lstStyle>
-          <a:p>
-            <a:endParaRPr/>
-          </a:p>
+          <a:p/>
         </p:txBody>
       </p:sp>
       <p:sp>
         <p:nvSpPr>
           <p:cNvPr id="63" name="Google Shape;63;p11"/>
-          <p:cNvSpPr>
-            <a:spLocks noGrp="1"/>
-          </p:cNvSpPr>
+          <p:cNvSpPr/>
           <p:nvPr>
-            <p:ph type="pic" idx="2"/>
+            <p:ph idx="2" type="pic"/>
           </p:nvPr>
         </p:nvSpPr>
         <p:spPr>
@@ -11367,11 +11152,9 @@
       <p:sp>
         <p:nvSpPr>
           <p:cNvPr id="64" name="Google Shape;64;p11"/>
-          <p:cNvSpPr txBox="1">
-            <a:spLocks noGrp="1"/>
-          </p:cNvSpPr>
+          <p:cNvSpPr txBox="1"/>
           <p:nvPr>
-            <p:ph type="body" idx="1"/>
+            <p:ph idx="1" type="body"/>
           </p:nvPr>
         </p:nvSpPr>
         <p:spPr>
@@ -11388,11 +11171,11 @@
           </a:ln>
         </p:spPr>
         <p:txBody>
-          <a:bodyPr spcFirstLastPara="1" wrap="square" lIns="91425" tIns="45700" rIns="91425" bIns="45700" anchor="t" anchorCtr="0">
+          <a:bodyPr anchorCtr="0" anchor="t" bIns="45700" lIns="91425" spcFirstLastPara="1" rIns="91425" wrap="square" tIns="45700">
             <a:normAutofit/>
           </a:bodyPr>
           <a:lstStyle>
-            <a:lvl1pPr marL="457200" lvl="0" indent="-228600" algn="l">
+            <a:lvl1pPr indent="-228600" lvl="0" marL="457200" algn="l">
               <a:lnSpc>
                 <a:spcPct val="90000"/>
               </a:lnSpc>
@@ -11409,7 +11192,7 @@
               <a:buNone/>
               <a:defRPr sz="1200"/>
             </a:lvl1pPr>
-            <a:lvl2pPr marL="914400" lvl="1" indent="-228600" algn="l">
+            <a:lvl2pPr indent="-228600" lvl="1" marL="914400" algn="l">
               <a:lnSpc>
                 <a:spcPct val="90000"/>
               </a:lnSpc>
@@ -11426,7 +11209,7 @@
               <a:buNone/>
               <a:defRPr sz="1050"/>
             </a:lvl2pPr>
-            <a:lvl3pPr marL="1371600" lvl="2" indent="-228600" algn="l">
+            <a:lvl3pPr indent="-228600" lvl="2" marL="1371600" algn="l">
               <a:lnSpc>
                 <a:spcPct val="90000"/>
               </a:lnSpc>
@@ -11443,7 +11226,7 @@
               <a:buNone/>
               <a:defRPr sz="900"/>
             </a:lvl3pPr>
-            <a:lvl4pPr marL="1828800" lvl="3" indent="-228600" algn="l">
+            <a:lvl4pPr indent="-228600" lvl="3" marL="1828800" algn="l">
               <a:lnSpc>
                 <a:spcPct val="90000"/>
               </a:lnSpc>
@@ -11460,7 +11243,7 @@
               <a:buNone/>
               <a:defRPr sz="750"/>
             </a:lvl4pPr>
-            <a:lvl5pPr marL="2286000" lvl="4" indent="-228600" algn="l">
+            <a:lvl5pPr indent="-228600" lvl="4" marL="2286000" algn="l">
               <a:lnSpc>
                 <a:spcPct val="90000"/>
               </a:lnSpc>
@@ -11477,7 +11260,7 @@
               <a:buNone/>
               <a:defRPr sz="750"/>
             </a:lvl5pPr>
-            <a:lvl6pPr marL="2743200" lvl="5" indent="-228600" algn="l">
+            <a:lvl6pPr indent="-228600" lvl="5" marL="2743200" algn="l">
               <a:lnSpc>
                 <a:spcPct val="90000"/>
               </a:lnSpc>
@@ -11494,7 +11277,7 @@
               <a:buNone/>
               <a:defRPr sz="750"/>
             </a:lvl6pPr>
-            <a:lvl7pPr marL="3200400" lvl="6" indent="-228600" algn="l">
+            <a:lvl7pPr indent="-228600" lvl="6" marL="3200400" algn="l">
               <a:lnSpc>
                 <a:spcPct val="90000"/>
               </a:lnSpc>
@@ -11511,7 +11294,7 @@
               <a:buNone/>
               <a:defRPr sz="750"/>
             </a:lvl7pPr>
-            <a:lvl8pPr marL="3657600" lvl="7" indent="-228600" algn="l">
+            <a:lvl8pPr indent="-228600" lvl="7" marL="3657600" algn="l">
               <a:lnSpc>
                 <a:spcPct val="90000"/>
               </a:lnSpc>
@@ -11528,7 +11311,7 @@
               <a:buNone/>
               <a:defRPr sz="750"/>
             </a:lvl8pPr>
-            <a:lvl9pPr marL="4114800" lvl="8" indent="-228600" algn="l">
+            <a:lvl9pPr indent="-228600" lvl="8" marL="4114800" algn="l">
               <a:lnSpc>
                 <a:spcPct val="90000"/>
               </a:lnSpc>
@@ -11546,19 +11329,15 @@
               <a:defRPr sz="750"/>
             </a:lvl9pPr>
           </a:lstStyle>
-          <a:p>
-            <a:endParaRPr/>
-          </a:p>
+          <a:p/>
         </p:txBody>
       </p:sp>
       <p:sp>
         <p:nvSpPr>
           <p:cNvPr id="65" name="Google Shape;65;p11"/>
-          <p:cNvSpPr txBox="1">
-            <a:spLocks noGrp="1"/>
-          </p:cNvSpPr>
+          <p:cNvSpPr txBox="1"/>
           <p:nvPr>
-            <p:ph type="dt" idx="10"/>
+            <p:ph idx="10" type="dt"/>
           </p:nvPr>
         </p:nvSpPr>
         <p:spPr>
@@ -11575,7 +11354,7 @@
           </a:ln>
         </p:spPr>
         <p:txBody>
-          <a:bodyPr spcFirstLastPara="1" wrap="square" lIns="91425" tIns="45700" rIns="91425" bIns="45700" anchor="ctr" anchorCtr="0">
+          <a:bodyPr anchorCtr="0" anchor="ctr" bIns="45700" lIns="91425" spcFirstLastPara="1" rIns="91425" wrap="square" tIns="45700">
             <a:noAutofit/>
           </a:bodyPr>
           <a:lstStyle>
@@ -11706,19 +11485,15 @@
               <a:defRPr/>
             </a:lvl9pPr>
           </a:lstStyle>
-          <a:p>
-            <a:endParaRPr/>
-          </a:p>
+          <a:p/>
         </p:txBody>
       </p:sp>
       <p:sp>
         <p:nvSpPr>
           <p:cNvPr id="66" name="Google Shape;66;p11"/>
-          <p:cNvSpPr txBox="1">
-            <a:spLocks noGrp="1"/>
-          </p:cNvSpPr>
+          <p:cNvSpPr txBox="1"/>
           <p:nvPr>
-            <p:ph type="ftr" idx="11"/>
+            <p:ph idx="11" type="ftr"/>
           </p:nvPr>
         </p:nvSpPr>
         <p:spPr>
@@ -11735,7 +11510,7 @@
           </a:ln>
         </p:spPr>
         <p:txBody>
-          <a:bodyPr spcFirstLastPara="1" wrap="square" lIns="91425" tIns="45700" rIns="91425" bIns="45700" anchor="ctr" anchorCtr="0">
+          <a:bodyPr anchorCtr="0" anchor="ctr" bIns="45700" lIns="91425" spcFirstLastPara="1" rIns="91425" wrap="square" tIns="45700">
             <a:noAutofit/>
           </a:bodyPr>
           <a:lstStyle>
@@ -11866,19 +11641,15 @@
               <a:defRPr/>
             </a:lvl9pPr>
           </a:lstStyle>
-          <a:p>
-            <a:endParaRPr/>
-          </a:p>
+          <a:p/>
         </p:txBody>
       </p:sp>
       <p:sp>
         <p:nvSpPr>
           <p:cNvPr id="67" name="Google Shape;67;p11"/>
-          <p:cNvSpPr txBox="1">
-            <a:spLocks noGrp="1"/>
-          </p:cNvSpPr>
+          <p:cNvSpPr txBox="1"/>
           <p:nvPr>
-            <p:ph type="sldNum" idx="12"/>
+            <p:ph idx="12" type="sldNum"/>
           </p:nvPr>
         </p:nvSpPr>
         <p:spPr>
@@ -11895,11 +11666,11 @@
           </a:ln>
         </p:spPr>
         <p:txBody>
-          <a:bodyPr spcFirstLastPara="1" wrap="square" lIns="91425" tIns="45700" rIns="91425" bIns="45700" anchor="ctr" anchorCtr="0">
+          <a:bodyPr anchorCtr="0" anchor="ctr" bIns="45700" lIns="91425" spcFirstLastPara="1" rIns="91425" wrap="square" tIns="45700">
             <a:noAutofit/>
           </a:bodyPr>
           <a:lstStyle>
-            <a:lvl1pPr marL="0" marR="0" lvl="0" indent="0" algn="r">
+            <a:lvl1pPr indent="0" lvl="0" marL="0" marR="0" algn="r">
               <a:lnSpc>
                 <a:spcPct val="100000"/>
               </a:lnSpc>
@@ -11915,7 +11686,7 @@
               <a:buSzPts val="900"/>
               <a:buFont typeface="Arial"/>
               <a:buNone/>
-              <a:defRPr sz="900" b="0" i="0" u="none" strike="noStrike" cap="none">
+              <a:defRPr b="0" i="0" sz="900" u="none" cap="none" strike="noStrike">
                 <a:solidFill>
                   <a:srgbClr val="757575"/>
                 </a:solidFill>
@@ -11925,7 +11696,7 @@
                 <a:sym typeface="Arial"/>
               </a:defRPr>
             </a:lvl1pPr>
-            <a:lvl2pPr marL="0" marR="0" lvl="1" indent="0" algn="r">
+            <a:lvl2pPr indent="0" lvl="1" marL="0" marR="0" algn="r">
               <a:lnSpc>
                 <a:spcPct val="100000"/>
               </a:lnSpc>
@@ -11941,7 +11712,7 @@
               <a:buSzPts val="900"/>
               <a:buFont typeface="Arial"/>
               <a:buNone/>
-              <a:defRPr sz="900" b="0" i="0" u="none" strike="noStrike" cap="none">
+              <a:defRPr b="0" i="0" sz="900" u="none" cap="none" strike="noStrike">
                 <a:solidFill>
                   <a:srgbClr val="757575"/>
                 </a:solidFill>
@@ -11951,7 +11722,7 @@
                 <a:sym typeface="Arial"/>
               </a:defRPr>
             </a:lvl2pPr>
-            <a:lvl3pPr marL="0" marR="0" lvl="2" indent="0" algn="r">
+            <a:lvl3pPr indent="0" lvl="2" marL="0" marR="0" algn="r">
               <a:lnSpc>
                 <a:spcPct val="100000"/>
               </a:lnSpc>
@@ -11967,7 +11738,7 @@
               <a:buSzPts val="900"/>
               <a:buFont typeface="Arial"/>
               <a:buNone/>
-              <a:defRPr sz="900" b="0" i="0" u="none" strike="noStrike" cap="none">
+              <a:defRPr b="0" i="0" sz="900" u="none" cap="none" strike="noStrike">
                 <a:solidFill>
                   <a:srgbClr val="757575"/>
                 </a:solidFill>
@@ -11977,7 +11748,7 @@
                 <a:sym typeface="Arial"/>
               </a:defRPr>
             </a:lvl3pPr>
-            <a:lvl4pPr marL="0" marR="0" lvl="3" indent="0" algn="r">
+            <a:lvl4pPr indent="0" lvl="3" marL="0" marR="0" algn="r">
               <a:lnSpc>
                 <a:spcPct val="100000"/>
               </a:lnSpc>
@@ -11993,7 +11764,7 @@
               <a:buSzPts val="900"/>
               <a:buFont typeface="Arial"/>
               <a:buNone/>
-              <a:defRPr sz="900" b="0" i="0" u="none" strike="noStrike" cap="none">
+              <a:defRPr b="0" i="0" sz="900" u="none" cap="none" strike="noStrike">
                 <a:solidFill>
                   <a:srgbClr val="757575"/>
                 </a:solidFill>
@@ -12003,7 +11774,7 @@
                 <a:sym typeface="Arial"/>
               </a:defRPr>
             </a:lvl4pPr>
-            <a:lvl5pPr marL="0" marR="0" lvl="4" indent="0" algn="r">
+            <a:lvl5pPr indent="0" lvl="4" marL="0" marR="0" algn="r">
               <a:lnSpc>
                 <a:spcPct val="100000"/>
               </a:lnSpc>
@@ -12019,7 +11790,7 @@
               <a:buSzPts val="900"/>
               <a:buFont typeface="Arial"/>
               <a:buNone/>
-              <a:defRPr sz="900" b="0" i="0" u="none" strike="noStrike" cap="none">
+              <a:defRPr b="0" i="0" sz="900" u="none" cap="none" strike="noStrike">
                 <a:solidFill>
                   <a:srgbClr val="757575"/>
                 </a:solidFill>
@@ -12029,7 +11800,7 @@
                 <a:sym typeface="Arial"/>
               </a:defRPr>
             </a:lvl5pPr>
-            <a:lvl6pPr marL="0" marR="0" lvl="5" indent="0" algn="r">
+            <a:lvl6pPr indent="0" lvl="5" marL="0" marR="0" algn="r">
               <a:lnSpc>
                 <a:spcPct val="100000"/>
               </a:lnSpc>
@@ -12045,7 +11816,7 @@
               <a:buSzPts val="900"/>
               <a:buFont typeface="Arial"/>
               <a:buNone/>
-              <a:defRPr sz="900" b="0" i="0" u="none" strike="noStrike" cap="none">
+              <a:defRPr b="0" i="0" sz="900" u="none" cap="none" strike="noStrike">
                 <a:solidFill>
                   <a:srgbClr val="757575"/>
                 </a:solidFill>
@@ -12055,7 +11826,7 @@
                 <a:sym typeface="Arial"/>
               </a:defRPr>
             </a:lvl6pPr>
-            <a:lvl7pPr marL="0" marR="0" lvl="6" indent="0" algn="r">
+            <a:lvl7pPr indent="0" lvl="6" marL="0" marR="0" algn="r">
               <a:lnSpc>
                 <a:spcPct val="100000"/>
               </a:lnSpc>
@@ -12071,7 +11842,7 @@
               <a:buSzPts val="900"/>
               <a:buFont typeface="Arial"/>
               <a:buNone/>
-              <a:defRPr sz="900" b="0" i="0" u="none" strike="noStrike" cap="none">
+              <a:defRPr b="0" i="0" sz="900" u="none" cap="none" strike="noStrike">
                 <a:solidFill>
                   <a:srgbClr val="757575"/>
                 </a:solidFill>
@@ -12081,7 +11852,7 @@
                 <a:sym typeface="Arial"/>
               </a:defRPr>
             </a:lvl7pPr>
-            <a:lvl8pPr marL="0" marR="0" lvl="7" indent="0" algn="r">
+            <a:lvl8pPr indent="0" lvl="7" marL="0" marR="0" algn="r">
               <a:lnSpc>
                 <a:spcPct val="100000"/>
               </a:lnSpc>
@@ -12097,7 +11868,7 @@
               <a:buSzPts val="900"/>
               <a:buFont typeface="Arial"/>
               <a:buNone/>
-              <a:defRPr sz="900" b="0" i="0" u="none" strike="noStrike" cap="none">
+              <a:defRPr b="0" i="0" sz="900" u="none" cap="none" strike="noStrike">
                 <a:solidFill>
                   <a:srgbClr val="757575"/>
                 </a:solidFill>
@@ -12107,7 +11878,7 @@
                 <a:sym typeface="Arial"/>
               </a:defRPr>
             </a:lvl8pPr>
-            <a:lvl9pPr marL="0" marR="0" lvl="8" indent="0" algn="r">
+            <a:lvl9pPr indent="0" lvl="8" marL="0" marR="0" algn="r">
               <a:lnSpc>
                 <a:spcPct val="100000"/>
               </a:lnSpc>
@@ -12123,7 +11894,7 @@
               <a:buSzPts val="900"/>
               <a:buFont typeface="Arial"/>
               <a:buNone/>
-              <a:defRPr sz="900" b="0" i="0" u="none" strike="noStrike" cap="none">
+              <a:defRPr b="0" i="0" sz="900" u="none" cap="none" strike="noStrike">
                 <a:solidFill>
                   <a:srgbClr val="757575"/>
                 </a:solidFill>
@@ -12135,7 +11906,7 @@
             </a:lvl9pPr>
           </a:lstStyle>
           <a:p>
-            <a:pPr marL="0" lvl="0" indent="0" algn="r" rtl="0">
+            <a:pPr indent="0" lvl="0" marL="0" rtl="0" algn="r">
               <a:spcBef>
                 <a:spcPts val="0"/>
               </a:spcBef>
@@ -12161,19 +11932,18 @@
 </file>
 
 <file path=ppt/slideMasters/slideMaster1.xml><?xml version="1.0" encoding="utf-8"?>
-<p:sldMaster xmlns:a="http://schemas.openxmlformats.org/drawingml/2006/main" xmlns:r="http://schemas.openxmlformats.org/officeDocument/2006/relationships" xmlns:p="http://schemas.openxmlformats.org/presentationml/2006/main">
+<p:sldMaster xmlns:a="http://schemas.openxmlformats.org/drawingml/2006/main" xmlns:r="http://schemas.openxmlformats.org/officeDocument/2006/relationships" xmlns:mc="http://schemas.openxmlformats.org/markup-compatibility/2006" xmlns:mv="urn:schemas-microsoft-com:mac:vml" xmlns:p="http://schemas.openxmlformats.org/presentationml/2006/main" xmlns:c="http://schemas.openxmlformats.org/drawingml/2006/chart" xmlns:dgm="http://schemas.openxmlformats.org/drawingml/2006/diagram" xmlns:o="urn:schemas-microsoft-com:office:office" xmlns:v="urn:schemas-microsoft-com:vml" xmlns:pvml="urn:schemas-microsoft-com:office:powerpoint" xmlns:com="http://schemas.openxmlformats.org/drawingml/2006/compatibility" xmlns:p14="http://schemas.microsoft.com/office/powerpoint/2010/main" xmlns:p15="http://schemas.microsoft.com/office/powerpoint/2012/main" xmlns:ahyp="http://schemas.microsoft.com/office/drawing/2018/hyperlinkcolor">
   <p:cSld>
     <p:bg>
       <p:bgPr>
         <a:solidFill>
           <a:schemeClr val="lt1"/>
         </a:solidFill>
-        <a:effectLst/>
       </p:bgPr>
     </p:bg>
     <p:spTree>
       <p:nvGrpSpPr>
-        <p:cNvPr id="1" name="Shape 5"/>
+        <p:cNvPr id="5" name="Shape 5"/>
         <p:cNvGrpSpPr/>
         <p:nvPr/>
       </p:nvGrpSpPr>
@@ -12188,9 +11958,7 @@
       <p:sp>
         <p:nvSpPr>
           <p:cNvPr id="6" name="Google Shape;6;p2"/>
-          <p:cNvSpPr txBox="1">
-            <a:spLocks noGrp="1"/>
-          </p:cNvSpPr>
+          <p:cNvSpPr txBox="1"/>
           <p:nvPr>
             <p:ph type="title"/>
           </p:nvPr>
@@ -12209,11 +11977,11 @@
           </a:ln>
         </p:spPr>
         <p:txBody>
-          <a:bodyPr spcFirstLastPara="1" wrap="square" lIns="91425" tIns="45700" rIns="91425" bIns="45700" anchor="ctr" anchorCtr="0">
+          <a:bodyPr anchorCtr="0" anchor="ctr" bIns="45700" lIns="91425" spcFirstLastPara="1" rIns="91425" wrap="square" tIns="45700">
             <a:normAutofit/>
           </a:bodyPr>
           <a:lstStyle>
-            <a:lvl1pPr marR="0" lvl="0" algn="l" rtl="0">
+            <a:lvl1pPr lvl="0" marR="0" rtl="0" algn="l">
               <a:lnSpc>
                 <a:spcPct val="90000"/>
               </a:lnSpc>
@@ -12229,7 +11997,7 @@
               <a:buSzPts val="3300"/>
               <a:buFont typeface="Play"/>
               <a:buNone/>
-              <a:defRPr sz="3300" b="0" i="0" u="none" strike="noStrike" cap="none">
+              <a:defRPr b="0" i="0" sz="3300" u="none" cap="none" strike="noStrike">
                 <a:solidFill>
                   <a:schemeClr val="dk1"/>
                 </a:solidFill>
@@ -12239,7 +12007,7 @@
                 <a:sym typeface="Play"/>
               </a:defRPr>
             </a:lvl1pPr>
-            <a:lvl2pPr marR="0" lvl="1" algn="l" rtl="0">
+            <a:lvl2pPr lvl="1" marR="0" rtl="0" algn="l">
               <a:lnSpc>
                 <a:spcPct val="100000"/>
               </a:lnSpc>
@@ -12255,7 +12023,7 @@
               <a:buSzPts val="1400"/>
               <a:buFont typeface="Arial"/>
               <a:buNone/>
-              <a:defRPr sz="1800" b="0" i="0" u="none" strike="noStrike" cap="none">
+              <a:defRPr b="0" i="0" sz="1800" u="none" cap="none" strike="noStrike">
                 <a:solidFill>
                   <a:srgbClr val="000000"/>
                 </a:solidFill>
@@ -12265,7 +12033,7 @@
                 <a:sym typeface="Arial"/>
               </a:defRPr>
             </a:lvl2pPr>
-            <a:lvl3pPr marR="0" lvl="2" algn="l" rtl="0">
+            <a:lvl3pPr lvl="2" marR="0" rtl="0" algn="l">
               <a:lnSpc>
                 <a:spcPct val="100000"/>
               </a:lnSpc>
@@ -12281,7 +12049,7 @@
               <a:buSzPts val="1400"/>
               <a:buFont typeface="Arial"/>
               <a:buNone/>
-              <a:defRPr sz="1800" b="0" i="0" u="none" strike="noStrike" cap="none">
+              <a:defRPr b="0" i="0" sz="1800" u="none" cap="none" strike="noStrike">
                 <a:solidFill>
                   <a:srgbClr val="000000"/>
                 </a:solidFill>
@@ -12291,7 +12059,7 @@
                 <a:sym typeface="Arial"/>
               </a:defRPr>
             </a:lvl3pPr>
-            <a:lvl4pPr marR="0" lvl="3" algn="l" rtl="0">
+            <a:lvl4pPr lvl="3" marR="0" rtl="0" algn="l">
               <a:lnSpc>
                 <a:spcPct val="100000"/>
               </a:lnSpc>
@@ -12307,7 +12075,7 @@
               <a:buSzPts val="1400"/>
               <a:buFont typeface="Arial"/>
               <a:buNone/>
-              <a:defRPr sz="1800" b="0" i="0" u="none" strike="noStrike" cap="none">
+              <a:defRPr b="0" i="0" sz="1800" u="none" cap="none" strike="noStrike">
                 <a:solidFill>
                   <a:srgbClr val="000000"/>
                 </a:solidFill>
@@ -12317,7 +12085,7 @@
                 <a:sym typeface="Arial"/>
               </a:defRPr>
             </a:lvl4pPr>
-            <a:lvl5pPr marR="0" lvl="4" algn="l" rtl="0">
+            <a:lvl5pPr lvl="4" marR="0" rtl="0" algn="l">
               <a:lnSpc>
                 <a:spcPct val="100000"/>
               </a:lnSpc>
@@ -12333,7 +12101,7 @@
               <a:buSzPts val="1400"/>
               <a:buFont typeface="Arial"/>
               <a:buNone/>
-              <a:defRPr sz="1800" b="0" i="0" u="none" strike="noStrike" cap="none">
+              <a:defRPr b="0" i="0" sz="1800" u="none" cap="none" strike="noStrike">
                 <a:solidFill>
                   <a:srgbClr val="000000"/>
                 </a:solidFill>
@@ -12343,7 +12111,7 @@
                 <a:sym typeface="Arial"/>
               </a:defRPr>
             </a:lvl5pPr>
-            <a:lvl6pPr marR="0" lvl="5" algn="l" rtl="0">
+            <a:lvl6pPr lvl="5" marR="0" rtl="0" algn="l">
               <a:lnSpc>
                 <a:spcPct val="100000"/>
               </a:lnSpc>
@@ -12359,7 +12127,7 @@
               <a:buSzPts val="1400"/>
               <a:buFont typeface="Arial"/>
               <a:buNone/>
-              <a:defRPr sz="1800" b="0" i="0" u="none" strike="noStrike" cap="none">
+              <a:defRPr b="0" i="0" sz="1800" u="none" cap="none" strike="noStrike">
                 <a:solidFill>
                   <a:srgbClr val="000000"/>
                 </a:solidFill>
@@ -12369,7 +12137,7 @@
                 <a:sym typeface="Arial"/>
               </a:defRPr>
             </a:lvl6pPr>
-            <a:lvl7pPr marR="0" lvl="6" algn="l" rtl="0">
+            <a:lvl7pPr lvl="6" marR="0" rtl="0" algn="l">
               <a:lnSpc>
                 <a:spcPct val="100000"/>
               </a:lnSpc>
@@ -12385,7 +12153,7 @@
               <a:buSzPts val="1400"/>
               <a:buFont typeface="Arial"/>
               <a:buNone/>
-              <a:defRPr sz="1800" b="0" i="0" u="none" strike="noStrike" cap="none">
+              <a:defRPr b="0" i="0" sz="1800" u="none" cap="none" strike="noStrike">
                 <a:solidFill>
                   <a:srgbClr val="000000"/>
                 </a:solidFill>
@@ -12395,7 +12163,7 @@
                 <a:sym typeface="Arial"/>
               </a:defRPr>
             </a:lvl7pPr>
-            <a:lvl8pPr marR="0" lvl="7" algn="l" rtl="0">
+            <a:lvl8pPr lvl="7" marR="0" rtl="0" algn="l">
               <a:lnSpc>
                 <a:spcPct val="100000"/>
               </a:lnSpc>
@@ -12411,7 +12179,7 @@
               <a:buSzPts val="1400"/>
               <a:buFont typeface="Arial"/>
               <a:buNone/>
-              <a:defRPr sz="1800" b="0" i="0" u="none" strike="noStrike" cap="none">
+              <a:defRPr b="0" i="0" sz="1800" u="none" cap="none" strike="noStrike">
                 <a:solidFill>
                   <a:srgbClr val="000000"/>
                 </a:solidFill>
@@ -12421,7 +12189,7 @@
                 <a:sym typeface="Arial"/>
               </a:defRPr>
             </a:lvl8pPr>
-            <a:lvl9pPr marR="0" lvl="8" algn="l" rtl="0">
+            <a:lvl9pPr lvl="8" marR="0" rtl="0" algn="l">
               <a:lnSpc>
                 <a:spcPct val="100000"/>
               </a:lnSpc>
@@ -12437,7 +12205,7 @@
               <a:buSzPts val="1400"/>
               <a:buFont typeface="Arial"/>
               <a:buNone/>
-              <a:defRPr sz="1800" b="0" i="0" u="none" strike="noStrike" cap="none">
+              <a:defRPr b="0" i="0" sz="1800" u="none" cap="none" strike="noStrike">
                 <a:solidFill>
                   <a:srgbClr val="000000"/>
                 </a:solidFill>
@@ -12448,19 +12216,15 @@
               </a:defRPr>
             </a:lvl9pPr>
           </a:lstStyle>
-          <a:p>
-            <a:endParaRPr/>
-          </a:p>
+          <a:p/>
         </p:txBody>
       </p:sp>
       <p:sp>
         <p:nvSpPr>
           <p:cNvPr id="7" name="Google Shape;7;p2"/>
-          <p:cNvSpPr txBox="1">
-            <a:spLocks noGrp="1"/>
-          </p:cNvSpPr>
+          <p:cNvSpPr txBox="1"/>
           <p:nvPr>
-            <p:ph type="body" idx="1"/>
+            <p:ph idx="1" type="body"/>
           </p:nvPr>
         </p:nvSpPr>
         <p:spPr>
@@ -12477,11 +12241,11 @@
           </a:ln>
         </p:spPr>
         <p:txBody>
-          <a:bodyPr spcFirstLastPara="1" wrap="square" lIns="91425" tIns="45700" rIns="91425" bIns="45700" anchor="t" anchorCtr="0">
+          <a:bodyPr anchorCtr="0" anchor="t" bIns="45700" lIns="91425" spcFirstLastPara="1" rIns="91425" wrap="square" tIns="45700">
             <a:normAutofit/>
           </a:bodyPr>
           <a:lstStyle>
-            <a:lvl1pPr marL="457200" marR="0" lvl="0" indent="-361950" algn="l" rtl="0">
+            <a:lvl1pPr indent="-361950" lvl="0" marL="457200" marR="0" rtl="0" algn="l">
               <a:lnSpc>
                 <a:spcPct val="90000"/>
               </a:lnSpc>
@@ -12497,7 +12261,7 @@
               <a:buSzPts val="2100"/>
               <a:buFont typeface="Arial"/>
               <a:buChar char="•"/>
-              <a:defRPr sz="2100" b="0" i="0" u="none" strike="noStrike" cap="none">
+              <a:defRPr b="0" i="0" sz="2100" u="none" cap="none" strike="noStrike">
                 <a:solidFill>
                   <a:schemeClr val="dk1"/>
                 </a:solidFill>
@@ -12507,7 +12271,7 @@
                 <a:sym typeface="Arial"/>
               </a:defRPr>
             </a:lvl1pPr>
-            <a:lvl2pPr marL="914400" marR="0" lvl="1" indent="-342900" algn="l" rtl="0">
+            <a:lvl2pPr indent="-342900" lvl="1" marL="914400" marR="0" rtl="0" algn="l">
               <a:lnSpc>
                 <a:spcPct val="90000"/>
               </a:lnSpc>
@@ -12523,7 +12287,7 @@
               <a:buSzPts val="1800"/>
               <a:buFont typeface="Arial"/>
               <a:buChar char="•"/>
-              <a:defRPr sz="1800" b="0" i="0" u="none" strike="noStrike" cap="none">
+              <a:defRPr b="0" i="0" sz="1800" u="none" cap="none" strike="noStrike">
                 <a:solidFill>
                   <a:schemeClr val="dk1"/>
                 </a:solidFill>
@@ -12533,7 +12297,7 @@
                 <a:sym typeface="Arial"/>
               </a:defRPr>
             </a:lvl2pPr>
-            <a:lvl3pPr marL="1371600" marR="0" lvl="2" indent="-323850" algn="l" rtl="0">
+            <a:lvl3pPr indent="-323850" lvl="2" marL="1371600" marR="0" rtl="0" algn="l">
               <a:lnSpc>
                 <a:spcPct val="90000"/>
               </a:lnSpc>
@@ -12549,7 +12313,7 @@
               <a:buSzPts val="1500"/>
               <a:buFont typeface="Arial"/>
               <a:buChar char="•"/>
-              <a:defRPr sz="1500" b="0" i="0" u="none" strike="noStrike" cap="none">
+              <a:defRPr b="0" i="0" sz="1500" u="none" cap="none" strike="noStrike">
                 <a:solidFill>
                   <a:schemeClr val="dk1"/>
                 </a:solidFill>
@@ -12559,7 +12323,7 @@
                 <a:sym typeface="Arial"/>
               </a:defRPr>
             </a:lvl3pPr>
-            <a:lvl4pPr marL="1828800" marR="0" lvl="3" indent="-314325" algn="l" rtl="0">
+            <a:lvl4pPr indent="-314325" lvl="3" marL="1828800" marR="0" rtl="0" algn="l">
               <a:lnSpc>
                 <a:spcPct val="90000"/>
               </a:lnSpc>
@@ -12575,7 +12339,7 @@
               <a:buSzPts val="1350"/>
               <a:buFont typeface="Arial"/>
               <a:buChar char="•"/>
-              <a:defRPr sz="1350" b="0" i="0" u="none" strike="noStrike" cap="none">
+              <a:defRPr b="0" i="0" sz="1350" u="none" cap="none" strike="noStrike">
                 <a:solidFill>
                   <a:schemeClr val="dk1"/>
                 </a:solidFill>
@@ -12585,7 +12349,7 @@
                 <a:sym typeface="Arial"/>
               </a:defRPr>
             </a:lvl4pPr>
-            <a:lvl5pPr marL="2286000" marR="0" lvl="4" indent="-314325" algn="l" rtl="0">
+            <a:lvl5pPr indent="-314325" lvl="4" marL="2286000" marR="0" rtl="0" algn="l">
               <a:lnSpc>
                 <a:spcPct val="90000"/>
               </a:lnSpc>
@@ -12601,7 +12365,7 @@
               <a:buSzPts val="1350"/>
               <a:buFont typeface="Arial"/>
               <a:buChar char="•"/>
-              <a:defRPr sz="1350" b="0" i="0" u="none" strike="noStrike" cap="none">
+              <a:defRPr b="0" i="0" sz="1350" u="none" cap="none" strike="noStrike">
                 <a:solidFill>
                   <a:schemeClr val="dk1"/>
                 </a:solidFill>
@@ -12611,7 +12375,7 @@
                 <a:sym typeface="Arial"/>
               </a:defRPr>
             </a:lvl5pPr>
-            <a:lvl6pPr marL="2743200" marR="0" lvl="5" indent="-314325" algn="l" rtl="0">
+            <a:lvl6pPr indent="-314325" lvl="5" marL="2743200" marR="0" rtl="0" algn="l">
               <a:lnSpc>
                 <a:spcPct val="90000"/>
               </a:lnSpc>
@@ -12627,7 +12391,7 @@
               <a:buSzPts val="1350"/>
               <a:buFont typeface="Arial"/>
               <a:buChar char="•"/>
-              <a:defRPr sz="1350" b="0" i="0" u="none" strike="noStrike" cap="none">
+              <a:defRPr b="0" i="0" sz="1350" u="none" cap="none" strike="noStrike">
                 <a:solidFill>
                   <a:schemeClr val="dk1"/>
                 </a:solidFill>
@@ -12637,7 +12401,7 @@
                 <a:sym typeface="Arial"/>
               </a:defRPr>
             </a:lvl6pPr>
-            <a:lvl7pPr marL="3200400" marR="0" lvl="6" indent="-314325" algn="l" rtl="0">
+            <a:lvl7pPr indent="-314325" lvl="6" marL="3200400" marR="0" rtl="0" algn="l">
               <a:lnSpc>
                 <a:spcPct val="90000"/>
               </a:lnSpc>
@@ -12653,7 +12417,7 @@
               <a:buSzPts val="1350"/>
               <a:buFont typeface="Arial"/>
               <a:buChar char="•"/>
-              <a:defRPr sz="1350" b="0" i="0" u="none" strike="noStrike" cap="none">
+              <a:defRPr b="0" i="0" sz="1350" u="none" cap="none" strike="noStrike">
                 <a:solidFill>
                   <a:schemeClr val="dk1"/>
                 </a:solidFill>
@@ -12663,7 +12427,7 @@
                 <a:sym typeface="Arial"/>
               </a:defRPr>
             </a:lvl7pPr>
-            <a:lvl8pPr marL="3657600" marR="0" lvl="7" indent="-314325" algn="l" rtl="0">
+            <a:lvl8pPr indent="-314325" lvl="7" marL="3657600" marR="0" rtl="0" algn="l">
               <a:lnSpc>
                 <a:spcPct val="90000"/>
               </a:lnSpc>
@@ -12679,7 +12443,7 @@
               <a:buSzPts val="1350"/>
               <a:buFont typeface="Arial"/>
               <a:buChar char="•"/>
-              <a:defRPr sz="1350" b="0" i="0" u="none" strike="noStrike" cap="none">
+              <a:defRPr b="0" i="0" sz="1350" u="none" cap="none" strike="noStrike">
                 <a:solidFill>
                   <a:schemeClr val="dk1"/>
                 </a:solidFill>
@@ -12689,7 +12453,7 @@
                 <a:sym typeface="Arial"/>
               </a:defRPr>
             </a:lvl8pPr>
-            <a:lvl9pPr marL="4114800" marR="0" lvl="8" indent="-314325" algn="l" rtl="0">
+            <a:lvl9pPr indent="-314325" lvl="8" marL="4114800" marR="0" rtl="0" algn="l">
               <a:lnSpc>
                 <a:spcPct val="90000"/>
               </a:lnSpc>
@@ -12705,7 +12469,7 @@
               <a:buSzPts val="1350"/>
               <a:buFont typeface="Arial"/>
               <a:buChar char="•"/>
-              <a:defRPr sz="1350" b="0" i="0" u="none" strike="noStrike" cap="none">
+              <a:defRPr b="0" i="0" sz="1350" u="none" cap="none" strike="noStrike">
                 <a:solidFill>
                   <a:schemeClr val="dk1"/>
                 </a:solidFill>
@@ -12716,19 +12480,15 @@
               </a:defRPr>
             </a:lvl9pPr>
           </a:lstStyle>
-          <a:p>
-            <a:endParaRPr/>
-          </a:p>
+          <a:p/>
         </p:txBody>
       </p:sp>
       <p:sp>
         <p:nvSpPr>
           <p:cNvPr id="8" name="Google Shape;8;p2"/>
-          <p:cNvSpPr txBox="1">
-            <a:spLocks noGrp="1"/>
-          </p:cNvSpPr>
+          <p:cNvSpPr txBox="1"/>
           <p:nvPr>
-            <p:ph type="dt" idx="10"/>
+            <p:ph idx="10" type="dt"/>
           </p:nvPr>
         </p:nvSpPr>
         <p:spPr>
@@ -12745,11 +12505,11 @@
           </a:ln>
         </p:spPr>
         <p:txBody>
-          <a:bodyPr spcFirstLastPara="1" wrap="square" lIns="91425" tIns="45700" rIns="91425" bIns="45700" anchor="ctr" anchorCtr="0">
+          <a:bodyPr anchorCtr="0" anchor="ctr" bIns="45700" lIns="91425" spcFirstLastPara="1" rIns="91425" wrap="square" tIns="45700">
             <a:noAutofit/>
           </a:bodyPr>
           <a:lstStyle>
-            <a:lvl1pPr marR="0" lvl="0" algn="l" rtl="0">
+            <a:lvl1pPr lvl="0" marR="0" rtl="0" algn="l">
               <a:lnSpc>
                 <a:spcPct val="100000"/>
               </a:lnSpc>
@@ -12765,7 +12525,7 @@
               <a:buSzPts val="1400"/>
               <a:buFont typeface="Arial"/>
               <a:buNone/>
-              <a:defRPr sz="900" b="0" i="0" u="none" strike="noStrike" cap="none">
+              <a:defRPr b="0" i="0" sz="900" u="none" cap="none" strike="noStrike">
                 <a:solidFill>
                   <a:srgbClr val="757575"/>
                 </a:solidFill>
@@ -12775,7 +12535,7 @@
                 <a:sym typeface="Arial"/>
               </a:defRPr>
             </a:lvl1pPr>
-            <a:lvl2pPr marR="0" lvl="1" algn="l" rtl="0">
+            <a:lvl2pPr lvl="1" marR="0" rtl="0" algn="l">
               <a:lnSpc>
                 <a:spcPct val="100000"/>
               </a:lnSpc>
@@ -12791,7 +12551,7 @@
               <a:buSzPts val="1400"/>
               <a:buFont typeface="Arial"/>
               <a:buNone/>
-              <a:defRPr sz="1800" b="0" i="0" u="none" strike="noStrike" cap="none">
+              <a:defRPr b="0" i="0" sz="1800" u="none" cap="none" strike="noStrike">
                 <a:solidFill>
                   <a:schemeClr val="dk1"/>
                 </a:solidFill>
@@ -12801,7 +12561,7 @@
                 <a:sym typeface="Arial"/>
               </a:defRPr>
             </a:lvl2pPr>
-            <a:lvl3pPr marR="0" lvl="2" algn="l" rtl="0">
+            <a:lvl3pPr lvl="2" marR="0" rtl="0" algn="l">
               <a:lnSpc>
                 <a:spcPct val="100000"/>
               </a:lnSpc>
@@ -12817,7 +12577,7 @@
               <a:buSzPts val="1400"/>
               <a:buFont typeface="Arial"/>
               <a:buNone/>
-              <a:defRPr sz="1800" b="0" i="0" u="none" strike="noStrike" cap="none">
+              <a:defRPr b="0" i="0" sz="1800" u="none" cap="none" strike="noStrike">
                 <a:solidFill>
                   <a:schemeClr val="dk1"/>
                 </a:solidFill>
@@ -12827,7 +12587,7 @@
                 <a:sym typeface="Arial"/>
               </a:defRPr>
             </a:lvl3pPr>
-            <a:lvl4pPr marR="0" lvl="3" algn="l" rtl="0">
+            <a:lvl4pPr lvl="3" marR="0" rtl="0" algn="l">
               <a:lnSpc>
                 <a:spcPct val="100000"/>
               </a:lnSpc>
@@ -12843,7 +12603,7 @@
               <a:buSzPts val="1400"/>
               <a:buFont typeface="Arial"/>
               <a:buNone/>
-              <a:defRPr sz="1800" b="0" i="0" u="none" strike="noStrike" cap="none">
+              <a:defRPr b="0" i="0" sz="1800" u="none" cap="none" strike="noStrike">
                 <a:solidFill>
                   <a:schemeClr val="dk1"/>
                 </a:solidFill>
@@ -12853,7 +12613,7 @@
                 <a:sym typeface="Arial"/>
               </a:defRPr>
             </a:lvl4pPr>
-            <a:lvl5pPr marR="0" lvl="4" algn="l" rtl="0">
+            <a:lvl5pPr lvl="4" marR="0" rtl="0" algn="l">
               <a:lnSpc>
                 <a:spcPct val="100000"/>
               </a:lnSpc>
@@ -12869,7 +12629,7 @@
               <a:buSzPts val="1400"/>
               <a:buFont typeface="Arial"/>
               <a:buNone/>
-              <a:defRPr sz="1800" b="0" i="0" u="none" strike="noStrike" cap="none">
+              <a:defRPr b="0" i="0" sz="1800" u="none" cap="none" strike="noStrike">
                 <a:solidFill>
                   <a:schemeClr val="dk1"/>
                 </a:solidFill>
@@ -12879,7 +12639,7 @@
                 <a:sym typeface="Arial"/>
               </a:defRPr>
             </a:lvl5pPr>
-            <a:lvl6pPr marR="0" lvl="5" algn="l" rtl="0">
+            <a:lvl6pPr lvl="5" marR="0" rtl="0" algn="l">
               <a:lnSpc>
                 <a:spcPct val="100000"/>
               </a:lnSpc>
@@ -12895,7 +12655,7 @@
               <a:buSzPts val="1400"/>
               <a:buFont typeface="Arial"/>
               <a:buNone/>
-              <a:defRPr sz="1800" b="0" i="0" u="none" strike="noStrike" cap="none">
+              <a:defRPr b="0" i="0" sz="1800" u="none" cap="none" strike="noStrike">
                 <a:solidFill>
                   <a:schemeClr val="dk1"/>
                 </a:solidFill>
@@ -12905,7 +12665,7 @@
                 <a:sym typeface="Arial"/>
               </a:defRPr>
             </a:lvl6pPr>
-            <a:lvl7pPr marR="0" lvl="6" algn="l" rtl="0">
+            <a:lvl7pPr lvl="6" marR="0" rtl="0" algn="l">
               <a:lnSpc>
                 <a:spcPct val="100000"/>
               </a:lnSpc>
@@ -12921,7 +12681,7 @@
               <a:buSzPts val="1400"/>
               <a:buFont typeface="Arial"/>
               <a:buNone/>
-              <a:defRPr sz="1800" b="0" i="0" u="none" strike="noStrike" cap="none">
+              <a:defRPr b="0" i="0" sz="1800" u="none" cap="none" strike="noStrike">
                 <a:solidFill>
                   <a:schemeClr val="dk1"/>
                 </a:solidFill>
@@ -12931,7 +12691,7 @@
                 <a:sym typeface="Arial"/>
               </a:defRPr>
             </a:lvl7pPr>
-            <a:lvl8pPr marR="0" lvl="7" algn="l" rtl="0">
+            <a:lvl8pPr lvl="7" marR="0" rtl="0" algn="l">
               <a:lnSpc>
                 <a:spcPct val="100000"/>
               </a:lnSpc>
@@ -12947,7 +12707,7 @@
               <a:buSzPts val="1400"/>
               <a:buFont typeface="Arial"/>
               <a:buNone/>
-              <a:defRPr sz="1800" b="0" i="0" u="none" strike="noStrike" cap="none">
+              <a:defRPr b="0" i="0" sz="1800" u="none" cap="none" strike="noStrike">
                 <a:solidFill>
                   <a:schemeClr val="dk1"/>
                 </a:solidFill>
@@ -12957,7 +12717,7 @@
                 <a:sym typeface="Arial"/>
               </a:defRPr>
             </a:lvl8pPr>
-            <a:lvl9pPr marR="0" lvl="8" algn="l" rtl="0">
+            <a:lvl9pPr lvl="8" marR="0" rtl="0" algn="l">
               <a:lnSpc>
                 <a:spcPct val="100000"/>
               </a:lnSpc>
@@ -12973,7 +12733,7 @@
               <a:buSzPts val="1400"/>
               <a:buFont typeface="Arial"/>
               <a:buNone/>
-              <a:defRPr sz="1800" b="0" i="0" u="none" strike="noStrike" cap="none">
+              <a:defRPr b="0" i="0" sz="1800" u="none" cap="none" strike="noStrike">
                 <a:solidFill>
                   <a:schemeClr val="dk1"/>
                 </a:solidFill>
@@ -12984,19 +12744,15 @@
               </a:defRPr>
             </a:lvl9pPr>
           </a:lstStyle>
-          <a:p>
-            <a:endParaRPr/>
-          </a:p>
+          <a:p/>
         </p:txBody>
       </p:sp>
       <p:sp>
         <p:nvSpPr>
           <p:cNvPr id="9" name="Google Shape;9;p2"/>
-          <p:cNvSpPr txBox="1">
-            <a:spLocks noGrp="1"/>
-          </p:cNvSpPr>
+          <p:cNvSpPr txBox="1"/>
           <p:nvPr>
-            <p:ph type="ftr" idx="11"/>
+            <p:ph idx="11" type="ftr"/>
           </p:nvPr>
         </p:nvSpPr>
         <p:spPr>
@@ -13013,11 +12769,11 @@
           </a:ln>
         </p:spPr>
         <p:txBody>
-          <a:bodyPr spcFirstLastPara="1" wrap="square" lIns="91425" tIns="45700" rIns="91425" bIns="45700" anchor="ctr" anchorCtr="0">
+          <a:bodyPr anchorCtr="0" anchor="ctr" bIns="45700" lIns="91425" spcFirstLastPara="1" rIns="91425" wrap="square" tIns="45700">
             <a:noAutofit/>
           </a:bodyPr>
           <a:lstStyle>
-            <a:lvl1pPr marR="0" lvl="0" algn="ctr" rtl="0">
+            <a:lvl1pPr lvl="0" marR="0" rtl="0" algn="ctr">
               <a:lnSpc>
                 <a:spcPct val="100000"/>
               </a:lnSpc>
@@ -13033,7 +12789,7 @@
               <a:buSzPts val="1400"/>
               <a:buFont typeface="Arial"/>
               <a:buNone/>
-              <a:defRPr sz="900" b="0" i="0" u="none" strike="noStrike" cap="none">
+              <a:defRPr b="0" i="0" sz="900" u="none" cap="none" strike="noStrike">
                 <a:solidFill>
                   <a:srgbClr val="757575"/>
                 </a:solidFill>
@@ -13043,7 +12799,7 @@
                 <a:sym typeface="Arial"/>
               </a:defRPr>
             </a:lvl1pPr>
-            <a:lvl2pPr marR="0" lvl="1" algn="l" rtl="0">
+            <a:lvl2pPr lvl="1" marR="0" rtl="0" algn="l">
               <a:lnSpc>
                 <a:spcPct val="100000"/>
               </a:lnSpc>
@@ -13059,7 +12815,7 @@
               <a:buSzPts val="1400"/>
               <a:buFont typeface="Arial"/>
               <a:buNone/>
-              <a:defRPr sz="1800" b="0" i="0" u="none" strike="noStrike" cap="none">
+              <a:defRPr b="0" i="0" sz="1800" u="none" cap="none" strike="noStrike">
                 <a:solidFill>
                   <a:schemeClr val="dk1"/>
                 </a:solidFill>
@@ -13069,7 +12825,7 @@
                 <a:sym typeface="Arial"/>
               </a:defRPr>
             </a:lvl2pPr>
-            <a:lvl3pPr marR="0" lvl="2" algn="l" rtl="0">
+            <a:lvl3pPr lvl="2" marR="0" rtl="0" algn="l">
               <a:lnSpc>
                 <a:spcPct val="100000"/>
               </a:lnSpc>
@@ -13085,7 +12841,7 @@
               <a:buSzPts val="1400"/>
               <a:buFont typeface="Arial"/>
               <a:buNone/>
-              <a:defRPr sz="1800" b="0" i="0" u="none" strike="noStrike" cap="none">
+              <a:defRPr b="0" i="0" sz="1800" u="none" cap="none" strike="noStrike">
                 <a:solidFill>
                   <a:schemeClr val="dk1"/>
                 </a:solidFill>
@@ -13095,7 +12851,7 @@
                 <a:sym typeface="Arial"/>
               </a:defRPr>
             </a:lvl3pPr>
-            <a:lvl4pPr marR="0" lvl="3" algn="l" rtl="0">
+            <a:lvl4pPr lvl="3" marR="0" rtl="0" algn="l">
               <a:lnSpc>
                 <a:spcPct val="100000"/>
               </a:lnSpc>
@@ -13111,7 +12867,7 @@
               <a:buSzPts val="1400"/>
               <a:buFont typeface="Arial"/>
               <a:buNone/>
-              <a:defRPr sz="1800" b="0" i="0" u="none" strike="noStrike" cap="none">
+              <a:defRPr b="0" i="0" sz="1800" u="none" cap="none" strike="noStrike">
                 <a:solidFill>
                   <a:schemeClr val="dk1"/>
                 </a:solidFill>
@@ -13121,7 +12877,7 @@
                 <a:sym typeface="Arial"/>
               </a:defRPr>
             </a:lvl4pPr>
-            <a:lvl5pPr marR="0" lvl="4" algn="l" rtl="0">
+            <a:lvl5pPr lvl="4" marR="0" rtl="0" algn="l">
               <a:lnSpc>
                 <a:spcPct val="100000"/>
               </a:lnSpc>
@@ -13137,7 +12893,7 @@
               <a:buSzPts val="1400"/>
               <a:buFont typeface="Arial"/>
               <a:buNone/>
-              <a:defRPr sz="1800" b="0" i="0" u="none" strike="noStrike" cap="none">
+              <a:defRPr b="0" i="0" sz="1800" u="none" cap="none" strike="noStrike">
                 <a:solidFill>
                   <a:schemeClr val="dk1"/>
                 </a:solidFill>
@@ -13147,7 +12903,7 @@
                 <a:sym typeface="Arial"/>
               </a:defRPr>
             </a:lvl5pPr>
-            <a:lvl6pPr marR="0" lvl="5" algn="l" rtl="0">
+            <a:lvl6pPr lvl="5" marR="0" rtl="0" algn="l">
               <a:lnSpc>
                 <a:spcPct val="100000"/>
               </a:lnSpc>
@@ -13163,7 +12919,7 @@
               <a:buSzPts val="1400"/>
               <a:buFont typeface="Arial"/>
               <a:buNone/>
-              <a:defRPr sz="1800" b="0" i="0" u="none" strike="noStrike" cap="none">
+              <a:defRPr b="0" i="0" sz="1800" u="none" cap="none" strike="noStrike">
                 <a:solidFill>
                   <a:schemeClr val="dk1"/>
                 </a:solidFill>
@@ -13173,7 +12929,7 @@
                 <a:sym typeface="Arial"/>
               </a:defRPr>
             </a:lvl6pPr>
-            <a:lvl7pPr marR="0" lvl="6" algn="l" rtl="0">
+            <a:lvl7pPr lvl="6" marR="0" rtl="0" algn="l">
               <a:lnSpc>
                 <a:spcPct val="100000"/>
               </a:lnSpc>
@@ -13189,7 +12945,7 @@
               <a:buSzPts val="1400"/>
               <a:buFont typeface="Arial"/>
               <a:buNone/>
-              <a:defRPr sz="1800" b="0" i="0" u="none" strike="noStrike" cap="none">
+              <a:defRPr b="0" i="0" sz="1800" u="none" cap="none" strike="noStrike">
                 <a:solidFill>
                   <a:schemeClr val="dk1"/>
                 </a:solidFill>
@@ -13199,7 +12955,7 @@
                 <a:sym typeface="Arial"/>
               </a:defRPr>
             </a:lvl7pPr>
-            <a:lvl8pPr marR="0" lvl="7" algn="l" rtl="0">
+            <a:lvl8pPr lvl="7" marR="0" rtl="0" algn="l">
               <a:lnSpc>
                 <a:spcPct val="100000"/>
               </a:lnSpc>
@@ -13215,7 +12971,7 @@
               <a:buSzPts val="1400"/>
               <a:buFont typeface="Arial"/>
               <a:buNone/>
-              <a:defRPr sz="1800" b="0" i="0" u="none" strike="noStrike" cap="none">
+              <a:defRPr b="0" i="0" sz="1800" u="none" cap="none" strike="noStrike">
                 <a:solidFill>
                   <a:schemeClr val="dk1"/>
                 </a:solidFill>
@@ -13225,7 +12981,7 @@
                 <a:sym typeface="Arial"/>
               </a:defRPr>
             </a:lvl8pPr>
-            <a:lvl9pPr marR="0" lvl="8" algn="l" rtl="0">
+            <a:lvl9pPr lvl="8" marR="0" rtl="0" algn="l">
               <a:lnSpc>
                 <a:spcPct val="100000"/>
               </a:lnSpc>
@@ -13241,7 +12997,7 @@
               <a:buSzPts val="1400"/>
               <a:buFont typeface="Arial"/>
               <a:buNone/>
-              <a:defRPr sz="1800" b="0" i="0" u="none" strike="noStrike" cap="none">
+              <a:defRPr b="0" i="0" sz="1800" u="none" cap="none" strike="noStrike">
                 <a:solidFill>
                   <a:schemeClr val="dk1"/>
                 </a:solidFill>
@@ -13252,19 +13008,15 @@
               </a:defRPr>
             </a:lvl9pPr>
           </a:lstStyle>
-          <a:p>
-            <a:endParaRPr/>
-          </a:p>
+          <a:p/>
         </p:txBody>
       </p:sp>
       <p:sp>
         <p:nvSpPr>
           <p:cNvPr id="10" name="Google Shape;10;p2"/>
-          <p:cNvSpPr txBox="1">
-            <a:spLocks noGrp="1"/>
-          </p:cNvSpPr>
+          <p:cNvSpPr txBox="1"/>
           <p:nvPr>
-            <p:ph type="sldNum" idx="12"/>
+            <p:ph idx="12" type="sldNum"/>
           </p:nvPr>
         </p:nvSpPr>
         <p:spPr>
@@ -13281,11 +13033,11 @@
           </a:ln>
         </p:spPr>
         <p:txBody>
-          <a:bodyPr spcFirstLastPara="1" wrap="square" lIns="91425" tIns="45700" rIns="91425" bIns="45700" anchor="ctr" anchorCtr="0">
+          <a:bodyPr anchorCtr="0" anchor="ctr" bIns="45700" lIns="91425" spcFirstLastPara="1" rIns="91425" wrap="square" tIns="45700">
             <a:noAutofit/>
           </a:bodyPr>
           <a:lstStyle>
-            <a:lvl1pPr marL="0" marR="0" lvl="0" indent="0" algn="r" rtl="0">
+            <a:lvl1pPr indent="0" lvl="0" marL="0" marR="0" rtl="0" algn="r">
               <a:lnSpc>
                 <a:spcPct val="100000"/>
               </a:lnSpc>
@@ -13301,7 +13053,7 @@
               <a:buSzPts val="900"/>
               <a:buFont typeface="Arial"/>
               <a:buNone/>
-              <a:defRPr sz="900" b="0" i="0" u="none" strike="noStrike" cap="none">
+              <a:defRPr b="0" i="0" sz="900" u="none" cap="none" strike="noStrike">
                 <a:solidFill>
                   <a:srgbClr val="757575"/>
                 </a:solidFill>
@@ -13311,7 +13063,7 @@
                 <a:sym typeface="Arial"/>
               </a:defRPr>
             </a:lvl1pPr>
-            <a:lvl2pPr marL="0" marR="0" lvl="1" indent="0" algn="r" rtl="0">
+            <a:lvl2pPr indent="0" lvl="1" marL="0" marR="0" rtl="0" algn="r">
               <a:lnSpc>
                 <a:spcPct val="100000"/>
               </a:lnSpc>
@@ -13327,7 +13079,7 @@
               <a:buSzPts val="900"/>
               <a:buFont typeface="Arial"/>
               <a:buNone/>
-              <a:defRPr sz="900" b="0" i="0" u="none" strike="noStrike" cap="none">
+              <a:defRPr b="0" i="0" sz="900" u="none" cap="none" strike="noStrike">
                 <a:solidFill>
                   <a:srgbClr val="757575"/>
                 </a:solidFill>
@@ -13337,7 +13089,7 @@
                 <a:sym typeface="Arial"/>
               </a:defRPr>
             </a:lvl2pPr>
-            <a:lvl3pPr marL="0" marR="0" lvl="2" indent="0" algn="r" rtl="0">
+            <a:lvl3pPr indent="0" lvl="2" marL="0" marR="0" rtl="0" algn="r">
               <a:lnSpc>
                 <a:spcPct val="100000"/>
               </a:lnSpc>
@@ -13353,7 +13105,7 @@
               <a:buSzPts val="900"/>
               <a:buFont typeface="Arial"/>
               <a:buNone/>
-              <a:defRPr sz="900" b="0" i="0" u="none" strike="noStrike" cap="none">
+              <a:defRPr b="0" i="0" sz="900" u="none" cap="none" strike="noStrike">
                 <a:solidFill>
                   <a:srgbClr val="757575"/>
                 </a:solidFill>
@@ -13363,7 +13115,7 @@
                 <a:sym typeface="Arial"/>
               </a:defRPr>
             </a:lvl3pPr>
-            <a:lvl4pPr marL="0" marR="0" lvl="3" indent="0" algn="r" rtl="0">
+            <a:lvl4pPr indent="0" lvl="3" marL="0" marR="0" rtl="0" algn="r">
               <a:lnSpc>
                 <a:spcPct val="100000"/>
               </a:lnSpc>
@@ -13379,7 +13131,7 @@
               <a:buSzPts val="900"/>
               <a:buFont typeface="Arial"/>
               <a:buNone/>
-              <a:defRPr sz="900" b="0" i="0" u="none" strike="noStrike" cap="none">
+              <a:defRPr b="0" i="0" sz="900" u="none" cap="none" strike="noStrike">
                 <a:solidFill>
                   <a:srgbClr val="757575"/>
                 </a:solidFill>
@@ -13389,7 +13141,7 @@
                 <a:sym typeface="Arial"/>
               </a:defRPr>
             </a:lvl4pPr>
-            <a:lvl5pPr marL="0" marR="0" lvl="4" indent="0" algn="r" rtl="0">
+            <a:lvl5pPr indent="0" lvl="4" marL="0" marR="0" rtl="0" algn="r">
               <a:lnSpc>
                 <a:spcPct val="100000"/>
               </a:lnSpc>
@@ -13405,7 +13157,7 @@
               <a:buSzPts val="900"/>
               <a:buFont typeface="Arial"/>
               <a:buNone/>
-              <a:defRPr sz="900" b="0" i="0" u="none" strike="noStrike" cap="none">
+              <a:defRPr b="0" i="0" sz="900" u="none" cap="none" strike="noStrike">
                 <a:solidFill>
                   <a:srgbClr val="757575"/>
                 </a:solidFill>
@@ -13415,7 +13167,7 @@
                 <a:sym typeface="Arial"/>
               </a:defRPr>
             </a:lvl5pPr>
-            <a:lvl6pPr marL="0" marR="0" lvl="5" indent="0" algn="r" rtl="0">
+            <a:lvl6pPr indent="0" lvl="5" marL="0" marR="0" rtl="0" algn="r">
               <a:lnSpc>
                 <a:spcPct val="100000"/>
               </a:lnSpc>
@@ -13431,7 +13183,7 @@
               <a:buSzPts val="900"/>
               <a:buFont typeface="Arial"/>
               <a:buNone/>
-              <a:defRPr sz="900" b="0" i="0" u="none" strike="noStrike" cap="none">
+              <a:defRPr b="0" i="0" sz="900" u="none" cap="none" strike="noStrike">
                 <a:solidFill>
                   <a:srgbClr val="757575"/>
                 </a:solidFill>
@@ -13441,7 +13193,7 @@
                 <a:sym typeface="Arial"/>
               </a:defRPr>
             </a:lvl6pPr>
-            <a:lvl7pPr marL="0" marR="0" lvl="6" indent="0" algn="r" rtl="0">
+            <a:lvl7pPr indent="0" lvl="6" marL="0" marR="0" rtl="0" algn="r">
               <a:lnSpc>
                 <a:spcPct val="100000"/>
               </a:lnSpc>
@@ -13457,7 +13209,7 @@
               <a:buSzPts val="900"/>
               <a:buFont typeface="Arial"/>
               <a:buNone/>
-              <a:defRPr sz="900" b="0" i="0" u="none" strike="noStrike" cap="none">
+              <a:defRPr b="0" i="0" sz="900" u="none" cap="none" strike="noStrike">
                 <a:solidFill>
                   <a:srgbClr val="757575"/>
                 </a:solidFill>
@@ -13467,7 +13219,7 @@
                 <a:sym typeface="Arial"/>
               </a:defRPr>
             </a:lvl7pPr>
-            <a:lvl8pPr marL="0" marR="0" lvl="7" indent="0" algn="r" rtl="0">
+            <a:lvl8pPr indent="0" lvl="7" marL="0" marR="0" rtl="0" algn="r">
               <a:lnSpc>
                 <a:spcPct val="100000"/>
               </a:lnSpc>
@@ -13483,7 +13235,7 @@
               <a:buSzPts val="900"/>
               <a:buFont typeface="Arial"/>
               <a:buNone/>
-              <a:defRPr sz="900" b="0" i="0" u="none" strike="noStrike" cap="none">
+              <a:defRPr b="0" i="0" sz="900" u="none" cap="none" strike="noStrike">
                 <a:solidFill>
                   <a:srgbClr val="757575"/>
                 </a:solidFill>
@@ -13493,7 +13245,7 @@
                 <a:sym typeface="Arial"/>
               </a:defRPr>
             </a:lvl8pPr>
-            <a:lvl9pPr marL="0" marR="0" lvl="8" indent="0" algn="r" rtl="0">
+            <a:lvl9pPr indent="0" lvl="8" marL="0" marR="0" rtl="0" algn="r">
               <a:lnSpc>
                 <a:spcPct val="100000"/>
               </a:lnSpc>
@@ -13509,7 +13261,7 @@
               <a:buSzPts val="900"/>
               <a:buFont typeface="Arial"/>
               <a:buNone/>
-              <a:defRPr sz="900" b="0" i="0" u="none" strike="noStrike" cap="none">
+              <a:defRPr b="0" i="0" sz="900" u="none" cap="none" strike="noStrike">
                 <a:solidFill>
                   <a:srgbClr val="757575"/>
                 </a:solidFill>
@@ -13521,7 +13273,7 @@
             </a:lvl9pPr>
           </a:lstStyle>
           <a:p>
-            <a:pPr marL="0" lvl="0" indent="0" algn="r" rtl="0">
+            <a:pPr indent="0" lvl="0" marL="0" rtl="0" algn="r">
               <a:spcBef>
                 <a:spcPts val="0"/>
               </a:spcBef>
@@ -13540,7 +13292,7 @@
       </p:sp>
     </p:spTree>
   </p:cSld>
-  <p:clrMap bg1="lt1" tx1="dk1" bg2="dk2" tx2="lt2" accent1="accent1" accent2="accent2" accent3="accent3" accent4="accent4" accent5="accent5" accent6="accent6" hlink="hlink" folHlink="folHlink"/>
+  <p:clrMap accent1="accent1" accent2="accent2" accent3="accent3" accent4="accent4" accent5="accent5" accent6="accent6" bg1="lt1" bg2="dk2" tx1="dk1" tx2="lt2" folHlink="folHlink" hlink="hlink"/>
   <p:sldLayoutIdLst>
     <p:sldLayoutId id="2147483649" r:id="rId1"/>
     <p:sldLayoutId id="2147483650" r:id="rId2"/>
@@ -13554,10 +13306,10 @@
     <p:sldLayoutId id="2147483658" r:id="rId10"/>
     <p:sldLayoutId id="2147483659" r:id="rId11"/>
   </p:sldLayoutIdLst>
-  <p:hf sldNum="0" hdr="0" ftr="0" dt="0"/>
+  <p:hf dt="0" ftr="0" hdr="0" sldNum="0"/>
   <p:txStyles>
     <p:titleStyle>
-      <a:defPPr marR="0" lvl="0" algn="l" rtl="0">
+      <a:defPPr lvl="0" marR="0" rtl="0" algn="l">
         <a:lnSpc>
           <a:spcPct val="100000"/>
         </a:lnSpc>
@@ -13568,7 +13320,7 @@
           <a:spcPts val="0"/>
         </a:spcAft>
       </a:defPPr>
-      <a:lvl1pPr marR="0" lvl="0" algn="l" rtl="0">
+      <a:lvl1pPr lvl="0" marR="0" rtl="0" algn="l">
         <a:lnSpc>
           <a:spcPct val="100000"/>
         </a:lnSpc>
@@ -13582,7 +13334,7 @@
           <a:srgbClr val="000000"/>
         </a:buClr>
         <a:buFont typeface="Arial"/>
-        <a:defRPr sz="1400" b="0" i="0" u="none" strike="noStrike" cap="none">
+        <a:defRPr b="0" i="0" spc="0" sz="1400" u="none" cap="none" strike="noStrike">
           <a:solidFill>
             <a:srgbClr val="000000"/>
           </a:solidFill>
@@ -13592,7 +13344,7 @@
           <a:sym typeface="Arial"/>
         </a:defRPr>
       </a:lvl1pPr>
-      <a:lvl2pPr marR="0" lvl="1" algn="l" rtl="0">
+      <a:lvl2pPr lvl="1" marR="0" rtl="0" algn="l">
         <a:lnSpc>
           <a:spcPct val="100000"/>
         </a:lnSpc>
@@ -13606,7 +13358,7 @@
           <a:srgbClr val="000000"/>
         </a:buClr>
         <a:buFont typeface="Arial"/>
-        <a:defRPr sz="1400" b="0" i="0" u="none" strike="noStrike" cap="none">
+        <a:defRPr b="0" i="0" spc="0" sz="1400" u="none" cap="none" strike="noStrike">
           <a:solidFill>
             <a:srgbClr val="000000"/>
           </a:solidFill>
@@ -13616,7 +13368,7 @@
           <a:sym typeface="Arial"/>
         </a:defRPr>
       </a:lvl2pPr>
-      <a:lvl3pPr marR="0" lvl="2" algn="l" rtl="0">
+      <a:lvl3pPr lvl="2" marR="0" rtl="0" algn="l">
         <a:lnSpc>
           <a:spcPct val="100000"/>
         </a:lnSpc>
@@ -13630,7 +13382,7 @@
           <a:srgbClr val="000000"/>
         </a:buClr>
         <a:buFont typeface="Arial"/>
-        <a:defRPr sz="1400" b="0" i="0" u="none" strike="noStrike" cap="none">
+        <a:defRPr b="0" i="0" spc="0" sz="1400" u="none" cap="none" strike="noStrike">
           <a:solidFill>
             <a:srgbClr val="000000"/>
           </a:solidFill>
@@ -13640,7 +13392,7 @@
           <a:sym typeface="Arial"/>
         </a:defRPr>
       </a:lvl3pPr>
-      <a:lvl4pPr marR="0" lvl="3" algn="l" rtl="0">
+      <a:lvl4pPr lvl="3" marR="0" rtl="0" algn="l">
         <a:lnSpc>
           <a:spcPct val="100000"/>
         </a:lnSpc>
@@ -13654,7 +13406,7 @@
           <a:srgbClr val="000000"/>
         </a:buClr>
         <a:buFont typeface="Arial"/>
-        <a:defRPr sz="1400" b="0" i="0" u="none" strike="noStrike" cap="none">
+        <a:defRPr b="0" i="0" spc="0" sz="1400" u="none" cap="none" strike="noStrike">
           <a:solidFill>
             <a:srgbClr val="000000"/>
           </a:solidFill>
@@ -13664,7 +13416,7 @@
           <a:sym typeface="Arial"/>
         </a:defRPr>
       </a:lvl4pPr>
-      <a:lvl5pPr marR="0" lvl="4" algn="l" rtl="0">
+      <a:lvl5pPr lvl="4" marR="0" rtl="0" algn="l">
         <a:lnSpc>
           <a:spcPct val="100000"/>
         </a:lnSpc>
@@ -13678,7 +13430,7 @@
           <a:srgbClr val="000000"/>
         </a:buClr>
         <a:buFont typeface="Arial"/>
-        <a:defRPr sz="1400" b="0" i="0" u="none" strike="noStrike" cap="none">
+        <a:defRPr b="0" i="0" spc="0" sz="1400" u="none" cap="none" strike="noStrike">
           <a:solidFill>
             <a:srgbClr val="000000"/>
           </a:solidFill>
@@ -13688,7 +13440,7 @@
           <a:sym typeface="Arial"/>
         </a:defRPr>
       </a:lvl5pPr>
-      <a:lvl6pPr marR="0" lvl="5" algn="l" rtl="0">
+      <a:lvl6pPr lvl="5" marR="0" rtl="0" algn="l">
         <a:lnSpc>
           <a:spcPct val="100000"/>
         </a:lnSpc>
@@ -13702,7 +13454,7 @@
           <a:srgbClr val="000000"/>
         </a:buClr>
         <a:buFont typeface="Arial"/>
-        <a:defRPr sz="1400" b="0" i="0" u="none" strike="noStrike" cap="none">
+        <a:defRPr b="0" i="0" spc="0" sz="1400" u="none" cap="none" strike="noStrike">
           <a:solidFill>
             <a:srgbClr val="000000"/>
           </a:solidFill>
@@ -13712,7 +13464,7 @@
           <a:sym typeface="Arial"/>
         </a:defRPr>
       </a:lvl6pPr>
-      <a:lvl7pPr marR="0" lvl="6" algn="l" rtl="0">
+      <a:lvl7pPr lvl="6" marR="0" rtl="0" algn="l">
         <a:lnSpc>
           <a:spcPct val="100000"/>
         </a:lnSpc>
@@ -13726,7 +13478,7 @@
           <a:srgbClr val="000000"/>
         </a:buClr>
         <a:buFont typeface="Arial"/>
-        <a:defRPr sz="1400" b="0" i="0" u="none" strike="noStrike" cap="none">
+        <a:defRPr b="0" i="0" spc="0" sz="1400" u="none" cap="none" strike="noStrike">
           <a:solidFill>
             <a:srgbClr val="000000"/>
           </a:solidFill>
@@ -13736,7 +13488,7 @@
           <a:sym typeface="Arial"/>
         </a:defRPr>
       </a:lvl7pPr>
-      <a:lvl8pPr marR="0" lvl="7" algn="l" rtl="0">
+      <a:lvl8pPr lvl="7" marR="0" rtl="0" algn="l">
         <a:lnSpc>
           <a:spcPct val="100000"/>
         </a:lnSpc>
@@ -13750,7 +13502,7 @@
           <a:srgbClr val="000000"/>
         </a:buClr>
         <a:buFont typeface="Arial"/>
-        <a:defRPr sz="1400" b="0" i="0" u="none" strike="noStrike" cap="none">
+        <a:defRPr b="0" i="0" spc="0" sz="1400" u="none" cap="none" strike="noStrike">
           <a:solidFill>
             <a:srgbClr val="000000"/>
           </a:solidFill>
@@ -13760,7 +13512,7 @@
           <a:sym typeface="Arial"/>
         </a:defRPr>
       </a:lvl8pPr>
-      <a:lvl9pPr marR="0" lvl="8" algn="l" rtl="0">
+      <a:lvl9pPr lvl="8" marR="0" rtl="0" algn="l">
         <a:lnSpc>
           <a:spcPct val="100000"/>
         </a:lnSpc>
@@ -13774,7 +13526,7 @@
           <a:srgbClr val="000000"/>
         </a:buClr>
         <a:buFont typeface="Arial"/>
-        <a:defRPr sz="1400" b="0" i="0" u="none" strike="noStrike" cap="none">
+        <a:defRPr b="0" i="0" spc="0" sz="1400" u="none" cap="none" strike="noStrike">
           <a:solidFill>
             <a:srgbClr val="000000"/>
           </a:solidFill>
@@ -13786,7 +13538,7 @@
       </a:lvl9pPr>
     </p:titleStyle>
     <p:bodyStyle>
-      <a:defPPr marR="0" lvl="0" algn="l" rtl="0">
+      <a:defPPr lvl="0" marR="0" rtl="0" algn="l">
         <a:lnSpc>
           <a:spcPct val="100000"/>
         </a:lnSpc>
@@ -13797,7 +13549,7 @@
           <a:spcPts val="0"/>
         </a:spcAft>
       </a:defPPr>
-      <a:lvl1pPr marR="0" lvl="0" algn="l" rtl="0">
+      <a:lvl1pPr lvl="0" marR="0" rtl="0" algn="l">
         <a:lnSpc>
           <a:spcPct val="100000"/>
         </a:lnSpc>
@@ -13811,7 +13563,7 @@
           <a:srgbClr val="000000"/>
         </a:buClr>
         <a:buFont typeface="Arial"/>
-        <a:defRPr sz="1400" b="0" i="0" u="none" strike="noStrike" cap="none">
+        <a:defRPr b="0" i="0" spc="0" sz="1400" u="none" cap="none" strike="noStrike">
           <a:solidFill>
             <a:srgbClr val="000000"/>
           </a:solidFill>
@@ -13821,7 +13573,7 @@
           <a:sym typeface="Arial"/>
         </a:defRPr>
       </a:lvl1pPr>
-      <a:lvl2pPr marR="0" lvl="1" algn="l" rtl="0">
+      <a:lvl2pPr lvl="1" marR="0" rtl="0" algn="l">
         <a:lnSpc>
           <a:spcPct val="100000"/>
         </a:lnSpc>
@@ -13835,7 +13587,7 @@
           <a:srgbClr val="000000"/>
         </a:buClr>
         <a:buFont typeface="Arial"/>
-        <a:defRPr sz="1400" b="0" i="0" u="none" strike="noStrike" cap="none">
+        <a:defRPr b="0" i="0" spc="0" sz="1400" u="none" cap="none" strike="noStrike">
           <a:solidFill>
             <a:srgbClr val="000000"/>
           </a:solidFill>
@@ -13845,7 +13597,7 @@
           <a:sym typeface="Arial"/>
         </a:defRPr>
       </a:lvl2pPr>
-      <a:lvl3pPr marR="0" lvl="2" algn="l" rtl="0">
+      <a:lvl3pPr lvl="2" marR="0" rtl="0" algn="l">
         <a:lnSpc>
           <a:spcPct val="100000"/>
         </a:lnSpc>
@@ -13859,7 +13611,7 @@
           <a:srgbClr val="000000"/>
         </a:buClr>
         <a:buFont typeface="Arial"/>
-        <a:defRPr sz="1400" b="0" i="0" u="none" strike="noStrike" cap="none">
+        <a:defRPr b="0" i="0" spc="0" sz="1400" u="none" cap="none" strike="noStrike">
           <a:solidFill>
             <a:srgbClr val="000000"/>
           </a:solidFill>
@@ -13869,7 +13621,7 @@
           <a:sym typeface="Arial"/>
         </a:defRPr>
       </a:lvl3pPr>
-      <a:lvl4pPr marR="0" lvl="3" algn="l" rtl="0">
+      <a:lvl4pPr lvl="3" marR="0" rtl="0" algn="l">
         <a:lnSpc>
           <a:spcPct val="100000"/>
         </a:lnSpc>
@@ -13883,7 +13635,7 @@
           <a:srgbClr val="000000"/>
         </a:buClr>
         <a:buFont typeface="Arial"/>
-        <a:defRPr sz="1400" b="0" i="0" u="none" strike="noStrike" cap="none">
+        <a:defRPr b="0" i="0" spc="0" sz="1400" u="none" cap="none" strike="noStrike">
           <a:solidFill>
             <a:srgbClr val="000000"/>
           </a:solidFill>
@@ -13893,7 +13645,7 @@
           <a:sym typeface="Arial"/>
         </a:defRPr>
       </a:lvl4pPr>
-      <a:lvl5pPr marR="0" lvl="4" algn="l" rtl="0">
+      <a:lvl5pPr lvl="4" marR="0" rtl="0" algn="l">
         <a:lnSpc>
           <a:spcPct val="100000"/>
         </a:lnSpc>
@@ -13907,7 +13659,7 @@
           <a:srgbClr val="000000"/>
         </a:buClr>
         <a:buFont typeface="Arial"/>
-        <a:defRPr sz="1400" b="0" i="0" u="none" strike="noStrike" cap="none">
+        <a:defRPr b="0" i="0" spc="0" sz="1400" u="none" cap="none" strike="noStrike">
           <a:solidFill>
             <a:srgbClr val="000000"/>
           </a:solidFill>
@@ -13917,7 +13669,7 @@
           <a:sym typeface="Arial"/>
         </a:defRPr>
       </a:lvl5pPr>
-      <a:lvl6pPr marR="0" lvl="5" algn="l" rtl="0">
+      <a:lvl6pPr lvl="5" marR="0" rtl="0" algn="l">
         <a:lnSpc>
           <a:spcPct val="100000"/>
         </a:lnSpc>
@@ -13931,7 +13683,7 @@
           <a:srgbClr val="000000"/>
         </a:buClr>
         <a:buFont typeface="Arial"/>
-        <a:defRPr sz="1400" b="0" i="0" u="none" strike="noStrike" cap="none">
+        <a:defRPr b="0" i="0" spc="0" sz="1400" u="none" cap="none" strike="noStrike">
           <a:solidFill>
             <a:srgbClr val="000000"/>
           </a:solidFill>
@@ -13941,7 +13693,7 @@
           <a:sym typeface="Arial"/>
         </a:defRPr>
       </a:lvl6pPr>
-      <a:lvl7pPr marR="0" lvl="6" algn="l" rtl="0">
+      <a:lvl7pPr lvl="6" marR="0" rtl="0" algn="l">
         <a:lnSpc>
           <a:spcPct val="100000"/>
         </a:lnSpc>
@@ -13955,7 +13707,7 @@
           <a:srgbClr val="000000"/>
         </a:buClr>
         <a:buFont typeface="Arial"/>
-        <a:defRPr sz="1400" b="0" i="0" u="none" strike="noStrike" cap="none">
+        <a:defRPr b="0" i="0" spc="0" sz="1400" u="none" cap="none" strike="noStrike">
           <a:solidFill>
             <a:srgbClr val="000000"/>
           </a:solidFill>
@@ -13965,7 +13717,7 @@
           <a:sym typeface="Arial"/>
         </a:defRPr>
       </a:lvl7pPr>
-      <a:lvl8pPr marR="0" lvl="7" algn="l" rtl="0">
+      <a:lvl8pPr lvl="7" marR="0" rtl="0" algn="l">
         <a:lnSpc>
           <a:spcPct val="100000"/>
         </a:lnSpc>
@@ -13979,7 +13731,7 @@
           <a:srgbClr val="000000"/>
         </a:buClr>
         <a:buFont typeface="Arial"/>
-        <a:defRPr sz="1400" b="0" i="0" u="none" strike="noStrike" cap="none">
+        <a:defRPr b="0" i="0" spc="0" sz="1400" u="none" cap="none" strike="noStrike">
           <a:solidFill>
             <a:srgbClr val="000000"/>
           </a:solidFill>
@@ -13989,7 +13741,7 @@
           <a:sym typeface="Arial"/>
         </a:defRPr>
       </a:lvl8pPr>
-      <a:lvl9pPr marR="0" lvl="8" algn="l" rtl="0">
+      <a:lvl9pPr lvl="8" marR="0" rtl="0" algn="l">
         <a:lnSpc>
           <a:spcPct val="100000"/>
         </a:lnSpc>
@@ -14003,7 +13755,7 @@
           <a:srgbClr val="000000"/>
         </a:buClr>
         <a:buFont typeface="Arial"/>
-        <a:defRPr sz="1400" b="0" i="0" u="none" strike="noStrike" cap="none">
+        <a:defRPr b="0" i="0" spc="0" sz="1400" u="none" cap="none" strike="noStrike">
           <a:solidFill>
             <a:srgbClr val="000000"/>
           </a:solidFill>
@@ -14015,7 +13767,7 @@
       </a:lvl9pPr>
     </p:bodyStyle>
     <p:otherStyle>
-      <a:defPPr marR="0" lvl="0" algn="l" rtl="0">
+      <a:defPPr lvl="0" marR="0" rtl="0" algn="l">
         <a:lnSpc>
           <a:spcPct val="100000"/>
         </a:lnSpc>
@@ -14026,7 +13778,7 @@
           <a:spcPts val="0"/>
         </a:spcAft>
       </a:defPPr>
-      <a:lvl1pPr marR="0" lvl="0" algn="l" rtl="0">
+      <a:lvl1pPr lvl="0" marR="0" rtl="0" algn="l">
         <a:lnSpc>
           <a:spcPct val="100000"/>
         </a:lnSpc>
@@ -14040,7 +13792,7 @@
           <a:srgbClr val="000000"/>
         </a:buClr>
         <a:buFont typeface="Arial"/>
-        <a:defRPr sz="1400" b="0" i="0" u="none" strike="noStrike" cap="none">
+        <a:defRPr b="0" i="0" spc="0" sz="1400" u="none" cap="none" strike="noStrike">
           <a:solidFill>
             <a:srgbClr val="000000"/>
           </a:solidFill>
@@ -14050,7 +13802,7 @@
           <a:sym typeface="Arial"/>
         </a:defRPr>
       </a:lvl1pPr>
-      <a:lvl2pPr marR="0" lvl="1" algn="l" rtl="0">
+      <a:lvl2pPr lvl="1" marR="0" rtl="0" algn="l">
         <a:lnSpc>
           <a:spcPct val="100000"/>
         </a:lnSpc>
@@ -14064,7 +13816,7 @@
           <a:srgbClr val="000000"/>
         </a:buClr>
         <a:buFont typeface="Arial"/>
-        <a:defRPr sz="1400" b="0" i="0" u="none" strike="noStrike" cap="none">
+        <a:defRPr b="0" i="0" spc="0" sz="1400" u="none" cap="none" strike="noStrike">
           <a:solidFill>
             <a:srgbClr val="000000"/>
           </a:solidFill>
@@ -14074,7 +13826,7 @@
           <a:sym typeface="Arial"/>
         </a:defRPr>
       </a:lvl2pPr>
-      <a:lvl3pPr marR="0" lvl="2" algn="l" rtl="0">
+      <a:lvl3pPr lvl="2" marR="0" rtl="0" algn="l">
         <a:lnSpc>
           <a:spcPct val="100000"/>
         </a:lnSpc>
@@ -14088,7 +13840,7 @@
           <a:srgbClr val="000000"/>
         </a:buClr>
         <a:buFont typeface="Arial"/>
-        <a:defRPr sz="1400" b="0" i="0" u="none" strike="noStrike" cap="none">
+        <a:defRPr b="0" i="0" spc="0" sz="1400" u="none" cap="none" strike="noStrike">
           <a:solidFill>
             <a:srgbClr val="000000"/>
           </a:solidFill>
@@ -14098,7 +13850,7 @@
           <a:sym typeface="Arial"/>
         </a:defRPr>
       </a:lvl3pPr>
-      <a:lvl4pPr marR="0" lvl="3" algn="l" rtl="0">
+      <a:lvl4pPr lvl="3" marR="0" rtl="0" algn="l">
         <a:lnSpc>
           <a:spcPct val="100000"/>
         </a:lnSpc>
@@ -14112,7 +13864,7 @@
           <a:srgbClr val="000000"/>
         </a:buClr>
         <a:buFont typeface="Arial"/>
-        <a:defRPr sz="1400" b="0" i="0" u="none" strike="noStrike" cap="none">
+        <a:defRPr b="0" i="0" spc="0" sz="1400" u="none" cap="none" strike="noStrike">
           <a:solidFill>
             <a:srgbClr val="000000"/>
           </a:solidFill>
@@ -14122,7 +13874,7 @@
           <a:sym typeface="Arial"/>
         </a:defRPr>
       </a:lvl4pPr>
-      <a:lvl5pPr marR="0" lvl="4" algn="l" rtl="0">
+      <a:lvl5pPr lvl="4" marR="0" rtl="0" algn="l">
         <a:lnSpc>
           <a:spcPct val="100000"/>
         </a:lnSpc>
@@ -14136,7 +13888,7 @@
           <a:srgbClr val="000000"/>
         </a:buClr>
         <a:buFont typeface="Arial"/>
-        <a:defRPr sz="1400" b="0" i="0" u="none" strike="noStrike" cap="none">
+        <a:defRPr b="0" i="0" spc="0" sz="1400" u="none" cap="none" strike="noStrike">
           <a:solidFill>
             <a:srgbClr val="000000"/>
           </a:solidFill>
@@ -14146,7 +13898,7 @@
           <a:sym typeface="Arial"/>
         </a:defRPr>
       </a:lvl5pPr>
-      <a:lvl6pPr marR="0" lvl="5" algn="l" rtl="0">
+      <a:lvl6pPr lvl="5" marR="0" rtl="0" algn="l">
         <a:lnSpc>
           <a:spcPct val="100000"/>
         </a:lnSpc>
@@ -14160,7 +13912,7 @@
           <a:srgbClr val="000000"/>
         </a:buClr>
         <a:buFont typeface="Arial"/>
-        <a:defRPr sz="1400" b="0" i="0" u="none" strike="noStrike" cap="none">
+        <a:defRPr b="0" i="0" spc="0" sz="1400" u="none" cap="none" strike="noStrike">
           <a:solidFill>
             <a:srgbClr val="000000"/>
           </a:solidFill>
@@ -14170,7 +13922,7 @@
           <a:sym typeface="Arial"/>
         </a:defRPr>
       </a:lvl6pPr>
-      <a:lvl7pPr marR="0" lvl="6" algn="l" rtl="0">
+      <a:lvl7pPr lvl="6" marR="0" rtl="0" algn="l">
         <a:lnSpc>
           <a:spcPct val="100000"/>
         </a:lnSpc>
@@ -14184,7 +13936,7 @@
           <a:srgbClr val="000000"/>
         </a:buClr>
         <a:buFont typeface="Arial"/>
-        <a:defRPr sz="1400" b="0" i="0" u="none" strike="noStrike" cap="none">
+        <a:defRPr b="0" i="0" spc="0" sz="1400" u="none" cap="none" strike="noStrike">
           <a:solidFill>
             <a:srgbClr val="000000"/>
           </a:solidFill>
@@ -14194,7 +13946,7 @@
           <a:sym typeface="Arial"/>
         </a:defRPr>
       </a:lvl7pPr>
-      <a:lvl8pPr marR="0" lvl="7" algn="l" rtl="0">
+      <a:lvl8pPr lvl="7" marR="0" rtl="0" algn="l">
         <a:lnSpc>
           <a:spcPct val="100000"/>
         </a:lnSpc>
@@ -14208,7 +13960,7 @@
           <a:srgbClr val="000000"/>
         </a:buClr>
         <a:buFont typeface="Arial"/>
-        <a:defRPr sz="1400" b="0" i="0" u="none" strike="noStrike" cap="none">
+        <a:defRPr b="0" i="0" spc="0" sz="1400" u="none" cap="none" strike="noStrike">
           <a:solidFill>
             <a:srgbClr val="000000"/>
           </a:solidFill>
@@ -14218,7 +13970,7 @@
           <a:sym typeface="Arial"/>
         </a:defRPr>
       </a:lvl8pPr>
-      <a:lvl9pPr marR="0" lvl="8" algn="l" rtl="0">
+      <a:lvl9pPr lvl="8" marR="0" rtl="0" algn="l">
         <a:lnSpc>
           <a:spcPct val="100000"/>
         </a:lnSpc>
@@ -14232,7 +13984,7 @@
           <a:srgbClr val="000000"/>
         </a:buClr>
         <a:buFont typeface="Arial"/>
-        <a:defRPr sz="1400" b="0" i="0" u="none" strike="noStrike" cap="none">
+        <a:defRPr b="0" i="0" spc="0" sz="1400" u="none" cap="none" strike="noStrike">
           <a:solidFill>
             <a:srgbClr val="000000"/>
           </a:solidFill>
@@ -14248,11 +14000,11 @@
 </file>
 
 <file path=ppt/slides/slide1.xml><?xml version="1.0" encoding="utf-8"?>
-<p:sld xmlns:a="http://schemas.openxmlformats.org/drawingml/2006/main" xmlns:r="http://schemas.openxmlformats.org/officeDocument/2006/relationships" xmlns:p="http://schemas.openxmlformats.org/presentationml/2006/main">
+<p:sld xmlns:a="http://schemas.openxmlformats.org/drawingml/2006/main" xmlns:r="http://schemas.openxmlformats.org/officeDocument/2006/relationships" xmlns:mc="http://schemas.openxmlformats.org/markup-compatibility/2006" xmlns:mv="urn:schemas-microsoft-com:mac:vml" xmlns:p="http://schemas.openxmlformats.org/presentationml/2006/main" xmlns:c="http://schemas.openxmlformats.org/drawingml/2006/chart" xmlns:dgm="http://schemas.openxmlformats.org/drawingml/2006/diagram" xmlns:o="urn:schemas-microsoft-com:office:office" xmlns:v="urn:schemas-microsoft-com:vml" xmlns:pvml="urn:schemas-microsoft-com:office:powerpoint" xmlns:com="http://schemas.openxmlformats.org/drawingml/2006/compatibility" xmlns:p14="http://schemas.microsoft.com/office/powerpoint/2010/main" xmlns:p15="http://schemas.microsoft.com/office/powerpoint/2012/main" xmlns:ahyp="http://schemas.microsoft.com/office/drawing/2018/hyperlinkcolor">
   <p:cSld>
     <p:spTree>
       <p:nvGrpSpPr>
-        <p:cNvPr id="1" name="Shape 83"/>
+        <p:cNvPr id="83" name="Shape 83"/>
         <p:cNvGrpSpPr/>
         <p:nvPr/>
       </p:nvGrpSpPr>
@@ -14272,23 +14024,17 @@
         </p:nvGraphicFramePr>
         <p:xfrm>
           <a:off x="460562" y="422462"/>
-          <a:ext cx="5936875" cy="9061075"/>
+          <a:ext cx="3000000" cy="3000000"/>
         </p:xfrm>
         <a:graphic>
           <a:graphicData uri="http://schemas.openxmlformats.org/drawingml/2006/table">
             <a:tbl>
-              <a:tblPr firstRow="1" bandRow="1">
+              <a:tblPr bandRow="1" firstRow="1">
                 <a:noFill/>
-                <a:tableStyleId>{4E99D34A-ADBA-4537-8B12-841D62B675AC}</a:tableStyleId>
+                <a:tableStyleId>{302B45B0-EAFC-4398-BDBB-DB6DD10C2442}</a:tableStyleId>
               </a:tblPr>
               <a:tblGrid>
-                <a:gridCol w="5936875">
-                  <a:extLst>
-                    <a:ext uri="{9D8B030D-6E8A-4147-A177-3AD203B41FA5}">
-                      <a16:colId xmlns:a16="http://schemas.microsoft.com/office/drawing/2014/main" val="20000"/>
-                    </a:ext>
-                  </a:extLst>
-                </a:gridCol>
+                <a:gridCol w="5936875"/>
               </a:tblGrid>
               <a:tr h="9061075">
                 <a:tc>
@@ -14296,7 +14042,7 @@
                     <a:bodyPr/>
                     <a:lstStyle/>
                     <a:p>
-                      <a:pPr marL="0" marR="0" lvl="0" indent="0" algn="l" rtl="0">
+                      <a:pPr indent="0" lvl="0" marL="0" marR="0" rtl="0" algn="l">
                         <a:lnSpc>
                           <a:spcPct val="100000"/>
                         </a:lnSpc>
@@ -14313,56 +14059,54 @@
                         <a:buFont typeface="Arial"/>
                         <a:buNone/>
                       </a:pPr>
-                      <a:endParaRPr sz="1350" u="none" strike="noStrike" cap="none"/>
+                      <a:r>
+                        <a:t/>
+                      </a:r>
+                      <a:endParaRPr sz="1350" u="none" cap="none" strike="noStrike"/>
                     </a:p>
                   </a:txBody>
-                  <a:tcPr marL="91450" marR="91450" marT="45725" marB="45725">
-                    <a:lnL w="12700" cap="flat" cmpd="sng">
+                  <a:tcPr marT="45725" marB="45725" marR="91450" marL="91450">
+                    <a:lnL cap="flat" cmpd="sng" w="12700">
                       <a:solidFill>
                         <a:schemeClr val="dk1"/>
                       </a:solidFill>
                       <a:prstDash val="solid"/>
                       <a:round/>
-                      <a:headEnd type="none" w="sm" len="sm"/>
-                      <a:tailEnd type="none" w="sm" len="sm"/>
+                      <a:headEnd len="sm" w="sm" type="none"/>
+                      <a:tailEnd len="sm" w="sm" type="none"/>
                     </a:lnL>
-                    <a:lnR w="12700" cap="flat" cmpd="sng">
+                    <a:lnR cap="flat" cmpd="sng" w="12700">
                       <a:solidFill>
                         <a:schemeClr val="dk1"/>
                       </a:solidFill>
                       <a:prstDash val="solid"/>
                       <a:round/>
-                      <a:headEnd type="none" w="sm" len="sm"/>
-                      <a:tailEnd type="none" w="sm" len="sm"/>
+                      <a:headEnd len="sm" w="sm" type="none"/>
+                      <a:tailEnd len="sm" w="sm" type="none"/>
                     </a:lnR>
-                    <a:lnT w="12700" cap="flat" cmpd="sng">
+                    <a:lnT cap="flat" cmpd="sng" w="12700">
                       <a:solidFill>
                         <a:schemeClr val="dk1"/>
                       </a:solidFill>
                       <a:prstDash val="solid"/>
                       <a:round/>
-                      <a:headEnd type="none" w="sm" len="sm"/>
-                      <a:tailEnd type="none" w="sm" len="sm"/>
+                      <a:headEnd len="sm" w="sm" type="none"/>
+                      <a:tailEnd len="sm" w="sm" type="none"/>
                     </a:lnT>
-                    <a:lnB w="12700" cap="flat" cmpd="sng">
+                    <a:lnB cap="flat" cmpd="sng" w="12700">
                       <a:solidFill>
                         <a:schemeClr val="dk1"/>
                       </a:solidFill>
                       <a:prstDash val="solid"/>
                       <a:round/>
-                      <a:headEnd type="none" w="sm" len="sm"/>
-                      <a:tailEnd type="none" w="sm" len="sm"/>
+                      <a:headEnd len="sm" w="sm" type="none"/>
+                      <a:tailEnd len="sm" w="sm" type="none"/>
                     </a:lnB>
                     <a:solidFill>
                       <a:schemeClr val="lt1"/>
                     </a:solidFill>
                   </a:tcPr>
                 </a:tc>
-                <a:extLst>
-                  <a:ext uri="{0D108BD9-81ED-4DB2-BD59-A6C34878D82A}">
-                    <a16:rowId xmlns:a16="http://schemas.microsoft.com/office/drawing/2014/main" val="10000"/>
-                  </a:ext>
-                </a:extLst>
               </a:tr>
             </a:tbl>
           </a:graphicData>
@@ -14371,9 +14115,7 @@
       <p:sp>
         <p:nvSpPr>
           <p:cNvPr id="85" name="Google Shape;85;p1"/>
-          <p:cNvSpPr txBox="1">
-            <a:spLocks noGrp="1"/>
-          </p:cNvSpPr>
+          <p:cNvSpPr txBox="1"/>
           <p:nvPr>
             <p:ph type="ctrTitle"/>
           </p:nvPr>
@@ -14392,12 +14134,12 @@
           </a:ln>
         </p:spPr>
         <p:txBody>
-          <a:bodyPr spcFirstLastPara="1" wrap="square" lIns="91425" tIns="45700" rIns="91425" bIns="45700" anchor="b" anchorCtr="0">
+          <a:bodyPr anchorCtr="0" anchor="b" bIns="45700" lIns="91425" spcFirstLastPara="1" rIns="91425" wrap="square" tIns="45700">
             <a:normAutofit/>
           </a:bodyPr>
           <a:lstStyle/>
           <a:p>
-            <a:pPr marL="0" lvl="0" indent="0" algn="ctr" rtl="0">
+            <a:pPr indent="0" lvl="0" marL="0" rtl="0" algn="ctr">
               <a:lnSpc>
                 <a:spcPct val="90000"/>
               </a:lnSpc>
@@ -14415,24 +14157,16 @@
               <a:buNone/>
             </a:pPr>
             <a:r>
-              <a:rPr lang="ko-KR" sz="3200" b="1">
-                <a:latin typeface="Pretendard" panose="02000503000000020004" pitchFamily="2" charset="-127"/>
-                <a:ea typeface="Pretendard" panose="02000503000000020004" pitchFamily="2" charset="-127"/>
-                <a:cs typeface="Pretendard" panose="02000503000000020004" pitchFamily="2" charset="-127"/>
-              </a:rPr>
+              <a:rPr b="1" lang="ko-KR" sz="3200"/>
               <a:t>수료증</a:t>
             </a:r>
-            <a:endParaRPr>
-              <a:latin typeface="Pretendard" panose="02000503000000020004" pitchFamily="2" charset="-127"/>
-              <a:ea typeface="Pretendard" panose="02000503000000020004" pitchFamily="2" charset="-127"/>
-              <a:cs typeface="Pretendard" panose="02000503000000020004" pitchFamily="2" charset="-127"/>
-            </a:endParaRPr>
+            <a:endParaRPr/>
           </a:p>
         </p:txBody>
       </p:sp>
       <p:pic>
         <p:nvPicPr>
-          <p:cNvPr id="86" name="Google Shape;86;p1" descr="패턴, 레드, 예술, 그래픽이(가) 표시된 사진&#10;&#10;자동 생성된 설명"/>
+          <p:cNvPr descr="패턴, 레드, 예술, 그래픽이(가) 표시된 사진&#10;&#10;자동 생성된 설명" id="86" name="Google Shape;86;p1"/>
           <p:cNvPicPr preferRelativeResize="0"/>
           <p:nvPr/>
         </p:nvPicPr>
@@ -14440,7 +14174,7 @@
           <a:blip r:embed="rId3">
             <a:alphaModFix/>
           </a:blip>
-          <a:srcRect/>
+          <a:srcRect b="0" l="0" r="0" t="0"/>
           <a:stretch/>
         </p:blipFill>
         <p:spPr>
@@ -14477,12 +14211,12 @@
           </a:ln>
         </p:spPr>
         <p:txBody>
-          <a:bodyPr spcFirstLastPara="1" wrap="square" lIns="91425" tIns="45700" rIns="91425" bIns="45700" anchor="b" anchorCtr="0">
+          <a:bodyPr anchorCtr="0" anchor="b" bIns="45700" lIns="91425" spcFirstLastPara="1" rIns="91425" wrap="square" tIns="45700">
             <a:normAutofit/>
           </a:bodyPr>
           <a:lstStyle/>
           <a:p>
-            <a:pPr marL="0" marR="0" lvl="0" indent="0" algn="ctr" rtl="0">
+            <a:pPr indent="0" lvl="0" marL="0" marR="0" rtl="0" algn="ctr">
               <a:lnSpc>
                 <a:spcPct val="90000"/>
               </a:lnSpc>
@@ -14500,24 +14234,24 @@
               <a:buNone/>
             </a:pPr>
             <a:r>
-              <a:rPr lang="ko-KR" sz="2000" b="1" i="0" u="none" strike="noStrike" cap="none">
+              <a:rPr b="1" i="0" lang="ko-KR" sz="2000" u="none" cap="none" strike="noStrike">
                 <a:solidFill>
                   <a:schemeClr val="dk1"/>
                 </a:solidFill>
-                <a:latin typeface="Pretendard" panose="02000503000000020004" pitchFamily="2" charset="-127"/>
-                <a:ea typeface="Pretendard" panose="02000503000000020004" pitchFamily="2" charset="-127"/>
-                <a:cs typeface="Pretendard" panose="02000503000000020004" pitchFamily="2" charset="-127"/>
+                <a:latin typeface="Play"/>
+                <a:ea typeface="Play"/>
+                <a:cs typeface="Play"/>
                 <a:sym typeface="Play"/>
               </a:rPr>
               <a:t>한국범죄예방교육센터</a:t>
             </a:r>
-            <a:endParaRPr sz="1400" b="0" i="0" u="none" strike="noStrike" cap="none">
+            <a:endParaRPr b="0" i="0" sz="1400" u="none" cap="none" strike="noStrike">
               <a:solidFill>
                 <a:srgbClr val="000000"/>
               </a:solidFill>
-              <a:latin typeface="Pretendard" panose="02000503000000020004" pitchFamily="2" charset="-127"/>
-              <a:ea typeface="Pretendard" panose="02000503000000020004" pitchFamily="2" charset="-127"/>
-              <a:cs typeface="Pretendard" panose="02000503000000020004" pitchFamily="2" charset="-127"/>
+              <a:latin typeface="Arial"/>
+              <a:ea typeface="Arial"/>
+              <a:cs typeface="Arial"/>
               <a:sym typeface="Arial"/>
             </a:endParaRPr>
           </a:p>
@@ -14543,12 +14277,12 @@
           </a:ln>
         </p:spPr>
         <p:txBody>
-          <a:bodyPr spcFirstLastPara="1" wrap="square" lIns="91425" tIns="45700" rIns="91425" bIns="45700" anchor="b" anchorCtr="0">
+          <a:bodyPr anchorCtr="0" anchor="b" bIns="45700" lIns="91425" spcFirstLastPara="1" rIns="91425" wrap="square" tIns="45700">
             <a:normAutofit/>
           </a:bodyPr>
           <a:lstStyle/>
           <a:p>
-            <a:pPr marL="0" marR="0" lvl="0" indent="0" algn="ctr" rtl="0">
+            <a:pPr indent="0" lvl="0" marL="0" marR="0" rtl="0" algn="ctr">
               <a:lnSpc>
                 <a:spcPct val="90000"/>
               </a:lnSpc>
@@ -14566,13 +14300,13 @@
               <a:buNone/>
             </a:pPr>
             <a:r>
-              <a:rPr lang="ko-KR" sz="1600" b="0" i="0" u="none" strike="noStrike" cap="none">
+              <a:rPr b="0" i="0" lang="ko-KR" sz="1600" u="none" cap="none" strike="noStrike">
                 <a:solidFill>
                   <a:schemeClr val="dk1"/>
                 </a:solidFill>
-                <a:latin typeface="Pretendard" panose="02000503000000020004" pitchFamily="2" charset="-127"/>
-                <a:ea typeface="Pretendard" panose="02000503000000020004" pitchFamily="2" charset="-127"/>
-                <a:cs typeface="Pretendard" panose="02000503000000020004" pitchFamily="2" charset="-127"/>
+                <a:latin typeface="Play"/>
+                <a:ea typeface="Play"/>
+                <a:cs typeface="Play"/>
                 <a:sym typeface="Play"/>
               </a:rPr>
               <a:t>발급일자 : 202</a:t>
@@ -14582,21 +14316,21 @@
                 <a:solidFill>
                   <a:schemeClr val="dk1"/>
                 </a:solidFill>
-                <a:latin typeface="Pretendard" panose="02000503000000020004" pitchFamily="2" charset="-127"/>
-                <a:ea typeface="Pretendard" panose="02000503000000020004" pitchFamily="2" charset="-127"/>
-                <a:cs typeface="Pretendard" panose="02000503000000020004" pitchFamily="2" charset="-127"/>
+                <a:latin typeface="Play"/>
+                <a:ea typeface="Play"/>
+                <a:cs typeface="Play"/>
                 <a:sym typeface="Play"/>
               </a:rPr>
               <a:t>6</a:t>
             </a:r>
             <a:r>
-              <a:rPr lang="ko-KR" sz="1600" b="0" i="0" u="none" strike="noStrike" cap="none">
+              <a:rPr b="0" i="0" lang="ko-KR" sz="1600" u="none" cap="none" strike="noStrike">
                 <a:solidFill>
                   <a:schemeClr val="dk1"/>
                 </a:solidFill>
-                <a:latin typeface="Pretendard" panose="02000503000000020004" pitchFamily="2" charset="-127"/>
-                <a:ea typeface="Pretendard" panose="02000503000000020004" pitchFamily="2" charset="-127"/>
-                <a:cs typeface="Pretendard" panose="02000503000000020004" pitchFamily="2" charset="-127"/>
+                <a:latin typeface="Play"/>
+                <a:ea typeface="Play"/>
+                <a:cs typeface="Play"/>
                 <a:sym typeface="Play"/>
               </a:rPr>
               <a:t>년   </a:t>
@@ -14606,21 +14340,21 @@
                 <a:solidFill>
                   <a:schemeClr val="dk1"/>
                 </a:solidFill>
-                <a:latin typeface="Pretendard" panose="02000503000000020004" pitchFamily="2" charset="-127"/>
-                <a:ea typeface="Pretendard" panose="02000503000000020004" pitchFamily="2" charset="-127"/>
-                <a:cs typeface="Pretendard" panose="02000503000000020004" pitchFamily="2" charset="-127"/>
+                <a:latin typeface="Play"/>
+                <a:ea typeface="Play"/>
+                <a:cs typeface="Play"/>
                 <a:sym typeface="Play"/>
               </a:rPr>
-              <a:t>4</a:t>
+              <a:t>9</a:t>
             </a:r>
             <a:r>
-              <a:rPr lang="ko-KR" sz="1600" b="0" i="0" u="none" strike="noStrike" cap="none">
+              <a:rPr b="0" i="0" lang="ko-KR" sz="1600" u="none" cap="none" strike="noStrike">
                 <a:solidFill>
                   <a:schemeClr val="dk1"/>
                 </a:solidFill>
-                <a:latin typeface="Pretendard" panose="02000503000000020004" pitchFamily="2" charset="-127"/>
-                <a:ea typeface="Pretendard" panose="02000503000000020004" pitchFamily="2" charset="-127"/>
-                <a:cs typeface="Pretendard" panose="02000503000000020004" pitchFamily="2" charset="-127"/>
+                <a:latin typeface="Play"/>
+                <a:ea typeface="Play"/>
+                <a:cs typeface="Play"/>
                 <a:sym typeface="Play"/>
               </a:rPr>
               <a:t>월 </a:t>
@@ -14630,32 +14364,32 @@
                 <a:solidFill>
                   <a:schemeClr val="dk1"/>
                 </a:solidFill>
-                <a:latin typeface="Pretendard" panose="02000503000000020004" pitchFamily="2" charset="-127"/>
-                <a:ea typeface="Pretendard" panose="02000503000000020004" pitchFamily="2" charset="-127"/>
-                <a:cs typeface="Pretendard" panose="02000503000000020004" pitchFamily="2" charset="-127"/>
+                <a:latin typeface="Play"/>
+                <a:ea typeface="Play"/>
+                <a:cs typeface="Play"/>
                 <a:sym typeface="Play"/>
               </a:rPr>
-              <a:t>  24</a:t>
+              <a:t>  5</a:t>
             </a:r>
             <a:r>
-              <a:rPr lang="ko-KR" sz="1600" b="0" i="0" u="none" strike="noStrike" cap="none">
+              <a:rPr b="0" i="0" lang="ko-KR" sz="1600" u="none" cap="none" strike="noStrike">
                 <a:solidFill>
                   <a:schemeClr val="dk1"/>
                 </a:solidFill>
-                <a:latin typeface="Pretendard" panose="02000503000000020004" pitchFamily="2" charset="-127"/>
-                <a:ea typeface="Pretendard" panose="02000503000000020004" pitchFamily="2" charset="-127"/>
-                <a:cs typeface="Pretendard" panose="02000503000000020004" pitchFamily="2" charset="-127"/>
+                <a:latin typeface="Play"/>
+                <a:ea typeface="Play"/>
+                <a:cs typeface="Play"/>
                 <a:sym typeface="Play"/>
               </a:rPr>
               <a:t>일</a:t>
             </a:r>
-            <a:endParaRPr sz="1400" b="0" i="0" u="none" strike="noStrike" cap="none">
+            <a:endParaRPr b="0" i="0" sz="1400" u="none" cap="none" strike="noStrike">
               <a:solidFill>
                 <a:srgbClr val="000000"/>
               </a:solidFill>
-              <a:latin typeface="Pretendard" panose="02000503000000020004" pitchFamily="2" charset="-127"/>
-              <a:ea typeface="Pretendard" panose="02000503000000020004" pitchFamily="2" charset="-127"/>
-              <a:cs typeface="Pretendard" panose="02000503000000020004" pitchFamily="2" charset="-127"/>
+              <a:latin typeface="Arial"/>
+              <a:ea typeface="Arial"/>
+              <a:cs typeface="Arial"/>
               <a:sym typeface="Arial"/>
             </a:endParaRPr>
           </a:p>
@@ -14663,7 +14397,7 @@
       </p:sp>
       <p:pic>
         <p:nvPicPr>
-          <p:cNvPr id="89" name="Google Shape;89;p1" descr="텍스트, 원, 폰트, 로고이(가) 표시된 사진&#10;&#10;자동 생성된 설명"/>
+          <p:cNvPr descr="텍스트, 원, 폰트, 로고이(가) 표시된 사진&#10;&#10;자동 생성된 설명" id="89" name="Google Shape;89;p1"/>
           <p:cNvPicPr preferRelativeResize="0"/>
           <p:nvPr/>
         </p:nvPicPr>
@@ -14671,7 +14405,7 @@
           <a:blip r:embed="rId4">
             <a:alphaModFix amt="50000"/>
           </a:blip>
-          <a:srcRect/>
+          <a:srcRect b="0" l="0" r="0" t="0"/>
           <a:stretch/>
         </p:blipFill>
         <p:spPr>
@@ -14708,12 +14442,12 @@
           </a:ln>
         </p:spPr>
         <p:txBody>
-          <a:bodyPr spcFirstLastPara="1" wrap="square" lIns="91425" tIns="45700" rIns="91425" bIns="45700" anchor="b" anchorCtr="0">
+          <a:bodyPr anchorCtr="0" anchor="b" bIns="45700" lIns="91425" spcFirstLastPara="1" rIns="91425" wrap="square" tIns="45700">
             <a:normAutofit/>
           </a:bodyPr>
           <a:lstStyle/>
           <a:p>
-            <a:pPr marL="0" marR="0" lvl="0" indent="0" algn="l" rtl="0">
+            <a:pPr indent="0" lvl="0" marL="0" marR="0" rtl="0" algn="l">
               <a:lnSpc>
                 <a:spcPct val="90000"/>
               </a:lnSpc>
@@ -14731,13 +14465,13 @@
               <a:buNone/>
             </a:pPr>
             <a:r>
-              <a:rPr lang="ko-KR" sz="1400" b="0" i="0" u="none" strike="noStrike" cap="none">
+              <a:rPr b="0" i="0" lang="ko-KR" sz="1400" u="none" cap="none" strike="noStrike">
                 <a:solidFill>
                   <a:schemeClr val="dk1"/>
                 </a:solidFill>
-                <a:latin typeface="Pretendard" panose="02000503000000020004" pitchFamily="2" charset="-127"/>
-                <a:ea typeface="Pretendard" panose="02000503000000020004" pitchFamily="2" charset="-127"/>
-                <a:cs typeface="Pretendard" panose="02000503000000020004" pitchFamily="2" charset="-127"/>
+                <a:latin typeface="Play"/>
+                <a:ea typeface="Play"/>
+                <a:cs typeface="Play"/>
                 <a:sym typeface="Play"/>
               </a:rPr>
               <a:t>증 202</a:t>
@@ -14747,21 +14481,21 @@
                 <a:solidFill>
                   <a:schemeClr val="dk1"/>
                 </a:solidFill>
-                <a:latin typeface="Pretendard" panose="02000503000000020004" pitchFamily="2" charset="-127"/>
-                <a:ea typeface="Pretendard" panose="02000503000000020004" pitchFamily="2" charset="-127"/>
-                <a:cs typeface="Pretendard" panose="02000503000000020004" pitchFamily="2" charset="-127"/>
+                <a:latin typeface="Play"/>
+                <a:ea typeface="Play"/>
+                <a:cs typeface="Play"/>
                 <a:sym typeface="Play"/>
               </a:rPr>
               <a:t>6</a:t>
             </a:r>
             <a:r>
-              <a:rPr lang="ko-KR" sz="1400" b="0" i="0" u="none" strike="noStrike" cap="none">
+              <a:rPr b="0" i="0" lang="ko-KR" sz="1400" u="none" cap="none" strike="noStrike">
                 <a:solidFill>
                   <a:schemeClr val="dk1"/>
                 </a:solidFill>
-                <a:latin typeface="Pretendard" panose="02000503000000020004" pitchFamily="2" charset="-127"/>
-                <a:ea typeface="Pretendard" panose="02000503000000020004" pitchFamily="2" charset="-127"/>
-                <a:cs typeface="Pretendard" panose="02000503000000020004" pitchFamily="2" charset="-127"/>
+                <a:latin typeface="Play"/>
+                <a:ea typeface="Play"/>
+                <a:cs typeface="Play"/>
                 <a:sym typeface="Play"/>
               </a:rPr>
               <a:t>-kcpec-</a:t>
@@ -14771,21 +14505,21 @@
                 <a:solidFill>
                   <a:schemeClr val="dk1"/>
                 </a:solidFill>
-                <a:latin typeface="Pretendard" panose="02000503000000020004" pitchFamily="2" charset="-127"/>
-                <a:ea typeface="Pretendard" panose="02000503000000020004" pitchFamily="2" charset="-127"/>
-                <a:cs typeface="Pretendard" panose="02000503000000020004" pitchFamily="2" charset="-127"/>
+                <a:latin typeface="Play"/>
+                <a:ea typeface="Play"/>
+                <a:cs typeface="Play"/>
                 <a:sym typeface="Play"/>
               </a:rPr>
               <a:t>6</a:t>
             </a:r>
             <a:r>
-              <a:rPr lang="ko-KR" sz="1400" b="0" i="0" u="none" strike="noStrike" cap="none">
+              <a:rPr b="0" i="0" lang="ko-KR" sz="1400" u="none" cap="none" strike="noStrike">
                 <a:solidFill>
                   <a:schemeClr val="dk1"/>
                 </a:solidFill>
-                <a:latin typeface="Pretendard" panose="02000503000000020004" pitchFamily="2" charset="-127"/>
-                <a:ea typeface="Pretendard" panose="02000503000000020004" pitchFamily="2" charset="-127"/>
-                <a:cs typeface="Pretendard" panose="02000503000000020004" pitchFamily="2" charset="-127"/>
+                <a:latin typeface="Play"/>
+                <a:ea typeface="Play"/>
+                <a:cs typeface="Play"/>
                 <a:sym typeface="Play"/>
               </a:rPr>
               <a:t>0- 000</a:t>
@@ -14795,32 +14529,32 @@
                 <a:solidFill>
                   <a:schemeClr val="dk1"/>
                 </a:solidFill>
-                <a:latin typeface="Pretendard" panose="02000503000000020004" pitchFamily="2" charset="-127"/>
-                <a:ea typeface="Pretendard" panose="02000503000000020004" pitchFamily="2" charset="-127"/>
-                <a:cs typeface="Pretendard" panose="02000503000000020004" pitchFamily="2" charset="-127"/>
+                <a:latin typeface="Play"/>
+                <a:ea typeface="Play"/>
+                <a:cs typeface="Play"/>
                 <a:sym typeface="Play"/>
               </a:rPr>
-              <a:t>17</a:t>
+              <a:t>56</a:t>
             </a:r>
             <a:r>
-              <a:rPr lang="ko-KR" sz="1400" b="0" i="0" u="none" strike="noStrike" cap="none">
+              <a:rPr b="0" i="0" lang="ko-KR" sz="1400" u="none" cap="none" strike="noStrike">
                 <a:solidFill>
                   <a:schemeClr val="dk1"/>
                 </a:solidFill>
-                <a:latin typeface="Pretendard" panose="02000503000000020004" pitchFamily="2" charset="-127"/>
-                <a:ea typeface="Pretendard" panose="02000503000000020004" pitchFamily="2" charset="-127"/>
-                <a:cs typeface="Pretendard" panose="02000503000000020004" pitchFamily="2" charset="-127"/>
+                <a:latin typeface="Play"/>
+                <a:ea typeface="Play"/>
+                <a:cs typeface="Play"/>
                 <a:sym typeface="Play"/>
               </a:rPr>
               <a:t> 호   </a:t>
             </a:r>
-            <a:endParaRPr sz="1400" b="0" i="0" u="none" strike="noStrike" cap="none">
+            <a:endParaRPr b="0" i="0" sz="1400" u="none" cap="none" strike="noStrike">
               <a:solidFill>
                 <a:srgbClr val="000000"/>
               </a:solidFill>
-              <a:latin typeface="Pretendard" panose="02000503000000020004" pitchFamily="2" charset="-127"/>
-              <a:ea typeface="Pretendard" panose="02000503000000020004" pitchFamily="2" charset="-127"/>
-              <a:cs typeface="Pretendard" panose="02000503000000020004" pitchFamily="2" charset="-127"/>
+              <a:latin typeface="Arial"/>
+              <a:ea typeface="Arial"/>
+              <a:cs typeface="Arial"/>
               <a:sym typeface="Arial"/>
             </a:endParaRPr>
           </a:p>
@@ -14829,11 +14563,9 @@
       <p:sp>
         <p:nvSpPr>
           <p:cNvPr id="91" name="Google Shape;91;p1"/>
-          <p:cNvSpPr txBox="1">
-            <a:spLocks noGrp="1"/>
-          </p:cNvSpPr>
+          <p:cNvSpPr txBox="1"/>
           <p:nvPr>
-            <p:ph type="subTitle" idx="1"/>
+            <p:ph idx="1" type="subTitle"/>
           </p:nvPr>
         </p:nvSpPr>
         <p:spPr>
@@ -14850,12 +14582,12 @@
           </a:ln>
         </p:spPr>
         <p:txBody>
-          <a:bodyPr spcFirstLastPara="1" wrap="square" lIns="91425" tIns="45700" rIns="91425" bIns="45700" anchor="t" anchorCtr="0">
+          <a:bodyPr anchorCtr="0" anchor="t" bIns="45700" lIns="91425" spcFirstLastPara="1" rIns="91425" wrap="square" tIns="45700">
             <a:normAutofit/>
           </a:bodyPr>
           <a:lstStyle/>
           <a:p>
-            <a:pPr marL="0" lvl="0" indent="0" algn="ctr" rtl="0">
+            <a:pPr indent="0" lvl="0" marL="0" rtl="0" algn="ctr">
               <a:lnSpc>
                 <a:spcPct val="90000"/>
               </a:lnSpc>
@@ -14873,22 +14605,22 @@
             </a:pPr>
             <a:r>
               <a:rPr lang="ko-KR" sz="1600">
-                <a:latin typeface="Pretendard" panose="02000503000000020004" pitchFamily="2" charset="-127"/>
-                <a:ea typeface="Pretendard" panose="02000503000000020004" pitchFamily="2" charset="-127"/>
-                <a:cs typeface="Pretendard" panose="02000503000000020004" pitchFamily="2" charset="-127"/>
+                <a:latin typeface="Arial"/>
+                <a:ea typeface="Arial"/>
+                <a:cs typeface="Arial"/>
                 <a:sym typeface="Arial"/>
               </a:rPr>
               <a:t>위 사람은 한국범죄예방교육센터에서 실시한</a:t>
             </a:r>
             <a:endParaRPr sz="1600">
-              <a:latin typeface="Pretendard" panose="02000503000000020004" pitchFamily="2" charset="-127"/>
-              <a:ea typeface="Pretendard" panose="02000503000000020004" pitchFamily="2" charset="-127"/>
-              <a:cs typeface="Pretendard" panose="02000503000000020004" pitchFamily="2" charset="-127"/>
+              <a:latin typeface="Arial"/>
+              <a:ea typeface="Arial"/>
+              <a:cs typeface="Arial"/>
               <a:sym typeface="Arial"/>
             </a:endParaRPr>
           </a:p>
           <a:p>
-            <a:pPr marL="0" lvl="0" indent="0" algn="ctr" rtl="0">
+            <a:pPr indent="0" lvl="0" marL="0" rtl="0" algn="ctr">
               <a:lnSpc>
                 <a:spcPct val="90000"/>
               </a:lnSpc>
@@ -14906,22 +14638,22 @@
             </a:pPr>
             <a:r>
               <a:rPr lang="ko-KR" sz="1600">
-                <a:latin typeface="Pretendard" panose="02000503000000020004" pitchFamily="2" charset="-127"/>
-                <a:ea typeface="Pretendard" panose="02000503000000020004" pitchFamily="2" charset="-127"/>
-                <a:cs typeface="Pretendard" panose="02000503000000020004" pitchFamily="2" charset="-127"/>
+                <a:latin typeface="Arial"/>
+                <a:ea typeface="Arial"/>
+                <a:cs typeface="Arial"/>
                 <a:sym typeface="Arial"/>
               </a:rPr>
               <a:t>상기 교육과정을 성실히 이수하였으므로</a:t>
             </a:r>
             <a:endParaRPr sz="1600">
-              <a:latin typeface="Pretendard" panose="02000503000000020004" pitchFamily="2" charset="-127"/>
-              <a:ea typeface="Pretendard" panose="02000503000000020004" pitchFamily="2" charset="-127"/>
-              <a:cs typeface="Pretendard" panose="02000503000000020004" pitchFamily="2" charset="-127"/>
+              <a:latin typeface="Arial"/>
+              <a:ea typeface="Arial"/>
+              <a:cs typeface="Arial"/>
               <a:sym typeface="Arial"/>
             </a:endParaRPr>
           </a:p>
           <a:p>
-            <a:pPr marL="0" lvl="0" indent="0" algn="ctr" rtl="0">
+            <a:pPr indent="0" lvl="0" marL="0" rtl="0" algn="ctr">
               <a:lnSpc>
                 <a:spcPct val="90000"/>
               </a:lnSpc>
@@ -14939,18 +14671,14 @@
             </a:pPr>
             <a:r>
               <a:rPr lang="ko-KR" sz="1600">
-                <a:latin typeface="Pretendard" panose="02000503000000020004" pitchFamily="2" charset="-127"/>
-                <a:ea typeface="Pretendard" panose="02000503000000020004" pitchFamily="2" charset="-127"/>
-                <a:cs typeface="Pretendard" panose="02000503000000020004" pitchFamily="2" charset="-127"/>
+                <a:latin typeface="Arial"/>
+                <a:ea typeface="Arial"/>
+                <a:cs typeface="Arial"/>
                 <a:sym typeface="Arial"/>
               </a:rPr>
               <a:t>본 증서를 수여합니다.</a:t>
             </a:r>
-            <a:endParaRPr>
-              <a:latin typeface="Pretendard" panose="02000503000000020004" pitchFamily="2" charset="-127"/>
-              <a:ea typeface="Pretendard" panose="02000503000000020004" pitchFamily="2" charset="-127"/>
-              <a:cs typeface="Pretendard" panose="02000503000000020004" pitchFamily="2" charset="-127"/>
-            </a:endParaRPr>
+            <a:endParaRPr/>
           </a:p>
         </p:txBody>
       </p:sp>
@@ -14962,44 +14690,20 @@
         </p:nvGraphicFramePr>
         <p:xfrm>
           <a:off x="813546" y="2245640"/>
-          <a:ext cx="5197275" cy="3659675"/>
+          <a:ext cx="3000000" cy="3000000"/>
         </p:xfrm>
         <a:graphic>
           <a:graphicData uri="http://schemas.openxmlformats.org/drawingml/2006/table">
             <a:tbl>
-              <a:tblPr firstRow="1" bandRow="1">
+              <a:tblPr bandRow="1" firstRow="1">
                 <a:noFill/>
-                <a:tableStyleId>{76C34E99-6266-4279-BEDC-D33A93AAC897}</a:tableStyleId>
+                <a:tableStyleId>{B93CFFC1-726A-49C1-9508-311CB56AD775}</a:tableStyleId>
               </a:tblPr>
               <a:tblGrid>
-                <a:gridCol w="1035450">
-                  <a:extLst>
-                    <a:ext uri="{9D8B030D-6E8A-4147-A177-3AD203B41FA5}">
-                      <a16:colId xmlns:a16="http://schemas.microsoft.com/office/drawing/2014/main" val="20000"/>
-                    </a:ext>
-                  </a:extLst>
-                </a:gridCol>
-                <a:gridCol w="1563175">
-                  <a:extLst>
-                    <a:ext uri="{9D8B030D-6E8A-4147-A177-3AD203B41FA5}">
-                      <a16:colId xmlns:a16="http://schemas.microsoft.com/office/drawing/2014/main" val="20001"/>
-                    </a:ext>
-                  </a:extLst>
-                </a:gridCol>
-                <a:gridCol w="1129600">
-                  <a:extLst>
-                    <a:ext uri="{9D8B030D-6E8A-4147-A177-3AD203B41FA5}">
-                      <a16:colId xmlns:a16="http://schemas.microsoft.com/office/drawing/2014/main" val="20002"/>
-                    </a:ext>
-                  </a:extLst>
-                </a:gridCol>
-                <a:gridCol w="1469050">
-                  <a:extLst>
-                    <a:ext uri="{9D8B030D-6E8A-4147-A177-3AD203B41FA5}">
-                      <a16:colId xmlns:a16="http://schemas.microsoft.com/office/drawing/2014/main" val="20003"/>
-                    </a:ext>
-                  </a:extLst>
-                </a:gridCol>
+                <a:gridCol w="1035450"/>
+                <a:gridCol w="1563175"/>
+                <a:gridCol w="1129600"/>
+                <a:gridCol w="1469050"/>
               </a:tblGrid>
               <a:tr h="562550">
                 <a:tc>
@@ -15007,7 +14711,7 @@
                     <a:bodyPr/>
                     <a:lstStyle/>
                     <a:p>
-                      <a:pPr marL="0" marR="0" lvl="0" indent="0" algn="ctr" rtl="0">
+                      <a:pPr indent="0" lvl="0" marL="0" marR="0" rtl="0" algn="ctr">
                         <a:lnSpc>
                           <a:spcPct val="100000"/>
                         </a:lnSpc>
@@ -15025,14 +14729,14 @@
                         <a:buNone/>
                       </a:pPr>
                       <a:r>
-                        <a:rPr lang="ko-KR" sz="1200" b="0" u="none" strike="noStrike" cap="none">
+                        <a:rPr b="0" lang="ko-KR" sz="1200" u="none" cap="none" strike="noStrike">
                           <a:solidFill>
                             <a:schemeClr val="dk1"/>
                           </a:solidFill>
                         </a:rPr>
                         <a:t>이수과정</a:t>
                       </a:r>
-                      <a:endParaRPr sz="1200" b="0" u="none" strike="noStrike" cap="none">
+                      <a:endParaRPr b="0" sz="1200" u="none" cap="none" strike="noStrike">
                         <a:solidFill>
                           <a:schemeClr val="dk1"/>
                         </a:solidFill>
@@ -15043,42 +14747,42 @@
                       </a:endParaRPr>
                     </a:p>
                   </a:txBody>
-                  <a:tcPr marL="91450" marR="91450" marT="45725" marB="45725" anchor="ctr">
-                    <a:lnL w="12700" cap="flat" cmpd="sng">
+                  <a:tcPr marT="45725" marB="45725" marR="91450" marL="91450" anchor="ctr">
+                    <a:lnL cap="flat" cmpd="sng" w="12700">
                       <a:solidFill>
                         <a:srgbClr val="747474"/>
                       </a:solidFill>
                       <a:prstDash val="solid"/>
                       <a:round/>
-                      <a:headEnd type="none" w="sm" len="sm"/>
-                      <a:tailEnd type="none" w="sm" len="sm"/>
+                      <a:headEnd len="sm" w="sm" type="none"/>
+                      <a:tailEnd len="sm" w="sm" type="none"/>
                     </a:lnL>
-                    <a:lnR w="12700" cap="flat" cmpd="sng">
+                    <a:lnR cap="flat" cmpd="sng" w="12700">
                       <a:solidFill>
                         <a:srgbClr val="747474"/>
                       </a:solidFill>
                       <a:prstDash val="solid"/>
                       <a:round/>
-                      <a:headEnd type="none" w="sm" len="sm"/>
-                      <a:tailEnd type="none" w="sm" len="sm"/>
+                      <a:headEnd len="sm" w="sm" type="none"/>
+                      <a:tailEnd len="sm" w="sm" type="none"/>
                     </a:lnR>
-                    <a:lnT w="12700" cap="flat" cmpd="sng">
+                    <a:lnT cap="flat" cmpd="sng" w="12700">
                       <a:solidFill>
                         <a:srgbClr val="747474"/>
                       </a:solidFill>
                       <a:prstDash val="solid"/>
                       <a:round/>
-                      <a:headEnd type="none" w="sm" len="sm"/>
-                      <a:tailEnd type="none" w="sm" len="sm"/>
+                      <a:headEnd len="sm" w="sm" type="none"/>
+                      <a:tailEnd len="sm" w="sm" type="none"/>
                     </a:lnT>
-                    <a:lnB w="12700" cap="flat" cmpd="sng">
+                    <a:lnB cap="flat" cmpd="sng" w="12700">
                       <a:solidFill>
                         <a:srgbClr val="747474"/>
                       </a:solidFill>
                       <a:prstDash val="solid"/>
                       <a:round/>
-                      <a:headEnd type="none" w="sm" len="sm"/>
-                      <a:tailEnd type="none" w="sm" len="sm"/>
+                      <a:headEnd len="sm" w="sm" type="none"/>
+                      <a:tailEnd len="sm" w="sm" type="none"/>
                     </a:lnB>
                   </a:tcPr>
                 </a:tc>
@@ -15087,7 +14791,7 @@
                     <a:bodyPr/>
                     <a:lstStyle/>
                     <a:p>
-                      <a:pPr marL="0" marR="0" lvl="0" indent="0" algn="ctr" rtl="0">
+                      <a:pPr indent="0" lvl="0" marL="0" marR="0" rtl="0" algn="ctr">
                         <a:lnSpc>
                           <a:spcPct val="100000"/>
                         </a:lnSpc>
@@ -15105,7 +14809,7 @@
                         <a:buNone/>
                       </a:pPr>
                       <a:r>
-                        <a:rPr lang="ko-KR" sz="1200" b="0">
+                        <a:rPr b="0" lang="ko-KR" sz="1200">
                           <a:latin typeface="Arial"/>
                           <a:ea typeface="Arial"/>
                           <a:cs typeface="Arial"/>
@@ -15114,7 +14818,7 @@
                         <a:t>성매매 </a:t>
                       </a:r>
                       <a:r>
-                        <a:rPr lang="ko-KR" sz="1200" b="0" u="none" strike="noStrike" cap="none">
+                        <a:rPr b="0" lang="ko-KR" sz="1200" u="none" cap="none" strike="noStrike">
                           <a:solidFill>
                             <a:schemeClr val="dk1"/>
                           </a:solidFill>
@@ -15125,7 +14829,7 @@
                         </a:rPr>
                         <a:t>예방교육</a:t>
                       </a:r>
-                      <a:endParaRPr sz="1200" b="0" u="none" strike="noStrike" cap="none">
+                      <a:endParaRPr b="0" sz="1200" u="none" cap="none" strike="noStrike">
                         <a:solidFill>
                           <a:schemeClr val="dk1"/>
                         </a:solidFill>
@@ -15136,42 +14840,42 @@
                       </a:endParaRPr>
                     </a:p>
                   </a:txBody>
-                  <a:tcPr marL="91450" marR="91450" marT="45725" marB="45725" anchor="ctr">
-                    <a:lnL w="12700" cap="flat" cmpd="sng">
+                  <a:tcPr marT="45725" marB="45725" marR="91450" marL="91450" anchor="ctr">
+                    <a:lnL cap="flat" cmpd="sng" w="12700">
                       <a:solidFill>
                         <a:srgbClr val="747474"/>
                       </a:solidFill>
                       <a:prstDash val="solid"/>
                       <a:round/>
-                      <a:headEnd type="none" w="sm" len="sm"/>
-                      <a:tailEnd type="none" w="sm" len="sm"/>
+                      <a:headEnd len="sm" w="sm" type="none"/>
+                      <a:tailEnd len="sm" w="sm" type="none"/>
                     </a:lnL>
-                    <a:lnR w="12700" cap="flat" cmpd="sng">
+                    <a:lnR cap="flat" cmpd="sng" w="12700">
                       <a:solidFill>
                         <a:srgbClr val="747474"/>
                       </a:solidFill>
                       <a:prstDash val="solid"/>
                       <a:round/>
-                      <a:headEnd type="none" w="sm" len="sm"/>
-                      <a:tailEnd type="none" w="sm" len="sm"/>
+                      <a:headEnd len="sm" w="sm" type="none"/>
+                      <a:tailEnd len="sm" w="sm" type="none"/>
                     </a:lnR>
-                    <a:lnT w="12700" cap="flat" cmpd="sng">
+                    <a:lnT cap="flat" cmpd="sng" w="12700">
                       <a:solidFill>
                         <a:srgbClr val="747474"/>
                       </a:solidFill>
                       <a:prstDash val="solid"/>
                       <a:round/>
-                      <a:headEnd type="none" w="sm" len="sm"/>
-                      <a:tailEnd type="none" w="sm" len="sm"/>
+                      <a:headEnd len="sm" w="sm" type="none"/>
+                      <a:tailEnd len="sm" w="sm" type="none"/>
                     </a:lnT>
-                    <a:lnB w="12700" cap="flat" cmpd="sng">
+                    <a:lnB cap="flat" cmpd="sng" w="12700">
                       <a:solidFill>
                         <a:srgbClr val="747474"/>
                       </a:solidFill>
                       <a:prstDash val="solid"/>
                       <a:round/>
-                      <a:headEnd type="none" w="sm" len="sm"/>
-                      <a:tailEnd type="none" w="sm" len="sm"/>
+                      <a:headEnd len="sm" w="sm" type="none"/>
+                      <a:tailEnd len="sm" w="sm" type="none"/>
                     </a:lnB>
                   </a:tcPr>
                 </a:tc>
@@ -15180,7 +14884,7 @@
                     <a:bodyPr/>
                     <a:lstStyle/>
                     <a:p>
-                      <a:pPr marL="0" marR="0" lvl="0" indent="0" algn="ctr" rtl="0">
+                      <a:pPr indent="0" lvl="0" marL="0" marR="0" rtl="0" algn="ctr">
                         <a:lnSpc>
                           <a:spcPct val="100000"/>
                         </a:lnSpc>
@@ -15198,14 +14902,14 @@
                         <a:buNone/>
                       </a:pPr>
                       <a:r>
-                        <a:rPr lang="ko-KR" sz="1200" b="0" u="none" strike="noStrike" cap="none">
+                        <a:rPr b="0" lang="ko-KR" sz="1200" u="none" cap="none" strike="noStrike">
                           <a:solidFill>
                             <a:schemeClr val="dk1"/>
                           </a:solidFill>
                         </a:rPr>
                         <a:t>이수일자</a:t>
                       </a:r>
-                      <a:endParaRPr sz="1200" b="0" u="none" strike="noStrike" cap="none">
+                      <a:endParaRPr b="0" sz="1200" u="none" cap="none" strike="noStrike">
                         <a:solidFill>
                           <a:schemeClr val="dk1"/>
                         </a:solidFill>
@@ -15216,42 +14920,42 @@
                       </a:endParaRPr>
                     </a:p>
                   </a:txBody>
-                  <a:tcPr marL="91450" marR="91450" marT="45725" marB="45725" anchor="ctr">
-                    <a:lnL w="12700" cap="flat" cmpd="sng">
+                  <a:tcPr marT="45725" marB="45725" marR="91450" marL="91450" anchor="ctr">
+                    <a:lnL cap="flat" cmpd="sng" w="12700">
                       <a:solidFill>
                         <a:srgbClr val="747474"/>
                       </a:solidFill>
                       <a:prstDash val="solid"/>
                       <a:round/>
-                      <a:headEnd type="none" w="sm" len="sm"/>
-                      <a:tailEnd type="none" w="sm" len="sm"/>
+                      <a:headEnd len="sm" w="sm" type="none"/>
+                      <a:tailEnd len="sm" w="sm" type="none"/>
                     </a:lnL>
-                    <a:lnR w="12700" cap="flat" cmpd="sng">
+                    <a:lnR cap="flat" cmpd="sng" w="12700">
                       <a:solidFill>
                         <a:srgbClr val="747474"/>
                       </a:solidFill>
                       <a:prstDash val="solid"/>
                       <a:round/>
-                      <a:headEnd type="none" w="sm" len="sm"/>
-                      <a:tailEnd type="none" w="sm" len="sm"/>
+                      <a:headEnd len="sm" w="sm" type="none"/>
+                      <a:tailEnd len="sm" w="sm" type="none"/>
                     </a:lnR>
-                    <a:lnT w="12700" cap="flat" cmpd="sng">
+                    <a:lnT cap="flat" cmpd="sng" w="12700">
                       <a:solidFill>
                         <a:srgbClr val="747474"/>
                       </a:solidFill>
                       <a:prstDash val="solid"/>
                       <a:round/>
-                      <a:headEnd type="none" w="sm" len="sm"/>
-                      <a:tailEnd type="none" w="sm" len="sm"/>
+                      <a:headEnd len="sm" w="sm" type="none"/>
+                      <a:tailEnd len="sm" w="sm" type="none"/>
                     </a:lnT>
-                    <a:lnB w="12700" cap="flat" cmpd="sng">
+                    <a:lnB cap="flat" cmpd="sng" w="12700">
                       <a:solidFill>
                         <a:srgbClr val="747474"/>
                       </a:solidFill>
                       <a:prstDash val="solid"/>
                       <a:round/>
-                      <a:headEnd type="none" w="sm" len="sm"/>
-                      <a:tailEnd type="none" w="sm" len="sm"/>
+                      <a:headEnd len="sm" w="sm" type="none"/>
+                      <a:tailEnd len="sm" w="sm" type="none"/>
                     </a:lnB>
                   </a:tcPr>
                 </a:tc>
@@ -15260,7 +14964,7 @@
                     <a:bodyPr/>
                     <a:lstStyle/>
                     <a:p>
-                      <a:pPr marL="0" marR="0" lvl="0" indent="0" algn="ctr" rtl="0">
+                      <a:pPr indent="0" lvl="0" marL="0" marR="0" rtl="0" algn="ctr">
                         <a:lnSpc>
                           <a:spcPct val="100000"/>
                         </a:lnSpc>
@@ -15278,26 +14982,26 @@
                         <a:buNone/>
                       </a:pPr>
                       <a:r>
-                        <a:rPr lang="ko-KR" sz="1200" b="0" u="none" strike="noStrike" cap="none"/>
+                        <a:rPr b="0" lang="ko-KR" sz="1200" u="none" cap="none" strike="noStrike"/>
                         <a:t>202</a:t>
                       </a:r>
                       <a:r>
-                        <a:rPr lang="ko-KR" sz="1200" b="0"/>
+                        <a:rPr b="0" lang="ko-KR" sz="1200"/>
                         <a:t>6</a:t>
                       </a:r>
                       <a:r>
-                        <a:rPr lang="ko-KR" sz="1200" b="0" u="none" strike="noStrike" cap="none"/>
+                        <a:rPr b="0" lang="ko-KR" sz="1200" u="none" cap="none" strike="noStrike"/>
                         <a:t>년</a:t>
                       </a:r>
                       <a:r>
-                        <a:rPr lang="ko-KR" sz="1200" b="0"/>
-                        <a:t>  4월  24</a:t>
+                        <a:rPr b="0" lang="ko-KR" sz="1200"/>
+                        <a:t>  9월  5</a:t>
                       </a:r>
                       <a:r>
-                        <a:rPr lang="ko-KR" sz="1200" b="0" u="none" strike="noStrike" cap="none"/>
+                        <a:rPr b="0" lang="ko-KR" sz="1200" u="none" cap="none" strike="noStrike"/>
                         <a:t>일</a:t>
                       </a:r>
-                      <a:endParaRPr sz="1200" b="0" u="none" strike="noStrike" cap="none">
+                      <a:endParaRPr b="0" sz="1200" u="none" cap="none" strike="noStrike">
                         <a:solidFill>
                           <a:schemeClr val="dk1"/>
                         </a:solidFill>
@@ -15308,50 +15012,45 @@
                       </a:endParaRPr>
                     </a:p>
                   </a:txBody>
-                  <a:tcPr marL="91450" marR="91450" marT="45725" marB="45725" anchor="ctr">
-                    <a:lnL w="12700" cap="flat" cmpd="sng">
+                  <a:tcPr marT="45725" marB="45725" marR="91450" marL="91450" anchor="ctr">
+                    <a:lnL cap="flat" cmpd="sng" w="12700">
                       <a:solidFill>
                         <a:srgbClr val="747474"/>
                       </a:solidFill>
                       <a:prstDash val="solid"/>
                       <a:round/>
-                      <a:headEnd type="none" w="sm" len="sm"/>
-                      <a:tailEnd type="none" w="sm" len="sm"/>
+                      <a:headEnd len="sm" w="sm" type="none"/>
+                      <a:tailEnd len="sm" w="sm" type="none"/>
                     </a:lnL>
-                    <a:lnR w="12700" cap="flat" cmpd="sng">
+                    <a:lnR cap="flat" cmpd="sng" w="12700">
                       <a:solidFill>
                         <a:srgbClr val="747474"/>
                       </a:solidFill>
                       <a:prstDash val="solid"/>
                       <a:round/>
-                      <a:headEnd type="none" w="sm" len="sm"/>
-                      <a:tailEnd type="none" w="sm" len="sm"/>
+                      <a:headEnd len="sm" w="sm" type="none"/>
+                      <a:tailEnd len="sm" w="sm" type="none"/>
                     </a:lnR>
-                    <a:lnT w="12700" cap="flat" cmpd="sng">
+                    <a:lnT cap="flat" cmpd="sng" w="12700">
                       <a:solidFill>
                         <a:srgbClr val="747474"/>
                       </a:solidFill>
                       <a:prstDash val="solid"/>
                       <a:round/>
-                      <a:headEnd type="none" w="sm" len="sm"/>
-                      <a:tailEnd type="none" w="sm" len="sm"/>
+                      <a:headEnd len="sm" w="sm" type="none"/>
+                      <a:tailEnd len="sm" w="sm" type="none"/>
                     </a:lnT>
-                    <a:lnB w="12700" cap="flat" cmpd="sng">
+                    <a:lnB cap="flat" cmpd="sng" w="12700">
                       <a:solidFill>
                         <a:srgbClr val="747474"/>
                       </a:solidFill>
                       <a:prstDash val="solid"/>
                       <a:round/>
-                      <a:headEnd type="none" w="sm" len="sm"/>
-                      <a:tailEnd type="none" w="sm" len="sm"/>
+                      <a:headEnd len="sm" w="sm" type="none"/>
+                      <a:tailEnd len="sm" w="sm" type="none"/>
                     </a:lnB>
                   </a:tcPr>
                 </a:tc>
-                <a:extLst>
-                  <a:ext uri="{0D108BD9-81ED-4DB2-BD59-A6C34878D82A}">
-                    <a16:rowId xmlns:a16="http://schemas.microsoft.com/office/drawing/2014/main" val="10000"/>
-                  </a:ext>
-                </a:extLst>
               </a:tr>
               <a:tr h="530075">
                 <a:tc>
@@ -15359,7 +15058,7 @@
                     <a:bodyPr/>
                     <a:lstStyle/>
                     <a:p>
-                      <a:pPr marL="0" marR="0" lvl="0" indent="0" algn="ctr" rtl="0">
+                      <a:pPr indent="0" lvl="0" marL="0" marR="0" rtl="0" algn="ctr">
                         <a:lnSpc>
                           <a:spcPct val="100000"/>
                         </a:lnSpc>
@@ -15377,14 +15076,14 @@
                         <a:buNone/>
                       </a:pPr>
                       <a:r>
-                        <a:rPr lang="ko-KR" sz="1200" b="0" u="none" strike="noStrike" cap="none">
+                        <a:rPr b="0" lang="ko-KR" sz="1200" u="none" cap="none" strike="noStrike">
                           <a:solidFill>
                             <a:schemeClr val="dk1"/>
                           </a:solidFill>
                         </a:rPr>
                         <a:t>성명</a:t>
                       </a:r>
-                      <a:endParaRPr sz="1200" b="0" u="none" strike="noStrike" cap="none">
+                      <a:endParaRPr b="0" sz="1200" u="none" cap="none" strike="noStrike">
                         <a:solidFill>
                           <a:schemeClr val="dk1"/>
                         </a:solidFill>
@@ -15395,42 +15094,42 @@
                       </a:endParaRPr>
                     </a:p>
                   </a:txBody>
-                  <a:tcPr marL="91450" marR="91450" marT="45725" marB="45725" anchor="ctr">
-                    <a:lnL w="12700" cap="flat" cmpd="sng">
+                  <a:tcPr marT="45725" marB="45725" marR="91450" marL="91450" anchor="ctr">
+                    <a:lnL cap="flat" cmpd="sng" w="12700">
                       <a:solidFill>
                         <a:srgbClr val="747474"/>
                       </a:solidFill>
                       <a:prstDash val="solid"/>
                       <a:round/>
-                      <a:headEnd type="none" w="sm" len="sm"/>
-                      <a:tailEnd type="none" w="sm" len="sm"/>
+                      <a:headEnd len="sm" w="sm" type="none"/>
+                      <a:tailEnd len="sm" w="sm" type="none"/>
                     </a:lnL>
-                    <a:lnR w="12700" cap="flat" cmpd="sng">
+                    <a:lnR cap="flat" cmpd="sng" w="12700">
                       <a:solidFill>
                         <a:srgbClr val="747474"/>
                       </a:solidFill>
                       <a:prstDash val="solid"/>
                       <a:round/>
-                      <a:headEnd type="none" w="sm" len="sm"/>
-                      <a:tailEnd type="none" w="sm" len="sm"/>
+                      <a:headEnd len="sm" w="sm" type="none"/>
+                      <a:tailEnd len="sm" w="sm" type="none"/>
                     </a:lnR>
-                    <a:lnT w="12700" cap="flat" cmpd="sng">
+                    <a:lnT cap="flat" cmpd="sng" w="12700">
                       <a:solidFill>
                         <a:srgbClr val="747474"/>
                       </a:solidFill>
                       <a:prstDash val="solid"/>
                       <a:round/>
-                      <a:headEnd type="none" w="sm" len="sm"/>
-                      <a:tailEnd type="none" w="sm" len="sm"/>
+                      <a:headEnd len="sm" w="sm" type="none"/>
+                      <a:tailEnd len="sm" w="sm" type="none"/>
                     </a:lnT>
-                    <a:lnB w="12700" cap="flat" cmpd="sng">
+                    <a:lnB cap="flat" cmpd="sng" w="12700">
                       <a:solidFill>
                         <a:srgbClr val="747474"/>
                       </a:solidFill>
                       <a:prstDash val="solid"/>
                       <a:round/>
-                      <a:headEnd type="none" w="sm" len="sm"/>
-                      <a:tailEnd type="none" w="sm" len="sm"/>
+                      <a:headEnd len="sm" w="sm" type="none"/>
+                      <a:tailEnd len="sm" w="sm" type="none"/>
                     </a:lnB>
                   </a:tcPr>
                 </a:tc>
@@ -15439,7 +15138,7 @@
                     <a:bodyPr/>
                     <a:lstStyle/>
                     <a:p>
-                      <a:pPr marL="0" marR="0" lvl="0" indent="0" algn="ctr" rtl="0">
+                      <a:pPr indent="0" lvl="0" marL="0" marR="0" rtl="0" algn="l">
                         <a:lnSpc>
                           <a:spcPct val="100000"/>
                         </a:lnSpc>
@@ -15463,9 +15162,9 @@
                           <a:cs typeface="Arial"/>
                           <a:sym typeface="Arial"/>
                         </a:rPr>
-                        <a:t>여 윤 수 </a:t>
+                        <a:t>           김 동 규 </a:t>
                       </a:r>
-                      <a:endParaRPr sz="1200" b="0" u="none" strike="noStrike" cap="none">
+                      <a:endParaRPr b="0" sz="1200" u="none" cap="none" strike="noStrike">
                         <a:solidFill>
                           <a:schemeClr val="dk1"/>
                         </a:solidFill>
@@ -15476,42 +15175,42 @@
                       </a:endParaRPr>
                     </a:p>
                   </a:txBody>
-                  <a:tcPr marL="91450" marR="91450" marT="45725" marB="45725" anchor="ctr">
-                    <a:lnL w="12700" cap="flat" cmpd="sng">
+                  <a:tcPr marT="45725" marB="45725" marR="91450" marL="91450" anchor="ctr">
+                    <a:lnL cap="flat" cmpd="sng" w="12700">
                       <a:solidFill>
                         <a:srgbClr val="747474"/>
                       </a:solidFill>
                       <a:prstDash val="solid"/>
                       <a:round/>
-                      <a:headEnd type="none" w="sm" len="sm"/>
-                      <a:tailEnd type="none" w="sm" len="sm"/>
+                      <a:headEnd len="sm" w="sm" type="none"/>
+                      <a:tailEnd len="sm" w="sm" type="none"/>
                     </a:lnL>
-                    <a:lnR w="12700" cap="flat" cmpd="sng">
+                    <a:lnR cap="flat" cmpd="sng" w="12700">
                       <a:solidFill>
                         <a:srgbClr val="747474"/>
                       </a:solidFill>
                       <a:prstDash val="solid"/>
                       <a:round/>
-                      <a:headEnd type="none" w="sm" len="sm"/>
-                      <a:tailEnd type="none" w="sm" len="sm"/>
+                      <a:headEnd len="sm" w="sm" type="none"/>
+                      <a:tailEnd len="sm" w="sm" type="none"/>
                     </a:lnR>
-                    <a:lnT w="12700" cap="flat" cmpd="sng">
+                    <a:lnT cap="flat" cmpd="sng" w="12700">
                       <a:solidFill>
                         <a:srgbClr val="747474"/>
                       </a:solidFill>
                       <a:prstDash val="solid"/>
                       <a:round/>
-                      <a:headEnd type="none" w="sm" len="sm"/>
-                      <a:tailEnd type="none" w="sm" len="sm"/>
+                      <a:headEnd len="sm" w="sm" type="none"/>
+                      <a:tailEnd len="sm" w="sm" type="none"/>
                     </a:lnT>
-                    <a:lnB w="12700" cap="flat" cmpd="sng">
+                    <a:lnB cap="flat" cmpd="sng" w="12700">
                       <a:solidFill>
                         <a:srgbClr val="747474"/>
                       </a:solidFill>
                       <a:prstDash val="solid"/>
                       <a:round/>
-                      <a:headEnd type="none" w="sm" len="sm"/>
-                      <a:tailEnd type="none" w="sm" len="sm"/>
+                      <a:headEnd len="sm" w="sm" type="none"/>
+                      <a:tailEnd len="sm" w="sm" type="none"/>
                     </a:lnB>
                   </a:tcPr>
                 </a:tc>
@@ -15520,7 +15219,7 @@
                     <a:bodyPr/>
                     <a:lstStyle/>
                     <a:p>
-                      <a:pPr marL="0" marR="0" lvl="0" indent="0" algn="ctr" rtl="0">
+                      <a:pPr indent="0" lvl="0" marL="0" marR="0" rtl="0" algn="ctr">
                         <a:lnSpc>
                           <a:spcPct val="100000"/>
                         </a:lnSpc>
@@ -15538,7 +15237,7 @@
                         <a:buNone/>
                       </a:pPr>
                       <a:r>
-                        <a:rPr lang="ko-KR" sz="1200" b="0" u="none" strike="noStrike" cap="none">
+                        <a:rPr b="0" lang="ko-KR" sz="1200" u="none" cap="none" strike="noStrike">
                           <a:solidFill>
                             <a:schemeClr val="dk1"/>
                           </a:solidFill>
@@ -15549,45 +15248,45 @@
                         </a:rPr>
                         <a:t>생년월일</a:t>
                       </a:r>
-                      <a:endParaRPr sz="1400" u="none" strike="noStrike" cap="none"/>
+                      <a:endParaRPr sz="1400" u="none" cap="none" strike="noStrike"/>
                     </a:p>
                   </a:txBody>
-                  <a:tcPr marL="91450" marR="91450" marT="45725" marB="45725" anchor="ctr">
-                    <a:lnL w="12700" cap="flat" cmpd="sng">
+                  <a:tcPr marT="45725" marB="45725" marR="91450" marL="91450" anchor="ctr">
+                    <a:lnL cap="flat" cmpd="sng" w="12700">
                       <a:solidFill>
                         <a:srgbClr val="747474"/>
                       </a:solidFill>
                       <a:prstDash val="solid"/>
                       <a:round/>
-                      <a:headEnd type="none" w="sm" len="sm"/>
-                      <a:tailEnd type="none" w="sm" len="sm"/>
+                      <a:headEnd len="sm" w="sm" type="none"/>
+                      <a:tailEnd len="sm" w="sm" type="none"/>
                     </a:lnL>
-                    <a:lnR w="12700" cap="flat" cmpd="sng">
+                    <a:lnR cap="flat" cmpd="sng" w="12700">
                       <a:solidFill>
                         <a:srgbClr val="747474"/>
                       </a:solidFill>
                       <a:prstDash val="solid"/>
                       <a:round/>
-                      <a:headEnd type="none" w="sm" len="sm"/>
-                      <a:tailEnd type="none" w="sm" len="sm"/>
+                      <a:headEnd len="sm" w="sm" type="none"/>
+                      <a:tailEnd len="sm" w="sm" type="none"/>
                     </a:lnR>
-                    <a:lnT w="12700" cap="flat" cmpd="sng">
+                    <a:lnT cap="flat" cmpd="sng" w="12700">
                       <a:solidFill>
                         <a:srgbClr val="747474"/>
                       </a:solidFill>
                       <a:prstDash val="solid"/>
                       <a:round/>
-                      <a:headEnd type="none" w="sm" len="sm"/>
-                      <a:tailEnd type="none" w="sm" len="sm"/>
+                      <a:headEnd len="sm" w="sm" type="none"/>
+                      <a:tailEnd len="sm" w="sm" type="none"/>
                     </a:lnT>
-                    <a:lnB w="12700" cap="flat" cmpd="sng">
+                    <a:lnB cap="flat" cmpd="sng" w="12700">
                       <a:solidFill>
                         <a:srgbClr val="747474"/>
                       </a:solidFill>
                       <a:prstDash val="solid"/>
                       <a:round/>
-                      <a:headEnd type="none" w="sm" len="sm"/>
-                      <a:tailEnd type="none" w="sm" len="sm"/>
+                      <a:headEnd len="sm" w="sm" type="none"/>
+                      <a:tailEnd len="sm" w="sm" type="none"/>
                     </a:lnB>
                   </a:tcPr>
                 </a:tc>
@@ -15596,7 +15295,7 @@
                     <a:bodyPr/>
                     <a:lstStyle/>
                     <a:p>
-                      <a:pPr marL="0" marR="0" lvl="0" indent="0" algn="ctr" rtl="0">
+                      <a:pPr indent="0" lvl="0" marL="0" marR="0" rtl="0" algn="ctr">
                         <a:lnSpc>
                           <a:spcPct val="100000"/>
                         </a:lnSpc>
@@ -15615,29 +15314,29 @@
                       </a:pPr>
                       <a:r>
                         <a:rPr lang="ko-KR" sz="1200"/>
-                        <a:t> 1988</a:t>
+                        <a:t>1998</a:t>
                       </a:r>
                       <a:r>
-                        <a:rPr lang="ko-KR" sz="1200" u="none" strike="noStrike" cap="none"/>
-                        <a:t>년 </a:t>
+                        <a:rPr lang="ko-KR" sz="1200" u="none" cap="none" strike="noStrike"/>
+                        <a:t>년  </a:t>
                       </a:r>
                       <a:r>
                         <a:rPr lang="ko-KR" sz="1200"/>
-                        <a:t> 9</a:t>
+                        <a:t>11</a:t>
                       </a:r>
                       <a:r>
-                        <a:rPr lang="ko-KR" sz="1200" u="none" strike="noStrike" cap="none"/>
+                        <a:rPr lang="ko-KR" sz="1200" u="none" cap="none" strike="noStrike"/>
                         <a:t>월</a:t>
                       </a:r>
                       <a:r>
                         <a:rPr lang="ko-KR" sz="1200"/>
-                        <a:t> 15</a:t>
+                        <a:t>  11</a:t>
                       </a:r>
                       <a:r>
-                        <a:rPr lang="ko-KR" sz="1200" u="none" strike="noStrike" cap="none"/>
+                        <a:rPr lang="ko-KR" sz="1200" u="none" cap="none" strike="noStrike"/>
                         <a:t>일</a:t>
                       </a:r>
-                      <a:endParaRPr sz="1200" b="0" u="none" strike="noStrike" cap="none">
+                      <a:endParaRPr b="0" sz="1200" u="none" cap="none" strike="noStrike">
                         <a:solidFill>
                           <a:schemeClr val="dk1"/>
                         </a:solidFill>
@@ -15648,50 +15347,45 @@
                       </a:endParaRPr>
                     </a:p>
                   </a:txBody>
-                  <a:tcPr marL="91450" marR="91450" marT="45725" marB="45725" anchor="ctr">
-                    <a:lnL w="12700" cap="flat" cmpd="sng">
+                  <a:tcPr marT="45725" marB="45725" marR="91450" marL="91450" anchor="ctr">
+                    <a:lnL cap="flat" cmpd="sng" w="12700">
                       <a:solidFill>
                         <a:srgbClr val="747474"/>
                       </a:solidFill>
                       <a:prstDash val="solid"/>
                       <a:round/>
-                      <a:headEnd type="none" w="sm" len="sm"/>
-                      <a:tailEnd type="none" w="sm" len="sm"/>
+                      <a:headEnd len="sm" w="sm" type="none"/>
+                      <a:tailEnd len="sm" w="sm" type="none"/>
                     </a:lnL>
-                    <a:lnR w="12700" cap="flat" cmpd="sng">
+                    <a:lnR cap="flat" cmpd="sng" w="12700">
                       <a:solidFill>
                         <a:srgbClr val="747474"/>
                       </a:solidFill>
                       <a:prstDash val="solid"/>
                       <a:round/>
-                      <a:headEnd type="none" w="sm" len="sm"/>
-                      <a:tailEnd type="none" w="sm" len="sm"/>
+                      <a:headEnd len="sm" w="sm" type="none"/>
+                      <a:tailEnd len="sm" w="sm" type="none"/>
                     </a:lnR>
-                    <a:lnT w="12700" cap="flat" cmpd="sng">
+                    <a:lnT cap="flat" cmpd="sng" w="12700">
                       <a:solidFill>
                         <a:srgbClr val="747474"/>
                       </a:solidFill>
                       <a:prstDash val="solid"/>
                       <a:round/>
-                      <a:headEnd type="none" w="sm" len="sm"/>
-                      <a:tailEnd type="none" w="sm" len="sm"/>
+                      <a:headEnd len="sm" w="sm" type="none"/>
+                      <a:tailEnd len="sm" w="sm" type="none"/>
                     </a:lnT>
-                    <a:lnB w="12700" cap="flat" cmpd="sng">
+                    <a:lnB cap="flat" cmpd="sng" w="12700">
                       <a:solidFill>
                         <a:srgbClr val="747474"/>
                       </a:solidFill>
                       <a:prstDash val="solid"/>
                       <a:round/>
-                      <a:headEnd type="none" w="sm" len="sm"/>
-                      <a:tailEnd type="none" w="sm" len="sm"/>
+                      <a:headEnd len="sm" w="sm" type="none"/>
+                      <a:tailEnd len="sm" w="sm" type="none"/>
                     </a:lnB>
                   </a:tcPr>
                 </a:tc>
-                <a:extLst>
-                  <a:ext uri="{0D108BD9-81ED-4DB2-BD59-A6C34878D82A}">
-                    <a16:rowId xmlns:a16="http://schemas.microsoft.com/office/drawing/2014/main" val="10001"/>
-                  </a:ext>
-                </a:extLst>
               </a:tr>
               <a:tr h="2567050">
                 <a:tc>
@@ -15699,7 +15393,7 @@
                     <a:bodyPr/>
                     <a:lstStyle/>
                     <a:p>
-                      <a:pPr marL="0" marR="0" lvl="0" indent="0" algn="ctr" rtl="0">
+                      <a:pPr indent="0" lvl="0" marL="0" marR="0" rtl="0" algn="ctr">
                         <a:lnSpc>
                           <a:spcPct val="100000"/>
                         </a:lnSpc>
@@ -15716,10 +15410,13 @@
                         <a:buFont typeface="Arial"/>
                         <a:buNone/>
                       </a:pPr>
-                      <a:endParaRPr sz="1350" b="0" u="none" strike="noStrike" cap="none"/>
+                      <a:r>
+                        <a:t/>
+                      </a:r>
+                      <a:endParaRPr b="0" sz="1350" u="none" cap="none" strike="noStrike"/>
                     </a:p>
                     <a:p>
-                      <a:pPr marL="0" marR="0" lvl="0" indent="0" algn="ctr" rtl="0">
+                      <a:pPr indent="0" lvl="0" marL="0" marR="0" rtl="0" algn="ctr">
                         <a:lnSpc>
                           <a:spcPct val="100000"/>
                         </a:lnSpc>
@@ -15737,48 +15434,48 @@
                         <a:buNone/>
                       </a:pPr>
                       <a:r>
-                        <a:rPr lang="ko-KR" sz="1200" b="0" u="none" strike="noStrike" cap="none"/>
+                        <a:rPr b="0" lang="ko-KR" sz="1200" u="none" cap="none" strike="noStrike"/>
                         <a:t>교육내용</a:t>
                       </a:r>
-                      <a:endParaRPr sz="1400" u="none" strike="noStrike" cap="none"/>
+                      <a:endParaRPr sz="1400" u="none" cap="none" strike="noStrike"/>
                     </a:p>
                   </a:txBody>
-                  <a:tcPr marL="91450" marR="91450" marT="45725" marB="45725">
-                    <a:lnL w="12700" cap="flat" cmpd="sng">
+                  <a:tcPr marT="45725" marB="45725" marR="91450" marL="91450">
+                    <a:lnL cap="flat" cmpd="sng" w="12700">
                       <a:solidFill>
                         <a:srgbClr val="747474"/>
                       </a:solidFill>
                       <a:prstDash val="solid"/>
                       <a:round/>
-                      <a:headEnd type="none" w="sm" len="sm"/>
-                      <a:tailEnd type="none" w="sm" len="sm"/>
+                      <a:headEnd len="sm" w="sm" type="none"/>
+                      <a:tailEnd len="sm" w="sm" type="none"/>
                     </a:lnL>
-                    <a:lnR w="12700" cap="flat" cmpd="sng">
+                    <a:lnR cap="flat" cmpd="sng" w="12700">
                       <a:solidFill>
                         <a:srgbClr val="747474"/>
                       </a:solidFill>
                       <a:prstDash val="solid"/>
                       <a:round/>
-                      <a:headEnd type="none" w="sm" len="sm"/>
-                      <a:tailEnd type="none" w="sm" len="sm"/>
+                      <a:headEnd len="sm" w="sm" type="none"/>
+                      <a:tailEnd len="sm" w="sm" type="none"/>
                     </a:lnR>
-                    <a:lnT w="12700" cap="flat" cmpd="sng">
+                    <a:lnT cap="flat" cmpd="sng" w="12700">
                       <a:solidFill>
                         <a:srgbClr val="747474"/>
                       </a:solidFill>
                       <a:prstDash val="solid"/>
                       <a:round/>
-                      <a:headEnd type="none" w="sm" len="sm"/>
-                      <a:tailEnd type="none" w="sm" len="sm"/>
+                      <a:headEnd len="sm" w="sm" type="none"/>
+                      <a:tailEnd len="sm" w="sm" type="none"/>
                     </a:lnT>
-                    <a:lnB w="12700" cap="flat" cmpd="sng">
+                    <a:lnB cap="flat" cmpd="sng" w="12700">
                       <a:solidFill>
                         <a:srgbClr val="747474"/>
                       </a:solidFill>
                       <a:prstDash val="solid"/>
                       <a:round/>
-                      <a:headEnd type="none" w="sm" len="sm"/>
-                      <a:tailEnd type="none" w="sm" len="sm"/>
+                      <a:headEnd len="sm" w="sm" type="none"/>
+                      <a:tailEnd len="sm" w="sm" type="none"/>
                     </a:lnB>
                   </a:tcPr>
                 </a:tc>
@@ -15787,7 +15484,7 @@
                     <a:bodyPr/>
                     <a:lstStyle/>
                     <a:p>
-                      <a:pPr marL="0" marR="0" lvl="0" indent="0" algn="l" rtl="0">
+                      <a:pPr indent="0" lvl="0" marL="0" marR="0" rtl="0" algn="l">
                         <a:lnSpc>
                           <a:spcPct val="100000"/>
                         </a:lnSpc>
@@ -15804,10 +15501,13 @@
                         <a:buFont typeface="Arial"/>
                         <a:buNone/>
                       </a:pPr>
-                      <a:endParaRPr sz="1350" b="0" u="none" strike="noStrike" cap="none"/>
+                      <a:r>
+                        <a:t/>
+                      </a:r>
+                      <a:endParaRPr b="0" sz="1350" u="none" cap="none" strike="noStrike"/>
                     </a:p>
                     <a:p>
-                      <a:pPr marL="228600" marR="0" lvl="0" indent="-228600" algn="l" rtl="0">
+                      <a:pPr indent="-228600" lvl="0" marL="228600" marR="0" rtl="0" algn="l">
                         <a:lnSpc>
                           <a:spcPct val="100000"/>
                         </a:lnSpc>
@@ -15831,7 +15531,7 @@
                       <a:endParaRPr sz="1200"/>
                     </a:p>
                     <a:p>
-                      <a:pPr marL="228600" marR="0" lvl="0" indent="-228600" algn="l" rtl="0">
+                      <a:pPr indent="-228600" lvl="0" marL="228600" marR="0" rtl="0" algn="l">
                         <a:lnSpc>
                           <a:spcPct val="100000"/>
                         </a:lnSpc>
@@ -15855,7 +15555,7 @@
                       <a:endParaRPr sz="1200"/>
                     </a:p>
                     <a:p>
-                      <a:pPr marL="228600" marR="0" lvl="0" indent="-228600" algn="l" rtl="0">
+                      <a:pPr indent="-228600" lvl="0" marL="228600" marR="0" rtl="0" algn="l">
                         <a:lnSpc>
                           <a:spcPct val="100000"/>
                         </a:lnSpc>
@@ -15879,7 +15579,7 @@
                       <a:endParaRPr sz="1200"/>
                     </a:p>
                     <a:p>
-                      <a:pPr marL="228600" marR="0" lvl="0" indent="-228600" algn="l" rtl="0">
+                      <a:pPr indent="-228600" lvl="0" marL="228600" marR="0" rtl="0" algn="l">
                         <a:lnSpc>
                           <a:spcPct val="100000"/>
                         </a:lnSpc>
@@ -15903,7 +15603,7 @@
                       <a:endParaRPr sz="1200"/>
                     </a:p>
                     <a:p>
-                      <a:pPr marL="228600" marR="0" lvl="0" indent="-228600" algn="l" rtl="0">
+                      <a:pPr indent="-228600" lvl="0" marL="228600" marR="0" rtl="0" algn="l">
                         <a:lnSpc>
                           <a:spcPct val="100000"/>
                         </a:lnSpc>
@@ -15927,7 +15627,7 @@
                       <a:endParaRPr sz="1200"/>
                     </a:p>
                     <a:p>
-                      <a:pPr marL="228600" marR="0" lvl="0" indent="-228600" algn="l" rtl="0">
+                      <a:pPr indent="-228600" lvl="0" marL="228600" marR="0" rtl="0" algn="l">
                         <a:lnSpc>
                           <a:spcPct val="100000"/>
                         </a:lnSpc>
@@ -15947,70 +15647,47 @@
                       <a:endParaRPr sz="1200"/>
                     </a:p>
                   </a:txBody>
-                  <a:tcPr marL="91450" marR="91450" marT="45725" marB="45725">
-                    <a:lnL w="12700" cap="flat" cmpd="sng">
+                  <a:tcPr marT="45725" marB="45725" marR="91450" marL="91450">
+                    <a:lnL cap="flat" cmpd="sng" w="12700">
                       <a:solidFill>
                         <a:srgbClr val="747474"/>
                       </a:solidFill>
                       <a:prstDash val="solid"/>
                       <a:round/>
-                      <a:headEnd type="none" w="sm" len="sm"/>
-                      <a:tailEnd type="none" w="sm" len="sm"/>
+                      <a:headEnd len="sm" w="sm" type="none"/>
+                      <a:tailEnd len="sm" w="sm" type="none"/>
                     </a:lnL>
-                    <a:lnR w="12700" cap="flat" cmpd="sng">
+                    <a:lnR cap="flat" cmpd="sng" w="12700">
                       <a:solidFill>
                         <a:srgbClr val="747474"/>
                       </a:solidFill>
                       <a:prstDash val="solid"/>
                       <a:round/>
-                      <a:headEnd type="none" w="sm" len="sm"/>
-                      <a:tailEnd type="none" w="sm" len="sm"/>
+                      <a:headEnd len="sm" w="sm" type="none"/>
+                      <a:tailEnd len="sm" w="sm" type="none"/>
                     </a:lnR>
-                    <a:lnT w="12700" cap="flat" cmpd="sng">
+                    <a:lnT cap="flat" cmpd="sng" w="12700">
                       <a:solidFill>
                         <a:srgbClr val="747474"/>
                       </a:solidFill>
                       <a:prstDash val="solid"/>
                       <a:round/>
-                      <a:headEnd type="none" w="sm" len="sm"/>
-                      <a:tailEnd type="none" w="sm" len="sm"/>
+                      <a:headEnd len="sm" w="sm" type="none"/>
+                      <a:tailEnd len="sm" w="sm" type="none"/>
                     </a:lnT>
-                    <a:lnB w="12700" cap="flat" cmpd="sng">
+                    <a:lnB cap="flat" cmpd="sng" w="12700">
                       <a:solidFill>
                         <a:srgbClr val="747474"/>
                       </a:solidFill>
                       <a:prstDash val="solid"/>
                       <a:round/>
-                      <a:headEnd type="none" w="sm" len="sm"/>
-                      <a:tailEnd type="none" w="sm" len="sm"/>
+                      <a:headEnd len="sm" w="sm" type="none"/>
+                      <a:tailEnd len="sm" w="sm" type="none"/>
                     </a:lnB>
                   </a:tcPr>
                 </a:tc>
-                <a:tc hMerge="1">
-                  <a:txBody>
-                    <a:bodyPr/>
-                    <a:lstStyle/>
-                    <a:p>
-                      <a:endParaRPr lang="ko-KR"/>
-                    </a:p>
-                  </a:txBody>
-                  <a:tcPr/>
-                </a:tc>
-                <a:tc hMerge="1">
-                  <a:txBody>
-                    <a:bodyPr/>
-                    <a:lstStyle/>
-                    <a:p>
-                      <a:endParaRPr lang="ko-KR"/>
-                    </a:p>
-                  </a:txBody>
-                  <a:tcPr/>
-                </a:tc>
-                <a:extLst>
-                  <a:ext uri="{0D108BD9-81ED-4DB2-BD59-A6C34878D82A}">
-                    <a16:rowId xmlns:a16="http://schemas.microsoft.com/office/drawing/2014/main" val="10002"/>
-                  </a:ext>
-                </a:extLst>
+                <a:tc hMerge="1"/>
+                <a:tc hMerge="1"/>
               </a:tr>
             </a:tbl>
           </a:graphicData>
@@ -16025,7 +15702,286 @@
 </file>
 
 <file path=ppt/theme/theme1.xml><?xml version="1.0" encoding="utf-8"?>
-<a:theme xmlns:a="http://schemas.openxmlformats.org/drawingml/2006/main" name="Office 테마">
+<a:theme xmlns:a="http://schemas.openxmlformats.org/drawingml/2006/main" xmlns:r="http://schemas.openxmlformats.org/officeDocument/2006/relationships">
+  <a:themeElements>
+    <a:clrScheme name="Default">
+      <a:dk1>
+        <a:srgbClr val="000000"/>
+      </a:dk1>
+      <a:lt1>
+        <a:srgbClr val="FFFFFF"/>
+      </a:lt1>
+      <a:dk2>
+        <a:srgbClr val="158158"/>
+      </a:dk2>
+      <a:lt2>
+        <a:srgbClr val="F3F3F3"/>
+      </a:lt2>
+      <a:accent1>
+        <a:srgbClr val="058DC7"/>
+      </a:accent1>
+      <a:accent2>
+        <a:srgbClr val="50B432"/>
+      </a:accent2>
+      <a:accent3>
+        <a:srgbClr val="ED561B"/>
+      </a:accent3>
+      <a:accent4>
+        <a:srgbClr val="EDEF00"/>
+      </a:accent4>
+      <a:accent5>
+        <a:srgbClr val="24CBE5"/>
+      </a:accent5>
+      <a:accent6>
+        <a:srgbClr val="64E572"/>
+      </a:accent6>
+      <a:hlink>
+        <a:srgbClr val="2200CC"/>
+      </a:hlink>
+      <a:folHlink>
+        <a:srgbClr val="551A8B"/>
+      </a:folHlink>
+    </a:clrScheme>
+    <a:fontScheme name="Office">
+      <a:majorFont>
+        <a:latin typeface="Arial"/>
+        <a:ea typeface=""/>
+        <a:cs typeface=""/>
+        <a:font script="Jpan" typeface="ＭＳ Ｐゴシック"/>
+        <a:font script="Hang" typeface="맑은 고딕"/>
+        <a:font script="Hans" typeface="宋体"/>
+        <a:font script="Hant" typeface="新細明體"/>
+        <a:font script="Arab" typeface="Times New Roman"/>
+        <a:font script="Hebr" typeface="Times New Roman"/>
+        <a:font script="Thai" typeface="Angsana New"/>
+        <a:font script="Ethi" typeface="Nyala"/>
+        <a:font script="Beng" typeface="Vrinda"/>
+        <a:font script="Gujr" typeface="Shruti"/>
+        <a:font script="Khmr" typeface="MoolBoran"/>
+        <a:font script="Knda" typeface="Tunga"/>
+        <a:font script="Guru" typeface="Raavi"/>
+        <a:font script="Cans" typeface="Euphemia"/>
+        <a:font script="Cher" typeface="Plantagenet Cherokee"/>
+        <a:font script="Yiii" typeface="Microsoft Yi Baiti"/>
+        <a:font script="Tibt" typeface="Microsoft Himalaya"/>
+        <a:font script="Thaa" typeface="MV Boli"/>
+        <a:font script="Deva" typeface="Mangal"/>
+        <a:font script="Telu" typeface="Gautami"/>
+        <a:font script="Taml" typeface="Latha"/>
+        <a:font script="Syrc" typeface="Estrangelo Edessa"/>
+        <a:font script="Orya" typeface="Kalinga"/>
+        <a:font script="Mlym" typeface="Kartika"/>
+        <a:font script="Laoo" typeface="DokChampa"/>
+        <a:font script="Sinh" typeface="Iskoola Pota"/>
+        <a:font script="Mong" typeface="Mongolian Baiti"/>
+        <a:font script="Viet" typeface="Times New Roman"/>
+        <a:font script="Uigh" typeface="Microsoft Uighur"/>
+        <a:font script="Geor" typeface="Sylfaen"/>
+      </a:majorFont>
+      <a:minorFont>
+        <a:latin typeface="Arial"/>
+        <a:ea typeface=""/>
+        <a:cs typeface=""/>
+        <a:font script="Jpan" typeface="ＭＳ Ｐゴシック"/>
+        <a:font script="Hang" typeface="맑은 고딕"/>
+        <a:font script="Hans" typeface="宋体"/>
+        <a:font script="Hant" typeface="新細明體"/>
+        <a:font script="Arab" typeface="Arial"/>
+        <a:font script="Hebr" typeface="Arial"/>
+        <a:font script="Thai" typeface="Cordia New"/>
+        <a:font script="Ethi" typeface="Nyala"/>
+        <a:font script="Beng" typeface="Vrinda"/>
+        <a:font script="Gujr" typeface="Shruti"/>
+        <a:font script="Khmr" typeface="DaunPenh"/>
+        <a:font script="Knda" typeface="Tunga"/>
+        <a:font script="Guru" typeface="Raavi"/>
+        <a:font script="Cans" typeface="Euphemia"/>
+        <a:font script="Cher" typeface="Plantagenet Cherokee"/>
+        <a:font script="Yiii" typeface="Microsoft Yi Baiti"/>
+        <a:font script="Tibt" typeface="Microsoft Himalaya"/>
+        <a:font script="Thaa" typeface="MV Boli"/>
+        <a:font script="Deva" typeface="Mangal"/>
+        <a:font script="Telu" typeface="Gautami"/>
+        <a:font script="Taml" typeface="Latha"/>
+        <a:font script="Syrc" typeface="Estrangelo Edessa"/>
+        <a:font script="Orya" typeface="Kalinga"/>
+        <a:font script="Mlym" typeface="Kartika"/>
+        <a:font script="Laoo" typeface="DokChampa"/>
+        <a:font script="Sinh" typeface="Iskoola Pota"/>
+        <a:font script="Mong" typeface="Mongolian Baiti"/>
+        <a:font script="Viet" typeface="Arial"/>
+        <a:font script="Uigh" typeface="Microsoft Uighur"/>
+        <a:font script="Geor" typeface="Sylfaen"/>
+      </a:minorFont>
+    </a:fontScheme>
+    <a:fmtScheme name="Office">
+      <a:fillStyleLst>
+        <a:solidFill>
+          <a:schemeClr val="phClr"/>
+        </a:solidFill>
+        <a:gradFill rotWithShape="1">
+          <a:gsLst>
+            <a:gs pos="0">
+              <a:schemeClr val="phClr">
+                <a:tint val="50000"/>
+                <a:satMod val="300000"/>
+              </a:schemeClr>
+            </a:gs>
+            <a:gs pos="35000">
+              <a:schemeClr val="phClr">
+                <a:tint val="37000"/>
+                <a:satMod val="300000"/>
+              </a:schemeClr>
+            </a:gs>
+            <a:gs pos="100000">
+              <a:schemeClr val="phClr">
+                <a:tint val="15000"/>
+                <a:satMod val="350000"/>
+              </a:schemeClr>
+            </a:gs>
+          </a:gsLst>
+          <a:lin ang="16200000" scaled="1"/>
+        </a:gradFill>
+        <a:gradFill rotWithShape="1">
+          <a:gsLst>
+            <a:gs pos="0">
+              <a:schemeClr val="phClr">
+                <a:tint val="100000"/>
+                <a:shade val="100000"/>
+                <a:satMod val="130000"/>
+              </a:schemeClr>
+            </a:gs>
+            <a:gs pos="100000">
+              <a:schemeClr val="phClr">
+                <a:tint val="50000"/>
+                <a:shade val="100000"/>
+                <a:satMod val="350000"/>
+              </a:schemeClr>
+            </a:gs>
+          </a:gsLst>
+          <a:lin ang="16200000" scaled="0"/>
+        </a:gradFill>
+      </a:fillStyleLst>
+      <a:lnStyleLst>
+        <a:ln w="9525" cap="flat" cmpd="sng" algn="ctr">
+          <a:solidFill>
+            <a:schemeClr val="phClr">
+              <a:shade val="95000"/>
+              <a:satMod val="105000"/>
+            </a:schemeClr>
+          </a:solidFill>
+          <a:prstDash val="solid"/>
+        </a:ln>
+        <a:ln w="25400" cap="flat" cmpd="sng" algn="ctr">
+          <a:solidFill>
+            <a:schemeClr val="phClr"/>
+          </a:solidFill>
+          <a:prstDash val="solid"/>
+        </a:ln>
+        <a:ln w="38100" cap="flat" cmpd="sng" algn="ctr">
+          <a:solidFill>
+            <a:schemeClr val="phClr"/>
+          </a:solidFill>
+          <a:prstDash val="solid"/>
+        </a:ln>
+      </a:lnStyleLst>
+      <a:effectStyleLst>
+        <a:effectStyle>
+          <a:effectLst>
+            <a:outerShdw blurRad="40000" dist="20000" dir="5400000" rotWithShape="0">
+              <a:srgbClr val="000000">
+                <a:alpha val="38000"/>
+              </a:srgbClr>
+            </a:outerShdw>
+          </a:effectLst>
+        </a:effectStyle>
+        <a:effectStyle>
+          <a:effectLst>
+            <a:outerShdw blurRad="40000" dist="23000" dir="5400000" rotWithShape="0">
+              <a:srgbClr val="000000">
+                <a:alpha val="35000"/>
+              </a:srgbClr>
+            </a:outerShdw>
+          </a:effectLst>
+        </a:effectStyle>
+        <a:effectStyle>
+          <a:effectLst>
+            <a:outerShdw blurRad="40000" dist="23000" dir="5400000" rotWithShape="0">
+              <a:srgbClr val="000000">
+                <a:alpha val="35000"/>
+              </a:srgbClr>
+            </a:outerShdw>
+          </a:effectLst>
+          <a:scene3d>
+            <a:camera prst="orthographicFront">
+              <a:rot lat="0" lon="0" rev="0"/>
+            </a:camera>
+            <a:lightRig rig="threePt" dir="t">
+              <a:rot lat="0" lon="0" rev="1200000"/>
+            </a:lightRig>
+          </a:scene3d>
+          <a:sp3d>
+            <a:bevelT w="63500" h="25400"/>
+          </a:sp3d>
+        </a:effectStyle>
+      </a:effectStyleLst>
+      <a:bgFillStyleLst>
+        <a:solidFill>
+          <a:schemeClr val="phClr"/>
+        </a:solidFill>
+        <a:gradFill rotWithShape="1">
+          <a:gsLst>
+            <a:gs pos="0">
+              <a:schemeClr val="phClr">
+                <a:tint val="40000"/>
+                <a:satMod val="350000"/>
+              </a:schemeClr>
+            </a:gs>
+            <a:gs pos="40000">
+              <a:schemeClr val="phClr">
+                <a:tint val="45000"/>
+                <a:shade val="99000"/>
+                <a:satMod val="350000"/>
+              </a:schemeClr>
+            </a:gs>
+            <a:gs pos="100000">
+              <a:schemeClr val="phClr">
+                <a:shade val="20000"/>
+                <a:satMod val="255000"/>
+              </a:schemeClr>
+            </a:gs>
+          </a:gsLst>
+          <a:path path="circle">
+            <a:fillToRect l="50000" t="-80000" r="50000" b="180000"/>
+          </a:path>
+        </a:gradFill>
+        <a:gradFill rotWithShape="1">
+          <a:gsLst>
+            <a:gs pos="0">
+              <a:schemeClr val="phClr">
+                <a:tint val="80000"/>
+                <a:satMod val="300000"/>
+              </a:schemeClr>
+            </a:gs>
+            <a:gs pos="100000">
+              <a:schemeClr val="phClr">
+                <a:shade val="30000"/>
+                <a:satMod val="200000"/>
+              </a:schemeClr>
+            </a:gs>
+          </a:gsLst>
+          <a:path path="circle">
+            <a:fillToRect l="50000" t="50000" r="50000" b="50000"/>
+          </a:path>
+        </a:gradFill>
+      </a:bgFillStyleLst>
+    </a:fmtScheme>
+  </a:themeElements>
+</a:theme>
+</file>
+
+<file path=ppt/theme/theme2.xml><?xml version="1.0" encoding="utf-8"?>
+<a:theme xmlns:a="http://schemas.openxmlformats.org/drawingml/2006/main" xmlns:r="http://schemas.openxmlformats.org/officeDocument/2006/relationships" name="Office 테마">
   <a:themeElements>
     <a:clrScheme name="Office 테마">
       <a:dk1>
@@ -16300,288 +16256,5 @@
       </a:bgFillStyleLst>
     </a:fmtScheme>
   </a:themeElements>
-  <a:objectDefaults/>
-  <a:extraClrSchemeLst/>
-</a:theme>
-</file>
-
-<file path=ppt/theme/theme2.xml><?xml version="1.0" encoding="utf-8"?>
-<a:theme xmlns:a="http://schemas.openxmlformats.org/drawingml/2006/main">
-  <a:themeElements>
-    <a:clrScheme name="Default">
-      <a:dk1>
-        <a:srgbClr val="000000"/>
-      </a:dk1>
-      <a:lt1>
-        <a:srgbClr val="FFFFFF"/>
-      </a:lt1>
-      <a:dk2>
-        <a:srgbClr val="158158"/>
-      </a:dk2>
-      <a:lt2>
-        <a:srgbClr val="F3F3F3"/>
-      </a:lt2>
-      <a:accent1>
-        <a:srgbClr val="058DC7"/>
-      </a:accent1>
-      <a:accent2>
-        <a:srgbClr val="50B432"/>
-      </a:accent2>
-      <a:accent3>
-        <a:srgbClr val="ED561B"/>
-      </a:accent3>
-      <a:accent4>
-        <a:srgbClr val="EDEF00"/>
-      </a:accent4>
-      <a:accent5>
-        <a:srgbClr val="24CBE5"/>
-      </a:accent5>
-      <a:accent6>
-        <a:srgbClr val="64E572"/>
-      </a:accent6>
-      <a:hlink>
-        <a:srgbClr val="2200CC"/>
-      </a:hlink>
-      <a:folHlink>
-        <a:srgbClr val="551A8B"/>
-      </a:folHlink>
-    </a:clrScheme>
-    <a:fontScheme name="Office">
-      <a:majorFont>
-        <a:latin typeface="Arial"/>
-        <a:ea typeface=""/>
-        <a:cs typeface=""/>
-        <a:font script="Jpan" typeface="ＭＳ Ｐゴシック"/>
-        <a:font script="Hang" typeface="맑은 고딕"/>
-        <a:font script="Hans" typeface="宋体"/>
-        <a:font script="Hant" typeface="新細明體"/>
-        <a:font script="Arab" typeface="Times New Roman"/>
-        <a:font script="Hebr" typeface="Times New Roman"/>
-        <a:font script="Thai" typeface="Angsana New"/>
-        <a:font script="Ethi" typeface="Nyala"/>
-        <a:font script="Beng" typeface="Vrinda"/>
-        <a:font script="Gujr" typeface="Shruti"/>
-        <a:font script="Khmr" typeface="MoolBoran"/>
-        <a:font script="Knda" typeface="Tunga"/>
-        <a:font script="Guru" typeface="Raavi"/>
-        <a:font script="Cans" typeface="Euphemia"/>
-        <a:font script="Cher" typeface="Plantagenet Cherokee"/>
-        <a:font script="Yiii" typeface="Microsoft Yi Baiti"/>
-        <a:font script="Tibt" typeface="Microsoft Himalaya"/>
-        <a:font script="Thaa" typeface="MV Boli"/>
-        <a:font script="Deva" typeface="Mangal"/>
-        <a:font script="Telu" typeface="Gautami"/>
-        <a:font script="Taml" typeface="Latha"/>
-        <a:font script="Syrc" typeface="Estrangelo Edessa"/>
-        <a:font script="Orya" typeface="Kalinga"/>
-        <a:font script="Mlym" typeface="Kartika"/>
-        <a:font script="Laoo" typeface="DokChampa"/>
-        <a:font script="Sinh" typeface="Iskoola Pota"/>
-        <a:font script="Mong" typeface="Mongolian Baiti"/>
-        <a:font script="Viet" typeface="Times New Roman"/>
-        <a:font script="Uigh" typeface="Microsoft Uighur"/>
-        <a:font script="Geor" typeface="Sylfaen"/>
-      </a:majorFont>
-      <a:minorFont>
-        <a:latin typeface="Arial"/>
-        <a:ea typeface=""/>
-        <a:cs typeface=""/>
-        <a:font script="Jpan" typeface="ＭＳ Ｐゴシック"/>
-        <a:font script="Hang" typeface="맑은 고딕"/>
-        <a:font script="Hans" typeface="宋体"/>
-        <a:font script="Hant" typeface="新細明體"/>
-        <a:font script="Arab" typeface="Arial"/>
-        <a:font script="Hebr" typeface="Arial"/>
-        <a:font script="Thai" typeface="Cordia New"/>
-        <a:font script="Ethi" typeface="Nyala"/>
-        <a:font script="Beng" typeface="Vrinda"/>
-        <a:font script="Gujr" typeface="Shruti"/>
-        <a:font script="Khmr" typeface="DaunPenh"/>
-        <a:font script="Knda" typeface="Tunga"/>
-        <a:font script="Guru" typeface="Raavi"/>
-        <a:font script="Cans" typeface="Euphemia"/>
-        <a:font script="Cher" typeface="Plantagenet Cherokee"/>
-        <a:font script="Yiii" typeface="Microsoft Yi Baiti"/>
-        <a:font script="Tibt" typeface="Microsoft Himalaya"/>
-        <a:font script="Thaa" typeface="MV Boli"/>
-        <a:font script="Deva" typeface="Mangal"/>
-        <a:font script="Telu" typeface="Gautami"/>
-        <a:font script="Taml" typeface="Latha"/>
-        <a:font script="Syrc" typeface="Estrangelo Edessa"/>
-        <a:font script="Orya" typeface="Kalinga"/>
-        <a:font script="Mlym" typeface="Kartika"/>
-        <a:font script="Laoo" typeface="DokChampa"/>
-        <a:font script="Sinh" typeface="Iskoola Pota"/>
-        <a:font script="Mong" typeface="Mongolian Baiti"/>
-        <a:font script="Viet" typeface="Arial"/>
-        <a:font script="Uigh" typeface="Microsoft Uighur"/>
-        <a:font script="Geor" typeface="Sylfaen"/>
-      </a:minorFont>
-    </a:fontScheme>
-    <a:fmtScheme name="Office">
-      <a:fillStyleLst>
-        <a:solidFill>
-          <a:schemeClr val="phClr"/>
-        </a:solidFill>
-        <a:gradFill rotWithShape="1">
-          <a:gsLst>
-            <a:gs pos="0">
-              <a:schemeClr val="phClr">
-                <a:tint val="50000"/>
-                <a:satMod val="300000"/>
-              </a:schemeClr>
-            </a:gs>
-            <a:gs pos="35000">
-              <a:schemeClr val="phClr">
-                <a:tint val="37000"/>
-                <a:satMod val="300000"/>
-              </a:schemeClr>
-            </a:gs>
-            <a:gs pos="100000">
-              <a:schemeClr val="phClr">
-                <a:tint val="15000"/>
-                <a:satMod val="350000"/>
-              </a:schemeClr>
-            </a:gs>
-          </a:gsLst>
-          <a:lin ang="16200000" scaled="1"/>
-        </a:gradFill>
-        <a:gradFill rotWithShape="1">
-          <a:gsLst>
-            <a:gs pos="0">
-              <a:schemeClr val="phClr">
-                <a:tint val="100000"/>
-                <a:shade val="100000"/>
-                <a:satMod val="130000"/>
-              </a:schemeClr>
-            </a:gs>
-            <a:gs pos="100000">
-              <a:schemeClr val="phClr">
-                <a:tint val="50000"/>
-                <a:shade val="100000"/>
-                <a:satMod val="350000"/>
-              </a:schemeClr>
-            </a:gs>
-          </a:gsLst>
-          <a:lin ang="16200000" scaled="0"/>
-        </a:gradFill>
-      </a:fillStyleLst>
-      <a:lnStyleLst>
-        <a:ln w="9525" cap="flat" cmpd="sng" algn="ctr">
-          <a:solidFill>
-            <a:schemeClr val="phClr">
-              <a:shade val="95000"/>
-              <a:satMod val="105000"/>
-            </a:schemeClr>
-          </a:solidFill>
-          <a:prstDash val="solid"/>
-        </a:ln>
-        <a:ln w="25400" cap="flat" cmpd="sng" algn="ctr">
-          <a:solidFill>
-            <a:schemeClr val="phClr"/>
-          </a:solidFill>
-          <a:prstDash val="solid"/>
-        </a:ln>
-        <a:ln w="38100" cap="flat" cmpd="sng" algn="ctr">
-          <a:solidFill>
-            <a:schemeClr val="phClr"/>
-          </a:solidFill>
-          <a:prstDash val="solid"/>
-        </a:ln>
-      </a:lnStyleLst>
-      <a:effectStyleLst>
-        <a:effectStyle>
-          <a:effectLst>
-            <a:outerShdw blurRad="40000" dist="20000" dir="5400000" rotWithShape="0">
-              <a:srgbClr val="000000">
-                <a:alpha val="38000"/>
-              </a:srgbClr>
-            </a:outerShdw>
-          </a:effectLst>
-        </a:effectStyle>
-        <a:effectStyle>
-          <a:effectLst>
-            <a:outerShdw blurRad="40000" dist="23000" dir="5400000" rotWithShape="0">
-              <a:srgbClr val="000000">
-                <a:alpha val="35000"/>
-              </a:srgbClr>
-            </a:outerShdw>
-          </a:effectLst>
-        </a:effectStyle>
-        <a:effectStyle>
-          <a:effectLst>
-            <a:outerShdw blurRad="40000" dist="23000" dir="5400000" rotWithShape="0">
-              <a:srgbClr val="000000">
-                <a:alpha val="35000"/>
-              </a:srgbClr>
-            </a:outerShdw>
-          </a:effectLst>
-          <a:scene3d>
-            <a:camera prst="orthographicFront">
-              <a:rot lat="0" lon="0" rev="0"/>
-            </a:camera>
-            <a:lightRig rig="threePt" dir="t">
-              <a:rot lat="0" lon="0" rev="1200000"/>
-            </a:lightRig>
-          </a:scene3d>
-          <a:sp3d>
-            <a:bevelT w="63500" h="25400"/>
-          </a:sp3d>
-        </a:effectStyle>
-      </a:effectStyleLst>
-      <a:bgFillStyleLst>
-        <a:solidFill>
-          <a:schemeClr val="phClr"/>
-        </a:solidFill>
-        <a:gradFill rotWithShape="1">
-          <a:gsLst>
-            <a:gs pos="0">
-              <a:schemeClr val="phClr">
-                <a:tint val="40000"/>
-                <a:satMod val="350000"/>
-              </a:schemeClr>
-            </a:gs>
-            <a:gs pos="40000">
-              <a:schemeClr val="phClr">
-                <a:tint val="45000"/>
-                <a:shade val="99000"/>
-                <a:satMod val="350000"/>
-              </a:schemeClr>
-            </a:gs>
-            <a:gs pos="100000">
-              <a:schemeClr val="phClr">
-                <a:shade val="20000"/>
-                <a:satMod val="255000"/>
-              </a:schemeClr>
-            </a:gs>
-          </a:gsLst>
-          <a:path path="circle">
-            <a:fillToRect l="50000" t="-80000" r="50000" b="180000"/>
-          </a:path>
-        </a:gradFill>
-        <a:gradFill rotWithShape="1">
-          <a:gsLst>
-            <a:gs pos="0">
-              <a:schemeClr val="phClr">
-                <a:tint val="80000"/>
-                <a:satMod val="300000"/>
-              </a:schemeClr>
-            </a:gs>
-            <a:gs pos="100000">
-              <a:schemeClr val="phClr">
-                <a:shade val="30000"/>
-                <a:satMod val="200000"/>
-              </a:schemeClr>
-            </a:gs>
-          </a:gsLst>
-          <a:path path="circle">
-            <a:fillToRect l="50000" t="50000" r="50000" b="50000"/>
-          </a:path>
-        </a:gradFill>
-      </a:bgFillStyleLst>
-    </a:fmtScheme>
-  </a:themeElements>
-  <a:objectDefaults/>
-  <a:extraClrSchemeLst/>
 </a:theme>
 </file>